--- a/artifacts/eng-prekickoff-2026-04-27.pptx
+++ b/artifacts/eng-prekickoff-2026-04-27.pptx
@@ -13,10 +13,9 @@
     <p:sldId id="261" r:id="rId7"/>
     <p:sldId id="262" r:id="rId8"/>
     <p:sldId id="263" r:id="rId9"/>
-    <p:sldId id="264" r:id="rId10"/>
   </p:sldIdLst>
   <p:notesMasterIdLst>
-    <p:notesMasterId r:id="rId11"/>
+    <p:notesMasterId r:id="rId10"/>
   </p:notesMasterIdLst>
   <p:sldSz cx="9144000" cy="5143500"/>
   <p:notesSz cx="5143500" cy="9144000"/>
@@ -1150,94 +1149,6 @@
             <a:fld id="{F7021451-1387-4CA6-816F-3879F97B5CBC}" type="slidenum">
               <a:rPr lang="en-US"/>
               <a:t>8</a:t>
-            </a:fld>
-            <a:endParaRPr lang="en-US"/>
-          </a:p>
-        </p:txBody>
-      </p:sp>
-    </p:spTree>
-    <p:extLst>
-      <p:ext uri="{BB962C8B-B14F-4D97-AF65-F5344CB8AC3E}">
-        <p14:creationId xmlns:p14="http://schemas.microsoft.com/office/powerpoint/2010/main" val="1024086991"/>
-      </p:ext>
-    </p:extLst>
-  </p:cSld>
-  <p:clrMapOvr>
-    <a:masterClrMapping/>
-  </p:clrMapOvr>
-</p:notes>
-</file>
-
-<file path=ppt/notesSlides/notesSlide9.xml><?xml version="1.0" encoding="utf-8"?>
-<p:notes xmlns:a="http://schemas.openxmlformats.org/drawingml/2006/main" xmlns:r="http://schemas.openxmlformats.org/officeDocument/2006/relationships" xmlns:p="http://schemas.openxmlformats.org/presentationml/2006/main">
-  <p:cSld>
-    <p:spTree>
-      <p:nvGrpSpPr>
-        <p:cNvPr id="1" name=""/>
-        <p:cNvGrpSpPr/>
-        <p:nvPr/>
-      </p:nvGrpSpPr>
-      <p:grpSpPr>
-        <a:xfrm>
-          <a:off x="0" y="0"/>
-          <a:ext cx="0" cy="0"/>
-          <a:chOff x="0" y="0"/>
-          <a:chExt cx="0" cy="0"/>
-        </a:xfrm>
-      </p:grpSpPr>
-      <p:sp>
-        <p:nvSpPr>
-          <p:cNvPr id="2" name="Slide Image Placeholder 1"/>
-          <p:cNvSpPr>
-            <a:spLocks noGrp="1" noRot="1" noChangeAspect="1"/>
-          </p:cNvSpPr>
-          <p:nvPr>
-            <p:ph type="sldImg"/>
-          </p:nvPr>
-        </p:nvSpPr>
-        <p:spPr/>
-      </p:sp>
-      <p:sp>
-        <p:nvSpPr>
-          <p:cNvPr id="3" name="Notes Placeholder 2"/>
-          <p:cNvSpPr>
-            <a:spLocks noGrp="1"/>
-          </p:cNvSpPr>
-          <p:nvPr>
-            <p:ph type="body" idx="1"/>
-          </p:nvPr>
-        </p:nvSpPr>
-        <p:spPr/>
-        <p:txBody>
-          <a:bodyPr/>
-          <a:lstStyle/>
-          <a:p>
-            <a:r>
-              <a:rPr lang="en-US" dirty="0"/>
-              <a:t/>
-            </a:r>
-            <a:endParaRPr lang="en-US" dirty="0"/>
-          </a:p>
-        </p:txBody>
-      </p:sp>
-      <p:sp>
-        <p:nvSpPr>
-          <p:cNvPr id="4" name="Slide Number Placeholder 3"/>
-          <p:cNvSpPr>
-            <a:spLocks noGrp="1"/>
-          </p:cNvSpPr>
-          <p:nvPr>
-            <p:ph type="sldNum" sz="quarter" idx="10"/>
-          </p:nvPr>
-        </p:nvSpPr>
-        <p:spPr/>
-        <p:txBody>
-          <a:bodyPr/>
-          <a:lstStyle/>
-          <a:p>
-            <a:fld id="{F7021451-1387-4CA6-816F-3879F97B5CBC}" type="slidenum">
-              <a:rPr lang="en-US"/>
-              <a:t>9</a:t>
             </a:fld>
             <a:endParaRPr lang="en-US"/>
           </a:p>
@@ -1728,7 +1639,7 @@
         <p:spPr>
           <a:xfrm>
             <a:off x="548640" y="2514600"/>
-            <a:ext cx="7315200" cy="457200"/>
+            <a:ext cx="7772400" cy="457200"/>
           </a:xfrm>
           <a:prstGeom prst="rect">
             <a:avLst/>
@@ -1752,7 +1663,7 @@
                 <a:ea typeface="Calibri" pitchFamily="34" charset="-122"/>
                 <a:cs typeface="Calibri" pitchFamily="34" charset="-120"/>
               </a:rPr>
-              <a:t>What we shipped · what we learned · where we go next.</a:t>
+              <a:t>Align on what we know. Name what we don't. Start moving.</a:t>
             </a:r>
             <a:endParaRPr lang="en-US" sz="1800" dirty="0"/>
           </a:p>
@@ -1760,63 +1671,7 @@
       </p:sp>
       <p:sp>
         <p:nvSpPr>
-          <p:cNvPr id="7" name="Text 5"/>
-          <p:cNvSpPr/>
-          <p:nvPr/>
-        </p:nvSpPr>
-        <p:spPr>
-          <a:xfrm>
-            <a:off x="548640" y="4114800"/>
-            <a:ext cx="5486400" cy="731520"/>
-          </a:xfrm>
-          <a:prstGeom prst="rect">
-            <a:avLst/>
-          </a:prstGeom>
-          <a:noFill/>
-          <a:ln/>
-        </p:spPr>
-        <p:txBody>
-          <a:bodyPr wrap="square" lIns="0" tIns="0" rIns="0" bIns="0" rtlCol="0" anchor="ctr"/>
-          <a:lstStyle/>
-          <a:p>
-            <a:pPr indent="0" marL="0">
-              <a:buNone/>
-            </a:pPr>
-            <a:r>
-              <a:rPr lang="en-US" sz="1400" b="1" dirty="0">
-                <a:solidFill>
-                  <a:srgbClr val="FFFFFF"/>
-                </a:solidFill>
-                <a:latin typeface="Calibri" pitchFamily="34" charset="0"/>
-                <a:ea typeface="Calibri" pitchFamily="34" charset="-122"/>
-                <a:cs typeface="Calibri" pitchFamily="34" charset="-120"/>
-              </a:rPr>
-              <a:t>Sunday · 27 April 2026</a:t>
-            </a:r>
-            <a:endParaRPr lang="en-US" sz="1400" dirty="0"/>
-          </a:p>
-          <a:p>
-            <a:pPr indent="0" marL="0">
-              <a:buNone/>
-            </a:pPr>
-            <a:r>
-              <a:rPr lang="en-US" sz="1400" dirty="0">
-                <a:solidFill>
-                  <a:srgbClr val="E8EEFC"/>
-                </a:solidFill>
-                <a:latin typeface="Calibri" pitchFamily="34" charset="0"/>
-                <a:ea typeface="Calibri" pitchFamily="34" charset="-122"/>
-                <a:cs typeface="Calibri" pitchFamily="34" charset="-120"/>
-              </a:rPr>
-              <a:t>Omri Lorch · Product</a:t>
-            </a:r>
-            <a:endParaRPr lang="en-US" sz="1400" dirty="0"/>
-          </a:p>
-        </p:txBody>
-      </p:sp>
-      <p:sp>
-        <p:nvSpPr>
-          <p:cNvPr id="8" name="Shape 6"/>
+          <p:cNvPr id="7" name="Shape 5"/>
           <p:cNvSpPr/>
           <p:nvPr/>
         </p:nvSpPr>
@@ -1838,6 +1693,62 @@
             <a:prstDash val="solid"/>
           </a:ln>
         </p:spPr>
+      </p:sp>
+      <p:sp>
+        <p:nvSpPr>
+          <p:cNvPr id="8" name="Text 6"/>
+          <p:cNvSpPr/>
+          <p:nvPr/>
+        </p:nvSpPr>
+        <p:spPr>
+          <a:xfrm>
+            <a:off x="548640" y="4114800"/>
+            <a:ext cx="5486400" cy="731520"/>
+          </a:xfrm>
+          <a:prstGeom prst="rect">
+            <a:avLst/>
+          </a:prstGeom>
+          <a:noFill/>
+          <a:ln/>
+        </p:spPr>
+        <p:txBody>
+          <a:bodyPr wrap="square" lIns="0" tIns="0" rIns="0" bIns="0" rtlCol="0" anchor="ctr"/>
+          <a:lstStyle/>
+          <a:p>
+            <a:pPr indent="0" marL="0">
+              <a:buNone/>
+            </a:pPr>
+            <a:r>
+              <a:rPr lang="en-US" sz="1400" b="1" dirty="0">
+                <a:solidFill>
+                  <a:srgbClr val="FFFFFF"/>
+                </a:solidFill>
+                <a:latin typeface="Calibri" pitchFamily="34" charset="0"/>
+                <a:ea typeface="Calibri" pitchFamily="34" charset="-122"/>
+                <a:cs typeface="Calibri" pitchFamily="34" charset="-120"/>
+              </a:rPr>
+              <a:t>Sunday · 27 April 2026</a:t>
+            </a:r>
+            <a:endParaRPr lang="en-US" sz="1400" dirty="0"/>
+          </a:p>
+          <a:p>
+            <a:pPr indent="0" marL="0">
+              <a:buNone/>
+            </a:pPr>
+            <a:r>
+              <a:rPr lang="en-US" sz="1400" dirty="0">
+                <a:solidFill>
+                  <a:srgbClr val="E8EEFC"/>
+                </a:solidFill>
+                <a:latin typeface="Calibri" pitchFamily="34" charset="0"/>
+                <a:ea typeface="Calibri" pitchFamily="34" charset="-122"/>
+                <a:cs typeface="Calibri" pitchFamily="34" charset="-120"/>
+              </a:rPr>
+              <a:t>Omri Lorch · Product</a:t>
+            </a:r>
+            <a:endParaRPr lang="en-US" sz="1400" dirty="0"/>
+          </a:p>
+        </p:txBody>
       </p:sp>
     </p:spTree>
   </p:cSld>
@@ -1905,7 +1816,7 @@
         <p:spPr>
           <a:xfrm>
             <a:off x="457200" y="365760"/>
-            <a:ext cx="5486400" cy="274320"/>
+            <a:ext cx="7315200" cy="274320"/>
           </a:xfrm>
           <a:prstGeom prst="rect">
             <a:avLst/>
@@ -1929,7 +1840,7 @@
                 <a:ea typeface="Calibri" pitchFamily="34" charset="-122"/>
                 <a:cs typeface="Calibri" pitchFamily="34" charset="-120"/>
               </a:rPr>
-              <a:t>01 · Why we started</a:t>
+              <a:t>01 · The problem space</a:t>
             </a:r>
             <a:endParaRPr lang="en-US" sz="1100" dirty="0"/>
           </a:p>
@@ -1944,23 +1855,23 @@
         <p:spPr>
           <a:xfrm>
             <a:off x="457200" y="731520"/>
-            <a:ext cx="8229600" cy="822960"/>
-          </a:xfrm>
-          <a:prstGeom prst="rect">
-            <a:avLst/>
-          </a:prstGeom>
-          <a:noFill/>
-          <a:ln/>
-        </p:spPr>
-        <p:txBody>
-          <a:bodyPr wrap="square" lIns="0" tIns="0" rIns="0" bIns="0" rtlCol="0" anchor="ctr"/>
-          <a:lstStyle/>
-          <a:p>
-            <a:pPr indent="0" marL="0">
-              <a:buNone/>
-            </a:pPr>
-            <a:r>
-              <a:rPr lang="en-US" sz="4000" b="1" dirty="0">
+            <a:ext cx="8229600" cy="777240"/>
+          </a:xfrm>
+          <a:prstGeom prst="rect">
+            <a:avLst/>
+          </a:prstGeom>
+          <a:noFill/>
+          <a:ln/>
+        </p:spPr>
+        <p:txBody>
+          <a:bodyPr wrap="square" lIns="0" tIns="0" rIns="0" bIns="0" rtlCol="0" anchor="ctr"/>
+          <a:lstStyle/>
+          <a:p>
+            <a:pPr indent="0" marL="0">
+              <a:buNone/>
+            </a:pPr>
+            <a:r>
+              <a:rPr lang="en-US" sz="3400" b="1" dirty="0">
                 <a:solidFill>
                   <a:srgbClr val="1A1F36"/>
                 </a:solidFill>
@@ -1970,7 +1881,7 @@
               </a:rPr>
               <a:t>Agents are humans on steroids.</a:t>
             </a:r>
-            <a:endParaRPr lang="en-US" sz="4000" dirty="0"/>
+            <a:endParaRPr lang="en-US" sz="3400" dirty="0"/>
           </a:p>
         </p:txBody>
       </p:sp>
@@ -1982,24 +1893,24 @@
         </p:nvSpPr>
         <p:spPr>
           <a:xfrm>
-            <a:off x="457200" y="1691640"/>
-            <a:ext cx="8229600" cy="640080"/>
-          </a:xfrm>
-          <a:prstGeom prst="rect">
-            <a:avLst/>
-          </a:prstGeom>
-          <a:noFill/>
-          <a:ln/>
-        </p:spPr>
-        <p:txBody>
-          <a:bodyPr wrap="square" lIns="0" tIns="0" rIns="0" bIns="0" rtlCol="0" anchor="ctr"/>
-          <a:lstStyle/>
-          <a:p>
-            <a:pPr indent="0" marL="0">
-              <a:buNone/>
-            </a:pPr>
-            <a:r>
-              <a:rPr lang="en-US" sz="1500" i="1" dirty="0">
+            <a:off x="457200" y="1554480"/>
+            <a:ext cx="8229600" cy="457200"/>
+          </a:xfrm>
+          <a:prstGeom prst="rect">
+            <a:avLst/>
+          </a:prstGeom>
+          <a:noFill/>
+          <a:ln/>
+        </p:spPr>
+        <p:txBody>
+          <a:bodyPr wrap="square" lIns="0" tIns="0" rIns="0" bIns="0" rtlCol="0" anchor="ctr"/>
+          <a:lstStyle/>
+          <a:p>
+            <a:pPr indent="0" marL="0">
+              <a:buNone/>
+            </a:pPr>
+            <a:r>
+              <a:rPr lang="en-US" sz="1400" i="1" dirty="0">
                 <a:solidFill>
                   <a:srgbClr val="64748B"/>
                 </a:solidFill>
@@ -2007,9 +1918,9 @@
                 <a:ea typeface="Calibri" pitchFamily="34" charset="-122"/>
                 <a:cs typeface="Calibri" pitchFamily="34" charset="-120"/>
               </a:rPr>
-              <a:t>They don't sleep. They don't wait. They operate at machine speed. And like any superpower — unmanaged, it becomes a risk.</a:t>
-            </a:r>
-            <a:endParaRPr lang="en-US" sz="1500" dirty="0"/>
+              <a:t>They don't sleep. They don't wait. They operate at machine speed. Human IAM wasn't built for this shape.</a:t>
+            </a:r>
+            <a:endParaRPr lang="en-US" sz="1400" dirty="0"/>
           </a:p>
         </p:txBody>
       </p:sp>
@@ -2021,8 +1932,207 @@
         </p:nvSpPr>
         <p:spPr>
           <a:xfrm>
-            <a:off x="457200" y="2651760"/>
-            <a:ext cx="2651760" cy="1188720"/>
+            <a:off x="388620" y="2194560"/>
+            <a:ext cx="2697480" cy="2194560"/>
+          </a:xfrm>
+          <a:prstGeom prst="rect">
+            <a:avLst/>
+          </a:prstGeom>
+          <a:solidFill>
+            <a:srgbClr val="FFFFFF"/>
+          </a:solidFill>
+          <a:ln w="12700">
+            <a:solidFill>
+              <a:srgbClr val="0F1B3D"/>
+            </a:solidFill>
+            <a:prstDash val="solid"/>
+          </a:ln>
+        </p:spPr>
+      </p:sp>
+      <p:sp>
+        <p:nvSpPr>
+          <p:cNvPr id="7" name="Shape 5"/>
+          <p:cNvSpPr/>
+          <p:nvPr/>
+        </p:nvSpPr>
+        <p:spPr>
+          <a:xfrm>
+            <a:off x="388620" y="2194560"/>
+            <a:ext cx="2697480" cy="365760"/>
+          </a:xfrm>
+          <a:prstGeom prst="rect">
+            <a:avLst/>
+          </a:prstGeom>
+          <a:solidFill>
+            <a:srgbClr val="0F1B3D"/>
+          </a:solidFill>
+          <a:ln w="12700">
+            <a:solidFill>
+              <a:srgbClr val="0F1B3D"/>
+            </a:solidFill>
+            <a:prstDash val="solid"/>
+          </a:ln>
+        </p:spPr>
+      </p:sp>
+      <p:sp>
+        <p:nvSpPr>
+          <p:cNvPr id="8" name="Text 6"/>
+          <p:cNvSpPr/>
+          <p:nvPr/>
+        </p:nvSpPr>
+        <p:spPr>
+          <a:xfrm>
+            <a:off x="388620" y="2194560"/>
+            <a:ext cx="2697480" cy="365760"/>
+          </a:xfrm>
+          <a:prstGeom prst="rect">
+            <a:avLst/>
+          </a:prstGeom>
+          <a:noFill/>
+          <a:ln/>
+        </p:spPr>
+        <p:txBody>
+          <a:bodyPr wrap="square" lIns="0" tIns="0" rIns="0" bIns="0" rtlCol="0" anchor="ctr"/>
+          <a:lstStyle/>
+          <a:p>
+            <a:pPr algn="ctr" indent="0" marL="0">
+              <a:buNone/>
+            </a:pPr>
+            <a:r>
+              <a:rPr lang="en-US" sz="1300" b="1" spc="400" kern="0" dirty="0">
+                <a:solidFill>
+                  <a:srgbClr val="FFFFFF"/>
+                </a:solidFill>
+                <a:latin typeface="Calibri" pitchFamily="34" charset="0"/>
+                <a:ea typeface="Calibri" pitchFamily="34" charset="-122"/>
+                <a:cs typeface="Calibri" pitchFamily="34" charset="-120"/>
+              </a:rPr>
+              <a:t>HUMAN</a:t>
+            </a:r>
+            <a:endParaRPr lang="en-US" sz="1300" dirty="0"/>
+          </a:p>
+        </p:txBody>
+      </p:sp>
+      <p:sp>
+        <p:nvSpPr>
+          <p:cNvPr id="9" name="Text 7"/>
+          <p:cNvSpPr/>
+          <p:nvPr/>
+        </p:nvSpPr>
+        <p:spPr>
+          <a:xfrm>
+            <a:off x="571500" y="2697480"/>
+            <a:ext cx="2331720" cy="1051560"/>
+          </a:xfrm>
+          <a:prstGeom prst="rect">
+            <a:avLst/>
+          </a:prstGeom>
+          <a:noFill/>
+          <a:ln/>
+        </p:spPr>
+        <p:txBody>
+          <a:bodyPr wrap="square" lIns="0" tIns="0" rIns="0" bIns="0" rtlCol="0" anchor="ctr"/>
+          <a:lstStyle/>
+          <a:p>
+            <a:pPr indent="0" marL="0">
+              <a:buNone/>
+            </a:pPr>
+            <a:r>
+              <a:rPr lang="en-US" sz="1200" dirty="0">
+                <a:solidFill>
+                  <a:srgbClr val="1A1F36"/>
+                </a:solidFill>
+                <a:latin typeface="Calibri" pitchFamily="34" charset="0"/>
+                <a:ea typeface="Calibri" pitchFamily="34" charset="-122"/>
+                <a:cs typeface="Calibri" pitchFamily="34" charset="-120"/>
+              </a:rPr>
+              <a:t>Role-based · Judicious</a:t>
+            </a:r>
+            <a:endParaRPr lang="en-US" sz="1200" dirty="0"/>
+          </a:p>
+          <a:p>
+            <a:pPr indent="0" marL="0">
+              <a:buNone/>
+            </a:pPr>
+            <a:r>
+              <a:rPr lang="en-US" sz="1200" dirty="0">
+                <a:solidFill>
+                  <a:srgbClr val="1A1F36"/>
+                </a:solidFill>
+                <a:latin typeface="Calibri" pitchFamily="34" charset="0"/>
+                <a:ea typeface="Calibri" pitchFamily="34" charset="-122"/>
+                <a:cs typeface="Calibri" pitchFamily="34" charset="-120"/>
+              </a:rPr>
+              <a:t>Static · Deterministic</a:t>
+            </a:r>
+            <a:endParaRPr lang="en-US" sz="1200" dirty="0"/>
+          </a:p>
+        </p:txBody>
+      </p:sp>
+      <p:sp>
+        <p:nvSpPr>
+          <p:cNvPr id="10" name="Text 8"/>
+          <p:cNvSpPr/>
+          <p:nvPr/>
+        </p:nvSpPr>
+        <p:spPr>
+          <a:xfrm>
+            <a:off x="571500" y="3749040"/>
+            <a:ext cx="2331720" cy="594360"/>
+          </a:xfrm>
+          <a:prstGeom prst="rect">
+            <a:avLst/>
+          </a:prstGeom>
+          <a:noFill/>
+          <a:ln/>
+        </p:spPr>
+        <p:txBody>
+          <a:bodyPr wrap="square" lIns="0" tIns="0" rIns="0" bIns="0" rtlCol="0" anchor="ctr"/>
+          <a:lstStyle/>
+          <a:p>
+            <a:pPr indent="0" marL="0">
+              <a:buNone/>
+            </a:pPr>
+            <a:r>
+              <a:rPr lang="en-US" sz="900" b="1" spc="200" kern="0" dirty="0">
+                <a:solidFill>
+                  <a:srgbClr val="0F1B3D"/>
+                </a:solidFill>
+                <a:latin typeface="Calibri" pitchFamily="34" charset="0"/>
+                <a:ea typeface="Calibri" pitchFamily="34" charset="-122"/>
+                <a:cs typeface="Calibri" pitchFamily="34" charset="-120"/>
+              </a:rPr>
+              <a:t>RISK
+</a:t>
+            </a:r>
+            <a:pPr indent="0" marL="0">
+              <a:buNone/>
+            </a:pPr>
+            <a:r>
+              <a:rPr lang="en-US" sz="1000" i="1" dirty="0">
+                <a:solidFill>
+                  <a:srgbClr val="64748B"/>
+                </a:solidFill>
+                <a:latin typeface="Calibri" pitchFamily="34" charset="0"/>
+                <a:ea typeface="Calibri" pitchFamily="34" charset="-122"/>
+                <a:cs typeface="Calibri" pitchFamily="34" charset="-120"/>
+              </a:rPr>
+              <a:t>Socially exploitable · Over-permissioned over time</a:t>
+            </a:r>
+            <a:endParaRPr lang="en-US" sz="900" dirty="0"/>
+          </a:p>
+        </p:txBody>
+      </p:sp>
+      <p:sp>
+        <p:nvSpPr>
+          <p:cNvPr id="11" name="Shape 9"/>
+          <p:cNvSpPr/>
+          <p:nvPr/>
+        </p:nvSpPr>
+        <p:spPr>
+          <a:xfrm>
+            <a:off x="3223260" y="2194560"/>
+            <a:ext cx="2697480" cy="2194560"/>
           </a:xfrm>
           <a:prstGeom prst="rect">
             <a:avLst/>
@@ -2030,9 +2140,9 @@
           <a:solidFill>
             <a:srgbClr val="E8EEFC"/>
           </a:solidFill>
-          <a:ln w="12700">
+          <a:ln w="25400">
             <a:solidFill>
-              <a:srgbClr val="E8EEFC"/>
+              <a:srgbClr val="02C39A"/>
             </a:solidFill>
             <a:prstDash val="solid"/>
           </a:ln>
@@ -2040,14 +2150,14 @@
       </p:sp>
       <p:sp>
         <p:nvSpPr>
-          <p:cNvPr id="7" name="Shape 5"/>
-          <p:cNvSpPr/>
-          <p:nvPr/>
-        </p:nvSpPr>
-        <p:spPr>
-          <a:xfrm>
-            <a:off x="457200" y="2651760"/>
-            <a:ext cx="73152" cy="1188720"/>
+          <p:cNvPr id="12" name="Shape 10"/>
+          <p:cNvSpPr/>
+          <p:nvPr/>
+        </p:nvSpPr>
+        <p:spPr>
+          <a:xfrm>
+            <a:off x="3223260" y="2194560"/>
+            <a:ext cx="2697480" cy="365760"/>
           </a:xfrm>
           <a:prstGeom prst="rect">
             <a:avLst/>
@@ -2065,69 +2175,69 @@
       </p:sp>
       <p:sp>
         <p:nvSpPr>
-          <p:cNvPr id="8" name="Text 6"/>
-          <p:cNvSpPr/>
-          <p:nvPr/>
-        </p:nvSpPr>
-        <p:spPr>
-          <a:xfrm>
-            <a:off x="685800" y="2788920"/>
-            <a:ext cx="2377440" cy="502920"/>
-          </a:xfrm>
-          <a:prstGeom prst="rect">
-            <a:avLst/>
-          </a:prstGeom>
-          <a:noFill/>
-          <a:ln/>
-        </p:spPr>
-        <p:txBody>
-          <a:bodyPr wrap="square" lIns="0" tIns="0" rIns="0" bIns="0" rtlCol="0" anchor="ctr"/>
-          <a:lstStyle/>
-          <a:p>
-            <a:pPr indent="0" marL="0">
-              <a:buNone/>
-            </a:pPr>
-            <a:r>
-              <a:rPr lang="en-US" sz="2800" b="1" dirty="0">
-                <a:solidFill>
-                  <a:srgbClr val="0F1B3D"/>
-                </a:solidFill>
-                <a:latin typeface="Georgia" pitchFamily="34" charset="0"/>
-                <a:ea typeface="Georgia" pitchFamily="34" charset="-122"/>
-                <a:cs typeface="Georgia" pitchFamily="34" charset="-120"/>
-              </a:rPr>
-              <a:t>144 : 1</a:t>
-            </a:r>
-            <a:endParaRPr lang="en-US" sz="2800" dirty="0"/>
-          </a:p>
-        </p:txBody>
-      </p:sp>
-      <p:sp>
-        <p:nvSpPr>
-          <p:cNvPr id="9" name="Text 7"/>
-          <p:cNvSpPr/>
-          <p:nvPr/>
-        </p:nvSpPr>
-        <p:spPr>
-          <a:xfrm>
-            <a:off x="685800" y="3291840"/>
-            <a:ext cx="2377440" cy="502920"/>
-          </a:xfrm>
-          <a:prstGeom prst="rect">
-            <a:avLst/>
-          </a:prstGeom>
-          <a:noFill/>
-          <a:ln/>
-        </p:spPr>
-        <p:txBody>
-          <a:bodyPr wrap="square" lIns="0" tIns="0" rIns="0" bIns="0" rtlCol="0" anchor="ctr"/>
-          <a:lstStyle/>
-          <a:p>
-            <a:pPr indent="0" marL="0">
-              <a:buNone/>
-            </a:pPr>
-            <a:r>
-              <a:rPr lang="en-US" sz="1100" dirty="0">
+          <p:cNvPr id="13" name="Text 11"/>
+          <p:cNvSpPr/>
+          <p:nvPr/>
+        </p:nvSpPr>
+        <p:spPr>
+          <a:xfrm>
+            <a:off x="3223260" y="2194560"/>
+            <a:ext cx="2697480" cy="365760"/>
+          </a:xfrm>
+          <a:prstGeom prst="rect">
+            <a:avLst/>
+          </a:prstGeom>
+          <a:noFill/>
+          <a:ln/>
+        </p:spPr>
+        <p:txBody>
+          <a:bodyPr wrap="square" lIns="0" tIns="0" rIns="0" bIns="0" rtlCol="0" anchor="ctr"/>
+          <a:lstStyle/>
+          <a:p>
+            <a:pPr algn="ctr" indent="0" marL="0">
+              <a:buNone/>
+            </a:pPr>
+            <a:r>
+              <a:rPr lang="en-US" sz="1300" b="1" spc="400" kern="0" dirty="0">
+                <a:solidFill>
+                  <a:srgbClr val="FFFFFF"/>
+                </a:solidFill>
+                <a:latin typeface="Calibri" pitchFamily="34" charset="0"/>
+                <a:ea typeface="Calibri" pitchFamily="34" charset="-122"/>
+                <a:cs typeface="Calibri" pitchFamily="34" charset="-120"/>
+              </a:rPr>
+              <a:t>AI AGENT</a:t>
+            </a:r>
+            <a:endParaRPr lang="en-US" sz="1300" dirty="0"/>
+          </a:p>
+        </p:txBody>
+      </p:sp>
+      <p:sp>
+        <p:nvSpPr>
+          <p:cNvPr id="14" name="Text 12"/>
+          <p:cNvSpPr/>
+          <p:nvPr/>
+        </p:nvSpPr>
+        <p:spPr>
+          <a:xfrm>
+            <a:off x="3406140" y="2697480"/>
+            <a:ext cx="2331720" cy="1051560"/>
+          </a:xfrm>
+          <a:prstGeom prst="rect">
+            <a:avLst/>
+          </a:prstGeom>
+          <a:noFill/>
+          <a:ln/>
+        </p:spPr>
+        <p:txBody>
+          <a:bodyPr wrap="square" lIns="0" tIns="0" rIns="0" bIns="0" rtlCol="0" anchor="ctr"/>
+          <a:lstStyle/>
+          <a:p>
+            <a:pPr indent="0" marL="0">
+              <a:buNone/>
+            </a:pPr>
+            <a:r>
+              <a:rPr lang="en-US" sz="1200" dirty="0">
                 <a:solidFill>
                   <a:srgbClr val="1A1F36"/>
                 </a:solidFill>
@@ -2135,16 +2245,16 @@
                 <a:ea typeface="Calibri" pitchFamily="34" charset="-122"/>
                 <a:cs typeface="Calibri" pitchFamily="34" charset="-120"/>
               </a:rPr>
-              <a:t>NHI-to-human ratio</a:t>
-            </a:r>
-            <a:endParaRPr lang="en-US" sz="1100" dirty="0"/>
-          </a:p>
-          <a:p>
-            <a:pPr indent="0" marL="0">
-              <a:buNone/>
-            </a:pPr>
-            <a:r>
-              <a:rPr lang="en-US" sz="1100" dirty="0">
+              <a:t>Autonomous · Goal-based</a:t>
+            </a:r>
+            <a:endParaRPr lang="en-US" sz="1200" dirty="0"/>
+          </a:p>
+          <a:p>
+            <a:pPr indent="0" marL="0">
+              <a:buNone/>
+            </a:pPr>
+            <a:r>
+              <a:rPr lang="en-US" sz="1200" dirty="0">
                 <a:solidFill>
                   <a:srgbClr val="1A1F36"/>
                 </a:solidFill>
@@ -2152,32 +2262,103 @@
                 <a:ea typeface="Calibri" pitchFamily="34" charset="-122"/>
                 <a:cs typeface="Calibri" pitchFamily="34" charset="-120"/>
               </a:rPr>
-              <a:t>(SACR benchmark)</a:t>
-            </a:r>
-            <a:endParaRPr lang="en-US" sz="1100" dirty="0"/>
-          </a:p>
-        </p:txBody>
-      </p:sp>
-      <p:sp>
-        <p:nvSpPr>
-          <p:cNvPr id="10" name="Shape 8"/>
-          <p:cNvSpPr/>
-          <p:nvPr/>
-        </p:nvSpPr>
-        <p:spPr>
-          <a:xfrm>
-            <a:off x="3246120" y="2651760"/>
-            <a:ext cx="2651760" cy="1188720"/>
+              <a:t>Iterative · Nondeterministic</a:t>
+            </a:r>
+            <a:endParaRPr lang="en-US" sz="1200" dirty="0"/>
+          </a:p>
+          <a:p>
+            <a:pPr indent="0" marL="0">
+              <a:buNone/>
+            </a:pPr>
+            <a:r>
+              <a:rPr lang="en-US" sz="1200" dirty="0">
+                <a:solidFill>
+                  <a:srgbClr val="1A1F36"/>
+                </a:solidFill>
+                <a:latin typeface="Calibri" pitchFamily="34" charset="0"/>
+                <a:ea typeface="Calibri" pitchFamily="34" charset="-122"/>
+                <a:cs typeface="Calibri" pitchFamily="34" charset="-120"/>
+              </a:rPr>
+              <a:t>LLM-powered · Context-aware</a:t>
+            </a:r>
+            <a:endParaRPr lang="en-US" sz="1200" dirty="0"/>
+          </a:p>
+        </p:txBody>
+      </p:sp>
+      <p:sp>
+        <p:nvSpPr>
+          <p:cNvPr id="15" name="Text 13"/>
+          <p:cNvSpPr/>
+          <p:nvPr/>
+        </p:nvSpPr>
+        <p:spPr>
+          <a:xfrm>
+            <a:off x="3406140" y="3749040"/>
+            <a:ext cx="2331720" cy="594360"/>
+          </a:xfrm>
+          <a:prstGeom prst="rect">
+            <a:avLst/>
+          </a:prstGeom>
+          <a:noFill/>
+          <a:ln/>
+        </p:spPr>
+        <p:txBody>
+          <a:bodyPr wrap="square" lIns="0" tIns="0" rIns="0" bIns="0" rtlCol="0" anchor="ctr"/>
+          <a:lstStyle/>
+          <a:p>
+            <a:pPr indent="0" marL="0">
+              <a:buNone/>
+            </a:pPr>
+            <a:r>
+              <a:rPr lang="en-US" sz="900" b="1" spc="200" kern="0" dirty="0">
+                <a:solidFill>
+                  <a:srgbClr val="02C39A"/>
+                </a:solidFill>
+                <a:latin typeface="Calibri" pitchFamily="34" charset="0"/>
+                <a:ea typeface="Calibri" pitchFamily="34" charset="-122"/>
+                <a:cs typeface="Calibri" pitchFamily="34" charset="-120"/>
+              </a:rPr>
+              <a:t>RISK
+</a:t>
+            </a:r>
+            <a:pPr indent="0" marL="0">
+              <a:buNone/>
+            </a:pPr>
+            <a:r>
+              <a:rPr lang="en-US" sz="1000" i="1" dirty="0">
+                <a:solidFill>
+                  <a:srgbClr val="64748B"/>
+                </a:solidFill>
+                <a:latin typeface="Calibri" pitchFamily="34" charset="0"/>
+                <a:ea typeface="Calibri" pitchFamily="34" charset="-122"/>
+                <a:cs typeface="Calibri" pitchFamily="34" charset="-120"/>
+              </a:rPr>
+              <a:t>Manipulable via inputs · Dangerous when over-trusted</a:t>
+            </a:r>
+            <a:endParaRPr lang="en-US" sz="900" dirty="0"/>
+          </a:p>
+        </p:txBody>
+      </p:sp>
+      <p:sp>
+        <p:nvSpPr>
+          <p:cNvPr id="16" name="Shape 14"/>
+          <p:cNvSpPr/>
+          <p:nvPr/>
+        </p:nvSpPr>
+        <p:spPr>
+          <a:xfrm>
+            <a:off x="6057900" y="2194560"/>
+            <a:ext cx="2697480" cy="2194560"/>
           </a:xfrm>
           <a:prstGeom prst="rect">
             <a:avLst/>
           </a:prstGeom>
           <a:solidFill>
-            <a:srgbClr val="E8EEFC"/>
+            <a:srgbClr val="FFFFFF"/>
           </a:solidFill>
           <a:ln w="12700">
             <a:solidFill>
-              <a:srgbClr val="E8EEFC"/>
+              <a:srgbClr val="0F1B3D"/>
             </a:solidFill>
             <a:prstDash val="solid"/>
           </a:ln>
@@ -2185,24 +2366,24 @@
       </p:sp>
       <p:sp>
         <p:nvSpPr>
-          <p:cNvPr id="11" name="Shape 9"/>
-          <p:cNvSpPr/>
-          <p:nvPr/>
-        </p:nvSpPr>
-        <p:spPr>
-          <a:xfrm>
-            <a:off x="3246120" y="2651760"/>
-            <a:ext cx="73152" cy="1188720"/>
+          <p:cNvPr id="17" name="Shape 15"/>
+          <p:cNvSpPr/>
+          <p:nvPr/>
+        </p:nvSpPr>
+        <p:spPr>
+          <a:xfrm>
+            <a:off x="6057900" y="2194560"/>
+            <a:ext cx="2697480" cy="365760"/>
           </a:xfrm>
           <a:prstGeom prst="rect">
             <a:avLst/>
           </a:prstGeom>
           <a:solidFill>
-            <a:srgbClr val="02C39A"/>
+            <a:srgbClr val="0F1B3D"/>
           </a:solidFill>
           <a:ln w="12700">
             <a:solidFill>
-              <a:srgbClr val="02C39A"/>
+              <a:srgbClr val="0F1B3D"/>
             </a:solidFill>
             <a:prstDash val="solid"/>
           </a:ln>
@@ -2210,397 +2391,189 @@
       </p:sp>
       <p:sp>
         <p:nvSpPr>
-          <p:cNvPr id="12" name="Text 10"/>
-          <p:cNvSpPr/>
-          <p:nvPr/>
-        </p:nvSpPr>
-        <p:spPr>
-          <a:xfrm>
-            <a:off x="3474720" y="2788920"/>
-            <a:ext cx="2377440" cy="502920"/>
-          </a:xfrm>
-          <a:prstGeom prst="rect">
-            <a:avLst/>
-          </a:prstGeom>
-          <a:noFill/>
-          <a:ln/>
-        </p:spPr>
-        <p:txBody>
-          <a:bodyPr wrap="square" lIns="0" tIns="0" rIns="0" bIns="0" rtlCol="0" anchor="ctr"/>
-          <a:lstStyle/>
-          <a:p>
-            <a:pPr indent="0" marL="0">
-              <a:buNone/>
-            </a:pPr>
-            <a:r>
-              <a:rPr lang="en-US" sz="2800" b="1" dirty="0">
+          <p:cNvPr id="18" name="Text 16"/>
+          <p:cNvSpPr/>
+          <p:nvPr/>
+        </p:nvSpPr>
+        <p:spPr>
+          <a:xfrm>
+            <a:off x="6057900" y="2194560"/>
+            <a:ext cx="2697480" cy="365760"/>
+          </a:xfrm>
+          <a:prstGeom prst="rect">
+            <a:avLst/>
+          </a:prstGeom>
+          <a:noFill/>
+          <a:ln/>
+        </p:spPr>
+        <p:txBody>
+          <a:bodyPr wrap="square" lIns="0" tIns="0" rIns="0" bIns="0" rtlCol="0" anchor="ctr"/>
+          <a:lstStyle/>
+          <a:p>
+            <a:pPr algn="ctr" indent="0" marL="0">
+              <a:buNone/>
+            </a:pPr>
+            <a:r>
+              <a:rPr lang="en-US" sz="1300" b="1" spc="400" kern="0" dirty="0">
+                <a:solidFill>
+                  <a:srgbClr val="FFFFFF"/>
+                </a:solidFill>
+                <a:latin typeface="Calibri" pitchFamily="34" charset="0"/>
+                <a:ea typeface="Calibri" pitchFamily="34" charset="-122"/>
+                <a:cs typeface="Calibri" pitchFamily="34" charset="-120"/>
+              </a:rPr>
+              <a:t>NHI</a:t>
+            </a:r>
+            <a:endParaRPr lang="en-US" sz="1300" dirty="0"/>
+          </a:p>
+        </p:txBody>
+      </p:sp>
+      <p:sp>
+        <p:nvSpPr>
+          <p:cNvPr id="19" name="Text 17"/>
+          <p:cNvSpPr/>
+          <p:nvPr/>
+        </p:nvSpPr>
+        <p:spPr>
+          <a:xfrm>
+            <a:off x="6240780" y="2697480"/>
+            <a:ext cx="2331720" cy="1051560"/>
+          </a:xfrm>
+          <a:prstGeom prst="rect">
+            <a:avLst/>
+          </a:prstGeom>
+          <a:noFill/>
+          <a:ln/>
+        </p:spPr>
+        <p:txBody>
+          <a:bodyPr wrap="square" lIns="0" tIns="0" rIns="0" bIns="0" rtlCol="0" anchor="ctr"/>
+          <a:lstStyle/>
+          <a:p>
+            <a:pPr indent="0" marL="0">
+              <a:buNone/>
+            </a:pPr>
+            <a:r>
+              <a:rPr lang="en-US" sz="1200" dirty="0">
+                <a:solidFill>
+                  <a:srgbClr val="1A1F36"/>
+                </a:solidFill>
+                <a:latin typeface="Calibri" pitchFamily="34" charset="0"/>
+                <a:ea typeface="Calibri" pitchFamily="34" charset="-122"/>
+                <a:cs typeface="Calibri" pitchFamily="34" charset="-120"/>
+              </a:rPr>
+              <a:t>Restless · Works at scale</a:t>
+            </a:r>
+            <a:endParaRPr lang="en-US" sz="1200" dirty="0"/>
+          </a:p>
+          <a:p>
+            <a:pPr indent="0" marL="0">
+              <a:buNone/>
+            </a:pPr>
+            <a:r>
+              <a:rPr lang="en-US" sz="1200" dirty="0">
+                <a:solidFill>
+                  <a:srgbClr val="1A1F36"/>
+                </a:solidFill>
+                <a:latin typeface="Calibri" pitchFamily="34" charset="0"/>
+                <a:ea typeface="Calibri" pitchFamily="34" charset="-122"/>
+                <a:cs typeface="Calibri" pitchFamily="34" charset="-120"/>
+              </a:rPr>
+              <a:t>Permission-greedy</a:t>
+            </a:r>
+            <a:endParaRPr lang="en-US" sz="1200" dirty="0"/>
+          </a:p>
+        </p:txBody>
+      </p:sp>
+      <p:sp>
+        <p:nvSpPr>
+          <p:cNvPr id="20" name="Text 18"/>
+          <p:cNvSpPr/>
+          <p:nvPr/>
+        </p:nvSpPr>
+        <p:spPr>
+          <a:xfrm>
+            <a:off x="6240780" y="3749040"/>
+            <a:ext cx="2331720" cy="594360"/>
+          </a:xfrm>
+          <a:prstGeom prst="rect">
+            <a:avLst/>
+          </a:prstGeom>
+          <a:noFill/>
+          <a:ln/>
+        </p:spPr>
+        <p:txBody>
+          <a:bodyPr wrap="square" lIns="0" tIns="0" rIns="0" bIns="0" rtlCol="0" anchor="ctr"/>
+          <a:lstStyle/>
+          <a:p>
+            <a:pPr indent="0" marL="0">
+              <a:buNone/>
+            </a:pPr>
+            <a:r>
+              <a:rPr lang="en-US" sz="900" b="1" spc="200" kern="0" dirty="0">
                 <a:solidFill>
                   <a:srgbClr val="0F1B3D"/>
                 </a:solidFill>
-                <a:latin typeface="Georgia" pitchFamily="34" charset="0"/>
-                <a:ea typeface="Georgia" pitchFamily="34" charset="-122"/>
-                <a:cs typeface="Georgia" pitchFamily="34" charset="-120"/>
-              </a:rPr>
-              <a:t>31%</a:t>
-            </a:r>
-            <a:endParaRPr lang="en-US" sz="2800" dirty="0"/>
-          </a:p>
-        </p:txBody>
-      </p:sp>
-      <p:sp>
-        <p:nvSpPr>
-          <p:cNvPr id="13" name="Text 11"/>
-          <p:cNvSpPr/>
-          <p:nvPr/>
-        </p:nvSpPr>
-        <p:spPr>
-          <a:xfrm>
-            <a:off x="3474720" y="3291840"/>
-            <a:ext cx="2377440" cy="502920"/>
-          </a:xfrm>
-          <a:prstGeom prst="rect">
-            <a:avLst/>
-          </a:prstGeom>
-          <a:noFill/>
-          <a:ln/>
-        </p:spPr>
-        <p:txBody>
-          <a:bodyPr wrap="square" lIns="0" tIns="0" rIns="0" bIns="0" rtlCol="0" anchor="ctr"/>
-          <a:lstStyle/>
-          <a:p>
-            <a:pPr indent="0" marL="0">
-              <a:buNone/>
-            </a:pPr>
-            <a:r>
-              <a:rPr lang="en-US" sz="1100" dirty="0">
-                <a:solidFill>
-                  <a:srgbClr val="1A1F36"/>
-                </a:solidFill>
-                <a:latin typeface="Calibri" pitchFamily="34" charset="0"/>
-                <a:ea typeface="Calibri" pitchFamily="34" charset="-122"/>
-                <a:cs typeface="Calibri" pitchFamily="34" charset="-120"/>
-              </a:rPr>
-              <a:t>of breaches start with</a:t>
+                <a:latin typeface="Calibri" pitchFamily="34" charset="0"/>
+                <a:ea typeface="Calibri" pitchFamily="34" charset="-122"/>
+                <a:cs typeface="Calibri" pitchFamily="34" charset="-120"/>
+              </a:rPr>
+              <a:t>RISK
+</a:t>
+            </a:r>
+            <a:pPr indent="0" marL="0">
+              <a:buNone/>
+            </a:pPr>
+            <a:r>
+              <a:rPr lang="en-US" sz="1000" i="1" dirty="0">
+                <a:solidFill>
+                  <a:srgbClr val="64748B"/>
+                </a:solidFill>
+                <a:latin typeface="Calibri" pitchFamily="34" charset="0"/>
+                <a:ea typeface="Calibri" pitchFamily="34" charset="-122"/>
+                <a:cs typeface="Calibri" pitchFamily="34" charset="-120"/>
+              </a:rPr>
+              <a:t>Misconfigurations · Long-lived secrets</a:t>
+            </a:r>
+            <a:endParaRPr lang="en-US" sz="900" dirty="0"/>
+          </a:p>
+        </p:txBody>
+      </p:sp>
+      <p:sp>
+        <p:nvSpPr>
+          <p:cNvPr id="21" name="Text 19"/>
+          <p:cNvSpPr/>
+          <p:nvPr/>
+        </p:nvSpPr>
+        <p:spPr>
+          <a:xfrm>
+            <a:off x="457200" y="4617720"/>
+            <a:ext cx="8229600" cy="274320"/>
+          </a:xfrm>
+          <a:prstGeom prst="rect">
+            <a:avLst/>
+          </a:prstGeom>
+          <a:noFill/>
+          <a:ln/>
+        </p:spPr>
+        <p:txBody>
+          <a:bodyPr wrap="square" lIns="0" tIns="0" rIns="0" bIns="0" rtlCol="0" anchor="ctr"/>
+          <a:lstStyle/>
+          <a:p>
+            <a:pPr algn="ctr" indent="0" marL="0">
+              <a:buNone/>
+            </a:pPr>
+            <a:r>
+              <a:rPr lang="en-US" sz="1100" b="1" i="1" dirty="0">
+                <a:solidFill>
+                  <a:srgbClr val="0F1B3D"/>
+                </a:solidFill>
+                <a:latin typeface="Calibri" pitchFamily="34" charset="0"/>
+                <a:ea typeface="Calibri" pitchFamily="34" charset="-122"/>
+                <a:cs typeface="Calibri" pitchFamily="34" charset="-120"/>
+              </a:rPr>
+              <a:t>144 agents per human (SACR benchmark). Manual oversight structurally impossible.</a:t>
             </a:r>
             <a:endParaRPr lang="en-US" sz="1100" dirty="0"/>
-          </a:p>
-          <a:p>
-            <a:pPr indent="0" marL="0">
-              <a:buNone/>
-            </a:pPr>
-            <a:r>
-              <a:rPr lang="en-US" sz="1100" dirty="0">
-                <a:solidFill>
-                  <a:srgbClr val="1A1F36"/>
-                </a:solidFill>
-                <a:latin typeface="Calibri" pitchFamily="34" charset="0"/>
-                <a:ea typeface="Calibri" pitchFamily="34" charset="-122"/>
-                <a:cs typeface="Calibri" pitchFamily="34" charset="-120"/>
-              </a:rPr>
-              <a:t>stolen credentials (DBIR '25)</a:t>
-            </a:r>
-            <a:endParaRPr lang="en-US" sz="1100" dirty="0"/>
-          </a:p>
-        </p:txBody>
-      </p:sp>
-      <p:sp>
-        <p:nvSpPr>
-          <p:cNvPr id="14" name="Shape 12"/>
-          <p:cNvSpPr/>
-          <p:nvPr/>
-        </p:nvSpPr>
-        <p:spPr>
-          <a:xfrm>
-            <a:off x="6035040" y="2651760"/>
-            <a:ext cx="2651760" cy="1188720"/>
-          </a:xfrm>
-          <a:prstGeom prst="rect">
-            <a:avLst/>
-          </a:prstGeom>
-          <a:solidFill>
-            <a:srgbClr val="E8EEFC"/>
-          </a:solidFill>
-          <a:ln w="12700">
-            <a:solidFill>
-              <a:srgbClr val="E8EEFC"/>
-            </a:solidFill>
-            <a:prstDash val="solid"/>
-          </a:ln>
-        </p:spPr>
-      </p:sp>
-      <p:sp>
-        <p:nvSpPr>
-          <p:cNvPr id="15" name="Shape 13"/>
-          <p:cNvSpPr/>
-          <p:nvPr/>
-        </p:nvSpPr>
-        <p:spPr>
-          <a:xfrm>
-            <a:off x="6035040" y="2651760"/>
-            <a:ext cx="73152" cy="1188720"/>
-          </a:xfrm>
-          <a:prstGeom prst="rect">
-            <a:avLst/>
-          </a:prstGeom>
-          <a:solidFill>
-            <a:srgbClr val="02C39A"/>
-          </a:solidFill>
-          <a:ln w="12700">
-            <a:solidFill>
-              <a:srgbClr val="02C39A"/>
-            </a:solidFill>
-            <a:prstDash val="solid"/>
-          </a:ln>
-        </p:spPr>
-      </p:sp>
-      <p:sp>
-        <p:nvSpPr>
-          <p:cNvPr id="16" name="Text 14"/>
-          <p:cNvSpPr/>
-          <p:nvPr/>
-        </p:nvSpPr>
-        <p:spPr>
-          <a:xfrm>
-            <a:off x="6263640" y="2788920"/>
-            <a:ext cx="2377440" cy="502920"/>
-          </a:xfrm>
-          <a:prstGeom prst="rect">
-            <a:avLst/>
-          </a:prstGeom>
-          <a:noFill/>
-          <a:ln/>
-        </p:spPr>
-        <p:txBody>
-          <a:bodyPr wrap="square" lIns="0" tIns="0" rIns="0" bIns="0" rtlCol="0" anchor="ctr"/>
-          <a:lstStyle/>
-          <a:p>
-            <a:pPr indent="0" marL="0">
-              <a:buNone/>
-            </a:pPr>
-            <a:r>
-              <a:rPr lang="en-US" sz="2800" b="1" dirty="0">
-                <a:solidFill>
-                  <a:srgbClr val="0F1B3D"/>
-                </a:solidFill>
-                <a:latin typeface="Georgia" pitchFamily="34" charset="0"/>
-                <a:ea typeface="Georgia" pitchFamily="34" charset="-122"/>
-                <a:cs typeface="Georgia" pitchFamily="34" charset="-120"/>
-              </a:rPr>
-              <a:t>3</a:t>
-            </a:r>
-            <a:endParaRPr lang="en-US" sz="2800" dirty="0"/>
-          </a:p>
-        </p:txBody>
-      </p:sp>
-      <p:sp>
-        <p:nvSpPr>
-          <p:cNvPr id="17" name="Text 15"/>
-          <p:cNvSpPr/>
-          <p:nvPr/>
-        </p:nvSpPr>
-        <p:spPr>
-          <a:xfrm>
-            <a:off x="6263640" y="3291840"/>
-            <a:ext cx="2377440" cy="502920"/>
-          </a:xfrm>
-          <a:prstGeom prst="rect">
-            <a:avLst/>
-          </a:prstGeom>
-          <a:noFill/>
-          <a:ln/>
-        </p:spPr>
-        <p:txBody>
-          <a:bodyPr wrap="square" lIns="0" tIns="0" rIns="0" bIns="0" rtlCol="0" anchor="ctr"/>
-          <a:lstStyle/>
-          <a:p>
-            <a:pPr indent="0" marL="0">
-              <a:buNone/>
-            </a:pPr>
-            <a:r>
-              <a:rPr lang="en-US" sz="1100" dirty="0">
-                <a:solidFill>
-                  <a:srgbClr val="1A1F36"/>
-                </a:solidFill>
-                <a:latin typeface="Calibri" pitchFamily="34" charset="0"/>
-                <a:ea typeface="Calibri" pitchFamily="34" charset="-122"/>
-                <a:cs typeface="Calibri" pitchFamily="34" charset="-120"/>
-              </a:rPr>
-              <a:t>CISO questions</a:t>
-            </a:r>
-            <a:endParaRPr lang="en-US" sz="1100" dirty="0"/>
-          </a:p>
-          <a:p>
-            <a:pPr indent="0" marL="0">
-              <a:buNone/>
-            </a:pPr>
-            <a:r>
-              <a:rPr lang="en-US" sz="1100" dirty="0">
-                <a:solidFill>
-                  <a:srgbClr val="1A1F36"/>
-                </a:solidFill>
-                <a:latin typeface="Calibri" pitchFamily="34" charset="0"/>
-                <a:ea typeface="Calibri" pitchFamily="34" charset="-122"/>
-                <a:cs typeface="Calibri" pitchFamily="34" charset="-120"/>
-              </a:rPr>
-              <a:t>we committed to answer</a:t>
-            </a:r>
-            <a:endParaRPr lang="en-US" sz="1100" dirty="0"/>
-          </a:p>
-        </p:txBody>
-      </p:sp>
-      <p:sp>
-        <p:nvSpPr>
-          <p:cNvPr id="18" name="Text 16"/>
-          <p:cNvSpPr/>
-          <p:nvPr/>
-        </p:nvSpPr>
-        <p:spPr>
-          <a:xfrm>
-            <a:off x="457200" y="4114800"/>
-            <a:ext cx="2651760" cy="320040"/>
-          </a:xfrm>
-          <a:prstGeom prst="rect">
-            <a:avLst/>
-          </a:prstGeom>
-          <a:noFill/>
-          <a:ln/>
-        </p:spPr>
-        <p:txBody>
-          <a:bodyPr wrap="square" lIns="0" tIns="0" rIns="0" bIns="0" rtlCol="0" anchor="ctr"/>
-          <a:lstStyle/>
-          <a:p>
-            <a:pPr algn="l" indent="0" marL="0">
-              <a:buNone/>
-            </a:pPr>
-            <a:r>
-              <a:rPr lang="en-US" sz="1200" b="1" dirty="0">
-                <a:solidFill>
-                  <a:srgbClr val="0F1B3D"/>
-                </a:solidFill>
-                <a:latin typeface="Calibri" pitchFamily="34" charset="0"/>
-                <a:ea typeface="Calibri" pitchFamily="34" charset="-122"/>
-                <a:cs typeface="Calibri" pitchFamily="34" charset="-120"/>
-              </a:rPr>
-              <a:t>Q1. Where are my agents?</a:t>
-            </a:r>
-            <a:endParaRPr lang="en-US" sz="1200" dirty="0"/>
-          </a:p>
-        </p:txBody>
-      </p:sp>
-      <p:sp>
-        <p:nvSpPr>
-          <p:cNvPr id="19" name="Text 17"/>
-          <p:cNvSpPr/>
-          <p:nvPr/>
-        </p:nvSpPr>
-        <p:spPr>
-          <a:xfrm>
-            <a:off x="3246120" y="4114800"/>
-            <a:ext cx="2651760" cy="320040"/>
-          </a:xfrm>
-          <a:prstGeom prst="rect">
-            <a:avLst/>
-          </a:prstGeom>
-          <a:noFill/>
-          <a:ln/>
-        </p:spPr>
-        <p:txBody>
-          <a:bodyPr wrap="square" lIns="0" tIns="0" rIns="0" bIns="0" rtlCol="0" anchor="ctr"/>
-          <a:lstStyle/>
-          <a:p>
-            <a:pPr algn="l" indent="0" marL="0">
-              <a:buNone/>
-            </a:pPr>
-            <a:r>
-              <a:rPr lang="en-US" sz="1200" b="1" dirty="0">
-                <a:solidFill>
-                  <a:srgbClr val="0F1B3D"/>
-                </a:solidFill>
-                <a:latin typeface="Calibri" pitchFamily="34" charset="0"/>
-                <a:ea typeface="Calibri" pitchFamily="34" charset="-122"/>
-                <a:cs typeface="Calibri" pitchFamily="34" charset="-120"/>
-              </a:rPr>
-              <a:t>Q2. What can they access?</a:t>
-            </a:r>
-            <a:endParaRPr lang="en-US" sz="1200" dirty="0"/>
-          </a:p>
-        </p:txBody>
-      </p:sp>
-      <p:sp>
-        <p:nvSpPr>
-          <p:cNvPr id="20" name="Text 18"/>
-          <p:cNvSpPr/>
-          <p:nvPr/>
-        </p:nvSpPr>
-        <p:spPr>
-          <a:xfrm>
-            <a:off x="6035040" y="4114800"/>
-            <a:ext cx="2651760" cy="320040"/>
-          </a:xfrm>
-          <a:prstGeom prst="rect">
-            <a:avLst/>
-          </a:prstGeom>
-          <a:noFill/>
-          <a:ln/>
-        </p:spPr>
-        <p:txBody>
-          <a:bodyPr wrap="square" lIns="0" tIns="0" rIns="0" bIns="0" rtlCol="0" anchor="ctr"/>
-          <a:lstStyle/>
-          <a:p>
-            <a:pPr algn="l" indent="0" marL="0">
-              <a:buNone/>
-            </a:pPr>
-            <a:r>
-              <a:rPr lang="en-US" sz="1200" b="1" dirty="0">
-                <a:solidFill>
-                  <a:srgbClr val="0F1B3D"/>
-                </a:solidFill>
-                <a:latin typeface="Calibri" pitchFamily="34" charset="0"/>
-                <a:ea typeface="Calibri" pitchFamily="34" charset="-122"/>
-                <a:cs typeface="Calibri" pitchFamily="34" charset="-120"/>
-              </a:rPr>
-              <a:t>Q3. Who is accountable?</a:t>
-            </a:r>
-            <a:endParaRPr lang="en-US" sz="1200" dirty="0"/>
-          </a:p>
-        </p:txBody>
-      </p:sp>
-      <p:sp>
-        <p:nvSpPr>
-          <p:cNvPr id="21" name="Text 19"/>
-          <p:cNvSpPr/>
-          <p:nvPr/>
-        </p:nvSpPr>
-        <p:spPr>
-          <a:xfrm>
-            <a:off x="457200" y="4823460"/>
-            <a:ext cx="8229600" cy="228600"/>
-          </a:xfrm>
-          <a:prstGeom prst="rect">
-            <a:avLst/>
-          </a:prstGeom>
-          <a:noFill/>
-          <a:ln/>
-        </p:spPr>
-        <p:txBody>
-          <a:bodyPr wrap="square" lIns="0" tIns="0" rIns="0" bIns="0" rtlCol="0" anchor="ctr"/>
-          <a:lstStyle/>
-          <a:p>
-            <a:pPr algn="l" indent="0" marL="0">
-              <a:buNone/>
-            </a:pPr>
-            <a:r>
-              <a:rPr lang="en-US" sz="900" dirty="0">
-                <a:solidFill>
-                  <a:srgbClr val="64748B"/>
-                </a:solidFill>
-                <a:latin typeface="Calibri" pitchFamily="34" charset="0"/>
-                <a:ea typeface="Calibri" pitchFamily="34" charset="-122"/>
-                <a:cs typeface="Calibri" pitchFamily="34" charset="-120"/>
-              </a:rPr>
-              <a:t>Pre-Kickoff · AI Governance · 2026-04-27</a:t>
-            </a:r>
-            <a:endParaRPr lang="en-US" sz="900" dirty="0"/>
           </a:p>
         </p:txBody>
       </p:sp>
@@ -2637,7 +2610,7 @@
                 <a:ea typeface="Calibri" pitchFamily="34" charset="-122"/>
                 <a:cs typeface="Calibri" pitchFamily="34" charset="-120"/>
               </a:rPr>
-              <a:t>2 / 9</a:t>
+              <a:t>2 / 8</a:t>
             </a:r>
             <a:endParaRPr lang="en-US" sz="900" dirty="0"/>
           </a:p>
@@ -2709,7 +2682,7 @@
         <p:spPr>
           <a:xfrm>
             <a:off x="457200" y="365760"/>
-            <a:ext cx="5486400" cy="274320"/>
+            <a:ext cx="7315200" cy="274320"/>
           </a:xfrm>
           <a:prstGeom prst="rect">
             <a:avLst/>
@@ -2733,7 +2706,7 @@
                 <a:ea typeface="Calibri" pitchFamily="34" charset="-122"/>
                 <a:cs typeface="Calibri" pitchFamily="34" charset="-120"/>
               </a:rPr>
-              <a:t>02 · What we shipped</a:t>
+              <a:t>02 · The map</a:t>
             </a:r>
             <a:endParaRPr lang="en-US" sz="1100" dirty="0"/>
           </a:p>
@@ -2748,7 +2721,7 @@
         <p:spPr>
           <a:xfrm>
             <a:off x="457200" y="731520"/>
-            <a:ext cx="8229600" cy="731520"/>
+            <a:ext cx="8229600" cy="777240"/>
           </a:xfrm>
           <a:prstGeom prst="rect">
             <a:avLst/>
@@ -2772,7 +2745,7 @@
                 <a:ea typeface="Georgia" pitchFamily="34" charset="-122"/>
                 <a:cs typeface="Georgia" pitchFamily="34" charset="-120"/>
               </a:rPr>
-              <a:t>M1 is live. Real agents, real data.</a:t>
+              <a:t>What “agent IAM” fully means.</a:t>
             </a:r>
             <a:endParaRPr lang="en-US" sz="3400" dirty="0"/>
           </a:p>
@@ -2786,28 +2759,88 @@
         </p:nvSpPr>
         <p:spPr>
           <a:xfrm>
-            <a:off x="548640" y="1691640"/>
-            <a:ext cx="4023360" cy="2468880"/>
-          </a:xfrm>
-          <a:prstGeom prst="rect">
-            <a:avLst/>
-          </a:prstGeom>
-          <a:noFill/>
-          <a:ln/>
-        </p:spPr>
-        <p:txBody>
-          <a:bodyPr wrap="square" lIns="0" tIns="0" rIns="0" bIns="0" rtlCol="0" anchor="ctr"/>
-          <a:lstStyle/>
-          <a:p>
-            <a:pPr marL="342900" indent="-342900">
-              <a:spcAft>
-                <a:spcPts val="200"/>
-              </a:spcAft>
-              <a:buSzPct val="100000"/>
-              <a:buChar char="■"/>
-            </a:pPr>
-            <a:r>
-              <a:rPr lang="en-US" sz="1400" b="1" dirty="0">
+            <a:off x="457200" y="1554480"/>
+            <a:ext cx="8229600" cy="365760"/>
+          </a:xfrm>
+          <a:prstGeom prst="rect">
+            <a:avLst/>
+          </a:prstGeom>
+          <a:noFill/>
+          <a:ln/>
+        </p:spPr>
+        <p:txBody>
+          <a:bodyPr wrap="square" lIns="0" tIns="0" rIns="0" bIns="0" rtlCol="0" anchor="ctr"/>
+          <a:lstStyle/>
+          <a:p>
+            <a:pPr indent="0" marL="0">
+              <a:buNone/>
+            </a:pPr>
+            <a:r>
+              <a:rPr lang="en-US" sz="1200" i="1" dirty="0">
+                <a:solidFill>
+                  <a:srgbClr val="64748B"/>
+                </a:solidFill>
+                <a:latin typeface="Calibri" pitchFamily="34" charset="0"/>
+                <a:ea typeface="Calibri" pitchFamily="34" charset="-122"/>
+                <a:cs typeface="Calibri" pitchFamily="34" charset="-120"/>
+              </a:rPr>
+              <a:t>10-capability framework (“IAM for LLM-Based AI Agents”). Our scope tags show where each one lands for us.</a:t>
+            </a:r>
+            <a:endParaRPr lang="en-US" sz="1200" dirty="0"/>
+          </a:p>
+        </p:txBody>
+      </p:sp>
+      <p:sp>
+        <p:nvSpPr>
+          <p:cNvPr id="6" name="Shape 4"/>
+          <p:cNvSpPr/>
+          <p:nvPr/>
+        </p:nvSpPr>
+        <p:spPr>
+          <a:xfrm>
+            <a:off x="457200" y="2011680"/>
+            <a:ext cx="292608" cy="292608"/>
+          </a:xfrm>
+          <a:prstGeom prst="ellipse">
+            <a:avLst/>
+          </a:prstGeom>
+          <a:solidFill>
+            <a:srgbClr val="E8EEFC"/>
+          </a:solidFill>
+          <a:ln w="6350">
+            <a:solidFill>
+              <a:srgbClr val="CBD5E1"/>
+            </a:solidFill>
+            <a:prstDash val="solid"/>
+          </a:ln>
+        </p:spPr>
+      </p:sp>
+      <p:sp>
+        <p:nvSpPr>
+          <p:cNvPr id="7" name="Text 5"/>
+          <p:cNvSpPr/>
+          <p:nvPr/>
+        </p:nvSpPr>
+        <p:spPr>
+          <a:xfrm>
+            <a:off x="457200" y="2011680"/>
+            <a:ext cx="292608" cy="292608"/>
+          </a:xfrm>
+          <a:prstGeom prst="rect">
+            <a:avLst/>
+          </a:prstGeom>
+          <a:noFill/>
+          <a:ln/>
+        </p:spPr>
+        <p:txBody>
+          <a:bodyPr wrap="square" lIns="0" tIns="0" rIns="0" bIns="0" rtlCol="0" anchor="ctr"/>
+          <a:lstStyle/>
+          <a:p>
+            <a:pPr algn="ctr" indent="0" marL="0">
+              <a:buNone/>
+            </a:pPr>
+            <a:r>
+              <a:rPr lang="en-US" sz="1100" b="1" dirty="0">
                 <a:solidFill>
                   <a:srgbClr val="0F1B3D"/>
                 </a:solidFill>
@@ -2815,60 +2848,166 @@
                 <a:ea typeface="Calibri" pitchFamily="34" charset="-122"/>
                 <a:cs typeface="Calibri" pitchFamily="34" charset="-120"/>
               </a:rPr>
-              <a:t>Agent graph model</a:t>
-            </a:r>
-            <a:endParaRPr lang="en-US" sz="1400" dirty="0"/>
-          </a:p>
-          <a:p>
-            <a:pPr indent="0" marL="0">
-              <a:spcAft>
-                <a:spcPts val="200"/>
-              </a:spcAft>
+              <a:t>1</a:t>
+            </a:r>
+            <a:endParaRPr lang="en-US" sz="1100" dirty="0"/>
+          </a:p>
+        </p:txBody>
+      </p:sp>
+      <p:sp>
+        <p:nvSpPr>
+          <p:cNvPr id="8" name="Text 6"/>
+          <p:cNvSpPr/>
+          <p:nvPr/>
+        </p:nvSpPr>
+        <p:spPr>
+          <a:xfrm>
+            <a:off x="822960" y="1965960"/>
+            <a:ext cx="2697480" cy="411480"/>
+          </a:xfrm>
+          <a:prstGeom prst="rect">
+            <a:avLst/>
+          </a:prstGeom>
+          <a:noFill/>
+          <a:ln/>
+        </p:spPr>
+        <p:txBody>
+          <a:bodyPr wrap="square" lIns="0" tIns="0" rIns="0" bIns="0" rtlCol="0" anchor="ctr"/>
+          <a:lstStyle/>
+          <a:p>
+            <a:pPr indent="0" marL="0">
               <a:buNone/>
             </a:pPr>
             <a:r>
               <a:rPr lang="en-US" sz="1200" dirty="0">
                 <a:solidFill>
-                  <a:srgbClr val="64748B"/>
-                </a:solidFill>
-                <a:latin typeface="Calibri" pitchFamily="34" charset="0"/>
-                <a:ea typeface="Calibri" pitchFamily="34" charset="-122"/>
-                <a:cs typeface="Calibri" pitchFamily="34" charset="-120"/>
-              </a:rPr>
-              <a:t>   Agents as first-class nodes in the identity graph.</a:t>
-            </a:r>
-            <a:endParaRPr lang="en-US" sz="1400" dirty="0"/>
-          </a:p>
-          <a:p>
-            <a:pPr indent="0" marL="0">
-              <a:spcAft>
-                <a:spcPts val="200"/>
-              </a:spcAft>
-              <a:buNone/>
-            </a:pPr>
-            <a:r>
-              <a:rPr lang="en-US" sz="600" dirty="0">
-                <a:solidFill>
-                  <a:srgbClr val="000000"/>
-                </a:solidFill>
-                <a:latin typeface="Calibri" pitchFamily="34" charset="0"/>
-                <a:ea typeface="Calibri" pitchFamily="34" charset="-122"/>
-                <a:cs typeface="Calibri" pitchFamily="34" charset="-120"/>
-              </a:rPr>
-              <a:t> </a:t>
-            </a:r>
-            <a:endParaRPr lang="en-US" sz="1400" dirty="0"/>
-          </a:p>
-          <a:p>
-            <a:pPr marL="342900" indent="-342900">
-              <a:spcAft>
-                <a:spcPts val="200"/>
-              </a:spcAft>
-              <a:buSzPct val="100000"/>
-              <a:buChar char="■"/>
-            </a:pPr>
-            <a:r>
-              <a:rPr lang="en-US" sz="1400" b="1" dirty="0">
+                  <a:srgbClr val="1A1F36"/>
+                </a:solidFill>
+                <a:latin typeface="Calibri" pitchFamily="34" charset="0"/>
+                <a:ea typeface="Calibri" pitchFamily="34" charset="-122"/>
+                <a:cs typeface="Calibri" pitchFamily="34" charset="-120"/>
+              </a:rPr>
+              <a:t>Registration &amp; identification</a:t>
+            </a:r>
+            <a:endParaRPr lang="en-US" sz="1200" dirty="0"/>
+          </a:p>
+        </p:txBody>
+      </p:sp>
+      <p:sp>
+        <p:nvSpPr>
+          <p:cNvPr id="9" name="Shape 7"/>
+          <p:cNvSpPr/>
+          <p:nvPr/>
+        </p:nvSpPr>
+        <p:spPr>
+          <a:xfrm>
+            <a:off x="3566160" y="2039112"/>
+            <a:ext cx="1005840" cy="256032"/>
+          </a:xfrm>
+          <a:prstGeom prst="rect">
+            <a:avLst/>
+          </a:prstGeom>
+          <a:solidFill>
+            <a:srgbClr val="02C39A"/>
+          </a:solidFill>
+          <a:ln w="12700">
+            <a:solidFill>
+              <a:srgbClr val="02C39A"/>
+            </a:solidFill>
+            <a:prstDash val="solid"/>
+          </a:ln>
+        </p:spPr>
+      </p:sp>
+      <p:sp>
+        <p:nvSpPr>
+          <p:cNvPr id="10" name="Text 8"/>
+          <p:cNvSpPr/>
+          <p:nvPr/>
+        </p:nvSpPr>
+        <p:spPr>
+          <a:xfrm>
+            <a:off x="3566160" y="2039112"/>
+            <a:ext cx="1005840" cy="256032"/>
+          </a:xfrm>
+          <a:prstGeom prst="rect">
+            <a:avLst/>
+          </a:prstGeom>
+          <a:noFill/>
+          <a:ln/>
+        </p:spPr>
+        <p:txBody>
+          <a:bodyPr wrap="square" lIns="0" tIns="0" rIns="0" bIns="0" rtlCol="0" anchor="ctr"/>
+          <a:lstStyle/>
+          <a:p>
+            <a:pPr algn="ctr" indent="0" marL="0">
+              <a:buNone/>
+            </a:pPr>
+            <a:r>
+              <a:rPr lang="en-US" sz="900" b="1" spc="200" kern="0" dirty="0">
+                <a:solidFill>
+                  <a:srgbClr val="FFFFFF"/>
+                </a:solidFill>
+                <a:latin typeface="Calibri" pitchFamily="34" charset="0"/>
+                <a:ea typeface="Calibri" pitchFamily="34" charset="-122"/>
+                <a:cs typeface="Calibri" pitchFamily="34" charset="-120"/>
+              </a:rPr>
+              <a:t>M1</a:t>
+            </a:r>
+            <a:endParaRPr lang="en-US" sz="900" dirty="0"/>
+          </a:p>
+        </p:txBody>
+      </p:sp>
+      <p:sp>
+        <p:nvSpPr>
+          <p:cNvPr id="11" name="Shape 9"/>
+          <p:cNvSpPr/>
+          <p:nvPr/>
+        </p:nvSpPr>
+        <p:spPr>
+          <a:xfrm>
+            <a:off x="457200" y="2423160"/>
+            <a:ext cx="292608" cy="292608"/>
+          </a:xfrm>
+          <a:prstGeom prst="ellipse">
+            <a:avLst/>
+          </a:prstGeom>
+          <a:solidFill>
+            <a:srgbClr val="E8EEFC"/>
+          </a:solidFill>
+          <a:ln w="6350">
+            <a:solidFill>
+              <a:srgbClr val="CBD5E1"/>
+            </a:solidFill>
+            <a:prstDash val="solid"/>
+          </a:ln>
+        </p:spPr>
+      </p:sp>
+      <p:sp>
+        <p:nvSpPr>
+          <p:cNvPr id="12" name="Text 10"/>
+          <p:cNvSpPr/>
+          <p:nvPr/>
+        </p:nvSpPr>
+        <p:spPr>
+          <a:xfrm>
+            <a:off x="457200" y="2423160"/>
+            <a:ext cx="292608" cy="292608"/>
+          </a:xfrm>
+          <a:prstGeom prst="rect">
+            <a:avLst/>
+          </a:prstGeom>
+          <a:noFill/>
+          <a:ln/>
+        </p:spPr>
+        <p:txBody>
+          <a:bodyPr wrap="square" lIns="0" tIns="0" rIns="0" bIns="0" rtlCol="0" anchor="ctr"/>
+          <a:lstStyle/>
+          <a:p>
+            <a:pPr algn="ctr" indent="0" marL="0">
+              <a:buNone/>
+            </a:pPr>
+            <a:r>
+              <a:rPr lang="en-US" sz="1100" b="1" dirty="0">
                 <a:solidFill>
                   <a:srgbClr val="0F1B3D"/>
                 </a:solidFill>
@@ -2876,60 +3015,166 @@
                 <a:ea typeface="Calibri" pitchFamily="34" charset="-122"/>
                 <a:cs typeface="Calibri" pitchFamily="34" charset="-120"/>
               </a:rPr>
-              <a:t>Discovery › Agents UI + entity page</a:t>
-            </a:r>
-            <a:endParaRPr lang="en-US" sz="1400" dirty="0"/>
-          </a:p>
-          <a:p>
-            <a:pPr indent="0" marL="0">
-              <a:spcAft>
-                <a:spcPts val="200"/>
-              </a:spcAft>
+              <a:t>2</a:t>
+            </a:r>
+            <a:endParaRPr lang="en-US" sz="1100" dirty="0"/>
+          </a:p>
+        </p:txBody>
+      </p:sp>
+      <p:sp>
+        <p:nvSpPr>
+          <p:cNvPr id="13" name="Text 11"/>
+          <p:cNvSpPr/>
+          <p:nvPr/>
+        </p:nvSpPr>
+        <p:spPr>
+          <a:xfrm>
+            <a:off x="822960" y="2377440"/>
+            <a:ext cx="2697480" cy="411480"/>
+          </a:xfrm>
+          <a:prstGeom prst="rect">
+            <a:avLst/>
+          </a:prstGeom>
+          <a:noFill/>
+          <a:ln/>
+        </p:spPr>
+        <p:txBody>
+          <a:bodyPr wrap="square" lIns="0" tIns="0" rIns="0" bIns="0" rtlCol="0" anchor="ctr"/>
+          <a:lstStyle/>
+          <a:p>
+            <a:pPr indent="0" marL="0">
               <a:buNone/>
             </a:pPr>
             <a:r>
               <a:rPr lang="en-US" sz="1200" dirty="0">
                 <a:solidFill>
-                  <a:srgbClr val="64748B"/>
-                </a:solidFill>
-                <a:latin typeface="Calibri" pitchFamily="34" charset="0"/>
-                <a:ea typeface="Calibri" pitchFamily="34" charset="-122"/>
-                <a:cs typeface="Calibri" pitchFamily="34" charset="-120"/>
-              </a:rPr>
-              <a:t>   Inventory, ownership, model, tools, issues — all in one place.</a:t>
-            </a:r>
-            <a:endParaRPr lang="en-US" sz="1400" dirty="0"/>
-          </a:p>
-          <a:p>
-            <a:pPr indent="0" marL="0">
-              <a:spcAft>
-                <a:spcPts val="200"/>
-              </a:spcAft>
-              <a:buNone/>
-            </a:pPr>
-            <a:r>
-              <a:rPr lang="en-US" sz="600" dirty="0">
-                <a:solidFill>
-                  <a:srgbClr val="000000"/>
-                </a:solidFill>
-                <a:latin typeface="Calibri" pitchFamily="34" charset="0"/>
-                <a:ea typeface="Calibri" pitchFamily="34" charset="-122"/>
-                <a:cs typeface="Calibri" pitchFamily="34" charset="-120"/>
-              </a:rPr>
-              <a:t> </a:t>
-            </a:r>
-            <a:endParaRPr lang="en-US" sz="1400" dirty="0"/>
-          </a:p>
-          <a:p>
-            <a:pPr marL="342900" indent="-342900">
-              <a:spcAft>
-                <a:spcPts val="200"/>
-              </a:spcAft>
-              <a:buSzPct val="100000"/>
-              <a:buChar char="■"/>
-            </a:pPr>
-            <a:r>
-              <a:rPr lang="en-US" sz="1400" b="1" dirty="0">
+                  <a:srgbClr val="1A1F36"/>
+                </a:solidFill>
+                <a:latin typeface="Calibri" pitchFamily="34" charset="0"/>
+                <a:ea typeface="Calibri" pitchFamily="34" charset="-122"/>
+                <a:cs typeface="Calibri" pitchFamily="34" charset="-120"/>
+              </a:rPr>
+              <a:t>Ownership assignment</a:t>
+            </a:r>
+            <a:endParaRPr lang="en-US" sz="1200" dirty="0"/>
+          </a:p>
+        </p:txBody>
+      </p:sp>
+      <p:sp>
+        <p:nvSpPr>
+          <p:cNvPr id="14" name="Shape 12"/>
+          <p:cNvSpPr/>
+          <p:nvPr/>
+        </p:nvSpPr>
+        <p:spPr>
+          <a:xfrm>
+            <a:off x="3566160" y="2450592"/>
+            <a:ext cx="1005840" cy="256032"/>
+          </a:xfrm>
+          <a:prstGeom prst="rect">
+            <a:avLst/>
+          </a:prstGeom>
+          <a:solidFill>
+            <a:srgbClr val="02C39A"/>
+          </a:solidFill>
+          <a:ln w="12700">
+            <a:solidFill>
+              <a:srgbClr val="02C39A"/>
+            </a:solidFill>
+            <a:prstDash val="solid"/>
+          </a:ln>
+        </p:spPr>
+      </p:sp>
+      <p:sp>
+        <p:nvSpPr>
+          <p:cNvPr id="15" name="Text 13"/>
+          <p:cNvSpPr/>
+          <p:nvPr/>
+        </p:nvSpPr>
+        <p:spPr>
+          <a:xfrm>
+            <a:off x="3566160" y="2450592"/>
+            <a:ext cx="1005840" cy="256032"/>
+          </a:xfrm>
+          <a:prstGeom prst="rect">
+            <a:avLst/>
+          </a:prstGeom>
+          <a:noFill/>
+          <a:ln/>
+        </p:spPr>
+        <p:txBody>
+          <a:bodyPr wrap="square" lIns="0" tIns="0" rIns="0" bIns="0" rtlCol="0" anchor="ctr"/>
+          <a:lstStyle/>
+          <a:p>
+            <a:pPr algn="ctr" indent="0" marL="0">
+              <a:buNone/>
+            </a:pPr>
+            <a:r>
+              <a:rPr lang="en-US" sz="900" b="1" spc="200" kern="0" dirty="0">
+                <a:solidFill>
+                  <a:srgbClr val="FFFFFF"/>
+                </a:solidFill>
+                <a:latin typeface="Calibri" pitchFamily="34" charset="0"/>
+                <a:ea typeface="Calibri" pitchFamily="34" charset="-122"/>
+                <a:cs typeface="Calibri" pitchFamily="34" charset="-120"/>
+              </a:rPr>
+              <a:t>M1</a:t>
+            </a:r>
+            <a:endParaRPr lang="en-US" sz="900" dirty="0"/>
+          </a:p>
+        </p:txBody>
+      </p:sp>
+      <p:sp>
+        <p:nvSpPr>
+          <p:cNvPr id="16" name="Shape 14"/>
+          <p:cNvSpPr/>
+          <p:nvPr/>
+        </p:nvSpPr>
+        <p:spPr>
+          <a:xfrm>
+            <a:off x="457200" y="2834640"/>
+            <a:ext cx="292608" cy="292608"/>
+          </a:xfrm>
+          <a:prstGeom prst="ellipse">
+            <a:avLst/>
+          </a:prstGeom>
+          <a:solidFill>
+            <a:srgbClr val="E8EEFC"/>
+          </a:solidFill>
+          <a:ln w="6350">
+            <a:solidFill>
+              <a:srgbClr val="CBD5E1"/>
+            </a:solidFill>
+            <a:prstDash val="solid"/>
+          </a:ln>
+        </p:spPr>
+      </p:sp>
+      <p:sp>
+        <p:nvSpPr>
+          <p:cNvPr id="17" name="Text 15"/>
+          <p:cNvSpPr/>
+          <p:nvPr/>
+        </p:nvSpPr>
+        <p:spPr>
+          <a:xfrm>
+            <a:off x="457200" y="2834640"/>
+            <a:ext cx="292608" cy="292608"/>
+          </a:xfrm>
+          <a:prstGeom prst="rect">
+            <a:avLst/>
+          </a:prstGeom>
+          <a:noFill/>
+          <a:ln/>
+        </p:spPr>
+        <p:txBody>
+          <a:bodyPr wrap="square" lIns="0" tIns="0" rIns="0" bIns="0" rtlCol="0" anchor="ctr"/>
+          <a:lstStyle/>
+          <a:p>
+            <a:pPr algn="ctr" indent="0" marL="0">
+              <a:buNone/>
+            </a:pPr>
+            <a:r>
+              <a:rPr lang="en-US" sz="1100" b="1" dirty="0">
                 <a:solidFill>
                   <a:srgbClr val="0F1B3D"/>
                 </a:solidFill>
@@ -2937,65 +3182,86 @@
                 <a:ea typeface="Calibri" pitchFamily="34" charset="-122"/>
                 <a:cs typeface="Calibri" pitchFamily="34" charset="-120"/>
               </a:rPr>
-              <a:t>Built-in issues</a:t>
-            </a:r>
-            <a:endParaRPr lang="en-US" sz="1400" dirty="0"/>
-          </a:p>
-          <a:p>
-            <a:pPr indent="0" marL="0">
-              <a:spcAft>
-                <a:spcPts val="200"/>
-              </a:spcAft>
+              <a:t>3</a:t>
+            </a:r>
+            <a:endParaRPr lang="en-US" sz="1100" dirty="0"/>
+          </a:p>
+        </p:txBody>
+      </p:sp>
+      <p:sp>
+        <p:nvSpPr>
+          <p:cNvPr id="18" name="Text 16"/>
+          <p:cNvSpPr/>
+          <p:nvPr/>
+        </p:nvSpPr>
+        <p:spPr>
+          <a:xfrm>
+            <a:off x="822960" y="2788920"/>
+            <a:ext cx="2697480" cy="411480"/>
+          </a:xfrm>
+          <a:prstGeom prst="rect">
+            <a:avLst/>
+          </a:prstGeom>
+          <a:noFill/>
+          <a:ln/>
+        </p:spPr>
+        <p:txBody>
+          <a:bodyPr wrap="square" lIns="0" tIns="0" rIns="0" bIns="0" rtlCol="0" anchor="ctr"/>
+          <a:lstStyle/>
+          <a:p>
+            <a:pPr indent="0" marL="0">
               <a:buNone/>
             </a:pPr>
             <a:r>
               <a:rPr lang="en-US" sz="1200" dirty="0">
                 <a:solidFill>
-                  <a:srgbClr val="64748B"/>
-                </a:solidFill>
-                <a:latin typeface="Calibri" pitchFamily="34" charset="0"/>
-                <a:ea typeface="Calibri" pitchFamily="34" charset="-122"/>
-                <a:cs typeface="Calibri" pitchFamily="34" charset="-120"/>
-              </a:rPr>
-              <a:t>   AGENT_EXCESSIVE_PERMISSIONS · AGENT_OWNER_OFFBOARDED.</a:t>
-            </a:r>
-            <a:endParaRPr lang="en-US" sz="1400" dirty="0"/>
-          </a:p>
-        </p:txBody>
-      </p:sp>
-      <p:pic>
-        <p:nvPicPr>
-          <p:cNvPr id="6" name="Image 0" descr="/tmp/mor-pics/slide12_160.png">    </p:cNvPr>
-          <p:cNvPicPr>
-            <a:picLocks noChangeAspect="1"/>
-          </p:cNvPicPr>
-          <p:nvPr/>
-        </p:nvPicPr>
-        <p:blipFill>
-          <a:blip r:embed="rId1"/>
-          <a:srcRect l="0" r="0" t="0" b="0"/>
-          <a:stretch/>
-        </p:blipFill>
-        <p:spPr>
-          <a:xfrm>
-            <a:off x="4754880" y="1691640"/>
-            <a:ext cx="3931920" cy="2468880"/>
-          </a:xfrm>
-          <a:prstGeom prst="rect">
-            <a:avLst/>
-          </a:prstGeom>
-        </p:spPr>
-      </p:pic>
-      <p:sp>
-        <p:nvSpPr>
-          <p:cNvPr id="7" name="Text 4"/>
-          <p:cNvSpPr/>
-          <p:nvPr/>
-        </p:nvSpPr>
-        <p:spPr>
-          <a:xfrm>
-            <a:off x="4754880" y="4160520"/>
-            <a:ext cx="3931920" cy="228600"/>
+                  <a:srgbClr val="1A1F36"/>
+                </a:solidFill>
+                <a:latin typeface="Calibri" pitchFamily="34" charset="0"/>
+                <a:ea typeface="Calibri" pitchFamily="34" charset="-122"/>
+                <a:cs typeface="Calibri" pitchFamily="34" charset="-120"/>
+              </a:rPr>
+              <a:t>Authentication</a:t>
+            </a:r>
+            <a:endParaRPr lang="en-US" sz="1200" dirty="0"/>
+          </a:p>
+        </p:txBody>
+      </p:sp>
+      <p:sp>
+        <p:nvSpPr>
+          <p:cNvPr id="19" name="Shape 17"/>
+          <p:cNvSpPr/>
+          <p:nvPr/>
+        </p:nvSpPr>
+        <p:spPr>
+          <a:xfrm>
+            <a:off x="3566160" y="2862072"/>
+            <a:ext cx="1005840" cy="256032"/>
+          </a:xfrm>
+          <a:prstGeom prst="rect">
+            <a:avLst/>
+          </a:prstGeom>
+          <a:solidFill>
+            <a:srgbClr val="F59E0B"/>
+          </a:solidFill>
+          <a:ln w="12700">
+            <a:solidFill>
+              <a:srgbClr val="F59E0B"/>
+            </a:solidFill>
+            <a:prstDash val="solid"/>
+          </a:ln>
+        </p:spPr>
+      </p:sp>
+      <p:sp>
+        <p:nvSpPr>
+          <p:cNvPr id="20" name="Text 18"/>
+          <p:cNvSpPr/>
+          <p:nvPr/>
+        </p:nvSpPr>
+        <p:spPr>
+          <a:xfrm>
+            <a:off x="3566160" y="2862072"/>
+            <a:ext cx="1005840" cy="256032"/>
           </a:xfrm>
           <a:prstGeom prst="rect">
             <a:avLst/>
@@ -3011,15 +3277,15 @@
               <a:buNone/>
             </a:pPr>
             <a:r>
-              <a:rPr lang="en-US" sz="900" i="1" dirty="0">
-                <a:solidFill>
-                  <a:srgbClr val="64748B"/>
-                </a:solidFill>
-                <a:latin typeface="Calibri" pitchFamily="34" charset="0"/>
-                <a:ea typeface="Calibri" pitchFamily="34" charset="-122"/>
-                <a:cs typeface="Calibri" pitchFamily="34" charset="-120"/>
-              </a:rPr>
-              <a:t>Shipped: release-notes-assistant agent detail page</a:t>
+              <a:rPr lang="en-US" sz="900" b="1" spc="200" kern="0" dirty="0">
+                <a:solidFill>
+                  <a:srgbClr val="FFFFFF"/>
+                </a:solidFill>
+                <a:latin typeface="Calibri" pitchFamily="34" charset="0"/>
+                <a:ea typeface="Calibri" pitchFamily="34" charset="-122"/>
+                <a:cs typeface="Calibri" pitchFamily="34" charset="-120"/>
+              </a:rPr>
+              <a:t>M2</a:t>
             </a:r>
             <a:endParaRPr lang="en-US" sz="900" dirty="0"/>
           </a:p>
@@ -3027,14 +3293,117 @@
       </p:sp>
       <p:sp>
         <p:nvSpPr>
-          <p:cNvPr id="8" name="Shape 5"/>
-          <p:cNvSpPr/>
-          <p:nvPr/>
-        </p:nvSpPr>
-        <p:spPr>
-          <a:xfrm>
-            <a:off x="457200" y="4526280"/>
-            <a:ext cx="8229600" cy="411480"/>
+          <p:cNvPr id="21" name="Shape 19"/>
+          <p:cNvSpPr/>
+          <p:nvPr/>
+        </p:nvSpPr>
+        <p:spPr>
+          <a:xfrm>
+            <a:off x="457200" y="3246120"/>
+            <a:ext cx="292608" cy="292608"/>
+          </a:xfrm>
+          <a:prstGeom prst="ellipse">
+            <a:avLst/>
+          </a:prstGeom>
+          <a:solidFill>
+            <a:srgbClr val="E8EEFC"/>
+          </a:solidFill>
+          <a:ln w="6350">
+            <a:solidFill>
+              <a:srgbClr val="CBD5E1"/>
+            </a:solidFill>
+            <a:prstDash val="solid"/>
+          </a:ln>
+        </p:spPr>
+      </p:sp>
+      <p:sp>
+        <p:nvSpPr>
+          <p:cNvPr id="22" name="Text 20"/>
+          <p:cNvSpPr/>
+          <p:nvPr/>
+        </p:nvSpPr>
+        <p:spPr>
+          <a:xfrm>
+            <a:off x="457200" y="3246120"/>
+            <a:ext cx="292608" cy="292608"/>
+          </a:xfrm>
+          <a:prstGeom prst="rect">
+            <a:avLst/>
+          </a:prstGeom>
+          <a:noFill/>
+          <a:ln/>
+        </p:spPr>
+        <p:txBody>
+          <a:bodyPr wrap="square" lIns="0" tIns="0" rIns="0" bIns="0" rtlCol="0" anchor="ctr"/>
+          <a:lstStyle/>
+          <a:p>
+            <a:pPr algn="ctr" indent="0" marL="0">
+              <a:buNone/>
+            </a:pPr>
+            <a:r>
+              <a:rPr lang="en-US" sz="1100" b="1" dirty="0">
+                <a:solidFill>
+                  <a:srgbClr val="0F1B3D"/>
+                </a:solidFill>
+                <a:latin typeface="Calibri" pitchFamily="34" charset="0"/>
+                <a:ea typeface="Calibri" pitchFamily="34" charset="-122"/>
+                <a:cs typeface="Calibri" pitchFamily="34" charset="-120"/>
+              </a:rPr>
+              <a:t>4</a:t>
+            </a:r>
+            <a:endParaRPr lang="en-US" sz="1100" dirty="0"/>
+          </a:p>
+        </p:txBody>
+      </p:sp>
+      <p:sp>
+        <p:nvSpPr>
+          <p:cNvPr id="23" name="Text 21"/>
+          <p:cNvSpPr/>
+          <p:nvPr/>
+        </p:nvSpPr>
+        <p:spPr>
+          <a:xfrm>
+            <a:off x="822960" y="3200400"/>
+            <a:ext cx="2697480" cy="411480"/>
+          </a:xfrm>
+          <a:prstGeom prst="rect">
+            <a:avLst/>
+          </a:prstGeom>
+          <a:noFill/>
+          <a:ln/>
+        </p:spPr>
+        <p:txBody>
+          <a:bodyPr wrap="square" lIns="0" tIns="0" rIns="0" bIns="0" rtlCol="0" anchor="ctr"/>
+          <a:lstStyle/>
+          <a:p>
+            <a:pPr indent="0" marL="0">
+              <a:buNone/>
+            </a:pPr>
+            <a:r>
+              <a:rPr lang="en-US" sz="1200" dirty="0">
+                <a:solidFill>
+                  <a:srgbClr val="1A1F36"/>
+                </a:solidFill>
+                <a:latin typeface="Calibri" pitchFamily="34" charset="0"/>
+                <a:ea typeface="Calibri" pitchFamily="34" charset="-122"/>
+                <a:cs typeface="Calibri" pitchFamily="34" charset="-120"/>
+              </a:rPr>
+              <a:t>Authorization &amp; delegation</a:t>
+            </a:r>
+            <a:endParaRPr lang="en-US" sz="1200" dirty="0"/>
+          </a:p>
+        </p:txBody>
+      </p:sp>
+      <p:sp>
+        <p:nvSpPr>
+          <p:cNvPr id="24" name="Shape 22"/>
+          <p:cNvSpPr/>
+          <p:nvPr/>
+        </p:nvSpPr>
+        <p:spPr>
+          <a:xfrm>
+            <a:off x="3566160" y="3273552"/>
+            <a:ext cx="1005840" cy="256032"/>
           </a:xfrm>
           <a:prstGeom prst="rect">
             <a:avLst/>
@@ -3052,30 +3421,1071 @@
       </p:sp>
       <p:sp>
         <p:nvSpPr>
-          <p:cNvPr id="9" name="Text 6"/>
-          <p:cNvSpPr/>
-          <p:nvPr/>
-        </p:nvSpPr>
-        <p:spPr>
-          <a:xfrm>
-            <a:off x="640080" y="4526280"/>
-            <a:ext cx="8046720" cy="411480"/>
-          </a:xfrm>
-          <a:prstGeom prst="rect">
-            <a:avLst/>
-          </a:prstGeom>
-          <a:noFill/>
-          <a:ln/>
-        </p:spPr>
-        <p:txBody>
-          <a:bodyPr wrap="square" lIns="0" tIns="0" rIns="0" bIns="0" rtlCol="0" anchor="ctr"/>
-          <a:lstStyle/>
-          <a:p>
-            <a:pPr indent="0" marL="0">
-              <a:buNone/>
-            </a:pPr>
-            <a:r>
-              <a:rPr lang="en-US" sz="1100" b="1" spc="200" kern="0" dirty="0">
+          <p:cNvPr id="25" name="Text 23"/>
+          <p:cNvSpPr/>
+          <p:nvPr/>
+        </p:nvSpPr>
+        <p:spPr>
+          <a:xfrm>
+            <a:off x="3566160" y="3273552"/>
+            <a:ext cx="1005840" cy="256032"/>
+          </a:xfrm>
+          <a:prstGeom prst="rect">
+            <a:avLst/>
+          </a:prstGeom>
+          <a:noFill/>
+          <a:ln/>
+        </p:spPr>
+        <p:txBody>
+          <a:bodyPr wrap="square" lIns="0" tIns="0" rIns="0" bIns="0" rtlCol="0" anchor="ctr"/>
+          <a:lstStyle/>
+          <a:p>
+            <a:pPr algn="ctr" indent="0" marL="0">
+              <a:buNone/>
+            </a:pPr>
+            <a:r>
+              <a:rPr lang="en-US" sz="900" b="1" spc="200" kern="0" dirty="0">
+                <a:solidFill>
+                  <a:srgbClr val="FFFFFF"/>
+                </a:solidFill>
+                <a:latin typeface="Calibri" pitchFamily="34" charset="0"/>
+                <a:ea typeface="Calibri" pitchFamily="34" charset="-122"/>
+                <a:cs typeface="Calibri" pitchFamily="34" charset="-120"/>
+              </a:rPr>
+              <a:t>P0</a:t>
+            </a:r>
+            <a:endParaRPr lang="en-US" sz="900" dirty="0"/>
+          </a:p>
+        </p:txBody>
+      </p:sp>
+      <p:sp>
+        <p:nvSpPr>
+          <p:cNvPr id="26" name="Shape 24"/>
+          <p:cNvSpPr/>
+          <p:nvPr/>
+        </p:nvSpPr>
+        <p:spPr>
+          <a:xfrm>
+            <a:off x="457200" y="3657600"/>
+            <a:ext cx="292608" cy="292608"/>
+          </a:xfrm>
+          <a:prstGeom prst="ellipse">
+            <a:avLst/>
+          </a:prstGeom>
+          <a:solidFill>
+            <a:srgbClr val="E8EEFC"/>
+          </a:solidFill>
+          <a:ln w="6350">
+            <a:solidFill>
+              <a:srgbClr val="CBD5E1"/>
+            </a:solidFill>
+            <a:prstDash val="solid"/>
+          </a:ln>
+        </p:spPr>
+      </p:sp>
+      <p:sp>
+        <p:nvSpPr>
+          <p:cNvPr id="27" name="Text 25"/>
+          <p:cNvSpPr/>
+          <p:nvPr/>
+        </p:nvSpPr>
+        <p:spPr>
+          <a:xfrm>
+            <a:off x="457200" y="3657600"/>
+            <a:ext cx="292608" cy="292608"/>
+          </a:xfrm>
+          <a:prstGeom prst="rect">
+            <a:avLst/>
+          </a:prstGeom>
+          <a:noFill/>
+          <a:ln/>
+        </p:spPr>
+        <p:txBody>
+          <a:bodyPr wrap="square" lIns="0" tIns="0" rIns="0" bIns="0" rtlCol="0" anchor="ctr"/>
+          <a:lstStyle/>
+          <a:p>
+            <a:pPr algn="ctr" indent="0" marL="0">
+              <a:buNone/>
+            </a:pPr>
+            <a:r>
+              <a:rPr lang="en-US" sz="1100" b="1" dirty="0">
+                <a:solidFill>
+                  <a:srgbClr val="0F1B3D"/>
+                </a:solidFill>
+                <a:latin typeface="Calibri" pitchFamily="34" charset="0"/>
+                <a:ea typeface="Calibri" pitchFamily="34" charset="-122"/>
+                <a:cs typeface="Calibri" pitchFamily="34" charset="-120"/>
+              </a:rPr>
+              <a:t>5</a:t>
+            </a:r>
+            <a:endParaRPr lang="en-US" sz="1100" dirty="0"/>
+          </a:p>
+        </p:txBody>
+      </p:sp>
+      <p:sp>
+        <p:nvSpPr>
+          <p:cNvPr id="28" name="Text 26"/>
+          <p:cNvSpPr/>
+          <p:nvPr/>
+        </p:nvSpPr>
+        <p:spPr>
+          <a:xfrm>
+            <a:off x="822960" y="3611880"/>
+            <a:ext cx="2697480" cy="411480"/>
+          </a:xfrm>
+          <a:prstGeom prst="rect">
+            <a:avLst/>
+          </a:prstGeom>
+          <a:noFill/>
+          <a:ln/>
+        </p:spPr>
+        <p:txBody>
+          <a:bodyPr wrap="square" lIns="0" tIns="0" rIns="0" bIns="0" rtlCol="0" anchor="ctr"/>
+          <a:lstStyle/>
+          <a:p>
+            <a:pPr indent="0" marL="0">
+              <a:buNone/>
+            </a:pPr>
+            <a:r>
+              <a:rPr lang="en-US" sz="1200" dirty="0">
+                <a:solidFill>
+                  <a:srgbClr val="1A1F36"/>
+                </a:solidFill>
+                <a:latin typeface="Calibri" pitchFamily="34" charset="0"/>
+                <a:ea typeface="Calibri" pitchFamily="34" charset="-122"/>
+                <a:cs typeface="Calibri" pitchFamily="34" charset="-120"/>
+              </a:rPr>
+              <a:t>Human oversight &amp; approval</a:t>
+            </a:r>
+            <a:endParaRPr lang="en-US" sz="1200" dirty="0"/>
+          </a:p>
+        </p:txBody>
+      </p:sp>
+      <p:sp>
+        <p:nvSpPr>
+          <p:cNvPr id="29" name="Shape 27"/>
+          <p:cNvSpPr/>
+          <p:nvPr/>
+        </p:nvSpPr>
+        <p:spPr>
+          <a:xfrm>
+            <a:off x="3566160" y="3685032"/>
+            <a:ext cx="1005840" cy="256032"/>
+          </a:xfrm>
+          <a:prstGeom prst="rect">
+            <a:avLst/>
+          </a:prstGeom>
+          <a:solidFill>
+            <a:srgbClr val="64748B"/>
+          </a:solidFill>
+          <a:ln w="12700">
+            <a:solidFill>
+              <a:srgbClr val="64748B"/>
+            </a:solidFill>
+            <a:prstDash val="solid"/>
+          </a:ln>
+        </p:spPr>
+      </p:sp>
+      <p:sp>
+        <p:nvSpPr>
+          <p:cNvPr id="30" name="Text 28"/>
+          <p:cNvSpPr/>
+          <p:nvPr/>
+        </p:nvSpPr>
+        <p:spPr>
+          <a:xfrm>
+            <a:off x="3566160" y="3685032"/>
+            <a:ext cx="1005840" cy="256032"/>
+          </a:xfrm>
+          <a:prstGeom prst="rect">
+            <a:avLst/>
+          </a:prstGeom>
+          <a:noFill/>
+          <a:ln/>
+        </p:spPr>
+        <p:txBody>
+          <a:bodyPr wrap="square" lIns="0" tIns="0" rIns="0" bIns="0" rtlCol="0" anchor="ctr"/>
+          <a:lstStyle/>
+          <a:p>
+            <a:pPr algn="ctr" indent="0" marL="0">
+              <a:buNone/>
+            </a:pPr>
+            <a:r>
+              <a:rPr lang="en-US" sz="900" b="1" spc="200" kern="0" dirty="0">
+                <a:solidFill>
+                  <a:srgbClr val="FFFFFF"/>
+                </a:solidFill>
+                <a:latin typeface="Calibri" pitchFamily="34" charset="0"/>
+                <a:ea typeface="Calibri" pitchFamily="34" charset="-122"/>
+                <a:cs typeface="Calibri" pitchFamily="34" charset="-120"/>
+              </a:rPr>
+              <a:t>Post-P0</a:t>
+            </a:r>
+            <a:endParaRPr lang="en-US" sz="900" dirty="0"/>
+          </a:p>
+        </p:txBody>
+      </p:sp>
+      <p:sp>
+        <p:nvSpPr>
+          <p:cNvPr id="31" name="Shape 29"/>
+          <p:cNvSpPr/>
+          <p:nvPr/>
+        </p:nvSpPr>
+        <p:spPr>
+          <a:xfrm>
+            <a:off x="4800600" y="2011680"/>
+            <a:ext cx="292608" cy="292608"/>
+          </a:xfrm>
+          <a:prstGeom prst="ellipse">
+            <a:avLst/>
+          </a:prstGeom>
+          <a:solidFill>
+            <a:srgbClr val="E8EEFC"/>
+          </a:solidFill>
+          <a:ln w="6350">
+            <a:solidFill>
+              <a:srgbClr val="CBD5E1"/>
+            </a:solidFill>
+            <a:prstDash val="solid"/>
+          </a:ln>
+        </p:spPr>
+      </p:sp>
+      <p:sp>
+        <p:nvSpPr>
+          <p:cNvPr id="32" name="Text 30"/>
+          <p:cNvSpPr/>
+          <p:nvPr/>
+        </p:nvSpPr>
+        <p:spPr>
+          <a:xfrm>
+            <a:off x="4800600" y="2011680"/>
+            <a:ext cx="292608" cy="292608"/>
+          </a:xfrm>
+          <a:prstGeom prst="rect">
+            <a:avLst/>
+          </a:prstGeom>
+          <a:noFill/>
+          <a:ln/>
+        </p:spPr>
+        <p:txBody>
+          <a:bodyPr wrap="square" lIns="0" tIns="0" rIns="0" bIns="0" rtlCol="0" anchor="ctr"/>
+          <a:lstStyle/>
+          <a:p>
+            <a:pPr algn="ctr" indent="0" marL="0">
+              <a:buNone/>
+            </a:pPr>
+            <a:r>
+              <a:rPr lang="en-US" sz="1100" b="1" dirty="0">
+                <a:solidFill>
+                  <a:srgbClr val="0F1B3D"/>
+                </a:solidFill>
+                <a:latin typeface="Calibri" pitchFamily="34" charset="0"/>
+                <a:ea typeface="Calibri" pitchFamily="34" charset="-122"/>
+                <a:cs typeface="Calibri" pitchFamily="34" charset="-120"/>
+              </a:rPr>
+              <a:t>6</a:t>
+            </a:r>
+            <a:endParaRPr lang="en-US" sz="1100" dirty="0"/>
+          </a:p>
+        </p:txBody>
+      </p:sp>
+      <p:sp>
+        <p:nvSpPr>
+          <p:cNvPr id="33" name="Text 31"/>
+          <p:cNvSpPr/>
+          <p:nvPr/>
+        </p:nvSpPr>
+        <p:spPr>
+          <a:xfrm>
+            <a:off x="5166360" y="1965960"/>
+            <a:ext cx="2697480" cy="411480"/>
+          </a:xfrm>
+          <a:prstGeom prst="rect">
+            <a:avLst/>
+          </a:prstGeom>
+          <a:noFill/>
+          <a:ln/>
+        </p:spPr>
+        <p:txBody>
+          <a:bodyPr wrap="square" lIns="0" tIns="0" rIns="0" bIns="0" rtlCol="0" anchor="ctr"/>
+          <a:lstStyle/>
+          <a:p>
+            <a:pPr indent="0" marL="0">
+              <a:buNone/>
+            </a:pPr>
+            <a:r>
+              <a:rPr lang="en-US" sz="1200" dirty="0">
+                <a:solidFill>
+                  <a:srgbClr val="1A1F36"/>
+                </a:solidFill>
+                <a:latin typeface="Calibri" pitchFamily="34" charset="0"/>
+                <a:ea typeface="Calibri" pitchFamily="34" charset="-122"/>
+                <a:cs typeface="Calibri" pitchFamily="34" charset="-120"/>
+              </a:rPr>
+              <a:t>Resource policy enforcement</a:t>
+            </a:r>
+            <a:endParaRPr lang="en-US" sz="1200" dirty="0"/>
+          </a:p>
+        </p:txBody>
+      </p:sp>
+      <p:sp>
+        <p:nvSpPr>
+          <p:cNvPr id="34" name="Shape 32"/>
+          <p:cNvSpPr/>
+          <p:nvPr/>
+        </p:nvSpPr>
+        <p:spPr>
+          <a:xfrm>
+            <a:off x="7909560" y="2039112"/>
+            <a:ext cx="1005840" cy="256032"/>
+          </a:xfrm>
+          <a:prstGeom prst="rect">
+            <a:avLst/>
+          </a:prstGeom>
+          <a:solidFill>
+            <a:srgbClr val="0F1B3D"/>
+          </a:solidFill>
+          <a:ln w="12700">
+            <a:solidFill>
+              <a:srgbClr val="0F1B3D"/>
+            </a:solidFill>
+            <a:prstDash val="solid"/>
+          </a:ln>
+        </p:spPr>
+      </p:sp>
+      <p:sp>
+        <p:nvSpPr>
+          <p:cNvPr id="35" name="Text 33"/>
+          <p:cNvSpPr/>
+          <p:nvPr/>
+        </p:nvSpPr>
+        <p:spPr>
+          <a:xfrm>
+            <a:off x="7909560" y="2039112"/>
+            <a:ext cx="1005840" cy="256032"/>
+          </a:xfrm>
+          <a:prstGeom prst="rect">
+            <a:avLst/>
+          </a:prstGeom>
+          <a:noFill/>
+          <a:ln/>
+        </p:spPr>
+        <p:txBody>
+          <a:bodyPr wrap="square" lIns="0" tIns="0" rIns="0" bIns="0" rtlCol="0" anchor="ctr"/>
+          <a:lstStyle/>
+          <a:p>
+            <a:pPr algn="ctr" indent="0" marL="0">
+              <a:buNone/>
+            </a:pPr>
+            <a:r>
+              <a:rPr lang="en-US" sz="900" b="1" spc="200" kern="0" dirty="0">
+                <a:solidFill>
+                  <a:srgbClr val="FFFFFF"/>
+                </a:solidFill>
+                <a:latin typeface="Calibri" pitchFamily="34" charset="0"/>
+                <a:ea typeface="Calibri" pitchFamily="34" charset="-122"/>
+                <a:cs typeface="Calibri" pitchFamily="34" charset="-120"/>
+              </a:rPr>
+              <a:t>P0</a:t>
+            </a:r>
+            <a:endParaRPr lang="en-US" sz="900" dirty="0"/>
+          </a:p>
+        </p:txBody>
+      </p:sp>
+      <p:sp>
+        <p:nvSpPr>
+          <p:cNvPr id="36" name="Shape 34"/>
+          <p:cNvSpPr/>
+          <p:nvPr/>
+        </p:nvSpPr>
+        <p:spPr>
+          <a:xfrm>
+            <a:off x="4800600" y="2423160"/>
+            <a:ext cx="292608" cy="292608"/>
+          </a:xfrm>
+          <a:prstGeom prst="ellipse">
+            <a:avLst/>
+          </a:prstGeom>
+          <a:solidFill>
+            <a:srgbClr val="E8EEFC"/>
+          </a:solidFill>
+          <a:ln w="6350">
+            <a:solidFill>
+              <a:srgbClr val="CBD5E1"/>
+            </a:solidFill>
+            <a:prstDash val="solid"/>
+          </a:ln>
+        </p:spPr>
+      </p:sp>
+      <p:sp>
+        <p:nvSpPr>
+          <p:cNvPr id="37" name="Text 35"/>
+          <p:cNvSpPr/>
+          <p:nvPr/>
+        </p:nvSpPr>
+        <p:spPr>
+          <a:xfrm>
+            <a:off x="4800600" y="2423160"/>
+            <a:ext cx="292608" cy="292608"/>
+          </a:xfrm>
+          <a:prstGeom prst="rect">
+            <a:avLst/>
+          </a:prstGeom>
+          <a:noFill/>
+          <a:ln/>
+        </p:spPr>
+        <p:txBody>
+          <a:bodyPr wrap="square" lIns="0" tIns="0" rIns="0" bIns="0" rtlCol="0" anchor="ctr"/>
+          <a:lstStyle/>
+          <a:p>
+            <a:pPr algn="ctr" indent="0" marL="0">
+              <a:buNone/>
+            </a:pPr>
+            <a:r>
+              <a:rPr lang="en-US" sz="1100" b="1" dirty="0">
+                <a:solidFill>
+                  <a:srgbClr val="0F1B3D"/>
+                </a:solidFill>
+                <a:latin typeface="Calibri" pitchFamily="34" charset="0"/>
+                <a:ea typeface="Calibri" pitchFamily="34" charset="-122"/>
+                <a:cs typeface="Calibri" pitchFamily="34" charset="-120"/>
+              </a:rPr>
+              <a:t>7</a:t>
+            </a:r>
+            <a:endParaRPr lang="en-US" sz="1100" dirty="0"/>
+          </a:p>
+        </p:txBody>
+      </p:sp>
+      <p:sp>
+        <p:nvSpPr>
+          <p:cNvPr id="38" name="Text 36"/>
+          <p:cNvSpPr/>
+          <p:nvPr/>
+        </p:nvSpPr>
+        <p:spPr>
+          <a:xfrm>
+            <a:off x="5166360" y="2377440"/>
+            <a:ext cx="2697480" cy="411480"/>
+          </a:xfrm>
+          <a:prstGeom prst="rect">
+            <a:avLst/>
+          </a:prstGeom>
+          <a:noFill/>
+          <a:ln/>
+        </p:spPr>
+        <p:txBody>
+          <a:bodyPr wrap="square" lIns="0" tIns="0" rIns="0" bIns="0" rtlCol="0" anchor="ctr"/>
+          <a:lstStyle/>
+          <a:p>
+            <a:pPr indent="0" marL="0">
+              <a:buNone/>
+            </a:pPr>
+            <a:r>
+              <a:rPr lang="en-US" sz="1200" dirty="0">
+                <a:solidFill>
+                  <a:srgbClr val="1A1F36"/>
+                </a:solidFill>
+                <a:latin typeface="Calibri" pitchFamily="34" charset="0"/>
+                <a:ea typeface="Calibri" pitchFamily="34" charset="-122"/>
+                <a:cs typeface="Calibri" pitchFamily="34" charset="-120"/>
+              </a:rPr>
+              <a:t>Credential lifecycle</a:t>
+            </a:r>
+            <a:endParaRPr lang="en-US" sz="1200" dirty="0"/>
+          </a:p>
+        </p:txBody>
+      </p:sp>
+      <p:sp>
+        <p:nvSpPr>
+          <p:cNvPr id="39" name="Shape 37"/>
+          <p:cNvSpPr/>
+          <p:nvPr/>
+        </p:nvSpPr>
+        <p:spPr>
+          <a:xfrm>
+            <a:off x="7909560" y="2450592"/>
+            <a:ext cx="1005840" cy="256032"/>
+          </a:xfrm>
+          <a:prstGeom prst="rect">
+            <a:avLst/>
+          </a:prstGeom>
+          <a:solidFill>
+            <a:srgbClr val="64748B"/>
+          </a:solidFill>
+          <a:ln w="12700">
+            <a:solidFill>
+              <a:srgbClr val="64748B"/>
+            </a:solidFill>
+            <a:prstDash val="solid"/>
+          </a:ln>
+        </p:spPr>
+      </p:sp>
+      <p:sp>
+        <p:nvSpPr>
+          <p:cNvPr id="40" name="Text 38"/>
+          <p:cNvSpPr/>
+          <p:nvPr/>
+        </p:nvSpPr>
+        <p:spPr>
+          <a:xfrm>
+            <a:off x="7909560" y="2450592"/>
+            <a:ext cx="1005840" cy="256032"/>
+          </a:xfrm>
+          <a:prstGeom prst="rect">
+            <a:avLst/>
+          </a:prstGeom>
+          <a:noFill/>
+          <a:ln/>
+        </p:spPr>
+        <p:txBody>
+          <a:bodyPr wrap="square" lIns="0" tIns="0" rIns="0" bIns="0" rtlCol="0" anchor="ctr"/>
+          <a:lstStyle/>
+          <a:p>
+            <a:pPr algn="ctr" indent="0" marL="0">
+              <a:buNone/>
+            </a:pPr>
+            <a:r>
+              <a:rPr lang="en-US" sz="900" b="1" spc="200" kern="0" dirty="0">
+                <a:solidFill>
+                  <a:srgbClr val="FFFFFF"/>
+                </a:solidFill>
+                <a:latin typeface="Calibri" pitchFamily="34" charset="0"/>
+                <a:ea typeface="Calibri" pitchFamily="34" charset="-122"/>
+                <a:cs typeface="Calibri" pitchFamily="34" charset="-120"/>
+              </a:rPr>
+              <a:t>Post-P0</a:t>
+            </a:r>
+            <a:endParaRPr lang="en-US" sz="900" dirty="0"/>
+          </a:p>
+        </p:txBody>
+      </p:sp>
+      <p:sp>
+        <p:nvSpPr>
+          <p:cNvPr id="41" name="Shape 39"/>
+          <p:cNvSpPr/>
+          <p:nvPr/>
+        </p:nvSpPr>
+        <p:spPr>
+          <a:xfrm>
+            <a:off x="4800600" y="2834640"/>
+            <a:ext cx="292608" cy="292608"/>
+          </a:xfrm>
+          <a:prstGeom prst="ellipse">
+            <a:avLst/>
+          </a:prstGeom>
+          <a:solidFill>
+            <a:srgbClr val="E8EEFC"/>
+          </a:solidFill>
+          <a:ln w="6350">
+            <a:solidFill>
+              <a:srgbClr val="CBD5E1"/>
+            </a:solidFill>
+            <a:prstDash val="solid"/>
+          </a:ln>
+        </p:spPr>
+      </p:sp>
+      <p:sp>
+        <p:nvSpPr>
+          <p:cNvPr id="42" name="Text 40"/>
+          <p:cNvSpPr/>
+          <p:nvPr/>
+        </p:nvSpPr>
+        <p:spPr>
+          <a:xfrm>
+            <a:off x="4800600" y="2834640"/>
+            <a:ext cx="292608" cy="292608"/>
+          </a:xfrm>
+          <a:prstGeom prst="rect">
+            <a:avLst/>
+          </a:prstGeom>
+          <a:noFill/>
+          <a:ln/>
+        </p:spPr>
+        <p:txBody>
+          <a:bodyPr wrap="square" lIns="0" tIns="0" rIns="0" bIns="0" rtlCol="0" anchor="ctr"/>
+          <a:lstStyle/>
+          <a:p>
+            <a:pPr algn="ctr" indent="0" marL="0">
+              <a:buNone/>
+            </a:pPr>
+            <a:r>
+              <a:rPr lang="en-US" sz="1100" b="1" dirty="0">
+                <a:solidFill>
+                  <a:srgbClr val="0F1B3D"/>
+                </a:solidFill>
+                <a:latin typeface="Calibri" pitchFamily="34" charset="0"/>
+                <a:ea typeface="Calibri" pitchFamily="34" charset="-122"/>
+                <a:cs typeface="Calibri" pitchFamily="34" charset="-120"/>
+              </a:rPr>
+              <a:t>8</a:t>
+            </a:r>
+            <a:endParaRPr lang="en-US" sz="1100" dirty="0"/>
+          </a:p>
+        </p:txBody>
+      </p:sp>
+      <p:sp>
+        <p:nvSpPr>
+          <p:cNvPr id="43" name="Text 41"/>
+          <p:cNvSpPr/>
+          <p:nvPr/>
+        </p:nvSpPr>
+        <p:spPr>
+          <a:xfrm>
+            <a:off x="5166360" y="2788920"/>
+            <a:ext cx="2697480" cy="411480"/>
+          </a:xfrm>
+          <a:prstGeom prst="rect">
+            <a:avLst/>
+          </a:prstGeom>
+          <a:noFill/>
+          <a:ln/>
+        </p:spPr>
+        <p:txBody>
+          <a:bodyPr wrap="square" lIns="0" tIns="0" rIns="0" bIns="0" rtlCol="0" anchor="ctr"/>
+          <a:lstStyle/>
+          <a:p>
+            <a:pPr indent="0" marL="0">
+              <a:buNone/>
+            </a:pPr>
+            <a:r>
+              <a:rPr lang="en-US" sz="1200" dirty="0">
+                <a:solidFill>
+                  <a:srgbClr val="1A1F36"/>
+                </a:solidFill>
+                <a:latin typeface="Calibri" pitchFamily="34" charset="0"/>
+                <a:ea typeface="Calibri" pitchFamily="34" charset="-122"/>
+                <a:cs typeface="Calibri" pitchFamily="34" charset="-120"/>
+              </a:rPr>
+              <a:t>Auditability &amp; logging</a:t>
+            </a:r>
+            <a:endParaRPr lang="en-US" sz="1200" dirty="0"/>
+          </a:p>
+        </p:txBody>
+      </p:sp>
+      <p:sp>
+        <p:nvSpPr>
+          <p:cNvPr id="44" name="Shape 42"/>
+          <p:cNvSpPr/>
+          <p:nvPr/>
+        </p:nvSpPr>
+        <p:spPr>
+          <a:xfrm>
+            <a:off x="7909560" y="2862072"/>
+            <a:ext cx="1005840" cy="256032"/>
+          </a:xfrm>
+          <a:prstGeom prst="rect">
+            <a:avLst/>
+          </a:prstGeom>
+          <a:solidFill>
+            <a:srgbClr val="0F1B3D"/>
+          </a:solidFill>
+          <a:ln w="12700">
+            <a:solidFill>
+              <a:srgbClr val="0F1B3D"/>
+            </a:solidFill>
+            <a:prstDash val="solid"/>
+          </a:ln>
+        </p:spPr>
+      </p:sp>
+      <p:sp>
+        <p:nvSpPr>
+          <p:cNvPr id="45" name="Text 43"/>
+          <p:cNvSpPr/>
+          <p:nvPr/>
+        </p:nvSpPr>
+        <p:spPr>
+          <a:xfrm>
+            <a:off x="7909560" y="2862072"/>
+            <a:ext cx="1005840" cy="256032"/>
+          </a:xfrm>
+          <a:prstGeom prst="rect">
+            <a:avLst/>
+          </a:prstGeom>
+          <a:noFill/>
+          <a:ln/>
+        </p:spPr>
+        <p:txBody>
+          <a:bodyPr wrap="square" lIns="0" tIns="0" rIns="0" bIns="0" rtlCol="0" anchor="ctr"/>
+          <a:lstStyle/>
+          <a:p>
+            <a:pPr algn="ctr" indent="0" marL="0">
+              <a:buNone/>
+            </a:pPr>
+            <a:r>
+              <a:rPr lang="en-US" sz="900" b="1" spc="200" kern="0" dirty="0">
+                <a:solidFill>
+                  <a:srgbClr val="FFFFFF"/>
+                </a:solidFill>
+                <a:latin typeface="Calibri" pitchFamily="34" charset="0"/>
+                <a:ea typeface="Calibri" pitchFamily="34" charset="-122"/>
+                <a:cs typeface="Calibri" pitchFamily="34" charset="-120"/>
+              </a:rPr>
+              <a:t>P0</a:t>
+            </a:r>
+            <a:endParaRPr lang="en-US" sz="900" dirty="0"/>
+          </a:p>
+        </p:txBody>
+      </p:sp>
+      <p:sp>
+        <p:nvSpPr>
+          <p:cNvPr id="46" name="Shape 44"/>
+          <p:cNvSpPr/>
+          <p:nvPr/>
+        </p:nvSpPr>
+        <p:spPr>
+          <a:xfrm>
+            <a:off x="4800600" y="3246120"/>
+            <a:ext cx="292608" cy="292608"/>
+          </a:xfrm>
+          <a:prstGeom prst="ellipse">
+            <a:avLst/>
+          </a:prstGeom>
+          <a:solidFill>
+            <a:srgbClr val="E8EEFC"/>
+          </a:solidFill>
+          <a:ln w="6350">
+            <a:solidFill>
+              <a:srgbClr val="CBD5E1"/>
+            </a:solidFill>
+            <a:prstDash val="solid"/>
+          </a:ln>
+        </p:spPr>
+      </p:sp>
+      <p:sp>
+        <p:nvSpPr>
+          <p:cNvPr id="47" name="Text 45"/>
+          <p:cNvSpPr/>
+          <p:nvPr/>
+        </p:nvSpPr>
+        <p:spPr>
+          <a:xfrm>
+            <a:off x="4800600" y="3246120"/>
+            <a:ext cx="292608" cy="292608"/>
+          </a:xfrm>
+          <a:prstGeom prst="rect">
+            <a:avLst/>
+          </a:prstGeom>
+          <a:noFill/>
+          <a:ln/>
+        </p:spPr>
+        <p:txBody>
+          <a:bodyPr wrap="square" lIns="0" tIns="0" rIns="0" bIns="0" rtlCol="0" anchor="ctr"/>
+          <a:lstStyle/>
+          <a:p>
+            <a:pPr algn="ctr" indent="0" marL="0">
+              <a:buNone/>
+            </a:pPr>
+            <a:r>
+              <a:rPr lang="en-US" sz="1100" b="1" dirty="0">
+                <a:solidFill>
+                  <a:srgbClr val="0F1B3D"/>
+                </a:solidFill>
+                <a:latin typeface="Calibri" pitchFamily="34" charset="0"/>
+                <a:ea typeface="Calibri" pitchFamily="34" charset="-122"/>
+                <a:cs typeface="Calibri" pitchFamily="34" charset="-120"/>
+              </a:rPr>
+              <a:t>9</a:t>
+            </a:r>
+            <a:endParaRPr lang="en-US" sz="1100" dirty="0"/>
+          </a:p>
+        </p:txBody>
+      </p:sp>
+      <p:sp>
+        <p:nvSpPr>
+          <p:cNvPr id="48" name="Text 46"/>
+          <p:cNvSpPr/>
+          <p:nvPr/>
+        </p:nvSpPr>
+        <p:spPr>
+          <a:xfrm>
+            <a:off x="5166360" y="3200400"/>
+            <a:ext cx="2697480" cy="411480"/>
+          </a:xfrm>
+          <a:prstGeom prst="rect">
+            <a:avLst/>
+          </a:prstGeom>
+          <a:noFill/>
+          <a:ln/>
+        </p:spPr>
+        <p:txBody>
+          <a:bodyPr wrap="square" lIns="0" tIns="0" rIns="0" bIns="0" rtlCol="0" anchor="ctr"/>
+          <a:lstStyle/>
+          <a:p>
+            <a:pPr indent="0" marL="0">
+              <a:buNone/>
+            </a:pPr>
+            <a:r>
+              <a:rPr lang="en-US" sz="1200" dirty="0">
+                <a:solidFill>
+                  <a:srgbClr val="1A1F36"/>
+                </a:solidFill>
+                <a:latin typeface="Calibri" pitchFamily="34" charset="0"/>
+                <a:ea typeface="Calibri" pitchFamily="34" charset="-122"/>
+                <a:cs typeface="Calibri" pitchFamily="34" charset="-120"/>
+              </a:rPr>
+              <a:t>Multi-agent collaboration</a:t>
+            </a:r>
+            <a:endParaRPr lang="en-US" sz="1200" dirty="0"/>
+          </a:p>
+        </p:txBody>
+      </p:sp>
+      <p:sp>
+        <p:nvSpPr>
+          <p:cNvPr id="49" name="Shape 47"/>
+          <p:cNvSpPr/>
+          <p:nvPr/>
+        </p:nvSpPr>
+        <p:spPr>
+          <a:xfrm>
+            <a:off x="7909560" y="3273552"/>
+            <a:ext cx="1005840" cy="256032"/>
+          </a:xfrm>
+          <a:prstGeom prst="rect">
+            <a:avLst/>
+          </a:prstGeom>
+          <a:solidFill>
+            <a:srgbClr val="64748B"/>
+          </a:solidFill>
+          <a:ln w="12700">
+            <a:solidFill>
+              <a:srgbClr val="64748B"/>
+            </a:solidFill>
+            <a:prstDash val="solid"/>
+          </a:ln>
+        </p:spPr>
+      </p:sp>
+      <p:sp>
+        <p:nvSpPr>
+          <p:cNvPr id="50" name="Text 48"/>
+          <p:cNvSpPr/>
+          <p:nvPr/>
+        </p:nvSpPr>
+        <p:spPr>
+          <a:xfrm>
+            <a:off x="7909560" y="3273552"/>
+            <a:ext cx="1005840" cy="256032"/>
+          </a:xfrm>
+          <a:prstGeom prst="rect">
+            <a:avLst/>
+          </a:prstGeom>
+          <a:noFill/>
+          <a:ln/>
+        </p:spPr>
+        <p:txBody>
+          <a:bodyPr wrap="square" lIns="0" tIns="0" rIns="0" bIns="0" rtlCol="0" anchor="ctr"/>
+          <a:lstStyle/>
+          <a:p>
+            <a:pPr algn="ctr" indent="0" marL="0">
+              <a:buNone/>
+            </a:pPr>
+            <a:r>
+              <a:rPr lang="en-US" sz="900" b="1" spc="200" kern="0" dirty="0">
+                <a:solidFill>
+                  <a:srgbClr val="FFFFFF"/>
+                </a:solidFill>
+                <a:latin typeface="Calibri" pitchFamily="34" charset="0"/>
+                <a:ea typeface="Calibri" pitchFamily="34" charset="-122"/>
+                <a:cs typeface="Calibri" pitchFamily="34" charset="-120"/>
+              </a:rPr>
+              <a:t>Future</a:t>
+            </a:r>
+            <a:endParaRPr lang="en-US" sz="900" dirty="0"/>
+          </a:p>
+        </p:txBody>
+      </p:sp>
+      <p:sp>
+        <p:nvSpPr>
+          <p:cNvPr id="51" name="Shape 49"/>
+          <p:cNvSpPr/>
+          <p:nvPr/>
+        </p:nvSpPr>
+        <p:spPr>
+          <a:xfrm>
+            <a:off x="4800600" y="3657600"/>
+            <a:ext cx="292608" cy="292608"/>
+          </a:xfrm>
+          <a:prstGeom prst="ellipse">
+            <a:avLst/>
+          </a:prstGeom>
+          <a:solidFill>
+            <a:srgbClr val="E8EEFC"/>
+          </a:solidFill>
+          <a:ln w="6350">
+            <a:solidFill>
+              <a:srgbClr val="CBD5E1"/>
+            </a:solidFill>
+            <a:prstDash val="solid"/>
+          </a:ln>
+        </p:spPr>
+      </p:sp>
+      <p:sp>
+        <p:nvSpPr>
+          <p:cNvPr id="52" name="Text 50"/>
+          <p:cNvSpPr/>
+          <p:nvPr/>
+        </p:nvSpPr>
+        <p:spPr>
+          <a:xfrm>
+            <a:off x="4800600" y="3657600"/>
+            <a:ext cx="292608" cy="292608"/>
+          </a:xfrm>
+          <a:prstGeom prst="rect">
+            <a:avLst/>
+          </a:prstGeom>
+          <a:noFill/>
+          <a:ln/>
+        </p:spPr>
+        <p:txBody>
+          <a:bodyPr wrap="square" lIns="0" tIns="0" rIns="0" bIns="0" rtlCol="0" anchor="ctr"/>
+          <a:lstStyle/>
+          <a:p>
+            <a:pPr algn="ctr" indent="0" marL="0">
+              <a:buNone/>
+            </a:pPr>
+            <a:r>
+              <a:rPr lang="en-US" sz="1100" b="1" dirty="0">
+                <a:solidFill>
+                  <a:srgbClr val="0F1B3D"/>
+                </a:solidFill>
+                <a:latin typeface="Calibri" pitchFamily="34" charset="0"/>
+                <a:ea typeface="Calibri" pitchFamily="34" charset="-122"/>
+                <a:cs typeface="Calibri" pitchFamily="34" charset="-120"/>
+              </a:rPr>
+              <a:t>10</a:t>
+            </a:r>
+            <a:endParaRPr lang="en-US" sz="1100" dirty="0"/>
+          </a:p>
+        </p:txBody>
+      </p:sp>
+      <p:sp>
+        <p:nvSpPr>
+          <p:cNvPr id="53" name="Text 51"/>
+          <p:cNvSpPr/>
+          <p:nvPr/>
+        </p:nvSpPr>
+        <p:spPr>
+          <a:xfrm>
+            <a:off x="5166360" y="3611880"/>
+            <a:ext cx="2697480" cy="411480"/>
+          </a:xfrm>
+          <a:prstGeom prst="rect">
+            <a:avLst/>
+          </a:prstGeom>
+          <a:noFill/>
+          <a:ln/>
+        </p:spPr>
+        <p:txBody>
+          <a:bodyPr wrap="square" lIns="0" tIns="0" rIns="0" bIns="0" rtlCol="0" anchor="ctr"/>
+          <a:lstStyle/>
+          <a:p>
+            <a:pPr indent="0" marL="0">
+              <a:buNone/>
+            </a:pPr>
+            <a:r>
+              <a:rPr lang="en-US" sz="1200" dirty="0">
+                <a:solidFill>
+                  <a:srgbClr val="1A1F36"/>
+                </a:solidFill>
+                <a:latin typeface="Calibri" pitchFamily="34" charset="0"/>
+                <a:ea typeface="Calibri" pitchFamily="34" charset="-122"/>
+                <a:cs typeface="Calibri" pitchFamily="34" charset="-120"/>
+              </a:rPr>
+              <a:t>Visibility &amp; observability</a:t>
+            </a:r>
+            <a:endParaRPr lang="en-US" sz="1200" dirty="0"/>
+          </a:p>
+        </p:txBody>
+      </p:sp>
+      <p:sp>
+        <p:nvSpPr>
+          <p:cNvPr id="54" name="Shape 52"/>
+          <p:cNvSpPr/>
+          <p:nvPr/>
+        </p:nvSpPr>
+        <p:spPr>
+          <a:xfrm>
+            <a:off x="7909560" y="3685032"/>
+            <a:ext cx="1005840" cy="256032"/>
+          </a:xfrm>
+          <a:prstGeom prst="rect">
+            <a:avLst/>
+          </a:prstGeom>
+          <a:solidFill>
+            <a:srgbClr val="02C39A"/>
+          </a:solidFill>
+          <a:ln w="12700">
+            <a:solidFill>
+              <a:srgbClr val="02C39A"/>
+            </a:solidFill>
+            <a:prstDash val="solid"/>
+          </a:ln>
+        </p:spPr>
+      </p:sp>
+      <p:sp>
+        <p:nvSpPr>
+          <p:cNvPr id="55" name="Text 53"/>
+          <p:cNvSpPr/>
+          <p:nvPr/>
+        </p:nvSpPr>
+        <p:spPr>
+          <a:xfrm>
+            <a:off x="7909560" y="3685032"/>
+            <a:ext cx="1005840" cy="256032"/>
+          </a:xfrm>
+          <a:prstGeom prst="rect">
+            <a:avLst/>
+          </a:prstGeom>
+          <a:noFill/>
+          <a:ln/>
+        </p:spPr>
+        <p:txBody>
+          <a:bodyPr wrap="square" lIns="0" tIns="0" rIns="0" bIns="0" rtlCol="0" anchor="ctr"/>
+          <a:lstStyle/>
+          <a:p>
+            <a:pPr algn="ctr" indent="0" marL="0">
+              <a:buNone/>
+            </a:pPr>
+            <a:r>
+              <a:rPr lang="en-US" sz="900" b="1" spc="200" kern="0" dirty="0">
+                <a:solidFill>
+                  <a:srgbClr val="FFFFFF"/>
+                </a:solidFill>
+                <a:latin typeface="Calibri" pitchFamily="34" charset="0"/>
+                <a:ea typeface="Calibri" pitchFamily="34" charset="-122"/>
+                <a:cs typeface="Calibri" pitchFamily="34" charset="-120"/>
+              </a:rPr>
+              <a:t>M1 + P0</a:t>
+            </a:r>
+            <a:endParaRPr lang="en-US" sz="900" dirty="0"/>
+          </a:p>
+        </p:txBody>
+      </p:sp>
+      <p:sp>
+        <p:nvSpPr>
+          <p:cNvPr id="56" name="Text 54"/>
+          <p:cNvSpPr/>
+          <p:nvPr/>
+        </p:nvSpPr>
+        <p:spPr>
+          <a:xfrm>
+            <a:off x="457200" y="4617720"/>
+            <a:ext cx="8229600" cy="274320"/>
+          </a:xfrm>
+          <a:prstGeom prst="rect">
+            <a:avLst/>
+          </a:prstGeom>
+          <a:noFill/>
+          <a:ln/>
+        </p:spPr>
+        <p:txBody>
+          <a:bodyPr wrap="square" lIns="0" tIns="0" rIns="0" bIns="0" rtlCol="0" anchor="ctr"/>
+          <a:lstStyle/>
+          <a:p>
+            <a:pPr indent="0" marL="0">
+              <a:buNone/>
+            </a:pPr>
+            <a:r>
+              <a:rPr lang="en-US" sz="1000" b="1" dirty="0">
                 <a:solidFill>
                   <a:srgbClr val="02C39A"/>
                 </a:solidFill>
@@ -3083,29 +4493,113 @@
                 <a:ea typeface="Calibri" pitchFamily="34" charset="-122"/>
                 <a:cs typeface="Calibri" pitchFamily="34" charset="-120"/>
               </a:rPr>
-              <a:t>CONNECTORS LIVE: </a:t>
-            </a:r>
-            <a:pPr indent="0" marL="0">
-              <a:buNone/>
-            </a:pPr>
-            <a:r>
-              <a:rPr lang="en-US" sz="1100" spc="200" kern="0" dirty="0">
-                <a:solidFill>
-                  <a:srgbClr val="FFFFFF"/>
-                </a:solidFill>
-                <a:latin typeface="Calibri" pitchFamily="34" charset="0"/>
-                <a:ea typeface="Calibri" pitchFamily="34" charset="-122"/>
-                <a:cs typeface="Calibri" pitchFamily="34" charset="-120"/>
-              </a:rPr>
-              <a:t>Gemini  ·  Vertex AI  ·  Amazon Bedrock  ·  n8n</a:t>
-            </a:r>
-            <a:endParaRPr lang="en-US" sz="1100" dirty="0"/>
-          </a:p>
-        </p:txBody>
-      </p:sp>
-      <p:sp>
-        <p:nvSpPr>
-          <p:cNvPr id="10" name="Text 7"/>
+              <a:t>M1</a:t>
+            </a:r>
+            <a:pPr indent="0" marL="0">
+              <a:buNone/>
+            </a:pPr>
+            <a:r>
+              <a:rPr lang="en-US" sz="1000" dirty="0">
+                <a:solidFill>
+                  <a:srgbClr val="64748B"/>
+                </a:solidFill>
+                <a:latin typeface="Calibri" pitchFamily="34" charset="0"/>
+                <a:ea typeface="Calibri" pitchFamily="34" charset="-122"/>
+                <a:cs typeface="Calibri" pitchFamily="34" charset="-120"/>
+              </a:rPr>
+              <a:t> shipped  ·  </a:t>
+            </a:r>
+            <a:pPr indent="0" marL="0">
+              <a:buNone/>
+            </a:pPr>
+            <a:r>
+              <a:rPr lang="en-US" sz="1000" b="1" dirty="0">
+                <a:solidFill>
+                  <a:srgbClr val="F59E0B"/>
+                </a:solidFill>
+                <a:latin typeface="Calibri" pitchFamily="34" charset="0"/>
+                <a:ea typeface="Calibri" pitchFamily="34" charset="-122"/>
+                <a:cs typeface="Calibri" pitchFamily="34" charset="-120"/>
+              </a:rPr>
+              <a:t>M2</a:t>
+            </a:r>
+            <a:pPr indent="0" marL="0">
+              <a:buNone/>
+            </a:pPr>
+            <a:r>
+              <a:rPr lang="en-US" sz="1000" dirty="0">
+                <a:solidFill>
+                  <a:srgbClr val="64748B"/>
+                </a:solidFill>
+                <a:latin typeface="Calibri" pitchFamily="34" charset="0"/>
+                <a:ea typeface="Calibri" pitchFamily="34" charset="-122"/>
+                <a:cs typeface="Calibri" pitchFamily="34" charset="-120"/>
+              </a:rPr>
+              <a:t> in flight  ·  </a:t>
+            </a:r>
+            <a:pPr indent="0" marL="0">
+              <a:buNone/>
+            </a:pPr>
+            <a:r>
+              <a:rPr lang="en-US" sz="1000" b="1" dirty="0">
+                <a:solidFill>
+                  <a:srgbClr val="0F1B3D"/>
+                </a:solidFill>
+                <a:latin typeface="Calibri" pitchFamily="34" charset="0"/>
+                <a:ea typeface="Calibri" pitchFamily="34" charset="-122"/>
+                <a:cs typeface="Calibri" pitchFamily="34" charset="-120"/>
+              </a:rPr>
+              <a:t>P0</a:t>
+            </a:r>
+            <a:pPr indent="0" marL="0">
+              <a:buNone/>
+            </a:pPr>
+            <a:r>
+              <a:rPr lang="en-US" sz="1000" dirty="0">
+                <a:solidFill>
+                  <a:srgbClr val="64748B"/>
+                </a:solidFill>
+                <a:latin typeface="Calibri" pitchFamily="34" charset="0"/>
+                <a:ea typeface="Calibri" pitchFamily="34" charset="-122"/>
+                <a:cs typeface="Calibri" pitchFamily="34" charset="-120"/>
+              </a:rPr>
+              <a:t> Gateway demo  ·  </a:t>
+            </a:r>
+            <a:pPr indent="0" marL="0">
+              <a:buNone/>
+            </a:pPr>
+            <a:r>
+              <a:rPr lang="en-US" sz="1000" dirty="0">
+                <a:solidFill>
+                  <a:srgbClr val="64748B"/>
+                </a:solidFill>
+                <a:latin typeface="Calibri" pitchFamily="34" charset="0"/>
+                <a:ea typeface="Calibri" pitchFamily="34" charset="-122"/>
+                <a:cs typeface="Calibri" pitchFamily="34" charset="-120"/>
+              </a:rPr>
+              <a:t>Post-P0 / Future</a:t>
+            </a:r>
+            <a:pPr indent="0" marL="0">
+              <a:buNone/>
+            </a:pPr>
+            <a:r>
+              <a:rPr lang="en-US" sz="1000" dirty="0">
+                <a:solidFill>
+                  <a:srgbClr val="64748B"/>
+                </a:solidFill>
+                <a:latin typeface="Calibri" pitchFamily="34" charset="0"/>
+                <a:ea typeface="Calibri" pitchFamily="34" charset="-122"/>
+                <a:cs typeface="Calibri" pitchFamily="34" charset="-120"/>
+              </a:rPr>
+              <a:t> next</a:t>
+            </a:r>
+            <a:endParaRPr lang="en-US" sz="1000" dirty="0"/>
+          </a:p>
+        </p:txBody>
+      </p:sp>
+      <p:sp>
+        <p:nvSpPr>
+          <p:cNvPr id="57" name="Text 55"/>
           <p:cNvSpPr/>
           <p:nvPr/>
         </p:nvSpPr>
@@ -3136,7 +4630,7 @@
                 <a:ea typeface="Calibri" pitchFamily="34" charset="-122"/>
                 <a:cs typeface="Calibri" pitchFamily="34" charset="-120"/>
               </a:rPr>
-              <a:t>3 / 9</a:t>
+              <a:t>3 / 8</a:t>
             </a:r>
             <a:endParaRPr lang="en-US" sz="900" dirty="0"/>
           </a:p>
@@ -3153,6 +4647,478 @@
 <file path=ppt/slides/slide4.xml><?xml version="1.0" encoding="utf-8"?>
 <p:sld xmlns:a="http://schemas.openxmlformats.org/drawingml/2006/main" xmlns:r="http://schemas.openxmlformats.org/officeDocument/2006/relationships" xmlns:p="http://schemas.openxmlformats.org/presentationml/2006/main">
   <p:cSld name="Slide 4">
+    <p:bg>
+      <p:bgPr>
+        <a:solidFill>
+          <a:srgbClr val="FFFFFF"/>
+        </a:solidFill>
+      </p:bgPr>
+    </p:bg>
+    <p:spTree>
+      <p:nvGrpSpPr>
+        <p:cNvPr id="1" name=""/>
+        <p:cNvGrpSpPr/>
+        <p:nvPr/>
+      </p:nvGrpSpPr>
+      <p:grpSpPr>
+        <a:xfrm>
+          <a:off x="0" y="0"/>
+          <a:ext cx="0" cy="0"/>
+          <a:chOff x="0" y="0"/>
+          <a:chExt cx="0" cy="0"/>
+        </a:xfrm>
+      </p:grpSpPr>
+      <p:sp>
+        <p:nvSpPr>
+          <p:cNvPr id="2" name="Shape 0"/>
+          <p:cNvSpPr/>
+          <p:nvPr/>
+        </p:nvSpPr>
+        <p:spPr>
+          <a:xfrm>
+            <a:off x="0" y="0"/>
+            <a:ext cx="109728" cy="5143500"/>
+          </a:xfrm>
+          <a:prstGeom prst="rect">
+            <a:avLst/>
+          </a:prstGeom>
+          <a:solidFill>
+            <a:srgbClr val="02C39A"/>
+          </a:solidFill>
+          <a:ln w="12700">
+            <a:solidFill>
+              <a:srgbClr val="02C39A"/>
+            </a:solidFill>
+            <a:prstDash val="solid"/>
+          </a:ln>
+        </p:spPr>
+      </p:sp>
+      <p:sp>
+        <p:nvSpPr>
+          <p:cNvPr id="3" name="Text 1"/>
+          <p:cNvSpPr/>
+          <p:nvPr/>
+        </p:nvSpPr>
+        <p:spPr>
+          <a:xfrm>
+            <a:off x="457200" y="365760"/>
+            <a:ext cx="7315200" cy="274320"/>
+          </a:xfrm>
+          <a:prstGeom prst="rect">
+            <a:avLst/>
+          </a:prstGeom>
+          <a:noFill/>
+          <a:ln/>
+        </p:spPr>
+        <p:txBody>
+          <a:bodyPr wrap="square" lIns="0" tIns="0" rIns="0" bIns="0" rtlCol="0" anchor="ctr"/>
+          <a:lstStyle/>
+          <a:p>
+            <a:pPr indent="0" marL="0">
+              <a:buNone/>
+            </a:pPr>
+            <a:r>
+              <a:rPr lang="en-US" sz="1100" b="1" spc="400" kern="0" dirty="0">
+                <a:solidFill>
+                  <a:srgbClr val="64748B"/>
+                </a:solidFill>
+                <a:latin typeface="Calibri" pitchFamily="34" charset="0"/>
+                <a:ea typeface="Calibri" pitchFamily="34" charset="-122"/>
+                <a:cs typeface="Calibri" pitchFamily="34" charset="-120"/>
+              </a:rPr>
+              <a:t>03 · What's done</a:t>
+            </a:r>
+            <a:endParaRPr lang="en-US" sz="1100" dirty="0"/>
+          </a:p>
+        </p:txBody>
+      </p:sp>
+      <p:sp>
+        <p:nvSpPr>
+          <p:cNvPr id="4" name="Text 2"/>
+          <p:cNvSpPr/>
+          <p:nvPr/>
+        </p:nvSpPr>
+        <p:spPr>
+          <a:xfrm>
+            <a:off x="457200" y="731520"/>
+            <a:ext cx="8229600" cy="777240"/>
+          </a:xfrm>
+          <a:prstGeom prst="rect">
+            <a:avLst/>
+          </a:prstGeom>
+          <a:noFill/>
+          <a:ln/>
+        </p:spPr>
+        <p:txBody>
+          <a:bodyPr wrap="square" lIns="0" tIns="0" rIns="0" bIns="0" rtlCol="0" anchor="ctr"/>
+          <a:lstStyle/>
+          <a:p>
+            <a:pPr indent="0" marL="0">
+              <a:buNone/>
+            </a:pPr>
+            <a:r>
+              <a:rPr lang="en-US" sz="3400" b="1" dirty="0">
+                <a:solidFill>
+                  <a:srgbClr val="1A1F36"/>
+                </a:solidFill>
+                <a:latin typeface="Georgia" pitchFamily="34" charset="0"/>
+                <a:ea typeface="Georgia" pitchFamily="34" charset="-122"/>
+                <a:cs typeface="Georgia" pitchFamily="34" charset="-120"/>
+              </a:rPr>
+              <a:t>M1 is live. Real agents, real data.</a:t>
+            </a:r>
+            <a:endParaRPr lang="en-US" sz="3400" dirty="0"/>
+          </a:p>
+        </p:txBody>
+      </p:sp>
+      <p:sp>
+        <p:nvSpPr>
+          <p:cNvPr id="5" name="Text 3"/>
+          <p:cNvSpPr/>
+          <p:nvPr/>
+        </p:nvSpPr>
+        <p:spPr>
+          <a:xfrm>
+            <a:off x="548640" y="1600200"/>
+            <a:ext cx="4206240" cy="2743200"/>
+          </a:xfrm>
+          <a:prstGeom prst="rect">
+            <a:avLst/>
+          </a:prstGeom>
+          <a:noFill/>
+          <a:ln/>
+        </p:spPr>
+        <p:txBody>
+          <a:bodyPr wrap="square" lIns="0" tIns="0" rIns="0" bIns="0" rtlCol="0" anchor="ctr"/>
+          <a:lstStyle/>
+          <a:p>
+            <a:pPr indent="0" marL="0">
+              <a:buNone/>
+            </a:pPr>
+            <a:r>
+              <a:rPr lang="en-US" sz="1400" b="1" dirty="0">
+                <a:solidFill>
+                  <a:srgbClr val="0F1B3D"/>
+                </a:solidFill>
+                <a:latin typeface="Calibri" pitchFamily="34" charset="0"/>
+                <a:ea typeface="Calibri" pitchFamily="34" charset="-122"/>
+                <a:cs typeface="Calibri" pitchFamily="34" charset="-120"/>
+              </a:rPr>
+              <a:t>Agent graph model</a:t>
+            </a:r>
+            <a:endParaRPr lang="en-US" sz="1400" dirty="0"/>
+          </a:p>
+          <a:p>
+            <a:pPr indent="0" marL="0">
+              <a:buNone/>
+            </a:pPr>
+            <a:r>
+              <a:rPr lang="en-US" sz="1200" dirty="0">
+                <a:solidFill>
+                  <a:srgbClr val="64748B"/>
+                </a:solidFill>
+                <a:latin typeface="Calibri" pitchFamily="34" charset="0"/>
+                <a:ea typeface="Calibri" pitchFamily="34" charset="-122"/>
+                <a:cs typeface="Calibri" pitchFamily="34" charset="-120"/>
+              </a:rPr>
+              <a:t>Agents as first-class nodes. Owner, model, tools, issues.</a:t>
+            </a:r>
+            <a:endParaRPr lang="en-US" sz="1400" dirty="0"/>
+          </a:p>
+          <a:p>
+            <a:pPr indent="0" marL="0">
+              <a:buNone/>
+            </a:pPr>
+            <a:r>
+              <a:rPr lang="en-US" sz="400" dirty="0">
+                <a:solidFill>
+                  <a:srgbClr val="000000"/>
+                </a:solidFill>
+                <a:latin typeface="Calibri" pitchFamily="34" charset="0"/>
+                <a:ea typeface="Calibri" pitchFamily="34" charset="-122"/>
+                <a:cs typeface="Calibri" pitchFamily="34" charset="-120"/>
+              </a:rPr>
+              <a:t> </a:t>
+            </a:r>
+            <a:endParaRPr lang="en-US" sz="1400" dirty="0"/>
+          </a:p>
+          <a:p>
+            <a:pPr indent="0" marL="0">
+              <a:buNone/>
+            </a:pPr>
+            <a:r>
+              <a:rPr lang="en-US" sz="1400" b="1" dirty="0">
+                <a:solidFill>
+                  <a:srgbClr val="0F1B3D"/>
+                </a:solidFill>
+                <a:latin typeface="Calibri" pitchFamily="34" charset="0"/>
+                <a:ea typeface="Calibri" pitchFamily="34" charset="-122"/>
+                <a:cs typeface="Calibri" pitchFamily="34" charset="-120"/>
+              </a:rPr>
+              <a:t>Discovery › Agents UI + entity page</a:t>
+            </a:r>
+            <a:endParaRPr lang="en-US" sz="1400" dirty="0"/>
+          </a:p>
+          <a:p>
+            <a:pPr indent="0" marL="0">
+              <a:buNone/>
+            </a:pPr>
+            <a:r>
+              <a:rPr lang="en-US" sz="1200" dirty="0">
+                <a:solidFill>
+                  <a:srgbClr val="64748B"/>
+                </a:solidFill>
+                <a:latin typeface="Calibri" pitchFamily="34" charset="0"/>
+                <a:ea typeface="Calibri" pitchFamily="34" charset="-122"/>
+                <a:cs typeface="Calibri" pitchFamily="34" charset="-120"/>
+              </a:rPr>
+              <a:t>Inventory across platforms. Issues: AGENT_EXCESSIVE_PERMISSIONS, AGENT_OWNER_OFFBOARDED.</a:t>
+            </a:r>
+            <a:endParaRPr lang="en-US" sz="1400" dirty="0"/>
+          </a:p>
+          <a:p>
+            <a:pPr indent="0" marL="0">
+              <a:buNone/>
+            </a:pPr>
+            <a:r>
+              <a:rPr lang="en-US" sz="400" dirty="0">
+                <a:solidFill>
+                  <a:srgbClr val="000000"/>
+                </a:solidFill>
+                <a:latin typeface="Calibri" pitchFamily="34" charset="0"/>
+                <a:ea typeface="Calibri" pitchFamily="34" charset="-122"/>
+                <a:cs typeface="Calibri" pitchFamily="34" charset="-120"/>
+              </a:rPr>
+              <a:t> </a:t>
+            </a:r>
+            <a:endParaRPr lang="en-US" sz="1400" dirty="0"/>
+          </a:p>
+          <a:p>
+            <a:pPr indent="0" marL="0">
+              <a:buNone/>
+            </a:pPr>
+            <a:r>
+              <a:rPr lang="en-US" sz="1400" b="1" dirty="0">
+                <a:solidFill>
+                  <a:srgbClr val="F59E0B"/>
+                </a:solidFill>
+                <a:latin typeface="Calibri" pitchFamily="34" charset="0"/>
+                <a:ea typeface="Calibri" pitchFamily="34" charset="-122"/>
+                <a:cs typeface="Calibri" pitchFamily="34" charset="-120"/>
+              </a:rPr>
+              <a:t>M2: Access Intelligence in flight</a:t>
+            </a:r>
+            <a:endParaRPr lang="en-US" sz="1400" dirty="0"/>
+          </a:p>
+          <a:p>
+            <a:pPr indent="0" marL="0">
+              <a:buNone/>
+            </a:pPr>
+            <a:r>
+              <a:rPr lang="en-US" sz="1200" dirty="0">
+                <a:solidFill>
+                  <a:srgbClr val="64748B"/>
+                </a:solidFill>
+                <a:latin typeface="Calibri" pitchFamily="34" charset="0"/>
+                <a:ea typeface="Calibri" pitchFamily="34" charset="-122"/>
+                <a:cs typeface="Calibri" pitchFamily="34" charset="-120"/>
+              </a:rPr>
+              <a:t>74% complete. The unfinished 26% is where the IdP-API approach hit the wall.</a:t>
+            </a:r>
+            <a:endParaRPr lang="en-US" sz="1400" dirty="0"/>
+          </a:p>
+        </p:txBody>
+      </p:sp>
+      <p:pic>
+        <p:nvPicPr>
+          <p:cNvPr id="6" name="Image 0" descr="/tmp/mor-pics/slide12_160.png">    </p:cNvPr>
+          <p:cNvPicPr>
+            <a:picLocks noChangeAspect="1"/>
+          </p:cNvPicPr>
+          <p:nvPr/>
+        </p:nvPicPr>
+        <p:blipFill>
+          <a:blip r:embed="rId1"/>
+          <a:srcRect l="0" r="0" t="0" b="0"/>
+          <a:stretch/>
+        </p:blipFill>
+        <p:spPr>
+          <a:xfrm>
+            <a:off x="4846320" y="1600200"/>
+            <a:ext cx="3840480" cy="2560320"/>
+          </a:xfrm>
+          <a:prstGeom prst="rect">
+            <a:avLst/>
+          </a:prstGeom>
+        </p:spPr>
+      </p:pic>
+      <p:sp>
+        <p:nvSpPr>
+          <p:cNvPr id="7" name="Text 4"/>
+          <p:cNvSpPr/>
+          <p:nvPr/>
+        </p:nvSpPr>
+        <p:spPr>
+          <a:xfrm>
+            <a:off x="4846320" y="4206240"/>
+            <a:ext cx="3840480" cy="228600"/>
+          </a:xfrm>
+          <a:prstGeom prst="rect">
+            <a:avLst/>
+          </a:prstGeom>
+          <a:noFill/>
+          <a:ln/>
+        </p:spPr>
+        <p:txBody>
+          <a:bodyPr wrap="square" lIns="0" tIns="0" rIns="0" bIns="0" rtlCol="0" anchor="ctr"/>
+          <a:lstStyle/>
+          <a:p>
+            <a:pPr algn="ctr" indent="0" marL="0">
+              <a:buNone/>
+            </a:pPr>
+            <a:r>
+              <a:rPr lang="en-US" sz="900" i="1" dirty="0">
+                <a:solidFill>
+                  <a:srgbClr val="64748B"/>
+                </a:solidFill>
+                <a:latin typeface="Calibri" pitchFamily="34" charset="0"/>
+                <a:ea typeface="Calibri" pitchFamily="34" charset="-122"/>
+                <a:cs typeface="Calibri" pitchFamily="34" charset="-120"/>
+              </a:rPr>
+              <a:t>Linx · release-notes-assistant · real M1 product</a:t>
+            </a:r>
+            <a:endParaRPr lang="en-US" sz="900" dirty="0"/>
+          </a:p>
+        </p:txBody>
+      </p:sp>
+      <p:sp>
+        <p:nvSpPr>
+          <p:cNvPr id="8" name="Shape 5"/>
+          <p:cNvSpPr/>
+          <p:nvPr/>
+        </p:nvSpPr>
+        <p:spPr>
+          <a:xfrm>
+            <a:off x="457200" y="4572000"/>
+            <a:ext cx="8229600" cy="411480"/>
+          </a:xfrm>
+          <a:prstGeom prst="rect">
+            <a:avLst/>
+          </a:prstGeom>
+          <a:solidFill>
+            <a:srgbClr val="0F1B3D"/>
+          </a:solidFill>
+          <a:ln w="12700">
+            <a:solidFill>
+              <a:srgbClr val="0F1B3D"/>
+            </a:solidFill>
+            <a:prstDash val="solid"/>
+          </a:ln>
+        </p:spPr>
+      </p:sp>
+      <p:sp>
+        <p:nvSpPr>
+          <p:cNvPr id="9" name="Text 6"/>
+          <p:cNvSpPr/>
+          <p:nvPr/>
+        </p:nvSpPr>
+        <p:spPr>
+          <a:xfrm>
+            <a:off x="640080" y="4572000"/>
+            <a:ext cx="7863840" cy="411480"/>
+          </a:xfrm>
+          <a:prstGeom prst="rect">
+            <a:avLst/>
+          </a:prstGeom>
+          <a:noFill/>
+          <a:ln/>
+        </p:spPr>
+        <p:txBody>
+          <a:bodyPr wrap="square" lIns="0" tIns="0" rIns="0" bIns="0" rtlCol="0" anchor="ctr"/>
+          <a:lstStyle/>
+          <a:p>
+            <a:pPr indent="0" marL="0">
+              <a:buNone/>
+            </a:pPr>
+            <a:r>
+              <a:rPr lang="en-US" sz="1100" b="1" spc="300" kern="0" dirty="0">
+                <a:solidFill>
+                  <a:srgbClr val="02C39A"/>
+                </a:solidFill>
+                <a:latin typeface="Calibri" pitchFamily="34" charset="0"/>
+                <a:ea typeface="Calibri" pitchFamily="34" charset="-122"/>
+                <a:cs typeface="Calibri" pitchFamily="34" charset="-120"/>
+              </a:rPr>
+              <a:t>CONNECTORS LIVE:  </a:t>
+            </a:r>
+            <a:pPr indent="0" marL="0">
+              <a:buNone/>
+            </a:pPr>
+            <a:r>
+              <a:rPr lang="en-US" sz="1100" dirty="0">
+                <a:solidFill>
+                  <a:srgbClr val="FFFFFF"/>
+                </a:solidFill>
+                <a:latin typeface="Calibri" pitchFamily="34" charset="0"/>
+                <a:ea typeface="Calibri" pitchFamily="34" charset="-122"/>
+                <a:cs typeface="Calibri" pitchFamily="34" charset="-120"/>
+              </a:rPr>
+              <a:t>Gemini  ·  Vertex AI  ·  Amazon Bedrock  ·  n8n</a:t>
+            </a:r>
+            <a:endParaRPr lang="en-US" sz="1100" dirty="0"/>
+          </a:p>
+        </p:txBody>
+      </p:sp>
+      <p:sp>
+        <p:nvSpPr>
+          <p:cNvPr id="10" name="Text 7"/>
+          <p:cNvSpPr/>
+          <p:nvPr/>
+        </p:nvSpPr>
+        <p:spPr>
+          <a:xfrm>
+            <a:off x="8321040" y="4823460"/>
+            <a:ext cx="457200" cy="228600"/>
+          </a:xfrm>
+          <a:prstGeom prst="rect">
+            <a:avLst/>
+          </a:prstGeom>
+          <a:noFill/>
+          <a:ln/>
+        </p:spPr>
+        <p:txBody>
+          <a:bodyPr wrap="square" lIns="0" tIns="0" rIns="0" bIns="0" rtlCol="0" anchor="ctr"/>
+          <a:lstStyle/>
+          <a:p>
+            <a:pPr algn="r" indent="0" marL="0">
+              <a:buNone/>
+            </a:pPr>
+            <a:r>
+              <a:rPr lang="en-US" sz="900" dirty="0">
+                <a:solidFill>
+                  <a:srgbClr val="64748B"/>
+                </a:solidFill>
+                <a:latin typeface="Calibri" pitchFamily="34" charset="0"/>
+                <a:ea typeface="Calibri" pitchFamily="34" charset="-122"/>
+                <a:cs typeface="Calibri" pitchFamily="34" charset="-120"/>
+              </a:rPr>
+              <a:t>4 / 8</a:t>
+            </a:r>
+            <a:endParaRPr lang="en-US" sz="900" dirty="0"/>
+          </a:p>
+        </p:txBody>
+      </p:sp>
+    </p:spTree>
+  </p:cSld>
+  <p:clrMapOvr>
+    <a:masterClrMapping/>
+  </p:clrMapOvr>
+</p:sld>
+</file>
+
+<file path=ppt/slides/slide5.xml><?xml version="1.0" encoding="utf-8"?>
+<p:sld xmlns:a="http://schemas.openxmlformats.org/drawingml/2006/main" xmlns:r="http://schemas.openxmlformats.org/officeDocument/2006/relationships" xmlns:p="http://schemas.openxmlformats.org/presentationml/2006/main">
+  <p:cSld name="Slide 5">
     <p:bg>
       <p:bgPr>
         <a:solidFill>
@@ -3208,7 +5174,7 @@
         <p:spPr>
           <a:xfrm>
             <a:off x="457200" y="365760"/>
-            <a:ext cx="5486400" cy="274320"/>
+            <a:ext cx="7315200" cy="274320"/>
           </a:xfrm>
           <a:prstGeom prst="rect">
             <a:avLst/>
@@ -3226,13 +5192,13 @@
             <a:r>
               <a:rPr lang="en-US" sz="1100" b="1" spc="400" kern="0" dirty="0">
                 <a:solidFill>
-                  <a:srgbClr val="F59E0B"/>
-                </a:solidFill>
-                <a:latin typeface="Calibri" pitchFamily="34" charset="0"/>
-                <a:ea typeface="Calibri" pitchFamily="34" charset="-122"/>
-                <a:cs typeface="Calibri" pitchFamily="34" charset="-120"/>
-              </a:rPr>
-              <a:t>03 · What we learned</a:t>
+                  <a:srgbClr val="02C39A"/>
+                </a:solidFill>
+                <a:latin typeface="Calibri" pitchFamily="34" charset="0"/>
+                <a:ea typeface="Calibri" pitchFamily="34" charset="-122"/>
+                <a:cs typeface="Calibri" pitchFamily="34" charset="-120"/>
+              </a:rPr>
+              <a:t>04 · The lesson</a:t>
             </a:r>
             <a:endParaRPr lang="en-US" sz="1100" dirty="0"/>
           </a:p>
@@ -3285,24 +5251,24 @@
         </p:nvSpPr>
         <p:spPr>
           <a:xfrm>
-            <a:off x="1371600" y="1188720"/>
-            <a:ext cx="7315200" cy="1645920"/>
-          </a:xfrm>
-          <a:prstGeom prst="rect">
-            <a:avLst/>
-          </a:prstGeom>
-          <a:noFill/>
-          <a:ln/>
-        </p:spPr>
-        <p:txBody>
-          <a:bodyPr wrap="square" lIns="0" tIns="0" rIns="0" bIns="0" rtlCol="0" anchor="ctr"/>
-          <a:lstStyle/>
-          <a:p>
-            <a:pPr indent="0" marL="0">
-              <a:buNone/>
-            </a:pPr>
-            <a:r>
-              <a:rPr lang="en-US" sz="3800" b="1" dirty="0">
+            <a:off x="1371600" y="1097280"/>
+            <a:ext cx="7315200" cy="1554480"/>
+          </a:xfrm>
+          <a:prstGeom prst="rect">
+            <a:avLst/>
+          </a:prstGeom>
+          <a:noFill/>
+          <a:ln/>
+        </p:spPr>
+        <p:txBody>
+          <a:bodyPr wrap="square" lIns="0" tIns="0" rIns="0" bIns="0" rtlCol="0" anchor="ctr"/>
+          <a:lstStyle/>
+          <a:p>
+            <a:pPr indent="0" marL="0">
+              <a:buNone/>
+            </a:pPr>
+            <a:r>
+              <a:rPr lang="en-US" sz="3400" b="1" dirty="0">
                 <a:solidFill>
                   <a:srgbClr val="FFFFFF"/>
                 </a:solidFill>
@@ -3312,14 +5278,14 @@
               </a:rPr>
               <a:t>We counted on the IdPs to identify agents.</a:t>
             </a:r>
-            <a:endParaRPr lang="en-US" sz="3800" dirty="0"/>
-          </a:p>
-          <a:p>
-            <a:pPr indent="0" marL="0">
-              <a:buNone/>
-            </a:pPr>
-            <a:r>
-              <a:rPr lang="en-US" sz="3800" b="1" dirty="0">
+            <a:endParaRPr lang="en-US" sz="3400" dirty="0"/>
+          </a:p>
+          <a:p>
+            <a:pPr indent="0" marL="0">
+              <a:buNone/>
+            </a:pPr>
+            <a:r>
+              <a:rPr lang="en-US" sz="3400" b="1" dirty="0">
                 <a:solidFill>
                   <a:srgbClr val="FFFFFF"/>
                 </a:solidFill>
@@ -3329,7 +5295,7 @@
               </a:rPr>
               <a:t>It didn't work.</a:t>
             </a:r>
-            <a:endParaRPr lang="en-US" sz="3800" dirty="0"/>
+            <a:endParaRPr lang="en-US" sz="3400" dirty="0"/>
           </a:p>
         </p:txBody>
       </p:sp>
@@ -3341,24 +5307,24 @@
         </p:nvSpPr>
         <p:spPr>
           <a:xfrm>
-            <a:off x="1371600" y="3017520"/>
-            <a:ext cx="7315200" cy="914400"/>
-          </a:xfrm>
-          <a:prstGeom prst="rect">
-            <a:avLst/>
-          </a:prstGeom>
-          <a:noFill/>
-          <a:ln/>
-        </p:spPr>
-        <p:txBody>
-          <a:bodyPr wrap="square" lIns="0" tIns="0" rIns="0" bIns="0" rtlCol="0" anchor="ctr"/>
-          <a:lstStyle/>
-          <a:p>
-            <a:pPr indent="0" marL="0">
-              <a:buNone/>
-            </a:pPr>
-            <a:r>
-              <a:rPr lang="en-US" sz="1500" i="1" dirty="0">
+            <a:off x="1371600" y="2788920"/>
+            <a:ext cx="7315200" cy="640080"/>
+          </a:xfrm>
+          <a:prstGeom prst="rect">
+            <a:avLst/>
+          </a:prstGeom>
+          <a:noFill/>
+          <a:ln/>
+        </p:spPr>
+        <p:txBody>
+          <a:bodyPr wrap="square" lIns="0" tIns="0" rIns="0" bIns="0" rtlCol="0" anchor="ctr"/>
+          <a:lstStyle/>
+          <a:p>
+            <a:pPr indent="0" marL="0">
+              <a:buNone/>
+            </a:pPr>
+            <a:r>
+              <a:rPr lang="en-US" sz="1400" i="1" dirty="0">
                 <a:solidFill>
                   <a:srgbClr val="E8EEFC"/>
                 </a:solidFill>
@@ -3366,9 +5332,9 @@
                 <a:ea typeface="Calibri" pitchFamily="34" charset="-122"/>
                 <a:cs typeface="Calibri" pitchFamily="34" charset="-120"/>
               </a:rPr>
-              <a:t>Agent access is ephemeral, intent-driven, and multi-hop through tools and MCP servers. The IAM API surface that powers human + NHI governance can't see that shape.</a:t>
-            </a:r>
-            <a:endParaRPr lang="en-US" sz="1500" dirty="0"/>
+              <a:t>Agent access is ephemeral, intent-driven, multi-hop through tools and MCP. The IAM API surface can't see that shape.</a:t>
+            </a:r>
+            <a:endParaRPr lang="en-US" sz="1400" dirty="0"/>
           </a:p>
         </p:txBody>
       </p:sp>
@@ -3380,151 +5346,16 @@
         </p:nvSpPr>
         <p:spPr>
           <a:xfrm>
-            <a:off x="457200" y="4206240"/>
-            <a:ext cx="8229600" cy="502920"/>
+            <a:off x="457200" y="3611880"/>
+            <a:ext cx="8229600" cy="777240"/>
           </a:xfrm>
           <a:prstGeom prst="rect">
             <a:avLst/>
           </a:prstGeom>
           <a:solidFill>
-            <a:srgbClr val="F59E0B">
-              <a:alpha val="20000"/>
+            <a:srgbClr val="02C39A">
+              <a:alpha val="25000"/>
             </a:srgbClr>
-          </a:solidFill>
-          <a:ln w="12700">
-            <a:solidFill>
-              <a:srgbClr val="F59E0B"/>
-            </a:solidFill>
-            <a:prstDash val="solid"/>
-          </a:ln>
-        </p:spPr>
-      </p:sp>
-      <p:sp>
-        <p:nvSpPr>
-          <p:cNvPr id="8" name="Text 6"/>
-          <p:cNvSpPr/>
-          <p:nvPr/>
-        </p:nvSpPr>
-        <p:spPr>
-          <a:xfrm>
-            <a:off x="640080" y="4206240"/>
-            <a:ext cx="7863840" cy="502920"/>
-          </a:xfrm>
-          <a:prstGeom prst="rect">
-            <a:avLst/>
-          </a:prstGeom>
-          <a:noFill/>
-          <a:ln/>
-        </p:spPr>
-        <p:txBody>
-          <a:bodyPr wrap="square" lIns="0" tIns="0" rIns="0" bIns="0" rtlCol="0" anchor="ctr"/>
-          <a:lstStyle/>
-          <a:p>
-            <a:pPr indent="0" marL="0">
-              <a:buNone/>
-            </a:pPr>
-            <a:r>
-              <a:rPr lang="en-US" sz="1300" b="1" dirty="0">
-                <a:solidFill>
-                  <a:srgbClr val="FFFFFF"/>
-                </a:solidFill>
-                <a:latin typeface="Calibri" pitchFamily="34" charset="0"/>
-                <a:ea typeface="Calibri" pitchFamily="34" charset="-122"/>
-                <a:cs typeface="Calibri" pitchFamily="34" charset="-120"/>
-              </a:rPr>
-              <a:t>This is a learning, not a failure. We now know what the next layer has to do.</a:t>
-            </a:r>
-            <a:endParaRPr lang="en-US" sz="1300" dirty="0"/>
-          </a:p>
-        </p:txBody>
-      </p:sp>
-      <p:sp>
-        <p:nvSpPr>
-          <p:cNvPr id="9" name="Text 7"/>
-          <p:cNvSpPr/>
-          <p:nvPr/>
-        </p:nvSpPr>
-        <p:spPr>
-          <a:xfrm>
-            <a:off x="8321040" y="4823460"/>
-            <a:ext cx="457200" cy="228600"/>
-          </a:xfrm>
-          <a:prstGeom prst="rect">
-            <a:avLst/>
-          </a:prstGeom>
-          <a:noFill/>
-          <a:ln/>
-        </p:spPr>
-        <p:txBody>
-          <a:bodyPr wrap="square" lIns="0" tIns="0" rIns="0" bIns="0" rtlCol="0" anchor="ctr"/>
-          <a:lstStyle/>
-          <a:p>
-            <a:pPr algn="r" indent="0" marL="0">
-              <a:buNone/>
-            </a:pPr>
-            <a:r>
-              <a:rPr lang="en-US" sz="900" dirty="0">
-                <a:solidFill>
-                  <a:srgbClr val="E8EEFC"/>
-                </a:solidFill>
-                <a:latin typeface="Calibri" pitchFamily="34" charset="0"/>
-                <a:ea typeface="Calibri" pitchFamily="34" charset="-122"/>
-                <a:cs typeface="Calibri" pitchFamily="34" charset="-120"/>
-              </a:rPr>
-              <a:t>4 / 9</a:t>
-            </a:r>
-            <a:endParaRPr lang="en-US" sz="900" dirty="0"/>
-          </a:p>
-        </p:txBody>
-      </p:sp>
-    </p:spTree>
-  </p:cSld>
-  <p:clrMapOvr>
-    <a:masterClrMapping/>
-  </p:clrMapOvr>
-</p:sld>
-</file>
-
-<file path=ppt/slides/slide5.xml><?xml version="1.0" encoding="utf-8"?>
-<p:sld xmlns:a="http://schemas.openxmlformats.org/drawingml/2006/main" xmlns:r="http://schemas.openxmlformats.org/officeDocument/2006/relationships" xmlns:p="http://schemas.openxmlformats.org/presentationml/2006/main">
-  <p:cSld name="Slide 5">
-    <p:bg>
-      <p:bgPr>
-        <a:solidFill>
-          <a:srgbClr val="FFFFFF"/>
-        </a:solidFill>
-      </p:bgPr>
-    </p:bg>
-    <p:spTree>
-      <p:nvGrpSpPr>
-        <p:cNvPr id="1" name=""/>
-        <p:cNvGrpSpPr/>
-        <p:nvPr/>
-      </p:nvGrpSpPr>
-      <p:grpSpPr>
-        <a:xfrm>
-          <a:off x="0" y="0"/>
-          <a:ext cx="0" cy="0"/>
-          <a:chOff x="0" y="0"/>
-          <a:chExt cx="0" cy="0"/>
-        </a:xfrm>
-      </p:grpSpPr>
-      <p:sp>
-        <p:nvSpPr>
-          <p:cNvPr id="2" name="Shape 0"/>
-          <p:cNvSpPr/>
-          <p:nvPr/>
-        </p:nvSpPr>
-        <p:spPr>
-          <a:xfrm>
-            <a:off x="0" y="0"/>
-            <a:ext cx="109728" cy="5143500"/>
-          </a:xfrm>
-          <a:prstGeom prst="rect">
-            <a:avLst/>
-          </a:prstGeom>
-          <a:solidFill>
-            <a:srgbClr val="02C39A"/>
           </a:solidFill>
           <a:ln w="12700">
             <a:solidFill>
@@ -3536,158 +5367,87 @@
       </p:sp>
       <p:sp>
         <p:nvSpPr>
-          <p:cNvPr id="3" name="Text 1"/>
-          <p:cNvSpPr/>
-          <p:nvPr/>
-        </p:nvSpPr>
-        <p:spPr>
-          <a:xfrm>
-            <a:off x="457200" y="365760"/>
-            <a:ext cx="5486400" cy="274320"/>
-          </a:xfrm>
-          <a:prstGeom prst="rect">
-            <a:avLst/>
-          </a:prstGeom>
-          <a:noFill/>
-          <a:ln/>
-        </p:spPr>
-        <p:txBody>
-          <a:bodyPr wrap="square" lIns="0" tIns="0" rIns="0" bIns="0" rtlCol="0" anchor="ctr"/>
-          <a:lstStyle/>
-          <a:p>
-            <a:pPr indent="0" marL="0">
-              <a:buNone/>
-            </a:pPr>
-            <a:r>
-              <a:rPr lang="en-US" sz="1100" b="1" spc="400" kern="0" dirty="0">
-                <a:solidFill>
-                  <a:srgbClr val="64748B"/>
-                </a:solidFill>
-                <a:latin typeface="Calibri" pitchFamily="34" charset="0"/>
-                <a:ea typeface="Calibri" pitchFamily="34" charset="-122"/>
-                <a:cs typeface="Calibri" pitchFamily="34" charset="-120"/>
-              </a:rPr>
-              <a:t>04 · The pivot</a:t>
-            </a:r>
+          <p:cNvPr id="8" name="Text 6"/>
+          <p:cNvSpPr/>
+          <p:nvPr/>
+        </p:nvSpPr>
+        <p:spPr>
+          <a:xfrm>
+            <a:off x="685800" y="3611880"/>
+            <a:ext cx="7772400" cy="777240"/>
+          </a:xfrm>
+          <a:prstGeom prst="rect">
+            <a:avLst/>
+          </a:prstGeom>
+          <a:noFill/>
+          <a:ln/>
+        </p:spPr>
+        <p:txBody>
+          <a:bodyPr wrap="square" lIns="0" tIns="0" rIns="0" bIns="0" rtlCol="0" anchor="ctr"/>
+          <a:lstStyle/>
+          <a:p>
+            <a:pPr indent="0" marL="0">
+              <a:buNone/>
+            </a:pPr>
+            <a:r>
+              <a:rPr lang="en-US" sz="1100" b="1" spc="300" kern="0" dirty="0">
+                <a:solidFill>
+                  <a:srgbClr val="02C39A"/>
+                </a:solidFill>
+                <a:latin typeface="Calibri" pitchFamily="34" charset="0"/>
+                <a:ea typeface="Calibri" pitchFamily="34" charset="-122"/>
+                <a:cs typeface="Calibri" pitchFamily="34" charset="-120"/>
+              </a:rPr>
+              <a:t>THE PIVOT  ·  </a:t>
+            </a:r>
+            <a:pPr indent="0" marL="0">
+              <a:buNone/>
+            </a:pPr>
+            <a:r>
+              <a:rPr lang="en-US" sz="1400" b="1" dirty="0">
+                <a:solidFill>
+                  <a:srgbClr val="FFFFFF"/>
+                </a:solidFill>
+                <a:latin typeface="Calibri" pitchFamily="34" charset="0"/>
+                <a:ea typeface="Calibri" pitchFamily="34" charset="-122"/>
+                <a:cs typeface="Calibri" pitchFamily="34" charset="-120"/>
+              </a:rPr>
+              <a:t>MCP Gateway. Govern at the protocol layer — one enforcement point between every agent and every tool.</a:t>
+            </a:r>
+            <a:pPr indent="0" marL="0">
+              <a:buNone/>
+            </a:pPr>
             <a:endParaRPr lang="en-US" sz="1100" dirty="0"/>
           </a:p>
-        </p:txBody>
-      </p:sp>
-      <p:sp>
-        <p:nvSpPr>
-          <p:cNvPr id="4" name="Text 2"/>
-          <p:cNvSpPr/>
-          <p:nvPr/>
-        </p:nvSpPr>
-        <p:spPr>
-          <a:xfrm>
-            <a:off x="457200" y="731520"/>
-            <a:ext cx="8229600" cy="731520"/>
-          </a:xfrm>
-          <a:prstGeom prst="rect">
-            <a:avLst/>
-          </a:prstGeom>
-          <a:noFill/>
-          <a:ln/>
-        </p:spPr>
-        <p:txBody>
-          <a:bodyPr wrap="square" lIns="0" tIns="0" rIns="0" bIns="0" rtlCol="0" anchor="ctr"/>
-          <a:lstStyle/>
-          <a:p>
-            <a:pPr indent="0" marL="0">
-              <a:buNone/>
-            </a:pPr>
-            <a:r>
-              <a:rPr lang="en-US" sz="3400" b="1" dirty="0">
-                <a:solidFill>
-                  <a:srgbClr val="1A1F36"/>
-                </a:solidFill>
-                <a:latin typeface="Georgia" pitchFamily="34" charset="0"/>
-                <a:ea typeface="Georgia" pitchFamily="34" charset="-122"/>
-                <a:cs typeface="Georgia" pitchFamily="34" charset="-120"/>
-              </a:rPr>
-              <a:t>Govern agents at the protocol layer.</a:t>
-            </a:r>
-            <a:endParaRPr lang="en-US" sz="3400" dirty="0"/>
-          </a:p>
-        </p:txBody>
-      </p:sp>
-      <p:sp>
-        <p:nvSpPr>
-          <p:cNvPr id="5" name="Text 3"/>
-          <p:cNvSpPr/>
-          <p:nvPr/>
-        </p:nvSpPr>
-        <p:spPr>
-          <a:xfrm>
-            <a:off x="457200" y="1508760"/>
-            <a:ext cx="8229600" cy="502920"/>
-          </a:xfrm>
-          <a:prstGeom prst="rect">
-            <a:avLst/>
-          </a:prstGeom>
-          <a:noFill/>
-          <a:ln/>
-        </p:spPr>
-        <p:txBody>
-          <a:bodyPr wrap="square" lIns="0" tIns="0" rIns="0" bIns="0" rtlCol="0" anchor="ctr"/>
-          <a:lstStyle/>
-          <a:p>
-            <a:pPr indent="0" marL="0">
-              <a:buNone/>
-            </a:pPr>
-            <a:r>
-              <a:rPr lang="en-US" sz="1400" i="1" dirty="0">
-                <a:solidFill>
-                  <a:srgbClr val="64748B"/>
-                </a:solidFill>
-                <a:latin typeface="Calibri" pitchFamily="34" charset="0"/>
-                <a:ea typeface="Calibri" pitchFamily="34" charset="-122"/>
-                <a:cs typeface="Calibri" pitchFamily="34" charset="-120"/>
-              </a:rPr>
-              <a:t>The MCP Gateway sits between agents and everything they reach — apps, tools, resources. One enforcement point. Every call, policy-checked.</a:t>
-            </a:r>
-            <a:endParaRPr lang="en-US" sz="1400" dirty="0"/>
-          </a:p>
-        </p:txBody>
-      </p:sp>
-      <p:sp>
-        <p:nvSpPr>
-          <p:cNvPr id="6" name="Shape 4"/>
-          <p:cNvSpPr/>
-          <p:nvPr/>
-        </p:nvSpPr>
-        <p:spPr>
-          <a:xfrm>
-            <a:off x="548640" y="2377440"/>
-            <a:ext cx="1828800" cy="1188720"/>
-          </a:xfrm>
-          <a:prstGeom prst="roundRect">
-            <a:avLst>
-              <a:gd name="adj" fmla="val 7692"/>
-            </a:avLst>
-          </a:prstGeom>
-          <a:solidFill>
-            <a:srgbClr val="E8EEFC"/>
-          </a:solidFill>
-          <a:ln w="19050">
-            <a:solidFill>
-              <a:srgbClr val="0F1B3D"/>
-            </a:solidFill>
-            <a:prstDash val="solid"/>
-          </a:ln>
-        </p:spPr>
-      </p:sp>
-      <p:sp>
-        <p:nvSpPr>
-          <p:cNvPr id="7" name="Text 5"/>
-          <p:cNvSpPr/>
-          <p:nvPr/>
-        </p:nvSpPr>
-        <p:spPr>
-          <a:xfrm>
-            <a:off x="548640" y="2514600"/>
-            <a:ext cx="1828800" cy="320040"/>
+          <a:p>
+            <a:pPr indent="0" marL="0">
+              <a:buNone/>
+            </a:pPr>
+            <a:r>
+              <a:rPr lang="en-US" sz="1200" i="1" dirty="0">
+                <a:solidFill>
+                  <a:srgbClr val="E8EEFC"/>
+                </a:solidFill>
+                <a:latin typeface="Calibri" pitchFamily="34" charset="0"/>
+                <a:ea typeface="Calibri" pitchFamily="34" charset="-122"/>
+                <a:cs typeface="Calibri" pitchFamily="34" charset="-120"/>
+              </a:rPr>
+              <a:t>Sarit + Amir Ben Ami leading architecture. Cycle 79 AI priority.</a:t>
+            </a:r>
+            <a:endParaRPr lang="en-US" sz="1100" dirty="0"/>
+          </a:p>
+        </p:txBody>
+      </p:sp>
+      <p:sp>
+        <p:nvSpPr>
+          <p:cNvPr id="9" name="Text 7"/>
+          <p:cNvSpPr/>
+          <p:nvPr/>
+        </p:nvSpPr>
+        <p:spPr>
+          <a:xfrm>
+            <a:off x="457200" y="4526280"/>
+            <a:ext cx="8229600" cy="365760"/>
           </a:xfrm>
           <a:prstGeom prst="rect">
             <a:avLst/>
@@ -3703,231 +5463,7 @@
               <a:buNone/>
             </a:pPr>
             <a:r>
-              <a:rPr lang="en-US" sz="1100" b="1" spc="300" kern="0" dirty="0">
-                <a:solidFill>
-                  <a:srgbClr val="64748B"/>
-                </a:solidFill>
-                <a:latin typeface="Calibri" pitchFamily="34" charset="0"/>
-                <a:ea typeface="Calibri" pitchFamily="34" charset="-122"/>
-                <a:cs typeface="Calibri" pitchFamily="34" charset="-120"/>
-              </a:rPr>
-              <a:t>AGENT</a:t>
-            </a:r>
-            <a:endParaRPr lang="en-US" sz="1100" dirty="0"/>
-          </a:p>
-        </p:txBody>
-      </p:sp>
-      <p:sp>
-        <p:nvSpPr>
-          <p:cNvPr id="8" name="Text 6"/>
-          <p:cNvSpPr/>
-          <p:nvPr/>
-        </p:nvSpPr>
-        <p:spPr>
-          <a:xfrm>
-            <a:off x="548640" y="2834640"/>
-            <a:ext cx="1828800" cy="685800"/>
-          </a:xfrm>
-          <a:prstGeom prst="rect">
-            <a:avLst/>
-          </a:prstGeom>
-          <a:noFill/>
-          <a:ln/>
-        </p:spPr>
-        <p:txBody>
-          <a:bodyPr wrap="square" lIns="0" tIns="0" rIns="0" bIns="0" rtlCol="0" anchor="ctr"/>
-          <a:lstStyle/>
-          <a:p>
-            <a:pPr algn="ctr" indent="0" marL="0">
-              <a:buNone/>
-            </a:pPr>
-            <a:r>
-              <a:rPr lang="en-US" sz="1200" b="1" dirty="0">
-                <a:solidFill>
-                  <a:srgbClr val="0F1B3D"/>
-                </a:solidFill>
-                <a:latin typeface="Calibri" pitchFamily="34" charset="0"/>
-                <a:ea typeface="Calibri" pitchFamily="34" charset="-122"/>
-                <a:cs typeface="Calibri" pitchFamily="34" charset="-120"/>
-              </a:rPr>
-              <a:t>ChatGPT · Claude</a:t>
-            </a:r>
-            <a:endParaRPr lang="en-US" sz="1200" dirty="0"/>
-          </a:p>
-          <a:p>
-            <a:pPr algn="ctr" indent="0" marL="0">
-              <a:buNone/>
-            </a:pPr>
-            <a:r>
-              <a:rPr lang="en-US" sz="1200" b="1" dirty="0">
-                <a:solidFill>
-                  <a:srgbClr val="0F1B3D"/>
-                </a:solidFill>
-                <a:latin typeface="Calibri" pitchFamily="34" charset="0"/>
-                <a:ea typeface="Calibri" pitchFamily="34" charset="-122"/>
-                <a:cs typeface="Calibri" pitchFamily="34" charset="-120"/>
-              </a:rPr>
-              <a:t>Cursor · n8n · Copilot</a:t>
-            </a:r>
-            <a:endParaRPr lang="en-US" sz="1200" dirty="0"/>
-          </a:p>
-        </p:txBody>
-      </p:sp>
-      <p:sp>
-        <p:nvSpPr>
-          <p:cNvPr id="9" name="Shape 7"/>
-          <p:cNvSpPr/>
-          <p:nvPr/>
-        </p:nvSpPr>
-        <p:spPr>
-          <a:xfrm>
-            <a:off x="2423160" y="2971800"/>
-            <a:ext cx="685800" cy="0"/>
-          </a:xfrm>
-          <a:prstGeom prst="line">
-            <a:avLst/>
-          </a:prstGeom>
-          <a:noFill/>
-          <a:ln w="25400">
-            <a:solidFill>
-              <a:srgbClr val="0F1B3D"/>
-            </a:solidFill>
-            <a:prstDash val="solid"/>
-            <a:tailEnd type="triangle"/>
-          </a:ln>
-        </p:spPr>
-      </p:sp>
-      <p:sp>
-        <p:nvSpPr>
-          <p:cNvPr id="10" name="Shape 8"/>
-          <p:cNvSpPr/>
-          <p:nvPr/>
-        </p:nvSpPr>
-        <p:spPr>
-          <a:xfrm>
-            <a:off x="3200400" y="2286000"/>
-            <a:ext cx="2743200" cy="1371600"/>
-          </a:xfrm>
-          <a:prstGeom prst="roundRect">
-            <a:avLst>
-              <a:gd name="adj" fmla="val 6667"/>
-            </a:avLst>
-          </a:prstGeom>
-          <a:solidFill>
-            <a:srgbClr val="0F1B3D"/>
-          </a:solidFill>
-          <a:ln w="38100">
-            <a:solidFill>
-              <a:srgbClr val="02C39A"/>
-            </a:solidFill>
-            <a:prstDash val="solid"/>
-          </a:ln>
-        </p:spPr>
-      </p:sp>
-      <p:sp>
-        <p:nvSpPr>
-          <p:cNvPr id="11" name="Text 9"/>
-          <p:cNvSpPr/>
-          <p:nvPr/>
-        </p:nvSpPr>
-        <p:spPr>
-          <a:xfrm>
-            <a:off x="3200400" y="2423160"/>
-            <a:ext cx="2743200" cy="365760"/>
-          </a:xfrm>
-          <a:prstGeom prst="rect">
-            <a:avLst/>
-          </a:prstGeom>
-          <a:noFill/>
-          <a:ln/>
-        </p:spPr>
-        <p:txBody>
-          <a:bodyPr wrap="square" lIns="0" tIns="0" rIns="0" bIns="0" rtlCol="0" anchor="ctr"/>
-          <a:lstStyle/>
-          <a:p>
-            <a:pPr algn="ctr" indent="0" marL="0">
-              <a:buNone/>
-            </a:pPr>
-            <a:r>
-              <a:rPr lang="en-US" sz="1300" b="1" spc="400" kern="0" dirty="0">
-                <a:solidFill>
-                  <a:srgbClr val="02C39A"/>
-                </a:solidFill>
-                <a:latin typeface="Calibri" pitchFamily="34" charset="0"/>
-                <a:ea typeface="Calibri" pitchFamily="34" charset="-122"/>
-                <a:cs typeface="Calibri" pitchFamily="34" charset="-120"/>
-              </a:rPr>
-              <a:t>MCP GATEWAY</a:t>
-            </a:r>
-            <a:endParaRPr lang="en-US" sz="1300" dirty="0"/>
-          </a:p>
-        </p:txBody>
-      </p:sp>
-      <p:sp>
-        <p:nvSpPr>
-          <p:cNvPr id="12" name="Text 10"/>
-          <p:cNvSpPr/>
-          <p:nvPr/>
-        </p:nvSpPr>
-        <p:spPr>
-          <a:xfrm>
-            <a:off x="3200400" y="2834640"/>
-            <a:ext cx="2743200" cy="274320"/>
-          </a:xfrm>
-          <a:prstGeom prst="rect">
-            <a:avLst/>
-          </a:prstGeom>
-          <a:noFill/>
-          <a:ln/>
-        </p:spPr>
-        <p:txBody>
-          <a:bodyPr wrap="square" lIns="0" tIns="0" rIns="0" bIns="0" rtlCol="0" anchor="ctr"/>
-          <a:lstStyle/>
-          <a:p>
-            <a:pPr algn="ctr" indent="0" marL="0">
-              <a:buNone/>
-            </a:pPr>
-            <a:r>
-              <a:rPr lang="en-US" sz="1300" i="1" dirty="0">
-                <a:solidFill>
-                  <a:srgbClr val="FFFFFF"/>
-                </a:solidFill>
-                <a:latin typeface="Calibri" pitchFamily="34" charset="0"/>
-                <a:ea typeface="Calibri" pitchFamily="34" charset="-122"/>
-                <a:cs typeface="Calibri" pitchFamily="34" charset="-120"/>
-              </a:rPr>
-              <a:t>identity · policy · audit</a:t>
-            </a:r>
-            <a:endParaRPr lang="en-US" sz="1300" dirty="0"/>
-          </a:p>
-        </p:txBody>
-      </p:sp>
-      <p:sp>
-        <p:nvSpPr>
-          <p:cNvPr id="13" name="Text 11"/>
-          <p:cNvSpPr/>
-          <p:nvPr/>
-        </p:nvSpPr>
-        <p:spPr>
-          <a:xfrm>
-            <a:off x="3200400" y="3200400"/>
-            <a:ext cx="2743200" cy="274320"/>
-          </a:xfrm>
-          <a:prstGeom prst="rect">
-            <a:avLst/>
-          </a:prstGeom>
-          <a:noFill/>
-          <a:ln/>
-        </p:spPr>
-        <p:txBody>
-          <a:bodyPr wrap="square" lIns="0" tIns="0" rIns="0" bIns="0" rtlCol="0" anchor="ctr"/>
-          <a:lstStyle/>
-          <a:p>
-            <a:pPr algn="ctr" indent="0" marL="0">
-              <a:buNone/>
-            </a:pPr>
-            <a:r>
-              <a:rPr lang="en-US" sz="1000" dirty="0">
+              <a:rPr lang="en-US" sz="1000" i="1" dirty="0">
                 <a:solidFill>
                   <a:srgbClr val="E8EEFC"/>
                 </a:solidFill>
@@ -3935,7 +5471,7 @@
                 <a:ea typeface="Calibri" pitchFamily="34" charset="-122"/>
                 <a:cs typeface="Calibri" pitchFamily="34" charset="-120"/>
               </a:rPr>
-              <a:t>one enforcement point</a:t>
+              <a:t>Market tailwind: Saviynt, Token Security, Astrix all converging on MCP-layer governance. We're aligned with where the category is going.</a:t>
             </a:r>
             <a:endParaRPr lang="en-US" sz="1000" dirty="0"/>
           </a:p>
@@ -3943,248 +5479,7 @@
       </p:sp>
       <p:sp>
         <p:nvSpPr>
-          <p:cNvPr id="14" name="Shape 12"/>
-          <p:cNvSpPr/>
-          <p:nvPr/>
-        </p:nvSpPr>
-        <p:spPr>
-          <a:xfrm>
-            <a:off x="5989320" y="2971800"/>
-            <a:ext cx="685800" cy="0"/>
-          </a:xfrm>
-          <a:prstGeom prst="line">
-            <a:avLst/>
-          </a:prstGeom>
-          <a:noFill/>
-          <a:ln w="25400">
-            <a:solidFill>
-              <a:srgbClr val="0F1B3D"/>
-            </a:solidFill>
-            <a:prstDash val="solid"/>
-            <a:tailEnd type="triangle"/>
-          </a:ln>
-        </p:spPr>
-      </p:sp>
-      <p:sp>
-        <p:nvSpPr>
-          <p:cNvPr id="15" name="Shape 13"/>
-          <p:cNvSpPr/>
-          <p:nvPr/>
-        </p:nvSpPr>
-        <p:spPr>
-          <a:xfrm>
-            <a:off x="6766560" y="2377440"/>
-            <a:ext cx="1828800" cy="1188720"/>
-          </a:xfrm>
-          <a:prstGeom prst="roundRect">
-            <a:avLst>
-              <a:gd name="adj" fmla="val 7692"/>
-            </a:avLst>
-          </a:prstGeom>
-          <a:solidFill>
-            <a:srgbClr val="E8EEFC"/>
-          </a:solidFill>
-          <a:ln w="19050">
-            <a:solidFill>
-              <a:srgbClr val="0F1B3D"/>
-            </a:solidFill>
-            <a:prstDash val="solid"/>
-          </a:ln>
-        </p:spPr>
-      </p:sp>
-      <p:sp>
-        <p:nvSpPr>
-          <p:cNvPr id="16" name="Text 14"/>
-          <p:cNvSpPr/>
-          <p:nvPr/>
-        </p:nvSpPr>
-        <p:spPr>
-          <a:xfrm>
-            <a:off x="6766560" y="2514600"/>
-            <a:ext cx="1828800" cy="320040"/>
-          </a:xfrm>
-          <a:prstGeom prst="rect">
-            <a:avLst/>
-          </a:prstGeom>
-          <a:noFill/>
-          <a:ln/>
-        </p:spPr>
-        <p:txBody>
-          <a:bodyPr wrap="square" lIns="0" tIns="0" rIns="0" bIns="0" rtlCol="0" anchor="ctr"/>
-          <a:lstStyle/>
-          <a:p>
-            <a:pPr algn="ctr" indent="0" marL="0">
-              <a:buNone/>
-            </a:pPr>
-            <a:r>
-              <a:rPr lang="en-US" sz="1000" b="1" spc="200" kern="0" dirty="0">
-                <a:solidFill>
-                  <a:srgbClr val="64748B"/>
-                </a:solidFill>
-                <a:latin typeface="Calibri" pitchFamily="34" charset="0"/>
-                <a:ea typeface="Calibri" pitchFamily="34" charset="-122"/>
-                <a:cs typeface="Calibri" pitchFamily="34" charset="-120"/>
-              </a:rPr>
-              <a:t>APPS · TOOLS · DATA</a:t>
-            </a:r>
-            <a:endParaRPr lang="en-US" sz="1000" dirty="0"/>
-          </a:p>
-        </p:txBody>
-      </p:sp>
-      <p:sp>
-        <p:nvSpPr>
-          <p:cNvPr id="17" name="Text 15"/>
-          <p:cNvSpPr/>
-          <p:nvPr/>
-        </p:nvSpPr>
-        <p:spPr>
-          <a:xfrm>
-            <a:off x="6766560" y="2834640"/>
-            <a:ext cx="1828800" cy="685800"/>
-          </a:xfrm>
-          <a:prstGeom prst="rect">
-            <a:avLst/>
-          </a:prstGeom>
-          <a:noFill/>
-          <a:ln/>
-        </p:spPr>
-        <p:txBody>
-          <a:bodyPr wrap="square" lIns="0" tIns="0" rIns="0" bIns="0" rtlCol="0" anchor="ctr"/>
-          <a:lstStyle/>
-          <a:p>
-            <a:pPr algn="ctr" indent="0" marL="0">
-              <a:buNone/>
-            </a:pPr>
-            <a:r>
-              <a:rPr lang="en-US" sz="1200" b="1" dirty="0">
-                <a:solidFill>
-                  <a:srgbClr val="0F1B3D"/>
-                </a:solidFill>
-                <a:latin typeface="Calibri" pitchFamily="34" charset="0"/>
-                <a:ea typeface="Calibri" pitchFamily="34" charset="-122"/>
-                <a:cs typeface="Calibri" pitchFamily="34" charset="-120"/>
-              </a:rPr>
-              <a:t>Slack · Notion</a:t>
-            </a:r>
-            <a:endParaRPr lang="en-US" sz="1200" dirty="0"/>
-          </a:p>
-          <a:p>
-            <a:pPr algn="ctr" indent="0" marL="0">
-              <a:buNone/>
-            </a:pPr>
-            <a:r>
-              <a:rPr lang="en-US" sz="1200" b="1" dirty="0">
-                <a:solidFill>
-                  <a:srgbClr val="0F1B3D"/>
-                </a:solidFill>
-                <a:latin typeface="Calibri" pitchFamily="34" charset="0"/>
-                <a:ea typeface="Calibri" pitchFamily="34" charset="-122"/>
-                <a:cs typeface="Calibri" pitchFamily="34" charset="-120"/>
-              </a:rPr>
-              <a:t>Postgres · Linear</a:t>
-            </a:r>
-            <a:endParaRPr lang="en-US" sz="1200" dirty="0"/>
-          </a:p>
-          <a:p>
-            <a:pPr algn="ctr" indent="0" marL="0">
-              <a:buNone/>
-            </a:pPr>
-            <a:r>
-              <a:rPr lang="en-US" sz="1200" b="1" dirty="0">
-                <a:solidFill>
-                  <a:srgbClr val="0F1B3D"/>
-                </a:solidFill>
-                <a:latin typeface="Calibri" pitchFamily="34" charset="0"/>
-                <a:ea typeface="Calibri" pitchFamily="34" charset="-122"/>
-                <a:cs typeface="Calibri" pitchFamily="34" charset="-120"/>
-              </a:rPr>
-              <a:t>GitHub · ...</a:t>
-            </a:r>
-            <a:endParaRPr lang="en-US" sz="1200" dirty="0"/>
-          </a:p>
-        </p:txBody>
-      </p:sp>
-      <p:sp>
-        <p:nvSpPr>
-          <p:cNvPr id="18" name="Shape 16"/>
-          <p:cNvSpPr/>
-          <p:nvPr/>
-        </p:nvSpPr>
-        <p:spPr>
-          <a:xfrm>
-            <a:off x="457200" y="4160520"/>
-            <a:ext cx="8229600" cy="548640"/>
-          </a:xfrm>
-          <a:prstGeom prst="rect">
-            <a:avLst/>
-          </a:prstGeom>
-          <a:solidFill>
-            <a:srgbClr val="E8EEFC"/>
-          </a:solidFill>
-          <a:ln w="12700">
-            <a:solidFill>
-              <a:srgbClr val="E8EEFC"/>
-            </a:solidFill>
-            <a:prstDash val="solid"/>
-          </a:ln>
-        </p:spPr>
-      </p:sp>
-      <p:sp>
-        <p:nvSpPr>
-          <p:cNvPr id="19" name="Text 17"/>
-          <p:cNvSpPr/>
-          <p:nvPr/>
-        </p:nvSpPr>
-        <p:spPr>
-          <a:xfrm>
-            <a:off x="685800" y="4160520"/>
-            <a:ext cx="7772400" cy="548640"/>
-          </a:xfrm>
-          <a:prstGeom prst="rect">
-            <a:avLst/>
-          </a:prstGeom>
-          <a:noFill/>
-          <a:ln/>
-        </p:spPr>
-        <p:txBody>
-          <a:bodyPr wrap="square" lIns="0" tIns="0" rIns="0" bIns="0" rtlCol="0" anchor="ctr"/>
-          <a:lstStyle/>
-          <a:p>
-            <a:pPr indent="0" marL="0">
-              <a:buNone/>
-            </a:pPr>
-            <a:r>
-              <a:rPr lang="en-US" sz="1000" b="1" spc="300" kern="0" dirty="0">
-                <a:solidFill>
-                  <a:srgbClr val="0F1B3D"/>
-                </a:solidFill>
-                <a:latin typeface="Calibri" pitchFamily="34" charset="0"/>
-                <a:ea typeface="Calibri" pitchFamily="34" charset="-122"/>
-                <a:cs typeface="Calibri" pitchFamily="34" charset="-120"/>
-              </a:rPr>
-              <a:t>MARKET CONVERGENCE  ·  </a:t>
-            </a:r>
-            <a:pPr indent="0" marL="0">
-              <a:buNone/>
-            </a:pPr>
-            <a:r>
-              <a:rPr lang="en-US" sz="1100" i="1" dirty="0">
-                <a:solidFill>
-                  <a:srgbClr val="1A1F36"/>
-                </a:solidFill>
-                <a:latin typeface="Calibri" pitchFamily="34" charset="0"/>
-                <a:ea typeface="Calibri" pitchFamily="34" charset="-122"/>
-                <a:cs typeface="Calibri" pitchFamily="34" charset="-120"/>
-              </a:rPr>
-              <a:t>Saviynt, Token Security, Astrix all moving toward MCP-layer governance. We're aligned to where the category is going.</a:t>
-            </a:r>
-            <a:endParaRPr lang="en-US" sz="1000" dirty="0"/>
-          </a:p>
-        </p:txBody>
-      </p:sp>
-      <p:sp>
-        <p:nvSpPr>
-          <p:cNvPr id="20" name="Text 18"/>
+          <p:cNvPr id="10" name="Text 8"/>
           <p:cNvSpPr/>
           <p:nvPr/>
         </p:nvSpPr>
@@ -4209,13 +5504,13 @@
             <a:r>
               <a:rPr lang="en-US" sz="900" dirty="0">
                 <a:solidFill>
-                  <a:srgbClr val="64748B"/>
-                </a:solidFill>
-                <a:latin typeface="Calibri" pitchFamily="34" charset="0"/>
-                <a:ea typeface="Calibri" pitchFamily="34" charset="-122"/>
-                <a:cs typeface="Calibri" pitchFamily="34" charset="-120"/>
-              </a:rPr>
-              <a:t>5 / 9</a:t>
+                  <a:srgbClr val="E8EEFC"/>
+                </a:solidFill>
+                <a:latin typeface="Calibri" pitchFamily="34" charset="0"/>
+                <a:ea typeface="Calibri" pitchFamily="34" charset="-122"/>
+                <a:cs typeface="Calibri" pitchFamily="34" charset="-120"/>
+              </a:rPr>
+              <a:t>5 / 8</a:t>
             </a:r>
             <a:endParaRPr lang="en-US" sz="900" dirty="0"/>
           </a:p>
@@ -4287,7 +5582,7 @@
         <p:spPr>
           <a:xfrm>
             <a:off x="457200" y="365760"/>
-            <a:ext cx="5486400" cy="274320"/>
+            <a:ext cx="7315200" cy="274320"/>
           </a:xfrm>
           <a:prstGeom prst="rect">
             <a:avLst/>
@@ -4311,7 +5606,7 @@
                 <a:ea typeface="Calibri" pitchFamily="34" charset="-122"/>
                 <a:cs typeface="Calibri" pitchFamily="34" charset="-120"/>
               </a:rPr>
-              <a:t>05 · P0 scope</a:t>
+              <a:t>05 · P0 scope — the demo target</a:t>
             </a:r>
             <a:endParaRPr lang="en-US" sz="1100" dirty="0"/>
           </a:p>
@@ -4326,7 +5621,7 @@
         <p:spPr>
           <a:xfrm>
             <a:off x="457200" y="731520"/>
-            <a:ext cx="8229600" cy="731520"/>
+            <a:ext cx="8229600" cy="777240"/>
           </a:xfrm>
           <a:prstGeom prst="rect">
             <a:avLst/>
@@ -4364,7 +5659,7 @@
         </p:nvSpPr>
         <p:spPr>
           <a:xfrm>
-            <a:off x="457200" y="1508760"/>
+            <a:off x="457200" y="1554480"/>
             <a:ext cx="8229600" cy="365760"/>
           </a:xfrm>
           <a:prstGeom prst="rect">
@@ -4381,7 +5676,7 @@
               <a:buNone/>
             </a:pPr>
             <a:r>
-              <a:rPr lang="en-US" sz="1300" i="1" dirty="0">
+              <a:rPr lang="en-US" sz="1200" i="1" dirty="0">
                 <a:solidFill>
                   <a:srgbClr val="64748B"/>
                 </a:solidFill>
@@ -4389,9 +5684,9 @@
                 <a:ea typeface="Calibri" pitchFamily="34" charset="-122"/>
                 <a:cs typeface="Calibri" pitchFamily="34" charset="-120"/>
               </a:rPr>
-              <a:t>From Sarit's architecture session — the minimum surface to demo at Identiverse.</a:t>
-            </a:r>
-            <a:endParaRPr lang="en-US" sz="1300" dirty="0"/>
+              <a:t>From Sarit's architecture session. Some pieces may already exist in M1/M2 — we'll connect the dots.</a:t>
+            </a:r>
+            <a:endParaRPr lang="en-US" sz="1200" dirty="0"/>
           </a:p>
         </p:txBody>
       </p:sp>
@@ -4404,7 +5699,7 @@
         <p:spPr>
           <a:xfrm>
             <a:off x="365760" y="2011680"/>
-            <a:ext cx="2743200" cy="2377440"/>
+            <a:ext cx="2743200" cy="2468880"/>
           </a:xfrm>
           <a:prstGeom prst="rect">
             <a:avLst/>
@@ -4453,8 +5748,8 @@
         </p:nvSpPr>
         <p:spPr>
           <a:xfrm>
-            <a:off x="640080" y="2240280"/>
-            <a:ext cx="914400" cy="365760"/>
+            <a:off x="640080" y="2194560"/>
+            <a:ext cx="914400" cy="320040"/>
           </a:xfrm>
           <a:prstGeom prst="rect">
             <a:avLst/>
@@ -4492,7 +5787,7 @@
         </p:nvSpPr>
         <p:spPr>
           <a:xfrm>
-            <a:off x="640080" y="2560320"/>
+            <a:off x="640080" y="2514600"/>
             <a:ext cx="2194560" cy="457200"/>
           </a:xfrm>
           <a:prstGeom prst="rect">
@@ -4531,8 +5826,8 @@
         </p:nvSpPr>
         <p:spPr>
           <a:xfrm>
-            <a:off x="640080" y="3063240"/>
-            <a:ext cx="2194560" cy="1188720"/>
+            <a:off x="640080" y="2971800"/>
+            <a:ext cx="2194560" cy="1371600"/>
           </a:xfrm>
           <a:prstGeom prst="rect">
             <a:avLst/>
@@ -4567,14 +5862,53 @@
       </p:sp>
       <p:sp>
         <p:nvSpPr>
-          <p:cNvPr id="11" name="Shape 9"/>
+          <p:cNvPr id="11" name="Text 9"/>
+          <p:cNvSpPr/>
+          <p:nvPr/>
+        </p:nvSpPr>
+        <p:spPr>
+          <a:xfrm>
+            <a:off x="640080" y="4160520"/>
+            <a:ext cx="2194560" cy="274320"/>
+          </a:xfrm>
+          <a:prstGeom prst="rect">
+            <a:avLst/>
+          </a:prstGeom>
+          <a:noFill/>
+          <a:ln/>
+        </p:spPr>
+        <p:txBody>
+          <a:bodyPr wrap="square" lIns="0" tIns="0" rIns="0" bIns="0" rtlCol="0" anchor="ctr"/>
+          <a:lstStyle/>
+          <a:p>
+            <a:pPr indent="0" marL="0">
+              <a:buNone/>
+            </a:pPr>
+            <a:r>
+              <a:rPr lang="en-US" sz="1000" b="1" i="1" dirty="0">
+                <a:solidFill>
+                  <a:srgbClr val="02C39A"/>
+                </a:solidFill>
+                <a:latin typeface="Calibri" pitchFamily="34" charset="0"/>
+                <a:ea typeface="Calibri" pitchFamily="34" charset="-122"/>
+                <a:cs typeface="Calibri" pitchFamily="34" charset="-120"/>
+              </a:rPr>
+              <a:t>Eng research starts here.</a:t>
+            </a:r>
+            <a:endParaRPr lang="en-US" sz="1000" dirty="0"/>
+          </a:p>
+        </p:txBody>
+      </p:sp>
+      <p:sp>
+        <p:nvSpPr>
+          <p:cNvPr id="12" name="Shape 10"/>
           <p:cNvSpPr/>
           <p:nvPr/>
         </p:nvSpPr>
         <p:spPr>
           <a:xfrm>
             <a:off x="3200400" y="2011680"/>
-            <a:ext cx="2743200" cy="2377440"/>
+            <a:ext cx="2743200" cy="2468880"/>
           </a:xfrm>
           <a:prstGeom prst="rect">
             <a:avLst/>
@@ -4592,7 +5926,7 @@
       </p:sp>
       <p:sp>
         <p:nvSpPr>
-          <p:cNvPr id="12" name="Shape 10"/>
+          <p:cNvPr id="13" name="Shape 11"/>
           <p:cNvSpPr/>
           <p:nvPr/>
         </p:nvSpPr>
@@ -4617,14 +5951,14 @@
       </p:sp>
       <p:sp>
         <p:nvSpPr>
-          <p:cNvPr id="13" name="Text 11"/>
-          <p:cNvSpPr/>
-          <p:nvPr/>
-        </p:nvSpPr>
-        <p:spPr>
-          <a:xfrm>
-            <a:off x="3474720" y="2240280"/>
-            <a:ext cx="914400" cy="365760"/>
+          <p:cNvPr id="14" name="Text 12"/>
+          <p:cNvSpPr/>
+          <p:nvPr/>
+        </p:nvSpPr>
+        <p:spPr>
+          <a:xfrm>
+            <a:off x="3474720" y="2194560"/>
+            <a:ext cx="914400" cy="320040"/>
           </a:xfrm>
           <a:prstGeom prst="rect">
             <a:avLst/>
@@ -4656,13 +5990,13 @@
       </p:sp>
       <p:sp>
         <p:nvSpPr>
-          <p:cNvPr id="14" name="Text 12"/>
-          <p:cNvSpPr/>
-          <p:nvPr/>
-        </p:nvSpPr>
-        <p:spPr>
-          <a:xfrm>
-            <a:off x="3474720" y="2560320"/>
+          <p:cNvPr id="15" name="Text 13"/>
+          <p:cNvSpPr/>
+          <p:nvPr/>
+        </p:nvSpPr>
+        <p:spPr>
+          <a:xfrm>
+            <a:off x="3474720" y="2514600"/>
             <a:ext cx="2194560" cy="457200"/>
           </a:xfrm>
           <a:prstGeom prst="rect">
@@ -4695,14 +6029,14 @@
       </p:sp>
       <p:sp>
         <p:nvSpPr>
-          <p:cNvPr id="15" name="Text 13"/>
-          <p:cNvSpPr/>
-          <p:nvPr/>
-        </p:nvSpPr>
-        <p:spPr>
-          <a:xfrm>
-            <a:off x="3474720" y="3063240"/>
-            <a:ext cx="2194560" cy="1188720"/>
+          <p:cNvPr id="16" name="Text 14"/>
+          <p:cNvSpPr/>
+          <p:nvPr/>
+        </p:nvSpPr>
+        <p:spPr>
+          <a:xfrm>
+            <a:off x="3474720" y="2971800"/>
+            <a:ext cx="2194560" cy="1371600"/>
           </a:xfrm>
           <a:prstGeom prst="rect">
             <a:avLst/>
@@ -4729,22 +6063,100 @@
                 <a:ea typeface="Calibri" pitchFamily="34" charset="-122"/>
                 <a:cs typeface="Calibri" pitchFamily="34" charset="-120"/>
               </a:rPr>
-              <a:t>Access profiles for agents — at MCP/platform level AND at the individual tool level inside each platform. Granular, not binary.</a:t>
+              <a:t>Access profiles for agents.</a:t>
             </a:r>
             <a:endParaRPr lang="en-US" sz="1100" dirty="0"/>
           </a:p>
-        </p:txBody>
-      </p:sp>
-      <p:sp>
-        <p:nvSpPr>
-          <p:cNvPr id="16" name="Shape 14"/>
+          <a:p>
+            <a:pPr indent="0" marL="0">
+              <a:spcAft>
+                <a:spcPts val="300"/>
+              </a:spcAft>
+              <a:buNone/>
+            </a:pPr>
+            <a:endParaRPr lang="en-US" sz="1100" dirty="0"/>
+          </a:p>
+          <a:p>
+            <a:pPr indent="0" marL="0">
+              <a:spcAft>
+                <a:spcPts val="300"/>
+              </a:spcAft>
+              <a:buNone/>
+            </a:pPr>
+            <a:r>
+              <a:rPr lang="en-US" sz="1100" dirty="0">
+                <a:solidFill>
+                  <a:srgbClr val="1A1F36"/>
+                </a:solidFill>
+                <a:latin typeface="Calibri" pitchFamily="34" charset="0"/>
+                <a:ea typeface="Calibri" pitchFamily="34" charset="-122"/>
+                <a:cs typeface="Calibri" pitchFamily="34" charset="-120"/>
+              </a:rPr>
+              <a:t>• At the MCP / platform level</a:t>
+            </a:r>
+            <a:endParaRPr lang="en-US" sz="1100" dirty="0"/>
+          </a:p>
+          <a:p>
+            <a:pPr indent="0" marL="0">
+              <a:spcAft>
+                <a:spcPts val="300"/>
+              </a:spcAft>
+              <a:buNone/>
+            </a:pPr>
+            <a:r>
+              <a:rPr lang="en-US" sz="1100" dirty="0">
+                <a:solidFill>
+                  <a:srgbClr val="1A1F36"/>
+                </a:solidFill>
+                <a:latin typeface="Calibri" pitchFamily="34" charset="0"/>
+                <a:ea typeface="Calibri" pitchFamily="34" charset="-122"/>
+                <a:cs typeface="Calibri" pitchFamily="34" charset="-120"/>
+              </a:rPr>
+              <a:t>• AND at the individual tool level</a:t>
+            </a:r>
+            <a:endParaRPr lang="en-US" sz="1100" dirty="0"/>
+          </a:p>
+          <a:p>
+            <a:pPr indent="0" marL="0">
+              <a:spcAft>
+                <a:spcPts val="300"/>
+              </a:spcAft>
+              <a:buNone/>
+            </a:pPr>
+            <a:endParaRPr lang="en-US" sz="1100" dirty="0"/>
+          </a:p>
+          <a:p>
+            <a:pPr indent="0" marL="0">
+              <a:spcAft>
+                <a:spcPts val="300"/>
+              </a:spcAft>
+              <a:buNone/>
+            </a:pPr>
+            <a:r>
+              <a:rPr lang="en-US" sz="1100" dirty="0">
+                <a:solidFill>
+                  <a:srgbClr val="1A1F36"/>
+                </a:solidFill>
+                <a:latin typeface="Calibri" pitchFamily="34" charset="0"/>
+                <a:ea typeface="Calibri" pitchFamily="34" charset="-122"/>
+                <a:cs typeface="Calibri" pitchFamily="34" charset="-120"/>
+              </a:rPr>
+              <a:t>Granular, not binary.</a:t>
+            </a:r>
+            <a:endParaRPr lang="en-US" sz="1100" dirty="0"/>
+          </a:p>
+        </p:txBody>
+      </p:sp>
+      <p:sp>
+        <p:nvSpPr>
+          <p:cNvPr id="17" name="Shape 15"/>
           <p:cNvSpPr/>
           <p:nvPr/>
         </p:nvSpPr>
         <p:spPr>
           <a:xfrm>
             <a:off x="6035040" y="2011680"/>
-            <a:ext cx="2743200" cy="2377440"/>
+            <a:ext cx="2743200" cy="2468880"/>
           </a:xfrm>
           <a:prstGeom prst="rect">
             <a:avLst/>
@@ -4762,7 +6174,7 @@
       </p:sp>
       <p:sp>
         <p:nvSpPr>
-          <p:cNvPr id="17" name="Shape 15"/>
+          <p:cNvPr id="18" name="Shape 16"/>
           <p:cNvSpPr/>
           <p:nvPr/>
         </p:nvSpPr>
@@ -4787,14 +6199,14 @@
       </p:sp>
       <p:sp>
         <p:nvSpPr>
-          <p:cNvPr id="18" name="Text 16"/>
-          <p:cNvSpPr/>
-          <p:nvPr/>
-        </p:nvSpPr>
-        <p:spPr>
-          <a:xfrm>
-            <a:off x="6309360" y="2240280"/>
-            <a:ext cx="914400" cy="365760"/>
+          <p:cNvPr id="19" name="Text 17"/>
+          <p:cNvSpPr/>
+          <p:nvPr/>
+        </p:nvSpPr>
+        <p:spPr>
+          <a:xfrm>
+            <a:off x="6309360" y="2194560"/>
+            <a:ext cx="914400" cy="320040"/>
           </a:xfrm>
           <a:prstGeom prst="rect">
             <a:avLst/>
@@ -4826,13 +6238,13 @@
       </p:sp>
       <p:sp>
         <p:nvSpPr>
-          <p:cNvPr id="19" name="Text 17"/>
-          <p:cNvSpPr/>
-          <p:nvPr/>
-        </p:nvSpPr>
-        <p:spPr>
-          <a:xfrm>
-            <a:off x="6309360" y="2560320"/>
+          <p:cNvPr id="20" name="Text 18"/>
+          <p:cNvSpPr/>
+          <p:nvPr/>
+        </p:nvSpPr>
+        <p:spPr>
+          <a:xfrm>
+            <a:off x="6309360" y="2514600"/>
             <a:ext cx="2194560" cy="457200"/>
           </a:xfrm>
           <a:prstGeom prst="rect">
@@ -4865,14 +6277,14 @@
       </p:sp>
       <p:sp>
         <p:nvSpPr>
-          <p:cNvPr id="20" name="Text 18"/>
-          <p:cNvSpPr/>
-          <p:nvPr/>
-        </p:nvSpPr>
-        <p:spPr>
-          <a:xfrm>
-            <a:off x="6309360" y="3063240"/>
-            <a:ext cx="2194560" cy="1188720"/>
+          <p:cNvPr id="21" name="Text 19"/>
+          <p:cNvSpPr/>
+          <p:nvPr/>
+        </p:nvSpPr>
+        <p:spPr>
+          <a:xfrm>
+            <a:off x="6309360" y="2971800"/>
+            <a:ext cx="2194560" cy="1371600"/>
           </a:xfrm>
           <a:prstGeom prst="rect">
             <a:avLst/>
@@ -4899,7 +6311,7 @@
                 <a:ea typeface="Calibri" pitchFamily="34" charset="-122"/>
                 <a:cs typeface="Calibri" pitchFamily="34" charset="-120"/>
               </a:rPr>
-              <a:t>• "Integration" tab for MCPs</a:t>
+              <a:t>“Integration” tab for MCPs</a:t>
             </a:r>
             <a:endParaRPr lang="en-US" sz="1100" dirty="0"/>
           </a:p>
@@ -4910,17 +6322,6 @@
               </a:spcAft>
               <a:buNone/>
             </a:pPr>
-            <a:r>
-              <a:rPr lang="en-US" sz="1100" dirty="0">
-                <a:solidFill>
-                  <a:srgbClr val="1A1F36"/>
-                </a:solidFill>
-                <a:latin typeface="Calibri" pitchFamily="34" charset="0"/>
-                <a:ea typeface="Calibri" pitchFamily="34" charset="-122"/>
-                <a:cs typeface="Calibri" pitchFamily="34" charset="-120"/>
-              </a:rPr>
-              <a:t>• Logs:</a:t>
-            </a:r>
             <a:endParaRPr lang="en-US" sz="1100" dirty="0"/>
           </a:p>
           <a:p>
@@ -4939,7 +6340,7 @@
                 <a:ea typeface="Calibri" pitchFamily="34" charset="-122"/>
                 <a:cs typeface="Calibri" pitchFamily="34" charset="-120"/>
               </a:rPr>
-              <a:t>    – System Logs</a:t>
+              <a:t>Logs — three views:</a:t>
             </a:r>
             <a:endParaRPr lang="en-US" sz="1100" dirty="0"/>
           </a:p>
@@ -4959,7 +6360,7 @@
                 <a:ea typeface="Calibri" pitchFamily="34" charset="-122"/>
                 <a:cs typeface="Calibri" pitchFamily="34" charset="-120"/>
               </a:rPr>
-              <a:t>    – Governance Logs</a:t>
+              <a:t>• System Logs</a:t>
             </a:r>
             <a:endParaRPr lang="en-US" sz="1100" dirty="0"/>
           </a:p>
@@ -4979,22 +6380,42 @@
                 <a:ea typeface="Calibri" pitchFamily="34" charset="-122"/>
                 <a:cs typeface="Calibri" pitchFamily="34" charset="-120"/>
               </a:rPr>
-              <a:t>    – All Access Logs</a:t>
+              <a:t>• Governance Logs</a:t>
             </a:r>
             <a:endParaRPr lang="en-US" sz="1100" dirty="0"/>
           </a:p>
-        </p:txBody>
-      </p:sp>
-      <p:sp>
-        <p:nvSpPr>
-          <p:cNvPr id="21" name="Shape 19"/>
-          <p:cNvSpPr/>
-          <p:nvPr/>
-        </p:nvSpPr>
-        <p:spPr>
-          <a:xfrm>
-            <a:off x="457200" y="4572000"/>
-            <a:ext cx="8229600" cy="411480"/>
+          <a:p>
+            <a:pPr indent="0" marL="0">
+              <a:spcAft>
+                <a:spcPts val="300"/>
+              </a:spcAft>
+              <a:buNone/>
+            </a:pPr>
+            <a:r>
+              <a:rPr lang="en-US" sz="1100" dirty="0">
+                <a:solidFill>
+                  <a:srgbClr val="1A1F36"/>
+                </a:solidFill>
+                <a:latin typeface="Calibri" pitchFamily="34" charset="0"/>
+                <a:ea typeface="Calibri" pitchFamily="34" charset="-122"/>
+                <a:cs typeface="Calibri" pitchFamily="34" charset="-120"/>
+              </a:rPr>
+              <a:t>• All Access Logs</a:t>
+            </a:r>
+            <a:endParaRPr lang="en-US" sz="1100" dirty="0"/>
+          </a:p>
+        </p:txBody>
+      </p:sp>
+      <p:sp>
+        <p:nvSpPr>
+          <p:cNvPr id="22" name="Shape 20"/>
+          <p:cNvSpPr/>
+          <p:nvPr/>
+        </p:nvSpPr>
+        <p:spPr>
+          <a:xfrm>
+            <a:off x="457200" y="4617720"/>
+            <a:ext cx="8229600" cy="365760"/>
           </a:xfrm>
           <a:prstGeom prst="rect">
             <a:avLst/>
@@ -5012,14 +6433,14 @@
       </p:sp>
       <p:sp>
         <p:nvSpPr>
-          <p:cNvPr id="22" name="Text 20"/>
-          <p:cNvSpPr/>
-          <p:nvPr/>
-        </p:nvSpPr>
-        <p:spPr>
-          <a:xfrm>
-            <a:off x="640080" y="4572000"/>
-            <a:ext cx="7863840" cy="411480"/>
+          <p:cNvPr id="23" name="Text 21"/>
+          <p:cNvSpPr/>
+          <p:nvPr/>
+        </p:nvSpPr>
+        <p:spPr>
+          <a:xfrm>
+            <a:off x="640080" y="4617720"/>
+            <a:ext cx="7863840" cy="365760"/>
           </a:xfrm>
           <a:prstGeom prst="rect">
             <a:avLst/>
@@ -5043,7 +6464,7 @@
                 <a:ea typeface="Calibri" pitchFamily="34" charset="-122"/>
                 <a:cs typeface="Calibri" pitchFamily="34" charset="-120"/>
               </a:rPr>
-              <a:t>This is what demoes at Identiverse. Everything else is post-P0.</a:t>
+              <a:t>This is what demoes at Identiverse · June 15.</a:t>
             </a:r>
             <a:endParaRPr lang="en-US" sz="1200" dirty="0"/>
           </a:p>
@@ -5051,7 +6472,7 @@
       </p:sp>
       <p:sp>
         <p:nvSpPr>
-          <p:cNvPr id="23" name="Text 21"/>
+          <p:cNvPr id="24" name="Text 22"/>
           <p:cNvSpPr/>
           <p:nvPr/>
         </p:nvSpPr>
@@ -5082,7 +6503,7 @@
                 <a:ea typeface="Calibri" pitchFamily="34" charset="-122"/>
                 <a:cs typeface="Calibri" pitchFamily="34" charset="-120"/>
               </a:rPr>
-              <a:t>6 / 9</a:t>
+              <a:t>6 / 8</a:t>
             </a:r>
             <a:endParaRPr lang="en-US" sz="900" dirty="0"/>
           </a:p>
@@ -5154,7 +6575,7 @@
         <p:spPr>
           <a:xfrm>
             <a:off x="457200" y="365760"/>
-            <a:ext cx="5486400" cy="274320"/>
+            <a:ext cx="7315200" cy="274320"/>
           </a:xfrm>
           <a:prstGeom prst="rect">
             <a:avLst/>
@@ -5193,7 +6614,7 @@
         <p:spPr>
           <a:xfrm>
             <a:off x="457200" y="731520"/>
-            <a:ext cx="8229600" cy="731520"/>
+            <a:ext cx="8229600" cy="777240"/>
           </a:xfrm>
           <a:prstGeom prst="rect">
             <a:avLst/>
@@ -5231,8 +6652,8 @@
         </p:nvSpPr>
         <p:spPr>
           <a:xfrm>
-            <a:off x="457200" y="1783080"/>
-            <a:ext cx="4160520" cy="1417320"/>
+            <a:off x="457200" y="1691640"/>
+            <a:ext cx="4160520" cy="1371600"/>
           </a:xfrm>
           <a:prstGeom prst="rect">
             <a:avLst/>
@@ -5256,8 +6677,8 @@
         </p:nvSpPr>
         <p:spPr>
           <a:xfrm>
-            <a:off x="457200" y="1783080"/>
-            <a:ext cx="73152" cy="1417320"/>
+            <a:off x="457200" y="1691640"/>
+            <a:ext cx="73152" cy="1371600"/>
           </a:xfrm>
           <a:prstGeom prst="rect">
             <a:avLst/>
@@ -5281,7 +6702,7 @@
         </p:nvSpPr>
         <p:spPr>
           <a:xfrm>
-            <a:off x="731520" y="1965960"/>
+            <a:off x="731520" y="1874520"/>
             <a:ext cx="3703320" cy="411480"/>
           </a:xfrm>
           <a:prstGeom prst="rect">
@@ -5320,8 +6741,8 @@
         </p:nvSpPr>
         <p:spPr>
           <a:xfrm>
-            <a:off x="731520" y="2423160"/>
-            <a:ext cx="3703320" cy="685800"/>
+            <a:off x="731520" y="2331720"/>
+            <a:ext cx="3703320" cy="640080"/>
           </a:xfrm>
           <a:prstGeom prst="rect">
             <a:avLst/>
@@ -5345,7 +6766,7 @@
                 <a:ea typeface="Calibri" pitchFamily="34" charset="-122"/>
                 <a:cs typeface="Calibri" pitchFamily="34" charset="-120"/>
               </a:rPr>
-              <a:t>On-the-fly access grants. With or without human-in-the-loop. Ephemeral, scoped per task — the JIT-TRUST pattern.</a:t>
+              <a:t>On-the-fly access grants. With or without human-in-the-loop. Ephemeral, scoped per task.</a:t>
             </a:r>
             <a:endParaRPr lang="en-US" sz="1100" dirty="0"/>
           </a:p>
@@ -5359,8 +6780,8 @@
         </p:nvSpPr>
         <p:spPr>
           <a:xfrm>
-            <a:off x="4800600" y="1783080"/>
-            <a:ext cx="4160520" cy="1417320"/>
+            <a:off x="4800600" y="1691640"/>
+            <a:ext cx="4160520" cy="1371600"/>
           </a:xfrm>
           <a:prstGeom prst="rect">
             <a:avLst/>
@@ -5384,8 +6805,8 @@
         </p:nvSpPr>
         <p:spPr>
           <a:xfrm>
-            <a:off x="4800600" y="1783080"/>
-            <a:ext cx="73152" cy="1417320"/>
+            <a:off x="4800600" y="1691640"/>
+            <a:ext cx="73152" cy="1371600"/>
           </a:xfrm>
           <a:prstGeom prst="rect">
             <a:avLst/>
@@ -5409,7 +6830,7 @@
         </p:nvSpPr>
         <p:spPr>
           <a:xfrm>
-            <a:off x="5074920" y="1965960"/>
+            <a:off x="5074920" y="1874520"/>
             <a:ext cx="3703320" cy="411480"/>
           </a:xfrm>
           <a:prstGeom prst="rect">
@@ -5448,8 +6869,8 @@
         </p:nvSpPr>
         <p:spPr>
           <a:xfrm>
-            <a:off x="5074920" y="2423160"/>
-            <a:ext cx="3703320" cy="685800"/>
+            <a:off x="5074920" y="2331720"/>
+            <a:ext cx="3703320" cy="640080"/>
           </a:xfrm>
           <a:prstGeom prst="rect">
             <a:avLst/>
@@ -5473,7 +6894,7 @@
                 <a:ea typeface="Calibri" pitchFamily="34" charset="-122"/>
                 <a:cs typeface="Calibri" pitchFamily="34" charset="-120"/>
               </a:rPr>
-              <a:t>Joiner / mover / leaver lifecycle. Owner offboarded? The agents they spawned don't linger.</a:t>
+              <a:t>Joiner / mover / leaver lifecycle. Owner offboarded? Their agents don't linger.</a:t>
             </a:r>
             <a:endParaRPr lang="en-US" sz="1100" dirty="0"/>
           </a:p>
@@ -5487,8 +6908,8 @@
         </p:nvSpPr>
         <p:spPr>
           <a:xfrm>
-            <a:off x="457200" y="3383280"/>
-            <a:ext cx="4160520" cy="1417320"/>
+            <a:off x="457200" y="3246120"/>
+            <a:ext cx="4160520" cy="1371600"/>
           </a:xfrm>
           <a:prstGeom prst="rect">
             <a:avLst/>
@@ -5512,8 +6933,8 @@
         </p:nvSpPr>
         <p:spPr>
           <a:xfrm>
-            <a:off x="457200" y="3383280"/>
-            <a:ext cx="73152" cy="1417320"/>
+            <a:off x="457200" y="3246120"/>
+            <a:ext cx="73152" cy="1371600"/>
           </a:xfrm>
           <a:prstGeom prst="rect">
             <a:avLst/>
@@ -5537,7 +6958,7 @@
         </p:nvSpPr>
         <p:spPr>
           <a:xfrm>
-            <a:off x="731520" y="3566160"/>
+            <a:off x="731520" y="3429000"/>
             <a:ext cx="3703320" cy="411480"/>
           </a:xfrm>
           <a:prstGeom prst="rect">
@@ -5576,8 +6997,8 @@
         </p:nvSpPr>
         <p:spPr>
           <a:xfrm>
-            <a:off x="731520" y="4023360"/>
-            <a:ext cx="3703320" cy="685800"/>
+            <a:off x="731520" y="3886200"/>
+            <a:ext cx="3703320" cy="640080"/>
           </a:xfrm>
           <a:prstGeom prst="rect">
             <a:avLst/>
@@ -5601,7 +7022,7 @@
                 <a:ea typeface="Calibri" pitchFamily="34" charset="-122"/>
                 <a:cs typeface="Calibri" pitchFamily="34" charset="-120"/>
               </a:rPr>
-              <a:t>UI for connecting apps to the Gateway. Secured setup flow — self-service, not a services engagement.</a:t>
+              <a:t>UI for connecting apps to the Gateway. Secured setup flow — self-service.</a:t>
             </a:r>
             <a:endParaRPr lang="en-US" sz="1100" dirty="0"/>
           </a:p>
@@ -5615,8 +7036,8 @@
         </p:nvSpPr>
         <p:spPr>
           <a:xfrm>
-            <a:off x="4800600" y="3383280"/>
-            <a:ext cx="4160520" cy="1417320"/>
+            <a:off x="4800600" y="3246120"/>
+            <a:ext cx="4160520" cy="1371600"/>
           </a:xfrm>
           <a:prstGeom prst="rect">
             <a:avLst/>
@@ -5640,8 +7061,8 @@
         </p:nvSpPr>
         <p:spPr>
           <a:xfrm>
-            <a:off x="4800600" y="3383280"/>
-            <a:ext cx="73152" cy="1417320"/>
+            <a:off x="4800600" y="3246120"/>
+            <a:ext cx="73152" cy="1371600"/>
           </a:xfrm>
           <a:prstGeom prst="rect">
             <a:avLst/>
@@ -5665,7 +7086,7 @@
         </p:nvSpPr>
         <p:spPr>
           <a:xfrm>
-            <a:off x="5074920" y="3566160"/>
+            <a:off x="5074920" y="3429000"/>
             <a:ext cx="3703320" cy="411480"/>
           </a:xfrm>
           <a:prstGeom prst="rect">
@@ -5704,8 +7125,8 @@
         </p:nvSpPr>
         <p:spPr>
           <a:xfrm>
-            <a:off x="5074920" y="4023360"/>
-            <a:ext cx="3703320" cy="685800"/>
+            <a:off x="5074920" y="3886200"/>
+            <a:ext cx="3703320" cy="640080"/>
           </a:xfrm>
           <a:prstGeom prst="rect">
             <a:avLst/>
@@ -5729,7 +7150,7 @@
                 <a:ea typeface="Calibri" pitchFamily="34" charset="-122"/>
                 <a:cs typeface="Calibri" pitchFamily="34" charset="-120"/>
               </a:rPr>
-              <a:t>Vision horizon. Identity + behavior + context + data sensitivity, continuously evaluated. SACR's emerging differentiator.</a:t>
+              <a:t>Identity + behavior + context + data sensitivity, continuously evaluated. Vision horizon.</a:t>
             </a:r>
             <a:endParaRPr lang="en-US" sz="1100" dirty="0"/>
           </a:p>
@@ -5743,7 +7164,7 @@
         </p:nvSpPr>
         <p:spPr>
           <a:xfrm>
-            <a:off x="457200" y="4709160"/>
+            <a:off x="457200" y="4617720"/>
             <a:ext cx="8229600" cy="274320"/>
           </a:xfrm>
           <a:prstGeom prst="rect">
@@ -5756,7 +7177,7 @@
           <a:bodyPr wrap="square" lIns="0" tIns="0" rIns="0" bIns="0" rtlCol="0" anchor="ctr"/>
           <a:lstStyle/>
           <a:p>
-            <a:pPr indent="0" marL="0">
+            <a:pPr algn="ctr" indent="0" marL="0">
               <a:buNone/>
             </a:pPr>
             <a:r>
@@ -5768,7 +7189,7 @@
                 <a:ea typeface="Calibri" pitchFamily="34" charset="-122"/>
                 <a:cs typeface="Calibri" pitchFamily="34" charset="-120"/>
               </a:rPr>
-              <a:t>Backlog, not roadmap. We sequence these after the Gateway earns its keep.</a:t>
+              <a:t>Sequenced after P0. Omri scopes these in parallel while Eng researches Gateway Core.</a:t>
             </a:r>
             <a:endParaRPr lang="en-US" sz="1100" dirty="0"/>
           </a:p>
@@ -5807,7 +7228,7 @@
                 <a:ea typeface="Calibri" pitchFamily="34" charset="-122"/>
                 <a:cs typeface="Calibri" pitchFamily="34" charset="-120"/>
               </a:rPr>
-              <a:t>7 / 9</a:t>
+              <a:t>7 / 8</a:t>
             </a:r>
             <a:endParaRPr lang="en-US" sz="900" dirty="0"/>
           </a:p>
@@ -5824,881 +7245,6 @@
 <file path=ppt/slides/slide8.xml><?xml version="1.0" encoding="utf-8"?>
 <p:sld xmlns:a="http://schemas.openxmlformats.org/drawingml/2006/main" xmlns:r="http://schemas.openxmlformats.org/officeDocument/2006/relationships" xmlns:p="http://schemas.openxmlformats.org/presentationml/2006/main">
   <p:cSld name="Slide 8">
-    <p:bg>
-      <p:bgPr>
-        <a:solidFill>
-          <a:srgbClr val="FFFFFF"/>
-        </a:solidFill>
-      </p:bgPr>
-    </p:bg>
-    <p:spTree>
-      <p:nvGrpSpPr>
-        <p:cNvPr id="1" name=""/>
-        <p:cNvGrpSpPr/>
-        <p:nvPr/>
-      </p:nvGrpSpPr>
-      <p:grpSpPr>
-        <a:xfrm>
-          <a:off x="0" y="0"/>
-          <a:ext cx="0" cy="0"/>
-          <a:chOff x="0" y="0"/>
-          <a:chExt cx="0" cy="0"/>
-        </a:xfrm>
-      </p:grpSpPr>
-      <p:sp>
-        <p:nvSpPr>
-          <p:cNvPr id="2" name="Shape 0"/>
-          <p:cNvSpPr/>
-          <p:nvPr/>
-        </p:nvSpPr>
-        <p:spPr>
-          <a:xfrm>
-            <a:off x="0" y="0"/>
-            <a:ext cx="109728" cy="5143500"/>
-          </a:xfrm>
-          <a:prstGeom prst="rect">
-            <a:avLst/>
-          </a:prstGeom>
-          <a:solidFill>
-            <a:srgbClr val="02C39A"/>
-          </a:solidFill>
-          <a:ln w="12700">
-            <a:solidFill>
-              <a:srgbClr val="02C39A"/>
-            </a:solidFill>
-            <a:prstDash val="solid"/>
-          </a:ln>
-        </p:spPr>
-      </p:sp>
-      <p:sp>
-        <p:nvSpPr>
-          <p:cNvPr id="3" name="Text 1"/>
-          <p:cNvSpPr/>
-          <p:nvPr/>
-        </p:nvSpPr>
-        <p:spPr>
-          <a:xfrm>
-            <a:off x="457200" y="365760"/>
-            <a:ext cx="5486400" cy="274320"/>
-          </a:xfrm>
-          <a:prstGeom prst="rect">
-            <a:avLst/>
-          </a:prstGeom>
-          <a:noFill/>
-          <a:ln/>
-        </p:spPr>
-        <p:txBody>
-          <a:bodyPr wrap="square" lIns="0" tIns="0" rIns="0" bIns="0" rtlCol="0" anchor="ctr"/>
-          <a:lstStyle/>
-          <a:p>
-            <a:pPr indent="0" marL="0">
-              <a:buNone/>
-            </a:pPr>
-            <a:r>
-              <a:rPr lang="en-US" sz="1100" b="1" spc="400" kern="0" dirty="0">
-                <a:solidFill>
-                  <a:srgbClr val="64748B"/>
-                </a:solidFill>
-                <a:latin typeface="Calibri" pitchFamily="34" charset="0"/>
-                <a:ea typeface="Calibri" pitchFamily="34" charset="-122"/>
-                <a:cs typeface="Calibri" pitchFamily="34" charset="-120"/>
-              </a:rPr>
-              <a:t>07 · How we'll move</a:t>
-            </a:r>
-            <a:endParaRPr lang="en-US" sz="1100" dirty="0"/>
-          </a:p>
-        </p:txBody>
-      </p:sp>
-      <p:sp>
-        <p:nvSpPr>
-          <p:cNvPr id="4" name="Text 2"/>
-          <p:cNvSpPr/>
-          <p:nvPr/>
-        </p:nvSpPr>
-        <p:spPr>
-          <a:xfrm>
-            <a:off x="457200" y="731520"/>
-            <a:ext cx="8229600" cy="731520"/>
-          </a:xfrm>
-          <a:prstGeom prst="rect">
-            <a:avLst/>
-          </a:prstGeom>
-          <a:noFill/>
-          <a:ln/>
-        </p:spPr>
-        <p:txBody>
-          <a:bodyPr wrap="square" lIns="0" tIns="0" rIns="0" bIns="0" rtlCol="0" anchor="ctr"/>
-          <a:lstStyle/>
-          <a:p>
-            <a:pPr indent="0" marL="0">
-              <a:buNone/>
-            </a:pPr>
-            <a:r>
-              <a:rPr lang="en-US" sz="3400" b="1" dirty="0">
-                <a:solidFill>
-                  <a:srgbClr val="1A1F36"/>
-                </a:solidFill>
-                <a:latin typeface="Georgia" pitchFamily="34" charset="0"/>
-                <a:ea typeface="Georgia" pitchFamily="34" charset="-122"/>
-                <a:cs typeface="Georgia" pitchFamily="34" charset="-120"/>
-              </a:rPr>
-              <a:t>Agility with discipline.</a:t>
-            </a:r>
-            <a:endParaRPr lang="en-US" sz="3400" dirty="0"/>
-          </a:p>
-        </p:txBody>
-      </p:sp>
-      <p:sp>
-        <p:nvSpPr>
-          <p:cNvPr id="5" name="Shape 3"/>
-          <p:cNvSpPr/>
-          <p:nvPr/>
-        </p:nvSpPr>
-        <p:spPr>
-          <a:xfrm>
-            <a:off x="548640" y="1764792"/>
-            <a:ext cx="274320" cy="274320"/>
-          </a:xfrm>
-          <a:prstGeom prst="ellipse">
-            <a:avLst/>
-          </a:prstGeom>
-          <a:solidFill>
-            <a:srgbClr val="02C39A"/>
-          </a:solidFill>
-          <a:ln w="12700">
-            <a:solidFill>
-              <a:srgbClr val="02C39A"/>
-            </a:solidFill>
-            <a:prstDash val="solid"/>
-          </a:ln>
-        </p:spPr>
-      </p:sp>
-      <p:sp>
-        <p:nvSpPr>
-          <p:cNvPr id="6" name="Text 4"/>
-          <p:cNvSpPr/>
-          <p:nvPr/>
-        </p:nvSpPr>
-        <p:spPr>
-          <a:xfrm>
-            <a:off x="548640" y="1764792"/>
-            <a:ext cx="274320" cy="274320"/>
-          </a:xfrm>
-          <a:prstGeom prst="rect">
-            <a:avLst/>
-          </a:prstGeom>
-          <a:noFill/>
-          <a:ln/>
-        </p:spPr>
-        <p:txBody>
-          <a:bodyPr wrap="square" lIns="0" tIns="0" rIns="0" bIns="0" rtlCol="0" anchor="ctr"/>
-          <a:lstStyle/>
-          <a:p>
-            <a:pPr algn="ctr" indent="0" marL="0">
-              <a:buNone/>
-            </a:pPr>
-            <a:r>
-              <a:rPr lang="en-US" sz="1400" b="1" dirty="0">
-                <a:solidFill>
-                  <a:srgbClr val="FFFFFF"/>
-                </a:solidFill>
-                <a:latin typeface="Calibri" pitchFamily="34" charset="0"/>
-                <a:ea typeface="Calibri" pitchFamily="34" charset="-122"/>
-                <a:cs typeface="Calibri" pitchFamily="34" charset="-120"/>
-              </a:rPr>
-              <a:t>1</a:t>
-            </a:r>
-            <a:endParaRPr lang="en-US" sz="1400" dirty="0"/>
-          </a:p>
-        </p:txBody>
-      </p:sp>
-      <p:sp>
-        <p:nvSpPr>
-          <p:cNvPr id="7" name="Text 5"/>
-          <p:cNvSpPr/>
-          <p:nvPr/>
-        </p:nvSpPr>
-        <p:spPr>
-          <a:xfrm>
-            <a:off x="960120" y="1691640"/>
-            <a:ext cx="7772400" cy="457200"/>
-          </a:xfrm>
-          <a:prstGeom prst="rect">
-            <a:avLst/>
-          </a:prstGeom>
-          <a:noFill/>
-          <a:ln/>
-        </p:spPr>
-        <p:txBody>
-          <a:bodyPr wrap="square" lIns="0" tIns="0" rIns="0" bIns="0" rtlCol="0" anchor="ctr"/>
-          <a:lstStyle/>
-          <a:p>
-            <a:pPr indent="0" marL="0">
-              <a:buNone/>
-            </a:pPr>
-            <a:r>
-              <a:rPr lang="en-US" sz="1500" b="1" dirty="0">
-                <a:solidFill>
-                  <a:srgbClr val="0F1B3D"/>
-                </a:solidFill>
-                <a:latin typeface="Calibri" pitchFamily="34" charset="0"/>
-                <a:ea typeface="Calibri" pitchFamily="34" charset="-122"/>
-                <a:cs typeface="Calibri" pitchFamily="34" charset="-120"/>
-              </a:rPr>
-              <a:t>2-week cycles  </a:t>
-            </a:r>
-            <a:pPr indent="0" marL="0">
-              <a:buNone/>
-            </a:pPr>
-            <a:r>
-              <a:rPr lang="en-US" sz="1300" dirty="0">
-                <a:solidFill>
-                  <a:srgbClr val="1A1F36"/>
-                </a:solidFill>
-                <a:latin typeface="Calibri" pitchFamily="34" charset="0"/>
-                <a:ea typeface="Calibri" pitchFamily="34" charset="-122"/>
-                <a:cs typeface="Calibri" pitchFamily="34" charset="-120"/>
-              </a:rPr>
-              <a:t>with explicit pivot points. No one is held to a plan that's been invalidated by learning.</a:t>
-            </a:r>
-            <a:endParaRPr lang="en-US" sz="1500" dirty="0"/>
-          </a:p>
-        </p:txBody>
-      </p:sp>
-      <p:sp>
-        <p:nvSpPr>
-          <p:cNvPr id="8" name="Shape 6"/>
-          <p:cNvSpPr/>
-          <p:nvPr/>
-        </p:nvSpPr>
-        <p:spPr>
-          <a:xfrm>
-            <a:off x="548640" y="2267712"/>
-            <a:ext cx="274320" cy="274320"/>
-          </a:xfrm>
-          <a:prstGeom prst="ellipse">
-            <a:avLst/>
-          </a:prstGeom>
-          <a:solidFill>
-            <a:srgbClr val="02C39A"/>
-          </a:solidFill>
-          <a:ln w="12700">
-            <a:solidFill>
-              <a:srgbClr val="02C39A"/>
-            </a:solidFill>
-            <a:prstDash val="solid"/>
-          </a:ln>
-        </p:spPr>
-      </p:sp>
-      <p:sp>
-        <p:nvSpPr>
-          <p:cNvPr id="9" name="Text 7"/>
-          <p:cNvSpPr/>
-          <p:nvPr/>
-        </p:nvSpPr>
-        <p:spPr>
-          <a:xfrm>
-            <a:off x="548640" y="2267712"/>
-            <a:ext cx="274320" cy="274320"/>
-          </a:xfrm>
-          <a:prstGeom prst="rect">
-            <a:avLst/>
-          </a:prstGeom>
-          <a:noFill/>
-          <a:ln/>
-        </p:spPr>
-        <p:txBody>
-          <a:bodyPr wrap="square" lIns="0" tIns="0" rIns="0" bIns="0" rtlCol="0" anchor="ctr"/>
-          <a:lstStyle/>
-          <a:p>
-            <a:pPr algn="ctr" indent="0" marL="0">
-              <a:buNone/>
-            </a:pPr>
-            <a:r>
-              <a:rPr lang="en-US" sz="1400" b="1" dirty="0">
-                <a:solidFill>
-                  <a:srgbClr val="FFFFFF"/>
-                </a:solidFill>
-                <a:latin typeface="Calibri" pitchFamily="34" charset="0"/>
-                <a:ea typeface="Calibri" pitchFamily="34" charset="-122"/>
-                <a:cs typeface="Calibri" pitchFamily="34" charset="-120"/>
-              </a:rPr>
-              <a:t>2</a:t>
-            </a:r>
-            <a:endParaRPr lang="en-US" sz="1400" dirty="0"/>
-          </a:p>
-        </p:txBody>
-      </p:sp>
-      <p:sp>
-        <p:nvSpPr>
-          <p:cNvPr id="10" name="Text 8"/>
-          <p:cNvSpPr/>
-          <p:nvPr/>
-        </p:nvSpPr>
-        <p:spPr>
-          <a:xfrm>
-            <a:off x="960120" y="2194560"/>
-            <a:ext cx="7772400" cy="457200"/>
-          </a:xfrm>
-          <a:prstGeom prst="rect">
-            <a:avLst/>
-          </a:prstGeom>
-          <a:noFill/>
-          <a:ln/>
-        </p:spPr>
-        <p:txBody>
-          <a:bodyPr wrap="square" lIns="0" tIns="0" rIns="0" bIns="0" rtlCol="0" anchor="ctr"/>
-          <a:lstStyle/>
-          <a:p>
-            <a:pPr indent="0" marL="0">
-              <a:buNone/>
-            </a:pPr>
-            <a:r>
-              <a:rPr lang="en-US" sz="1500" b="1" dirty="0">
-                <a:solidFill>
-                  <a:srgbClr val="0F1B3D"/>
-                </a:solidFill>
-                <a:latin typeface="Calibri" pitchFamily="34" charset="0"/>
-                <a:ea typeface="Calibri" pitchFamily="34" charset="-122"/>
-                <a:cs typeface="Calibri" pitchFamily="34" charset="-120"/>
-              </a:rPr>
-              <a:t>PM ↔ Eng co-discovery  </a:t>
-            </a:r>
-            <a:pPr indent="0" marL="0">
-              <a:buNone/>
-            </a:pPr>
-            <a:r>
-              <a:rPr lang="en-US" sz="1300" dirty="0">
-                <a:solidFill>
-                  <a:srgbClr val="1A1F36"/>
-                </a:solidFill>
-                <a:latin typeface="Calibri" pitchFamily="34" charset="0"/>
-                <a:ea typeface="Calibri" pitchFamily="34" charset="-122"/>
-                <a:cs typeface="Calibri" pitchFamily="34" charset="-120"/>
-              </a:rPr>
-              <a:t>This isn't tickets in a queue. We find the problem and the solution together.</a:t>
-            </a:r>
-            <a:endParaRPr lang="en-US" sz="1500" dirty="0"/>
-          </a:p>
-        </p:txBody>
-      </p:sp>
-      <p:sp>
-        <p:nvSpPr>
-          <p:cNvPr id="11" name="Shape 9"/>
-          <p:cNvSpPr/>
-          <p:nvPr/>
-        </p:nvSpPr>
-        <p:spPr>
-          <a:xfrm>
-            <a:off x="548640" y="2770632"/>
-            <a:ext cx="274320" cy="274320"/>
-          </a:xfrm>
-          <a:prstGeom prst="ellipse">
-            <a:avLst/>
-          </a:prstGeom>
-          <a:solidFill>
-            <a:srgbClr val="02C39A"/>
-          </a:solidFill>
-          <a:ln w="12700">
-            <a:solidFill>
-              <a:srgbClr val="02C39A"/>
-            </a:solidFill>
-            <a:prstDash val="solid"/>
-          </a:ln>
-        </p:spPr>
-      </p:sp>
-      <p:sp>
-        <p:nvSpPr>
-          <p:cNvPr id="12" name="Text 10"/>
-          <p:cNvSpPr/>
-          <p:nvPr/>
-        </p:nvSpPr>
-        <p:spPr>
-          <a:xfrm>
-            <a:off x="548640" y="2770632"/>
-            <a:ext cx="274320" cy="274320"/>
-          </a:xfrm>
-          <a:prstGeom prst="rect">
-            <a:avLst/>
-          </a:prstGeom>
-          <a:noFill/>
-          <a:ln/>
-        </p:spPr>
-        <p:txBody>
-          <a:bodyPr wrap="square" lIns="0" tIns="0" rIns="0" bIns="0" rtlCol="0" anchor="ctr"/>
-          <a:lstStyle/>
-          <a:p>
-            <a:pPr algn="ctr" indent="0" marL="0">
-              <a:buNone/>
-            </a:pPr>
-            <a:r>
-              <a:rPr lang="en-US" sz="1400" b="1" dirty="0">
-                <a:solidFill>
-                  <a:srgbClr val="FFFFFF"/>
-                </a:solidFill>
-                <a:latin typeface="Calibri" pitchFamily="34" charset="0"/>
-                <a:ea typeface="Calibri" pitchFamily="34" charset="-122"/>
-                <a:cs typeface="Calibri" pitchFamily="34" charset="-120"/>
-              </a:rPr>
-              <a:t>3</a:t>
-            </a:r>
-            <a:endParaRPr lang="en-US" sz="1400" dirty="0"/>
-          </a:p>
-        </p:txBody>
-      </p:sp>
-      <p:sp>
-        <p:nvSpPr>
-          <p:cNvPr id="13" name="Text 11"/>
-          <p:cNvSpPr/>
-          <p:nvPr/>
-        </p:nvSpPr>
-        <p:spPr>
-          <a:xfrm>
-            <a:off x="960120" y="2697480"/>
-            <a:ext cx="7772400" cy="457200"/>
-          </a:xfrm>
-          <a:prstGeom prst="rect">
-            <a:avLst/>
-          </a:prstGeom>
-          <a:noFill/>
-          <a:ln/>
-        </p:spPr>
-        <p:txBody>
-          <a:bodyPr wrap="square" lIns="0" tIns="0" rIns="0" bIns="0" rtlCol="0" anchor="ctr"/>
-          <a:lstStyle/>
-          <a:p>
-            <a:pPr indent="0" marL="0">
-              <a:buNone/>
-            </a:pPr>
-            <a:r>
-              <a:rPr lang="en-US" sz="1500" b="1" dirty="0">
-                <a:solidFill>
-                  <a:srgbClr val="0F1B3D"/>
-                </a:solidFill>
-                <a:latin typeface="Calibri" pitchFamily="34" charset="0"/>
-                <a:ea typeface="Calibri" pitchFamily="34" charset="-122"/>
-                <a:cs typeface="Calibri" pitchFamily="34" charset="-120"/>
-              </a:rPr>
-              <a:t>Wrong early  </a:t>
-            </a:r>
-            <a:pPr indent="0" marL="0">
-              <a:buNone/>
-            </a:pPr>
-            <a:r>
-              <a:rPr lang="en-US" sz="1300" dirty="0">
-                <a:solidFill>
-                  <a:srgbClr val="1A1F36"/>
-                </a:solidFill>
-                <a:latin typeface="Calibri" pitchFamily="34" charset="0"/>
-                <a:ea typeface="Calibri" pitchFamily="34" charset="-122"/>
-                <a:cs typeface="Calibri" pitchFamily="34" charset="-120"/>
-              </a:rPr>
-              <a:t>beats wrong at Identiverse. Fast feedback over polished spec.</a:t>
-            </a:r>
-            <a:endParaRPr lang="en-US" sz="1500" dirty="0"/>
-          </a:p>
-        </p:txBody>
-      </p:sp>
-      <p:sp>
-        <p:nvSpPr>
-          <p:cNvPr id="14" name="Shape 12"/>
-          <p:cNvSpPr/>
-          <p:nvPr/>
-        </p:nvSpPr>
-        <p:spPr>
-          <a:xfrm>
-            <a:off x="548640" y="3273552"/>
-            <a:ext cx="274320" cy="274320"/>
-          </a:xfrm>
-          <a:prstGeom prst="ellipse">
-            <a:avLst/>
-          </a:prstGeom>
-          <a:solidFill>
-            <a:srgbClr val="02C39A"/>
-          </a:solidFill>
-          <a:ln w="12700">
-            <a:solidFill>
-              <a:srgbClr val="02C39A"/>
-            </a:solidFill>
-            <a:prstDash val="solid"/>
-          </a:ln>
-        </p:spPr>
-      </p:sp>
-      <p:sp>
-        <p:nvSpPr>
-          <p:cNvPr id="15" name="Text 13"/>
-          <p:cNvSpPr/>
-          <p:nvPr/>
-        </p:nvSpPr>
-        <p:spPr>
-          <a:xfrm>
-            <a:off x="548640" y="3273552"/>
-            <a:ext cx="274320" cy="274320"/>
-          </a:xfrm>
-          <a:prstGeom prst="rect">
-            <a:avLst/>
-          </a:prstGeom>
-          <a:noFill/>
-          <a:ln/>
-        </p:spPr>
-        <p:txBody>
-          <a:bodyPr wrap="square" lIns="0" tIns="0" rIns="0" bIns="0" rtlCol="0" anchor="ctr"/>
-          <a:lstStyle/>
-          <a:p>
-            <a:pPr algn="ctr" indent="0" marL="0">
-              <a:buNone/>
-            </a:pPr>
-            <a:r>
-              <a:rPr lang="en-US" sz="1400" b="1" dirty="0">
-                <a:solidFill>
-                  <a:srgbClr val="FFFFFF"/>
-                </a:solidFill>
-                <a:latin typeface="Calibri" pitchFamily="34" charset="0"/>
-                <a:ea typeface="Calibri" pitchFamily="34" charset="-122"/>
-                <a:cs typeface="Calibri" pitchFamily="34" charset="-120"/>
-              </a:rPr>
-              <a:t>4</a:t>
-            </a:r>
-            <a:endParaRPr lang="en-US" sz="1400" dirty="0"/>
-          </a:p>
-        </p:txBody>
-      </p:sp>
-      <p:sp>
-        <p:nvSpPr>
-          <p:cNvPr id="16" name="Text 14"/>
-          <p:cNvSpPr/>
-          <p:nvPr/>
-        </p:nvSpPr>
-        <p:spPr>
-          <a:xfrm>
-            <a:off x="960120" y="3200400"/>
-            <a:ext cx="7772400" cy="457200"/>
-          </a:xfrm>
-          <a:prstGeom prst="rect">
-            <a:avLst/>
-          </a:prstGeom>
-          <a:noFill/>
-          <a:ln/>
-        </p:spPr>
-        <p:txBody>
-          <a:bodyPr wrap="square" lIns="0" tIns="0" rIns="0" bIns="0" rtlCol="0" anchor="ctr"/>
-          <a:lstStyle/>
-          <a:p>
-            <a:pPr indent="0" marL="0">
-              <a:buNone/>
-            </a:pPr>
-            <a:r>
-              <a:rPr lang="en-US" sz="1500" b="1" dirty="0">
-                <a:solidFill>
-                  <a:srgbClr val="0F1B3D"/>
-                </a:solidFill>
-                <a:latin typeface="Calibri" pitchFamily="34" charset="0"/>
-                <a:ea typeface="Calibri" pitchFamily="34" charset="-122"/>
-                <a:cs typeface="Calibri" pitchFamily="34" charset="-120"/>
-              </a:rPr>
-              <a:t>Harsh deadline  </a:t>
-            </a:r>
-            <a:pPr indent="0" marL="0">
-              <a:buNone/>
-            </a:pPr>
-            <a:r>
-              <a:rPr lang="en-US" sz="1300" dirty="0">
-                <a:solidFill>
-                  <a:srgbClr val="1A1F36"/>
-                </a:solidFill>
-                <a:latin typeface="Calibri" pitchFamily="34" charset="0"/>
-                <a:ea typeface="Calibri" pitchFamily="34" charset="-122"/>
-                <a:cs typeface="Calibri" pitchFamily="34" charset="-120"/>
-              </a:rPr>
-              <a:t>June 15 · Identiverse. That's what we're working backwards from.</a:t>
-            </a:r>
-            <a:endParaRPr lang="en-US" sz="1500" dirty="0"/>
-          </a:p>
-        </p:txBody>
-      </p:sp>
-      <p:sp>
-        <p:nvSpPr>
-          <p:cNvPr id="17" name="Shape 15"/>
-          <p:cNvSpPr/>
-          <p:nvPr/>
-        </p:nvSpPr>
-        <p:spPr>
-          <a:xfrm>
-            <a:off x="457200" y="4114800"/>
-            <a:ext cx="8229600" cy="640080"/>
-          </a:xfrm>
-          <a:prstGeom prst="rect">
-            <a:avLst/>
-          </a:prstGeom>
-          <a:solidFill>
-            <a:srgbClr val="0F1B3D"/>
-          </a:solidFill>
-          <a:ln w="12700">
-            <a:solidFill>
-              <a:srgbClr val="0F1B3D"/>
-            </a:solidFill>
-            <a:prstDash val="solid"/>
-          </a:ln>
-        </p:spPr>
-      </p:sp>
-      <p:sp>
-        <p:nvSpPr>
-          <p:cNvPr id="18" name="Text 16"/>
-          <p:cNvSpPr/>
-          <p:nvPr/>
-        </p:nvSpPr>
-        <p:spPr>
-          <a:xfrm>
-            <a:off x="640080" y="4160520"/>
-            <a:ext cx="1645920" cy="548640"/>
-          </a:xfrm>
-          <a:prstGeom prst="rect">
-            <a:avLst/>
-          </a:prstGeom>
-          <a:noFill/>
-          <a:ln/>
-        </p:spPr>
-        <p:txBody>
-          <a:bodyPr wrap="square" lIns="0" tIns="0" rIns="0" bIns="0" rtlCol="0" anchor="ctr"/>
-          <a:lstStyle/>
-          <a:p>
-            <a:pPr indent="0" marL="0">
-              <a:buNone/>
-            </a:pPr>
-            <a:r>
-              <a:rPr lang="en-US" sz="900" b="1" spc="300" kern="0" dirty="0">
-                <a:solidFill>
-                  <a:srgbClr val="02C39A"/>
-                </a:solidFill>
-                <a:latin typeface="Calibri" pitchFamily="34" charset="0"/>
-                <a:ea typeface="Calibri" pitchFamily="34" charset="-122"/>
-                <a:cs typeface="Calibri" pitchFamily="34" charset="-120"/>
-              </a:rPr>
-              <a:t>TODAY
-</a:t>
-            </a:r>
-            <a:pPr indent="0" marL="0">
-              <a:buNone/>
-            </a:pPr>
-            <a:r>
-              <a:rPr lang="en-US" sz="1400" b="1" dirty="0">
-                <a:solidFill>
-                  <a:srgbClr val="FFFFFF"/>
-                </a:solidFill>
-                <a:latin typeface="Calibri" pitchFamily="34" charset="0"/>
-                <a:ea typeface="Calibri" pitchFamily="34" charset="-122"/>
-                <a:cs typeface="Calibri" pitchFamily="34" charset="-120"/>
-              </a:rPr>
-              <a:t>Apr 27</a:t>
-            </a:r>
-            <a:endParaRPr lang="en-US" sz="900" dirty="0"/>
-          </a:p>
-        </p:txBody>
-      </p:sp>
-      <p:sp>
-        <p:nvSpPr>
-          <p:cNvPr id="19" name="Shape 17"/>
-          <p:cNvSpPr/>
-          <p:nvPr/>
-        </p:nvSpPr>
-        <p:spPr>
-          <a:xfrm>
-            <a:off x="2286000" y="4434840"/>
-            <a:ext cx="1371600" cy="0"/>
-          </a:xfrm>
-          <a:prstGeom prst="line">
-            <a:avLst/>
-          </a:prstGeom>
-          <a:noFill/>
-          <a:ln w="25400">
-            <a:solidFill>
-              <a:srgbClr val="02C39A"/>
-            </a:solidFill>
-            <a:prstDash val="solid"/>
-          </a:ln>
-        </p:spPr>
-      </p:sp>
-      <p:sp>
-        <p:nvSpPr>
-          <p:cNvPr id="20" name="Text 18"/>
-          <p:cNvSpPr/>
-          <p:nvPr/>
-        </p:nvSpPr>
-        <p:spPr>
-          <a:xfrm>
-            <a:off x="3749040" y="4160520"/>
-            <a:ext cx="2011680" cy="548640"/>
-          </a:xfrm>
-          <a:prstGeom prst="rect">
-            <a:avLst/>
-          </a:prstGeom>
-          <a:noFill/>
-          <a:ln/>
-        </p:spPr>
-        <p:txBody>
-          <a:bodyPr wrap="square" lIns="0" tIns="0" rIns="0" bIns="0" rtlCol="0" anchor="ctr"/>
-          <a:lstStyle/>
-          <a:p>
-            <a:pPr indent="0" marL="0">
-              <a:buNone/>
-            </a:pPr>
-            <a:r>
-              <a:rPr lang="en-US" sz="900" b="1" spc="300" kern="0" dirty="0">
-                <a:solidFill>
-                  <a:srgbClr val="02C39A"/>
-                </a:solidFill>
-                <a:latin typeface="Calibri" pitchFamily="34" charset="0"/>
-                <a:ea typeface="Calibri" pitchFamily="34" charset="-122"/>
-                <a:cs typeface="Calibri" pitchFamily="34" charset="-120"/>
-              </a:rPr>
-              <a:t>DESIGN + BUILD CYCLES
-</a:t>
-            </a:r>
-            <a:pPr indent="0" marL="0">
-              <a:buNone/>
-            </a:pPr>
-            <a:r>
-              <a:rPr lang="en-US" sz="1400" b="1" dirty="0">
-                <a:solidFill>
-                  <a:srgbClr val="FFFFFF"/>
-                </a:solidFill>
-                <a:latin typeface="Calibri" pitchFamily="34" charset="0"/>
-                <a:ea typeface="Calibri" pitchFamily="34" charset="-122"/>
-                <a:cs typeface="Calibri" pitchFamily="34" charset="-120"/>
-              </a:rPr>
-              <a:t>May</a:t>
-            </a:r>
-            <a:endParaRPr lang="en-US" sz="900" dirty="0"/>
-          </a:p>
-        </p:txBody>
-      </p:sp>
-      <p:sp>
-        <p:nvSpPr>
-          <p:cNvPr id="21" name="Shape 19"/>
-          <p:cNvSpPr/>
-          <p:nvPr/>
-        </p:nvSpPr>
-        <p:spPr>
-          <a:xfrm>
-            <a:off x="5760720" y="4434840"/>
-            <a:ext cx="1371600" cy="0"/>
-          </a:xfrm>
-          <a:prstGeom prst="line">
-            <a:avLst/>
-          </a:prstGeom>
-          <a:noFill/>
-          <a:ln w="25400">
-            <a:solidFill>
-              <a:srgbClr val="02C39A"/>
-            </a:solidFill>
-            <a:prstDash val="solid"/>
-          </a:ln>
-        </p:spPr>
-      </p:sp>
-      <p:sp>
-        <p:nvSpPr>
-          <p:cNvPr id="22" name="Text 20"/>
-          <p:cNvSpPr/>
-          <p:nvPr/>
-        </p:nvSpPr>
-        <p:spPr>
-          <a:xfrm>
-            <a:off x="7223760" y="4160520"/>
-            <a:ext cx="1645920" cy="548640"/>
-          </a:xfrm>
-          <a:prstGeom prst="rect">
-            <a:avLst/>
-          </a:prstGeom>
-          <a:noFill/>
-          <a:ln/>
-        </p:spPr>
-        <p:txBody>
-          <a:bodyPr wrap="square" lIns="0" tIns="0" rIns="0" bIns="0" rtlCol="0" anchor="ctr"/>
-          <a:lstStyle/>
-          <a:p>
-            <a:pPr indent="0" marL="0">
-              <a:buNone/>
-            </a:pPr>
-            <a:r>
-              <a:rPr lang="en-US" sz="900" b="1" spc="300" kern="0" dirty="0">
-                <a:solidFill>
-                  <a:srgbClr val="F59E0B"/>
-                </a:solidFill>
-                <a:latin typeface="Calibri" pitchFamily="34" charset="0"/>
-                <a:ea typeface="Calibri" pitchFamily="34" charset="-122"/>
-                <a:cs typeface="Calibri" pitchFamily="34" charset="-120"/>
-              </a:rPr>
-              <a:t>IDENTIVERSE
-</a:t>
-            </a:r>
-            <a:pPr indent="0" marL="0">
-              <a:buNone/>
-            </a:pPr>
-            <a:r>
-              <a:rPr lang="en-US" sz="1400" b="1" dirty="0">
-                <a:solidFill>
-                  <a:srgbClr val="FFFFFF"/>
-                </a:solidFill>
-                <a:latin typeface="Calibri" pitchFamily="34" charset="0"/>
-                <a:ea typeface="Calibri" pitchFamily="34" charset="-122"/>
-                <a:cs typeface="Calibri" pitchFamily="34" charset="-120"/>
-              </a:rPr>
-              <a:t>Jun 15</a:t>
-            </a:r>
-            <a:endParaRPr lang="en-US" sz="900" dirty="0"/>
-          </a:p>
-        </p:txBody>
-      </p:sp>
-      <p:sp>
-        <p:nvSpPr>
-          <p:cNvPr id="23" name="Text 21"/>
-          <p:cNvSpPr/>
-          <p:nvPr/>
-        </p:nvSpPr>
-        <p:spPr>
-          <a:xfrm>
-            <a:off x="8321040" y="4823460"/>
-            <a:ext cx="457200" cy="228600"/>
-          </a:xfrm>
-          <a:prstGeom prst="rect">
-            <a:avLst/>
-          </a:prstGeom>
-          <a:noFill/>
-          <a:ln/>
-        </p:spPr>
-        <p:txBody>
-          <a:bodyPr wrap="square" lIns="0" tIns="0" rIns="0" bIns="0" rtlCol="0" anchor="ctr"/>
-          <a:lstStyle/>
-          <a:p>
-            <a:pPr algn="r" indent="0" marL="0">
-              <a:buNone/>
-            </a:pPr>
-            <a:r>
-              <a:rPr lang="en-US" sz="900" dirty="0">
-                <a:solidFill>
-                  <a:srgbClr val="64748B"/>
-                </a:solidFill>
-                <a:latin typeface="Calibri" pitchFamily="34" charset="0"/>
-                <a:ea typeface="Calibri" pitchFamily="34" charset="-122"/>
-                <a:cs typeface="Calibri" pitchFamily="34" charset="-120"/>
-              </a:rPr>
-              <a:t>8 / 9</a:t>
-            </a:r>
-            <a:endParaRPr lang="en-US" sz="900" dirty="0"/>
-          </a:p>
-        </p:txBody>
-      </p:sp>
-    </p:spTree>
-  </p:cSld>
-  <p:clrMapOvr>
-    <a:masterClrMapping/>
-  </p:clrMapOvr>
-</p:sld>
-</file>
-
-<file path=ppt/slides/slide9.xml><?xml version="1.0" encoding="utf-8"?>
-<p:sld xmlns:a="http://schemas.openxmlformats.org/drawingml/2006/main" xmlns:r="http://schemas.openxmlformats.org/officeDocument/2006/relationships" xmlns:p="http://schemas.openxmlformats.org/presentationml/2006/main">
-  <p:cSld name="Slide 9">
     <p:bg>
       <p:bgPr>
         <a:solidFill>
@@ -6749,73 +7295,46 @@
       </p:sp>
       <p:sp>
         <p:nvSpPr>
-          <p:cNvPr id="3" name="Shape 1"/>
-          <p:cNvSpPr/>
-          <p:nvPr/>
-        </p:nvSpPr>
-        <p:spPr>
-          <a:xfrm>
-            <a:off x="6858000" y="-1371600"/>
-            <a:ext cx="3657600" cy="3657600"/>
-          </a:xfrm>
-          <a:prstGeom prst="ellipse">
-            <a:avLst/>
-          </a:prstGeom>
-          <a:solidFill>
-            <a:srgbClr val="E8EEFC">
-              <a:alpha val="10000"/>
-            </a:srgbClr>
-          </a:solidFill>
-          <a:ln w="12700">
-            <a:solidFill>
-              <a:srgbClr val="E8EEFC"/>
-            </a:solidFill>
-            <a:prstDash val="solid"/>
-          </a:ln>
-        </p:spPr>
+          <p:cNvPr id="3" name="Text 1"/>
+          <p:cNvSpPr/>
+          <p:nvPr/>
+        </p:nvSpPr>
+        <p:spPr>
+          <a:xfrm>
+            <a:off x="457200" y="365760"/>
+            <a:ext cx="7315200" cy="274320"/>
+          </a:xfrm>
+          <a:prstGeom prst="rect">
+            <a:avLst/>
+          </a:prstGeom>
+          <a:noFill/>
+          <a:ln/>
+        </p:spPr>
+        <p:txBody>
+          <a:bodyPr wrap="square" lIns="0" tIns="0" rIns="0" bIns="0" rtlCol="0" anchor="ctr"/>
+          <a:lstStyle/>
+          <a:p>
+            <a:pPr indent="0" marL="0">
+              <a:buNone/>
+            </a:pPr>
+            <a:r>
+              <a:rPr lang="en-US" sz="1100" b="1" spc="400" kern="0" dirty="0">
+                <a:solidFill>
+                  <a:srgbClr val="02C39A"/>
+                </a:solidFill>
+                <a:latin typeface="Calibri" pitchFamily="34" charset="0"/>
+                <a:ea typeface="Calibri" pitchFamily="34" charset="-122"/>
+                <a:cs typeface="Calibri" pitchFamily="34" charset="-120"/>
+              </a:rPr>
+              <a:t>07 · What we leave with</a:t>
+            </a:r>
+            <a:endParaRPr lang="en-US" sz="1100" dirty="0"/>
+          </a:p>
+        </p:txBody>
       </p:sp>
       <p:sp>
         <p:nvSpPr>
           <p:cNvPr id="4" name="Text 2"/>
-          <p:cNvSpPr/>
-          <p:nvPr/>
-        </p:nvSpPr>
-        <p:spPr>
-          <a:xfrm>
-            <a:off x="457200" y="365760"/>
-            <a:ext cx="5486400" cy="274320"/>
-          </a:xfrm>
-          <a:prstGeom prst="rect">
-            <a:avLst/>
-          </a:prstGeom>
-          <a:noFill/>
-          <a:ln/>
-        </p:spPr>
-        <p:txBody>
-          <a:bodyPr wrap="square" lIns="0" tIns="0" rIns="0" bIns="0" rtlCol="0" anchor="ctr"/>
-          <a:lstStyle/>
-          <a:p>
-            <a:pPr indent="0" marL="0">
-              <a:buNone/>
-            </a:pPr>
-            <a:r>
-              <a:rPr lang="en-US" sz="1100" b="1" spc="400" kern="0" dirty="0">
-                <a:solidFill>
-                  <a:srgbClr val="02C39A"/>
-                </a:solidFill>
-                <a:latin typeface="Calibri" pitchFamily="34" charset="0"/>
-                <a:ea typeface="Calibri" pitchFamily="34" charset="-122"/>
-                <a:cs typeface="Calibri" pitchFamily="34" charset="-120"/>
-              </a:rPr>
-              <a:t>08 · What we leave with</a:t>
-            </a:r>
-            <a:endParaRPr lang="en-US" sz="1100" dirty="0"/>
-          </a:p>
-        </p:txBody>
-      </p:sp>
-      <p:sp>
-        <p:nvSpPr>
-          <p:cNvPr id="5" name="Text 3"/>
           <p:cNvSpPr/>
           <p:nvPr/>
         </p:nvSpPr>
@@ -6838,7 +7357,7 @@
               <a:buNone/>
             </a:pPr>
             <a:r>
-              <a:rPr lang="en-US" sz="3400" b="1" i="1" dirty="0">
+              <a:rPr lang="en-US" sz="3200" b="1" dirty="0">
                 <a:solidFill>
                   <a:srgbClr val="FFFFFF"/>
                 </a:solidFill>
@@ -6846,24 +7365,24 @@
                 <a:ea typeface="Georgia" pitchFamily="34" charset="-122"/>
                 <a:cs typeface="Georgia" pitchFamily="34" charset="-120"/>
               </a:rPr>
-              <a:t>Sunday only counts if…</a:t>
-            </a:r>
-            <a:endParaRPr lang="en-US" sz="3400" dirty="0"/>
-          </a:p>
-        </p:txBody>
-      </p:sp>
-      <p:sp>
-        <p:nvSpPr>
-          <p:cNvPr id="6" name="Shape 4"/>
-          <p:cNvSpPr/>
-          <p:nvPr/>
-        </p:nvSpPr>
-        <p:spPr>
-          <a:xfrm>
-            <a:off x="548640" y="1828800"/>
-            <a:ext cx="201168" cy="201168"/>
-          </a:xfrm>
-          <a:prstGeom prst="ellipse">
+              <a:t>Know · Don't know · Start.</a:t>
+            </a:r>
+            <a:endParaRPr lang="en-US" sz="3200" dirty="0"/>
+          </a:p>
+        </p:txBody>
+      </p:sp>
+      <p:sp>
+        <p:nvSpPr>
+          <p:cNvPr id="5" name="Shape 3"/>
+          <p:cNvSpPr/>
+          <p:nvPr/>
+        </p:nvSpPr>
+        <p:spPr>
+          <a:xfrm>
+            <a:off x="320040" y="1737360"/>
+            <a:ext cx="2743200" cy="320040"/>
+          </a:xfrm>
+          <a:prstGeom prst="rect">
             <a:avLst/>
           </a:prstGeom>
           <a:solidFill>
@@ -6879,55 +7398,576 @@
       </p:sp>
       <p:sp>
         <p:nvSpPr>
-          <p:cNvPr id="7" name="Text 5"/>
-          <p:cNvSpPr/>
-          <p:nvPr/>
-        </p:nvSpPr>
-        <p:spPr>
-          <a:xfrm>
-            <a:off x="914400" y="1737360"/>
-            <a:ext cx="8046720" cy="457200"/>
-          </a:xfrm>
-          <a:prstGeom prst="rect">
-            <a:avLst/>
-          </a:prstGeom>
-          <a:noFill/>
-          <a:ln/>
-        </p:spPr>
-        <p:txBody>
-          <a:bodyPr wrap="square" lIns="0" tIns="0" rIns="0" bIns="0" rtlCol="0" anchor="ctr"/>
-          <a:lstStyle/>
-          <a:p>
-            <a:pPr indent="0" marL="0">
-              <a:buNone/>
-            </a:pPr>
-            <a:r>
-              <a:rPr lang="en-US" sz="1400" dirty="0">
-                <a:solidFill>
-                  <a:srgbClr val="E8EEFC"/>
-                </a:solidFill>
-                <a:latin typeface="Calibri" pitchFamily="34" charset="0"/>
-                <a:ea typeface="Calibri" pitchFamily="34" charset="-122"/>
-                <a:cs typeface="Calibri" pitchFamily="34" charset="-120"/>
-              </a:rPr>
-              <a:t>We share one picture of M1/M2 status — what ships, what pauses, what folds into the Gateway.</a:t>
-            </a:r>
-            <a:endParaRPr lang="en-US" sz="1400" dirty="0"/>
-          </a:p>
-        </p:txBody>
-      </p:sp>
-      <p:sp>
-        <p:nvSpPr>
-          <p:cNvPr id="8" name="Shape 6"/>
-          <p:cNvSpPr/>
-          <p:nvPr/>
-        </p:nvSpPr>
-        <p:spPr>
-          <a:xfrm>
-            <a:off x="548640" y="2331720"/>
-            <a:ext cx="201168" cy="201168"/>
-          </a:xfrm>
-          <a:prstGeom prst="ellipse">
+          <p:cNvPr id="6" name="Text 4"/>
+          <p:cNvSpPr/>
+          <p:nvPr/>
+        </p:nvSpPr>
+        <p:spPr>
+          <a:xfrm>
+            <a:off x="320040" y="1737360"/>
+            <a:ext cx="2743200" cy="320040"/>
+          </a:xfrm>
+          <a:prstGeom prst="rect">
+            <a:avLst/>
+          </a:prstGeom>
+          <a:noFill/>
+          <a:ln/>
+        </p:spPr>
+        <p:txBody>
+          <a:bodyPr wrap="square" lIns="0" tIns="0" rIns="0" bIns="0" rtlCol="0" anchor="ctr"/>
+          <a:lstStyle/>
+          <a:p>
+            <a:pPr algn="ctr" indent="0" marL="0">
+              <a:buNone/>
+            </a:pPr>
+            <a:r>
+              <a:rPr lang="en-US" sz="1100" b="1" spc="300" kern="0" dirty="0">
+                <a:solidFill>
+                  <a:srgbClr val="0F1B3D"/>
+                </a:solidFill>
+                <a:latin typeface="Calibri" pitchFamily="34" charset="0"/>
+                <a:ea typeface="Calibri" pitchFamily="34" charset="-122"/>
+                <a:cs typeface="Calibri" pitchFamily="34" charset="-120"/>
+              </a:rPr>
+              <a:t>WE KNOW</a:t>
+            </a:r>
+            <a:endParaRPr lang="en-US" sz="1100" dirty="0"/>
+          </a:p>
+        </p:txBody>
+      </p:sp>
+      <p:sp>
+        <p:nvSpPr>
+          <p:cNvPr id="7" name="Shape 5"/>
+          <p:cNvSpPr/>
+          <p:nvPr/>
+        </p:nvSpPr>
+        <p:spPr>
+          <a:xfrm>
+            <a:off x="320040" y="2057400"/>
+            <a:ext cx="2743200" cy="2331720"/>
+          </a:xfrm>
+          <a:prstGeom prst="rect">
+            <a:avLst/>
+          </a:prstGeom>
+          <a:solidFill>
+            <a:srgbClr val="091230"/>
+          </a:solidFill>
+          <a:ln w="12700">
+            <a:solidFill>
+              <a:srgbClr val="02C39A"/>
+            </a:solidFill>
+            <a:prstDash val="solid"/>
+          </a:ln>
+        </p:spPr>
+      </p:sp>
+      <p:sp>
+        <p:nvSpPr>
+          <p:cNvPr id="8" name="Text 6"/>
+          <p:cNvSpPr/>
+          <p:nvPr/>
+        </p:nvSpPr>
+        <p:spPr>
+          <a:xfrm>
+            <a:off x="502920" y="2194560"/>
+            <a:ext cx="2377440" cy="2148840"/>
+          </a:xfrm>
+          <a:prstGeom prst="rect">
+            <a:avLst/>
+          </a:prstGeom>
+          <a:noFill/>
+          <a:ln/>
+        </p:spPr>
+        <p:txBody>
+          <a:bodyPr wrap="square" lIns="0" tIns="0" rIns="0" bIns="0" rtlCol="0" anchor="ctr"/>
+          <a:lstStyle/>
+          <a:p>
+            <a:pPr marL="342900" indent="-342900">
+              <a:spcAft>
+                <a:spcPts val="400"/>
+              </a:spcAft>
+              <a:buSzPct val="100000"/>
+              <a:buChar char="■"/>
+            </a:pPr>
+            <a:r>
+              <a:rPr lang="en-US" sz="1100" dirty="0">
+                <a:solidFill>
+                  <a:srgbClr val="FFFFFF"/>
+                </a:solidFill>
+                <a:latin typeface="Calibri" pitchFamily="34" charset="0"/>
+                <a:ea typeface="Calibri" pitchFamily="34" charset="-122"/>
+                <a:cs typeface="Calibri" pitchFamily="34" charset="-120"/>
+              </a:rPr>
+              <a:t>Deadline: Identiverse, June 15</a:t>
+            </a:r>
+            <a:endParaRPr lang="en-US" sz="1100" dirty="0"/>
+          </a:p>
+          <a:p>
+            <a:pPr marL="342900" indent="-342900">
+              <a:spcAft>
+                <a:spcPts val="400"/>
+              </a:spcAft>
+              <a:buSzPct val="100000"/>
+              <a:buChar char="■"/>
+            </a:pPr>
+            <a:r>
+              <a:rPr lang="en-US" sz="1100" dirty="0">
+                <a:solidFill>
+                  <a:srgbClr val="FFFFFF"/>
+                </a:solidFill>
+                <a:latin typeface="Calibri" pitchFamily="34" charset="0"/>
+                <a:ea typeface="Calibri" pitchFamily="34" charset="-122"/>
+                <a:cs typeface="Calibri" pitchFamily="34" charset="-120"/>
+              </a:rPr>
+              <a:t>Arch lead: Sarit + Amir Ben Ami</a:t>
+            </a:r>
+            <a:endParaRPr lang="en-US" sz="1100" dirty="0"/>
+          </a:p>
+          <a:p>
+            <a:pPr marL="342900" indent="-342900">
+              <a:spcAft>
+                <a:spcPts val="400"/>
+              </a:spcAft>
+              <a:buSzPct val="100000"/>
+              <a:buChar char="■"/>
+            </a:pPr>
+            <a:r>
+              <a:rPr lang="en-US" sz="1100" dirty="0">
+                <a:solidFill>
+                  <a:srgbClr val="FFFFFF"/>
+                </a:solidFill>
+                <a:latin typeface="Calibri" pitchFamily="34" charset="0"/>
+                <a:ea typeface="Calibri" pitchFamily="34" charset="-122"/>
+                <a:cs typeface="Calibri" pitchFamily="34" charset="-120"/>
+              </a:rPr>
+              <a:t>P0 target: Gateway Core, Policy Agent, Screens</a:t>
+            </a:r>
+            <a:endParaRPr lang="en-US" sz="1100" dirty="0"/>
+          </a:p>
+          <a:p>
+            <a:pPr marL="342900" indent="-342900">
+              <a:spcAft>
+                <a:spcPts val="400"/>
+              </a:spcAft>
+              <a:buSzPct val="100000"/>
+              <a:buChar char="■"/>
+            </a:pPr>
+            <a:r>
+              <a:rPr lang="en-US" sz="1100" dirty="0">
+                <a:solidFill>
+                  <a:srgbClr val="FFFFFF"/>
+                </a:solidFill>
+                <a:latin typeface="Calibri" pitchFamily="34" charset="0"/>
+                <a:ea typeface="Calibri" pitchFamily="34" charset="-122"/>
+                <a:cs typeface="Calibri" pitchFamily="34" charset="-120"/>
+              </a:rPr>
+              <a:t>M1 is shipped &amp; real</a:t>
+            </a:r>
+            <a:endParaRPr lang="en-US" sz="1100" dirty="0"/>
+          </a:p>
+        </p:txBody>
+      </p:sp>
+      <p:sp>
+        <p:nvSpPr>
+          <p:cNvPr id="9" name="Shape 7"/>
+          <p:cNvSpPr/>
+          <p:nvPr/>
+        </p:nvSpPr>
+        <p:spPr>
+          <a:xfrm>
+            <a:off x="3200400" y="1737360"/>
+            <a:ext cx="2743200" cy="320040"/>
+          </a:xfrm>
+          <a:prstGeom prst="rect">
+            <a:avLst/>
+          </a:prstGeom>
+          <a:solidFill>
+            <a:srgbClr val="F59E0B"/>
+          </a:solidFill>
+          <a:ln w="12700">
+            <a:solidFill>
+              <a:srgbClr val="F59E0B"/>
+            </a:solidFill>
+            <a:prstDash val="solid"/>
+          </a:ln>
+        </p:spPr>
+      </p:sp>
+      <p:sp>
+        <p:nvSpPr>
+          <p:cNvPr id="10" name="Text 8"/>
+          <p:cNvSpPr/>
+          <p:nvPr/>
+        </p:nvSpPr>
+        <p:spPr>
+          <a:xfrm>
+            <a:off x="3200400" y="1737360"/>
+            <a:ext cx="2743200" cy="320040"/>
+          </a:xfrm>
+          <a:prstGeom prst="rect">
+            <a:avLst/>
+          </a:prstGeom>
+          <a:noFill/>
+          <a:ln/>
+        </p:spPr>
+        <p:txBody>
+          <a:bodyPr wrap="square" lIns="0" tIns="0" rIns="0" bIns="0" rtlCol="0" anchor="ctr"/>
+          <a:lstStyle/>
+          <a:p>
+            <a:pPr algn="ctr" indent="0" marL="0">
+              <a:buNone/>
+            </a:pPr>
+            <a:r>
+              <a:rPr lang="en-US" sz="1100" b="1" spc="300" kern="0" dirty="0">
+                <a:solidFill>
+                  <a:srgbClr val="0F1B3D"/>
+                </a:solidFill>
+                <a:latin typeface="Calibri" pitchFamily="34" charset="0"/>
+                <a:ea typeface="Calibri" pitchFamily="34" charset="-122"/>
+                <a:cs typeface="Calibri" pitchFamily="34" charset="-120"/>
+              </a:rPr>
+              <a:t>WE DON'T KNOW</a:t>
+            </a:r>
+            <a:endParaRPr lang="en-US" sz="1100" dirty="0"/>
+          </a:p>
+        </p:txBody>
+      </p:sp>
+      <p:sp>
+        <p:nvSpPr>
+          <p:cNvPr id="11" name="Shape 9"/>
+          <p:cNvSpPr/>
+          <p:nvPr/>
+        </p:nvSpPr>
+        <p:spPr>
+          <a:xfrm>
+            <a:off x="3200400" y="2057400"/>
+            <a:ext cx="2743200" cy="2331720"/>
+          </a:xfrm>
+          <a:prstGeom prst="rect">
+            <a:avLst/>
+          </a:prstGeom>
+          <a:solidFill>
+            <a:srgbClr val="091230"/>
+          </a:solidFill>
+          <a:ln w="12700">
+            <a:solidFill>
+              <a:srgbClr val="F59E0B"/>
+            </a:solidFill>
+            <a:prstDash val="solid"/>
+          </a:ln>
+        </p:spPr>
+      </p:sp>
+      <p:sp>
+        <p:nvSpPr>
+          <p:cNvPr id="12" name="Text 10"/>
+          <p:cNvSpPr/>
+          <p:nvPr/>
+        </p:nvSpPr>
+        <p:spPr>
+          <a:xfrm>
+            <a:off x="3383280" y="2194560"/>
+            <a:ext cx="2377440" cy="2148840"/>
+          </a:xfrm>
+          <a:prstGeom prst="rect">
+            <a:avLst/>
+          </a:prstGeom>
+          <a:noFill/>
+          <a:ln/>
+        </p:spPr>
+        <p:txBody>
+          <a:bodyPr wrap="square" lIns="0" tIns="0" rIns="0" bIns="0" rtlCol="0" anchor="ctr"/>
+          <a:lstStyle/>
+          <a:p>
+            <a:pPr marL="342900" indent="-342900">
+              <a:spcAft>
+                <a:spcPts val="400"/>
+              </a:spcAft>
+              <a:buSzPct val="100000"/>
+              <a:buChar char="■"/>
+            </a:pPr>
+            <a:r>
+              <a:rPr lang="en-US" sz="1100" dirty="0">
+                <a:solidFill>
+                  <a:srgbClr val="FFFFFF"/>
+                </a:solidFill>
+                <a:latin typeface="Calibri" pitchFamily="34" charset="0"/>
+                <a:ea typeface="Calibri" pitchFamily="34" charset="-122"/>
+                <a:cs typeface="Calibri" pitchFamily="34" charset="-120"/>
+              </a:rPr>
+              <a:t>What Gateway Core actually looks like</a:t>
+            </a:r>
+            <a:endParaRPr lang="en-US" sz="1100" dirty="0"/>
+          </a:p>
+          <a:p>
+            <a:pPr marL="342900" indent="-342900">
+              <a:spcAft>
+                <a:spcPts val="400"/>
+              </a:spcAft>
+              <a:buSzPct val="100000"/>
+              <a:buChar char="■"/>
+            </a:pPr>
+            <a:r>
+              <a:rPr lang="en-US" sz="1100" dirty="0">
+                <a:solidFill>
+                  <a:srgbClr val="FFFFFF"/>
+                </a:solidFill>
+                <a:latin typeface="Calibri" pitchFamily="34" charset="0"/>
+                <a:ea typeface="Calibri" pitchFamily="34" charset="-122"/>
+                <a:cs typeface="Calibri" pitchFamily="34" charset="-120"/>
+              </a:rPr>
+              <a:t>Build options and coverage trade-offs</a:t>
+            </a:r>
+            <a:endParaRPr lang="en-US" sz="1100" dirty="0"/>
+          </a:p>
+          <a:p>
+            <a:pPr marL="342900" indent="-342900">
+              <a:spcAft>
+                <a:spcPts val="400"/>
+              </a:spcAft>
+              <a:buSzPct val="100000"/>
+              <a:buChar char="■"/>
+            </a:pPr>
+            <a:r>
+              <a:rPr lang="en-US" sz="1100" dirty="0">
+                <a:solidFill>
+                  <a:srgbClr val="FFFFFF"/>
+                </a:solidFill>
+                <a:latin typeface="Calibri" pitchFamily="34" charset="0"/>
+                <a:ea typeface="Calibri" pitchFamily="34" charset="-122"/>
+                <a:cs typeface="Calibri" pitchFamily="34" charset="-120"/>
+              </a:rPr>
+              <a:t>How much M2 work feeds in vs. pauses</a:t>
+            </a:r>
+            <a:endParaRPr lang="en-US" sz="1100" dirty="0"/>
+          </a:p>
+          <a:p>
+            <a:pPr marL="342900" indent="-342900">
+              <a:spcAft>
+                <a:spcPts val="400"/>
+              </a:spcAft>
+              <a:buSzPct val="100000"/>
+              <a:buChar char="■"/>
+            </a:pPr>
+            <a:r>
+              <a:rPr lang="en-US" sz="1100" dirty="0">
+                <a:solidFill>
+                  <a:srgbClr val="FFFFFF"/>
+                </a:solidFill>
+                <a:latin typeface="Calibri" pitchFamily="34" charset="0"/>
+                <a:ea typeface="Calibri" pitchFamily="34" charset="-122"/>
+                <a:cs typeface="Calibri" pitchFamily="34" charset="-120"/>
+              </a:rPr>
+              <a:t>What from M1/M2 already covers P0 — Omri to map</a:t>
+            </a:r>
+            <a:endParaRPr lang="en-US" sz="1100" dirty="0"/>
+          </a:p>
+        </p:txBody>
+      </p:sp>
+      <p:sp>
+        <p:nvSpPr>
+          <p:cNvPr id="13" name="Shape 11"/>
+          <p:cNvSpPr/>
+          <p:nvPr/>
+        </p:nvSpPr>
+        <p:spPr>
+          <a:xfrm>
+            <a:off x="6080760" y="1737360"/>
+            <a:ext cx="2743200" cy="320040"/>
+          </a:xfrm>
+          <a:prstGeom prst="rect">
+            <a:avLst/>
+          </a:prstGeom>
+          <a:solidFill>
+            <a:srgbClr val="E8EEFC"/>
+          </a:solidFill>
+          <a:ln w="12700">
+            <a:solidFill>
+              <a:srgbClr val="E8EEFC"/>
+            </a:solidFill>
+            <a:prstDash val="solid"/>
+          </a:ln>
+        </p:spPr>
+      </p:sp>
+      <p:sp>
+        <p:nvSpPr>
+          <p:cNvPr id="14" name="Text 12"/>
+          <p:cNvSpPr/>
+          <p:nvPr/>
+        </p:nvSpPr>
+        <p:spPr>
+          <a:xfrm>
+            <a:off x="6080760" y="1737360"/>
+            <a:ext cx="2743200" cy="320040"/>
+          </a:xfrm>
+          <a:prstGeom prst="rect">
+            <a:avLst/>
+          </a:prstGeom>
+          <a:noFill/>
+          <a:ln/>
+        </p:spPr>
+        <p:txBody>
+          <a:bodyPr wrap="square" lIns="0" tIns="0" rIns="0" bIns="0" rtlCol="0" anchor="ctr"/>
+          <a:lstStyle/>
+          <a:p>
+            <a:pPr algn="ctr" indent="0" marL="0">
+              <a:buNone/>
+            </a:pPr>
+            <a:r>
+              <a:rPr lang="en-US" sz="1100" b="1" spc="300" kern="0" dirty="0">
+                <a:solidFill>
+                  <a:srgbClr val="0F1B3D"/>
+                </a:solidFill>
+                <a:latin typeface="Calibri" pitchFamily="34" charset="0"/>
+                <a:ea typeface="Calibri" pitchFamily="34" charset="-122"/>
+                <a:cs typeface="Calibri" pitchFamily="34" charset="-120"/>
+              </a:rPr>
+              <a:t>WE START NOW</a:t>
+            </a:r>
+            <a:endParaRPr lang="en-US" sz="1100" dirty="0"/>
+          </a:p>
+        </p:txBody>
+      </p:sp>
+      <p:sp>
+        <p:nvSpPr>
+          <p:cNvPr id="15" name="Shape 13"/>
+          <p:cNvSpPr/>
+          <p:nvPr/>
+        </p:nvSpPr>
+        <p:spPr>
+          <a:xfrm>
+            <a:off x="6080760" y="2057400"/>
+            <a:ext cx="2743200" cy="2331720"/>
+          </a:xfrm>
+          <a:prstGeom prst="rect">
+            <a:avLst/>
+          </a:prstGeom>
+          <a:solidFill>
+            <a:srgbClr val="091230"/>
+          </a:solidFill>
+          <a:ln w="12700">
+            <a:solidFill>
+              <a:srgbClr val="E8EEFC"/>
+            </a:solidFill>
+            <a:prstDash val="solid"/>
+          </a:ln>
+        </p:spPr>
+      </p:sp>
+      <p:sp>
+        <p:nvSpPr>
+          <p:cNvPr id="16" name="Text 14"/>
+          <p:cNvSpPr/>
+          <p:nvPr/>
+        </p:nvSpPr>
+        <p:spPr>
+          <a:xfrm>
+            <a:off x="6263640" y="2194560"/>
+            <a:ext cx="2377440" cy="2148840"/>
+          </a:xfrm>
+          <a:prstGeom prst="rect">
+            <a:avLst/>
+          </a:prstGeom>
+          <a:noFill/>
+          <a:ln/>
+        </p:spPr>
+        <p:txBody>
+          <a:bodyPr wrap="square" lIns="0" tIns="0" rIns="0" bIns="0" rtlCol="0" anchor="ctr"/>
+          <a:lstStyle/>
+          <a:p>
+            <a:pPr marL="342900" indent="-342900">
+              <a:spcAft>
+                <a:spcPts val="400"/>
+              </a:spcAft>
+              <a:buSzPct val="100000"/>
+              <a:buChar char="■"/>
+            </a:pPr>
+            <a:r>
+              <a:rPr lang="en-US" sz="1100" dirty="0">
+                <a:solidFill>
+                  <a:srgbClr val="FFFFFF"/>
+                </a:solidFill>
+                <a:latin typeface="Calibri" pitchFamily="34" charset="0"/>
+                <a:ea typeface="Calibri" pitchFamily="34" charset="-122"/>
+                <a:cs typeface="Calibri" pitchFamily="34" charset="-120"/>
+              </a:rPr>
+              <a:t>Eng: research Gateway Core — options, coverage, POC plan</a:t>
+            </a:r>
+            <a:endParaRPr lang="en-US" sz="1100" dirty="0"/>
+          </a:p>
+          <a:p>
+            <a:pPr marL="342900" indent="-342900">
+              <a:spcAft>
+                <a:spcPts val="400"/>
+              </a:spcAft>
+              <a:buSzPct val="100000"/>
+              <a:buChar char="■"/>
+            </a:pPr>
+            <a:r>
+              <a:rPr lang="en-US" sz="1100" dirty="0">
+                <a:solidFill>
+                  <a:srgbClr val="FFFFFF"/>
+                </a:solidFill>
+                <a:latin typeface="Calibri" pitchFamily="34" charset="0"/>
+                <a:ea typeface="Calibri" pitchFamily="34" charset="-122"/>
+                <a:cs typeface="Calibri" pitchFamily="34" charset="-120"/>
+              </a:rPr>
+              <a:t>Omri: competitors + market scan (share what we already have)</a:t>
+            </a:r>
+            <a:endParaRPr lang="en-US" sz="1100" dirty="0"/>
+          </a:p>
+          <a:p>
+            <a:pPr marL="342900" indent="-342900">
+              <a:spcAft>
+                <a:spcPts val="400"/>
+              </a:spcAft>
+              <a:buSzPct val="100000"/>
+              <a:buChar char="■"/>
+            </a:pPr>
+            <a:r>
+              <a:rPr lang="en-US" sz="1100" dirty="0">
+                <a:solidFill>
+                  <a:srgbClr val="FFFFFF"/>
+                </a:solidFill>
+                <a:latin typeface="Calibri" pitchFamily="34" charset="0"/>
+                <a:ea typeface="Calibri" pitchFamily="34" charset="-122"/>
+                <a:cs typeface="Calibri" pitchFamily="34" charset="-120"/>
+              </a:rPr>
+              <a:t>Omri: scope rest of P0 + post-P0 in parallel</a:t>
+            </a:r>
+            <a:endParaRPr lang="en-US" sz="1100" dirty="0"/>
+          </a:p>
+          <a:p>
+            <a:pPr marL="342900" indent="-342900">
+              <a:spcAft>
+                <a:spcPts val="400"/>
+              </a:spcAft>
+              <a:buSzPct val="100000"/>
+              <a:buChar char="■"/>
+            </a:pPr>
+            <a:r>
+              <a:rPr lang="en-US" sz="1100" dirty="0">
+                <a:solidFill>
+                  <a:srgbClr val="FFFFFF"/>
+                </a:solidFill>
+                <a:latin typeface="Calibri" pitchFamily="34" charset="0"/>
+                <a:ea typeface="Calibri" pitchFamily="34" charset="-122"/>
+                <a:cs typeface="Calibri" pitchFamily="34" charset="-120"/>
+              </a:rPr>
+              <a:t>Next sync: cycle in 2 weeks</a:t>
+            </a:r>
+            <a:endParaRPr lang="en-US" sz="1100" dirty="0"/>
+          </a:p>
+        </p:txBody>
+      </p:sp>
+      <p:sp>
+        <p:nvSpPr>
+          <p:cNvPr id="17" name="Shape 15"/>
+          <p:cNvSpPr/>
+          <p:nvPr/>
+        </p:nvSpPr>
+        <p:spPr>
+          <a:xfrm>
+            <a:off x="457200" y="4572000"/>
+            <a:ext cx="8229600" cy="411480"/>
+          </a:xfrm>
+          <a:prstGeom prst="rect">
             <a:avLst/>
           </a:prstGeom>
           <a:solidFill>
@@ -6943,238 +7983,60 @@
       </p:sp>
       <p:sp>
         <p:nvSpPr>
-          <p:cNvPr id="9" name="Text 7"/>
-          <p:cNvSpPr/>
-          <p:nvPr/>
-        </p:nvSpPr>
-        <p:spPr>
-          <a:xfrm>
-            <a:off x="914400" y="2240280"/>
-            <a:ext cx="8046720" cy="457200"/>
-          </a:xfrm>
-          <a:prstGeom prst="rect">
-            <a:avLst/>
-          </a:prstGeom>
-          <a:noFill/>
-          <a:ln/>
-        </p:spPr>
-        <p:txBody>
-          <a:bodyPr wrap="square" lIns="0" tIns="0" rIns="0" bIns="0" rtlCol="0" anchor="ctr"/>
-          <a:lstStyle/>
-          <a:p>
-            <a:pPr indent="0" marL="0">
-              <a:buNone/>
-            </a:pPr>
-            <a:r>
-              <a:rPr lang="en-US" sz="1400" dirty="0">
-                <a:solidFill>
-                  <a:srgbClr val="E8EEFC"/>
-                </a:solidFill>
-                <a:latin typeface="Calibri" pitchFamily="34" charset="0"/>
-                <a:ea typeface="Calibri" pitchFamily="34" charset="-122"/>
-                <a:cs typeface="Calibri" pitchFamily="34" charset="-120"/>
-              </a:rPr>
-              <a:t>We pressure-test the P0 Gateway scope. Sarit + Amir leave with enough to take into design this week.</a:t>
-            </a:r>
-            <a:endParaRPr lang="en-US" sz="1400" dirty="0"/>
-          </a:p>
-        </p:txBody>
-      </p:sp>
-      <p:sp>
-        <p:nvSpPr>
-          <p:cNvPr id="10" name="Shape 8"/>
-          <p:cNvSpPr/>
-          <p:nvPr/>
-        </p:nvSpPr>
-        <p:spPr>
-          <a:xfrm>
-            <a:off x="548640" y="2834640"/>
-            <a:ext cx="201168" cy="201168"/>
-          </a:xfrm>
-          <a:prstGeom prst="ellipse">
-            <a:avLst/>
-          </a:prstGeom>
-          <a:solidFill>
-            <a:srgbClr val="02C39A"/>
-          </a:solidFill>
-          <a:ln w="12700">
-            <a:solidFill>
-              <a:srgbClr val="02C39A"/>
-            </a:solidFill>
-            <a:prstDash val="solid"/>
-          </a:ln>
-        </p:spPr>
-      </p:sp>
-      <p:sp>
-        <p:nvSpPr>
-          <p:cNvPr id="11" name="Text 9"/>
-          <p:cNvSpPr/>
-          <p:nvPr/>
-        </p:nvSpPr>
-        <p:spPr>
-          <a:xfrm>
-            <a:off x="914400" y="2743200"/>
-            <a:ext cx="8046720" cy="457200"/>
-          </a:xfrm>
-          <a:prstGeom prst="rect">
-            <a:avLst/>
-          </a:prstGeom>
-          <a:noFill/>
-          <a:ln/>
-        </p:spPr>
-        <p:txBody>
-          <a:bodyPr wrap="square" lIns="0" tIns="0" rIns="0" bIns="0" rtlCol="0" anchor="ctr"/>
-          <a:lstStyle/>
-          <a:p>
-            <a:pPr indent="0" marL="0">
-              <a:buNone/>
-            </a:pPr>
-            <a:r>
-              <a:rPr lang="en-US" sz="1400" dirty="0">
-                <a:solidFill>
-                  <a:srgbClr val="E8EEFC"/>
-                </a:solidFill>
-                <a:latin typeface="Calibri" pitchFamily="34" charset="0"/>
-                <a:ea typeface="Calibri" pitchFamily="34" charset="-122"/>
-                <a:cs typeface="Calibri" pitchFamily="34" charset="-120"/>
-              </a:rPr>
-              <a:t>We name owners for the next 2 weeks of investigation.</a:t>
-            </a:r>
-            <a:endParaRPr lang="en-US" sz="1400" dirty="0"/>
-          </a:p>
-        </p:txBody>
-      </p:sp>
-      <p:sp>
-        <p:nvSpPr>
-          <p:cNvPr id="12" name="Shape 10"/>
-          <p:cNvSpPr/>
-          <p:nvPr/>
-        </p:nvSpPr>
-        <p:spPr>
-          <a:xfrm>
-            <a:off x="548640" y="3337560"/>
-            <a:ext cx="201168" cy="201168"/>
-          </a:xfrm>
-          <a:prstGeom prst="ellipse">
-            <a:avLst/>
-          </a:prstGeom>
-          <a:solidFill>
-            <a:srgbClr val="02C39A"/>
-          </a:solidFill>
-          <a:ln w="12700">
-            <a:solidFill>
-              <a:srgbClr val="02C39A"/>
-            </a:solidFill>
-            <a:prstDash val="solid"/>
-          </a:ln>
-        </p:spPr>
-      </p:sp>
-      <p:sp>
-        <p:nvSpPr>
-          <p:cNvPr id="13" name="Text 11"/>
-          <p:cNvSpPr/>
-          <p:nvPr/>
-        </p:nvSpPr>
-        <p:spPr>
-          <a:xfrm>
-            <a:off x="914400" y="3246120"/>
-            <a:ext cx="8046720" cy="457200"/>
-          </a:xfrm>
-          <a:prstGeom prst="rect">
-            <a:avLst/>
-          </a:prstGeom>
-          <a:noFill/>
-          <a:ln/>
-        </p:spPr>
-        <p:txBody>
-          <a:bodyPr wrap="square" lIns="0" tIns="0" rIns="0" bIns="0" rtlCol="0" anchor="ctr"/>
-          <a:lstStyle/>
-          <a:p>
-            <a:pPr indent="0" marL="0">
-              <a:buNone/>
-            </a:pPr>
-            <a:r>
-              <a:rPr lang="en-US" sz="1400" dirty="0">
-                <a:solidFill>
-                  <a:srgbClr val="E8EEFC"/>
-                </a:solidFill>
-                <a:latin typeface="Calibri" pitchFamily="34" charset="0"/>
-                <a:ea typeface="Calibri" pitchFamily="34" charset="-122"/>
-                <a:cs typeface="Calibri" pitchFamily="34" charset="-120"/>
-              </a:rPr>
-              <a:t>We do a June 15 sanity check — committed demo, or aspiration we re-evaluate in 2 weeks?</a:t>
-            </a:r>
-            <a:endParaRPr lang="en-US" sz="1400" dirty="0"/>
-          </a:p>
-        </p:txBody>
-      </p:sp>
-      <p:sp>
-        <p:nvSpPr>
-          <p:cNvPr id="14" name="Shape 12"/>
-          <p:cNvSpPr/>
-          <p:nvPr/>
-        </p:nvSpPr>
-        <p:spPr>
-          <a:xfrm>
-            <a:off x="457200" y="4206240"/>
-            <a:ext cx="548640" cy="45720"/>
-          </a:xfrm>
-          <a:prstGeom prst="rect">
-            <a:avLst/>
-          </a:prstGeom>
-          <a:solidFill>
-            <a:srgbClr val="02C39A"/>
-          </a:solidFill>
-          <a:ln w="12700">
-            <a:solidFill>
-              <a:srgbClr val="02C39A"/>
-            </a:solidFill>
-            <a:prstDash val="solid"/>
-          </a:ln>
-        </p:spPr>
-      </p:sp>
-      <p:sp>
-        <p:nvSpPr>
-          <p:cNvPr id="15" name="Text 13"/>
-          <p:cNvSpPr/>
-          <p:nvPr/>
-        </p:nvSpPr>
-        <p:spPr>
-          <a:xfrm>
-            <a:off x="457200" y="4343400"/>
-            <a:ext cx="8229600" cy="548640"/>
-          </a:xfrm>
-          <a:prstGeom prst="rect">
-            <a:avLst/>
-          </a:prstGeom>
-          <a:noFill/>
-          <a:ln/>
-        </p:spPr>
-        <p:txBody>
-          <a:bodyPr wrap="square" lIns="0" tIns="0" rIns="0" bIns="0" rtlCol="0" anchor="ctr"/>
-          <a:lstStyle/>
-          <a:p>
-            <a:pPr indent="0" marL="0">
-              <a:buNone/>
-            </a:pPr>
-            <a:r>
-              <a:rPr lang="en-US" sz="2400" b="1" dirty="0">
-                <a:solidFill>
-                  <a:srgbClr val="FFFFFF"/>
-                </a:solidFill>
-                <a:latin typeface="Georgia" pitchFamily="34" charset="0"/>
-                <a:ea typeface="Georgia" pitchFamily="34" charset="-122"/>
-                <a:cs typeface="Georgia" pitchFamily="34" charset="-120"/>
-              </a:rPr>
-              <a:t>Connect the team. Start moving.</a:t>
-            </a:r>
-            <a:endParaRPr lang="en-US" sz="2400" dirty="0"/>
-          </a:p>
-        </p:txBody>
-      </p:sp>
-      <p:sp>
-        <p:nvSpPr>
-          <p:cNvPr id="16" name="Text 14"/>
+          <p:cNvPr id="18" name="Text 16"/>
+          <p:cNvSpPr/>
+          <p:nvPr/>
+        </p:nvSpPr>
+        <p:spPr>
+          <a:xfrm>
+            <a:off x="640080" y="4572000"/>
+            <a:ext cx="7863840" cy="411480"/>
+          </a:xfrm>
+          <a:prstGeom prst="rect">
+            <a:avLst/>
+          </a:prstGeom>
+          <a:noFill/>
+          <a:ln/>
+        </p:spPr>
+        <p:txBody>
+          <a:bodyPr wrap="square" lIns="0" tIns="0" rIns="0" bIns="0" rtlCol="0" anchor="ctr"/>
+          <a:lstStyle/>
+          <a:p>
+            <a:pPr indent="0" marL="0">
+              <a:buNone/>
+            </a:pPr>
+            <a:r>
+              <a:rPr lang="en-US" sz="1100" b="1" spc="300" kern="0" dirty="0">
+                <a:solidFill>
+                  <a:srgbClr val="0F1B3D"/>
+                </a:solidFill>
+                <a:latin typeface="Calibri" pitchFamily="34" charset="0"/>
+                <a:ea typeface="Calibri" pitchFamily="34" charset="-122"/>
+                <a:cs typeface="Calibri" pitchFamily="34" charset="-120"/>
+              </a:rPr>
+              <a:t>OPEN TO THE ROOM:  </a:t>
+            </a:r>
+            <a:pPr indent="0" marL="0">
+              <a:buNone/>
+            </a:pPr>
+            <a:r>
+              <a:rPr lang="en-US" sz="1300" b="1" i="1" dirty="0">
+                <a:solidFill>
+                  <a:srgbClr val="0F1B3D"/>
+                </a:solidFill>
+                <a:latin typeface="Calibri" pitchFamily="34" charset="0"/>
+                <a:ea typeface="Calibri" pitchFamily="34" charset="-122"/>
+                <a:cs typeface="Calibri" pitchFamily="34" charset="-120"/>
+              </a:rPr>
+              <a:t>What from M1 / M2 do you think already covers parts of P0?</a:t>
+            </a:r>
+            <a:endParaRPr lang="en-US" sz="1100" dirty="0"/>
+          </a:p>
+        </p:txBody>
+      </p:sp>
+      <p:sp>
+        <p:nvSpPr>
+          <p:cNvPr id="19" name="Text 17"/>
           <p:cNvSpPr/>
           <p:nvPr/>
         </p:nvSpPr>
@@ -7205,7 +8067,7 @@
                 <a:ea typeface="Calibri" pitchFamily="34" charset="-122"/>
                 <a:cs typeface="Calibri" pitchFamily="34" charset="-120"/>
               </a:rPr>
-              <a:t>9 / 9</a:t>
+              <a:t>8 / 8</a:t>
             </a:r>
             <a:endParaRPr lang="en-US" sz="900" dirty="0"/>
           </a:p>

--- a/artifacts/eng-prekickoff-2026-04-27.pptx
+++ b/artifacts/eng-prekickoff-2026-04-27.pptx
@@ -13,9 +13,10 @@
     <p:sldId id="261" r:id="rId7"/>
     <p:sldId id="262" r:id="rId8"/>
     <p:sldId id="263" r:id="rId9"/>
+    <p:sldId id="264" r:id="rId10"/>
   </p:sldIdLst>
   <p:notesMasterIdLst>
-    <p:notesMasterId r:id="rId10"/>
+    <p:notesMasterId r:id="rId11"/>
   </p:notesMasterIdLst>
   <p:sldSz cx="9144000" cy="5143500"/>
   <p:notesSz cx="5143500" cy="9144000"/>
@@ -1149,6 +1150,94 @@
             <a:fld id="{F7021451-1387-4CA6-816F-3879F97B5CBC}" type="slidenum">
               <a:rPr lang="en-US"/>
               <a:t>8</a:t>
+            </a:fld>
+            <a:endParaRPr lang="en-US"/>
+          </a:p>
+        </p:txBody>
+      </p:sp>
+    </p:spTree>
+    <p:extLst>
+      <p:ext uri="{BB962C8B-B14F-4D97-AF65-F5344CB8AC3E}">
+        <p14:creationId xmlns:p14="http://schemas.microsoft.com/office/powerpoint/2010/main" val="1024086991"/>
+      </p:ext>
+    </p:extLst>
+  </p:cSld>
+  <p:clrMapOvr>
+    <a:masterClrMapping/>
+  </p:clrMapOvr>
+</p:notes>
+</file>
+
+<file path=ppt/notesSlides/notesSlide9.xml><?xml version="1.0" encoding="utf-8"?>
+<p:notes xmlns:a="http://schemas.openxmlformats.org/drawingml/2006/main" xmlns:r="http://schemas.openxmlformats.org/officeDocument/2006/relationships" xmlns:p="http://schemas.openxmlformats.org/presentationml/2006/main">
+  <p:cSld>
+    <p:spTree>
+      <p:nvGrpSpPr>
+        <p:cNvPr id="1" name=""/>
+        <p:cNvGrpSpPr/>
+        <p:nvPr/>
+      </p:nvGrpSpPr>
+      <p:grpSpPr>
+        <a:xfrm>
+          <a:off x="0" y="0"/>
+          <a:ext cx="0" cy="0"/>
+          <a:chOff x="0" y="0"/>
+          <a:chExt cx="0" cy="0"/>
+        </a:xfrm>
+      </p:grpSpPr>
+      <p:sp>
+        <p:nvSpPr>
+          <p:cNvPr id="2" name="Slide Image Placeholder 1"/>
+          <p:cNvSpPr>
+            <a:spLocks noGrp="1" noRot="1" noChangeAspect="1"/>
+          </p:cNvSpPr>
+          <p:nvPr>
+            <p:ph type="sldImg"/>
+          </p:nvPr>
+        </p:nvSpPr>
+        <p:spPr/>
+      </p:sp>
+      <p:sp>
+        <p:nvSpPr>
+          <p:cNvPr id="3" name="Notes Placeholder 2"/>
+          <p:cNvSpPr>
+            <a:spLocks noGrp="1"/>
+          </p:cNvSpPr>
+          <p:nvPr>
+            <p:ph type="body" idx="1"/>
+          </p:nvPr>
+        </p:nvSpPr>
+        <p:spPr/>
+        <p:txBody>
+          <a:bodyPr/>
+          <a:lstStyle/>
+          <a:p>
+            <a:r>
+              <a:rPr lang="en-US" dirty="0"/>
+              <a:t/>
+            </a:r>
+            <a:endParaRPr lang="en-US" dirty="0"/>
+          </a:p>
+        </p:txBody>
+      </p:sp>
+      <p:sp>
+        <p:nvSpPr>
+          <p:cNvPr id="4" name="Slide Number Placeholder 3"/>
+          <p:cNvSpPr>
+            <a:spLocks noGrp="1"/>
+          </p:cNvSpPr>
+          <p:nvPr>
+            <p:ph type="sldNum" sz="quarter" idx="10"/>
+          </p:nvPr>
+        </p:nvSpPr>
+        <p:spPr/>
+        <p:txBody>
+          <a:bodyPr/>
+          <a:lstStyle/>
+          <a:p>
+            <a:fld id="{F7021451-1387-4CA6-816F-3879F97B5CBC}" type="slidenum">
+              <a:rPr lang="en-US"/>
+              <a:t>9</a:t>
             </a:fld>
             <a:endParaRPr lang="en-US"/>
           </a:p>
@@ -1764,7 +1853,7 @@
     <p:bg>
       <p:bgPr>
         <a:solidFill>
-          <a:srgbClr val="FFFFFF"/>
+          <a:srgbClr val="0A0E1A"/>
         </a:solidFill>
       </p:bgPr>
     </p:bg>
@@ -1784,20 +1873,166 @@
       </p:grpSpPr>
       <p:sp>
         <p:nvSpPr>
-          <p:cNvPr id="2" name="Shape 0"/>
-          <p:cNvSpPr/>
-          <p:nvPr/>
-        </p:nvSpPr>
-        <p:spPr>
-          <a:xfrm>
-            <a:off x="0" y="0"/>
-            <a:ext cx="109728" cy="5143500"/>
-          </a:xfrm>
-          <a:prstGeom prst="rect">
+          <p:cNvPr id="2" name="Text 0"/>
+          <p:cNvSpPr/>
+          <p:nvPr/>
+        </p:nvSpPr>
+        <p:spPr>
+          <a:xfrm>
+            <a:off x="457200" y="365760"/>
+            <a:ext cx="7315200" cy="274320"/>
+          </a:xfrm>
+          <a:prstGeom prst="rect">
+            <a:avLst/>
+          </a:prstGeom>
+          <a:noFill/>
+          <a:ln/>
+        </p:spPr>
+        <p:txBody>
+          <a:bodyPr wrap="square" lIns="0" tIns="0" rIns="0" bIns="0" rtlCol="0" anchor="ctr"/>
+          <a:lstStyle/>
+          <a:p>
+            <a:pPr indent="0" marL="0">
+              <a:buNone/>
+            </a:pPr>
+            <a:r>
+              <a:rPr lang="en-US" sz="1100" b="1" spc="400" kern="0" dirty="0">
+                <a:solidFill>
+                  <a:srgbClr val="02C39A"/>
+                </a:solidFill>
+                <a:latin typeface="Calibri" pitchFamily="34" charset="0"/>
+                <a:ea typeface="Calibri" pitchFamily="34" charset="-122"/>
+                <a:cs typeface="Calibri" pitchFamily="34" charset="-120"/>
+              </a:rPr>
+              <a:t>01 · The problem space</a:t>
+            </a:r>
+            <a:endParaRPr lang="en-US" sz="1100" dirty="0"/>
+          </a:p>
+        </p:txBody>
+      </p:sp>
+      <p:sp>
+        <p:nvSpPr>
+          <p:cNvPr id="3" name="Text 1"/>
+          <p:cNvSpPr/>
+          <p:nvPr/>
+        </p:nvSpPr>
+        <p:spPr>
+          <a:xfrm>
+            <a:off x="457200" y="731520"/>
+            <a:ext cx="8229600" cy="685800"/>
+          </a:xfrm>
+          <a:prstGeom prst="rect">
+            <a:avLst/>
+          </a:prstGeom>
+          <a:noFill/>
+          <a:ln/>
+        </p:spPr>
+        <p:txBody>
+          <a:bodyPr wrap="square" lIns="0" tIns="0" rIns="0" bIns="0" rtlCol="0" anchor="ctr"/>
+          <a:lstStyle/>
+          <a:p>
+            <a:pPr indent="0" marL="0">
+              <a:buNone/>
+            </a:pPr>
+            <a:r>
+              <a:rPr lang="en-US" sz="3000" b="1" dirty="0">
+                <a:solidFill>
+                  <a:srgbClr val="FFFFFF"/>
+                </a:solidFill>
+                <a:latin typeface="Georgia" pitchFamily="34" charset="0"/>
+                <a:ea typeface="Georgia" pitchFamily="34" charset="-122"/>
+                <a:cs typeface="Georgia" pitchFamily="34" charset="-120"/>
+              </a:rPr>
+              <a:t>What makes agents different?</a:t>
+            </a:r>
+            <a:endParaRPr lang="en-US" sz="3000" dirty="0"/>
+          </a:p>
+        </p:txBody>
+      </p:sp>
+      <p:sp>
+        <p:nvSpPr>
+          <p:cNvPr id="4" name="Text 2"/>
+          <p:cNvSpPr/>
+          <p:nvPr/>
+        </p:nvSpPr>
+        <p:spPr>
+          <a:xfrm>
+            <a:off x="457200" y="1417320"/>
+            <a:ext cx="8229600" cy="411480"/>
+          </a:xfrm>
+          <a:prstGeom prst="rect">
+            <a:avLst/>
+          </a:prstGeom>
+          <a:noFill/>
+          <a:ln/>
+        </p:spPr>
+        <p:txBody>
+          <a:bodyPr wrap="square" lIns="0" tIns="0" rIns="0" bIns="0" rtlCol="0" anchor="ctr"/>
+          <a:lstStyle/>
+          <a:p>
+            <a:pPr indent="0" marL="0">
+              <a:buNone/>
+            </a:pPr>
+            <a:r>
+              <a:rPr lang="en-US" sz="1200" i="1" dirty="0">
+                <a:solidFill>
+                  <a:srgbClr val="E8EEFC"/>
+                </a:solidFill>
+                <a:latin typeface="Calibri" pitchFamily="34" charset="0"/>
+                <a:ea typeface="Calibri" pitchFamily="34" charset="-122"/>
+                <a:cs typeface="Calibri" pitchFamily="34" charset="-120"/>
+              </a:rPr>
+              <a:t>"Agents are like humans on steroids — they don't sleep, they don't wait, they operate at machine speed."  — Mor Shabi</a:t>
+            </a:r>
+            <a:endParaRPr lang="en-US" sz="1200" dirty="0"/>
+          </a:p>
+        </p:txBody>
+      </p:sp>
+      <p:sp>
+        <p:nvSpPr>
+          <p:cNvPr id="5" name="Shape 3"/>
+          <p:cNvSpPr/>
+          <p:nvPr/>
+        </p:nvSpPr>
+        <p:spPr>
+          <a:xfrm>
+            <a:off x="182880" y="1920240"/>
+            <a:ext cx="2743200" cy="2286000"/>
+          </a:xfrm>
+          <a:prstGeom prst="ellipse">
             <a:avLst/>
           </a:prstGeom>
           <a:solidFill>
-            <a:srgbClr val="02C39A"/>
+            <a:srgbClr val="7C3AED">
+              <a:alpha val="45000"/>
+            </a:srgbClr>
+          </a:solidFill>
+          <a:ln w="12700">
+            <a:solidFill>
+              <a:srgbClr val="7C3AED"/>
+            </a:solidFill>
+            <a:prstDash val="solid"/>
+          </a:ln>
+        </p:spPr>
+      </p:sp>
+      <p:sp>
+        <p:nvSpPr>
+          <p:cNvPr id="6" name="Shape 4"/>
+          <p:cNvSpPr/>
+          <p:nvPr/>
+        </p:nvSpPr>
+        <p:spPr>
+          <a:xfrm>
+            <a:off x="3200400" y="2057400"/>
+            <a:ext cx="2743200" cy="2286000"/>
+          </a:xfrm>
+          <a:prstGeom prst="ellipse">
+            <a:avLst/>
+          </a:prstGeom>
+          <a:solidFill>
+            <a:srgbClr val="02C39A">
+              <a:alpha val="50000"/>
+            </a:srgbClr>
           </a:solidFill>
           <a:ln w="12700">
             <a:solidFill>
@@ -1809,141 +2044,26 @@
       </p:sp>
       <p:sp>
         <p:nvSpPr>
-          <p:cNvPr id="3" name="Text 1"/>
-          <p:cNvSpPr/>
-          <p:nvPr/>
-        </p:nvSpPr>
-        <p:spPr>
-          <a:xfrm>
-            <a:off x="457200" y="365760"/>
-            <a:ext cx="7315200" cy="274320"/>
-          </a:xfrm>
-          <a:prstGeom prst="rect">
-            <a:avLst/>
-          </a:prstGeom>
-          <a:noFill/>
-          <a:ln/>
-        </p:spPr>
-        <p:txBody>
-          <a:bodyPr wrap="square" lIns="0" tIns="0" rIns="0" bIns="0" rtlCol="0" anchor="ctr"/>
-          <a:lstStyle/>
-          <a:p>
-            <a:pPr indent="0" marL="0">
-              <a:buNone/>
-            </a:pPr>
-            <a:r>
-              <a:rPr lang="en-US" sz="1100" b="1" spc="400" kern="0" dirty="0">
-                <a:solidFill>
-                  <a:srgbClr val="64748B"/>
-                </a:solidFill>
-                <a:latin typeface="Calibri" pitchFamily="34" charset="0"/>
-                <a:ea typeface="Calibri" pitchFamily="34" charset="-122"/>
-                <a:cs typeface="Calibri" pitchFamily="34" charset="-120"/>
-              </a:rPr>
-              <a:t>01 · The problem space</a:t>
-            </a:r>
-            <a:endParaRPr lang="en-US" sz="1100" dirty="0"/>
-          </a:p>
-        </p:txBody>
-      </p:sp>
-      <p:sp>
-        <p:nvSpPr>
-          <p:cNvPr id="4" name="Text 2"/>
-          <p:cNvSpPr/>
-          <p:nvPr/>
-        </p:nvSpPr>
-        <p:spPr>
-          <a:xfrm>
-            <a:off x="457200" y="731520"/>
-            <a:ext cx="8229600" cy="777240"/>
-          </a:xfrm>
-          <a:prstGeom prst="rect">
-            <a:avLst/>
-          </a:prstGeom>
-          <a:noFill/>
-          <a:ln/>
-        </p:spPr>
-        <p:txBody>
-          <a:bodyPr wrap="square" lIns="0" tIns="0" rIns="0" bIns="0" rtlCol="0" anchor="ctr"/>
-          <a:lstStyle/>
-          <a:p>
-            <a:pPr indent="0" marL="0">
-              <a:buNone/>
-            </a:pPr>
-            <a:r>
-              <a:rPr lang="en-US" sz="3400" b="1" dirty="0">
-                <a:solidFill>
-                  <a:srgbClr val="1A1F36"/>
-                </a:solidFill>
-                <a:latin typeface="Georgia" pitchFamily="34" charset="0"/>
-                <a:ea typeface="Georgia" pitchFamily="34" charset="-122"/>
-                <a:cs typeface="Georgia" pitchFamily="34" charset="-120"/>
-              </a:rPr>
-              <a:t>Agents are humans on steroids.</a:t>
-            </a:r>
-            <a:endParaRPr lang="en-US" sz="3400" dirty="0"/>
-          </a:p>
-        </p:txBody>
-      </p:sp>
-      <p:sp>
-        <p:nvSpPr>
-          <p:cNvPr id="5" name="Text 3"/>
-          <p:cNvSpPr/>
-          <p:nvPr/>
-        </p:nvSpPr>
-        <p:spPr>
-          <a:xfrm>
-            <a:off x="457200" y="1554480"/>
-            <a:ext cx="8229600" cy="457200"/>
-          </a:xfrm>
-          <a:prstGeom prst="rect">
-            <a:avLst/>
-          </a:prstGeom>
-          <a:noFill/>
-          <a:ln/>
-        </p:spPr>
-        <p:txBody>
-          <a:bodyPr wrap="square" lIns="0" tIns="0" rIns="0" bIns="0" rtlCol="0" anchor="ctr"/>
-          <a:lstStyle/>
-          <a:p>
-            <a:pPr indent="0" marL="0">
-              <a:buNone/>
-            </a:pPr>
-            <a:r>
-              <a:rPr lang="en-US" sz="1400" i="1" dirty="0">
-                <a:solidFill>
-                  <a:srgbClr val="64748B"/>
-                </a:solidFill>
-                <a:latin typeface="Calibri" pitchFamily="34" charset="0"/>
-                <a:ea typeface="Calibri" pitchFamily="34" charset="-122"/>
-                <a:cs typeface="Calibri" pitchFamily="34" charset="-120"/>
-              </a:rPr>
-              <a:t>They don't sleep. They don't wait. They operate at machine speed. Human IAM wasn't built for this shape.</a:t>
-            </a:r>
-            <a:endParaRPr lang="en-US" sz="1400" dirty="0"/>
-          </a:p>
-        </p:txBody>
-      </p:sp>
-      <p:sp>
-        <p:nvSpPr>
-          <p:cNvPr id="6" name="Shape 4"/>
-          <p:cNvSpPr/>
-          <p:nvPr/>
-        </p:nvSpPr>
-        <p:spPr>
-          <a:xfrm>
-            <a:off x="388620" y="2194560"/>
-            <a:ext cx="2697480" cy="2194560"/>
-          </a:xfrm>
-          <a:prstGeom prst="rect">
+          <p:cNvPr id="7" name="Shape 5"/>
+          <p:cNvSpPr/>
+          <p:nvPr/>
+        </p:nvSpPr>
+        <p:spPr>
+          <a:xfrm>
+            <a:off x="6126480" y="1920240"/>
+            <a:ext cx="2743200" cy="2286000"/>
+          </a:xfrm>
+          <a:prstGeom prst="ellipse">
             <a:avLst/>
           </a:prstGeom>
           <a:solidFill>
-            <a:srgbClr val="FFFFFF"/>
+            <a:srgbClr val="F59E0B">
+              <a:alpha val="45000"/>
+            </a:srgbClr>
           </a:solidFill>
           <a:ln w="12700">
             <a:solidFill>
-              <a:srgbClr val="0F1B3D"/>
+              <a:srgbClr val="F59E0B"/>
             </a:solidFill>
             <a:prstDash val="solid"/>
           </a:ln>
@@ -1951,39 +2071,14 @@
       </p:sp>
       <p:sp>
         <p:nvSpPr>
-          <p:cNvPr id="7" name="Shape 5"/>
-          <p:cNvSpPr/>
-          <p:nvPr/>
-        </p:nvSpPr>
-        <p:spPr>
-          <a:xfrm>
-            <a:off x="388620" y="2194560"/>
-            <a:ext cx="2697480" cy="365760"/>
-          </a:xfrm>
-          <a:prstGeom prst="rect">
-            <a:avLst/>
-          </a:prstGeom>
-          <a:solidFill>
-            <a:srgbClr val="0F1B3D"/>
-          </a:solidFill>
-          <a:ln w="12700">
-            <a:solidFill>
-              <a:srgbClr val="0F1B3D"/>
-            </a:solidFill>
-            <a:prstDash val="solid"/>
-          </a:ln>
-        </p:spPr>
-      </p:sp>
-      <p:sp>
-        <p:nvSpPr>
           <p:cNvPr id="8" name="Text 6"/>
           <p:cNvSpPr/>
           <p:nvPr/>
         </p:nvSpPr>
         <p:spPr>
           <a:xfrm>
-            <a:off x="388620" y="2194560"/>
-            <a:ext cx="2697480" cy="365760"/>
+            <a:off x="365760" y="2148840"/>
+            <a:ext cx="2377440" cy="365760"/>
           </a:xfrm>
           <a:prstGeom prst="rect">
             <a:avLst/>
@@ -2021,51 +2116,34 @@
         </p:nvSpPr>
         <p:spPr>
           <a:xfrm>
-            <a:off x="571500" y="2697480"/>
-            <a:ext cx="2331720" cy="1051560"/>
-          </a:xfrm>
-          <a:prstGeom prst="rect">
-            <a:avLst/>
-          </a:prstGeom>
-          <a:noFill/>
-          <a:ln/>
-        </p:spPr>
-        <p:txBody>
-          <a:bodyPr wrap="square" lIns="0" tIns="0" rIns="0" bIns="0" rtlCol="0" anchor="ctr"/>
-          <a:lstStyle/>
-          <a:p>
-            <a:pPr indent="0" marL="0">
-              <a:buNone/>
-            </a:pPr>
-            <a:r>
-              <a:rPr lang="en-US" sz="1200" dirty="0">
-                <a:solidFill>
-                  <a:srgbClr val="1A1F36"/>
-                </a:solidFill>
-                <a:latin typeface="Calibri" pitchFamily="34" charset="0"/>
-                <a:ea typeface="Calibri" pitchFamily="34" charset="-122"/>
-                <a:cs typeface="Calibri" pitchFamily="34" charset="-120"/>
-              </a:rPr>
-              <a:t>Role-based · Judicious</a:t>
-            </a:r>
-            <a:endParaRPr lang="en-US" sz="1200" dirty="0"/>
-          </a:p>
-          <a:p>
-            <a:pPr indent="0" marL="0">
-              <a:buNone/>
-            </a:pPr>
-            <a:r>
-              <a:rPr lang="en-US" sz="1200" dirty="0">
-                <a:solidFill>
-                  <a:srgbClr val="1A1F36"/>
-                </a:solidFill>
-                <a:latin typeface="Calibri" pitchFamily="34" charset="0"/>
-                <a:ea typeface="Calibri" pitchFamily="34" charset="-122"/>
-                <a:cs typeface="Calibri" pitchFamily="34" charset="-120"/>
-              </a:rPr>
-              <a:t>Static · Deterministic</a:t>
-            </a:r>
-            <a:endParaRPr lang="en-US" sz="1200" dirty="0"/>
+            <a:off x="3383280" y="2286000"/>
+            <a:ext cx="2377440" cy="365760"/>
+          </a:xfrm>
+          <a:prstGeom prst="rect">
+            <a:avLst/>
+          </a:prstGeom>
+          <a:noFill/>
+          <a:ln/>
+        </p:spPr>
+        <p:txBody>
+          <a:bodyPr wrap="square" lIns="0" tIns="0" rIns="0" bIns="0" rtlCol="0" anchor="ctr"/>
+          <a:lstStyle/>
+          <a:p>
+            <a:pPr algn="ctr" indent="0" marL="0">
+              <a:buNone/>
+            </a:pPr>
+            <a:r>
+              <a:rPr lang="en-US" sz="1300" b="1" spc="400" kern="0" dirty="0">
+                <a:solidFill>
+                  <a:srgbClr val="FFFFFF"/>
+                </a:solidFill>
+                <a:latin typeface="Calibri" pitchFamily="34" charset="0"/>
+                <a:ea typeface="Calibri" pitchFamily="34" charset="-122"/>
+                <a:cs typeface="Calibri" pitchFamily="34" charset="-120"/>
+              </a:rPr>
+              <a:t>AI AGENT</a:t>
+            </a:r>
+            <a:endParaRPr lang="en-US" sz="1300" dirty="0"/>
           </a:p>
         </p:txBody>
       </p:sp>
@@ -2077,101 +2155,165 @@
         </p:nvSpPr>
         <p:spPr>
           <a:xfrm>
-            <a:off x="571500" y="3749040"/>
-            <a:ext cx="2331720" cy="594360"/>
-          </a:xfrm>
-          <a:prstGeom prst="rect">
-            <a:avLst/>
-          </a:prstGeom>
-          <a:noFill/>
-          <a:ln/>
-        </p:spPr>
-        <p:txBody>
-          <a:bodyPr wrap="square" lIns="0" tIns="0" rIns="0" bIns="0" rtlCol="0" anchor="ctr"/>
-          <a:lstStyle/>
-          <a:p>
-            <a:pPr indent="0" marL="0">
-              <a:buNone/>
-            </a:pPr>
-            <a:r>
-              <a:rPr lang="en-US" sz="900" b="1" spc="200" kern="0" dirty="0">
-                <a:solidFill>
-                  <a:srgbClr val="0F1B3D"/>
-                </a:solidFill>
-                <a:latin typeface="Calibri" pitchFamily="34" charset="0"/>
-                <a:ea typeface="Calibri" pitchFamily="34" charset="-122"/>
-                <a:cs typeface="Calibri" pitchFamily="34" charset="-120"/>
-              </a:rPr>
-              <a:t>RISK
-</a:t>
-            </a:r>
-            <a:pPr indent="0" marL="0">
+            <a:off x="6309360" y="2148840"/>
+            <a:ext cx="2377440" cy="365760"/>
+          </a:xfrm>
+          <a:prstGeom prst="rect">
+            <a:avLst/>
+          </a:prstGeom>
+          <a:noFill/>
+          <a:ln/>
+        </p:spPr>
+        <p:txBody>
+          <a:bodyPr wrap="square" lIns="0" tIns="0" rIns="0" bIns="0" rtlCol="0" anchor="ctr"/>
+          <a:lstStyle/>
+          <a:p>
+            <a:pPr algn="ctr" indent="0" marL="0">
+              <a:buNone/>
+            </a:pPr>
+            <a:r>
+              <a:rPr lang="en-US" sz="1300" b="1" spc="400" kern="0" dirty="0">
+                <a:solidFill>
+                  <a:srgbClr val="FFFFFF"/>
+                </a:solidFill>
+                <a:latin typeface="Calibri" pitchFamily="34" charset="0"/>
+                <a:ea typeface="Calibri" pitchFamily="34" charset="-122"/>
+                <a:cs typeface="Calibri" pitchFamily="34" charset="-120"/>
+              </a:rPr>
+              <a:t>NHI</a:t>
+            </a:r>
+            <a:endParaRPr lang="en-US" sz="1300" dirty="0"/>
+          </a:p>
+        </p:txBody>
+      </p:sp>
+      <p:sp>
+        <p:nvSpPr>
+          <p:cNvPr id="11" name="Text 9"/>
+          <p:cNvSpPr/>
+          <p:nvPr/>
+        </p:nvSpPr>
+        <p:spPr>
+          <a:xfrm>
+            <a:off x="228600" y="2697480"/>
+            <a:ext cx="2560320" cy="822960"/>
+          </a:xfrm>
+          <a:prstGeom prst="rect">
+            <a:avLst/>
+          </a:prstGeom>
+          <a:noFill/>
+          <a:ln/>
+        </p:spPr>
+        <p:txBody>
+          <a:bodyPr wrap="square" lIns="0" tIns="0" rIns="0" bIns="0" rtlCol="0" anchor="ctr"/>
+          <a:lstStyle/>
+          <a:p>
+            <a:pPr algn="ctr" indent="0" marL="0">
+              <a:buNone/>
+            </a:pPr>
+            <a:r>
+              <a:rPr lang="en-US" sz="1100" dirty="0">
+                <a:solidFill>
+                  <a:srgbClr val="E8EEFC"/>
+                </a:solidFill>
+                <a:latin typeface="Calibri" pitchFamily="34" charset="0"/>
+                <a:ea typeface="Calibri" pitchFamily="34" charset="-122"/>
+                <a:cs typeface="Calibri" pitchFamily="34" charset="-120"/>
+              </a:rPr>
+              <a:t>Judicious · Static</a:t>
+            </a:r>
+            <a:endParaRPr lang="en-US" sz="1100" dirty="0"/>
+          </a:p>
+          <a:p>
+            <a:pPr algn="ctr" indent="0" marL="0">
+              <a:buNone/>
+            </a:pPr>
+            <a:r>
+              <a:rPr lang="en-US" sz="1100" dirty="0">
+                <a:solidFill>
+                  <a:srgbClr val="E8EEFC"/>
+                </a:solidFill>
+                <a:latin typeface="Calibri" pitchFamily="34" charset="0"/>
+                <a:ea typeface="Calibri" pitchFamily="34" charset="-122"/>
+                <a:cs typeface="Calibri" pitchFamily="34" charset="-120"/>
+              </a:rPr>
+              <a:t>Role-based permissions</a:t>
+            </a:r>
+            <a:endParaRPr lang="en-US" sz="1100" dirty="0"/>
+          </a:p>
+          <a:p>
+            <a:pPr algn="ctr" indent="0" marL="0">
+              <a:buNone/>
+            </a:pPr>
+            <a:r>
+              <a:rPr lang="en-US" sz="1100" dirty="0">
+                <a:solidFill>
+                  <a:srgbClr val="E8EEFC"/>
+                </a:solidFill>
+                <a:latin typeface="Calibri" pitchFamily="34" charset="0"/>
+                <a:ea typeface="Calibri" pitchFamily="34" charset="-122"/>
+                <a:cs typeface="Calibri" pitchFamily="34" charset="-120"/>
+              </a:rPr>
+              <a:t>Deterministic</a:t>
+            </a:r>
+            <a:endParaRPr lang="en-US" sz="1100" dirty="0"/>
+          </a:p>
+        </p:txBody>
+      </p:sp>
+      <p:sp>
+        <p:nvSpPr>
+          <p:cNvPr id="12" name="Text 10"/>
+          <p:cNvSpPr/>
+          <p:nvPr/>
+        </p:nvSpPr>
+        <p:spPr>
+          <a:xfrm>
+            <a:off x="228600" y="3566160"/>
+            <a:ext cx="2560320" cy="502920"/>
+          </a:xfrm>
+          <a:prstGeom prst="rect">
+            <a:avLst/>
+          </a:prstGeom>
+          <a:noFill/>
+          <a:ln/>
+        </p:spPr>
+        <p:txBody>
+          <a:bodyPr wrap="square" lIns="0" tIns="0" rIns="0" bIns="0" rtlCol="0" anchor="ctr"/>
+          <a:lstStyle/>
+          <a:p>
+            <a:pPr algn="ctr" indent="0" marL="0">
               <a:buNone/>
             </a:pPr>
             <a:r>
               <a:rPr lang="en-US" sz="1000" i="1" dirty="0">
                 <a:solidFill>
-                  <a:srgbClr val="64748B"/>
-                </a:solidFill>
-                <a:latin typeface="Calibri" pitchFamily="34" charset="0"/>
-                <a:ea typeface="Calibri" pitchFamily="34" charset="-122"/>
-                <a:cs typeface="Calibri" pitchFamily="34" charset="-120"/>
-              </a:rPr>
-              <a:t>Socially exploitable · Over-permissioned over time</a:t>
-            </a:r>
-            <a:endParaRPr lang="en-US" sz="900" dirty="0"/>
-          </a:p>
-        </p:txBody>
-      </p:sp>
-      <p:sp>
-        <p:nvSpPr>
-          <p:cNvPr id="11" name="Shape 9"/>
-          <p:cNvSpPr/>
-          <p:nvPr/>
-        </p:nvSpPr>
-        <p:spPr>
-          <a:xfrm>
-            <a:off x="3223260" y="2194560"/>
-            <a:ext cx="2697480" cy="2194560"/>
-          </a:xfrm>
-          <a:prstGeom prst="rect">
-            <a:avLst/>
-          </a:prstGeom>
-          <a:solidFill>
-            <a:srgbClr val="E8EEFC"/>
-          </a:solidFill>
-          <a:ln w="25400">
-            <a:solidFill>
-              <a:srgbClr val="02C39A"/>
-            </a:solidFill>
-            <a:prstDash val="solid"/>
-          </a:ln>
-        </p:spPr>
-      </p:sp>
-      <p:sp>
-        <p:nvSpPr>
-          <p:cNvPr id="12" name="Shape 10"/>
-          <p:cNvSpPr/>
-          <p:nvPr/>
-        </p:nvSpPr>
-        <p:spPr>
-          <a:xfrm>
-            <a:off x="3223260" y="2194560"/>
-            <a:ext cx="2697480" cy="365760"/>
-          </a:xfrm>
-          <a:prstGeom prst="rect">
-            <a:avLst/>
-          </a:prstGeom>
-          <a:solidFill>
-            <a:srgbClr val="02C39A"/>
-          </a:solidFill>
-          <a:ln w="12700">
-            <a:solidFill>
-              <a:srgbClr val="02C39A"/>
-            </a:solidFill>
-            <a:prstDash val="solid"/>
-          </a:ln>
-        </p:spPr>
+                  <a:srgbClr val="7C3AED"/>
+                </a:solidFill>
+                <a:latin typeface="Calibri" pitchFamily="34" charset="0"/>
+                <a:ea typeface="Calibri" pitchFamily="34" charset="-122"/>
+                <a:cs typeface="Calibri" pitchFamily="34" charset="-120"/>
+              </a:rPr>
+              <a:t>Risk: Socially exploitable</a:t>
+            </a:r>
+            <a:endParaRPr lang="en-US" sz="1000" dirty="0"/>
+          </a:p>
+          <a:p>
+            <a:pPr algn="ctr" indent="0" marL="0">
+              <a:buNone/>
+            </a:pPr>
+            <a:r>
+              <a:rPr lang="en-US" sz="1000" i="1" dirty="0">
+                <a:solidFill>
+                  <a:srgbClr val="7C3AED"/>
+                </a:solidFill>
+                <a:latin typeface="Calibri" pitchFamily="34" charset="0"/>
+                <a:ea typeface="Calibri" pitchFamily="34" charset="-122"/>
+                <a:cs typeface="Calibri" pitchFamily="34" charset="-120"/>
+              </a:rPr>
+              <a:t>over-permissioned over time</a:t>
+            </a:r>
+            <a:endParaRPr lang="en-US" sz="1000" dirty="0"/>
+          </a:p>
+        </p:txBody>
       </p:sp>
       <p:sp>
         <p:nvSpPr>
@@ -2181,8 +2323,8 @@
         </p:nvSpPr>
         <p:spPr>
           <a:xfrm>
-            <a:off x="3223260" y="2194560"/>
-            <a:ext cx="2697480" cy="365760"/>
+            <a:off x="3291840" y="2816352"/>
+            <a:ext cx="2560320" cy="822960"/>
           </a:xfrm>
           <a:prstGeom prst="rect">
             <a:avLst/>
@@ -2198,17 +2340,51 @@
               <a:buNone/>
             </a:pPr>
             <a:r>
-              <a:rPr lang="en-US" sz="1300" b="1" spc="400" kern="0" dirty="0">
-                <a:solidFill>
-                  <a:srgbClr val="FFFFFF"/>
-                </a:solidFill>
-                <a:latin typeface="Calibri" pitchFamily="34" charset="0"/>
-                <a:ea typeface="Calibri" pitchFamily="34" charset="-122"/>
-                <a:cs typeface="Calibri" pitchFamily="34" charset="-120"/>
-              </a:rPr>
-              <a:t>AI AGENT</a:t>
-            </a:r>
-            <a:endParaRPr lang="en-US" sz="1300" dirty="0"/>
+              <a:rPr lang="en-US" sz="1100" dirty="0">
+                <a:solidFill>
+                  <a:srgbClr val="E8EEFC"/>
+                </a:solidFill>
+                <a:latin typeface="Calibri" pitchFamily="34" charset="0"/>
+                <a:ea typeface="Calibri" pitchFamily="34" charset="-122"/>
+                <a:cs typeface="Calibri" pitchFamily="34" charset="-120"/>
+              </a:rPr>
+              <a:t>Autonomous · Goal-based</a:t>
+            </a:r>
+            <a:endParaRPr lang="en-US" sz="1100" dirty="0"/>
+          </a:p>
+          <a:p>
+            <a:pPr algn="ctr" indent="0" marL="0">
+              <a:buNone/>
+            </a:pPr>
+            <a:r>
+              <a:rPr lang="en-US" sz="1100" dirty="0">
+                <a:solidFill>
+                  <a:srgbClr val="E8EEFC"/>
+                </a:solidFill>
+                <a:latin typeface="Calibri" pitchFamily="34" charset="0"/>
+                <a:ea typeface="Calibri" pitchFamily="34" charset="-122"/>
+                <a:cs typeface="Calibri" pitchFamily="34" charset="-120"/>
+              </a:rPr>
+              <a:t>Nondeterministic · LLM-powered</a:t>
+            </a:r>
+            <a:endParaRPr lang="en-US" sz="1100" dirty="0"/>
+          </a:p>
+          <a:p>
+            <a:pPr algn="ctr" indent="0" marL="0">
+              <a:buNone/>
+            </a:pPr>
+            <a:r>
+              <a:rPr lang="en-US" sz="1100" dirty="0">
+                <a:solidFill>
+                  <a:srgbClr val="E8EEFC"/>
+                </a:solidFill>
+                <a:latin typeface="Calibri" pitchFamily="34" charset="0"/>
+                <a:ea typeface="Calibri" pitchFamily="34" charset="-122"/>
+                <a:cs typeface="Calibri" pitchFamily="34" charset="-120"/>
+              </a:rPr>
+              <a:t>Context-aware · Iterative</a:t>
+            </a:r>
+            <a:endParaRPr lang="en-US" sz="1100" dirty="0"/>
           </a:p>
         </p:txBody>
       </p:sp>
@@ -2220,68 +2396,51 @@
         </p:nvSpPr>
         <p:spPr>
           <a:xfrm>
-            <a:off x="3406140" y="2697480"/>
-            <a:ext cx="2331720" cy="1051560"/>
-          </a:xfrm>
-          <a:prstGeom prst="rect">
-            <a:avLst/>
-          </a:prstGeom>
-          <a:noFill/>
-          <a:ln/>
-        </p:spPr>
-        <p:txBody>
-          <a:bodyPr wrap="square" lIns="0" tIns="0" rIns="0" bIns="0" rtlCol="0" anchor="ctr"/>
-          <a:lstStyle/>
-          <a:p>
-            <a:pPr indent="0" marL="0">
-              <a:buNone/>
-            </a:pPr>
-            <a:r>
-              <a:rPr lang="en-US" sz="1200" dirty="0">
-                <a:solidFill>
-                  <a:srgbClr val="1A1F36"/>
-                </a:solidFill>
-                <a:latin typeface="Calibri" pitchFamily="34" charset="0"/>
-                <a:ea typeface="Calibri" pitchFamily="34" charset="-122"/>
-                <a:cs typeface="Calibri" pitchFamily="34" charset="-120"/>
-              </a:rPr>
-              <a:t>Autonomous · Goal-based</a:t>
-            </a:r>
-            <a:endParaRPr lang="en-US" sz="1200" dirty="0"/>
-          </a:p>
-          <a:p>
-            <a:pPr indent="0" marL="0">
-              <a:buNone/>
-            </a:pPr>
-            <a:r>
-              <a:rPr lang="en-US" sz="1200" dirty="0">
-                <a:solidFill>
-                  <a:srgbClr val="1A1F36"/>
-                </a:solidFill>
-                <a:latin typeface="Calibri" pitchFamily="34" charset="0"/>
-                <a:ea typeface="Calibri" pitchFamily="34" charset="-122"/>
-                <a:cs typeface="Calibri" pitchFamily="34" charset="-120"/>
-              </a:rPr>
-              <a:t>Iterative · Nondeterministic</a:t>
-            </a:r>
-            <a:endParaRPr lang="en-US" sz="1200" dirty="0"/>
-          </a:p>
-          <a:p>
-            <a:pPr indent="0" marL="0">
-              <a:buNone/>
-            </a:pPr>
-            <a:r>
-              <a:rPr lang="en-US" sz="1200" dirty="0">
-                <a:solidFill>
-                  <a:srgbClr val="1A1F36"/>
-                </a:solidFill>
-                <a:latin typeface="Calibri" pitchFamily="34" charset="0"/>
-                <a:ea typeface="Calibri" pitchFamily="34" charset="-122"/>
-                <a:cs typeface="Calibri" pitchFamily="34" charset="-120"/>
-              </a:rPr>
-              <a:t>LLM-powered · Context-aware</a:t>
-            </a:r>
-            <a:endParaRPr lang="en-US" sz="1200" dirty="0"/>
+            <a:off x="3291840" y="3657600"/>
+            <a:ext cx="2560320" cy="502920"/>
+          </a:xfrm>
+          <a:prstGeom prst="rect">
+            <a:avLst/>
+          </a:prstGeom>
+          <a:noFill/>
+          <a:ln/>
+        </p:spPr>
+        <p:txBody>
+          <a:bodyPr wrap="square" lIns="0" tIns="0" rIns="0" bIns="0" rtlCol="0" anchor="ctr"/>
+          <a:lstStyle/>
+          <a:p>
+            <a:pPr algn="ctr" indent="0" marL="0">
+              <a:buNone/>
+            </a:pPr>
+            <a:r>
+              <a:rPr lang="en-US" sz="1000" i="1" dirty="0">
+                <a:solidFill>
+                  <a:srgbClr val="02C39A"/>
+                </a:solidFill>
+                <a:latin typeface="Calibri" pitchFamily="34" charset="0"/>
+                <a:ea typeface="Calibri" pitchFamily="34" charset="-122"/>
+                <a:cs typeface="Calibri" pitchFamily="34" charset="-120"/>
+              </a:rPr>
+              <a:t>Risk: Manipulable via inputs</a:t>
+            </a:r>
+            <a:endParaRPr lang="en-US" sz="1000" dirty="0"/>
+          </a:p>
+          <a:p>
+            <a:pPr algn="ctr" indent="0" marL="0">
+              <a:buNone/>
+            </a:pPr>
+            <a:r>
+              <a:rPr lang="en-US" sz="1000" i="1" dirty="0">
+                <a:solidFill>
+                  <a:srgbClr val="02C39A"/>
+                </a:solidFill>
+                <a:latin typeface="Calibri" pitchFamily="34" charset="0"/>
+                <a:ea typeface="Calibri" pitchFamily="34" charset="-122"/>
+                <a:cs typeface="Calibri" pitchFamily="34" charset="-120"/>
+              </a:rPr>
+              <a:t>dangerous when over-trusted</a:t>
+            </a:r>
+            <a:endParaRPr lang="en-US" sz="1000" dirty="0"/>
           </a:p>
         </p:txBody>
       </p:sp>
@@ -2293,293 +2452,113 @@
         </p:nvSpPr>
         <p:spPr>
           <a:xfrm>
-            <a:off x="3406140" y="3749040"/>
-            <a:ext cx="2331720" cy="594360"/>
-          </a:xfrm>
-          <a:prstGeom prst="rect">
-            <a:avLst/>
-          </a:prstGeom>
-          <a:noFill/>
-          <a:ln/>
-        </p:spPr>
-        <p:txBody>
-          <a:bodyPr wrap="square" lIns="0" tIns="0" rIns="0" bIns="0" rtlCol="0" anchor="ctr"/>
-          <a:lstStyle/>
-          <a:p>
-            <a:pPr indent="0" marL="0">
-              <a:buNone/>
-            </a:pPr>
-            <a:r>
-              <a:rPr lang="en-US" sz="900" b="1" spc="200" kern="0" dirty="0">
-                <a:solidFill>
-                  <a:srgbClr val="02C39A"/>
-                </a:solidFill>
-                <a:latin typeface="Calibri" pitchFamily="34" charset="0"/>
-                <a:ea typeface="Calibri" pitchFamily="34" charset="-122"/>
-                <a:cs typeface="Calibri" pitchFamily="34" charset="-120"/>
-              </a:rPr>
-              <a:t>RISK
-</a:t>
-            </a:r>
-            <a:pPr indent="0" marL="0">
+            <a:off x="6217920" y="2697480"/>
+            <a:ext cx="2560320" cy="822960"/>
+          </a:xfrm>
+          <a:prstGeom prst="rect">
+            <a:avLst/>
+          </a:prstGeom>
+          <a:noFill/>
+          <a:ln/>
+        </p:spPr>
+        <p:txBody>
+          <a:bodyPr wrap="square" lIns="0" tIns="0" rIns="0" bIns="0" rtlCol="0" anchor="ctr"/>
+          <a:lstStyle/>
+          <a:p>
+            <a:pPr algn="ctr" indent="0" marL="0">
+              <a:buNone/>
+            </a:pPr>
+            <a:r>
+              <a:rPr lang="en-US" sz="1100" dirty="0">
+                <a:solidFill>
+                  <a:srgbClr val="E8EEFC"/>
+                </a:solidFill>
+                <a:latin typeface="Calibri" pitchFamily="34" charset="0"/>
+                <a:ea typeface="Calibri" pitchFamily="34" charset="-122"/>
+                <a:cs typeface="Calibri" pitchFamily="34" charset="-120"/>
+              </a:rPr>
+              <a:t>Restless · Works at scale</a:t>
+            </a:r>
+            <a:endParaRPr lang="en-US" sz="1100" dirty="0"/>
+          </a:p>
+          <a:p>
+            <a:pPr algn="ctr" indent="0" marL="0">
+              <a:buNone/>
+            </a:pPr>
+            <a:r>
+              <a:rPr lang="en-US" sz="1100" dirty="0">
+                <a:solidFill>
+                  <a:srgbClr val="E8EEFC"/>
+                </a:solidFill>
+                <a:latin typeface="Calibri" pitchFamily="34" charset="0"/>
+                <a:ea typeface="Calibri" pitchFamily="34" charset="-122"/>
+                <a:cs typeface="Calibri" pitchFamily="34" charset="-120"/>
+              </a:rPr>
+              <a:t>Permission-greedy</a:t>
+            </a:r>
+            <a:endParaRPr lang="en-US" sz="1100" dirty="0"/>
+          </a:p>
+        </p:txBody>
+      </p:sp>
+      <p:sp>
+        <p:nvSpPr>
+          <p:cNvPr id="16" name="Text 14"/>
+          <p:cNvSpPr/>
+          <p:nvPr/>
+        </p:nvSpPr>
+        <p:spPr>
+          <a:xfrm>
+            <a:off x="6217920" y="3566160"/>
+            <a:ext cx="2560320" cy="502920"/>
+          </a:xfrm>
+          <a:prstGeom prst="rect">
+            <a:avLst/>
+          </a:prstGeom>
+          <a:noFill/>
+          <a:ln/>
+        </p:spPr>
+        <p:txBody>
+          <a:bodyPr wrap="square" lIns="0" tIns="0" rIns="0" bIns="0" rtlCol="0" anchor="ctr"/>
+          <a:lstStyle/>
+          <a:p>
+            <a:pPr algn="ctr" indent="0" marL="0">
               <a:buNone/>
             </a:pPr>
             <a:r>
               <a:rPr lang="en-US" sz="1000" i="1" dirty="0">
                 <a:solidFill>
-                  <a:srgbClr val="64748B"/>
-                </a:solidFill>
-                <a:latin typeface="Calibri" pitchFamily="34" charset="0"/>
-                <a:ea typeface="Calibri" pitchFamily="34" charset="-122"/>
-                <a:cs typeface="Calibri" pitchFamily="34" charset="-120"/>
-              </a:rPr>
-              <a:t>Manipulable via inputs · Dangerous when over-trusted</a:t>
-            </a:r>
-            <a:endParaRPr lang="en-US" sz="900" dirty="0"/>
-          </a:p>
-        </p:txBody>
-      </p:sp>
-      <p:sp>
-        <p:nvSpPr>
-          <p:cNvPr id="16" name="Shape 14"/>
-          <p:cNvSpPr/>
-          <p:nvPr/>
-        </p:nvSpPr>
-        <p:spPr>
-          <a:xfrm>
-            <a:off x="6057900" y="2194560"/>
-            <a:ext cx="2697480" cy="2194560"/>
-          </a:xfrm>
-          <a:prstGeom prst="rect">
-            <a:avLst/>
-          </a:prstGeom>
-          <a:solidFill>
-            <a:srgbClr val="FFFFFF"/>
-          </a:solidFill>
-          <a:ln w="12700">
-            <a:solidFill>
-              <a:srgbClr val="0F1B3D"/>
-            </a:solidFill>
-            <a:prstDash val="solid"/>
-          </a:ln>
-        </p:spPr>
-      </p:sp>
-      <p:sp>
-        <p:nvSpPr>
-          <p:cNvPr id="17" name="Shape 15"/>
-          <p:cNvSpPr/>
-          <p:nvPr/>
-        </p:nvSpPr>
-        <p:spPr>
-          <a:xfrm>
-            <a:off x="6057900" y="2194560"/>
-            <a:ext cx="2697480" cy="365760"/>
-          </a:xfrm>
-          <a:prstGeom prst="rect">
-            <a:avLst/>
-          </a:prstGeom>
-          <a:solidFill>
-            <a:srgbClr val="0F1B3D"/>
-          </a:solidFill>
-          <a:ln w="12700">
-            <a:solidFill>
-              <a:srgbClr val="0F1B3D"/>
-            </a:solidFill>
-            <a:prstDash val="solid"/>
-          </a:ln>
-        </p:spPr>
-      </p:sp>
-      <p:sp>
-        <p:nvSpPr>
-          <p:cNvPr id="18" name="Text 16"/>
-          <p:cNvSpPr/>
-          <p:nvPr/>
-        </p:nvSpPr>
-        <p:spPr>
-          <a:xfrm>
-            <a:off x="6057900" y="2194560"/>
-            <a:ext cx="2697480" cy="365760"/>
-          </a:xfrm>
-          <a:prstGeom prst="rect">
-            <a:avLst/>
-          </a:prstGeom>
-          <a:noFill/>
-          <a:ln/>
-        </p:spPr>
-        <p:txBody>
-          <a:bodyPr wrap="square" lIns="0" tIns="0" rIns="0" bIns="0" rtlCol="0" anchor="ctr"/>
-          <a:lstStyle/>
+                  <a:srgbClr val="F59E0B"/>
+                </a:solidFill>
+                <a:latin typeface="Calibri" pitchFamily="34" charset="0"/>
+                <a:ea typeface="Calibri" pitchFamily="34" charset="-122"/>
+                <a:cs typeface="Calibri" pitchFamily="34" charset="-120"/>
+              </a:rPr>
+              <a:t>Risk: Misconfigurations</a:t>
+            </a:r>
+            <a:endParaRPr lang="en-US" sz="1000" dirty="0"/>
+          </a:p>
           <a:p>
             <a:pPr algn="ctr" indent="0" marL="0">
               <a:buNone/>
             </a:pPr>
             <a:r>
-              <a:rPr lang="en-US" sz="1300" b="1" spc="400" kern="0" dirty="0">
-                <a:solidFill>
-                  <a:srgbClr val="FFFFFF"/>
-                </a:solidFill>
-                <a:latin typeface="Calibri" pitchFamily="34" charset="0"/>
-                <a:ea typeface="Calibri" pitchFamily="34" charset="-122"/>
-                <a:cs typeface="Calibri" pitchFamily="34" charset="-120"/>
-              </a:rPr>
-              <a:t>NHI</a:t>
-            </a:r>
-            <a:endParaRPr lang="en-US" sz="1300" dirty="0"/>
-          </a:p>
-        </p:txBody>
-      </p:sp>
-      <p:sp>
-        <p:nvSpPr>
-          <p:cNvPr id="19" name="Text 17"/>
-          <p:cNvSpPr/>
-          <p:nvPr/>
-        </p:nvSpPr>
-        <p:spPr>
-          <a:xfrm>
-            <a:off x="6240780" y="2697480"/>
-            <a:ext cx="2331720" cy="1051560"/>
-          </a:xfrm>
-          <a:prstGeom prst="rect">
-            <a:avLst/>
-          </a:prstGeom>
-          <a:noFill/>
-          <a:ln/>
-        </p:spPr>
-        <p:txBody>
-          <a:bodyPr wrap="square" lIns="0" tIns="0" rIns="0" bIns="0" rtlCol="0" anchor="ctr"/>
-          <a:lstStyle/>
-          <a:p>
-            <a:pPr indent="0" marL="0">
-              <a:buNone/>
-            </a:pPr>
-            <a:r>
-              <a:rPr lang="en-US" sz="1200" dirty="0">
-                <a:solidFill>
-                  <a:srgbClr val="1A1F36"/>
-                </a:solidFill>
-                <a:latin typeface="Calibri" pitchFamily="34" charset="0"/>
-                <a:ea typeface="Calibri" pitchFamily="34" charset="-122"/>
-                <a:cs typeface="Calibri" pitchFamily="34" charset="-120"/>
-              </a:rPr>
-              <a:t>Restless · Works at scale</a:t>
-            </a:r>
-            <a:endParaRPr lang="en-US" sz="1200" dirty="0"/>
-          </a:p>
-          <a:p>
-            <a:pPr indent="0" marL="0">
-              <a:buNone/>
-            </a:pPr>
-            <a:r>
-              <a:rPr lang="en-US" sz="1200" dirty="0">
-                <a:solidFill>
-                  <a:srgbClr val="1A1F36"/>
-                </a:solidFill>
-                <a:latin typeface="Calibri" pitchFamily="34" charset="0"/>
-                <a:ea typeface="Calibri" pitchFamily="34" charset="-122"/>
-                <a:cs typeface="Calibri" pitchFamily="34" charset="-120"/>
-              </a:rPr>
-              <a:t>Permission-greedy</a:t>
-            </a:r>
-            <a:endParaRPr lang="en-US" sz="1200" dirty="0"/>
-          </a:p>
-        </p:txBody>
-      </p:sp>
-      <p:sp>
-        <p:nvSpPr>
-          <p:cNvPr id="20" name="Text 18"/>
-          <p:cNvSpPr/>
-          <p:nvPr/>
-        </p:nvSpPr>
-        <p:spPr>
-          <a:xfrm>
-            <a:off x="6240780" y="3749040"/>
-            <a:ext cx="2331720" cy="594360"/>
-          </a:xfrm>
-          <a:prstGeom prst="rect">
-            <a:avLst/>
-          </a:prstGeom>
-          <a:noFill/>
-          <a:ln/>
-        </p:spPr>
-        <p:txBody>
-          <a:bodyPr wrap="square" lIns="0" tIns="0" rIns="0" bIns="0" rtlCol="0" anchor="ctr"/>
-          <a:lstStyle/>
-          <a:p>
-            <a:pPr indent="0" marL="0">
-              <a:buNone/>
-            </a:pPr>
-            <a:r>
-              <a:rPr lang="en-US" sz="900" b="1" spc="200" kern="0" dirty="0">
-                <a:solidFill>
-                  <a:srgbClr val="0F1B3D"/>
-                </a:solidFill>
-                <a:latin typeface="Calibri" pitchFamily="34" charset="0"/>
-                <a:ea typeface="Calibri" pitchFamily="34" charset="-122"/>
-                <a:cs typeface="Calibri" pitchFamily="34" charset="-120"/>
-              </a:rPr>
-              <a:t>RISK
-</a:t>
-            </a:r>
-            <a:pPr indent="0" marL="0">
-              <a:buNone/>
-            </a:pPr>
-            <a:r>
               <a:rPr lang="en-US" sz="1000" i="1" dirty="0">
                 <a:solidFill>
-                  <a:srgbClr val="64748B"/>
-                </a:solidFill>
-                <a:latin typeface="Calibri" pitchFamily="34" charset="0"/>
-                <a:ea typeface="Calibri" pitchFamily="34" charset="-122"/>
-                <a:cs typeface="Calibri" pitchFamily="34" charset="-120"/>
-              </a:rPr>
-              <a:t>Misconfigurations · Long-lived secrets</a:t>
-            </a:r>
-            <a:endParaRPr lang="en-US" sz="900" dirty="0"/>
-          </a:p>
-        </p:txBody>
-      </p:sp>
-      <p:sp>
-        <p:nvSpPr>
-          <p:cNvPr id="21" name="Text 19"/>
-          <p:cNvSpPr/>
-          <p:nvPr/>
-        </p:nvSpPr>
-        <p:spPr>
-          <a:xfrm>
-            <a:off x="457200" y="4617720"/>
-            <a:ext cx="8229600" cy="274320"/>
-          </a:xfrm>
-          <a:prstGeom prst="rect">
-            <a:avLst/>
-          </a:prstGeom>
-          <a:noFill/>
-          <a:ln/>
-        </p:spPr>
-        <p:txBody>
-          <a:bodyPr wrap="square" lIns="0" tIns="0" rIns="0" bIns="0" rtlCol="0" anchor="ctr"/>
-          <a:lstStyle/>
-          <a:p>
-            <a:pPr algn="ctr" indent="0" marL="0">
-              <a:buNone/>
-            </a:pPr>
-            <a:r>
-              <a:rPr lang="en-US" sz="1100" b="1" i="1" dirty="0">
-                <a:solidFill>
-                  <a:srgbClr val="0F1B3D"/>
-                </a:solidFill>
-                <a:latin typeface="Calibri" pitchFamily="34" charset="0"/>
-                <a:ea typeface="Calibri" pitchFamily="34" charset="-122"/>
-                <a:cs typeface="Calibri" pitchFamily="34" charset="-120"/>
-              </a:rPr>
-              <a:t>144 agents per human (SACR benchmark). Manual oversight structurally impossible.</a:t>
-            </a:r>
-            <a:endParaRPr lang="en-US" sz="1100" dirty="0"/>
-          </a:p>
-        </p:txBody>
-      </p:sp>
-      <p:sp>
-        <p:nvSpPr>
-          <p:cNvPr id="22" name="Text 20"/>
+                  <a:srgbClr val="F59E0B"/>
+                </a:solidFill>
+                <a:latin typeface="Calibri" pitchFamily="34" charset="0"/>
+                <a:ea typeface="Calibri" pitchFamily="34" charset="-122"/>
+                <a:cs typeface="Calibri" pitchFamily="34" charset="-120"/>
+              </a:rPr>
+              <a:t>long-lived secrets</a:t>
+            </a:r>
+            <a:endParaRPr lang="en-US" sz="1000" dirty="0"/>
+          </a:p>
+        </p:txBody>
+      </p:sp>
+      <p:sp>
+        <p:nvSpPr>
+          <p:cNvPr id="17" name="Text 15"/>
           <p:cNvSpPr/>
           <p:nvPr/>
         </p:nvSpPr>
@@ -2604,13 +2583,13 @@
             <a:r>
               <a:rPr lang="en-US" sz="900" dirty="0">
                 <a:solidFill>
-                  <a:srgbClr val="64748B"/>
-                </a:solidFill>
-                <a:latin typeface="Calibri" pitchFamily="34" charset="0"/>
-                <a:ea typeface="Calibri" pitchFamily="34" charset="-122"/>
-                <a:cs typeface="Calibri" pitchFamily="34" charset="-120"/>
-              </a:rPr>
-              <a:t>2 / 8</a:t>
+                  <a:srgbClr val="E8EEFC"/>
+                </a:solidFill>
+                <a:latin typeface="Calibri" pitchFamily="34" charset="0"/>
+                <a:ea typeface="Calibri" pitchFamily="34" charset="-122"/>
+                <a:cs typeface="Calibri" pitchFamily="34" charset="-120"/>
+              </a:rPr>
+              <a:t>2 / 9</a:t>
             </a:r>
             <a:endParaRPr lang="en-US" sz="900" dirty="0"/>
           </a:p>
@@ -2706,7 +2685,7 @@
                 <a:ea typeface="Calibri" pitchFamily="34" charset="-122"/>
                 <a:cs typeface="Calibri" pitchFamily="34" charset="-120"/>
               </a:rPr>
-              <a:t>02 · The map</a:t>
+              <a:t>02 · The full map</a:t>
             </a:r>
             <a:endParaRPr lang="en-US" sz="1100" dirty="0"/>
           </a:p>
@@ -2745,7 +2724,7 @@
                 <a:ea typeface="Georgia" pitchFamily="34" charset="-122"/>
                 <a:cs typeface="Georgia" pitchFamily="34" charset="-120"/>
               </a:rPr>
-              <a:t>What “agent IAM” fully means.</a:t>
+              <a:t>What “agent IAM” actually means.</a:t>
             </a:r>
             <a:endParaRPr lang="en-US" sz="3400" dirty="0"/>
           </a:p>
@@ -2759,8 +2738,8 @@
         </p:nvSpPr>
         <p:spPr>
           <a:xfrm>
-            <a:off x="457200" y="1554480"/>
-            <a:ext cx="8229600" cy="365760"/>
+            <a:off x="457200" y="1600200"/>
+            <a:ext cx="8229600" cy="320040"/>
           </a:xfrm>
           <a:prstGeom prst="rect">
             <a:avLst/>
@@ -2784,7 +2763,7 @@
                 <a:ea typeface="Calibri" pitchFamily="34" charset="-122"/>
                 <a:cs typeface="Calibri" pitchFamily="34" charset="-120"/>
               </a:rPr>
-              <a:t>10-capability framework (“IAM for LLM-Based AI Agents”). Our scope tags show where each one lands for us.</a:t>
+              <a:t>10-capability framework (“IAM for LLM-Based AI Agents”). Grouped by theme — not phases.</a:t>
             </a:r>
             <a:endParaRPr lang="en-US" sz="1200" dirty="0"/>
           </a:p>
@@ -2798,111 +2777,8 @@
         </p:nvSpPr>
         <p:spPr>
           <a:xfrm>
-            <a:off x="457200" y="2011680"/>
-            <a:ext cx="292608" cy="292608"/>
-          </a:xfrm>
-          <a:prstGeom prst="ellipse">
-            <a:avLst/>
-          </a:prstGeom>
-          <a:solidFill>
-            <a:srgbClr val="E8EEFC"/>
-          </a:solidFill>
-          <a:ln w="6350">
-            <a:solidFill>
-              <a:srgbClr val="CBD5E1"/>
-            </a:solidFill>
-            <a:prstDash val="solid"/>
-          </a:ln>
-        </p:spPr>
-      </p:sp>
-      <p:sp>
-        <p:nvSpPr>
-          <p:cNvPr id="7" name="Text 5"/>
-          <p:cNvSpPr/>
-          <p:nvPr/>
-        </p:nvSpPr>
-        <p:spPr>
-          <a:xfrm>
-            <a:off x="457200" y="2011680"/>
-            <a:ext cx="292608" cy="292608"/>
-          </a:xfrm>
-          <a:prstGeom prst="rect">
-            <a:avLst/>
-          </a:prstGeom>
-          <a:noFill/>
-          <a:ln/>
-        </p:spPr>
-        <p:txBody>
-          <a:bodyPr wrap="square" lIns="0" tIns="0" rIns="0" bIns="0" rtlCol="0" anchor="ctr"/>
-          <a:lstStyle/>
-          <a:p>
-            <a:pPr algn="ctr" indent="0" marL="0">
-              <a:buNone/>
-            </a:pPr>
-            <a:r>
-              <a:rPr lang="en-US" sz="1100" b="1" dirty="0">
-                <a:solidFill>
-                  <a:srgbClr val="0F1B3D"/>
-                </a:solidFill>
-                <a:latin typeface="Calibri" pitchFamily="34" charset="0"/>
-                <a:ea typeface="Calibri" pitchFamily="34" charset="-122"/>
-                <a:cs typeface="Calibri" pitchFamily="34" charset="-120"/>
-              </a:rPr>
-              <a:t>1</a:t>
-            </a:r>
-            <a:endParaRPr lang="en-US" sz="1100" dirty="0"/>
-          </a:p>
-        </p:txBody>
-      </p:sp>
-      <p:sp>
-        <p:nvSpPr>
-          <p:cNvPr id="8" name="Text 6"/>
-          <p:cNvSpPr/>
-          <p:nvPr/>
-        </p:nvSpPr>
-        <p:spPr>
-          <a:xfrm>
-            <a:off x="822960" y="1965960"/>
-            <a:ext cx="2697480" cy="411480"/>
-          </a:xfrm>
-          <a:prstGeom prst="rect">
-            <a:avLst/>
-          </a:prstGeom>
-          <a:noFill/>
-          <a:ln/>
-        </p:spPr>
-        <p:txBody>
-          <a:bodyPr wrap="square" lIns="0" tIns="0" rIns="0" bIns="0" rtlCol="0" anchor="ctr"/>
-          <a:lstStyle/>
-          <a:p>
-            <a:pPr indent="0" marL="0">
-              <a:buNone/>
-            </a:pPr>
-            <a:r>
-              <a:rPr lang="en-US" sz="1200" dirty="0">
-                <a:solidFill>
-                  <a:srgbClr val="1A1F36"/>
-                </a:solidFill>
-                <a:latin typeface="Calibri" pitchFamily="34" charset="0"/>
-                <a:ea typeface="Calibri" pitchFamily="34" charset="-122"/>
-                <a:cs typeface="Calibri" pitchFamily="34" charset="-120"/>
-              </a:rPr>
-              <a:t>Registration &amp; identification</a:t>
-            </a:r>
-            <a:endParaRPr lang="en-US" sz="1200" dirty="0"/>
-          </a:p>
-        </p:txBody>
-      </p:sp>
-      <p:sp>
-        <p:nvSpPr>
-          <p:cNvPr id="9" name="Shape 7"/>
-          <p:cNvSpPr/>
-          <p:nvPr/>
-        </p:nvSpPr>
-        <p:spPr>
-          <a:xfrm>
-            <a:off x="3566160" y="2039112"/>
-            <a:ext cx="1005840" cy="256032"/>
+            <a:off x="365760" y="2011680"/>
+            <a:ext cx="2743200" cy="384048"/>
           </a:xfrm>
           <a:prstGeom prst="rect">
             <a:avLst/>
@@ -2920,14 +2796,14 @@
       </p:sp>
       <p:sp>
         <p:nvSpPr>
-          <p:cNvPr id="10" name="Text 8"/>
-          <p:cNvSpPr/>
-          <p:nvPr/>
-        </p:nvSpPr>
-        <p:spPr>
-          <a:xfrm>
-            <a:off x="3566160" y="2039112"/>
-            <a:ext cx="1005840" cy="256032"/>
+          <p:cNvPr id="7" name="Text 5"/>
+          <p:cNvSpPr/>
+          <p:nvPr/>
+        </p:nvSpPr>
+        <p:spPr>
+          <a:xfrm>
+            <a:off x="365760" y="2011680"/>
+            <a:ext cx="2743200" cy="384048"/>
           </a:xfrm>
           <a:prstGeom prst="rect">
             <a:avLst/>
@@ -2943,7 +2819,7 @@
               <a:buNone/>
             </a:pPr>
             <a:r>
-              <a:rPr lang="en-US" sz="900" b="1" spc="200" kern="0" dirty="0">
+              <a:rPr lang="en-US" sz="1300" b="1" spc="400" kern="0" dirty="0">
                 <a:solidFill>
                   <a:srgbClr val="FFFFFF"/>
                 </a:solidFill>
@@ -2951,32 +2827,32 @@
                 <a:ea typeface="Calibri" pitchFamily="34" charset="-122"/>
                 <a:cs typeface="Calibri" pitchFamily="34" charset="-120"/>
               </a:rPr>
-              <a:t>M1</a:t>
-            </a:r>
-            <a:endParaRPr lang="en-US" sz="900" dirty="0"/>
-          </a:p>
-        </p:txBody>
-      </p:sp>
-      <p:sp>
-        <p:nvSpPr>
-          <p:cNvPr id="11" name="Shape 9"/>
-          <p:cNvSpPr/>
-          <p:nvPr/>
-        </p:nvSpPr>
-        <p:spPr>
-          <a:xfrm>
-            <a:off x="457200" y="2423160"/>
-            <a:ext cx="292608" cy="292608"/>
-          </a:xfrm>
-          <a:prstGeom prst="ellipse">
+              <a:t>VISIBILITY</a:t>
+            </a:r>
+            <a:endParaRPr lang="en-US" sz="1300" dirty="0"/>
+          </a:p>
+        </p:txBody>
+      </p:sp>
+      <p:sp>
+        <p:nvSpPr>
+          <p:cNvPr id="8" name="Shape 6"/>
+          <p:cNvSpPr/>
+          <p:nvPr/>
+        </p:nvSpPr>
+        <p:spPr>
+          <a:xfrm>
+            <a:off x="365760" y="2395728"/>
+            <a:ext cx="2743200" cy="2176272"/>
+          </a:xfrm>
+          <a:prstGeom prst="rect">
             <a:avLst/>
           </a:prstGeom>
           <a:solidFill>
             <a:srgbClr val="E8EEFC"/>
           </a:solidFill>
-          <a:ln w="6350">
+          <a:ln w="12700">
             <a:solidFill>
-              <a:srgbClr val="CBD5E1"/>
+              <a:srgbClr val="02C39A"/>
             </a:solidFill>
             <a:prstDash val="solid"/>
           </a:ln>
@@ -2984,94 +2860,16 @@
       </p:sp>
       <p:sp>
         <p:nvSpPr>
-          <p:cNvPr id="12" name="Text 10"/>
-          <p:cNvSpPr/>
-          <p:nvPr/>
-        </p:nvSpPr>
-        <p:spPr>
-          <a:xfrm>
-            <a:off x="457200" y="2423160"/>
-            <a:ext cx="292608" cy="292608"/>
-          </a:xfrm>
-          <a:prstGeom prst="rect">
-            <a:avLst/>
-          </a:prstGeom>
-          <a:noFill/>
-          <a:ln/>
-        </p:spPr>
-        <p:txBody>
-          <a:bodyPr wrap="square" lIns="0" tIns="0" rIns="0" bIns="0" rtlCol="0" anchor="ctr"/>
-          <a:lstStyle/>
-          <a:p>
-            <a:pPr algn="ctr" indent="0" marL="0">
-              <a:buNone/>
-            </a:pPr>
-            <a:r>
-              <a:rPr lang="en-US" sz="1100" b="1" dirty="0">
-                <a:solidFill>
-                  <a:srgbClr val="0F1B3D"/>
-                </a:solidFill>
-                <a:latin typeface="Calibri" pitchFamily="34" charset="0"/>
-                <a:ea typeface="Calibri" pitchFamily="34" charset="-122"/>
-                <a:cs typeface="Calibri" pitchFamily="34" charset="-120"/>
-              </a:rPr>
-              <a:t>2</a:t>
-            </a:r>
-            <a:endParaRPr lang="en-US" sz="1100" dirty="0"/>
-          </a:p>
-        </p:txBody>
-      </p:sp>
-      <p:sp>
-        <p:nvSpPr>
-          <p:cNvPr id="13" name="Text 11"/>
-          <p:cNvSpPr/>
-          <p:nvPr/>
-        </p:nvSpPr>
-        <p:spPr>
-          <a:xfrm>
-            <a:off x="822960" y="2377440"/>
-            <a:ext cx="2697480" cy="411480"/>
-          </a:xfrm>
-          <a:prstGeom prst="rect">
-            <a:avLst/>
-          </a:prstGeom>
-          <a:noFill/>
-          <a:ln/>
-        </p:spPr>
-        <p:txBody>
-          <a:bodyPr wrap="square" lIns="0" tIns="0" rIns="0" bIns="0" rtlCol="0" anchor="ctr"/>
-          <a:lstStyle/>
-          <a:p>
-            <a:pPr indent="0" marL="0">
-              <a:buNone/>
-            </a:pPr>
-            <a:r>
-              <a:rPr lang="en-US" sz="1200" dirty="0">
-                <a:solidFill>
-                  <a:srgbClr val="1A1F36"/>
-                </a:solidFill>
-                <a:latin typeface="Calibri" pitchFamily="34" charset="0"/>
-                <a:ea typeface="Calibri" pitchFamily="34" charset="-122"/>
-                <a:cs typeface="Calibri" pitchFamily="34" charset="-120"/>
-              </a:rPr>
-              <a:t>Ownership assignment</a:t>
-            </a:r>
-            <a:endParaRPr lang="en-US" sz="1200" dirty="0"/>
-          </a:p>
-        </p:txBody>
-      </p:sp>
-      <p:sp>
-        <p:nvSpPr>
-          <p:cNvPr id="14" name="Shape 12"/>
-          <p:cNvSpPr/>
-          <p:nvPr/>
-        </p:nvSpPr>
-        <p:spPr>
-          <a:xfrm>
-            <a:off x="3566160" y="2450592"/>
-            <a:ext cx="1005840" cy="256032"/>
-          </a:xfrm>
-          <a:prstGeom prst="rect">
+          <p:cNvPr id="9" name="Shape 7"/>
+          <p:cNvSpPr/>
+          <p:nvPr/>
+        </p:nvSpPr>
+        <p:spPr>
+          <a:xfrm>
+            <a:off x="548640" y="2551176"/>
+            <a:ext cx="274320" cy="274320"/>
+          </a:xfrm>
+          <a:prstGeom prst="ellipse">
             <a:avLst/>
           </a:prstGeom>
           <a:solidFill>
@@ -3087,14 +2885,14 @@
       </p:sp>
       <p:sp>
         <p:nvSpPr>
-          <p:cNvPr id="15" name="Text 13"/>
-          <p:cNvSpPr/>
-          <p:nvPr/>
-        </p:nvSpPr>
-        <p:spPr>
-          <a:xfrm>
-            <a:off x="3566160" y="2450592"/>
-            <a:ext cx="1005840" cy="256032"/>
+          <p:cNvPr id="10" name="Text 8"/>
+          <p:cNvSpPr/>
+          <p:nvPr/>
+        </p:nvSpPr>
+        <p:spPr>
+          <a:xfrm>
+            <a:off x="548640" y="2551176"/>
+            <a:ext cx="274320" cy="274320"/>
           </a:xfrm>
           <a:prstGeom prst="rect">
             <a:avLst/>
@@ -3110,7 +2908,7 @@
               <a:buNone/>
             </a:pPr>
             <a:r>
-              <a:rPr lang="en-US" sz="900" b="1" spc="200" kern="0" dirty="0">
+              <a:rPr lang="en-US" sz="1100" b="1" dirty="0">
                 <a:solidFill>
                   <a:srgbClr val="FFFFFF"/>
                 </a:solidFill>
@@ -3118,32 +2916,71 @@
                 <a:ea typeface="Calibri" pitchFamily="34" charset="-122"/>
                 <a:cs typeface="Calibri" pitchFamily="34" charset="-120"/>
               </a:rPr>
-              <a:t>M1</a:t>
-            </a:r>
-            <a:endParaRPr lang="en-US" sz="900" dirty="0"/>
-          </a:p>
-        </p:txBody>
-      </p:sp>
-      <p:sp>
-        <p:nvSpPr>
-          <p:cNvPr id="16" name="Shape 14"/>
-          <p:cNvSpPr/>
-          <p:nvPr/>
-        </p:nvSpPr>
-        <p:spPr>
-          <a:xfrm>
-            <a:off x="457200" y="2834640"/>
-            <a:ext cx="292608" cy="292608"/>
+              <a:t>1</a:t>
+            </a:r>
+            <a:endParaRPr lang="en-US" sz="1100" dirty="0"/>
+          </a:p>
+        </p:txBody>
+      </p:sp>
+      <p:sp>
+        <p:nvSpPr>
+          <p:cNvPr id="11" name="Text 9"/>
+          <p:cNvSpPr/>
+          <p:nvPr/>
+        </p:nvSpPr>
+        <p:spPr>
+          <a:xfrm>
+            <a:off x="914400" y="2514600"/>
+            <a:ext cx="2057400" cy="384048"/>
+          </a:xfrm>
+          <a:prstGeom prst="rect">
+            <a:avLst/>
+          </a:prstGeom>
+          <a:noFill/>
+          <a:ln/>
+        </p:spPr>
+        <p:txBody>
+          <a:bodyPr wrap="square" lIns="0" tIns="0" rIns="0" bIns="0" rtlCol="0" anchor="ctr"/>
+          <a:lstStyle/>
+          <a:p>
+            <a:pPr indent="0" marL="0">
+              <a:buNone/>
+            </a:pPr>
+            <a:r>
+              <a:rPr lang="en-US" sz="1200" dirty="0">
+                <a:solidFill>
+                  <a:srgbClr val="1A1F36"/>
+                </a:solidFill>
+                <a:latin typeface="Calibri" pitchFamily="34" charset="0"/>
+                <a:ea typeface="Calibri" pitchFamily="34" charset="-122"/>
+                <a:cs typeface="Calibri" pitchFamily="34" charset="-120"/>
+              </a:rPr>
+              <a:t>Registration &amp; identification</a:t>
+            </a:r>
+            <a:endParaRPr lang="en-US" sz="1200" dirty="0"/>
+          </a:p>
+        </p:txBody>
+      </p:sp>
+      <p:sp>
+        <p:nvSpPr>
+          <p:cNvPr id="12" name="Shape 10"/>
+          <p:cNvSpPr/>
+          <p:nvPr/>
+        </p:nvSpPr>
+        <p:spPr>
+          <a:xfrm>
+            <a:off x="548640" y="3072384"/>
+            <a:ext cx="274320" cy="274320"/>
           </a:xfrm>
           <a:prstGeom prst="ellipse">
             <a:avLst/>
           </a:prstGeom>
           <a:solidFill>
-            <a:srgbClr val="E8EEFC"/>
+            <a:srgbClr val="02C39A"/>
           </a:solidFill>
-          <a:ln w="6350">
+          <a:ln w="12700">
             <a:solidFill>
-              <a:srgbClr val="CBD5E1"/>
+              <a:srgbClr val="02C39A"/>
             </a:solidFill>
             <a:prstDash val="solid"/>
           </a:ln>
@@ -3151,14 +2988,14 @@
       </p:sp>
       <p:sp>
         <p:nvSpPr>
-          <p:cNvPr id="17" name="Text 15"/>
-          <p:cNvSpPr/>
-          <p:nvPr/>
-        </p:nvSpPr>
-        <p:spPr>
-          <a:xfrm>
-            <a:off x="457200" y="2834640"/>
-            <a:ext cx="292608" cy="292608"/>
+          <p:cNvPr id="13" name="Text 11"/>
+          <p:cNvSpPr/>
+          <p:nvPr/>
+        </p:nvSpPr>
+        <p:spPr>
+          <a:xfrm>
+            <a:off x="548640" y="3072384"/>
+            <a:ext cx="274320" cy="274320"/>
           </a:xfrm>
           <a:prstGeom prst="rect">
             <a:avLst/>
@@ -3176,13 +3013,13 @@
             <a:r>
               <a:rPr lang="en-US" sz="1100" b="1" dirty="0">
                 <a:solidFill>
-                  <a:srgbClr val="0F1B3D"/>
-                </a:solidFill>
-                <a:latin typeface="Calibri" pitchFamily="34" charset="0"/>
-                <a:ea typeface="Calibri" pitchFamily="34" charset="-122"/>
-                <a:cs typeface="Calibri" pitchFamily="34" charset="-120"/>
-              </a:rPr>
-              <a:t>3</a:t>
+                  <a:srgbClr val="FFFFFF"/>
+                </a:solidFill>
+                <a:latin typeface="Calibri" pitchFamily="34" charset="0"/>
+                <a:ea typeface="Calibri" pitchFamily="34" charset="-122"/>
+                <a:cs typeface="Calibri" pitchFamily="34" charset="-120"/>
+              </a:rPr>
+              <a:t>2</a:t>
             </a:r>
             <a:endParaRPr lang="en-US" sz="1100" dirty="0"/>
           </a:p>
@@ -3190,14 +3027,14 @@
       </p:sp>
       <p:sp>
         <p:nvSpPr>
-          <p:cNvPr id="18" name="Text 16"/>
-          <p:cNvSpPr/>
-          <p:nvPr/>
-        </p:nvSpPr>
-        <p:spPr>
-          <a:xfrm>
-            <a:off x="822960" y="2788920"/>
-            <a:ext cx="2697480" cy="411480"/>
+          <p:cNvPr id="14" name="Text 12"/>
+          <p:cNvSpPr/>
+          <p:nvPr/>
+        </p:nvSpPr>
+        <p:spPr>
+          <a:xfrm>
+            <a:off x="914400" y="3035808"/>
+            <a:ext cx="2057400" cy="384048"/>
           </a:xfrm>
           <a:prstGeom prst="rect">
             <a:avLst/>
@@ -3221,7 +3058,7 @@
                 <a:ea typeface="Calibri" pitchFamily="34" charset="-122"/>
                 <a:cs typeface="Calibri" pitchFamily="34" charset="-120"/>
               </a:rPr>
-              <a:t>Authentication</a:t>
+              <a:t>Ownership assignment</a:t>
             </a:r>
             <a:endParaRPr lang="en-US" sz="1200" dirty="0"/>
           </a:p>
@@ -3229,24 +3066,24 @@
       </p:sp>
       <p:sp>
         <p:nvSpPr>
-          <p:cNvPr id="19" name="Shape 17"/>
-          <p:cNvSpPr/>
-          <p:nvPr/>
-        </p:nvSpPr>
-        <p:spPr>
-          <a:xfrm>
-            <a:off x="3566160" y="2862072"/>
-            <a:ext cx="1005840" cy="256032"/>
-          </a:xfrm>
-          <a:prstGeom prst="rect">
+          <p:cNvPr id="15" name="Shape 13"/>
+          <p:cNvSpPr/>
+          <p:nvPr/>
+        </p:nvSpPr>
+        <p:spPr>
+          <a:xfrm>
+            <a:off x="548640" y="3593592"/>
+            <a:ext cx="274320" cy="274320"/>
+          </a:xfrm>
+          <a:prstGeom prst="ellipse">
             <a:avLst/>
           </a:prstGeom>
           <a:solidFill>
-            <a:srgbClr val="F59E0B"/>
+            <a:srgbClr val="02C39A"/>
           </a:solidFill>
           <a:ln w="12700">
             <a:solidFill>
-              <a:srgbClr val="F59E0B"/>
+              <a:srgbClr val="02C39A"/>
             </a:solidFill>
             <a:prstDash val="solid"/>
           </a:ln>
@@ -3254,14 +3091,14 @@
       </p:sp>
       <p:sp>
         <p:nvSpPr>
-          <p:cNvPr id="20" name="Text 18"/>
-          <p:cNvSpPr/>
-          <p:nvPr/>
-        </p:nvSpPr>
-        <p:spPr>
-          <a:xfrm>
-            <a:off x="3566160" y="2862072"/>
-            <a:ext cx="1005840" cy="256032"/>
+          <p:cNvPr id="16" name="Text 14"/>
+          <p:cNvSpPr/>
+          <p:nvPr/>
+        </p:nvSpPr>
+        <p:spPr>
+          <a:xfrm>
+            <a:off x="548640" y="3593592"/>
+            <a:ext cx="274320" cy="274320"/>
           </a:xfrm>
           <a:prstGeom prst="rect">
             <a:avLst/>
@@ -3277,7 +3114,7 @@
               <a:buNone/>
             </a:pPr>
             <a:r>
-              <a:rPr lang="en-US" sz="900" b="1" spc="200" kern="0" dirty="0">
+              <a:rPr lang="en-US" sz="1100" b="1" dirty="0">
                 <a:solidFill>
                   <a:srgbClr val="FFFFFF"/>
                 </a:solidFill>
@@ -3285,32 +3122,71 @@
                 <a:ea typeface="Calibri" pitchFamily="34" charset="-122"/>
                 <a:cs typeface="Calibri" pitchFamily="34" charset="-120"/>
               </a:rPr>
-              <a:t>M2</a:t>
-            </a:r>
-            <a:endParaRPr lang="en-US" sz="900" dirty="0"/>
-          </a:p>
-        </p:txBody>
-      </p:sp>
-      <p:sp>
-        <p:nvSpPr>
-          <p:cNvPr id="21" name="Shape 19"/>
-          <p:cNvSpPr/>
-          <p:nvPr/>
-        </p:nvSpPr>
-        <p:spPr>
-          <a:xfrm>
-            <a:off x="457200" y="3246120"/>
-            <a:ext cx="292608" cy="292608"/>
+              <a:t>3</a:t>
+            </a:r>
+            <a:endParaRPr lang="en-US" sz="1100" dirty="0"/>
+          </a:p>
+        </p:txBody>
+      </p:sp>
+      <p:sp>
+        <p:nvSpPr>
+          <p:cNvPr id="17" name="Text 15"/>
+          <p:cNvSpPr/>
+          <p:nvPr/>
+        </p:nvSpPr>
+        <p:spPr>
+          <a:xfrm>
+            <a:off x="914400" y="3557016"/>
+            <a:ext cx="2057400" cy="384048"/>
+          </a:xfrm>
+          <a:prstGeom prst="rect">
+            <a:avLst/>
+          </a:prstGeom>
+          <a:noFill/>
+          <a:ln/>
+        </p:spPr>
+        <p:txBody>
+          <a:bodyPr wrap="square" lIns="0" tIns="0" rIns="0" bIns="0" rtlCol="0" anchor="ctr"/>
+          <a:lstStyle/>
+          <a:p>
+            <a:pPr indent="0" marL="0">
+              <a:buNone/>
+            </a:pPr>
+            <a:r>
+              <a:rPr lang="en-US" sz="1200" dirty="0">
+                <a:solidFill>
+                  <a:srgbClr val="1A1F36"/>
+                </a:solidFill>
+                <a:latin typeface="Calibri" pitchFamily="34" charset="0"/>
+                <a:ea typeface="Calibri" pitchFamily="34" charset="-122"/>
+                <a:cs typeface="Calibri" pitchFamily="34" charset="-120"/>
+              </a:rPr>
+              <a:t>Authentication</a:t>
+            </a:r>
+            <a:endParaRPr lang="en-US" sz="1200" dirty="0"/>
+          </a:p>
+        </p:txBody>
+      </p:sp>
+      <p:sp>
+        <p:nvSpPr>
+          <p:cNvPr id="18" name="Shape 16"/>
+          <p:cNvSpPr/>
+          <p:nvPr/>
+        </p:nvSpPr>
+        <p:spPr>
+          <a:xfrm>
+            <a:off x="548640" y="4114800"/>
+            <a:ext cx="274320" cy="274320"/>
           </a:xfrm>
           <a:prstGeom prst="ellipse">
             <a:avLst/>
           </a:prstGeom>
           <a:solidFill>
-            <a:srgbClr val="E8EEFC"/>
+            <a:srgbClr val="02C39A"/>
           </a:solidFill>
-          <a:ln w="6350">
+          <a:ln w="12700">
             <a:solidFill>
-              <a:srgbClr val="CBD5E1"/>
+              <a:srgbClr val="02C39A"/>
             </a:solidFill>
             <a:prstDash val="solid"/>
           </a:ln>
@@ -3318,14 +3194,14 @@
       </p:sp>
       <p:sp>
         <p:nvSpPr>
-          <p:cNvPr id="22" name="Text 20"/>
-          <p:cNvSpPr/>
-          <p:nvPr/>
-        </p:nvSpPr>
-        <p:spPr>
-          <a:xfrm>
-            <a:off x="457200" y="3246120"/>
-            <a:ext cx="292608" cy="292608"/>
+          <p:cNvPr id="19" name="Text 17"/>
+          <p:cNvSpPr/>
+          <p:nvPr/>
+        </p:nvSpPr>
+        <p:spPr>
+          <a:xfrm>
+            <a:off x="548640" y="4114800"/>
+            <a:ext cx="274320" cy="274320"/>
           </a:xfrm>
           <a:prstGeom prst="rect">
             <a:avLst/>
@@ -3343,13 +3219,13 @@
             <a:r>
               <a:rPr lang="en-US" sz="1100" b="1" dirty="0">
                 <a:solidFill>
-                  <a:srgbClr val="0F1B3D"/>
-                </a:solidFill>
-                <a:latin typeface="Calibri" pitchFamily="34" charset="0"/>
-                <a:ea typeface="Calibri" pitchFamily="34" charset="-122"/>
-                <a:cs typeface="Calibri" pitchFamily="34" charset="-120"/>
-              </a:rPr>
-              <a:t>4</a:t>
+                  <a:srgbClr val="FFFFFF"/>
+                </a:solidFill>
+                <a:latin typeface="Calibri" pitchFamily="34" charset="0"/>
+                <a:ea typeface="Calibri" pitchFamily="34" charset="-122"/>
+                <a:cs typeface="Calibri" pitchFamily="34" charset="-120"/>
+              </a:rPr>
+              <a:t>10</a:t>
             </a:r>
             <a:endParaRPr lang="en-US" sz="1100" dirty="0"/>
           </a:p>
@@ -3357,14 +3233,14 @@
       </p:sp>
       <p:sp>
         <p:nvSpPr>
-          <p:cNvPr id="23" name="Text 21"/>
-          <p:cNvSpPr/>
-          <p:nvPr/>
-        </p:nvSpPr>
-        <p:spPr>
-          <a:xfrm>
-            <a:off x="822960" y="3200400"/>
-            <a:ext cx="2697480" cy="411480"/>
+          <p:cNvPr id="20" name="Text 18"/>
+          <p:cNvSpPr/>
+          <p:nvPr/>
+        </p:nvSpPr>
+        <p:spPr>
+          <a:xfrm>
+            <a:off x="914400" y="4078224"/>
+            <a:ext cx="2057400" cy="384048"/>
           </a:xfrm>
           <a:prstGeom prst="rect">
             <a:avLst/>
@@ -3388,7 +3264,7 @@
                 <a:ea typeface="Calibri" pitchFamily="34" charset="-122"/>
                 <a:cs typeface="Calibri" pitchFamily="34" charset="-120"/>
               </a:rPr>
-              <a:t>Authorization &amp; delegation</a:t>
+              <a:t>Visibility &amp; observability</a:t>
             </a:r>
             <a:endParaRPr lang="en-US" sz="1200" dirty="0"/>
           </a:p>
@@ -3396,14 +3272,14 @@
       </p:sp>
       <p:sp>
         <p:nvSpPr>
-          <p:cNvPr id="24" name="Shape 22"/>
-          <p:cNvSpPr/>
-          <p:nvPr/>
-        </p:nvSpPr>
-        <p:spPr>
-          <a:xfrm>
-            <a:off x="3566160" y="3273552"/>
-            <a:ext cx="1005840" cy="256032"/>
+          <p:cNvPr id="21" name="Shape 19"/>
+          <p:cNvSpPr/>
+          <p:nvPr/>
+        </p:nvSpPr>
+        <p:spPr>
+          <a:xfrm>
+            <a:off x="3200400" y="2011680"/>
+            <a:ext cx="2743200" cy="384048"/>
           </a:xfrm>
           <a:prstGeom prst="rect">
             <a:avLst/>
@@ -3421,14 +3297,14 @@
       </p:sp>
       <p:sp>
         <p:nvSpPr>
-          <p:cNvPr id="25" name="Text 23"/>
-          <p:cNvSpPr/>
-          <p:nvPr/>
-        </p:nvSpPr>
-        <p:spPr>
-          <a:xfrm>
-            <a:off x="3566160" y="3273552"/>
-            <a:ext cx="1005840" cy="256032"/>
+          <p:cNvPr id="22" name="Text 20"/>
+          <p:cNvSpPr/>
+          <p:nvPr/>
+        </p:nvSpPr>
+        <p:spPr>
+          <a:xfrm>
+            <a:off x="3200400" y="2011680"/>
+            <a:ext cx="2743200" cy="384048"/>
           </a:xfrm>
           <a:prstGeom prst="rect">
             <a:avLst/>
@@ -3444,7 +3320,7 @@
               <a:buNone/>
             </a:pPr>
             <a:r>
-              <a:rPr lang="en-US" sz="900" b="1" spc="200" kern="0" dirty="0">
+              <a:rPr lang="en-US" sz="1300" b="1" spc="400" kern="0" dirty="0">
                 <a:solidFill>
                   <a:srgbClr val="FFFFFF"/>
                 </a:solidFill>
@@ -3452,32 +3328,32 @@
                 <a:ea typeface="Calibri" pitchFamily="34" charset="-122"/>
                 <a:cs typeface="Calibri" pitchFamily="34" charset="-120"/>
               </a:rPr>
-              <a:t>P0</a:t>
-            </a:r>
-            <a:endParaRPr lang="en-US" sz="900" dirty="0"/>
-          </a:p>
-        </p:txBody>
-      </p:sp>
-      <p:sp>
-        <p:nvSpPr>
-          <p:cNvPr id="26" name="Shape 24"/>
-          <p:cNvSpPr/>
-          <p:nvPr/>
-        </p:nvSpPr>
-        <p:spPr>
-          <a:xfrm>
-            <a:off x="457200" y="3657600"/>
-            <a:ext cx="292608" cy="292608"/>
-          </a:xfrm>
-          <a:prstGeom prst="ellipse">
+              <a:t>CONTROL</a:t>
+            </a:r>
+            <a:endParaRPr lang="en-US" sz="1300" dirty="0"/>
+          </a:p>
+        </p:txBody>
+      </p:sp>
+      <p:sp>
+        <p:nvSpPr>
+          <p:cNvPr id="23" name="Shape 21"/>
+          <p:cNvSpPr/>
+          <p:nvPr/>
+        </p:nvSpPr>
+        <p:spPr>
+          <a:xfrm>
+            <a:off x="3200400" y="2395728"/>
+            <a:ext cx="2743200" cy="2176272"/>
+          </a:xfrm>
+          <a:prstGeom prst="rect">
             <a:avLst/>
           </a:prstGeom>
           <a:solidFill>
             <a:srgbClr val="E8EEFC"/>
           </a:solidFill>
-          <a:ln w="6350">
+          <a:ln w="12700">
             <a:solidFill>
-              <a:srgbClr val="CBD5E1"/>
+              <a:srgbClr val="0F1B3D"/>
             </a:solidFill>
             <a:prstDash val="solid"/>
           </a:ln>
@@ -3485,261 +3361,16 @@
       </p:sp>
       <p:sp>
         <p:nvSpPr>
-          <p:cNvPr id="27" name="Text 25"/>
-          <p:cNvSpPr/>
-          <p:nvPr/>
-        </p:nvSpPr>
-        <p:spPr>
-          <a:xfrm>
-            <a:off x="457200" y="3657600"/>
-            <a:ext cx="292608" cy="292608"/>
-          </a:xfrm>
-          <a:prstGeom prst="rect">
-            <a:avLst/>
-          </a:prstGeom>
-          <a:noFill/>
-          <a:ln/>
-        </p:spPr>
-        <p:txBody>
-          <a:bodyPr wrap="square" lIns="0" tIns="0" rIns="0" bIns="0" rtlCol="0" anchor="ctr"/>
-          <a:lstStyle/>
-          <a:p>
-            <a:pPr algn="ctr" indent="0" marL="0">
-              <a:buNone/>
-            </a:pPr>
-            <a:r>
-              <a:rPr lang="en-US" sz="1100" b="1" dirty="0">
-                <a:solidFill>
-                  <a:srgbClr val="0F1B3D"/>
-                </a:solidFill>
-                <a:latin typeface="Calibri" pitchFamily="34" charset="0"/>
-                <a:ea typeface="Calibri" pitchFamily="34" charset="-122"/>
-                <a:cs typeface="Calibri" pitchFamily="34" charset="-120"/>
-              </a:rPr>
-              <a:t>5</a:t>
-            </a:r>
-            <a:endParaRPr lang="en-US" sz="1100" dirty="0"/>
-          </a:p>
-        </p:txBody>
-      </p:sp>
-      <p:sp>
-        <p:nvSpPr>
-          <p:cNvPr id="28" name="Text 26"/>
-          <p:cNvSpPr/>
-          <p:nvPr/>
-        </p:nvSpPr>
-        <p:spPr>
-          <a:xfrm>
-            <a:off x="822960" y="3611880"/>
-            <a:ext cx="2697480" cy="411480"/>
-          </a:xfrm>
-          <a:prstGeom prst="rect">
-            <a:avLst/>
-          </a:prstGeom>
-          <a:noFill/>
-          <a:ln/>
-        </p:spPr>
-        <p:txBody>
-          <a:bodyPr wrap="square" lIns="0" tIns="0" rIns="0" bIns="0" rtlCol="0" anchor="ctr"/>
-          <a:lstStyle/>
-          <a:p>
-            <a:pPr indent="0" marL="0">
-              <a:buNone/>
-            </a:pPr>
-            <a:r>
-              <a:rPr lang="en-US" sz="1200" dirty="0">
-                <a:solidFill>
-                  <a:srgbClr val="1A1F36"/>
-                </a:solidFill>
-                <a:latin typeface="Calibri" pitchFamily="34" charset="0"/>
-                <a:ea typeface="Calibri" pitchFamily="34" charset="-122"/>
-                <a:cs typeface="Calibri" pitchFamily="34" charset="-120"/>
-              </a:rPr>
-              <a:t>Human oversight &amp; approval</a:t>
-            </a:r>
-            <a:endParaRPr lang="en-US" sz="1200" dirty="0"/>
-          </a:p>
-        </p:txBody>
-      </p:sp>
-      <p:sp>
-        <p:nvSpPr>
-          <p:cNvPr id="29" name="Shape 27"/>
-          <p:cNvSpPr/>
-          <p:nvPr/>
-        </p:nvSpPr>
-        <p:spPr>
-          <a:xfrm>
-            <a:off x="3566160" y="3685032"/>
-            <a:ext cx="1005840" cy="256032"/>
-          </a:xfrm>
-          <a:prstGeom prst="rect">
-            <a:avLst/>
-          </a:prstGeom>
-          <a:solidFill>
-            <a:srgbClr val="64748B"/>
-          </a:solidFill>
-          <a:ln w="12700">
-            <a:solidFill>
-              <a:srgbClr val="64748B"/>
-            </a:solidFill>
-            <a:prstDash val="solid"/>
-          </a:ln>
-        </p:spPr>
-      </p:sp>
-      <p:sp>
-        <p:nvSpPr>
-          <p:cNvPr id="30" name="Text 28"/>
-          <p:cNvSpPr/>
-          <p:nvPr/>
-        </p:nvSpPr>
-        <p:spPr>
-          <a:xfrm>
-            <a:off x="3566160" y="3685032"/>
-            <a:ext cx="1005840" cy="256032"/>
-          </a:xfrm>
-          <a:prstGeom prst="rect">
-            <a:avLst/>
-          </a:prstGeom>
-          <a:noFill/>
-          <a:ln/>
-        </p:spPr>
-        <p:txBody>
-          <a:bodyPr wrap="square" lIns="0" tIns="0" rIns="0" bIns="0" rtlCol="0" anchor="ctr"/>
-          <a:lstStyle/>
-          <a:p>
-            <a:pPr algn="ctr" indent="0" marL="0">
-              <a:buNone/>
-            </a:pPr>
-            <a:r>
-              <a:rPr lang="en-US" sz="900" b="1" spc="200" kern="0" dirty="0">
-                <a:solidFill>
-                  <a:srgbClr val="FFFFFF"/>
-                </a:solidFill>
-                <a:latin typeface="Calibri" pitchFamily="34" charset="0"/>
-                <a:ea typeface="Calibri" pitchFamily="34" charset="-122"/>
-                <a:cs typeface="Calibri" pitchFamily="34" charset="-120"/>
-              </a:rPr>
-              <a:t>Post-P0</a:t>
-            </a:r>
-            <a:endParaRPr lang="en-US" sz="900" dirty="0"/>
-          </a:p>
-        </p:txBody>
-      </p:sp>
-      <p:sp>
-        <p:nvSpPr>
-          <p:cNvPr id="31" name="Shape 29"/>
-          <p:cNvSpPr/>
-          <p:nvPr/>
-        </p:nvSpPr>
-        <p:spPr>
-          <a:xfrm>
-            <a:off x="4800600" y="2011680"/>
-            <a:ext cx="292608" cy="292608"/>
+          <p:cNvPr id="24" name="Shape 22"/>
+          <p:cNvSpPr/>
+          <p:nvPr/>
+        </p:nvSpPr>
+        <p:spPr>
+          <a:xfrm>
+            <a:off x="3383280" y="2551176"/>
+            <a:ext cx="274320" cy="274320"/>
           </a:xfrm>
           <a:prstGeom prst="ellipse">
-            <a:avLst/>
-          </a:prstGeom>
-          <a:solidFill>
-            <a:srgbClr val="E8EEFC"/>
-          </a:solidFill>
-          <a:ln w="6350">
-            <a:solidFill>
-              <a:srgbClr val="CBD5E1"/>
-            </a:solidFill>
-            <a:prstDash val="solid"/>
-          </a:ln>
-        </p:spPr>
-      </p:sp>
-      <p:sp>
-        <p:nvSpPr>
-          <p:cNvPr id="32" name="Text 30"/>
-          <p:cNvSpPr/>
-          <p:nvPr/>
-        </p:nvSpPr>
-        <p:spPr>
-          <a:xfrm>
-            <a:off x="4800600" y="2011680"/>
-            <a:ext cx="292608" cy="292608"/>
-          </a:xfrm>
-          <a:prstGeom prst="rect">
-            <a:avLst/>
-          </a:prstGeom>
-          <a:noFill/>
-          <a:ln/>
-        </p:spPr>
-        <p:txBody>
-          <a:bodyPr wrap="square" lIns="0" tIns="0" rIns="0" bIns="0" rtlCol="0" anchor="ctr"/>
-          <a:lstStyle/>
-          <a:p>
-            <a:pPr algn="ctr" indent="0" marL="0">
-              <a:buNone/>
-            </a:pPr>
-            <a:r>
-              <a:rPr lang="en-US" sz="1100" b="1" dirty="0">
-                <a:solidFill>
-                  <a:srgbClr val="0F1B3D"/>
-                </a:solidFill>
-                <a:latin typeface="Calibri" pitchFamily="34" charset="0"/>
-                <a:ea typeface="Calibri" pitchFamily="34" charset="-122"/>
-                <a:cs typeface="Calibri" pitchFamily="34" charset="-120"/>
-              </a:rPr>
-              <a:t>6</a:t>
-            </a:r>
-            <a:endParaRPr lang="en-US" sz="1100" dirty="0"/>
-          </a:p>
-        </p:txBody>
-      </p:sp>
-      <p:sp>
-        <p:nvSpPr>
-          <p:cNvPr id="33" name="Text 31"/>
-          <p:cNvSpPr/>
-          <p:nvPr/>
-        </p:nvSpPr>
-        <p:spPr>
-          <a:xfrm>
-            <a:off x="5166360" y="1965960"/>
-            <a:ext cx="2697480" cy="411480"/>
-          </a:xfrm>
-          <a:prstGeom prst="rect">
-            <a:avLst/>
-          </a:prstGeom>
-          <a:noFill/>
-          <a:ln/>
-        </p:spPr>
-        <p:txBody>
-          <a:bodyPr wrap="square" lIns="0" tIns="0" rIns="0" bIns="0" rtlCol="0" anchor="ctr"/>
-          <a:lstStyle/>
-          <a:p>
-            <a:pPr indent="0" marL="0">
-              <a:buNone/>
-            </a:pPr>
-            <a:r>
-              <a:rPr lang="en-US" sz="1200" dirty="0">
-                <a:solidFill>
-                  <a:srgbClr val="1A1F36"/>
-                </a:solidFill>
-                <a:latin typeface="Calibri" pitchFamily="34" charset="0"/>
-                <a:ea typeface="Calibri" pitchFamily="34" charset="-122"/>
-                <a:cs typeface="Calibri" pitchFamily="34" charset="-120"/>
-              </a:rPr>
-              <a:t>Resource policy enforcement</a:t>
-            </a:r>
-            <a:endParaRPr lang="en-US" sz="1200" dirty="0"/>
-          </a:p>
-        </p:txBody>
-      </p:sp>
-      <p:sp>
-        <p:nvSpPr>
-          <p:cNvPr id="34" name="Shape 32"/>
-          <p:cNvSpPr/>
-          <p:nvPr/>
-        </p:nvSpPr>
-        <p:spPr>
-          <a:xfrm>
-            <a:off x="7909560" y="2039112"/>
-            <a:ext cx="1005840" cy="256032"/>
-          </a:xfrm>
-          <a:prstGeom prst="rect">
             <a:avLst/>
           </a:prstGeom>
           <a:solidFill>
@@ -3755,14 +3386,14 @@
       </p:sp>
       <p:sp>
         <p:nvSpPr>
-          <p:cNvPr id="35" name="Text 33"/>
-          <p:cNvSpPr/>
-          <p:nvPr/>
-        </p:nvSpPr>
-        <p:spPr>
-          <a:xfrm>
-            <a:off x="7909560" y="2039112"/>
-            <a:ext cx="1005840" cy="256032"/>
+          <p:cNvPr id="25" name="Text 23"/>
+          <p:cNvSpPr/>
+          <p:nvPr/>
+        </p:nvSpPr>
+        <p:spPr>
+          <a:xfrm>
+            <a:off x="3383280" y="2551176"/>
+            <a:ext cx="274320" cy="274320"/>
           </a:xfrm>
           <a:prstGeom prst="rect">
             <a:avLst/>
@@ -3778,7 +3409,7 @@
               <a:buNone/>
             </a:pPr>
             <a:r>
-              <a:rPr lang="en-US" sz="900" b="1" spc="200" kern="0" dirty="0">
+              <a:rPr lang="en-US" sz="1100" b="1" dirty="0">
                 <a:solidFill>
                   <a:srgbClr val="FFFFFF"/>
                 </a:solidFill>
@@ -3786,294 +3417,63 @@
                 <a:ea typeface="Calibri" pitchFamily="34" charset="-122"/>
                 <a:cs typeface="Calibri" pitchFamily="34" charset="-120"/>
               </a:rPr>
-              <a:t>P0</a:t>
-            </a:r>
-            <a:endParaRPr lang="en-US" sz="900" dirty="0"/>
-          </a:p>
-        </p:txBody>
-      </p:sp>
-      <p:sp>
-        <p:nvSpPr>
-          <p:cNvPr id="36" name="Shape 34"/>
-          <p:cNvSpPr/>
-          <p:nvPr/>
-        </p:nvSpPr>
-        <p:spPr>
-          <a:xfrm>
-            <a:off x="4800600" y="2423160"/>
-            <a:ext cx="292608" cy="292608"/>
+              <a:t>4</a:t>
+            </a:r>
+            <a:endParaRPr lang="en-US" sz="1100" dirty="0"/>
+          </a:p>
+        </p:txBody>
+      </p:sp>
+      <p:sp>
+        <p:nvSpPr>
+          <p:cNvPr id="26" name="Text 24"/>
+          <p:cNvSpPr/>
+          <p:nvPr/>
+        </p:nvSpPr>
+        <p:spPr>
+          <a:xfrm>
+            <a:off x="3749040" y="2514600"/>
+            <a:ext cx="2057400" cy="384048"/>
+          </a:xfrm>
+          <a:prstGeom prst="rect">
+            <a:avLst/>
+          </a:prstGeom>
+          <a:noFill/>
+          <a:ln/>
+        </p:spPr>
+        <p:txBody>
+          <a:bodyPr wrap="square" lIns="0" tIns="0" rIns="0" bIns="0" rtlCol="0" anchor="ctr"/>
+          <a:lstStyle/>
+          <a:p>
+            <a:pPr indent="0" marL="0">
+              <a:buNone/>
+            </a:pPr>
+            <a:r>
+              <a:rPr lang="en-US" sz="1200" dirty="0">
+                <a:solidFill>
+                  <a:srgbClr val="1A1F36"/>
+                </a:solidFill>
+                <a:latin typeface="Calibri" pitchFamily="34" charset="0"/>
+                <a:ea typeface="Calibri" pitchFamily="34" charset="-122"/>
+                <a:cs typeface="Calibri" pitchFamily="34" charset="-120"/>
+              </a:rPr>
+              <a:t>Authorization &amp; delegation</a:t>
+            </a:r>
+            <a:endParaRPr lang="en-US" sz="1200" dirty="0"/>
+          </a:p>
+        </p:txBody>
+      </p:sp>
+      <p:sp>
+        <p:nvSpPr>
+          <p:cNvPr id="27" name="Shape 25"/>
+          <p:cNvSpPr/>
+          <p:nvPr/>
+        </p:nvSpPr>
+        <p:spPr>
+          <a:xfrm>
+            <a:off x="3383280" y="3072384"/>
+            <a:ext cx="274320" cy="274320"/>
           </a:xfrm>
           <a:prstGeom prst="ellipse">
-            <a:avLst/>
-          </a:prstGeom>
-          <a:solidFill>
-            <a:srgbClr val="E8EEFC"/>
-          </a:solidFill>
-          <a:ln w="6350">
-            <a:solidFill>
-              <a:srgbClr val="CBD5E1"/>
-            </a:solidFill>
-            <a:prstDash val="solid"/>
-          </a:ln>
-        </p:spPr>
-      </p:sp>
-      <p:sp>
-        <p:nvSpPr>
-          <p:cNvPr id="37" name="Text 35"/>
-          <p:cNvSpPr/>
-          <p:nvPr/>
-        </p:nvSpPr>
-        <p:spPr>
-          <a:xfrm>
-            <a:off x="4800600" y="2423160"/>
-            <a:ext cx="292608" cy="292608"/>
-          </a:xfrm>
-          <a:prstGeom prst="rect">
-            <a:avLst/>
-          </a:prstGeom>
-          <a:noFill/>
-          <a:ln/>
-        </p:spPr>
-        <p:txBody>
-          <a:bodyPr wrap="square" lIns="0" tIns="0" rIns="0" bIns="0" rtlCol="0" anchor="ctr"/>
-          <a:lstStyle/>
-          <a:p>
-            <a:pPr algn="ctr" indent="0" marL="0">
-              <a:buNone/>
-            </a:pPr>
-            <a:r>
-              <a:rPr lang="en-US" sz="1100" b="1" dirty="0">
-                <a:solidFill>
-                  <a:srgbClr val="0F1B3D"/>
-                </a:solidFill>
-                <a:latin typeface="Calibri" pitchFamily="34" charset="0"/>
-                <a:ea typeface="Calibri" pitchFamily="34" charset="-122"/>
-                <a:cs typeface="Calibri" pitchFamily="34" charset="-120"/>
-              </a:rPr>
-              <a:t>7</a:t>
-            </a:r>
-            <a:endParaRPr lang="en-US" sz="1100" dirty="0"/>
-          </a:p>
-        </p:txBody>
-      </p:sp>
-      <p:sp>
-        <p:nvSpPr>
-          <p:cNvPr id="38" name="Text 36"/>
-          <p:cNvSpPr/>
-          <p:nvPr/>
-        </p:nvSpPr>
-        <p:spPr>
-          <a:xfrm>
-            <a:off x="5166360" y="2377440"/>
-            <a:ext cx="2697480" cy="411480"/>
-          </a:xfrm>
-          <a:prstGeom prst="rect">
-            <a:avLst/>
-          </a:prstGeom>
-          <a:noFill/>
-          <a:ln/>
-        </p:spPr>
-        <p:txBody>
-          <a:bodyPr wrap="square" lIns="0" tIns="0" rIns="0" bIns="0" rtlCol="0" anchor="ctr"/>
-          <a:lstStyle/>
-          <a:p>
-            <a:pPr indent="0" marL="0">
-              <a:buNone/>
-            </a:pPr>
-            <a:r>
-              <a:rPr lang="en-US" sz="1200" dirty="0">
-                <a:solidFill>
-                  <a:srgbClr val="1A1F36"/>
-                </a:solidFill>
-                <a:latin typeface="Calibri" pitchFamily="34" charset="0"/>
-                <a:ea typeface="Calibri" pitchFamily="34" charset="-122"/>
-                <a:cs typeface="Calibri" pitchFamily="34" charset="-120"/>
-              </a:rPr>
-              <a:t>Credential lifecycle</a:t>
-            </a:r>
-            <a:endParaRPr lang="en-US" sz="1200" dirty="0"/>
-          </a:p>
-        </p:txBody>
-      </p:sp>
-      <p:sp>
-        <p:nvSpPr>
-          <p:cNvPr id="39" name="Shape 37"/>
-          <p:cNvSpPr/>
-          <p:nvPr/>
-        </p:nvSpPr>
-        <p:spPr>
-          <a:xfrm>
-            <a:off x="7909560" y="2450592"/>
-            <a:ext cx="1005840" cy="256032"/>
-          </a:xfrm>
-          <a:prstGeom prst="rect">
-            <a:avLst/>
-          </a:prstGeom>
-          <a:solidFill>
-            <a:srgbClr val="64748B"/>
-          </a:solidFill>
-          <a:ln w="12700">
-            <a:solidFill>
-              <a:srgbClr val="64748B"/>
-            </a:solidFill>
-            <a:prstDash val="solid"/>
-          </a:ln>
-        </p:spPr>
-      </p:sp>
-      <p:sp>
-        <p:nvSpPr>
-          <p:cNvPr id="40" name="Text 38"/>
-          <p:cNvSpPr/>
-          <p:nvPr/>
-        </p:nvSpPr>
-        <p:spPr>
-          <a:xfrm>
-            <a:off x="7909560" y="2450592"/>
-            <a:ext cx="1005840" cy="256032"/>
-          </a:xfrm>
-          <a:prstGeom prst="rect">
-            <a:avLst/>
-          </a:prstGeom>
-          <a:noFill/>
-          <a:ln/>
-        </p:spPr>
-        <p:txBody>
-          <a:bodyPr wrap="square" lIns="0" tIns="0" rIns="0" bIns="0" rtlCol="0" anchor="ctr"/>
-          <a:lstStyle/>
-          <a:p>
-            <a:pPr algn="ctr" indent="0" marL="0">
-              <a:buNone/>
-            </a:pPr>
-            <a:r>
-              <a:rPr lang="en-US" sz="900" b="1" spc="200" kern="0" dirty="0">
-                <a:solidFill>
-                  <a:srgbClr val="FFFFFF"/>
-                </a:solidFill>
-                <a:latin typeface="Calibri" pitchFamily="34" charset="0"/>
-                <a:ea typeface="Calibri" pitchFamily="34" charset="-122"/>
-                <a:cs typeface="Calibri" pitchFamily="34" charset="-120"/>
-              </a:rPr>
-              <a:t>Post-P0</a:t>
-            </a:r>
-            <a:endParaRPr lang="en-US" sz="900" dirty="0"/>
-          </a:p>
-        </p:txBody>
-      </p:sp>
-      <p:sp>
-        <p:nvSpPr>
-          <p:cNvPr id="41" name="Shape 39"/>
-          <p:cNvSpPr/>
-          <p:nvPr/>
-        </p:nvSpPr>
-        <p:spPr>
-          <a:xfrm>
-            <a:off x="4800600" y="2834640"/>
-            <a:ext cx="292608" cy="292608"/>
-          </a:xfrm>
-          <a:prstGeom prst="ellipse">
-            <a:avLst/>
-          </a:prstGeom>
-          <a:solidFill>
-            <a:srgbClr val="E8EEFC"/>
-          </a:solidFill>
-          <a:ln w="6350">
-            <a:solidFill>
-              <a:srgbClr val="CBD5E1"/>
-            </a:solidFill>
-            <a:prstDash val="solid"/>
-          </a:ln>
-        </p:spPr>
-      </p:sp>
-      <p:sp>
-        <p:nvSpPr>
-          <p:cNvPr id="42" name="Text 40"/>
-          <p:cNvSpPr/>
-          <p:nvPr/>
-        </p:nvSpPr>
-        <p:spPr>
-          <a:xfrm>
-            <a:off x="4800600" y="2834640"/>
-            <a:ext cx="292608" cy="292608"/>
-          </a:xfrm>
-          <a:prstGeom prst="rect">
-            <a:avLst/>
-          </a:prstGeom>
-          <a:noFill/>
-          <a:ln/>
-        </p:spPr>
-        <p:txBody>
-          <a:bodyPr wrap="square" lIns="0" tIns="0" rIns="0" bIns="0" rtlCol="0" anchor="ctr"/>
-          <a:lstStyle/>
-          <a:p>
-            <a:pPr algn="ctr" indent="0" marL="0">
-              <a:buNone/>
-            </a:pPr>
-            <a:r>
-              <a:rPr lang="en-US" sz="1100" b="1" dirty="0">
-                <a:solidFill>
-                  <a:srgbClr val="0F1B3D"/>
-                </a:solidFill>
-                <a:latin typeface="Calibri" pitchFamily="34" charset="0"/>
-                <a:ea typeface="Calibri" pitchFamily="34" charset="-122"/>
-                <a:cs typeface="Calibri" pitchFamily="34" charset="-120"/>
-              </a:rPr>
-              <a:t>8</a:t>
-            </a:r>
-            <a:endParaRPr lang="en-US" sz="1100" dirty="0"/>
-          </a:p>
-        </p:txBody>
-      </p:sp>
-      <p:sp>
-        <p:nvSpPr>
-          <p:cNvPr id="43" name="Text 41"/>
-          <p:cNvSpPr/>
-          <p:nvPr/>
-        </p:nvSpPr>
-        <p:spPr>
-          <a:xfrm>
-            <a:off x="5166360" y="2788920"/>
-            <a:ext cx="2697480" cy="411480"/>
-          </a:xfrm>
-          <a:prstGeom prst="rect">
-            <a:avLst/>
-          </a:prstGeom>
-          <a:noFill/>
-          <a:ln/>
-        </p:spPr>
-        <p:txBody>
-          <a:bodyPr wrap="square" lIns="0" tIns="0" rIns="0" bIns="0" rtlCol="0" anchor="ctr"/>
-          <a:lstStyle/>
-          <a:p>
-            <a:pPr indent="0" marL="0">
-              <a:buNone/>
-            </a:pPr>
-            <a:r>
-              <a:rPr lang="en-US" sz="1200" dirty="0">
-                <a:solidFill>
-                  <a:srgbClr val="1A1F36"/>
-                </a:solidFill>
-                <a:latin typeface="Calibri" pitchFamily="34" charset="0"/>
-                <a:ea typeface="Calibri" pitchFamily="34" charset="-122"/>
-                <a:cs typeface="Calibri" pitchFamily="34" charset="-120"/>
-              </a:rPr>
-              <a:t>Auditability &amp; logging</a:t>
-            </a:r>
-            <a:endParaRPr lang="en-US" sz="1200" dirty="0"/>
-          </a:p>
-        </p:txBody>
-      </p:sp>
-      <p:sp>
-        <p:nvSpPr>
-          <p:cNvPr id="44" name="Shape 42"/>
-          <p:cNvSpPr/>
-          <p:nvPr/>
-        </p:nvSpPr>
-        <p:spPr>
-          <a:xfrm>
-            <a:off x="7909560" y="2862072"/>
-            <a:ext cx="1005840" cy="256032"/>
-          </a:xfrm>
-          <a:prstGeom prst="rect">
             <a:avLst/>
           </a:prstGeom>
           <a:solidFill>
@@ -4089,14 +3489,14 @@
       </p:sp>
       <p:sp>
         <p:nvSpPr>
-          <p:cNvPr id="45" name="Text 43"/>
-          <p:cNvSpPr/>
-          <p:nvPr/>
-        </p:nvSpPr>
-        <p:spPr>
-          <a:xfrm>
-            <a:off x="7909560" y="2862072"/>
-            <a:ext cx="1005840" cy="256032"/>
+          <p:cNvPr id="28" name="Text 26"/>
+          <p:cNvSpPr/>
+          <p:nvPr/>
+        </p:nvSpPr>
+        <p:spPr>
+          <a:xfrm>
+            <a:off x="3383280" y="3072384"/>
+            <a:ext cx="274320" cy="274320"/>
           </a:xfrm>
           <a:prstGeom prst="rect">
             <a:avLst/>
@@ -4112,7 +3512,7 @@
               <a:buNone/>
             </a:pPr>
             <a:r>
-              <a:rPr lang="en-US" sz="900" b="1" spc="200" kern="0" dirty="0">
+              <a:rPr lang="en-US" sz="1100" b="1" dirty="0">
                 <a:solidFill>
                   <a:srgbClr val="FFFFFF"/>
                 </a:solidFill>
@@ -4120,32 +3520,238 @@
                 <a:ea typeface="Calibri" pitchFamily="34" charset="-122"/>
                 <a:cs typeface="Calibri" pitchFamily="34" charset="-120"/>
               </a:rPr>
-              <a:t>P0</a:t>
-            </a:r>
-            <a:endParaRPr lang="en-US" sz="900" dirty="0"/>
-          </a:p>
-        </p:txBody>
-      </p:sp>
-      <p:sp>
-        <p:nvSpPr>
-          <p:cNvPr id="46" name="Shape 44"/>
-          <p:cNvSpPr/>
-          <p:nvPr/>
-        </p:nvSpPr>
-        <p:spPr>
-          <a:xfrm>
-            <a:off x="4800600" y="3246120"/>
-            <a:ext cx="292608" cy="292608"/>
+              <a:t>5</a:t>
+            </a:r>
+            <a:endParaRPr lang="en-US" sz="1100" dirty="0"/>
+          </a:p>
+        </p:txBody>
+      </p:sp>
+      <p:sp>
+        <p:nvSpPr>
+          <p:cNvPr id="29" name="Text 27"/>
+          <p:cNvSpPr/>
+          <p:nvPr/>
+        </p:nvSpPr>
+        <p:spPr>
+          <a:xfrm>
+            <a:off x="3749040" y="3035808"/>
+            <a:ext cx="2057400" cy="384048"/>
+          </a:xfrm>
+          <a:prstGeom prst="rect">
+            <a:avLst/>
+          </a:prstGeom>
+          <a:noFill/>
+          <a:ln/>
+        </p:spPr>
+        <p:txBody>
+          <a:bodyPr wrap="square" lIns="0" tIns="0" rIns="0" bIns="0" rtlCol="0" anchor="ctr"/>
+          <a:lstStyle/>
+          <a:p>
+            <a:pPr indent="0" marL="0">
+              <a:buNone/>
+            </a:pPr>
+            <a:r>
+              <a:rPr lang="en-US" sz="1200" dirty="0">
+                <a:solidFill>
+                  <a:srgbClr val="1A1F36"/>
+                </a:solidFill>
+                <a:latin typeface="Calibri" pitchFamily="34" charset="0"/>
+                <a:ea typeface="Calibri" pitchFamily="34" charset="-122"/>
+                <a:cs typeface="Calibri" pitchFamily="34" charset="-120"/>
+              </a:rPr>
+              <a:t>Human oversight &amp; approval</a:t>
+            </a:r>
+            <a:endParaRPr lang="en-US" sz="1200" dirty="0"/>
+          </a:p>
+        </p:txBody>
+      </p:sp>
+      <p:sp>
+        <p:nvSpPr>
+          <p:cNvPr id="30" name="Shape 28"/>
+          <p:cNvSpPr/>
+          <p:nvPr/>
+        </p:nvSpPr>
+        <p:spPr>
+          <a:xfrm>
+            <a:off x="3383280" y="3593592"/>
+            <a:ext cx="274320" cy="274320"/>
           </a:xfrm>
           <a:prstGeom prst="ellipse">
+            <a:avLst/>
+          </a:prstGeom>
+          <a:solidFill>
+            <a:srgbClr val="0F1B3D"/>
+          </a:solidFill>
+          <a:ln w="12700">
+            <a:solidFill>
+              <a:srgbClr val="0F1B3D"/>
+            </a:solidFill>
+            <a:prstDash val="solid"/>
+          </a:ln>
+        </p:spPr>
+      </p:sp>
+      <p:sp>
+        <p:nvSpPr>
+          <p:cNvPr id="31" name="Text 29"/>
+          <p:cNvSpPr/>
+          <p:nvPr/>
+        </p:nvSpPr>
+        <p:spPr>
+          <a:xfrm>
+            <a:off x="3383280" y="3593592"/>
+            <a:ext cx="274320" cy="274320"/>
+          </a:xfrm>
+          <a:prstGeom prst="rect">
+            <a:avLst/>
+          </a:prstGeom>
+          <a:noFill/>
+          <a:ln/>
+        </p:spPr>
+        <p:txBody>
+          <a:bodyPr wrap="square" lIns="0" tIns="0" rIns="0" bIns="0" rtlCol="0" anchor="ctr"/>
+          <a:lstStyle/>
+          <a:p>
+            <a:pPr algn="ctr" indent="0" marL="0">
+              <a:buNone/>
+            </a:pPr>
+            <a:r>
+              <a:rPr lang="en-US" sz="1100" b="1" dirty="0">
+                <a:solidFill>
+                  <a:srgbClr val="FFFFFF"/>
+                </a:solidFill>
+                <a:latin typeface="Calibri" pitchFamily="34" charset="0"/>
+                <a:ea typeface="Calibri" pitchFamily="34" charset="-122"/>
+                <a:cs typeface="Calibri" pitchFamily="34" charset="-120"/>
+              </a:rPr>
+              <a:t>6</a:t>
+            </a:r>
+            <a:endParaRPr lang="en-US" sz="1100" dirty="0"/>
+          </a:p>
+        </p:txBody>
+      </p:sp>
+      <p:sp>
+        <p:nvSpPr>
+          <p:cNvPr id="32" name="Text 30"/>
+          <p:cNvSpPr/>
+          <p:nvPr/>
+        </p:nvSpPr>
+        <p:spPr>
+          <a:xfrm>
+            <a:off x="3749040" y="3557016"/>
+            <a:ext cx="2057400" cy="384048"/>
+          </a:xfrm>
+          <a:prstGeom prst="rect">
+            <a:avLst/>
+          </a:prstGeom>
+          <a:noFill/>
+          <a:ln/>
+        </p:spPr>
+        <p:txBody>
+          <a:bodyPr wrap="square" lIns="0" tIns="0" rIns="0" bIns="0" rtlCol="0" anchor="ctr"/>
+          <a:lstStyle/>
+          <a:p>
+            <a:pPr indent="0" marL="0">
+              <a:buNone/>
+            </a:pPr>
+            <a:r>
+              <a:rPr lang="en-US" sz="1200" dirty="0">
+                <a:solidFill>
+                  <a:srgbClr val="1A1F36"/>
+                </a:solidFill>
+                <a:latin typeface="Calibri" pitchFamily="34" charset="0"/>
+                <a:ea typeface="Calibri" pitchFamily="34" charset="-122"/>
+                <a:cs typeface="Calibri" pitchFamily="34" charset="-120"/>
+              </a:rPr>
+              <a:t>Resource policy enforcement</a:t>
+            </a:r>
+            <a:endParaRPr lang="en-US" sz="1200" dirty="0"/>
+          </a:p>
+        </p:txBody>
+      </p:sp>
+      <p:sp>
+        <p:nvSpPr>
+          <p:cNvPr id="33" name="Shape 31"/>
+          <p:cNvSpPr/>
+          <p:nvPr/>
+        </p:nvSpPr>
+        <p:spPr>
+          <a:xfrm>
+            <a:off x="6035040" y="2011680"/>
+            <a:ext cx="2743200" cy="384048"/>
+          </a:xfrm>
+          <a:prstGeom prst="rect">
+            <a:avLst/>
+          </a:prstGeom>
+          <a:solidFill>
+            <a:srgbClr val="7C3AED"/>
+          </a:solidFill>
+          <a:ln w="12700">
+            <a:solidFill>
+              <a:srgbClr val="7C3AED"/>
+            </a:solidFill>
+            <a:prstDash val="solid"/>
+          </a:ln>
+        </p:spPr>
+      </p:sp>
+      <p:sp>
+        <p:nvSpPr>
+          <p:cNvPr id="34" name="Text 32"/>
+          <p:cNvSpPr/>
+          <p:nvPr/>
+        </p:nvSpPr>
+        <p:spPr>
+          <a:xfrm>
+            <a:off x="6035040" y="2011680"/>
+            <a:ext cx="2743200" cy="384048"/>
+          </a:xfrm>
+          <a:prstGeom prst="rect">
+            <a:avLst/>
+          </a:prstGeom>
+          <a:noFill/>
+          <a:ln/>
+        </p:spPr>
+        <p:txBody>
+          <a:bodyPr wrap="square" lIns="0" tIns="0" rIns="0" bIns="0" rtlCol="0" anchor="ctr"/>
+          <a:lstStyle/>
+          <a:p>
+            <a:pPr algn="ctr" indent="0" marL="0">
+              <a:buNone/>
+            </a:pPr>
+            <a:r>
+              <a:rPr lang="en-US" sz="1300" b="1" spc="400" kern="0" dirty="0">
+                <a:solidFill>
+                  <a:srgbClr val="FFFFFF"/>
+                </a:solidFill>
+                <a:latin typeface="Calibri" pitchFamily="34" charset="0"/>
+                <a:ea typeface="Calibri" pitchFamily="34" charset="-122"/>
+                <a:cs typeface="Calibri" pitchFamily="34" charset="-120"/>
+              </a:rPr>
+              <a:t>LIFECYCLE</a:t>
+            </a:r>
+            <a:endParaRPr lang="en-US" sz="1300" dirty="0"/>
+          </a:p>
+        </p:txBody>
+      </p:sp>
+      <p:sp>
+        <p:nvSpPr>
+          <p:cNvPr id="35" name="Shape 33"/>
+          <p:cNvSpPr/>
+          <p:nvPr/>
+        </p:nvSpPr>
+        <p:spPr>
+          <a:xfrm>
+            <a:off x="6035040" y="2395728"/>
+            <a:ext cx="2743200" cy="2176272"/>
+          </a:xfrm>
+          <a:prstGeom prst="rect">
             <a:avLst/>
           </a:prstGeom>
           <a:solidFill>
             <a:srgbClr val="E8EEFC"/>
           </a:solidFill>
-          <a:ln w="6350">
+          <a:ln w="12700">
             <a:solidFill>
-              <a:srgbClr val="CBD5E1"/>
+              <a:srgbClr val="7C3AED"/>
             </a:solidFill>
             <a:prstDash val="solid"/>
           </a:ln>
@@ -4153,102 +3759,24 @@
       </p:sp>
       <p:sp>
         <p:nvSpPr>
-          <p:cNvPr id="47" name="Text 45"/>
-          <p:cNvSpPr/>
-          <p:nvPr/>
-        </p:nvSpPr>
-        <p:spPr>
-          <a:xfrm>
-            <a:off x="4800600" y="3246120"/>
-            <a:ext cx="292608" cy="292608"/>
-          </a:xfrm>
-          <a:prstGeom prst="rect">
-            <a:avLst/>
-          </a:prstGeom>
-          <a:noFill/>
-          <a:ln/>
-        </p:spPr>
-        <p:txBody>
-          <a:bodyPr wrap="square" lIns="0" tIns="0" rIns="0" bIns="0" rtlCol="0" anchor="ctr"/>
-          <a:lstStyle/>
-          <a:p>
-            <a:pPr algn="ctr" indent="0" marL="0">
-              <a:buNone/>
-            </a:pPr>
-            <a:r>
-              <a:rPr lang="en-US" sz="1100" b="1" dirty="0">
-                <a:solidFill>
-                  <a:srgbClr val="0F1B3D"/>
-                </a:solidFill>
-                <a:latin typeface="Calibri" pitchFamily="34" charset="0"/>
-                <a:ea typeface="Calibri" pitchFamily="34" charset="-122"/>
-                <a:cs typeface="Calibri" pitchFamily="34" charset="-120"/>
-              </a:rPr>
-              <a:t>9</a:t>
-            </a:r>
-            <a:endParaRPr lang="en-US" sz="1100" dirty="0"/>
-          </a:p>
-        </p:txBody>
-      </p:sp>
-      <p:sp>
-        <p:nvSpPr>
-          <p:cNvPr id="48" name="Text 46"/>
-          <p:cNvSpPr/>
-          <p:nvPr/>
-        </p:nvSpPr>
-        <p:spPr>
-          <a:xfrm>
-            <a:off x="5166360" y="3200400"/>
-            <a:ext cx="2697480" cy="411480"/>
-          </a:xfrm>
-          <a:prstGeom prst="rect">
-            <a:avLst/>
-          </a:prstGeom>
-          <a:noFill/>
-          <a:ln/>
-        </p:spPr>
-        <p:txBody>
-          <a:bodyPr wrap="square" lIns="0" tIns="0" rIns="0" bIns="0" rtlCol="0" anchor="ctr"/>
-          <a:lstStyle/>
-          <a:p>
-            <a:pPr indent="0" marL="0">
-              <a:buNone/>
-            </a:pPr>
-            <a:r>
-              <a:rPr lang="en-US" sz="1200" dirty="0">
-                <a:solidFill>
-                  <a:srgbClr val="1A1F36"/>
-                </a:solidFill>
-                <a:latin typeface="Calibri" pitchFamily="34" charset="0"/>
-                <a:ea typeface="Calibri" pitchFamily="34" charset="-122"/>
-                <a:cs typeface="Calibri" pitchFamily="34" charset="-120"/>
-              </a:rPr>
-              <a:t>Multi-agent collaboration</a:t>
-            </a:r>
-            <a:endParaRPr lang="en-US" sz="1200" dirty="0"/>
-          </a:p>
-        </p:txBody>
-      </p:sp>
-      <p:sp>
-        <p:nvSpPr>
-          <p:cNvPr id="49" name="Shape 47"/>
-          <p:cNvSpPr/>
-          <p:nvPr/>
-        </p:nvSpPr>
-        <p:spPr>
-          <a:xfrm>
-            <a:off x="7909560" y="3273552"/>
-            <a:ext cx="1005840" cy="256032"/>
-          </a:xfrm>
-          <a:prstGeom prst="rect">
+          <p:cNvPr id="36" name="Shape 34"/>
+          <p:cNvSpPr/>
+          <p:nvPr/>
+        </p:nvSpPr>
+        <p:spPr>
+          <a:xfrm>
+            <a:off x="6217920" y="2551176"/>
+            <a:ext cx="274320" cy="274320"/>
+          </a:xfrm>
+          <a:prstGeom prst="ellipse">
             <a:avLst/>
           </a:prstGeom>
           <a:solidFill>
-            <a:srgbClr val="64748B"/>
+            <a:srgbClr val="7C3AED"/>
           </a:solidFill>
           <a:ln w="12700">
             <a:solidFill>
-              <a:srgbClr val="64748B"/>
+              <a:srgbClr val="7C3AED"/>
             </a:solidFill>
             <a:prstDash val="solid"/>
           </a:ln>
@@ -4256,14 +3784,14 @@
       </p:sp>
       <p:sp>
         <p:nvSpPr>
-          <p:cNvPr id="50" name="Text 48"/>
-          <p:cNvSpPr/>
-          <p:nvPr/>
-        </p:nvSpPr>
-        <p:spPr>
-          <a:xfrm>
-            <a:off x="7909560" y="3273552"/>
-            <a:ext cx="1005840" cy="256032"/>
+          <p:cNvPr id="37" name="Text 35"/>
+          <p:cNvSpPr/>
+          <p:nvPr/>
+        </p:nvSpPr>
+        <p:spPr>
+          <a:xfrm>
+            <a:off x="6217920" y="2551176"/>
+            <a:ext cx="274320" cy="274320"/>
           </a:xfrm>
           <a:prstGeom prst="rect">
             <a:avLst/>
@@ -4279,7 +3807,7 @@
               <a:buNone/>
             </a:pPr>
             <a:r>
-              <a:rPr lang="en-US" sz="900" b="1" spc="200" kern="0" dirty="0">
+              <a:rPr lang="en-US" sz="1100" b="1" dirty="0">
                 <a:solidFill>
                   <a:srgbClr val="FFFFFF"/>
                 </a:solidFill>
@@ -4287,32 +3815,71 @@
                 <a:ea typeface="Calibri" pitchFamily="34" charset="-122"/>
                 <a:cs typeface="Calibri" pitchFamily="34" charset="-120"/>
               </a:rPr>
-              <a:t>Future</a:t>
-            </a:r>
-            <a:endParaRPr lang="en-US" sz="900" dirty="0"/>
-          </a:p>
-        </p:txBody>
-      </p:sp>
-      <p:sp>
-        <p:nvSpPr>
-          <p:cNvPr id="51" name="Shape 49"/>
-          <p:cNvSpPr/>
-          <p:nvPr/>
-        </p:nvSpPr>
-        <p:spPr>
-          <a:xfrm>
-            <a:off x="4800600" y="3657600"/>
-            <a:ext cx="292608" cy="292608"/>
+              <a:t>7</a:t>
+            </a:r>
+            <a:endParaRPr lang="en-US" sz="1100" dirty="0"/>
+          </a:p>
+        </p:txBody>
+      </p:sp>
+      <p:sp>
+        <p:nvSpPr>
+          <p:cNvPr id="38" name="Text 36"/>
+          <p:cNvSpPr/>
+          <p:nvPr/>
+        </p:nvSpPr>
+        <p:spPr>
+          <a:xfrm>
+            <a:off x="6583680" y="2514600"/>
+            <a:ext cx="2057400" cy="384048"/>
+          </a:xfrm>
+          <a:prstGeom prst="rect">
+            <a:avLst/>
+          </a:prstGeom>
+          <a:noFill/>
+          <a:ln/>
+        </p:spPr>
+        <p:txBody>
+          <a:bodyPr wrap="square" lIns="0" tIns="0" rIns="0" bIns="0" rtlCol="0" anchor="ctr"/>
+          <a:lstStyle/>
+          <a:p>
+            <a:pPr indent="0" marL="0">
+              <a:buNone/>
+            </a:pPr>
+            <a:r>
+              <a:rPr lang="en-US" sz="1200" dirty="0">
+                <a:solidFill>
+                  <a:srgbClr val="1A1F36"/>
+                </a:solidFill>
+                <a:latin typeface="Calibri" pitchFamily="34" charset="0"/>
+                <a:ea typeface="Calibri" pitchFamily="34" charset="-122"/>
+                <a:cs typeface="Calibri" pitchFamily="34" charset="-120"/>
+              </a:rPr>
+              <a:t>Credential lifecycle</a:t>
+            </a:r>
+            <a:endParaRPr lang="en-US" sz="1200" dirty="0"/>
+          </a:p>
+        </p:txBody>
+      </p:sp>
+      <p:sp>
+        <p:nvSpPr>
+          <p:cNvPr id="39" name="Shape 37"/>
+          <p:cNvSpPr/>
+          <p:nvPr/>
+        </p:nvSpPr>
+        <p:spPr>
+          <a:xfrm>
+            <a:off x="6217920" y="3072384"/>
+            <a:ext cx="274320" cy="274320"/>
           </a:xfrm>
           <a:prstGeom prst="ellipse">
             <a:avLst/>
           </a:prstGeom>
           <a:solidFill>
-            <a:srgbClr val="E8EEFC"/>
+            <a:srgbClr val="7C3AED"/>
           </a:solidFill>
-          <a:ln w="6350">
+          <a:ln w="12700">
             <a:solidFill>
-              <a:srgbClr val="CBD5E1"/>
+              <a:srgbClr val="7C3AED"/>
             </a:solidFill>
             <a:prstDash val="solid"/>
           </a:ln>
@@ -4320,14 +3887,14 @@
       </p:sp>
       <p:sp>
         <p:nvSpPr>
-          <p:cNvPr id="52" name="Text 50"/>
-          <p:cNvSpPr/>
-          <p:nvPr/>
-        </p:nvSpPr>
-        <p:spPr>
-          <a:xfrm>
-            <a:off x="4800600" y="3657600"/>
-            <a:ext cx="292608" cy="292608"/>
+          <p:cNvPr id="40" name="Text 38"/>
+          <p:cNvSpPr/>
+          <p:nvPr/>
+        </p:nvSpPr>
+        <p:spPr>
+          <a:xfrm>
+            <a:off x="6217920" y="3072384"/>
+            <a:ext cx="274320" cy="274320"/>
           </a:xfrm>
           <a:prstGeom prst="rect">
             <a:avLst/>
@@ -4345,13 +3912,13 @@
             <a:r>
               <a:rPr lang="en-US" sz="1100" b="1" dirty="0">
                 <a:solidFill>
-                  <a:srgbClr val="0F1B3D"/>
-                </a:solidFill>
-                <a:latin typeface="Calibri" pitchFamily="34" charset="0"/>
-                <a:ea typeface="Calibri" pitchFamily="34" charset="-122"/>
-                <a:cs typeface="Calibri" pitchFamily="34" charset="-120"/>
-              </a:rPr>
-              <a:t>10</a:t>
+                  <a:srgbClr val="FFFFFF"/>
+                </a:solidFill>
+                <a:latin typeface="Calibri" pitchFamily="34" charset="0"/>
+                <a:ea typeface="Calibri" pitchFamily="34" charset="-122"/>
+                <a:cs typeface="Calibri" pitchFamily="34" charset="-120"/>
+              </a:rPr>
+              <a:t>8</a:t>
             </a:r>
             <a:endParaRPr lang="en-US" sz="1100" dirty="0"/>
           </a:p>
@@ -4359,14 +3926,14 @@
       </p:sp>
       <p:sp>
         <p:nvSpPr>
-          <p:cNvPr id="53" name="Text 51"/>
-          <p:cNvSpPr/>
-          <p:nvPr/>
-        </p:nvSpPr>
-        <p:spPr>
-          <a:xfrm>
-            <a:off x="5166360" y="3611880"/>
-            <a:ext cx="2697480" cy="411480"/>
+          <p:cNvPr id="41" name="Text 39"/>
+          <p:cNvSpPr/>
+          <p:nvPr/>
+        </p:nvSpPr>
+        <p:spPr>
+          <a:xfrm>
+            <a:off x="6583680" y="3035808"/>
+            <a:ext cx="2057400" cy="384048"/>
           </a:xfrm>
           <a:prstGeom prst="rect">
             <a:avLst/>
@@ -4390,7 +3957,7 @@
                 <a:ea typeface="Calibri" pitchFamily="34" charset="-122"/>
                 <a:cs typeface="Calibri" pitchFamily="34" charset="-120"/>
               </a:rPr>
-              <a:t>Visibility &amp; observability</a:t>
+              <a:t>Auditability &amp; logging</a:t>
             </a:r>
             <a:endParaRPr lang="en-US" sz="1200" dirty="0"/>
           </a:p>
@@ -4398,24 +3965,24 @@
       </p:sp>
       <p:sp>
         <p:nvSpPr>
-          <p:cNvPr id="54" name="Shape 52"/>
-          <p:cNvSpPr/>
-          <p:nvPr/>
-        </p:nvSpPr>
-        <p:spPr>
-          <a:xfrm>
-            <a:off x="7909560" y="3685032"/>
-            <a:ext cx="1005840" cy="256032"/>
-          </a:xfrm>
-          <a:prstGeom prst="rect">
+          <p:cNvPr id="42" name="Shape 40"/>
+          <p:cNvSpPr/>
+          <p:nvPr/>
+        </p:nvSpPr>
+        <p:spPr>
+          <a:xfrm>
+            <a:off x="6217920" y="3593592"/>
+            <a:ext cx="274320" cy="274320"/>
+          </a:xfrm>
+          <a:prstGeom prst="ellipse">
             <a:avLst/>
           </a:prstGeom>
           <a:solidFill>
-            <a:srgbClr val="02C39A"/>
+            <a:srgbClr val="7C3AED"/>
           </a:solidFill>
           <a:ln w="12700">
             <a:solidFill>
-              <a:srgbClr val="02C39A"/>
+              <a:srgbClr val="7C3AED"/>
             </a:solidFill>
             <a:prstDash val="solid"/>
           </a:ln>
@@ -4423,14 +3990,14 @@
       </p:sp>
       <p:sp>
         <p:nvSpPr>
-          <p:cNvPr id="55" name="Text 53"/>
-          <p:cNvSpPr/>
-          <p:nvPr/>
-        </p:nvSpPr>
-        <p:spPr>
-          <a:xfrm>
-            <a:off x="7909560" y="3685032"/>
-            <a:ext cx="1005840" cy="256032"/>
+          <p:cNvPr id="43" name="Text 41"/>
+          <p:cNvSpPr/>
+          <p:nvPr/>
+        </p:nvSpPr>
+        <p:spPr>
+          <a:xfrm>
+            <a:off x="6217920" y="3593592"/>
+            <a:ext cx="274320" cy="274320"/>
           </a:xfrm>
           <a:prstGeom prst="rect">
             <a:avLst/>
@@ -4446,7 +4013,7 @@
               <a:buNone/>
             </a:pPr>
             <a:r>
-              <a:rPr lang="en-US" sz="900" b="1" spc="200" kern="0" dirty="0">
+              <a:rPr lang="en-US" sz="1100" b="1" dirty="0">
                 <a:solidFill>
                   <a:srgbClr val="FFFFFF"/>
                 </a:solidFill>
@@ -4454,52 +4021,77 @@
                 <a:ea typeface="Calibri" pitchFamily="34" charset="-122"/>
                 <a:cs typeface="Calibri" pitchFamily="34" charset="-120"/>
               </a:rPr>
-              <a:t>M1 + P0</a:t>
-            </a:r>
-            <a:endParaRPr lang="en-US" sz="900" dirty="0"/>
-          </a:p>
-        </p:txBody>
-      </p:sp>
-      <p:sp>
-        <p:nvSpPr>
-          <p:cNvPr id="56" name="Text 54"/>
+              <a:t>9</a:t>
+            </a:r>
+            <a:endParaRPr lang="en-US" sz="1100" dirty="0"/>
+          </a:p>
+        </p:txBody>
+      </p:sp>
+      <p:sp>
+        <p:nvSpPr>
+          <p:cNvPr id="44" name="Text 42"/>
+          <p:cNvSpPr/>
+          <p:nvPr/>
+        </p:nvSpPr>
+        <p:spPr>
+          <a:xfrm>
+            <a:off x="6583680" y="3557016"/>
+            <a:ext cx="2057400" cy="384048"/>
+          </a:xfrm>
+          <a:prstGeom prst="rect">
+            <a:avLst/>
+          </a:prstGeom>
+          <a:noFill/>
+          <a:ln/>
+        </p:spPr>
+        <p:txBody>
+          <a:bodyPr wrap="square" lIns="0" tIns="0" rIns="0" bIns="0" rtlCol="0" anchor="ctr"/>
+          <a:lstStyle/>
+          <a:p>
+            <a:pPr indent="0" marL="0">
+              <a:buNone/>
+            </a:pPr>
+            <a:r>
+              <a:rPr lang="en-US" sz="1200" dirty="0">
+                <a:solidFill>
+                  <a:srgbClr val="1A1F36"/>
+                </a:solidFill>
+                <a:latin typeface="Calibri" pitchFamily="34" charset="0"/>
+                <a:ea typeface="Calibri" pitchFamily="34" charset="-122"/>
+                <a:cs typeface="Calibri" pitchFamily="34" charset="-120"/>
+              </a:rPr>
+              <a:t>Multi-agent collaboration</a:t>
+            </a:r>
+            <a:endParaRPr lang="en-US" sz="1200" dirty="0"/>
+          </a:p>
+        </p:txBody>
+      </p:sp>
+      <p:sp>
+        <p:nvSpPr>
+          <p:cNvPr id="45" name="Text 43"/>
           <p:cNvSpPr/>
           <p:nvPr/>
         </p:nvSpPr>
         <p:spPr>
           <a:xfrm>
             <a:off x="457200" y="4617720"/>
-            <a:ext cx="8229600" cy="274320"/>
-          </a:xfrm>
-          <a:prstGeom prst="rect">
-            <a:avLst/>
-          </a:prstGeom>
-          <a:noFill/>
-          <a:ln/>
-        </p:spPr>
-        <p:txBody>
-          <a:bodyPr wrap="square" lIns="0" tIns="0" rIns="0" bIns="0" rtlCol="0" anchor="ctr"/>
-          <a:lstStyle/>
-          <a:p>
-            <a:pPr indent="0" marL="0">
-              <a:buNone/>
-            </a:pPr>
-            <a:r>
-              <a:rPr lang="en-US" sz="1000" b="1" dirty="0">
-                <a:solidFill>
-                  <a:srgbClr val="02C39A"/>
-                </a:solidFill>
-                <a:latin typeface="Calibri" pitchFamily="34" charset="0"/>
-                <a:ea typeface="Calibri" pitchFamily="34" charset="-122"/>
-                <a:cs typeface="Calibri" pitchFamily="34" charset="-120"/>
-              </a:rPr>
-              <a:t>M1</a:t>
-            </a:r>
-            <a:pPr indent="0" marL="0">
-              <a:buNone/>
-            </a:pPr>
-            <a:r>
-              <a:rPr lang="en-US" sz="1000" dirty="0">
+            <a:ext cx="8229600" cy="320040"/>
+          </a:xfrm>
+          <a:prstGeom prst="rect">
+            <a:avLst/>
+          </a:prstGeom>
+          <a:noFill/>
+          <a:ln/>
+        </p:spPr>
+        <p:txBody>
+          <a:bodyPr wrap="square" lIns="0" tIns="0" rIns="0" bIns="0" rtlCol="0" anchor="ctr"/>
+          <a:lstStyle/>
+          <a:p>
+            <a:pPr algn="ctr" indent="0" marL="0">
+              <a:buNone/>
+            </a:pPr>
+            <a:r>
+              <a:rPr lang="en-US" sz="1100" i="1" dirty="0">
                 <a:solidFill>
                   <a:srgbClr val="64748B"/>
                 </a:solidFill>
@@ -4507,99 +4099,15 @@
                 <a:ea typeface="Calibri" pitchFamily="34" charset="-122"/>
                 <a:cs typeface="Calibri" pitchFamily="34" charset="-120"/>
               </a:rPr>
-              <a:t> shipped  ·  </a:t>
-            </a:r>
-            <a:pPr indent="0" marL="0">
-              <a:buNone/>
-            </a:pPr>
-            <a:r>
-              <a:rPr lang="en-US" sz="1000" b="1" dirty="0">
-                <a:solidFill>
-                  <a:srgbClr val="F59E0B"/>
-                </a:solidFill>
-                <a:latin typeface="Calibri" pitchFamily="34" charset="0"/>
-                <a:ea typeface="Calibri" pitchFamily="34" charset="-122"/>
-                <a:cs typeface="Calibri" pitchFamily="34" charset="-120"/>
-              </a:rPr>
-              <a:t>M2</a:t>
-            </a:r>
-            <a:pPr indent="0" marL="0">
-              <a:buNone/>
-            </a:pPr>
-            <a:r>
-              <a:rPr lang="en-US" sz="1000" dirty="0">
-                <a:solidFill>
-                  <a:srgbClr val="64748B"/>
-                </a:solidFill>
-                <a:latin typeface="Calibri" pitchFamily="34" charset="0"/>
-                <a:ea typeface="Calibri" pitchFamily="34" charset="-122"/>
-                <a:cs typeface="Calibri" pitchFamily="34" charset="-120"/>
-              </a:rPr>
-              <a:t> in flight  ·  </a:t>
-            </a:r>
-            <a:pPr indent="0" marL="0">
-              <a:buNone/>
-            </a:pPr>
-            <a:r>
-              <a:rPr lang="en-US" sz="1000" b="1" dirty="0">
-                <a:solidFill>
-                  <a:srgbClr val="0F1B3D"/>
-                </a:solidFill>
-                <a:latin typeface="Calibri" pitchFamily="34" charset="0"/>
-                <a:ea typeface="Calibri" pitchFamily="34" charset="-122"/>
-                <a:cs typeface="Calibri" pitchFamily="34" charset="-120"/>
-              </a:rPr>
-              <a:t>P0</a:t>
-            </a:r>
-            <a:pPr indent="0" marL="0">
-              <a:buNone/>
-            </a:pPr>
-            <a:r>
-              <a:rPr lang="en-US" sz="1000" dirty="0">
-                <a:solidFill>
-                  <a:srgbClr val="64748B"/>
-                </a:solidFill>
-                <a:latin typeface="Calibri" pitchFamily="34" charset="0"/>
-                <a:ea typeface="Calibri" pitchFamily="34" charset="-122"/>
-                <a:cs typeface="Calibri" pitchFamily="34" charset="-120"/>
-              </a:rPr>
-              <a:t> Gateway demo  ·  </a:t>
-            </a:r>
-            <a:pPr indent="0" marL="0">
-              <a:buNone/>
-            </a:pPr>
-            <a:r>
-              <a:rPr lang="en-US" sz="1000" dirty="0">
-                <a:solidFill>
-                  <a:srgbClr val="64748B"/>
-                </a:solidFill>
-                <a:latin typeface="Calibri" pitchFamily="34" charset="0"/>
-                <a:ea typeface="Calibri" pitchFamily="34" charset="-122"/>
-                <a:cs typeface="Calibri" pitchFamily="34" charset="-120"/>
-              </a:rPr>
-              <a:t>Post-P0 / Future</a:t>
-            </a:r>
-            <a:pPr indent="0" marL="0">
-              <a:buNone/>
-            </a:pPr>
-            <a:r>
-              <a:rPr lang="en-US" sz="1000" dirty="0">
-                <a:solidFill>
-                  <a:srgbClr val="64748B"/>
-                </a:solidFill>
-                <a:latin typeface="Calibri" pitchFamily="34" charset="0"/>
-                <a:ea typeface="Calibri" pitchFamily="34" charset="-122"/>
-                <a:cs typeface="Calibri" pitchFamily="34" charset="-120"/>
-              </a:rPr>
-              <a:t> next</a:t>
-            </a:r>
-            <a:endParaRPr lang="en-US" sz="1000" dirty="0"/>
-          </a:p>
-        </p:txBody>
-      </p:sp>
-      <p:sp>
-        <p:nvSpPr>
-          <p:cNvPr id="57" name="Text 55"/>
+              <a:t>P0 covers the full Visibility group + Authorization + Resource policy + Auditability. Everything else is post-P0.</a:t>
+            </a:r>
+            <a:endParaRPr lang="en-US" sz="1100" dirty="0"/>
+          </a:p>
+        </p:txBody>
+      </p:sp>
+      <p:sp>
+        <p:nvSpPr>
+          <p:cNvPr id="46" name="Text 44"/>
           <p:cNvSpPr/>
           <p:nvPr/>
         </p:nvSpPr>
@@ -4630,7 +4138,7 @@
                 <a:ea typeface="Calibri" pitchFamily="34" charset="-122"/>
                 <a:cs typeface="Calibri" pitchFamily="34" charset="-120"/>
               </a:rPr>
-              <a:t>3 / 8</a:t>
+              <a:t>3 / 9</a:t>
             </a:r>
             <a:endParaRPr lang="en-US" sz="900" dirty="0"/>
           </a:p>
@@ -4726,7 +4234,7 @@
                 <a:ea typeface="Calibri" pitchFamily="34" charset="-122"/>
                 <a:cs typeface="Calibri" pitchFamily="34" charset="-120"/>
               </a:rPr>
-              <a:t>03 · What's done</a:t>
+              <a:t>03 · Where we are</a:t>
             </a:r>
             <a:endParaRPr lang="en-US" sz="1100" dirty="0"/>
           </a:p>
@@ -4765,7 +4273,7 @@
                 <a:ea typeface="Georgia" pitchFamily="34" charset="-122"/>
                 <a:cs typeface="Georgia" pitchFamily="34" charset="-120"/>
               </a:rPr>
-              <a:t>M1 is live. Real agents, real data.</a:t>
+              <a:t>What's been started.</a:t>
             </a:r>
             <a:endParaRPr lang="en-US" sz="3400" dirty="0"/>
           </a:p>
@@ -4779,8 +4287,47 @@
         </p:nvSpPr>
         <p:spPr>
           <a:xfrm>
-            <a:off x="548640" y="1600200"/>
-            <a:ext cx="4206240" cy="2743200"/>
+            <a:off x="457200" y="1554480"/>
+            <a:ext cx="8229600" cy="365760"/>
+          </a:xfrm>
+          <a:prstGeom prst="rect">
+            <a:avLst/>
+          </a:prstGeom>
+          <a:noFill/>
+          <a:ln/>
+        </p:spPr>
+        <p:txBody>
+          <a:bodyPr wrap="square" lIns="0" tIns="0" rIns="0" bIns="0" rtlCol="0" anchor="ctr"/>
+          <a:lstStyle/>
+          <a:p>
+            <a:pPr indent="0" marL="0">
+              <a:buNone/>
+            </a:pPr>
+            <a:r>
+              <a:rPr lang="en-US" sz="1200" i="1" dirty="0">
+                <a:solidFill>
+                  <a:srgbClr val="64748B"/>
+                </a:solidFill>
+                <a:latin typeface="Calibri" pitchFamily="34" charset="0"/>
+                <a:ea typeface="Calibri" pitchFamily="34" charset="-122"/>
+                <a:cs typeface="Calibri" pitchFamily="34" charset="-120"/>
+              </a:rPr>
+              <a:t>M1 visibility layer is live. M2 is ~74% in. Some work may cover P0 needs — Omri will verify with Mor.</a:t>
+            </a:r>
+            <a:endParaRPr lang="en-US" sz="1200" dirty="0"/>
+          </a:p>
+        </p:txBody>
+      </p:sp>
+      <p:sp>
+        <p:nvSpPr>
+          <p:cNvPr id="6" name="Text 4"/>
+          <p:cNvSpPr/>
+          <p:nvPr/>
+        </p:nvSpPr>
+        <p:spPr>
+          <a:xfrm>
+            <a:off x="548640" y="1691640"/>
+            <a:ext cx="4114800" cy="2834640"/>
           </a:xfrm>
           <a:prstGeom prst="rect">
             <a:avLst/>
@@ -4804,7 +4351,7 @@
                 <a:ea typeface="Calibri" pitchFamily="34" charset="-122"/>
                 <a:cs typeface="Calibri" pitchFamily="34" charset="-120"/>
               </a:rPr>
-              <a:t>Agent graph model</a:t>
+              <a:t>M1 · Agent visibility layer</a:t>
             </a:r>
             <a:endParaRPr lang="en-US" sz="1400" dirty="0"/>
           </a:p>
@@ -4821,7 +4368,7 @@
                 <a:ea typeface="Calibri" pitchFamily="34" charset="-122"/>
                 <a:cs typeface="Calibri" pitchFamily="34" charset="-120"/>
               </a:rPr>
-              <a:t>Agents as first-class nodes. Owner, model, tools, issues.</a:t>
+              <a:t>Agent graph model · Discovery &gt; Agents UI · agent entity page</a:t>
             </a:r>
             <a:endParaRPr lang="en-US" sz="1400" dirty="0"/>
           </a:p>
@@ -4830,7 +4377,41 @@
               <a:buNone/>
             </a:pPr>
             <a:r>
-              <a:rPr lang="en-US" sz="400" dirty="0">
+              <a:rPr lang="en-US" sz="1200" dirty="0">
+                <a:solidFill>
+                  <a:srgbClr val="64748B"/>
+                </a:solidFill>
+                <a:latin typeface="Calibri" pitchFamily="34" charset="0"/>
+                <a:ea typeface="Calibri" pitchFamily="34" charset="-122"/>
+                <a:cs typeface="Calibri" pitchFamily="34" charset="-120"/>
+              </a:rPr>
+              <a:t>Built-in issues: AGENT_EXCESSIVE_PERMISSIONS · AGENT_OWNER_OFFBOARDED</a:t>
+            </a:r>
+            <a:endParaRPr lang="en-US" sz="1400" dirty="0"/>
+          </a:p>
+          <a:p>
+            <a:pPr indent="0" marL="0">
+              <a:buNone/>
+            </a:pPr>
+            <a:r>
+              <a:rPr lang="en-US" sz="1200" dirty="0">
+                <a:solidFill>
+                  <a:srgbClr val="64748B"/>
+                </a:solidFill>
+                <a:latin typeface="Calibri" pitchFamily="34" charset="0"/>
+                <a:ea typeface="Calibri" pitchFamily="34" charset="-122"/>
+                <a:cs typeface="Calibri" pitchFamily="34" charset="-120"/>
+              </a:rPr>
+              <a:t>Connectors: Gemini · Vertex AI · Amazon Bedrock · n8n</a:t>
+            </a:r>
+            <a:endParaRPr lang="en-US" sz="1400" dirty="0"/>
+          </a:p>
+          <a:p>
+            <a:pPr indent="0" marL="0">
+              <a:buNone/>
+            </a:pPr>
+            <a:r>
+              <a:rPr lang="en-US" sz="500" dirty="0">
                 <a:solidFill>
                   <a:srgbClr val="000000"/>
                 </a:solidFill>
@@ -4849,13 +4430,13 @@
             <a:r>
               <a:rPr lang="en-US" sz="1400" b="1" dirty="0">
                 <a:solidFill>
-                  <a:srgbClr val="0F1B3D"/>
-                </a:solidFill>
-                <a:latin typeface="Calibri" pitchFamily="34" charset="0"/>
-                <a:ea typeface="Calibri" pitchFamily="34" charset="-122"/>
-                <a:cs typeface="Calibri" pitchFamily="34" charset="-120"/>
-              </a:rPr>
-              <a:t>Discovery › Agents UI + entity page</a:t>
+                  <a:srgbClr val="F59E0B"/>
+                </a:solidFill>
+                <a:latin typeface="Calibri" pitchFamily="34" charset="0"/>
+                <a:ea typeface="Calibri" pitchFamily="34" charset="-122"/>
+                <a:cs typeface="Calibri" pitchFamily="34" charset="-120"/>
+              </a:rPr>
+              <a:t>M2 · Access Intelligence</a:t>
             </a:r>
             <a:endParaRPr lang="en-US" sz="1400" dirty="0"/>
           </a:p>
@@ -4872,7 +4453,7 @@
                 <a:ea typeface="Calibri" pitchFamily="34" charset="-122"/>
                 <a:cs typeface="Calibri" pitchFamily="34" charset="-120"/>
               </a:rPr>
-              <a:t>Inventory across platforms. Issues: AGENT_EXCESSIVE_PERMISSIONS, AGENT_OWNER_OFFBOARDED.</a:t>
+              <a:t>~74% in progress. Credential discovery, NHI→agent map, OAuth scope viz.</a:t>
             </a:r>
             <a:endParaRPr lang="en-US" sz="1400" dirty="0"/>
           </a:p>
@@ -4881,40 +4462,6 @@
               <a:buNone/>
             </a:pPr>
             <a:r>
-              <a:rPr lang="en-US" sz="400" dirty="0">
-                <a:solidFill>
-                  <a:srgbClr val="000000"/>
-                </a:solidFill>
-                <a:latin typeface="Calibri" pitchFamily="34" charset="0"/>
-                <a:ea typeface="Calibri" pitchFamily="34" charset="-122"/>
-                <a:cs typeface="Calibri" pitchFamily="34" charset="-120"/>
-              </a:rPr>
-              <a:t> </a:t>
-            </a:r>
-            <a:endParaRPr lang="en-US" sz="1400" dirty="0"/>
-          </a:p>
-          <a:p>
-            <a:pPr indent="0" marL="0">
-              <a:buNone/>
-            </a:pPr>
-            <a:r>
-              <a:rPr lang="en-US" sz="1400" b="1" dirty="0">
-                <a:solidFill>
-                  <a:srgbClr val="F59E0B"/>
-                </a:solidFill>
-                <a:latin typeface="Calibri" pitchFamily="34" charset="0"/>
-                <a:ea typeface="Calibri" pitchFamily="34" charset="-122"/>
-                <a:cs typeface="Calibri" pitchFamily="34" charset="-120"/>
-              </a:rPr>
-              <a:t>M2: Access Intelligence in flight</a:t>
-            </a:r>
-            <a:endParaRPr lang="en-US" sz="1400" dirty="0"/>
-          </a:p>
-          <a:p>
-            <a:pPr indent="0" marL="0">
-              <a:buNone/>
-            </a:pPr>
-            <a:r>
               <a:rPr lang="en-US" sz="1200" dirty="0">
                 <a:solidFill>
                   <a:srgbClr val="64748B"/>
@@ -4923,7 +4470,7 @@
                 <a:ea typeface="Calibri" pitchFamily="34" charset="-122"/>
                 <a:cs typeface="Calibri" pitchFamily="34" charset="-120"/>
               </a:rPr>
-              <a:t>74% complete. The unfinished 26% is where the IdP-API approach hit the wall.</a:t>
+              <a:t>The remaining 26% is where the original approach hit the wall.</a:t>
             </a:r>
             <a:endParaRPr lang="en-US" sz="1400" dirty="0"/>
           </a:p>
@@ -4931,7 +4478,7 @@
       </p:sp>
       <p:pic>
         <p:nvPicPr>
-          <p:cNvPr id="6" name="Image 0" descr="/tmp/mor-pics/slide12_160.png">    </p:cNvPr>
+          <p:cNvPr id="7" name="Image 0" descr="/tmp/mor-pics/slide12_160.png">    </p:cNvPr>
           <p:cNvPicPr>
             <a:picLocks noChangeAspect="1"/>
           </p:cNvPicPr>
@@ -4954,7 +4501,7 @@
       </p:pic>
       <p:sp>
         <p:nvSpPr>
-          <p:cNvPr id="7" name="Text 4"/>
+          <p:cNvPr id="8" name="Text 5"/>
           <p:cNvSpPr/>
           <p:nvPr/>
         </p:nvSpPr>
@@ -4985,7 +4532,7 @@
                 <a:ea typeface="Calibri" pitchFamily="34" charset="-122"/>
                 <a:cs typeface="Calibri" pitchFamily="34" charset="-120"/>
               </a:rPr>
-              <a:t>Linx · release-notes-assistant · real M1 product</a:t>
+              <a:t>Linx · agent detail page (in product)</a:t>
             </a:r>
             <a:endParaRPr lang="en-US" sz="900" dirty="0"/>
           </a:p>
@@ -4993,24 +4540,24 @@
       </p:sp>
       <p:sp>
         <p:nvSpPr>
-          <p:cNvPr id="8" name="Shape 5"/>
-          <p:cNvSpPr/>
-          <p:nvPr/>
-        </p:nvSpPr>
-        <p:spPr>
-          <a:xfrm>
-            <a:off x="457200" y="4572000"/>
-            <a:ext cx="8229600" cy="411480"/>
+          <p:cNvPr id="9" name="Shape 6"/>
+          <p:cNvSpPr/>
+          <p:nvPr/>
+        </p:nvSpPr>
+        <p:spPr>
+          <a:xfrm>
+            <a:off x="457200" y="4617720"/>
+            <a:ext cx="8229600" cy="365760"/>
           </a:xfrm>
           <a:prstGeom prst="rect">
             <a:avLst/>
           </a:prstGeom>
           <a:solidFill>
-            <a:srgbClr val="0F1B3D"/>
+            <a:srgbClr val="E8EEFC"/>
           </a:solidFill>
           <a:ln w="12700">
             <a:solidFill>
-              <a:srgbClr val="0F1B3D"/>
+              <a:srgbClr val="CBD5E1"/>
             </a:solidFill>
             <a:prstDash val="solid"/>
           </a:ln>
@@ -5018,52 +4565,38 @@
       </p:sp>
       <p:sp>
         <p:nvSpPr>
-          <p:cNvPr id="9" name="Text 6"/>
-          <p:cNvSpPr/>
-          <p:nvPr/>
-        </p:nvSpPr>
-        <p:spPr>
-          <a:xfrm>
-            <a:off x="640080" y="4572000"/>
-            <a:ext cx="7863840" cy="411480"/>
-          </a:xfrm>
-          <a:prstGeom prst="rect">
-            <a:avLst/>
-          </a:prstGeom>
-          <a:noFill/>
-          <a:ln/>
-        </p:spPr>
-        <p:txBody>
-          <a:bodyPr wrap="square" lIns="0" tIns="0" rIns="0" bIns="0" rtlCol="0" anchor="ctr"/>
-          <a:lstStyle/>
-          <a:p>
-            <a:pPr indent="0" marL="0">
-              <a:buNone/>
-            </a:pPr>
-            <a:r>
-              <a:rPr lang="en-US" sz="1100" b="1" spc="300" kern="0" dirty="0">
-                <a:solidFill>
-                  <a:srgbClr val="02C39A"/>
-                </a:solidFill>
-                <a:latin typeface="Calibri" pitchFamily="34" charset="0"/>
-                <a:ea typeface="Calibri" pitchFamily="34" charset="-122"/>
-                <a:cs typeface="Calibri" pitchFamily="34" charset="-120"/>
-              </a:rPr>
-              <a:t>CONNECTORS LIVE:  </a:t>
-            </a:r>
-            <a:pPr indent="0" marL="0">
-              <a:buNone/>
-            </a:pPr>
-            <a:r>
-              <a:rPr lang="en-US" sz="1100" dirty="0">
-                <a:solidFill>
-                  <a:srgbClr val="FFFFFF"/>
-                </a:solidFill>
-                <a:latin typeface="Calibri" pitchFamily="34" charset="0"/>
-                <a:ea typeface="Calibri" pitchFamily="34" charset="-122"/>
-                <a:cs typeface="Calibri" pitchFamily="34" charset="-120"/>
-              </a:rPr>
-              <a:t>Gemini  ·  Vertex AI  ·  Amazon Bedrock  ·  n8n</a:t>
+          <p:cNvPr id="10" name="Text 7"/>
+          <p:cNvSpPr/>
+          <p:nvPr/>
+        </p:nvSpPr>
+        <p:spPr>
+          <a:xfrm>
+            <a:off x="640080" y="4617720"/>
+            <a:ext cx="7863840" cy="365760"/>
+          </a:xfrm>
+          <a:prstGeom prst="rect">
+            <a:avLst/>
+          </a:prstGeom>
+          <a:noFill/>
+          <a:ln/>
+        </p:spPr>
+        <p:txBody>
+          <a:bodyPr wrap="square" lIns="0" tIns="0" rIns="0" bIns="0" rtlCol="0" anchor="ctr"/>
+          <a:lstStyle/>
+          <a:p>
+            <a:pPr indent="0" marL="0">
+              <a:buNone/>
+            </a:pPr>
+            <a:r>
+              <a:rPr lang="en-US" sz="1100" i="1" dirty="0">
+                <a:solidFill>
+                  <a:srgbClr val="64748B"/>
+                </a:solidFill>
+                <a:latin typeface="Calibri" pitchFamily="34" charset="0"/>
+                <a:ea typeface="Calibri" pitchFamily="34" charset="-122"/>
+                <a:cs typeface="Calibri" pitchFamily="34" charset="-120"/>
+              </a:rPr>
+              <a:t>ChatGPT Enterprise: still in Backlog  ·  Copilot Studio direct connector: Canceled (Jan 2026)</a:t>
             </a:r>
             <a:endParaRPr lang="en-US" sz="1100" dirty="0"/>
           </a:p>
@@ -5071,7 +4604,7 @@
       </p:sp>
       <p:sp>
         <p:nvSpPr>
-          <p:cNvPr id="10" name="Text 7"/>
+          <p:cNvPr id="11" name="Text 8"/>
           <p:cNvSpPr/>
           <p:nvPr/>
         </p:nvSpPr>
@@ -5102,7 +4635,7 @@
                 <a:ea typeface="Calibri" pitchFamily="34" charset="-122"/>
                 <a:cs typeface="Calibri" pitchFamily="34" charset="-120"/>
               </a:rPr>
-              <a:t>4 / 8</a:t>
+              <a:t>4 / 9</a:t>
             </a:r>
             <a:endParaRPr lang="en-US" sz="900" dirty="0"/>
           </a:p>
@@ -5119,6 +4652,772 @@
 <file path=ppt/slides/slide5.xml><?xml version="1.0" encoding="utf-8"?>
 <p:sld xmlns:a="http://schemas.openxmlformats.org/drawingml/2006/main" xmlns:r="http://schemas.openxmlformats.org/officeDocument/2006/relationships" xmlns:p="http://schemas.openxmlformats.org/presentationml/2006/main">
   <p:cSld name="Slide 5">
+    <p:bg>
+      <p:bgPr>
+        <a:solidFill>
+          <a:srgbClr val="FFFFFF"/>
+        </a:solidFill>
+      </p:bgPr>
+    </p:bg>
+    <p:spTree>
+      <p:nvGrpSpPr>
+        <p:cNvPr id="1" name=""/>
+        <p:cNvGrpSpPr/>
+        <p:nvPr/>
+      </p:nvGrpSpPr>
+      <p:grpSpPr>
+        <a:xfrm>
+          <a:off x="0" y="0"/>
+          <a:ext cx="0" cy="0"/>
+          <a:chOff x="0" y="0"/>
+          <a:chExt cx="0" cy="0"/>
+        </a:xfrm>
+      </p:grpSpPr>
+      <p:sp>
+        <p:nvSpPr>
+          <p:cNvPr id="2" name="Shape 0"/>
+          <p:cNvSpPr/>
+          <p:nvPr/>
+        </p:nvSpPr>
+        <p:spPr>
+          <a:xfrm>
+            <a:off x="0" y="0"/>
+            <a:ext cx="109728" cy="5143500"/>
+          </a:xfrm>
+          <a:prstGeom prst="rect">
+            <a:avLst/>
+          </a:prstGeom>
+          <a:solidFill>
+            <a:srgbClr val="F59E0B"/>
+          </a:solidFill>
+          <a:ln w="12700">
+            <a:solidFill>
+              <a:srgbClr val="F59E0B"/>
+            </a:solidFill>
+            <a:prstDash val="solid"/>
+          </a:ln>
+        </p:spPr>
+      </p:sp>
+      <p:sp>
+        <p:nvSpPr>
+          <p:cNvPr id="3" name="Text 1"/>
+          <p:cNvSpPr/>
+          <p:nvPr/>
+        </p:nvSpPr>
+        <p:spPr>
+          <a:xfrm>
+            <a:off x="457200" y="365760"/>
+            <a:ext cx="7315200" cy="274320"/>
+          </a:xfrm>
+          <a:prstGeom prst="rect">
+            <a:avLst/>
+          </a:prstGeom>
+          <a:noFill/>
+          <a:ln/>
+        </p:spPr>
+        <p:txBody>
+          <a:bodyPr wrap="square" lIns="0" tIns="0" rIns="0" bIns="0" rtlCol="0" anchor="ctr"/>
+          <a:lstStyle/>
+          <a:p>
+            <a:pPr indent="0" marL="0">
+              <a:buNone/>
+            </a:pPr>
+            <a:r>
+              <a:rPr lang="en-US" sz="1100" b="1" spc="400" kern="0" dirty="0">
+                <a:solidFill>
+                  <a:srgbClr val="64748B"/>
+                </a:solidFill>
+                <a:latin typeface="Calibri" pitchFamily="34" charset="0"/>
+                <a:ea typeface="Calibri" pitchFamily="34" charset="-122"/>
+                <a:cs typeface="Calibri" pitchFamily="34" charset="-120"/>
+              </a:rPr>
+              <a:t>04 · What we tried first</a:t>
+            </a:r>
+            <a:endParaRPr lang="en-US" sz="1100" dirty="0"/>
+          </a:p>
+        </p:txBody>
+      </p:sp>
+      <p:sp>
+        <p:nvSpPr>
+          <p:cNvPr id="4" name="Text 2"/>
+          <p:cNvSpPr/>
+          <p:nvPr/>
+        </p:nvSpPr>
+        <p:spPr>
+          <a:xfrm>
+            <a:off x="457200" y="731520"/>
+            <a:ext cx="8229600" cy="777240"/>
+          </a:xfrm>
+          <a:prstGeom prst="rect">
+            <a:avLst/>
+          </a:prstGeom>
+          <a:noFill/>
+          <a:ln/>
+        </p:spPr>
+        <p:txBody>
+          <a:bodyPr wrap="square" lIns="0" tIns="0" rIns="0" bIns="0" rtlCol="0" anchor="ctr"/>
+          <a:lstStyle/>
+          <a:p>
+            <a:pPr indent="0" marL="0">
+              <a:buNone/>
+            </a:pPr>
+            <a:r>
+              <a:rPr lang="en-US" sz="3400" b="1" dirty="0">
+                <a:solidFill>
+                  <a:srgbClr val="1A1F36"/>
+                </a:solidFill>
+                <a:latin typeface="Georgia" pitchFamily="34" charset="0"/>
+                <a:ea typeface="Georgia" pitchFamily="34" charset="-122"/>
+                <a:cs typeface="Georgia" pitchFamily="34" charset="-120"/>
+              </a:rPr>
+              <a:t>The original approach.</a:t>
+            </a:r>
+            <a:endParaRPr lang="en-US" sz="3400" dirty="0"/>
+          </a:p>
+        </p:txBody>
+      </p:sp>
+      <p:sp>
+        <p:nvSpPr>
+          <p:cNvPr id="5" name="Shape 3"/>
+          <p:cNvSpPr/>
+          <p:nvPr/>
+        </p:nvSpPr>
+        <p:spPr>
+          <a:xfrm>
+            <a:off x="457200" y="1691640"/>
+            <a:ext cx="3931920" cy="2743200"/>
+          </a:xfrm>
+          <a:prstGeom prst="rect">
+            <a:avLst/>
+          </a:prstGeom>
+          <a:solidFill>
+            <a:srgbClr val="E8EEFC"/>
+          </a:solidFill>
+          <a:ln w="12700">
+            <a:solidFill>
+              <a:srgbClr val="E8EEFC"/>
+            </a:solidFill>
+            <a:prstDash val="solid"/>
+          </a:ln>
+        </p:spPr>
+      </p:sp>
+      <p:sp>
+        <p:nvSpPr>
+          <p:cNvPr id="6" name="Shape 4"/>
+          <p:cNvSpPr/>
+          <p:nvPr/>
+        </p:nvSpPr>
+        <p:spPr>
+          <a:xfrm>
+            <a:off x="457200" y="1691640"/>
+            <a:ext cx="73152" cy="2743200"/>
+          </a:xfrm>
+          <a:prstGeom prst="rect">
+            <a:avLst/>
+          </a:prstGeom>
+          <a:solidFill>
+            <a:srgbClr val="F59E0B"/>
+          </a:solidFill>
+          <a:ln w="12700">
+            <a:solidFill>
+              <a:srgbClr val="F59E0B"/>
+            </a:solidFill>
+            <a:prstDash val="solid"/>
+          </a:ln>
+        </p:spPr>
+      </p:sp>
+      <p:sp>
+        <p:nvSpPr>
+          <p:cNvPr id="7" name="Text 5"/>
+          <p:cNvSpPr/>
+          <p:nvPr/>
+        </p:nvSpPr>
+        <p:spPr>
+          <a:xfrm>
+            <a:off x="640080" y="1783080"/>
+            <a:ext cx="3566160" cy="365760"/>
+          </a:xfrm>
+          <a:prstGeom prst="rect">
+            <a:avLst/>
+          </a:prstGeom>
+          <a:noFill/>
+          <a:ln/>
+        </p:spPr>
+        <p:txBody>
+          <a:bodyPr wrap="square" lIns="0" tIns="0" rIns="0" bIns="0" rtlCol="0" anchor="ctr"/>
+          <a:lstStyle/>
+          <a:p>
+            <a:pPr indent="0" marL="0">
+              <a:buNone/>
+            </a:pPr>
+            <a:r>
+              <a:rPr lang="en-US" sz="1500" b="1" dirty="0">
+                <a:solidFill>
+                  <a:srgbClr val="0F1B3D"/>
+                </a:solidFill>
+                <a:latin typeface="Georgia" pitchFamily="34" charset="0"/>
+                <a:ea typeface="Georgia" pitchFamily="34" charset="-122"/>
+                <a:cs typeface="Georgia" pitchFamily="34" charset="-120"/>
+              </a:rPr>
+              <a:t>The plan</a:t>
+            </a:r>
+            <a:endParaRPr lang="en-US" sz="1500" dirty="0"/>
+          </a:p>
+        </p:txBody>
+      </p:sp>
+      <p:sp>
+        <p:nvSpPr>
+          <p:cNvPr id="8" name="Text 6"/>
+          <p:cNvSpPr/>
+          <p:nvPr/>
+        </p:nvSpPr>
+        <p:spPr>
+          <a:xfrm>
+            <a:off x="640080" y="2240280"/>
+            <a:ext cx="3566160" cy="2011680"/>
+          </a:xfrm>
+          <a:prstGeom prst="rect">
+            <a:avLst/>
+          </a:prstGeom>
+          <a:noFill/>
+          <a:ln/>
+        </p:spPr>
+        <p:txBody>
+          <a:bodyPr wrap="square" lIns="0" tIns="0" rIns="0" bIns="0" rtlCol="0" anchor="ctr"/>
+          <a:lstStyle/>
+          <a:p>
+            <a:pPr indent="0" marL="0">
+              <a:buNone/>
+            </a:pPr>
+            <a:r>
+              <a:rPr lang="en-US" sz="1200" dirty="0">
+                <a:solidFill>
+                  <a:srgbClr val="1A1F36"/>
+                </a:solidFill>
+                <a:latin typeface="Calibri" pitchFamily="34" charset="0"/>
+                <a:ea typeface="Calibri" pitchFamily="34" charset="-122"/>
+                <a:cs typeface="Calibri" pitchFamily="34" charset="-120"/>
+              </a:rPr>
+              <a:t>Govern agents using the same IAM APIs that power human + NHI governance.</a:t>
+            </a:r>
+            <a:endParaRPr lang="en-US" sz="1200" dirty="0"/>
+          </a:p>
+          <a:p>
+            <a:pPr indent="0" marL="0">
+              <a:buNone/>
+            </a:pPr>
+            <a:r>
+              <a:rPr lang="en-US" sz="500" dirty="0">
+                <a:solidFill>
+                  <a:srgbClr val="000000"/>
+                </a:solidFill>
+                <a:latin typeface="Calibri" pitchFamily="34" charset="0"/>
+                <a:ea typeface="Calibri" pitchFamily="34" charset="-122"/>
+                <a:cs typeface="Calibri" pitchFamily="34" charset="-120"/>
+              </a:rPr>
+              <a:t> </a:t>
+            </a:r>
+            <a:endParaRPr lang="en-US" sz="1200" dirty="0"/>
+          </a:p>
+          <a:p>
+            <a:pPr indent="0" marL="0">
+              <a:buNone/>
+            </a:pPr>
+            <a:r>
+              <a:rPr lang="en-US" sz="1200" dirty="0">
+                <a:solidFill>
+                  <a:srgbClr val="1A1F36"/>
+                </a:solidFill>
+                <a:latin typeface="Calibri" pitchFamily="34" charset="0"/>
+                <a:ea typeface="Calibri" pitchFamily="34" charset="-122"/>
+                <a:cs typeface="Calibri" pitchFamily="34" charset="-120"/>
+              </a:rPr>
+              <a:t>Identity graph already connected to every app.</a:t>
+            </a:r>
+            <a:endParaRPr lang="en-US" sz="1200" dirty="0"/>
+          </a:p>
+          <a:p>
+            <a:pPr indent="0" marL="0">
+              <a:buNone/>
+            </a:pPr>
+            <a:r>
+              <a:rPr lang="en-US" sz="1200" dirty="0">
+                <a:solidFill>
+                  <a:srgbClr val="1A1F36"/>
+                </a:solidFill>
+                <a:latin typeface="Calibri" pitchFamily="34" charset="0"/>
+                <a:ea typeface="Calibri" pitchFamily="34" charset="-122"/>
+                <a:cs typeface="Calibri" pitchFamily="34" charset="-120"/>
+              </a:rPr>
+              <a:t>Access request flows already built.</a:t>
+            </a:r>
+            <a:endParaRPr lang="en-US" sz="1200" dirty="0"/>
+          </a:p>
+          <a:p>
+            <a:pPr indent="0" marL="0">
+              <a:buNone/>
+            </a:pPr>
+            <a:r>
+              <a:rPr lang="en-US" sz="1200" dirty="0">
+                <a:solidFill>
+                  <a:srgbClr val="1A1F36"/>
+                </a:solidFill>
+                <a:latin typeface="Calibri" pitchFamily="34" charset="0"/>
+                <a:ea typeface="Calibri" pitchFamily="34" charset="-122"/>
+                <a:cs typeface="Calibri" pitchFamily="34" charset="-120"/>
+              </a:rPr>
+              <a:t>Credential discovery already in motion (M2).</a:t>
+            </a:r>
+            <a:endParaRPr lang="en-US" sz="1200" dirty="0"/>
+          </a:p>
+          <a:p>
+            <a:pPr indent="0" marL="0">
+              <a:buNone/>
+            </a:pPr>
+            <a:r>
+              <a:rPr lang="en-US" sz="500" dirty="0">
+                <a:solidFill>
+                  <a:srgbClr val="000000"/>
+                </a:solidFill>
+                <a:latin typeface="Calibri" pitchFamily="34" charset="0"/>
+                <a:ea typeface="Calibri" pitchFamily="34" charset="-122"/>
+                <a:cs typeface="Calibri" pitchFamily="34" charset="-120"/>
+              </a:rPr>
+              <a:t> </a:t>
+            </a:r>
+            <a:endParaRPr lang="en-US" sz="1200" dirty="0"/>
+          </a:p>
+          <a:p>
+            <a:pPr indent="0" marL="0">
+              <a:buNone/>
+            </a:pPr>
+            <a:r>
+              <a:rPr lang="en-US" sz="1200" i="1" dirty="0">
+                <a:solidFill>
+                  <a:srgbClr val="64748B"/>
+                </a:solidFill>
+                <a:latin typeface="Calibri" pitchFamily="34" charset="0"/>
+                <a:ea typeface="Calibri" pitchFamily="34" charset="-122"/>
+                <a:cs typeface="Calibri" pitchFamily="34" charset="-120"/>
+              </a:rPr>
+              <a:t>Natural extension of what we already do for humans and NHIs.</a:t>
+            </a:r>
+            <a:endParaRPr lang="en-US" sz="1200" dirty="0"/>
+          </a:p>
+        </p:txBody>
+      </p:sp>
+      <p:sp>
+        <p:nvSpPr>
+          <p:cNvPr id="9" name="Shape 7"/>
+          <p:cNvSpPr/>
+          <p:nvPr/>
+        </p:nvSpPr>
+        <p:spPr>
+          <a:xfrm>
+            <a:off x="4453128" y="3063240"/>
+            <a:ext cx="502920" cy="0"/>
+          </a:xfrm>
+          <a:prstGeom prst="line">
+            <a:avLst/>
+          </a:prstGeom>
+          <a:noFill/>
+          <a:ln w="25400">
+            <a:solidFill>
+              <a:srgbClr val="0F1B3D"/>
+            </a:solidFill>
+            <a:prstDash val="solid"/>
+            <a:tailEnd type="triangle"/>
+          </a:ln>
+        </p:spPr>
+      </p:sp>
+      <p:sp>
+        <p:nvSpPr>
+          <p:cNvPr id="10" name="Shape 8"/>
+          <p:cNvSpPr/>
+          <p:nvPr/>
+        </p:nvSpPr>
+        <p:spPr>
+          <a:xfrm>
+            <a:off x="5029200" y="1691640"/>
+            <a:ext cx="3749040" cy="2743200"/>
+          </a:xfrm>
+          <a:prstGeom prst="rect">
+            <a:avLst/>
+          </a:prstGeom>
+          <a:solidFill>
+            <a:srgbClr val="E8EEFC"/>
+          </a:solidFill>
+          <a:ln w="12700">
+            <a:solidFill>
+              <a:srgbClr val="E8EEFC"/>
+            </a:solidFill>
+            <a:prstDash val="solid"/>
+          </a:ln>
+        </p:spPr>
+      </p:sp>
+      <p:sp>
+        <p:nvSpPr>
+          <p:cNvPr id="11" name="Shape 9"/>
+          <p:cNvSpPr/>
+          <p:nvPr/>
+        </p:nvSpPr>
+        <p:spPr>
+          <a:xfrm>
+            <a:off x="5029200" y="1691640"/>
+            <a:ext cx="73152" cy="2743200"/>
+          </a:xfrm>
+          <a:prstGeom prst="rect">
+            <a:avLst/>
+          </a:prstGeom>
+          <a:solidFill>
+            <a:srgbClr val="E11D48"/>
+          </a:solidFill>
+          <a:ln w="12700">
+            <a:solidFill>
+              <a:srgbClr val="E11D48"/>
+            </a:solidFill>
+            <a:prstDash val="solid"/>
+          </a:ln>
+        </p:spPr>
+      </p:sp>
+      <p:sp>
+        <p:nvSpPr>
+          <p:cNvPr id="12" name="Text 10"/>
+          <p:cNvSpPr/>
+          <p:nvPr/>
+        </p:nvSpPr>
+        <p:spPr>
+          <a:xfrm>
+            <a:off x="5212080" y="1783080"/>
+            <a:ext cx="3383280" cy="365760"/>
+          </a:xfrm>
+          <a:prstGeom prst="rect">
+            <a:avLst/>
+          </a:prstGeom>
+          <a:noFill/>
+          <a:ln/>
+        </p:spPr>
+        <p:txBody>
+          <a:bodyPr wrap="square" lIns="0" tIns="0" rIns="0" bIns="0" rtlCol="0" anchor="ctr"/>
+          <a:lstStyle/>
+          <a:p>
+            <a:pPr indent="0" marL="0">
+              <a:buNone/>
+            </a:pPr>
+            <a:r>
+              <a:rPr lang="en-US" sz="1500" b="1" dirty="0">
+                <a:solidFill>
+                  <a:srgbClr val="0F1B3D"/>
+                </a:solidFill>
+                <a:latin typeface="Georgia" pitchFamily="34" charset="0"/>
+                <a:ea typeface="Georgia" pitchFamily="34" charset="-122"/>
+                <a:cs typeface="Georgia" pitchFamily="34" charset="-120"/>
+              </a:rPr>
+              <a:t>What happened</a:t>
+            </a:r>
+            <a:endParaRPr lang="en-US" sz="1500" dirty="0"/>
+          </a:p>
+        </p:txBody>
+      </p:sp>
+      <p:sp>
+        <p:nvSpPr>
+          <p:cNvPr id="13" name="Text 11"/>
+          <p:cNvSpPr/>
+          <p:nvPr/>
+        </p:nvSpPr>
+        <p:spPr>
+          <a:xfrm>
+            <a:off x="5212080" y="2240280"/>
+            <a:ext cx="3383280" cy="2103120"/>
+          </a:xfrm>
+          <a:prstGeom prst="rect">
+            <a:avLst/>
+          </a:prstGeom>
+          <a:noFill/>
+          <a:ln/>
+        </p:spPr>
+        <p:txBody>
+          <a:bodyPr wrap="square" lIns="0" tIns="0" rIns="0" bIns="0" rtlCol="0" anchor="ctr"/>
+          <a:lstStyle/>
+          <a:p>
+            <a:pPr indent="0" marL="0">
+              <a:buNone/>
+            </a:pPr>
+            <a:r>
+              <a:rPr lang="en-US" sz="1200" b="1" dirty="0">
+                <a:solidFill>
+                  <a:srgbClr val="E11D48"/>
+                </a:solidFill>
+                <a:latin typeface="Calibri" pitchFamily="34" charset="0"/>
+                <a:ea typeface="Calibri" pitchFamily="34" charset="-122"/>
+                <a:cs typeface="Calibri" pitchFamily="34" charset="-120"/>
+              </a:rPr>
+              <a:t>Agent access doesn't map to the IAM API surface.</a:t>
+            </a:r>
+            <a:endParaRPr lang="en-US" sz="1200" dirty="0"/>
+          </a:p>
+          <a:p>
+            <a:pPr indent="0" marL="0">
+              <a:buNone/>
+            </a:pPr>
+            <a:r>
+              <a:rPr lang="en-US" sz="500" dirty="0">
+                <a:solidFill>
+                  <a:srgbClr val="000000"/>
+                </a:solidFill>
+                <a:latin typeface="Calibri" pitchFamily="34" charset="0"/>
+                <a:ea typeface="Calibri" pitchFamily="34" charset="-122"/>
+                <a:cs typeface="Calibri" pitchFamily="34" charset="-120"/>
+              </a:rPr>
+              <a:t> </a:t>
+            </a:r>
+            <a:endParaRPr lang="en-US" sz="1200" dirty="0"/>
+          </a:p>
+          <a:p>
+            <a:pPr indent="0" marL="0">
+              <a:buNone/>
+            </a:pPr>
+            <a:r>
+              <a:rPr lang="en-US" sz="1200" b="1" dirty="0">
+                <a:solidFill>
+                  <a:srgbClr val="1A1F36"/>
+                </a:solidFill>
+                <a:latin typeface="Calibri" pitchFamily="34" charset="0"/>
+                <a:ea typeface="Calibri" pitchFamily="34" charset="-122"/>
+                <a:cs typeface="Calibri" pitchFamily="34" charset="-120"/>
+              </a:rPr>
+              <a:t>Ephemeral:</a:t>
+            </a:r>
+            <a:pPr indent="0" marL="0">
+              <a:buNone/>
+            </a:pPr>
+            <a:r>
+              <a:rPr lang="en-US" sz="1200" dirty="0">
+                <a:solidFill>
+                  <a:srgbClr val="1A1F36"/>
+                </a:solidFill>
+                <a:latin typeface="Calibri" pitchFamily="34" charset="0"/>
+                <a:ea typeface="Calibri" pitchFamily="34" charset="-122"/>
+                <a:cs typeface="Calibri" pitchFamily="34" charset="-120"/>
+              </a:rPr>
+              <a:t> sessions spin up/down in seconds — no persistent identity to track.</a:t>
+            </a:r>
+            <a:endParaRPr lang="en-US" sz="1200" dirty="0"/>
+          </a:p>
+          <a:p>
+            <a:pPr indent="0" marL="0">
+              <a:buNone/>
+            </a:pPr>
+            <a:r>
+              <a:rPr lang="en-US" sz="500" dirty="0">
+                <a:solidFill>
+                  <a:srgbClr val="000000"/>
+                </a:solidFill>
+                <a:latin typeface="Calibri" pitchFamily="34" charset="0"/>
+                <a:ea typeface="Calibri" pitchFamily="34" charset="-122"/>
+                <a:cs typeface="Calibri" pitchFamily="34" charset="-120"/>
+              </a:rPr>
+              <a:t> </a:t>
+            </a:r>
+            <a:endParaRPr lang="en-US" sz="1200" dirty="0"/>
+          </a:p>
+          <a:p>
+            <a:pPr indent="0" marL="0">
+              <a:buNone/>
+            </a:pPr>
+            <a:r>
+              <a:rPr lang="en-US" sz="1200" b="1" dirty="0">
+                <a:solidFill>
+                  <a:srgbClr val="1A1F36"/>
+                </a:solidFill>
+                <a:latin typeface="Calibri" pitchFamily="34" charset="0"/>
+                <a:ea typeface="Calibri" pitchFamily="34" charset="-122"/>
+                <a:cs typeface="Calibri" pitchFamily="34" charset="-120"/>
+              </a:rPr>
+              <a:t>Intent-driven:</a:t>
+            </a:r>
+            <a:pPr indent="0" marL="0">
+              <a:buNone/>
+            </a:pPr>
+            <a:r>
+              <a:rPr lang="en-US" sz="1200" dirty="0">
+                <a:solidFill>
+                  <a:srgbClr val="1A1F36"/>
+                </a:solidFill>
+                <a:latin typeface="Calibri" pitchFamily="34" charset="0"/>
+                <a:ea typeface="Calibri" pitchFamily="34" charset="-122"/>
+                <a:cs typeface="Calibri" pitchFamily="34" charset="-120"/>
+              </a:rPr>
+              <a:t> access isn't pre-declared — it's determined at runtime based on task context.</a:t>
+            </a:r>
+            <a:endParaRPr lang="en-US" sz="1200" dirty="0"/>
+          </a:p>
+          <a:p>
+            <a:pPr indent="0" marL="0">
+              <a:buNone/>
+            </a:pPr>
+            <a:r>
+              <a:rPr lang="en-US" sz="500" dirty="0">
+                <a:solidFill>
+                  <a:srgbClr val="000000"/>
+                </a:solidFill>
+                <a:latin typeface="Calibri" pitchFamily="34" charset="0"/>
+                <a:ea typeface="Calibri" pitchFamily="34" charset="-122"/>
+                <a:cs typeface="Calibri" pitchFamily="34" charset="-120"/>
+              </a:rPr>
+              <a:t> </a:t>
+            </a:r>
+            <a:endParaRPr lang="en-US" sz="1200" dirty="0"/>
+          </a:p>
+          <a:p>
+            <a:pPr indent="0" marL="0">
+              <a:buNone/>
+            </a:pPr>
+            <a:r>
+              <a:rPr lang="en-US" sz="1200" b="1" dirty="0">
+                <a:solidFill>
+                  <a:srgbClr val="1A1F36"/>
+                </a:solidFill>
+                <a:latin typeface="Calibri" pitchFamily="34" charset="0"/>
+                <a:ea typeface="Calibri" pitchFamily="34" charset="-122"/>
+                <a:cs typeface="Calibri" pitchFamily="34" charset="-120"/>
+              </a:rPr>
+              <a:t>Multi-hop:</a:t>
+            </a:r>
+            <a:pPr indent="0" marL="0">
+              <a:buNone/>
+            </a:pPr>
+            <a:r>
+              <a:rPr lang="en-US" sz="1200" dirty="0">
+                <a:solidFill>
+                  <a:srgbClr val="1A1F36"/>
+                </a:solidFill>
+                <a:latin typeface="Calibri" pitchFamily="34" charset="0"/>
+                <a:ea typeface="Calibri" pitchFamily="34" charset="-122"/>
+                <a:cs typeface="Calibri" pitchFamily="34" charset="-120"/>
+              </a:rPr>
+              <a:t> one agent call chains through tools, MCP servers, and downstream apps — not a single entitlement check.</a:t>
+            </a:r>
+            <a:endParaRPr lang="en-US" sz="1200" dirty="0"/>
+          </a:p>
+        </p:txBody>
+      </p:sp>
+      <p:sp>
+        <p:nvSpPr>
+          <p:cNvPr id="14" name="Shape 12"/>
+          <p:cNvSpPr/>
+          <p:nvPr/>
+        </p:nvSpPr>
+        <p:spPr>
+          <a:xfrm>
+            <a:off x="457200" y="4617720"/>
+            <a:ext cx="8229600" cy="365760"/>
+          </a:xfrm>
+          <a:prstGeom prst="rect">
+            <a:avLst/>
+          </a:prstGeom>
+          <a:solidFill>
+            <a:srgbClr val="F59E0B">
+              <a:alpha val="25000"/>
+            </a:srgbClr>
+          </a:solidFill>
+          <a:ln w="12700">
+            <a:solidFill>
+              <a:srgbClr val="F59E0B"/>
+            </a:solidFill>
+            <a:prstDash val="solid"/>
+          </a:ln>
+        </p:spPr>
+      </p:sp>
+      <p:sp>
+        <p:nvSpPr>
+          <p:cNvPr id="15" name="Text 13"/>
+          <p:cNvSpPr/>
+          <p:nvPr/>
+        </p:nvSpPr>
+        <p:spPr>
+          <a:xfrm>
+            <a:off x="640080" y="4617720"/>
+            <a:ext cx="7863840" cy="365760"/>
+          </a:xfrm>
+          <a:prstGeom prst="rect">
+            <a:avLst/>
+          </a:prstGeom>
+          <a:noFill/>
+          <a:ln/>
+        </p:spPr>
+        <p:txBody>
+          <a:bodyPr wrap="square" lIns="0" tIns="0" rIns="0" bIns="0" rtlCol="0" anchor="ctr"/>
+          <a:lstStyle/>
+          <a:p>
+            <a:pPr indent="0" marL="0">
+              <a:buNone/>
+            </a:pPr>
+            <a:r>
+              <a:rPr lang="en-US" sz="1200" b="1" i="1" dirty="0">
+                <a:solidFill>
+                  <a:srgbClr val="0F1B3D"/>
+                </a:solidFill>
+                <a:latin typeface="Calibri" pitchFamily="34" charset="0"/>
+                <a:ea typeface="Calibri" pitchFamily="34" charset="-122"/>
+                <a:cs typeface="Calibri" pitchFamily="34" charset="-120"/>
+              </a:rPr>
+              <a:t>This is a useful discovery. We now know exactly what the next layer must do.</a:t>
+            </a:r>
+            <a:endParaRPr lang="en-US" sz="1200" dirty="0"/>
+          </a:p>
+        </p:txBody>
+      </p:sp>
+      <p:sp>
+        <p:nvSpPr>
+          <p:cNvPr id="16" name="Text 14"/>
+          <p:cNvSpPr/>
+          <p:nvPr/>
+        </p:nvSpPr>
+        <p:spPr>
+          <a:xfrm>
+            <a:off x="8321040" y="4823460"/>
+            <a:ext cx="457200" cy="228600"/>
+          </a:xfrm>
+          <a:prstGeom prst="rect">
+            <a:avLst/>
+          </a:prstGeom>
+          <a:noFill/>
+          <a:ln/>
+        </p:spPr>
+        <p:txBody>
+          <a:bodyPr wrap="square" lIns="0" tIns="0" rIns="0" bIns="0" rtlCol="0" anchor="ctr"/>
+          <a:lstStyle/>
+          <a:p>
+            <a:pPr algn="r" indent="0" marL="0">
+              <a:buNone/>
+            </a:pPr>
+            <a:r>
+              <a:rPr lang="en-US" sz="900" dirty="0">
+                <a:solidFill>
+                  <a:srgbClr val="64748B"/>
+                </a:solidFill>
+                <a:latin typeface="Calibri" pitchFamily="34" charset="0"/>
+                <a:ea typeface="Calibri" pitchFamily="34" charset="-122"/>
+                <a:cs typeface="Calibri" pitchFamily="34" charset="-120"/>
+              </a:rPr>
+              <a:t>5 / 9</a:t>
+            </a:r>
+            <a:endParaRPr lang="en-US" sz="900" dirty="0"/>
+          </a:p>
+        </p:txBody>
+      </p:sp>
+    </p:spTree>
+  </p:cSld>
+  <p:clrMapOvr>
+    <a:masterClrMapping/>
+  </p:clrMapOvr>
+</p:sld>
+</file>
+
+<file path=ppt/slides/slide6.xml><?xml version="1.0" encoding="utf-8"?>
+<p:sld xmlns:a="http://schemas.openxmlformats.org/drawingml/2006/main" xmlns:r="http://schemas.openxmlformats.org/officeDocument/2006/relationships" xmlns:p="http://schemas.openxmlformats.org/presentationml/2006/main">
+  <p:cSld name="Slide 6">
     <p:bg>
       <p:bgPr>
         <a:solidFill>
@@ -5155,414 +5454,6 @@
             <a:avLst/>
           </a:prstGeom>
           <a:solidFill>
-            <a:srgbClr val="F59E0B"/>
-          </a:solidFill>
-          <a:ln w="12700">
-            <a:solidFill>
-              <a:srgbClr val="F59E0B"/>
-            </a:solidFill>
-            <a:prstDash val="solid"/>
-          </a:ln>
-        </p:spPr>
-      </p:sp>
-      <p:sp>
-        <p:nvSpPr>
-          <p:cNvPr id="3" name="Text 1"/>
-          <p:cNvSpPr/>
-          <p:nvPr/>
-        </p:nvSpPr>
-        <p:spPr>
-          <a:xfrm>
-            <a:off x="457200" y="365760"/>
-            <a:ext cx="7315200" cy="274320"/>
-          </a:xfrm>
-          <a:prstGeom prst="rect">
-            <a:avLst/>
-          </a:prstGeom>
-          <a:noFill/>
-          <a:ln/>
-        </p:spPr>
-        <p:txBody>
-          <a:bodyPr wrap="square" lIns="0" tIns="0" rIns="0" bIns="0" rtlCol="0" anchor="ctr"/>
-          <a:lstStyle/>
-          <a:p>
-            <a:pPr indent="0" marL="0">
-              <a:buNone/>
-            </a:pPr>
-            <a:r>
-              <a:rPr lang="en-US" sz="1100" b="1" spc="400" kern="0" dirty="0">
-                <a:solidFill>
-                  <a:srgbClr val="02C39A"/>
-                </a:solidFill>
-                <a:latin typeface="Calibri" pitchFamily="34" charset="0"/>
-                <a:ea typeface="Calibri" pitchFamily="34" charset="-122"/>
-                <a:cs typeface="Calibri" pitchFamily="34" charset="-120"/>
-              </a:rPr>
-              <a:t>04 · The lesson</a:t>
-            </a:r>
-            <a:endParaRPr lang="en-US" sz="1100" dirty="0"/>
-          </a:p>
-        </p:txBody>
-      </p:sp>
-      <p:sp>
-        <p:nvSpPr>
-          <p:cNvPr id="4" name="Text 2"/>
-          <p:cNvSpPr/>
-          <p:nvPr/>
-        </p:nvSpPr>
-        <p:spPr>
-          <a:xfrm>
-            <a:off x="365760" y="640080"/>
-            <a:ext cx="1097280" cy="1371600"/>
-          </a:xfrm>
-          <a:prstGeom prst="rect">
-            <a:avLst/>
-          </a:prstGeom>
-          <a:noFill/>
-          <a:ln/>
-        </p:spPr>
-        <p:txBody>
-          <a:bodyPr wrap="square" lIns="0" tIns="0" rIns="0" bIns="0" rtlCol="0" anchor="ctr"/>
-          <a:lstStyle/>
-          <a:p>
-            <a:pPr indent="0" marL="0">
-              <a:buNone/>
-            </a:pPr>
-            <a:r>
-              <a:rPr lang="en-US" sz="11000" b="1" dirty="0">
-                <a:solidFill>
-                  <a:srgbClr val="F59E0B"/>
-                </a:solidFill>
-                <a:latin typeface="Georgia" pitchFamily="34" charset="0"/>
-                <a:ea typeface="Georgia" pitchFamily="34" charset="-122"/>
-                <a:cs typeface="Georgia" pitchFamily="34" charset="-120"/>
-              </a:rPr>
-              <a:t>“</a:t>
-            </a:r>
-            <a:endParaRPr lang="en-US" sz="11000" dirty="0"/>
-          </a:p>
-        </p:txBody>
-      </p:sp>
-      <p:sp>
-        <p:nvSpPr>
-          <p:cNvPr id="5" name="Text 3"/>
-          <p:cNvSpPr/>
-          <p:nvPr/>
-        </p:nvSpPr>
-        <p:spPr>
-          <a:xfrm>
-            <a:off x="1371600" y="1097280"/>
-            <a:ext cx="7315200" cy="1554480"/>
-          </a:xfrm>
-          <a:prstGeom prst="rect">
-            <a:avLst/>
-          </a:prstGeom>
-          <a:noFill/>
-          <a:ln/>
-        </p:spPr>
-        <p:txBody>
-          <a:bodyPr wrap="square" lIns="0" tIns="0" rIns="0" bIns="0" rtlCol="0" anchor="ctr"/>
-          <a:lstStyle/>
-          <a:p>
-            <a:pPr indent="0" marL="0">
-              <a:buNone/>
-            </a:pPr>
-            <a:r>
-              <a:rPr lang="en-US" sz="3400" b="1" dirty="0">
-                <a:solidFill>
-                  <a:srgbClr val="FFFFFF"/>
-                </a:solidFill>
-                <a:latin typeface="Georgia" pitchFamily="34" charset="0"/>
-                <a:ea typeface="Georgia" pitchFamily="34" charset="-122"/>
-                <a:cs typeface="Georgia" pitchFamily="34" charset="-120"/>
-              </a:rPr>
-              <a:t>We counted on the IdPs to identify agents.</a:t>
-            </a:r>
-            <a:endParaRPr lang="en-US" sz="3400" dirty="0"/>
-          </a:p>
-          <a:p>
-            <a:pPr indent="0" marL="0">
-              <a:buNone/>
-            </a:pPr>
-            <a:r>
-              <a:rPr lang="en-US" sz="3400" b="1" dirty="0">
-                <a:solidFill>
-                  <a:srgbClr val="FFFFFF"/>
-                </a:solidFill>
-                <a:latin typeface="Georgia" pitchFamily="34" charset="0"/>
-                <a:ea typeface="Georgia" pitchFamily="34" charset="-122"/>
-                <a:cs typeface="Georgia" pitchFamily="34" charset="-120"/>
-              </a:rPr>
-              <a:t>It didn't work.</a:t>
-            </a:r>
-            <a:endParaRPr lang="en-US" sz="3400" dirty="0"/>
-          </a:p>
-        </p:txBody>
-      </p:sp>
-      <p:sp>
-        <p:nvSpPr>
-          <p:cNvPr id="6" name="Text 4"/>
-          <p:cNvSpPr/>
-          <p:nvPr/>
-        </p:nvSpPr>
-        <p:spPr>
-          <a:xfrm>
-            <a:off x="1371600" y="2788920"/>
-            <a:ext cx="7315200" cy="640080"/>
-          </a:xfrm>
-          <a:prstGeom prst="rect">
-            <a:avLst/>
-          </a:prstGeom>
-          <a:noFill/>
-          <a:ln/>
-        </p:spPr>
-        <p:txBody>
-          <a:bodyPr wrap="square" lIns="0" tIns="0" rIns="0" bIns="0" rtlCol="0" anchor="ctr"/>
-          <a:lstStyle/>
-          <a:p>
-            <a:pPr indent="0" marL="0">
-              <a:buNone/>
-            </a:pPr>
-            <a:r>
-              <a:rPr lang="en-US" sz="1400" i="1" dirty="0">
-                <a:solidFill>
-                  <a:srgbClr val="E8EEFC"/>
-                </a:solidFill>
-                <a:latin typeface="Calibri" pitchFamily="34" charset="0"/>
-                <a:ea typeface="Calibri" pitchFamily="34" charset="-122"/>
-                <a:cs typeface="Calibri" pitchFamily="34" charset="-120"/>
-              </a:rPr>
-              <a:t>Agent access is ephemeral, intent-driven, multi-hop through tools and MCP. The IAM API surface can't see that shape.</a:t>
-            </a:r>
-            <a:endParaRPr lang="en-US" sz="1400" dirty="0"/>
-          </a:p>
-        </p:txBody>
-      </p:sp>
-      <p:sp>
-        <p:nvSpPr>
-          <p:cNvPr id="7" name="Shape 5"/>
-          <p:cNvSpPr/>
-          <p:nvPr/>
-        </p:nvSpPr>
-        <p:spPr>
-          <a:xfrm>
-            <a:off x="457200" y="3611880"/>
-            <a:ext cx="8229600" cy="777240"/>
-          </a:xfrm>
-          <a:prstGeom prst="rect">
-            <a:avLst/>
-          </a:prstGeom>
-          <a:solidFill>
-            <a:srgbClr val="02C39A">
-              <a:alpha val="25000"/>
-            </a:srgbClr>
-          </a:solidFill>
-          <a:ln w="12700">
-            <a:solidFill>
-              <a:srgbClr val="02C39A"/>
-            </a:solidFill>
-            <a:prstDash val="solid"/>
-          </a:ln>
-        </p:spPr>
-      </p:sp>
-      <p:sp>
-        <p:nvSpPr>
-          <p:cNvPr id="8" name="Text 6"/>
-          <p:cNvSpPr/>
-          <p:nvPr/>
-        </p:nvSpPr>
-        <p:spPr>
-          <a:xfrm>
-            <a:off x="685800" y="3611880"/>
-            <a:ext cx="7772400" cy="777240"/>
-          </a:xfrm>
-          <a:prstGeom prst="rect">
-            <a:avLst/>
-          </a:prstGeom>
-          <a:noFill/>
-          <a:ln/>
-        </p:spPr>
-        <p:txBody>
-          <a:bodyPr wrap="square" lIns="0" tIns="0" rIns="0" bIns="0" rtlCol="0" anchor="ctr"/>
-          <a:lstStyle/>
-          <a:p>
-            <a:pPr indent="0" marL="0">
-              <a:buNone/>
-            </a:pPr>
-            <a:r>
-              <a:rPr lang="en-US" sz="1100" b="1" spc="300" kern="0" dirty="0">
-                <a:solidFill>
-                  <a:srgbClr val="02C39A"/>
-                </a:solidFill>
-                <a:latin typeface="Calibri" pitchFamily="34" charset="0"/>
-                <a:ea typeface="Calibri" pitchFamily="34" charset="-122"/>
-                <a:cs typeface="Calibri" pitchFamily="34" charset="-120"/>
-              </a:rPr>
-              <a:t>THE PIVOT  ·  </a:t>
-            </a:r>
-            <a:pPr indent="0" marL="0">
-              <a:buNone/>
-            </a:pPr>
-            <a:r>
-              <a:rPr lang="en-US" sz="1400" b="1" dirty="0">
-                <a:solidFill>
-                  <a:srgbClr val="FFFFFF"/>
-                </a:solidFill>
-                <a:latin typeface="Calibri" pitchFamily="34" charset="0"/>
-                <a:ea typeface="Calibri" pitchFamily="34" charset="-122"/>
-                <a:cs typeface="Calibri" pitchFamily="34" charset="-120"/>
-              </a:rPr>
-              <a:t>MCP Gateway. Govern at the protocol layer — one enforcement point between every agent and every tool.</a:t>
-            </a:r>
-            <a:pPr indent="0" marL="0">
-              <a:buNone/>
-            </a:pPr>
-            <a:endParaRPr lang="en-US" sz="1100" dirty="0"/>
-          </a:p>
-          <a:p>
-            <a:pPr indent="0" marL="0">
-              <a:buNone/>
-            </a:pPr>
-            <a:r>
-              <a:rPr lang="en-US" sz="1200" i="1" dirty="0">
-                <a:solidFill>
-                  <a:srgbClr val="E8EEFC"/>
-                </a:solidFill>
-                <a:latin typeface="Calibri" pitchFamily="34" charset="0"/>
-                <a:ea typeface="Calibri" pitchFamily="34" charset="-122"/>
-                <a:cs typeface="Calibri" pitchFamily="34" charset="-120"/>
-              </a:rPr>
-              <a:t>Sarit + Amir Ben Ami leading architecture. Cycle 79 AI priority.</a:t>
-            </a:r>
-            <a:endParaRPr lang="en-US" sz="1100" dirty="0"/>
-          </a:p>
-        </p:txBody>
-      </p:sp>
-      <p:sp>
-        <p:nvSpPr>
-          <p:cNvPr id="9" name="Text 7"/>
-          <p:cNvSpPr/>
-          <p:nvPr/>
-        </p:nvSpPr>
-        <p:spPr>
-          <a:xfrm>
-            <a:off x="457200" y="4526280"/>
-            <a:ext cx="8229600" cy="365760"/>
-          </a:xfrm>
-          <a:prstGeom prst="rect">
-            <a:avLst/>
-          </a:prstGeom>
-          <a:noFill/>
-          <a:ln/>
-        </p:spPr>
-        <p:txBody>
-          <a:bodyPr wrap="square" lIns="0" tIns="0" rIns="0" bIns="0" rtlCol="0" anchor="ctr"/>
-          <a:lstStyle/>
-          <a:p>
-            <a:pPr algn="ctr" indent="0" marL="0">
-              <a:buNone/>
-            </a:pPr>
-            <a:r>
-              <a:rPr lang="en-US" sz="1000" i="1" dirty="0">
-                <a:solidFill>
-                  <a:srgbClr val="E8EEFC"/>
-                </a:solidFill>
-                <a:latin typeface="Calibri" pitchFamily="34" charset="0"/>
-                <a:ea typeface="Calibri" pitchFamily="34" charset="-122"/>
-                <a:cs typeface="Calibri" pitchFamily="34" charset="-120"/>
-              </a:rPr>
-              <a:t>Market tailwind: Saviynt, Token Security, Astrix all converging on MCP-layer governance. We're aligned with where the category is going.</a:t>
-            </a:r>
-            <a:endParaRPr lang="en-US" sz="1000" dirty="0"/>
-          </a:p>
-        </p:txBody>
-      </p:sp>
-      <p:sp>
-        <p:nvSpPr>
-          <p:cNvPr id="10" name="Text 8"/>
-          <p:cNvSpPr/>
-          <p:nvPr/>
-        </p:nvSpPr>
-        <p:spPr>
-          <a:xfrm>
-            <a:off x="8321040" y="4823460"/>
-            <a:ext cx="457200" cy="228600"/>
-          </a:xfrm>
-          <a:prstGeom prst="rect">
-            <a:avLst/>
-          </a:prstGeom>
-          <a:noFill/>
-          <a:ln/>
-        </p:spPr>
-        <p:txBody>
-          <a:bodyPr wrap="square" lIns="0" tIns="0" rIns="0" bIns="0" rtlCol="0" anchor="ctr"/>
-          <a:lstStyle/>
-          <a:p>
-            <a:pPr algn="r" indent="0" marL="0">
-              <a:buNone/>
-            </a:pPr>
-            <a:r>
-              <a:rPr lang="en-US" sz="900" dirty="0">
-                <a:solidFill>
-                  <a:srgbClr val="E8EEFC"/>
-                </a:solidFill>
-                <a:latin typeface="Calibri" pitchFamily="34" charset="0"/>
-                <a:ea typeface="Calibri" pitchFamily="34" charset="-122"/>
-                <a:cs typeface="Calibri" pitchFamily="34" charset="-120"/>
-              </a:rPr>
-              <a:t>5 / 8</a:t>
-            </a:r>
-            <a:endParaRPr lang="en-US" sz="900" dirty="0"/>
-          </a:p>
-        </p:txBody>
-      </p:sp>
-    </p:spTree>
-  </p:cSld>
-  <p:clrMapOvr>
-    <a:masterClrMapping/>
-  </p:clrMapOvr>
-</p:sld>
-</file>
-
-<file path=ppt/slides/slide6.xml><?xml version="1.0" encoding="utf-8"?>
-<p:sld xmlns:a="http://schemas.openxmlformats.org/drawingml/2006/main" xmlns:r="http://schemas.openxmlformats.org/officeDocument/2006/relationships" xmlns:p="http://schemas.openxmlformats.org/presentationml/2006/main">
-  <p:cSld name="Slide 6">
-    <p:bg>
-      <p:bgPr>
-        <a:solidFill>
-          <a:srgbClr val="FFFFFF"/>
-        </a:solidFill>
-      </p:bgPr>
-    </p:bg>
-    <p:spTree>
-      <p:nvGrpSpPr>
-        <p:cNvPr id="1" name=""/>
-        <p:cNvGrpSpPr/>
-        <p:nvPr/>
-      </p:nvGrpSpPr>
-      <p:grpSpPr>
-        <a:xfrm>
-          <a:off x="0" y="0"/>
-          <a:ext cx="0" cy="0"/>
-          <a:chOff x="0" y="0"/>
-          <a:chExt cx="0" cy="0"/>
-        </a:xfrm>
-      </p:grpSpPr>
-      <p:sp>
-        <p:nvSpPr>
-          <p:cNvPr id="2" name="Shape 0"/>
-          <p:cNvSpPr/>
-          <p:nvPr/>
-        </p:nvSpPr>
-        <p:spPr>
-          <a:xfrm>
-            <a:off x="0" y="0"/>
-            <a:ext cx="109728" cy="5143500"/>
-          </a:xfrm>
-          <a:prstGeom prst="rect">
-            <a:avLst/>
-          </a:prstGeom>
-          <a:solidFill>
             <a:srgbClr val="02C39A"/>
           </a:solidFill>
           <a:ln w="12700">
@@ -5600,13 +5491,13 @@
             <a:r>
               <a:rPr lang="en-US" sz="1100" b="1" spc="400" kern="0" dirty="0">
                 <a:solidFill>
-                  <a:srgbClr val="64748B"/>
-                </a:solidFill>
-                <a:latin typeface="Calibri" pitchFamily="34" charset="0"/>
-                <a:ea typeface="Calibri" pitchFamily="34" charset="-122"/>
-                <a:cs typeface="Calibri" pitchFamily="34" charset="-120"/>
-              </a:rPr>
-              <a:t>05 · P0 scope — the demo target</a:t>
+                  <a:srgbClr val="02C39A"/>
+                </a:solidFill>
+                <a:latin typeface="Calibri" pitchFamily="34" charset="0"/>
+                <a:ea typeface="Calibri" pitchFamily="34" charset="-122"/>
+                <a:cs typeface="Calibri" pitchFamily="34" charset="-120"/>
+              </a:rPr>
+              <a:t>05 · The new approach</a:t>
             </a:r>
             <a:endParaRPr lang="en-US" sz="1100" dirty="0"/>
           </a:p>
@@ -5639,13 +5530,13 @@
             <a:r>
               <a:rPr lang="en-US" sz="3400" b="1" dirty="0">
                 <a:solidFill>
-                  <a:srgbClr val="1A1F36"/>
+                  <a:srgbClr val="FFFFFF"/>
                 </a:solidFill>
                 <a:latin typeface="Georgia" pitchFamily="34" charset="0"/>
                 <a:ea typeface="Georgia" pitchFamily="34" charset="-122"/>
                 <a:cs typeface="Georgia" pitchFamily="34" charset="-120"/>
               </a:rPr>
-              <a:t>What we're building first.</a:t>
+              <a:t>MCP Gateway.</a:t>
             </a:r>
             <a:endParaRPr lang="en-US" sz="3400" dirty="0"/>
           </a:p>
@@ -5659,34 +5550,34 @@
         </p:nvSpPr>
         <p:spPr>
           <a:xfrm>
-            <a:off x="457200" y="1554480"/>
-            <a:ext cx="8229600" cy="365760"/>
-          </a:xfrm>
-          <a:prstGeom prst="rect">
-            <a:avLst/>
-          </a:prstGeom>
-          <a:noFill/>
-          <a:ln/>
-        </p:spPr>
-        <p:txBody>
-          <a:bodyPr wrap="square" lIns="0" tIns="0" rIns="0" bIns="0" rtlCol="0" anchor="ctr"/>
-          <a:lstStyle/>
-          <a:p>
-            <a:pPr indent="0" marL="0">
-              <a:buNone/>
-            </a:pPr>
-            <a:r>
-              <a:rPr lang="en-US" sz="1200" i="1" dirty="0">
-                <a:solidFill>
-                  <a:srgbClr val="64748B"/>
-                </a:solidFill>
-                <a:latin typeface="Calibri" pitchFamily="34" charset="0"/>
-                <a:ea typeface="Calibri" pitchFamily="34" charset="-122"/>
-                <a:cs typeface="Calibri" pitchFamily="34" charset="-120"/>
-              </a:rPr>
-              <a:t>From Sarit's architecture session. Some pieces may already exist in M1/M2 — we'll connect the dots.</a:t>
-            </a:r>
-            <a:endParaRPr lang="en-US" sz="1200" dirty="0"/>
+            <a:off x="457200" y="1600200"/>
+            <a:ext cx="8229600" cy="457200"/>
+          </a:xfrm>
+          <a:prstGeom prst="rect">
+            <a:avLst/>
+          </a:prstGeom>
+          <a:noFill/>
+          <a:ln/>
+        </p:spPr>
+        <p:txBody>
+          <a:bodyPr wrap="square" lIns="0" tIns="0" rIns="0" bIns="0" rtlCol="0" anchor="ctr"/>
+          <a:lstStyle/>
+          <a:p>
+            <a:pPr indent="0" marL="0">
+              <a:buNone/>
+            </a:pPr>
+            <a:r>
+              <a:rPr lang="en-US" sz="1500" i="1" dirty="0">
+                <a:solidFill>
+                  <a:srgbClr val="E8EEFC"/>
+                </a:solidFill>
+                <a:latin typeface="Calibri" pitchFamily="34" charset="0"/>
+                <a:ea typeface="Calibri" pitchFamily="34" charset="-122"/>
+                <a:cs typeface="Calibri" pitchFamily="34" charset="-120"/>
+              </a:rPr>
+              <a:t>Govern agents at the protocol layer — one enforcement point between every agent and every tool.</a:t>
+            </a:r>
+            <a:endParaRPr lang="en-US" sz="1500" dirty="0"/>
           </a:p>
         </p:txBody>
       </p:sp>
@@ -5698,18 +5589,20 @@
         </p:nvSpPr>
         <p:spPr>
           <a:xfrm>
-            <a:off x="365760" y="2011680"/>
-            <a:ext cx="2743200" cy="2468880"/>
-          </a:xfrm>
-          <a:prstGeom prst="rect">
-            <a:avLst/>
+            <a:off x="457200" y="2331720"/>
+            <a:ext cx="1828800" cy="1188720"/>
+          </a:xfrm>
+          <a:prstGeom prst="roundRect">
+            <a:avLst>
+              <a:gd name="adj" fmla="val 6154"/>
+            </a:avLst>
           </a:prstGeom>
           <a:solidFill>
-            <a:srgbClr val="FFFFFF"/>
+            <a:srgbClr val="1A2545"/>
           </a:solidFill>
           <a:ln w="12700">
             <a:solidFill>
-              <a:srgbClr val="CBD5E1"/>
+              <a:srgbClr val="E8EEFC"/>
             </a:solidFill>
             <a:prstDash val="solid"/>
           </a:ln>
@@ -5717,22 +5610,143 @@
       </p:sp>
       <p:sp>
         <p:nvSpPr>
-          <p:cNvPr id="7" name="Shape 5"/>
-          <p:cNvSpPr/>
-          <p:nvPr/>
-        </p:nvSpPr>
-        <p:spPr>
-          <a:xfrm>
-            <a:off x="365760" y="2011680"/>
-            <a:ext cx="2743200" cy="73152"/>
-          </a:xfrm>
-          <a:prstGeom prst="rect">
-            <a:avLst/>
+          <p:cNvPr id="7" name="Text 5"/>
+          <p:cNvSpPr/>
+          <p:nvPr/>
+        </p:nvSpPr>
+        <p:spPr>
+          <a:xfrm>
+            <a:off x="457200" y="2423160"/>
+            <a:ext cx="1828800" cy="320040"/>
+          </a:xfrm>
+          <a:prstGeom prst="rect">
+            <a:avLst/>
+          </a:prstGeom>
+          <a:noFill/>
+          <a:ln/>
+        </p:spPr>
+        <p:txBody>
+          <a:bodyPr wrap="square" lIns="0" tIns="0" rIns="0" bIns="0" rtlCol="0" anchor="ctr"/>
+          <a:lstStyle/>
+          <a:p>
+            <a:pPr algn="ctr" indent="0" marL="0">
+              <a:buNone/>
+            </a:pPr>
+            <a:r>
+              <a:rPr lang="en-US" sz="1000" b="1" spc="300" kern="0" dirty="0">
+                <a:solidFill>
+                  <a:srgbClr val="64748B"/>
+                </a:solidFill>
+                <a:latin typeface="Calibri" pitchFamily="34" charset="0"/>
+                <a:ea typeface="Calibri" pitchFamily="34" charset="-122"/>
+                <a:cs typeface="Calibri" pitchFamily="34" charset="-120"/>
+              </a:rPr>
+              <a:t>AGENT</a:t>
+            </a:r>
+            <a:endParaRPr lang="en-US" sz="1000" dirty="0"/>
+          </a:p>
+        </p:txBody>
+      </p:sp>
+      <p:sp>
+        <p:nvSpPr>
+          <p:cNvPr id="8" name="Text 6"/>
+          <p:cNvSpPr/>
+          <p:nvPr/>
+        </p:nvSpPr>
+        <p:spPr>
+          <a:xfrm>
+            <a:off x="457200" y="2788920"/>
+            <a:ext cx="1828800" cy="685800"/>
+          </a:xfrm>
+          <a:prstGeom prst="rect">
+            <a:avLst/>
+          </a:prstGeom>
+          <a:noFill/>
+          <a:ln/>
+        </p:spPr>
+        <p:txBody>
+          <a:bodyPr wrap="square" lIns="0" tIns="0" rIns="0" bIns="0" rtlCol="0" anchor="ctr"/>
+          <a:lstStyle/>
+          <a:p>
+            <a:pPr algn="ctr" indent="0" marL="0">
+              <a:buNone/>
+            </a:pPr>
+            <a:r>
+              <a:rPr lang="en-US" sz="1200" dirty="0">
+                <a:solidFill>
+                  <a:srgbClr val="FFFFFF"/>
+                </a:solidFill>
+                <a:latin typeface="Calibri" pitchFamily="34" charset="0"/>
+                <a:ea typeface="Calibri" pitchFamily="34" charset="-122"/>
+                <a:cs typeface="Calibri" pitchFamily="34" charset="-120"/>
+              </a:rPr>
+              <a:t>ChatGPT · Claude</a:t>
+            </a:r>
+            <a:endParaRPr lang="en-US" sz="1200" dirty="0"/>
+          </a:p>
+          <a:p>
+            <a:pPr algn="ctr" indent="0" marL="0">
+              <a:buNone/>
+            </a:pPr>
+            <a:r>
+              <a:rPr lang="en-US" sz="1200" dirty="0">
+                <a:solidFill>
+                  <a:srgbClr val="FFFFFF"/>
+                </a:solidFill>
+                <a:latin typeface="Calibri" pitchFamily="34" charset="0"/>
+                <a:ea typeface="Calibri" pitchFamily="34" charset="-122"/>
+                <a:cs typeface="Calibri" pitchFamily="34" charset="-120"/>
+              </a:rPr>
+              <a:t>Cursor · n8n</a:t>
+            </a:r>
+            <a:endParaRPr lang="en-US" sz="1200" dirty="0"/>
+          </a:p>
+        </p:txBody>
+      </p:sp>
+      <p:sp>
+        <p:nvSpPr>
+          <p:cNvPr id="9" name="Shape 7"/>
+          <p:cNvSpPr/>
+          <p:nvPr/>
+        </p:nvSpPr>
+        <p:spPr>
+          <a:xfrm>
+            <a:off x="2331720" y="2926080"/>
+            <a:ext cx="685800" cy="0"/>
+          </a:xfrm>
+          <a:prstGeom prst="line">
+            <a:avLst/>
+          </a:prstGeom>
+          <a:noFill/>
+          <a:ln w="25400">
+            <a:solidFill>
+              <a:srgbClr val="02C39A"/>
+            </a:solidFill>
+            <a:prstDash val="solid"/>
+            <a:tailEnd type="triangle"/>
+          </a:ln>
+        </p:spPr>
+      </p:sp>
+      <p:sp>
+        <p:nvSpPr>
+          <p:cNvPr id="10" name="Shape 8"/>
+          <p:cNvSpPr/>
+          <p:nvPr/>
+        </p:nvSpPr>
+        <p:spPr>
+          <a:xfrm>
+            <a:off x="3108960" y="2194560"/>
+            <a:ext cx="2926080" cy="1463040"/>
+          </a:xfrm>
+          <a:prstGeom prst="roundRect">
+            <a:avLst>
+              <a:gd name="adj" fmla="val 6250"/>
+            </a:avLst>
           </a:prstGeom>
           <a:solidFill>
-            <a:srgbClr val="02C39A"/>
+            <a:srgbClr val="0F1B3D"/>
           </a:solidFill>
-          <a:ln w="12700">
+          <a:ln w="38100">
             <a:solidFill>
               <a:srgbClr val="02C39A"/>
             </a:solidFill>
@@ -5742,30 +5756,30 @@
       </p:sp>
       <p:sp>
         <p:nvSpPr>
-          <p:cNvPr id="8" name="Text 6"/>
-          <p:cNvSpPr/>
-          <p:nvPr/>
-        </p:nvSpPr>
-        <p:spPr>
-          <a:xfrm>
-            <a:off x="640080" y="2194560"/>
-            <a:ext cx="914400" cy="320040"/>
-          </a:xfrm>
-          <a:prstGeom prst="rect">
-            <a:avLst/>
-          </a:prstGeom>
-          <a:noFill/>
-          <a:ln/>
-        </p:spPr>
-        <p:txBody>
-          <a:bodyPr wrap="square" lIns="0" tIns="0" rIns="0" bIns="0" rtlCol="0" anchor="ctr"/>
-          <a:lstStyle/>
-          <a:p>
-            <a:pPr indent="0" marL="0">
-              <a:buNone/>
-            </a:pPr>
-            <a:r>
-              <a:rPr lang="en-US" sz="1100" b="1" spc="300" kern="0" dirty="0">
+          <p:cNvPr id="11" name="Text 9"/>
+          <p:cNvSpPr/>
+          <p:nvPr/>
+        </p:nvSpPr>
+        <p:spPr>
+          <a:xfrm>
+            <a:off x="3108960" y="2331720"/>
+            <a:ext cx="2926080" cy="365760"/>
+          </a:xfrm>
+          <a:prstGeom prst="rect">
+            <a:avLst/>
+          </a:prstGeom>
+          <a:noFill/>
+          <a:ln/>
+        </p:spPr>
+        <p:txBody>
+          <a:bodyPr wrap="square" lIns="0" tIns="0" rIns="0" bIns="0" rtlCol="0" anchor="ctr"/>
+          <a:lstStyle/>
+          <a:p>
+            <a:pPr algn="ctr" indent="0" marL="0">
+              <a:buNone/>
+            </a:pPr>
+            <a:r>
+              <a:rPr lang="en-US" sz="1300" b="1" spc="400" kern="0" dirty="0">
                 <a:solidFill>
                   <a:srgbClr val="02C39A"/>
                 </a:solidFill>
@@ -5773,127 +5787,85 @@
                 <a:ea typeface="Calibri" pitchFamily="34" charset="-122"/>
                 <a:cs typeface="Calibri" pitchFamily="34" charset="-120"/>
               </a:rPr>
-              <a:t>01</a:t>
-            </a:r>
-            <a:endParaRPr lang="en-US" sz="1100" dirty="0"/>
-          </a:p>
-        </p:txBody>
-      </p:sp>
-      <p:sp>
-        <p:nvSpPr>
-          <p:cNvPr id="9" name="Text 7"/>
-          <p:cNvSpPr/>
-          <p:nvPr/>
-        </p:nvSpPr>
-        <p:spPr>
-          <a:xfrm>
-            <a:off x="640080" y="2514600"/>
-            <a:ext cx="2194560" cy="457200"/>
-          </a:xfrm>
-          <a:prstGeom prst="rect">
-            <a:avLst/>
-          </a:prstGeom>
-          <a:noFill/>
-          <a:ln/>
-        </p:spPr>
-        <p:txBody>
-          <a:bodyPr wrap="square" lIns="0" tIns="0" rIns="0" bIns="0" rtlCol="0" anchor="ctr"/>
-          <a:lstStyle/>
-          <a:p>
-            <a:pPr indent="0" marL="0">
-              <a:buNone/>
-            </a:pPr>
-            <a:r>
-              <a:rPr lang="en-US" sz="1800" b="1" dirty="0">
-                <a:solidFill>
-                  <a:srgbClr val="0F1B3D"/>
-                </a:solidFill>
-                <a:latin typeface="Georgia" pitchFamily="34" charset="0"/>
-                <a:ea typeface="Georgia" pitchFamily="34" charset="-122"/>
-                <a:cs typeface="Georgia" pitchFamily="34" charset="-120"/>
-              </a:rPr>
-              <a:t>Gateway Core</a:t>
-            </a:r>
-            <a:endParaRPr lang="en-US" sz="1800" dirty="0"/>
-          </a:p>
-        </p:txBody>
-      </p:sp>
-      <p:sp>
-        <p:nvSpPr>
-          <p:cNvPr id="10" name="Text 8"/>
-          <p:cNvSpPr/>
-          <p:nvPr/>
-        </p:nvSpPr>
-        <p:spPr>
-          <a:xfrm>
-            <a:off x="640080" y="2971800"/>
-            <a:ext cx="2194560" cy="1371600"/>
-          </a:xfrm>
-          <a:prstGeom prst="rect">
-            <a:avLst/>
-          </a:prstGeom>
-          <a:noFill/>
-          <a:ln/>
-        </p:spPr>
-        <p:txBody>
-          <a:bodyPr wrap="square" lIns="0" tIns="0" rIns="0" bIns="0" rtlCol="0" anchor="ctr"/>
-          <a:lstStyle/>
-          <a:p>
-            <a:pPr indent="0" marL="0">
-              <a:spcAft>
-                <a:spcPts val="300"/>
-              </a:spcAft>
-              <a:buNone/>
-            </a:pPr>
-            <a:r>
-              <a:rPr lang="en-US" sz="1100" dirty="0">
-                <a:solidFill>
-                  <a:srgbClr val="1A1F36"/>
-                </a:solidFill>
-                <a:latin typeface="Calibri" pitchFamily="34" charset="0"/>
-                <a:ea typeface="Calibri" pitchFamily="34" charset="-122"/>
-                <a:cs typeface="Calibri" pitchFamily="34" charset="-120"/>
-              </a:rPr>
-              <a:t>The protocol-layer enforcement point. Every agent → tool call flows through it. Identity-aware, loggable, policy-checkable.</a:t>
-            </a:r>
-            <a:endParaRPr lang="en-US" sz="1100" dirty="0"/>
-          </a:p>
-        </p:txBody>
-      </p:sp>
-      <p:sp>
-        <p:nvSpPr>
-          <p:cNvPr id="11" name="Text 9"/>
-          <p:cNvSpPr/>
-          <p:nvPr/>
-        </p:nvSpPr>
-        <p:spPr>
-          <a:xfrm>
-            <a:off x="640080" y="4160520"/>
-            <a:ext cx="2194560" cy="274320"/>
-          </a:xfrm>
-          <a:prstGeom prst="rect">
-            <a:avLst/>
-          </a:prstGeom>
-          <a:noFill/>
-          <a:ln/>
-        </p:spPr>
-        <p:txBody>
-          <a:bodyPr wrap="square" lIns="0" tIns="0" rIns="0" bIns="0" rtlCol="0" anchor="ctr"/>
-          <a:lstStyle/>
-          <a:p>
-            <a:pPr indent="0" marL="0">
-              <a:buNone/>
-            </a:pPr>
-            <a:r>
-              <a:rPr lang="en-US" sz="1000" b="1" i="1" dirty="0">
-                <a:solidFill>
-                  <a:srgbClr val="02C39A"/>
-                </a:solidFill>
-                <a:latin typeface="Calibri" pitchFamily="34" charset="0"/>
-                <a:ea typeface="Calibri" pitchFamily="34" charset="-122"/>
-                <a:cs typeface="Calibri" pitchFamily="34" charset="-120"/>
-              </a:rPr>
-              <a:t>Eng research starts here.</a:t>
+              <a:t>MCP GATEWAY</a:t>
+            </a:r>
+            <a:endParaRPr lang="en-US" sz="1300" dirty="0"/>
+          </a:p>
+        </p:txBody>
+      </p:sp>
+      <p:sp>
+        <p:nvSpPr>
+          <p:cNvPr id="12" name="Text 10"/>
+          <p:cNvSpPr/>
+          <p:nvPr/>
+        </p:nvSpPr>
+        <p:spPr>
+          <a:xfrm>
+            <a:off x="3108960" y="2743200"/>
+            <a:ext cx="2926080" cy="274320"/>
+          </a:xfrm>
+          <a:prstGeom prst="rect">
+            <a:avLst/>
+          </a:prstGeom>
+          <a:noFill/>
+          <a:ln/>
+        </p:spPr>
+        <p:txBody>
+          <a:bodyPr wrap="square" lIns="0" tIns="0" rIns="0" bIns="0" rtlCol="0" anchor="ctr"/>
+          <a:lstStyle/>
+          <a:p>
+            <a:pPr algn="ctr" indent="0" marL="0">
+              <a:buNone/>
+            </a:pPr>
+            <a:r>
+              <a:rPr lang="en-US" sz="1300" i="1" dirty="0">
+                <a:solidFill>
+                  <a:srgbClr val="FFFFFF"/>
+                </a:solidFill>
+                <a:latin typeface="Calibri" pitchFamily="34" charset="0"/>
+                <a:ea typeface="Calibri" pitchFamily="34" charset="-122"/>
+                <a:cs typeface="Calibri" pitchFamily="34" charset="-120"/>
+              </a:rPr>
+              <a:t>identity · policy · audit</a:t>
+            </a:r>
+            <a:endParaRPr lang="en-US" sz="1300" dirty="0"/>
+          </a:p>
+        </p:txBody>
+      </p:sp>
+      <p:sp>
+        <p:nvSpPr>
+          <p:cNvPr id="13" name="Text 11"/>
+          <p:cNvSpPr/>
+          <p:nvPr/>
+        </p:nvSpPr>
+        <p:spPr>
+          <a:xfrm>
+            <a:off x="3108960" y="3108960"/>
+            <a:ext cx="2926080" cy="274320"/>
+          </a:xfrm>
+          <a:prstGeom prst="rect">
+            <a:avLst/>
+          </a:prstGeom>
+          <a:noFill/>
+          <a:ln/>
+        </p:spPr>
+        <p:txBody>
+          <a:bodyPr wrap="square" lIns="0" tIns="0" rIns="0" bIns="0" rtlCol="0" anchor="ctr"/>
+          <a:lstStyle/>
+          <a:p>
+            <a:pPr algn="ctr" indent="0" marL="0">
+              <a:buNone/>
+            </a:pPr>
+            <a:r>
+              <a:rPr lang="en-US" sz="1000" dirty="0">
+                <a:solidFill>
+                  <a:srgbClr val="E8EEFC"/>
+                </a:solidFill>
+                <a:latin typeface="Calibri" pitchFamily="34" charset="0"/>
+                <a:ea typeface="Calibri" pitchFamily="34" charset="-122"/>
+                <a:cs typeface="Calibri" pitchFamily="34" charset="-120"/>
+              </a:rPr>
+              <a:t>every call, policy-checked</a:t>
             </a:r>
             <a:endParaRPr lang="en-US" sz="1000" dirty="0"/>
           </a:p>
@@ -5901,272 +5873,50 @@
       </p:sp>
       <p:sp>
         <p:nvSpPr>
-          <p:cNvPr id="12" name="Shape 10"/>
-          <p:cNvSpPr/>
-          <p:nvPr/>
-        </p:nvSpPr>
-        <p:spPr>
-          <a:xfrm>
-            <a:off x="3200400" y="2011680"/>
-            <a:ext cx="2743200" cy="2468880"/>
-          </a:xfrm>
-          <a:prstGeom prst="rect">
-            <a:avLst/>
-          </a:prstGeom>
-          <a:solidFill>
-            <a:srgbClr val="FFFFFF"/>
-          </a:solidFill>
-          <a:ln w="12700">
-            <a:solidFill>
-              <a:srgbClr val="CBD5E1"/>
-            </a:solidFill>
-            <a:prstDash val="solid"/>
-          </a:ln>
-        </p:spPr>
-      </p:sp>
-      <p:sp>
-        <p:nvSpPr>
-          <p:cNvPr id="13" name="Shape 11"/>
-          <p:cNvSpPr/>
-          <p:nvPr/>
-        </p:nvSpPr>
-        <p:spPr>
-          <a:xfrm>
-            <a:off x="3200400" y="2011680"/>
-            <a:ext cx="2743200" cy="73152"/>
-          </a:xfrm>
-          <a:prstGeom prst="rect">
-            <a:avLst/>
-          </a:prstGeom>
-          <a:solidFill>
-            <a:srgbClr val="02C39A"/>
-          </a:solidFill>
-          <a:ln w="12700">
+          <p:cNvPr id="14" name="Shape 12"/>
+          <p:cNvSpPr/>
+          <p:nvPr/>
+        </p:nvSpPr>
+        <p:spPr>
+          <a:xfrm>
+            <a:off x="6080760" y="2926080"/>
+            <a:ext cx="685800" cy="0"/>
+          </a:xfrm>
+          <a:prstGeom prst="line">
+            <a:avLst/>
+          </a:prstGeom>
+          <a:noFill/>
+          <a:ln w="25400">
             <a:solidFill>
               <a:srgbClr val="02C39A"/>
             </a:solidFill>
             <a:prstDash val="solid"/>
+            <a:tailEnd type="triangle"/>
           </a:ln>
         </p:spPr>
       </p:sp>
       <p:sp>
         <p:nvSpPr>
-          <p:cNvPr id="14" name="Text 12"/>
-          <p:cNvSpPr/>
-          <p:nvPr/>
-        </p:nvSpPr>
-        <p:spPr>
-          <a:xfrm>
-            <a:off x="3474720" y="2194560"/>
-            <a:ext cx="914400" cy="320040"/>
-          </a:xfrm>
-          <a:prstGeom prst="rect">
-            <a:avLst/>
-          </a:prstGeom>
-          <a:noFill/>
-          <a:ln/>
-        </p:spPr>
-        <p:txBody>
-          <a:bodyPr wrap="square" lIns="0" tIns="0" rIns="0" bIns="0" rtlCol="0" anchor="ctr"/>
-          <a:lstStyle/>
-          <a:p>
-            <a:pPr indent="0" marL="0">
-              <a:buNone/>
-            </a:pPr>
-            <a:r>
-              <a:rPr lang="en-US" sz="1100" b="1" spc="300" kern="0" dirty="0">
-                <a:solidFill>
-                  <a:srgbClr val="02C39A"/>
-                </a:solidFill>
-                <a:latin typeface="Calibri" pitchFamily="34" charset="0"/>
-                <a:ea typeface="Calibri" pitchFamily="34" charset="-122"/>
-                <a:cs typeface="Calibri" pitchFamily="34" charset="-120"/>
-              </a:rPr>
-              <a:t>02</a:t>
-            </a:r>
-            <a:endParaRPr lang="en-US" sz="1100" dirty="0"/>
-          </a:p>
-        </p:txBody>
-      </p:sp>
-      <p:sp>
-        <p:nvSpPr>
-          <p:cNvPr id="15" name="Text 13"/>
-          <p:cNvSpPr/>
-          <p:nvPr/>
-        </p:nvSpPr>
-        <p:spPr>
-          <a:xfrm>
-            <a:off x="3474720" y="2514600"/>
-            <a:ext cx="2194560" cy="457200"/>
-          </a:xfrm>
-          <a:prstGeom prst="rect">
-            <a:avLst/>
-          </a:prstGeom>
-          <a:noFill/>
-          <a:ln/>
-        </p:spPr>
-        <p:txBody>
-          <a:bodyPr wrap="square" lIns="0" tIns="0" rIns="0" bIns="0" rtlCol="0" anchor="ctr"/>
-          <a:lstStyle/>
-          <a:p>
-            <a:pPr indent="0" marL="0">
-              <a:buNone/>
-            </a:pPr>
-            <a:r>
-              <a:rPr lang="en-US" sz="1800" b="1" dirty="0">
-                <a:solidFill>
-                  <a:srgbClr val="0F1B3D"/>
-                </a:solidFill>
-                <a:latin typeface="Georgia" pitchFamily="34" charset="0"/>
-                <a:ea typeface="Georgia" pitchFamily="34" charset="-122"/>
-                <a:cs typeface="Georgia" pitchFamily="34" charset="-120"/>
-              </a:rPr>
-              <a:t>Policy Agent</a:t>
-            </a:r>
-            <a:endParaRPr lang="en-US" sz="1800" dirty="0"/>
-          </a:p>
-        </p:txBody>
-      </p:sp>
-      <p:sp>
-        <p:nvSpPr>
-          <p:cNvPr id="16" name="Text 14"/>
-          <p:cNvSpPr/>
-          <p:nvPr/>
-        </p:nvSpPr>
-        <p:spPr>
-          <a:xfrm>
-            <a:off x="3474720" y="2971800"/>
-            <a:ext cx="2194560" cy="1371600"/>
-          </a:xfrm>
-          <a:prstGeom prst="rect">
-            <a:avLst/>
-          </a:prstGeom>
-          <a:noFill/>
-          <a:ln/>
-        </p:spPr>
-        <p:txBody>
-          <a:bodyPr wrap="square" lIns="0" tIns="0" rIns="0" bIns="0" rtlCol="0" anchor="ctr"/>
-          <a:lstStyle/>
-          <a:p>
-            <a:pPr indent="0" marL="0">
-              <a:spcAft>
-                <a:spcPts val="300"/>
-              </a:spcAft>
-              <a:buNone/>
-            </a:pPr>
-            <a:r>
-              <a:rPr lang="en-US" sz="1100" dirty="0">
-                <a:solidFill>
-                  <a:srgbClr val="1A1F36"/>
-                </a:solidFill>
-                <a:latin typeface="Calibri" pitchFamily="34" charset="0"/>
-                <a:ea typeface="Calibri" pitchFamily="34" charset="-122"/>
-                <a:cs typeface="Calibri" pitchFamily="34" charset="-120"/>
-              </a:rPr>
-              <a:t>Access profiles for agents.</a:t>
-            </a:r>
-            <a:endParaRPr lang="en-US" sz="1100" dirty="0"/>
-          </a:p>
-          <a:p>
-            <a:pPr indent="0" marL="0">
-              <a:spcAft>
-                <a:spcPts val="300"/>
-              </a:spcAft>
-              <a:buNone/>
-            </a:pPr>
-            <a:endParaRPr lang="en-US" sz="1100" dirty="0"/>
-          </a:p>
-          <a:p>
-            <a:pPr indent="0" marL="0">
-              <a:spcAft>
-                <a:spcPts val="300"/>
-              </a:spcAft>
-              <a:buNone/>
-            </a:pPr>
-            <a:r>
-              <a:rPr lang="en-US" sz="1100" dirty="0">
-                <a:solidFill>
-                  <a:srgbClr val="1A1F36"/>
-                </a:solidFill>
-                <a:latin typeface="Calibri" pitchFamily="34" charset="0"/>
-                <a:ea typeface="Calibri" pitchFamily="34" charset="-122"/>
-                <a:cs typeface="Calibri" pitchFamily="34" charset="-120"/>
-              </a:rPr>
-              <a:t>• At the MCP / platform level</a:t>
-            </a:r>
-            <a:endParaRPr lang="en-US" sz="1100" dirty="0"/>
-          </a:p>
-          <a:p>
-            <a:pPr indent="0" marL="0">
-              <a:spcAft>
-                <a:spcPts val="300"/>
-              </a:spcAft>
-              <a:buNone/>
-            </a:pPr>
-            <a:r>
-              <a:rPr lang="en-US" sz="1100" dirty="0">
-                <a:solidFill>
-                  <a:srgbClr val="1A1F36"/>
-                </a:solidFill>
-                <a:latin typeface="Calibri" pitchFamily="34" charset="0"/>
-                <a:ea typeface="Calibri" pitchFamily="34" charset="-122"/>
-                <a:cs typeface="Calibri" pitchFamily="34" charset="-120"/>
-              </a:rPr>
-              <a:t>• AND at the individual tool level</a:t>
-            </a:r>
-            <a:endParaRPr lang="en-US" sz="1100" dirty="0"/>
-          </a:p>
-          <a:p>
-            <a:pPr indent="0" marL="0">
-              <a:spcAft>
-                <a:spcPts val="300"/>
-              </a:spcAft>
-              <a:buNone/>
-            </a:pPr>
-            <a:endParaRPr lang="en-US" sz="1100" dirty="0"/>
-          </a:p>
-          <a:p>
-            <a:pPr indent="0" marL="0">
-              <a:spcAft>
-                <a:spcPts val="300"/>
-              </a:spcAft>
-              <a:buNone/>
-            </a:pPr>
-            <a:r>
-              <a:rPr lang="en-US" sz="1100" dirty="0">
-                <a:solidFill>
-                  <a:srgbClr val="1A1F36"/>
-                </a:solidFill>
-                <a:latin typeface="Calibri" pitchFamily="34" charset="0"/>
-                <a:ea typeface="Calibri" pitchFamily="34" charset="-122"/>
-                <a:cs typeface="Calibri" pitchFamily="34" charset="-120"/>
-              </a:rPr>
-              <a:t>Granular, not binary.</a:t>
-            </a:r>
-            <a:endParaRPr lang="en-US" sz="1100" dirty="0"/>
-          </a:p>
-        </p:txBody>
-      </p:sp>
-      <p:sp>
-        <p:nvSpPr>
-          <p:cNvPr id="17" name="Shape 15"/>
-          <p:cNvSpPr/>
-          <p:nvPr/>
-        </p:nvSpPr>
-        <p:spPr>
-          <a:xfrm>
-            <a:off x="6035040" y="2011680"/>
-            <a:ext cx="2743200" cy="2468880"/>
-          </a:xfrm>
-          <a:prstGeom prst="rect">
-            <a:avLst/>
+          <p:cNvPr id="15" name="Shape 13"/>
+          <p:cNvSpPr/>
+          <p:nvPr/>
+        </p:nvSpPr>
+        <p:spPr>
+          <a:xfrm>
+            <a:off x="6858000" y="2331720"/>
+            <a:ext cx="1828800" cy="1188720"/>
+          </a:xfrm>
+          <a:prstGeom prst="roundRect">
+            <a:avLst>
+              <a:gd name="adj" fmla="val 6154"/>
+            </a:avLst>
           </a:prstGeom>
           <a:solidFill>
-            <a:srgbClr val="FFFFFF"/>
+            <a:srgbClr val="1A2545"/>
           </a:solidFill>
           <a:ln w="12700">
             <a:solidFill>
-              <a:srgbClr val="CBD5E1"/>
+              <a:srgbClr val="E8EEFC"/>
             </a:solidFill>
             <a:prstDash val="solid"/>
           </a:ln>
@@ -6174,305 +5924,183 @@
       </p:sp>
       <p:sp>
         <p:nvSpPr>
-          <p:cNvPr id="18" name="Shape 16"/>
-          <p:cNvSpPr/>
-          <p:nvPr/>
-        </p:nvSpPr>
-        <p:spPr>
-          <a:xfrm>
-            <a:off x="6035040" y="2011680"/>
-            <a:ext cx="2743200" cy="73152"/>
-          </a:xfrm>
-          <a:prstGeom prst="rect">
-            <a:avLst/>
-          </a:prstGeom>
-          <a:solidFill>
-            <a:srgbClr val="02C39A"/>
-          </a:solidFill>
-          <a:ln w="12700">
-            <a:solidFill>
-              <a:srgbClr val="02C39A"/>
-            </a:solidFill>
-            <a:prstDash val="solid"/>
-          </a:ln>
-        </p:spPr>
+          <p:cNvPr id="16" name="Text 14"/>
+          <p:cNvSpPr/>
+          <p:nvPr/>
+        </p:nvSpPr>
+        <p:spPr>
+          <a:xfrm>
+            <a:off x="6858000" y="2423160"/>
+            <a:ext cx="1828800" cy="320040"/>
+          </a:xfrm>
+          <a:prstGeom prst="rect">
+            <a:avLst/>
+          </a:prstGeom>
+          <a:noFill/>
+          <a:ln/>
+        </p:spPr>
+        <p:txBody>
+          <a:bodyPr wrap="square" lIns="0" tIns="0" rIns="0" bIns="0" rtlCol="0" anchor="ctr"/>
+          <a:lstStyle/>
+          <a:p>
+            <a:pPr algn="ctr" indent="0" marL="0">
+              <a:buNone/>
+            </a:pPr>
+            <a:r>
+              <a:rPr lang="en-US" sz="1000" b="1" spc="200" kern="0" dirty="0">
+                <a:solidFill>
+                  <a:srgbClr val="64748B"/>
+                </a:solidFill>
+                <a:latin typeface="Calibri" pitchFamily="34" charset="0"/>
+                <a:ea typeface="Calibri" pitchFamily="34" charset="-122"/>
+                <a:cs typeface="Calibri" pitchFamily="34" charset="-120"/>
+              </a:rPr>
+              <a:t>APPS · TOOLS</a:t>
+            </a:r>
+            <a:endParaRPr lang="en-US" sz="1000" dirty="0"/>
+          </a:p>
+        </p:txBody>
+      </p:sp>
+      <p:sp>
+        <p:nvSpPr>
+          <p:cNvPr id="17" name="Text 15"/>
+          <p:cNvSpPr/>
+          <p:nvPr/>
+        </p:nvSpPr>
+        <p:spPr>
+          <a:xfrm>
+            <a:off x="6858000" y="2788920"/>
+            <a:ext cx="1828800" cy="685800"/>
+          </a:xfrm>
+          <a:prstGeom prst="rect">
+            <a:avLst/>
+          </a:prstGeom>
+          <a:noFill/>
+          <a:ln/>
+        </p:spPr>
+        <p:txBody>
+          <a:bodyPr wrap="square" lIns="0" tIns="0" rIns="0" bIns="0" rtlCol="0" anchor="ctr"/>
+          <a:lstStyle/>
+          <a:p>
+            <a:pPr algn="ctr" indent="0" marL="0">
+              <a:buNone/>
+            </a:pPr>
+            <a:r>
+              <a:rPr lang="en-US" sz="1200" dirty="0">
+                <a:solidFill>
+                  <a:srgbClr val="FFFFFF"/>
+                </a:solidFill>
+                <a:latin typeface="Calibri" pitchFamily="34" charset="0"/>
+                <a:ea typeface="Calibri" pitchFamily="34" charset="-122"/>
+                <a:cs typeface="Calibri" pitchFamily="34" charset="-120"/>
+              </a:rPr>
+              <a:t>Slack · Linear</a:t>
+            </a:r>
+            <a:endParaRPr lang="en-US" sz="1200" dirty="0"/>
+          </a:p>
+          <a:p>
+            <a:pPr algn="ctr" indent="0" marL="0">
+              <a:buNone/>
+            </a:pPr>
+            <a:r>
+              <a:rPr lang="en-US" sz="1200" dirty="0">
+                <a:solidFill>
+                  <a:srgbClr val="FFFFFF"/>
+                </a:solidFill>
+                <a:latin typeface="Calibri" pitchFamily="34" charset="0"/>
+                <a:ea typeface="Calibri" pitchFamily="34" charset="-122"/>
+                <a:cs typeface="Calibri" pitchFamily="34" charset="-120"/>
+              </a:rPr>
+              <a:t>Notions · Postgres</a:t>
+            </a:r>
+            <a:endParaRPr lang="en-US" sz="1200" dirty="0"/>
+          </a:p>
+        </p:txBody>
+      </p:sp>
+      <p:sp>
+        <p:nvSpPr>
+          <p:cNvPr id="18" name="Text 16"/>
+          <p:cNvSpPr/>
+          <p:nvPr/>
+        </p:nvSpPr>
+        <p:spPr>
+          <a:xfrm>
+            <a:off x="457200" y="3794760"/>
+            <a:ext cx="8229600" cy="365760"/>
+          </a:xfrm>
+          <a:prstGeom prst="rect">
+            <a:avLst/>
+          </a:prstGeom>
+          <a:noFill/>
+          <a:ln/>
+        </p:spPr>
+        <p:txBody>
+          <a:bodyPr wrap="square" lIns="0" tIns="0" rIns="0" bIns="0" rtlCol="0" anchor="ctr"/>
+          <a:lstStyle/>
+          <a:p>
+            <a:pPr indent="0" marL="0">
+              <a:buNone/>
+            </a:pPr>
+            <a:r>
+              <a:rPr lang="en-US" sz="1200" b="1" dirty="0">
+                <a:solidFill>
+                  <a:srgbClr val="F59E0B"/>
+                </a:solidFill>
+                <a:latin typeface="Calibri" pitchFamily="34" charset="0"/>
+                <a:ea typeface="Calibri" pitchFamily="34" charset="-122"/>
+                <a:cs typeface="Calibri" pitchFamily="34" charset="-120"/>
+              </a:rPr>
+              <a:t>Status: concept / whiteboard.  </a:t>
+            </a:r>
+            <a:pPr indent="0" marL="0">
+              <a:buNone/>
+            </a:pPr>
+            <a:r>
+              <a:rPr lang="en-US" sz="1200" dirty="0">
+                <a:solidFill>
+                  <a:srgbClr val="E8EEFC"/>
+                </a:solidFill>
+                <a:latin typeface="Calibri" pitchFamily="34" charset="0"/>
+                <a:ea typeface="Calibri" pitchFamily="34" charset="-122"/>
+                <a:cs typeface="Calibri" pitchFamily="34" charset="-120"/>
+              </a:rPr>
+              <a:t>Sarit + Amir Ben Ami leading architecture.  </a:t>
+            </a:r>
+            <a:pPr indent="0" marL="0">
+              <a:buNone/>
+            </a:pPr>
+            <a:r>
+              <a:rPr lang="en-US" sz="1200" dirty="0">
+                <a:solidFill>
+                  <a:srgbClr val="E8EEFC"/>
+                </a:solidFill>
+                <a:latin typeface="Calibri" pitchFamily="34" charset="0"/>
+                <a:ea typeface="Calibri" pitchFamily="34" charset="-122"/>
+                <a:cs typeface="Calibri" pitchFamily="34" charset="-120"/>
+              </a:rPr>
+              <a:t>Cycle 79 AI priority.  </a:t>
+            </a:r>
+            <a:pPr indent="0" marL="0">
+              <a:buNone/>
+            </a:pPr>
+            <a:r>
+              <a:rPr lang="en-US" sz="1200" i="1" dirty="0">
+                <a:solidFill>
+                  <a:srgbClr val="E8EEFC"/>
+                </a:solidFill>
+                <a:latin typeface="Calibri" pitchFamily="34" charset="0"/>
+                <a:ea typeface="Calibri" pitchFamily="34" charset="-122"/>
+                <a:cs typeface="Calibri" pitchFamily="34" charset="-120"/>
+              </a:rPr>
+              <a:t>Market: Saviynt, Token Security, Astrix converging here.</a:t>
+            </a:r>
+            <a:endParaRPr lang="en-US" sz="1200" dirty="0"/>
+          </a:p>
+        </p:txBody>
       </p:sp>
       <p:sp>
         <p:nvSpPr>
           <p:cNvPr id="19" name="Text 17"/>
-          <p:cNvSpPr/>
-          <p:nvPr/>
-        </p:nvSpPr>
-        <p:spPr>
-          <a:xfrm>
-            <a:off x="6309360" y="2194560"/>
-            <a:ext cx="914400" cy="320040"/>
-          </a:xfrm>
-          <a:prstGeom prst="rect">
-            <a:avLst/>
-          </a:prstGeom>
-          <a:noFill/>
-          <a:ln/>
-        </p:spPr>
-        <p:txBody>
-          <a:bodyPr wrap="square" lIns="0" tIns="0" rIns="0" bIns="0" rtlCol="0" anchor="ctr"/>
-          <a:lstStyle/>
-          <a:p>
-            <a:pPr indent="0" marL="0">
-              <a:buNone/>
-            </a:pPr>
-            <a:r>
-              <a:rPr lang="en-US" sz="1100" b="1" spc="300" kern="0" dirty="0">
-                <a:solidFill>
-                  <a:srgbClr val="02C39A"/>
-                </a:solidFill>
-                <a:latin typeface="Calibri" pitchFamily="34" charset="0"/>
-                <a:ea typeface="Calibri" pitchFamily="34" charset="-122"/>
-                <a:cs typeface="Calibri" pitchFamily="34" charset="-120"/>
-              </a:rPr>
-              <a:t>03</a:t>
-            </a:r>
-            <a:endParaRPr lang="en-US" sz="1100" dirty="0"/>
-          </a:p>
-        </p:txBody>
-      </p:sp>
-      <p:sp>
-        <p:nvSpPr>
-          <p:cNvPr id="20" name="Text 18"/>
-          <p:cNvSpPr/>
-          <p:nvPr/>
-        </p:nvSpPr>
-        <p:spPr>
-          <a:xfrm>
-            <a:off x="6309360" y="2514600"/>
-            <a:ext cx="2194560" cy="457200"/>
-          </a:xfrm>
-          <a:prstGeom prst="rect">
-            <a:avLst/>
-          </a:prstGeom>
-          <a:noFill/>
-          <a:ln/>
-        </p:spPr>
-        <p:txBody>
-          <a:bodyPr wrap="square" lIns="0" tIns="0" rIns="0" bIns="0" rtlCol="0" anchor="ctr"/>
-          <a:lstStyle/>
-          <a:p>
-            <a:pPr indent="0" marL="0">
-              <a:buNone/>
-            </a:pPr>
-            <a:r>
-              <a:rPr lang="en-US" sz="1800" b="1" dirty="0">
-                <a:solidFill>
-                  <a:srgbClr val="0F1B3D"/>
-                </a:solidFill>
-                <a:latin typeface="Georgia" pitchFamily="34" charset="0"/>
-                <a:ea typeface="Georgia" pitchFamily="34" charset="-122"/>
-                <a:cs typeface="Georgia" pitchFamily="34" charset="-120"/>
-              </a:rPr>
-              <a:t>Screens</a:t>
-            </a:r>
-            <a:endParaRPr lang="en-US" sz="1800" dirty="0"/>
-          </a:p>
-        </p:txBody>
-      </p:sp>
-      <p:sp>
-        <p:nvSpPr>
-          <p:cNvPr id="21" name="Text 19"/>
-          <p:cNvSpPr/>
-          <p:nvPr/>
-        </p:nvSpPr>
-        <p:spPr>
-          <a:xfrm>
-            <a:off x="6309360" y="2971800"/>
-            <a:ext cx="2194560" cy="1371600"/>
-          </a:xfrm>
-          <a:prstGeom prst="rect">
-            <a:avLst/>
-          </a:prstGeom>
-          <a:noFill/>
-          <a:ln/>
-        </p:spPr>
-        <p:txBody>
-          <a:bodyPr wrap="square" lIns="0" tIns="0" rIns="0" bIns="0" rtlCol="0" anchor="ctr"/>
-          <a:lstStyle/>
-          <a:p>
-            <a:pPr indent="0" marL="0">
-              <a:spcAft>
-                <a:spcPts val="300"/>
-              </a:spcAft>
-              <a:buNone/>
-            </a:pPr>
-            <a:r>
-              <a:rPr lang="en-US" sz="1100" dirty="0">
-                <a:solidFill>
-                  <a:srgbClr val="1A1F36"/>
-                </a:solidFill>
-                <a:latin typeface="Calibri" pitchFamily="34" charset="0"/>
-                <a:ea typeface="Calibri" pitchFamily="34" charset="-122"/>
-                <a:cs typeface="Calibri" pitchFamily="34" charset="-120"/>
-              </a:rPr>
-              <a:t>“Integration” tab for MCPs</a:t>
-            </a:r>
-            <a:endParaRPr lang="en-US" sz="1100" dirty="0"/>
-          </a:p>
-          <a:p>
-            <a:pPr indent="0" marL="0">
-              <a:spcAft>
-                <a:spcPts val="300"/>
-              </a:spcAft>
-              <a:buNone/>
-            </a:pPr>
-            <a:endParaRPr lang="en-US" sz="1100" dirty="0"/>
-          </a:p>
-          <a:p>
-            <a:pPr indent="0" marL="0">
-              <a:spcAft>
-                <a:spcPts val="300"/>
-              </a:spcAft>
-              <a:buNone/>
-            </a:pPr>
-            <a:r>
-              <a:rPr lang="en-US" sz="1100" dirty="0">
-                <a:solidFill>
-                  <a:srgbClr val="1A1F36"/>
-                </a:solidFill>
-                <a:latin typeface="Calibri" pitchFamily="34" charset="0"/>
-                <a:ea typeface="Calibri" pitchFamily="34" charset="-122"/>
-                <a:cs typeface="Calibri" pitchFamily="34" charset="-120"/>
-              </a:rPr>
-              <a:t>Logs — three views:</a:t>
-            </a:r>
-            <a:endParaRPr lang="en-US" sz="1100" dirty="0"/>
-          </a:p>
-          <a:p>
-            <a:pPr indent="0" marL="0">
-              <a:spcAft>
-                <a:spcPts val="300"/>
-              </a:spcAft>
-              <a:buNone/>
-            </a:pPr>
-            <a:r>
-              <a:rPr lang="en-US" sz="1100" dirty="0">
-                <a:solidFill>
-                  <a:srgbClr val="1A1F36"/>
-                </a:solidFill>
-                <a:latin typeface="Calibri" pitchFamily="34" charset="0"/>
-                <a:ea typeface="Calibri" pitchFamily="34" charset="-122"/>
-                <a:cs typeface="Calibri" pitchFamily="34" charset="-120"/>
-              </a:rPr>
-              <a:t>• System Logs</a:t>
-            </a:r>
-            <a:endParaRPr lang="en-US" sz="1100" dirty="0"/>
-          </a:p>
-          <a:p>
-            <a:pPr indent="0" marL="0">
-              <a:spcAft>
-                <a:spcPts val="300"/>
-              </a:spcAft>
-              <a:buNone/>
-            </a:pPr>
-            <a:r>
-              <a:rPr lang="en-US" sz="1100" dirty="0">
-                <a:solidFill>
-                  <a:srgbClr val="1A1F36"/>
-                </a:solidFill>
-                <a:latin typeface="Calibri" pitchFamily="34" charset="0"/>
-                <a:ea typeface="Calibri" pitchFamily="34" charset="-122"/>
-                <a:cs typeface="Calibri" pitchFamily="34" charset="-120"/>
-              </a:rPr>
-              <a:t>• Governance Logs</a:t>
-            </a:r>
-            <a:endParaRPr lang="en-US" sz="1100" dirty="0"/>
-          </a:p>
-          <a:p>
-            <a:pPr indent="0" marL="0">
-              <a:spcAft>
-                <a:spcPts val="300"/>
-              </a:spcAft>
-              <a:buNone/>
-            </a:pPr>
-            <a:r>
-              <a:rPr lang="en-US" sz="1100" dirty="0">
-                <a:solidFill>
-                  <a:srgbClr val="1A1F36"/>
-                </a:solidFill>
-                <a:latin typeface="Calibri" pitchFamily="34" charset="0"/>
-                <a:ea typeface="Calibri" pitchFamily="34" charset="-122"/>
-                <a:cs typeface="Calibri" pitchFamily="34" charset="-120"/>
-              </a:rPr>
-              <a:t>• All Access Logs</a:t>
-            </a:r>
-            <a:endParaRPr lang="en-US" sz="1100" dirty="0"/>
-          </a:p>
-        </p:txBody>
-      </p:sp>
-      <p:sp>
-        <p:nvSpPr>
-          <p:cNvPr id="22" name="Shape 20"/>
-          <p:cNvSpPr/>
-          <p:nvPr/>
-        </p:nvSpPr>
-        <p:spPr>
-          <a:xfrm>
-            <a:off x="457200" y="4617720"/>
-            <a:ext cx="8229600" cy="365760"/>
-          </a:xfrm>
-          <a:prstGeom prst="rect">
-            <a:avLst/>
-          </a:prstGeom>
-          <a:solidFill>
-            <a:srgbClr val="0F1B3D"/>
-          </a:solidFill>
-          <a:ln w="12700">
-            <a:solidFill>
-              <a:srgbClr val="0F1B3D"/>
-            </a:solidFill>
-            <a:prstDash val="solid"/>
-          </a:ln>
-        </p:spPr>
-      </p:sp>
-      <p:sp>
-        <p:nvSpPr>
-          <p:cNvPr id="23" name="Text 21"/>
-          <p:cNvSpPr/>
-          <p:nvPr/>
-        </p:nvSpPr>
-        <p:spPr>
-          <a:xfrm>
-            <a:off x="640080" y="4617720"/>
-            <a:ext cx="7863840" cy="365760"/>
-          </a:xfrm>
-          <a:prstGeom prst="rect">
-            <a:avLst/>
-          </a:prstGeom>
-          <a:noFill/>
-          <a:ln/>
-        </p:spPr>
-        <p:txBody>
-          <a:bodyPr wrap="square" lIns="0" tIns="0" rIns="0" bIns="0" rtlCol="0" anchor="ctr"/>
-          <a:lstStyle/>
-          <a:p>
-            <a:pPr indent="0" marL="0">
-              <a:buNone/>
-            </a:pPr>
-            <a:r>
-              <a:rPr lang="en-US" sz="1200" b="1" i="1" dirty="0">
-                <a:solidFill>
-                  <a:srgbClr val="FFFFFF"/>
-                </a:solidFill>
-                <a:latin typeface="Calibri" pitchFamily="34" charset="0"/>
-                <a:ea typeface="Calibri" pitchFamily="34" charset="-122"/>
-                <a:cs typeface="Calibri" pitchFamily="34" charset="-120"/>
-              </a:rPr>
-              <a:t>This is what demoes at Identiverse · June 15.</a:t>
-            </a:r>
-            <a:endParaRPr lang="en-US" sz="1200" dirty="0"/>
-          </a:p>
-        </p:txBody>
-      </p:sp>
-      <p:sp>
-        <p:nvSpPr>
-          <p:cNvPr id="24" name="Text 22"/>
           <p:cNvSpPr/>
           <p:nvPr/>
         </p:nvSpPr>
@@ -6497,13 +6125,13 @@
             <a:r>
               <a:rPr lang="en-US" sz="900" dirty="0">
                 <a:solidFill>
-                  <a:srgbClr val="64748B"/>
-                </a:solidFill>
-                <a:latin typeface="Calibri" pitchFamily="34" charset="0"/>
-                <a:ea typeface="Calibri" pitchFamily="34" charset="-122"/>
-                <a:cs typeface="Calibri" pitchFamily="34" charset="-120"/>
-              </a:rPr>
-              <a:t>6 / 8</a:t>
+                  <a:srgbClr val="E8EEFC"/>
+                </a:solidFill>
+                <a:latin typeface="Calibri" pitchFamily="34" charset="0"/>
+                <a:ea typeface="Calibri" pitchFamily="34" charset="-122"/>
+                <a:cs typeface="Calibri" pitchFamily="34" charset="-120"/>
+              </a:rPr>
+              <a:t>6 / 9</a:t>
             </a:r>
             <a:endParaRPr lang="en-US" sz="900" dirty="0"/>
           </a:p>
@@ -6599,7 +6227,7 @@
                 <a:ea typeface="Calibri" pitchFamily="34" charset="-122"/>
                 <a:cs typeface="Calibri" pitchFamily="34" charset="-120"/>
               </a:rPr>
-              <a:t>06 · Post-P0</a:t>
+              <a:t>06 · P0 scope — the demo target</a:t>
             </a:r>
             <a:endParaRPr lang="en-US" sz="1100" dirty="0"/>
           </a:p>
@@ -6638,7 +6266,7 @@
                 <a:ea typeface="Georgia" pitchFamily="34" charset="-122"/>
                 <a:cs typeface="Georgia" pitchFamily="34" charset="-120"/>
               </a:rPr>
-              <a:t>Where this goes next.</a:t>
+              <a:t>What we're building first.</a:t>
             </a:r>
             <a:endParaRPr lang="en-US" sz="3400" dirty="0"/>
           </a:p>
@@ -6646,24 +6274,63 @@
       </p:sp>
       <p:sp>
         <p:nvSpPr>
-          <p:cNvPr id="5" name="Shape 3"/>
-          <p:cNvSpPr/>
-          <p:nvPr/>
-        </p:nvSpPr>
-        <p:spPr>
-          <a:xfrm>
-            <a:off x="457200" y="1691640"/>
-            <a:ext cx="4160520" cy="1371600"/>
+          <p:cNvPr id="5" name="Text 3"/>
+          <p:cNvSpPr/>
+          <p:nvPr/>
+        </p:nvSpPr>
+        <p:spPr>
+          <a:xfrm>
+            <a:off x="457200" y="1554480"/>
+            <a:ext cx="8229600" cy="365760"/>
+          </a:xfrm>
+          <a:prstGeom prst="rect">
+            <a:avLst/>
+          </a:prstGeom>
+          <a:noFill/>
+          <a:ln/>
+        </p:spPr>
+        <p:txBody>
+          <a:bodyPr wrap="square" lIns="0" tIns="0" rIns="0" bIns="0" rtlCol="0" anchor="ctr"/>
+          <a:lstStyle/>
+          <a:p>
+            <a:pPr indent="0" marL="0">
+              <a:buNone/>
+            </a:pPr>
+            <a:r>
+              <a:rPr lang="en-US" sz="1200" i="1" dirty="0">
+                <a:solidFill>
+                  <a:srgbClr val="64748B"/>
+                </a:solidFill>
+                <a:latin typeface="Calibri" pitchFamily="34" charset="0"/>
+                <a:ea typeface="Calibri" pitchFamily="34" charset="-122"/>
+                <a:cs typeface="Calibri" pitchFamily="34" charset="-120"/>
+              </a:rPr>
+              <a:t>From Sarit's session. Some pieces may exist in M1/M2 — Omri will connect the dots.</a:t>
+            </a:r>
+            <a:endParaRPr lang="en-US" sz="1200" dirty="0"/>
+          </a:p>
+        </p:txBody>
+      </p:sp>
+      <p:sp>
+        <p:nvSpPr>
+          <p:cNvPr id="6" name="Shape 4"/>
+          <p:cNvSpPr/>
+          <p:nvPr/>
+        </p:nvSpPr>
+        <p:spPr>
+          <a:xfrm>
+            <a:off x="365760" y="2011680"/>
+            <a:ext cx="2743200" cy="2468880"/>
           </a:xfrm>
           <a:prstGeom prst="rect">
             <a:avLst/>
           </a:prstGeom>
           <a:solidFill>
-            <a:srgbClr val="E8EEFC"/>
+            <a:srgbClr val="FFFFFF"/>
           </a:solidFill>
           <a:ln w="12700">
             <a:solidFill>
-              <a:srgbClr val="E8EEFC"/>
+              <a:srgbClr val="CBD5E1"/>
             </a:solidFill>
             <a:prstDash val="solid"/>
           </a:ln>
@@ -6671,14 +6338,734 @@
       </p:sp>
       <p:sp>
         <p:nvSpPr>
-          <p:cNvPr id="6" name="Shape 4"/>
-          <p:cNvSpPr/>
-          <p:nvPr/>
-        </p:nvSpPr>
-        <p:spPr>
-          <a:xfrm>
-            <a:off x="457200" y="1691640"/>
-            <a:ext cx="73152" cy="1371600"/>
+          <p:cNvPr id="7" name="Shape 5"/>
+          <p:cNvSpPr/>
+          <p:nvPr/>
+        </p:nvSpPr>
+        <p:spPr>
+          <a:xfrm>
+            <a:off x="365760" y="2011680"/>
+            <a:ext cx="2743200" cy="73152"/>
+          </a:xfrm>
+          <a:prstGeom prst="rect">
+            <a:avLst/>
+          </a:prstGeom>
+          <a:solidFill>
+            <a:srgbClr val="02C39A"/>
+          </a:solidFill>
+          <a:ln w="12700">
+            <a:solidFill>
+              <a:srgbClr val="02C39A"/>
+            </a:solidFill>
+            <a:prstDash val="solid"/>
+          </a:ln>
+        </p:spPr>
+      </p:sp>
+      <p:sp>
+        <p:nvSpPr>
+          <p:cNvPr id="8" name="Text 6"/>
+          <p:cNvSpPr/>
+          <p:nvPr/>
+        </p:nvSpPr>
+        <p:spPr>
+          <a:xfrm>
+            <a:off x="640080" y="2194560"/>
+            <a:ext cx="914400" cy="320040"/>
+          </a:xfrm>
+          <a:prstGeom prst="rect">
+            <a:avLst/>
+          </a:prstGeom>
+          <a:noFill/>
+          <a:ln/>
+        </p:spPr>
+        <p:txBody>
+          <a:bodyPr wrap="square" lIns="0" tIns="0" rIns="0" bIns="0" rtlCol="0" anchor="ctr"/>
+          <a:lstStyle/>
+          <a:p>
+            <a:pPr indent="0" marL="0">
+              <a:buNone/>
+            </a:pPr>
+            <a:r>
+              <a:rPr lang="en-US" sz="1100" b="1" spc="300" kern="0" dirty="0">
+                <a:solidFill>
+                  <a:srgbClr val="02C39A"/>
+                </a:solidFill>
+                <a:latin typeface="Calibri" pitchFamily="34" charset="0"/>
+                <a:ea typeface="Calibri" pitchFamily="34" charset="-122"/>
+                <a:cs typeface="Calibri" pitchFamily="34" charset="-120"/>
+              </a:rPr>
+              <a:t>01</a:t>
+            </a:r>
+            <a:endParaRPr lang="en-US" sz="1100" dirty="0"/>
+          </a:p>
+        </p:txBody>
+      </p:sp>
+      <p:sp>
+        <p:nvSpPr>
+          <p:cNvPr id="9" name="Text 7"/>
+          <p:cNvSpPr/>
+          <p:nvPr/>
+        </p:nvSpPr>
+        <p:spPr>
+          <a:xfrm>
+            <a:off x="640080" y="2514600"/>
+            <a:ext cx="2194560" cy="457200"/>
+          </a:xfrm>
+          <a:prstGeom prst="rect">
+            <a:avLst/>
+          </a:prstGeom>
+          <a:noFill/>
+          <a:ln/>
+        </p:spPr>
+        <p:txBody>
+          <a:bodyPr wrap="square" lIns="0" tIns="0" rIns="0" bIns="0" rtlCol="0" anchor="ctr"/>
+          <a:lstStyle/>
+          <a:p>
+            <a:pPr indent="0" marL="0">
+              <a:buNone/>
+            </a:pPr>
+            <a:r>
+              <a:rPr lang="en-US" sz="1800" b="1" dirty="0">
+                <a:solidFill>
+                  <a:srgbClr val="0F1B3D"/>
+                </a:solidFill>
+                <a:latin typeface="Georgia" pitchFamily="34" charset="0"/>
+                <a:ea typeface="Georgia" pitchFamily="34" charset="-122"/>
+                <a:cs typeface="Georgia" pitchFamily="34" charset="-120"/>
+              </a:rPr>
+              <a:t>Gateway Core</a:t>
+            </a:r>
+            <a:endParaRPr lang="en-US" sz="1800" dirty="0"/>
+          </a:p>
+        </p:txBody>
+      </p:sp>
+      <p:sp>
+        <p:nvSpPr>
+          <p:cNvPr id="10" name="Text 8"/>
+          <p:cNvSpPr/>
+          <p:nvPr/>
+        </p:nvSpPr>
+        <p:spPr>
+          <a:xfrm>
+            <a:off x="640080" y="3017520"/>
+            <a:ext cx="2194560" cy="1325880"/>
+          </a:xfrm>
+          <a:prstGeom prst="rect">
+            <a:avLst/>
+          </a:prstGeom>
+          <a:noFill/>
+          <a:ln/>
+        </p:spPr>
+        <p:txBody>
+          <a:bodyPr wrap="square" lIns="0" tIns="0" rIns="0" bIns="0" rtlCol="0" anchor="ctr"/>
+          <a:lstStyle/>
+          <a:p>
+            <a:pPr indent="0" marL="0">
+              <a:spcAft>
+                <a:spcPts val="200"/>
+              </a:spcAft>
+              <a:buNone/>
+            </a:pPr>
+            <a:r>
+              <a:rPr lang="en-US" sz="1100" dirty="0">
+                <a:solidFill>
+                  <a:srgbClr val="1A1F36"/>
+                </a:solidFill>
+                <a:latin typeface="Calibri" pitchFamily="34" charset="0"/>
+                <a:ea typeface="Calibri" pitchFamily="34" charset="-122"/>
+                <a:cs typeface="Calibri" pitchFamily="34" charset="-120"/>
+              </a:rPr>
+              <a:t>The protocol-layer enforcement point. Every agent → tool call flows through it.</a:t>
+            </a:r>
+            <a:endParaRPr lang="en-US" sz="1100" dirty="0"/>
+          </a:p>
+          <a:p>
+            <a:pPr indent="0" marL="0">
+              <a:spcAft>
+                <a:spcPts val="200"/>
+              </a:spcAft>
+              <a:buNone/>
+            </a:pPr>
+            <a:endParaRPr lang="en-US" sz="1100" dirty="0"/>
+          </a:p>
+          <a:p>
+            <a:pPr indent="0" marL="0">
+              <a:spcAft>
+                <a:spcPts val="200"/>
+              </a:spcAft>
+              <a:buNone/>
+            </a:pPr>
+            <a:r>
+              <a:rPr lang="en-US" sz="1100" dirty="0">
+                <a:solidFill>
+                  <a:srgbClr val="1A1F36"/>
+                </a:solidFill>
+                <a:latin typeface="Calibri" pitchFamily="34" charset="0"/>
+                <a:ea typeface="Calibri" pitchFamily="34" charset="-122"/>
+                <a:cs typeface="Calibri" pitchFamily="34" charset="-120"/>
+              </a:rPr>
+              <a:t>Identity-aware, loggable, policy-checkable.</a:t>
+            </a:r>
+            <a:endParaRPr lang="en-US" sz="1100" dirty="0"/>
+          </a:p>
+        </p:txBody>
+      </p:sp>
+      <p:sp>
+        <p:nvSpPr>
+          <p:cNvPr id="11" name="Text 9"/>
+          <p:cNvSpPr/>
+          <p:nvPr/>
+        </p:nvSpPr>
+        <p:spPr>
+          <a:xfrm>
+            <a:off x="640080" y="4187952"/>
+            <a:ext cx="2194560" cy="256032"/>
+          </a:xfrm>
+          <a:prstGeom prst="rect">
+            <a:avLst/>
+          </a:prstGeom>
+          <a:noFill/>
+          <a:ln/>
+        </p:spPr>
+        <p:txBody>
+          <a:bodyPr wrap="square" lIns="0" tIns="0" rIns="0" bIns="0" rtlCol="0" anchor="ctr"/>
+          <a:lstStyle/>
+          <a:p>
+            <a:pPr indent="0" marL="0">
+              <a:buNone/>
+            </a:pPr>
+            <a:r>
+              <a:rPr lang="en-US" sz="1000" b="1" i="1" dirty="0">
+                <a:solidFill>
+                  <a:srgbClr val="02C39A"/>
+                </a:solidFill>
+                <a:latin typeface="Calibri" pitchFamily="34" charset="0"/>
+                <a:ea typeface="Calibri" pitchFamily="34" charset="-122"/>
+                <a:cs typeface="Calibri" pitchFamily="34" charset="-120"/>
+              </a:rPr>
+              <a:t>Eng research starts here.</a:t>
+            </a:r>
+            <a:endParaRPr lang="en-US" sz="1000" dirty="0"/>
+          </a:p>
+        </p:txBody>
+      </p:sp>
+      <p:sp>
+        <p:nvSpPr>
+          <p:cNvPr id="12" name="Shape 10"/>
+          <p:cNvSpPr/>
+          <p:nvPr/>
+        </p:nvSpPr>
+        <p:spPr>
+          <a:xfrm>
+            <a:off x="3200400" y="2011680"/>
+            <a:ext cx="2743200" cy="2468880"/>
+          </a:xfrm>
+          <a:prstGeom prst="rect">
+            <a:avLst/>
+          </a:prstGeom>
+          <a:solidFill>
+            <a:srgbClr val="FFFFFF"/>
+          </a:solidFill>
+          <a:ln w="12700">
+            <a:solidFill>
+              <a:srgbClr val="CBD5E1"/>
+            </a:solidFill>
+            <a:prstDash val="solid"/>
+          </a:ln>
+        </p:spPr>
+      </p:sp>
+      <p:sp>
+        <p:nvSpPr>
+          <p:cNvPr id="13" name="Shape 11"/>
+          <p:cNvSpPr/>
+          <p:nvPr/>
+        </p:nvSpPr>
+        <p:spPr>
+          <a:xfrm>
+            <a:off x="3200400" y="2011680"/>
+            <a:ext cx="2743200" cy="73152"/>
+          </a:xfrm>
+          <a:prstGeom prst="rect">
+            <a:avLst/>
+          </a:prstGeom>
+          <a:solidFill>
+            <a:srgbClr val="02C39A"/>
+          </a:solidFill>
+          <a:ln w="12700">
+            <a:solidFill>
+              <a:srgbClr val="02C39A"/>
+            </a:solidFill>
+            <a:prstDash val="solid"/>
+          </a:ln>
+        </p:spPr>
+      </p:sp>
+      <p:sp>
+        <p:nvSpPr>
+          <p:cNvPr id="14" name="Text 12"/>
+          <p:cNvSpPr/>
+          <p:nvPr/>
+        </p:nvSpPr>
+        <p:spPr>
+          <a:xfrm>
+            <a:off x="3474720" y="2194560"/>
+            <a:ext cx="914400" cy="320040"/>
+          </a:xfrm>
+          <a:prstGeom prst="rect">
+            <a:avLst/>
+          </a:prstGeom>
+          <a:noFill/>
+          <a:ln/>
+        </p:spPr>
+        <p:txBody>
+          <a:bodyPr wrap="square" lIns="0" tIns="0" rIns="0" bIns="0" rtlCol="0" anchor="ctr"/>
+          <a:lstStyle/>
+          <a:p>
+            <a:pPr indent="0" marL="0">
+              <a:buNone/>
+            </a:pPr>
+            <a:r>
+              <a:rPr lang="en-US" sz="1100" b="1" spc="300" kern="0" dirty="0">
+                <a:solidFill>
+                  <a:srgbClr val="02C39A"/>
+                </a:solidFill>
+                <a:latin typeface="Calibri" pitchFamily="34" charset="0"/>
+                <a:ea typeface="Calibri" pitchFamily="34" charset="-122"/>
+                <a:cs typeface="Calibri" pitchFamily="34" charset="-120"/>
+              </a:rPr>
+              <a:t>02</a:t>
+            </a:r>
+            <a:endParaRPr lang="en-US" sz="1100" dirty="0"/>
+          </a:p>
+        </p:txBody>
+      </p:sp>
+      <p:sp>
+        <p:nvSpPr>
+          <p:cNvPr id="15" name="Text 13"/>
+          <p:cNvSpPr/>
+          <p:nvPr/>
+        </p:nvSpPr>
+        <p:spPr>
+          <a:xfrm>
+            <a:off x="3474720" y="2514600"/>
+            <a:ext cx="2194560" cy="457200"/>
+          </a:xfrm>
+          <a:prstGeom prst="rect">
+            <a:avLst/>
+          </a:prstGeom>
+          <a:noFill/>
+          <a:ln/>
+        </p:spPr>
+        <p:txBody>
+          <a:bodyPr wrap="square" lIns="0" tIns="0" rIns="0" bIns="0" rtlCol="0" anchor="ctr"/>
+          <a:lstStyle/>
+          <a:p>
+            <a:pPr indent="0" marL="0">
+              <a:buNone/>
+            </a:pPr>
+            <a:r>
+              <a:rPr lang="en-US" sz="1800" b="1" dirty="0">
+                <a:solidFill>
+                  <a:srgbClr val="0F1B3D"/>
+                </a:solidFill>
+                <a:latin typeface="Georgia" pitchFamily="34" charset="0"/>
+                <a:ea typeface="Georgia" pitchFamily="34" charset="-122"/>
+                <a:cs typeface="Georgia" pitchFamily="34" charset="-120"/>
+              </a:rPr>
+              <a:t>Policy Agent</a:t>
+            </a:r>
+            <a:endParaRPr lang="en-US" sz="1800" dirty="0"/>
+          </a:p>
+        </p:txBody>
+      </p:sp>
+      <p:sp>
+        <p:nvSpPr>
+          <p:cNvPr id="16" name="Text 14"/>
+          <p:cNvSpPr/>
+          <p:nvPr/>
+        </p:nvSpPr>
+        <p:spPr>
+          <a:xfrm>
+            <a:off x="3474720" y="3017520"/>
+            <a:ext cx="2194560" cy="1325880"/>
+          </a:xfrm>
+          <a:prstGeom prst="rect">
+            <a:avLst/>
+          </a:prstGeom>
+          <a:noFill/>
+          <a:ln/>
+        </p:spPr>
+        <p:txBody>
+          <a:bodyPr wrap="square" lIns="0" tIns="0" rIns="0" bIns="0" rtlCol="0" anchor="ctr"/>
+          <a:lstStyle/>
+          <a:p>
+            <a:pPr indent="0" marL="0">
+              <a:spcAft>
+                <a:spcPts val="200"/>
+              </a:spcAft>
+              <a:buNone/>
+            </a:pPr>
+            <a:r>
+              <a:rPr lang="en-US" sz="1100" dirty="0">
+                <a:solidFill>
+                  <a:srgbClr val="1A1F36"/>
+                </a:solidFill>
+                <a:latin typeface="Calibri" pitchFamily="34" charset="0"/>
+                <a:ea typeface="Calibri" pitchFamily="34" charset="-122"/>
+                <a:cs typeface="Calibri" pitchFamily="34" charset="-120"/>
+              </a:rPr>
+              <a:t>Access profiles for agents:</a:t>
+            </a:r>
+            <a:endParaRPr lang="en-US" sz="1100" dirty="0"/>
+          </a:p>
+          <a:p>
+            <a:pPr indent="0" marL="0">
+              <a:spcAft>
+                <a:spcPts val="200"/>
+              </a:spcAft>
+              <a:buNone/>
+            </a:pPr>
+            <a:endParaRPr lang="en-US" sz="1100" dirty="0"/>
+          </a:p>
+          <a:p>
+            <a:pPr indent="0" marL="0">
+              <a:spcAft>
+                <a:spcPts val="200"/>
+              </a:spcAft>
+              <a:buNone/>
+            </a:pPr>
+            <a:r>
+              <a:rPr lang="en-US" sz="1100" dirty="0">
+                <a:solidFill>
+                  <a:srgbClr val="1A1F36"/>
+                </a:solidFill>
+                <a:latin typeface="Calibri" pitchFamily="34" charset="0"/>
+                <a:ea typeface="Calibri" pitchFamily="34" charset="-122"/>
+                <a:cs typeface="Calibri" pitchFamily="34" charset="-120"/>
+              </a:rPr>
+              <a:t>• At the MCP / platform level</a:t>
+            </a:r>
+            <a:endParaRPr lang="en-US" sz="1100" dirty="0"/>
+          </a:p>
+          <a:p>
+            <a:pPr indent="0" marL="0">
+              <a:spcAft>
+                <a:spcPts val="200"/>
+              </a:spcAft>
+              <a:buNone/>
+            </a:pPr>
+            <a:r>
+              <a:rPr lang="en-US" sz="1100" dirty="0">
+                <a:solidFill>
+                  <a:srgbClr val="1A1F36"/>
+                </a:solidFill>
+                <a:latin typeface="Calibri" pitchFamily="34" charset="0"/>
+                <a:ea typeface="Calibri" pitchFamily="34" charset="-122"/>
+                <a:cs typeface="Calibri" pitchFamily="34" charset="-120"/>
+              </a:rPr>
+              <a:t>• AND at the individual tool level</a:t>
+            </a:r>
+            <a:endParaRPr lang="en-US" sz="1100" dirty="0"/>
+          </a:p>
+          <a:p>
+            <a:pPr indent="0" marL="0">
+              <a:spcAft>
+                <a:spcPts val="200"/>
+              </a:spcAft>
+              <a:buNone/>
+            </a:pPr>
+            <a:endParaRPr lang="en-US" sz="1100" dirty="0"/>
+          </a:p>
+          <a:p>
+            <a:pPr indent="0" marL="0">
+              <a:spcAft>
+                <a:spcPts val="200"/>
+              </a:spcAft>
+              <a:buNone/>
+            </a:pPr>
+            <a:r>
+              <a:rPr lang="en-US" sz="1100" dirty="0">
+                <a:solidFill>
+                  <a:srgbClr val="1A1F36"/>
+                </a:solidFill>
+                <a:latin typeface="Calibri" pitchFamily="34" charset="0"/>
+                <a:ea typeface="Calibri" pitchFamily="34" charset="-122"/>
+                <a:cs typeface="Calibri" pitchFamily="34" charset="-120"/>
+              </a:rPr>
+              <a:t>Granular, not binary.</a:t>
+            </a:r>
+            <a:endParaRPr lang="en-US" sz="1100" dirty="0"/>
+          </a:p>
+        </p:txBody>
+      </p:sp>
+      <p:sp>
+        <p:nvSpPr>
+          <p:cNvPr id="17" name="Shape 15"/>
+          <p:cNvSpPr/>
+          <p:nvPr/>
+        </p:nvSpPr>
+        <p:spPr>
+          <a:xfrm>
+            <a:off x="6035040" y="2011680"/>
+            <a:ext cx="2743200" cy="2468880"/>
+          </a:xfrm>
+          <a:prstGeom prst="rect">
+            <a:avLst/>
+          </a:prstGeom>
+          <a:solidFill>
+            <a:srgbClr val="FFFFFF"/>
+          </a:solidFill>
+          <a:ln w="12700">
+            <a:solidFill>
+              <a:srgbClr val="CBD5E1"/>
+            </a:solidFill>
+            <a:prstDash val="solid"/>
+          </a:ln>
+        </p:spPr>
+      </p:sp>
+      <p:sp>
+        <p:nvSpPr>
+          <p:cNvPr id="18" name="Shape 16"/>
+          <p:cNvSpPr/>
+          <p:nvPr/>
+        </p:nvSpPr>
+        <p:spPr>
+          <a:xfrm>
+            <a:off x="6035040" y="2011680"/>
+            <a:ext cx="2743200" cy="73152"/>
+          </a:xfrm>
+          <a:prstGeom prst="rect">
+            <a:avLst/>
+          </a:prstGeom>
+          <a:solidFill>
+            <a:srgbClr val="02C39A"/>
+          </a:solidFill>
+          <a:ln w="12700">
+            <a:solidFill>
+              <a:srgbClr val="02C39A"/>
+            </a:solidFill>
+            <a:prstDash val="solid"/>
+          </a:ln>
+        </p:spPr>
+      </p:sp>
+      <p:sp>
+        <p:nvSpPr>
+          <p:cNvPr id="19" name="Text 17"/>
+          <p:cNvSpPr/>
+          <p:nvPr/>
+        </p:nvSpPr>
+        <p:spPr>
+          <a:xfrm>
+            <a:off x="6309360" y="2194560"/>
+            <a:ext cx="914400" cy="320040"/>
+          </a:xfrm>
+          <a:prstGeom prst="rect">
+            <a:avLst/>
+          </a:prstGeom>
+          <a:noFill/>
+          <a:ln/>
+        </p:spPr>
+        <p:txBody>
+          <a:bodyPr wrap="square" lIns="0" tIns="0" rIns="0" bIns="0" rtlCol="0" anchor="ctr"/>
+          <a:lstStyle/>
+          <a:p>
+            <a:pPr indent="0" marL="0">
+              <a:buNone/>
+            </a:pPr>
+            <a:r>
+              <a:rPr lang="en-US" sz="1100" b="1" spc="300" kern="0" dirty="0">
+                <a:solidFill>
+                  <a:srgbClr val="02C39A"/>
+                </a:solidFill>
+                <a:latin typeface="Calibri" pitchFamily="34" charset="0"/>
+                <a:ea typeface="Calibri" pitchFamily="34" charset="-122"/>
+                <a:cs typeface="Calibri" pitchFamily="34" charset="-120"/>
+              </a:rPr>
+              <a:t>03</a:t>
+            </a:r>
+            <a:endParaRPr lang="en-US" sz="1100" dirty="0"/>
+          </a:p>
+        </p:txBody>
+      </p:sp>
+      <p:sp>
+        <p:nvSpPr>
+          <p:cNvPr id="20" name="Text 18"/>
+          <p:cNvSpPr/>
+          <p:nvPr/>
+        </p:nvSpPr>
+        <p:spPr>
+          <a:xfrm>
+            <a:off x="6309360" y="2514600"/>
+            <a:ext cx="2194560" cy="457200"/>
+          </a:xfrm>
+          <a:prstGeom prst="rect">
+            <a:avLst/>
+          </a:prstGeom>
+          <a:noFill/>
+          <a:ln/>
+        </p:spPr>
+        <p:txBody>
+          <a:bodyPr wrap="square" lIns="0" tIns="0" rIns="0" bIns="0" rtlCol="0" anchor="ctr"/>
+          <a:lstStyle/>
+          <a:p>
+            <a:pPr indent="0" marL="0">
+              <a:buNone/>
+            </a:pPr>
+            <a:r>
+              <a:rPr lang="en-US" sz="1800" b="1" dirty="0">
+                <a:solidFill>
+                  <a:srgbClr val="0F1B3D"/>
+                </a:solidFill>
+                <a:latin typeface="Georgia" pitchFamily="34" charset="0"/>
+                <a:ea typeface="Georgia" pitchFamily="34" charset="-122"/>
+                <a:cs typeface="Georgia" pitchFamily="34" charset="-120"/>
+              </a:rPr>
+              <a:t>Screens</a:t>
+            </a:r>
+            <a:endParaRPr lang="en-US" sz="1800" dirty="0"/>
+          </a:p>
+        </p:txBody>
+      </p:sp>
+      <p:sp>
+        <p:nvSpPr>
+          <p:cNvPr id="21" name="Text 19"/>
+          <p:cNvSpPr/>
+          <p:nvPr/>
+        </p:nvSpPr>
+        <p:spPr>
+          <a:xfrm>
+            <a:off x="6309360" y="3017520"/>
+            <a:ext cx="2194560" cy="1325880"/>
+          </a:xfrm>
+          <a:prstGeom prst="rect">
+            <a:avLst/>
+          </a:prstGeom>
+          <a:noFill/>
+          <a:ln/>
+        </p:spPr>
+        <p:txBody>
+          <a:bodyPr wrap="square" lIns="0" tIns="0" rIns="0" bIns="0" rtlCol="0" anchor="ctr"/>
+          <a:lstStyle/>
+          <a:p>
+            <a:pPr indent="0" marL="0">
+              <a:spcAft>
+                <a:spcPts val="200"/>
+              </a:spcAft>
+              <a:buNone/>
+            </a:pPr>
+            <a:r>
+              <a:rPr lang="en-US" sz="1100" dirty="0">
+                <a:solidFill>
+                  <a:srgbClr val="1A1F36"/>
+                </a:solidFill>
+                <a:latin typeface="Calibri" pitchFamily="34" charset="0"/>
+                <a:ea typeface="Calibri" pitchFamily="34" charset="-122"/>
+                <a:cs typeface="Calibri" pitchFamily="34" charset="-120"/>
+              </a:rPr>
+              <a:t>"Integration" tab for MCPs</a:t>
+            </a:r>
+            <a:endParaRPr lang="en-US" sz="1100" dirty="0"/>
+          </a:p>
+          <a:p>
+            <a:pPr indent="0" marL="0">
+              <a:spcAft>
+                <a:spcPts val="200"/>
+              </a:spcAft>
+              <a:buNone/>
+            </a:pPr>
+            <a:endParaRPr lang="en-US" sz="1100" dirty="0"/>
+          </a:p>
+          <a:p>
+            <a:pPr indent="0" marL="0">
+              <a:spcAft>
+                <a:spcPts val="200"/>
+              </a:spcAft>
+              <a:buNone/>
+            </a:pPr>
+            <a:r>
+              <a:rPr lang="en-US" sz="1100" dirty="0">
+                <a:solidFill>
+                  <a:srgbClr val="1A1F36"/>
+                </a:solidFill>
+                <a:latin typeface="Calibri" pitchFamily="34" charset="0"/>
+                <a:ea typeface="Calibri" pitchFamily="34" charset="-122"/>
+                <a:cs typeface="Calibri" pitchFamily="34" charset="-120"/>
+              </a:rPr>
+              <a:t>Logs — three views:</a:t>
+            </a:r>
+            <a:endParaRPr lang="en-US" sz="1100" dirty="0"/>
+          </a:p>
+          <a:p>
+            <a:pPr indent="0" marL="0">
+              <a:spcAft>
+                <a:spcPts val="200"/>
+              </a:spcAft>
+              <a:buNone/>
+            </a:pPr>
+            <a:r>
+              <a:rPr lang="en-US" sz="1100" dirty="0">
+                <a:solidFill>
+                  <a:srgbClr val="1A1F36"/>
+                </a:solidFill>
+                <a:latin typeface="Calibri" pitchFamily="34" charset="0"/>
+                <a:ea typeface="Calibri" pitchFamily="34" charset="-122"/>
+                <a:cs typeface="Calibri" pitchFamily="34" charset="-120"/>
+              </a:rPr>
+              <a:t>• System Logs</a:t>
+            </a:r>
+            <a:endParaRPr lang="en-US" sz="1100" dirty="0"/>
+          </a:p>
+          <a:p>
+            <a:pPr indent="0" marL="0">
+              <a:spcAft>
+                <a:spcPts val="200"/>
+              </a:spcAft>
+              <a:buNone/>
+            </a:pPr>
+            <a:r>
+              <a:rPr lang="en-US" sz="1100" dirty="0">
+                <a:solidFill>
+                  <a:srgbClr val="1A1F36"/>
+                </a:solidFill>
+                <a:latin typeface="Calibri" pitchFamily="34" charset="0"/>
+                <a:ea typeface="Calibri" pitchFamily="34" charset="-122"/>
+                <a:cs typeface="Calibri" pitchFamily="34" charset="-120"/>
+              </a:rPr>
+              <a:t>• Governance Logs</a:t>
+            </a:r>
+            <a:endParaRPr lang="en-US" sz="1100" dirty="0"/>
+          </a:p>
+          <a:p>
+            <a:pPr indent="0" marL="0">
+              <a:spcAft>
+                <a:spcPts val="200"/>
+              </a:spcAft>
+              <a:buNone/>
+            </a:pPr>
+            <a:r>
+              <a:rPr lang="en-US" sz="1100" dirty="0">
+                <a:solidFill>
+                  <a:srgbClr val="1A1F36"/>
+                </a:solidFill>
+                <a:latin typeface="Calibri" pitchFamily="34" charset="0"/>
+                <a:ea typeface="Calibri" pitchFamily="34" charset="-122"/>
+                <a:cs typeface="Calibri" pitchFamily="34" charset="-120"/>
+              </a:rPr>
+              <a:t>• All Access Logs</a:t>
+            </a:r>
+            <a:endParaRPr lang="en-US" sz="1100" dirty="0"/>
+          </a:p>
+        </p:txBody>
+      </p:sp>
+      <p:sp>
+        <p:nvSpPr>
+          <p:cNvPr id="22" name="Shape 20"/>
+          <p:cNvSpPr/>
+          <p:nvPr/>
+        </p:nvSpPr>
+        <p:spPr>
+          <a:xfrm>
+            <a:off x="457200" y="4617720"/>
+            <a:ext cx="8229600" cy="365760"/>
           </a:xfrm>
           <a:prstGeom prst="rect">
             <a:avLst/>
@@ -6696,508 +7083,46 @@
       </p:sp>
       <p:sp>
         <p:nvSpPr>
-          <p:cNvPr id="7" name="Text 5"/>
-          <p:cNvSpPr/>
-          <p:nvPr/>
-        </p:nvSpPr>
-        <p:spPr>
-          <a:xfrm>
-            <a:off x="731520" y="1874520"/>
-            <a:ext cx="3703320" cy="411480"/>
-          </a:xfrm>
-          <a:prstGeom prst="rect">
-            <a:avLst/>
-          </a:prstGeom>
-          <a:noFill/>
-          <a:ln/>
-        </p:spPr>
-        <p:txBody>
-          <a:bodyPr wrap="square" lIns="0" tIns="0" rIns="0" bIns="0" rtlCol="0" anchor="ctr"/>
-          <a:lstStyle/>
-          <a:p>
-            <a:pPr indent="0" marL="0">
-              <a:buNone/>
-            </a:pPr>
-            <a:r>
-              <a:rPr lang="en-US" sz="1700" b="1" dirty="0">
-                <a:solidFill>
-                  <a:srgbClr val="0F1B3D"/>
-                </a:solidFill>
-                <a:latin typeface="Georgia" pitchFamily="34" charset="0"/>
-                <a:ea typeface="Georgia" pitchFamily="34" charset="-122"/>
-                <a:cs typeface="Georgia" pitchFamily="34" charset="-120"/>
-              </a:rPr>
-              <a:t>JIT with Gateway</a:t>
-            </a:r>
-            <a:endParaRPr lang="en-US" sz="1700" dirty="0"/>
-          </a:p>
-        </p:txBody>
-      </p:sp>
-      <p:sp>
-        <p:nvSpPr>
-          <p:cNvPr id="8" name="Text 6"/>
-          <p:cNvSpPr/>
-          <p:nvPr/>
-        </p:nvSpPr>
-        <p:spPr>
-          <a:xfrm>
-            <a:off x="731520" y="2331720"/>
-            <a:ext cx="3703320" cy="640080"/>
-          </a:xfrm>
-          <a:prstGeom prst="rect">
-            <a:avLst/>
-          </a:prstGeom>
-          <a:noFill/>
-          <a:ln/>
-        </p:spPr>
-        <p:txBody>
-          <a:bodyPr wrap="square" lIns="0" tIns="0" rIns="0" bIns="0" rtlCol="0" anchor="ctr"/>
-          <a:lstStyle/>
-          <a:p>
-            <a:pPr indent="0" marL="0">
-              <a:buNone/>
-            </a:pPr>
-            <a:r>
-              <a:rPr lang="en-US" sz="1100" dirty="0">
-                <a:solidFill>
-                  <a:srgbClr val="1A1F36"/>
-                </a:solidFill>
-                <a:latin typeface="Calibri" pitchFamily="34" charset="0"/>
-                <a:ea typeface="Calibri" pitchFamily="34" charset="-122"/>
-                <a:cs typeface="Calibri" pitchFamily="34" charset="-120"/>
-              </a:rPr>
-              <a:t>On-the-fly access grants. With or without human-in-the-loop. Ephemeral, scoped per task.</a:t>
-            </a:r>
-            <a:endParaRPr lang="en-US" sz="1100" dirty="0"/>
-          </a:p>
-        </p:txBody>
-      </p:sp>
-      <p:sp>
-        <p:nvSpPr>
-          <p:cNvPr id="9" name="Shape 7"/>
-          <p:cNvSpPr/>
-          <p:nvPr/>
-        </p:nvSpPr>
-        <p:spPr>
-          <a:xfrm>
-            <a:off x="4800600" y="1691640"/>
-            <a:ext cx="4160520" cy="1371600"/>
-          </a:xfrm>
-          <a:prstGeom prst="rect">
-            <a:avLst/>
-          </a:prstGeom>
-          <a:solidFill>
-            <a:srgbClr val="E8EEFC"/>
-          </a:solidFill>
-          <a:ln w="12700">
-            <a:solidFill>
-              <a:srgbClr val="E8EEFC"/>
-            </a:solidFill>
-            <a:prstDash val="solid"/>
-          </a:ln>
-        </p:spPr>
-      </p:sp>
-      <p:sp>
-        <p:nvSpPr>
-          <p:cNvPr id="10" name="Shape 8"/>
-          <p:cNvSpPr/>
-          <p:nvPr/>
-        </p:nvSpPr>
-        <p:spPr>
-          <a:xfrm>
-            <a:off x="4800600" y="1691640"/>
-            <a:ext cx="73152" cy="1371600"/>
-          </a:xfrm>
-          <a:prstGeom prst="rect">
-            <a:avLst/>
-          </a:prstGeom>
-          <a:solidFill>
-            <a:srgbClr val="0F1B3D"/>
-          </a:solidFill>
-          <a:ln w="12700">
-            <a:solidFill>
-              <a:srgbClr val="0F1B3D"/>
-            </a:solidFill>
-            <a:prstDash val="solid"/>
-          </a:ln>
-        </p:spPr>
-      </p:sp>
-      <p:sp>
-        <p:nvSpPr>
-          <p:cNvPr id="11" name="Text 9"/>
-          <p:cNvSpPr/>
-          <p:nvPr/>
-        </p:nvSpPr>
-        <p:spPr>
-          <a:xfrm>
-            <a:off x="5074920" y="1874520"/>
-            <a:ext cx="3703320" cy="411480"/>
-          </a:xfrm>
-          <a:prstGeom prst="rect">
-            <a:avLst/>
-          </a:prstGeom>
-          <a:noFill/>
-          <a:ln/>
-        </p:spPr>
-        <p:txBody>
-          <a:bodyPr wrap="square" lIns="0" tIns="0" rIns="0" bIns="0" rtlCol="0" anchor="ctr"/>
-          <a:lstStyle/>
-          <a:p>
-            <a:pPr indent="0" marL="0">
-              <a:buNone/>
-            </a:pPr>
-            <a:r>
-              <a:rPr lang="en-US" sz="1700" b="1" dirty="0">
-                <a:solidFill>
-                  <a:srgbClr val="0F1B3D"/>
-                </a:solidFill>
-                <a:latin typeface="Georgia" pitchFamily="34" charset="0"/>
-                <a:ea typeface="Georgia" pitchFamily="34" charset="-122"/>
-                <a:cs typeface="Georgia" pitchFamily="34" charset="-120"/>
-              </a:rPr>
-              <a:t>JML for Agents</a:t>
-            </a:r>
-            <a:endParaRPr lang="en-US" sz="1700" dirty="0"/>
-          </a:p>
-        </p:txBody>
-      </p:sp>
-      <p:sp>
-        <p:nvSpPr>
-          <p:cNvPr id="12" name="Text 10"/>
-          <p:cNvSpPr/>
-          <p:nvPr/>
-        </p:nvSpPr>
-        <p:spPr>
-          <a:xfrm>
-            <a:off x="5074920" y="2331720"/>
-            <a:ext cx="3703320" cy="640080"/>
-          </a:xfrm>
-          <a:prstGeom prst="rect">
-            <a:avLst/>
-          </a:prstGeom>
-          <a:noFill/>
-          <a:ln/>
-        </p:spPr>
-        <p:txBody>
-          <a:bodyPr wrap="square" lIns="0" tIns="0" rIns="0" bIns="0" rtlCol="0" anchor="ctr"/>
-          <a:lstStyle/>
-          <a:p>
-            <a:pPr indent="0" marL="0">
-              <a:buNone/>
-            </a:pPr>
-            <a:r>
-              <a:rPr lang="en-US" sz="1100" dirty="0">
-                <a:solidFill>
-                  <a:srgbClr val="1A1F36"/>
-                </a:solidFill>
-                <a:latin typeface="Calibri" pitchFamily="34" charset="0"/>
-                <a:ea typeface="Calibri" pitchFamily="34" charset="-122"/>
-                <a:cs typeface="Calibri" pitchFamily="34" charset="-120"/>
-              </a:rPr>
-              <a:t>Joiner / mover / leaver lifecycle. Owner offboarded? Their agents don't linger.</a:t>
-            </a:r>
-            <a:endParaRPr lang="en-US" sz="1100" dirty="0"/>
-          </a:p>
-        </p:txBody>
-      </p:sp>
-      <p:sp>
-        <p:nvSpPr>
-          <p:cNvPr id="13" name="Shape 11"/>
-          <p:cNvSpPr/>
-          <p:nvPr/>
-        </p:nvSpPr>
-        <p:spPr>
-          <a:xfrm>
-            <a:off x="457200" y="3246120"/>
-            <a:ext cx="4160520" cy="1371600"/>
-          </a:xfrm>
-          <a:prstGeom prst="rect">
-            <a:avLst/>
-          </a:prstGeom>
-          <a:solidFill>
-            <a:srgbClr val="E8EEFC"/>
-          </a:solidFill>
-          <a:ln w="12700">
-            <a:solidFill>
-              <a:srgbClr val="E8EEFC"/>
-            </a:solidFill>
-            <a:prstDash val="solid"/>
-          </a:ln>
-        </p:spPr>
-      </p:sp>
-      <p:sp>
-        <p:nvSpPr>
-          <p:cNvPr id="14" name="Shape 12"/>
-          <p:cNvSpPr/>
-          <p:nvPr/>
-        </p:nvSpPr>
-        <p:spPr>
-          <a:xfrm>
-            <a:off x="457200" y="3246120"/>
-            <a:ext cx="73152" cy="1371600"/>
-          </a:xfrm>
-          <a:prstGeom prst="rect">
-            <a:avLst/>
-          </a:prstGeom>
-          <a:solidFill>
-            <a:srgbClr val="0F1B3D"/>
-          </a:solidFill>
-          <a:ln w="12700">
-            <a:solidFill>
-              <a:srgbClr val="0F1B3D"/>
-            </a:solidFill>
-            <a:prstDash val="solid"/>
-          </a:ln>
-        </p:spPr>
-      </p:sp>
-      <p:sp>
-        <p:nvSpPr>
-          <p:cNvPr id="15" name="Text 13"/>
-          <p:cNvSpPr/>
-          <p:nvPr/>
-        </p:nvSpPr>
-        <p:spPr>
-          <a:xfrm>
-            <a:off x="731520" y="3429000"/>
-            <a:ext cx="3703320" cy="411480"/>
-          </a:xfrm>
-          <a:prstGeom prst="rect">
-            <a:avLst/>
-          </a:prstGeom>
-          <a:noFill/>
-          <a:ln/>
-        </p:spPr>
-        <p:txBody>
-          <a:bodyPr wrap="square" lIns="0" tIns="0" rIns="0" bIns="0" rtlCol="0" anchor="ctr"/>
-          <a:lstStyle/>
-          <a:p>
-            <a:pPr indent="0" marL="0">
-              <a:buNone/>
-            </a:pPr>
-            <a:r>
-              <a:rPr lang="en-US" sz="1700" b="1" dirty="0">
-                <a:solidFill>
-                  <a:srgbClr val="0F1B3D"/>
-                </a:solidFill>
-                <a:latin typeface="Georgia" pitchFamily="34" charset="0"/>
-                <a:ea typeface="Georgia" pitchFamily="34" charset="-122"/>
-                <a:cs typeface="Georgia" pitchFamily="34" charset="-120"/>
-              </a:rPr>
-              <a:t>Onboarding</a:t>
-            </a:r>
-            <a:endParaRPr lang="en-US" sz="1700" dirty="0"/>
-          </a:p>
-        </p:txBody>
-      </p:sp>
-      <p:sp>
-        <p:nvSpPr>
-          <p:cNvPr id="16" name="Text 14"/>
-          <p:cNvSpPr/>
-          <p:nvPr/>
-        </p:nvSpPr>
-        <p:spPr>
-          <a:xfrm>
-            <a:off x="731520" y="3886200"/>
-            <a:ext cx="3703320" cy="640080"/>
-          </a:xfrm>
-          <a:prstGeom prst="rect">
-            <a:avLst/>
-          </a:prstGeom>
-          <a:noFill/>
-          <a:ln/>
-        </p:spPr>
-        <p:txBody>
-          <a:bodyPr wrap="square" lIns="0" tIns="0" rIns="0" bIns="0" rtlCol="0" anchor="ctr"/>
-          <a:lstStyle/>
-          <a:p>
-            <a:pPr indent="0" marL="0">
-              <a:buNone/>
-            </a:pPr>
-            <a:r>
-              <a:rPr lang="en-US" sz="1100" dirty="0">
-                <a:solidFill>
-                  <a:srgbClr val="1A1F36"/>
-                </a:solidFill>
-                <a:latin typeface="Calibri" pitchFamily="34" charset="0"/>
-                <a:ea typeface="Calibri" pitchFamily="34" charset="-122"/>
-                <a:cs typeface="Calibri" pitchFamily="34" charset="-120"/>
-              </a:rPr>
-              <a:t>UI for connecting apps to the Gateway. Secured setup flow — self-service.</a:t>
-            </a:r>
-            <a:endParaRPr lang="en-US" sz="1100" dirty="0"/>
-          </a:p>
-        </p:txBody>
-      </p:sp>
-      <p:sp>
-        <p:nvSpPr>
-          <p:cNvPr id="17" name="Shape 15"/>
-          <p:cNvSpPr/>
-          <p:nvPr/>
-        </p:nvSpPr>
-        <p:spPr>
-          <a:xfrm>
-            <a:off x="4800600" y="3246120"/>
-            <a:ext cx="4160520" cy="1371600"/>
-          </a:xfrm>
-          <a:prstGeom prst="rect">
-            <a:avLst/>
-          </a:prstGeom>
-          <a:solidFill>
-            <a:srgbClr val="E8EEFC"/>
-          </a:solidFill>
-          <a:ln w="12700">
-            <a:solidFill>
-              <a:srgbClr val="E8EEFC"/>
-            </a:solidFill>
-            <a:prstDash val="solid"/>
-          </a:ln>
-        </p:spPr>
-      </p:sp>
-      <p:sp>
-        <p:nvSpPr>
-          <p:cNvPr id="18" name="Shape 16"/>
-          <p:cNvSpPr/>
-          <p:nvPr/>
-        </p:nvSpPr>
-        <p:spPr>
-          <a:xfrm>
-            <a:off x="4800600" y="3246120"/>
-            <a:ext cx="73152" cy="1371600"/>
-          </a:xfrm>
-          <a:prstGeom prst="rect">
-            <a:avLst/>
-          </a:prstGeom>
-          <a:solidFill>
-            <a:srgbClr val="0F1B3D"/>
-          </a:solidFill>
-          <a:ln w="12700">
-            <a:solidFill>
-              <a:srgbClr val="0F1B3D"/>
-            </a:solidFill>
-            <a:prstDash val="solid"/>
-          </a:ln>
-        </p:spPr>
-      </p:sp>
-      <p:sp>
-        <p:nvSpPr>
-          <p:cNvPr id="19" name="Text 17"/>
-          <p:cNvSpPr/>
-          <p:nvPr/>
-        </p:nvSpPr>
-        <p:spPr>
-          <a:xfrm>
-            <a:off x="5074920" y="3429000"/>
-            <a:ext cx="3703320" cy="411480"/>
-          </a:xfrm>
-          <a:prstGeom prst="rect">
-            <a:avLst/>
-          </a:prstGeom>
-          <a:noFill/>
-          <a:ln/>
-        </p:spPr>
-        <p:txBody>
-          <a:bodyPr wrap="square" lIns="0" tIns="0" rIns="0" bIns="0" rtlCol="0" anchor="ctr"/>
-          <a:lstStyle/>
-          <a:p>
-            <a:pPr indent="0" marL="0">
-              <a:buNone/>
-            </a:pPr>
-            <a:r>
-              <a:rPr lang="en-US" sz="1700" b="1" dirty="0">
-                <a:solidFill>
-                  <a:srgbClr val="0F1B3D"/>
-                </a:solidFill>
-                <a:latin typeface="Georgia" pitchFamily="34" charset="0"/>
-                <a:ea typeface="Georgia" pitchFamily="34" charset="-122"/>
-                <a:cs typeface="Georgia" pitchFamily="34" charset="-120"/>
-              </a:rPr>
-              <a:t>Agent Intent</a:t>
-            </a:r>
-            <a:endParaRPr lang="en-US" sz="1700" dirty="0"/>
-          </a:p>
-        </p:txBody>
-      </p:sp>
-      <p:sp>
-        <p:nvSpPr>
-          <p:cNvPr id="20" name="Text 18"/>
-          <p:cNvSpPr/>
-          <p:nvPr/>
-        </p:nvSpPr>
-        <p:spPr>
-          <a:xfrm>
-            <a:off x="5074920" y="3886200"/>
-            <a:ext cx="3703320" cy="640080"/>
-          </a:xfrm>
-          <a:prstGeom prst="rect">
-            <a:avLst/>
-          </a:prstGeom>
-          <a:noFill/>
-          <a:ln/>
-        </p:spPr>
-        <p:txBody>
-          <a:bodyPr wrap="square" lIns="0" tIns="0" rIns="0" bIns="0" rtlCol="0" anchor="ctr"/>
-          <a:lstStyle/>
-          <a:p>
-            <a:pPr indent="0" marL="0">
-              <a:buNone/>
-            </a:pPr>
-            <a:r>
-              <a:rPr lang="en-US" sz="1100" dirty="0">
-                <a:solidFill>
-                  <a:srgbClr val="1A1F36"/>
-                </a:solidFill>
-                <a:latin typeface="Calibri" pitchFamily="34" charset="0"/>
-                <a:ea typeface="Calibri" pitchFamily="34" charset="-122"/>
-                <a:cs typeface="Calibri" pitchFamily="34" charset="-120"/>
-              </a:rPr>
-              <a:t>Identity + behavior + context + data sensitivity, continuously evaluated. Vision horizon.</a:t>
-            </a:r>
-            <a:endParaRPr lang="en-US" sz="1100" dirty="0"/>
-          </a:p>
-        </p:txBody>
-      </p:sp>
-      <p:sp>
-        <p:nvSpPr>
-          <p:cNvPr id="21" name="Text 19"/>
-          <p:cNvSpPr/>
-          <p:nvPr/>
-        </p:nvSpPr>
-        <p:spPr>
-          <a:xfrm>
-            <a:off x="457200" y="4617720"/>
-            <a:ext cx="8229600" cy="274320"/>
-          </a:xfrm>
-          <a:prstGeom prst="rect">
-            <a:avLst/>
-          </a:prstGeom>
-          <a:noFill/>
-          <a:ln/>
-        </p:spPr>
-        <p:txBody>
-          <a:bodyPr wrap="square" lIns="0" tIns="0" rIns="0" bIns="0" rtlCol="0" anchor="ctr"/>
-          <a:lstStyle/>
-          <a:p>
-            <a:pPr algn="ctr" indent="0" marL="0">
-              <a:buNone/>
-            </a:pPr>
-            <a:r>
-              <a:rPr lang="en-US" sz="1100" i="1" dirty="0">
-                <a:solidFill>
-                  <a:srgbClr val="64748B"/>
-                </a:solidFill>
-                <a:latin typeface="Calibri" pitchFamily="34" charset="0"/>
-                <a:ea typeface="Calibri" pitchFamily="34" charset="-122"/>
-                <a:cs typeface="Calibri" pitchFamily="34" charset="-120"/>
-              </a:rPr>
-              <a:t>Sequenced after P0. Omri scopes these in parallel while Eng researches Gateway Core.</a:t>
-            </a:r>
-            <a:endParaRPr lang="en-US" sz="1100" dirty="0"/>
-          </a:p>
-        </p:txBody>
-      </p:sp>
-      <p:sp>
-        <p:nvSpPr>
-          <p:cNvPr id="22" name="Text 20"/>
+          <p:cNvPr id="23" name="Text 21"/>
+          <p:cNvSpPr/>
+          <p:nvPr/>
+        </p:nvSpPr>
+        <p:spPr>
+          <a:xfrm>
+            <a:off x="640080" y="4617720"/>
+            <a:ext cx="7863840" cy="365760"/>
+          </a:xfrm>
+          <a:prstGeom prst="rect">
+            <a:avLst/>
+          </a:prstGeom>
+          <a:noFill/>
+          <a:ln/>
+        </p:spPr>
+        <p:txBody>
+          <a:bodyPr wrap="square" lIns="0" tIns="0" rIns="0" bIns="0" rtlCol="0" anchor="ctr"/>
+          <a:lstStyle/>
+          <a:p>
+            <a:pPr indent="0" marL="0">
+              <a:buNone/>
+            </a:pPr>
+            <a:r>
+              <a:rPr lang="en-US" sz="1200" b="1" dirty="0">
+                <a:solidFill>
+                  <a:srgbClr val="FFFFFF"/>
+                </a:solidFill>
+                <a:latin typeface="Calibri" pitchFamily="34" charset="0"/>
+                <a:ea typeface="Calibri" pitchFamily="34" charset="-122"/>
+                <a:cs typeface="Calibri" pitchFamily="34" charset="-120"/>
+              </a:rPr>
+              <a:t>Identiverse · June 15 · harsh deadline.</a:t>
+            </a:r>
+            <a:endParaRPr lang="en-US" sz="1200" dirty="0"/>
+          </a:p>
+        </p:txBody>
+      </p:sp>
+      <p:sp>
+        <p:nvSpPr>
+          <p:cNvPr id="24" name="Text 22"/>
           <p:cNvSpPr/>
           <p:nvPr/>
         </p:nvSpPr>
@@ -7228,7 +7153,7 @@
                 <a:ea typeface="Calibri" pitchFamily="34" charset="-122"/>
                 <a:cs typeface="Calibri" pitchFamily="34" charset="-120"/>
               </a:rPr>
-              <a:t>7 / 8</a:t>
+              <a:t>7 / 9</a:t>
             </a:r>
             <a:endParaRPr lang="en-US" sz="900" dirty="0"/>
           </a:p>
@@ -7245,6 +7170,731 @@
 <file path=ppt/slides/slide8.xml><?xml version="1.0" encoding="utf-8"?>
 <p:sld xmlns:a="http://schemas.openxmlformats.org/drawingml/2006/main" xmlns:r="http://schemas.openxmlformats.org/officeDocument/2006/relationships" xmlns:p="http://schemas.openxmlformats.org/presentationml/2006/main">
   <p:cSld name="Slide 8">
+    <p:bg>
+      <p:bgPr>
+        <a:solidFill>
+          <a:srgbClr val="FFFFFF"/>
+        </a:solidFill>
+      </p:bgPr>
+    </p:bg>
+    <p:spTree>
+      <p:nvGrpSpPr>
+        <p:cNvPr id="1" name=""/>
+        <p:cNvGrpSpPr/>
+        <p:nvPr/>
+      </p:nvGrpSpPr>
+      <p:grpSpPr>
+        <a:xfrm>
+          <a:off x="0" y="0"/>
+          <a:ext cx="0" cy="0"/>
+          <a:chOff x="0" y="0"/>
+          <a:chExt cx="0" cy="0"/>
+        </a:xfrm>
+      </p:grpSpPr>
+      <p:sp>
+        <p:nvSpPr>
+          <p:cNvPr id="2" name="Shape 0"/>
+          <p:cNvSpPr/>
+          <p:nvPr/>
+        </p:nvSpPr>
+        <p:spPr>
+          <a:xfrm>
+            <a:off x="0" y="0"/>
+            <a:ext cx="109728" cy="5143500"/>
+          </a:xfrm>
+          <a:prstGeom prst="rect">
+            <a:avLst/>
+          </a:prstGeom>
+          <a:solidFill>
+            <a:srgbClr val="02C39A"/>
+          </a:solidFill>
+          <a:ln w="12700">
+            <a:solidFill>
+              <a:srgbClr val="02C39A"/>
+            </a:solidFill>
+            <a:prstDash val="solid"/>
+          </a:ln>
+        </p:spPr>
+      </p:sp>
+      <p:sp>
+        <p:nvSpPr>
+          <p:cNvPr id="3" name="Text 1"/>
+          <p:cNvSpPr/>
+          <p:nvPr/>
+        </p:nvSpPr>
+        <p:spPr>
+          <a:xfrm>
+            <a:off x="457200" y="365760"/>
+            <a:ext cx="7315200" cy="274320"/>
+          </a:xfrm>
+          <a:prstGeom prst="rect">
+            <a:avLst/>
+          </a:prstGeom>
+          <a:noFill/>
+          <a:ln/>
+        </p:spPr>
+        <p:txBody>
+          <a:bodyPr wrap="square" lIns="0" tIns="0" rIns="0" bIns="0" rtlCol="0" anchor="ctr"/>
+          <a:lstStyle/>
+          <a:p>
+            <a:pPr indent="0" marL="0">
+              <a:buNone/>
+            </a:pPr>
+            <a:r>
+              <a:rPr lang="en-US" sz="1100" b="1" spc="400" kern="0" dirty="0">
+                <a:solidFill>
+                  <a:srgbClr val="64748B"/>
+                </a:solidFill>
+                <a:latin typeface="Calibri" pitchFamily="34" charset="0"/>
+                <a:ea typeface="Calibri" pitchFamily="34" charset="-122"/>
+                <a:cs typeface="Calibri" pitchFamily="34" charset="-120"/>
+              </a:rPr>
+              <a:t>07 · Post-P0</a:t>
+            </a:r>
+            <a:endParaRPr lang="en-US" sz="1100" dirty="0"/>
+          </a:p>
+        </p:txBody>
+      </p:sp>
+      <p:sp>
+        <p:nvSpPr>
+          <p:cNvPr id="4" name="Text 2"/>
+          <p:cNvSpPr/>
+          <p:nvPr/>
+        </p:nvSpPr>
+        <p:spPr>
+          <a:xfrm>
+            <a:off x="457200" y="731520"/>
+            <a:ext cx="8229600" cy="777240"/>
+          </a:xfrm>
+          <a:prstGeom prst="rect">
+            <a:avLst/>
+          </a:prstGeom>
+          <a:noFill/>
+          <a:ln/>
+        </p:spPr>
+        <p:txBody>
+          <a:bodyPr wrap="square" lIns="0" tIns="0" rIns="0" bIns="0" rtlCol="0" anchor="ctr"/>
+          <a:lstStyle/>
+          <a:p>
+            <a:pPr indent="0" marL="0">
+              <a:buNone/>
+            </a:pPr>
+            <a:r>
+              <a:rPr lang="en-US" sz="3400" b="1" dirty="0">
+                <a:solidFill>
+                  <a:srgbClr val="1A1F36"/>
+                </a:solidFill>
+                <a:latin typeface="Georgia" pitchFamily="34" charset="0"/>
+                <a:ea typeface="Georgia" pitchFamily="34" charset="-122"/>
+                <a:cs typeface="Georgia" pitchFamily="34" charset="-120"/>
+              </a:rPr>
+              <a:t>Where this goes next.</a:t>
+            </a:r>
+            <a:endParaRPr lang="en-US" sz="3400" dirty="0"/>
+          </a:p>
+        </p:txBody>
+      </p:sp>
+      <p:sp>
+        <p:nvSpPr>
+          <p:cNvPr id="5" name="Shape 3"/>
+          <p:cNvSpPr/>
+          <p:nvPr/>
+        </p:nvSpPr>
+        <p:spPr>
+          <a:xfrm>
+            <a:off x="457200" y="1691640"/>
+            <a:ext cx="4160520" cy="1371600"/>
+          </a:xfrm>
+          <a:prstGeom prst="rect">
+            <a:avLst/>
+          </a:prstGeom>
+          <a:solidFill>
+            <a:srgbClr val="E8EEFC"/>
+          </a:solidFill>
+          <a:ln w="12700">
+            <a:solidFill>
+              <a:srgbClr val="E8EEFC"/>
+            </a:solidFill>
+            <a:prstDash val="solid"/>
+          </a:ln>
+        </p:spPr>
+      </p:sp>
+      <p:sp>
+        <p:nvSpPr>
+          <p:cNvPr id="6" name="Shape 4"/>
+          <p:cNvSpPr/>
+          <p:nvPr/>
+        </p:nvSpPr>
+        <p:spPr>
+          <a:xfrm>
+            <a:off x="457200" y="1691640"/>
+            <a:ext cx="73152" cy="1371600"/>
+          </a:xfrm>
+          <a:prstGeom prst="rect">
+            <a:avLst/>
+          </a:prstGeom>
+          <a:solidFill>
+            <a:srgbClr val="0F1B3D"/>
+          </a:solidFill>
+          <a:ln w="12700">
+            <a:solidFill>
+              <a:srgbClr val="0F1B3D"/>
+            </a:solidFill>
+            <a:prstDash val="solid"/>
+          </a:ln>
+        </p:spPr>
+      </p:sp>
+      <p:sp>
+        <p:nvSpPr>
+          <p:cNvPr id="7" name="Text 5"/>
+          <p:cNvSpPr/>
+          <p:nvPr/>
+        </p:nvSpPr>
+        <p:spPr>
+          <a:xfrm>
+            <a:off x="731520" y="1856232"/>
+            <a:ext cx="3703320" cy="411480"/>
+          </a:xfrm>
+          <a:prstGeom prst="rect">
+            <a:avLst/>
+          </a:prstGeom>
+          <a:noFill/>
+          <a:ln/>
+        </p:spPr>
+        <p:txBody>
+          <a:bodyPr wrap="square" lIns="0" tIns="0" rIns="0" bIns="0" rtlCol="0" anchor="ctr"/>
+          <a:lstStyle/>
+          <a:p>
+            <a:pPr indent="0" marL="0">
+              <a:buNone/>
+            </a:pPr>
+            <a:r>
+              <a:rPr lang="en-US" sz="1700" b="1" dirty="0">
+                <a:solidFill>
+                  <a:srgbClr val="0F1B3D"/>
+                </a:solidFill>
+                <a:latin typeface="Georgia" pitchFamily="34" charset="0"/>
+                <a:ea typeface="Georgia" pitchFamily="34" charset="-122"/>
+                <a:cs typeface="Georgia" pitchFamily="34" charset="-120"/>
+              </a:rPr>
+              <a:t>JIT with Gateway</a:t>
+            </a:r>
+            <a:endParaRPr lang="en-US" sz="1700" dirty="0"/>
+          </a:p>
+        </p:txBody>
+      </p:sp>
+      <p:sp>
+        <p:nvSpPr>
+          <p:cNvPr id="8" name="Text 6"/>
+          <p:cNvSpPr/>
+          <p:nvPr/>
+        </p:nvSpPr>
+        <p:spPr>
+          <a:xfrm>
+            <a:off x="731520" y="2313432"/>
+            <a:ext cx="3703320" cy="658368"/>
+          </a:xfrm>
+          <a:prstGeom prst="rect">
+            <a:avLst/>
+          </a:prstGeom>
+          <a:noFill/>
+          <a:ln/>
+        </p:spPr>
+        <p:txBody>
+          <a:bodyPr wrap="square" lIns="0" tIns="0" rIns="0" bIns="0" rtlCol="0" anchor="ctr"/>
+          <a:lstStyle/>
+          <a:p>
+            <a:pPr indent="0" marL="0">
+              <a:buNone/>
+            </a:pPr>
+            <a:r>
+              <a:rPr lang="en-US" sz="1100" dirty="0">
+                <a:solidFill>
+                  <a:srgbClr val="1A1F36"/>
+                </a:solidFill>
+                <a:latin typeface="Calibri" pitchFamily="34" charset="0"/>
+                <a:ea typeface="Calibri" pitchFamily="34" charset="-122"/>
+                <a:cs typeface="Calibri" pitchFamily="34" charset="-120"/>
+              </a:rPr>
+              <a:t>On-the-fly access grants, with or without human-in-the-loop. Ephemeral, scoped per task.</a:t>
+            </a:r>
+            <a:endParaRPr lang="en-US" sz="1100" dirty="0"/>
+          </a:p>
+        </p:txBody>
+      </p:sp>
+      <p:sp>
+        <p:nvSpPr>
+          <p:cNvPr id="9" name="Shape 7"/>
+          <p:cNvSpPr/>
+          <p:nvPr/>
+        </p:nvSpPr>
+        <p:spPr>
+          <a:xfrm>
+            <a:off x="4800600" y="1691640"/>
+            <a:ext cx="4160520" cy="1371600"/>
+          </a:xfrm>
+          <a:prstGeom prst="rect">
+            <a:avLst/>
+          </a:prstGeom>
+          <a:solidFill>
+            <a:srgbClr val="E8EEFC"/>
+          </a:solidFill>
+          <a:ln w="12700">
+            <a:solidFill>
+              <a:srgbClr val="E8EEFC"/>
+            </a:solidFill>
+            <a:prstDash val="solid"/>
+          </a:ln>
+        </p:spPr>
+      </p:sp>
+      <p:sp>
+        <p:nvSpPr>
+          <p:cNvPr id="10" name="Shape 8"/>
+          <p:cNvSpPr/>
+          <p:nvPr/>
+        </p:nvSpPr>
+        <p:spPr>
+          <a:xfrm>
+            <a:off x="4800600" y="1691640"/>
+            <a:ext cx="73152" cy="1371600"/>
+          </a:xfrm>
+          <a:prstGeom prst="rect">
+            <a:avLst/>
+          </a:prstGeom>
+          <a:solidFill>
+            <a:srgbClr val="0F1B3D"/>
+          </a:solidFill>
+          <a:ln w="12700">
+            <a:solidFill>
+              <a:srgbClr val="0F1B3D"/>
+            </a:solidFill>
+            <a:prstDash val="solid"/>
+          </a:ln>
+        </p:spPr>
+      </p:sp>
+      <p:sp>
+        <p:nvSpPr>
+          <p:cNvPr id="11" name="Text 9"/>
+          <p:cNvSpPr/>
+          <p:nvPr/>
+        </p:nvSpPr>
+        <p:spPr>
+          <a:xfrm>
+            <a:off x="5074920" y="1856232"/>
+            <a:ext cx="3703320" cy="411480"/>
+          </a:xfrm>
+          <a:prstGeom prst="rect">
+            <a:avLst/>
+          </a:prstGeom>
+          <a:noFill/>
+          <a:ln/>
+        </p:spPr>
+        <p:txBody>
+          <a:bodyPr wrap="square" lIns="0" tIns="0" rIns="0" bIns="0" rtlCol="0" anchor="ctr"/>
+          <a:lstStyle/>
+          <a:p>
+            <a:pPr indent="0" marL="0">
+              <a:buNone/>
+            </a:pPr>
+            <a:r>
+              <a:rPr lang="en-US" sz="1700" b="1" dirty="0">
+                <a:solidFill>
+                  <a:srgbClr val="0F1B3D"/>
+                </a:solidFill>
+                <a:latin typeface="Georgia" pitchFamily="34" charset="0"/>
+                <a:ea typeface="Georgia" pitchFamily="34" charset="-122"/>
+                <a:cs typeface="Georgia" pitchFamily="34" charset="-120"/>
+              </a:rPr>
+              <a:t>JML for Agents</a:t>
+            </a:r>
+            <a:endParaRPr lang="en-US" sz="1700" dirty="0"/>
+          </a:p>
+        </p:txBody>
+      </p:sp>
+      <p:sp>
+        <p:nvSpPr>
+          <p:cNvPr id="12" name="Text 10"/>
+          <p:cNvSpPr/>
+          <p:nvPr/>
+        </p:nvSpPr>
+        <p:spPr>
+          <a:xfrm>
+            <a:off x="5074920" y="2313432"/>
+            <a:ext cx="3703320" cy="658368"/>
+          </a:xfrm>
+          <a:prstGeom prst="rect">
+            <a:avLst/>
+          </a:prstGeom>
+          <a:noFill/>
+          <a:ln/>
+        </p:spPr>
+        <p:txBody>
+          <a:bodyPr wrap="square" lIns="0" tIns="0" rIns="0" bIns="0" rtlCol="0" anchor="ctr"/>
+          <a:lstStyle/>
+          <a:p>
+            <a:pPr indent="0" marL="0">
+              <a:buNone/>
+            </a:pPr>
+            <a:r>
+              <a:rPr lang="en-US" sz="1100" dirty="0">
+                <a:solidFill>
+                  <a:srgbClr val="1A1F36"/>
+                </a:solidFill>
+                <a:latin typeface="Calibri" pitchFamily="34" charset="0"/>
+                <a:ea typeface="Calibri" pitchFamily="34" charset="-122"/>
+                <a:cs typeface="Calibri" pitchFamily="34" charset="-120"/>
+              </a:rPr>
+              <a:t>Joiner / mover / leaver lifecycle. Owner offboarded? Their agents don't linger.</a:t>
+            </a:r>
+            <a:endParaRPr lang="en-US" sz="1100" dirty="0"/>
+          </a:p>
+        </p:txBody>
+      </p:sp>
+      <p:sp>
+        <p:nvSpPr>
+          <p:cNvPr id="13" name="Shape 11"/>
+          <p:cNvSpPr/>
+          <p:nvPr/>
+        </p:nvSpPr>
+        <p:spPr>
+          <a:xfrm>
+            <a:off x="457200" y="3246120"/>
+            <a:ext cx="4160520" cy="1371600"/>
+          </a:xfrm>
+          <a:prstGeom prst="rect">
+            <a:avLst/>
+          </a:prstGeom>
+          <a:solidFill>
+            <a:srgbClr val="E8EEFC"/>
+          </a:solidFill>
+          <a:ln w="12700">
+            <a:solidFill>
+              <a:srgbClr val="E8EEFC"/>
+            </a:solidFill>
+            <a:prstDash val="solid"/>
+          </a:ln>
+        </p:spPr>
+      </p:sp>
+      <p:sp>
+        <p:nvSpPr>
+          <p:cNvPr id="14" name="Shape 12"/>
+          <p:cNvSpPr/>
+          <p:nvPr/>
+        </p:nvSpPr>
+        <p:spPr>
+          <a:xfrm>
+            <a:off x="457200" y="3246120"/>
+            <a:ext cx="73152" cy="1371600"/>
+          </a:xfrm>
+          <a:prstGeom prst="rect">
+            <a:avLst/>
+          </a:prstGeom>
+          <a:solidFill>
+            <a:srgbClr val="0F1B3D"/>
+          </a:solidFill>
+          <a:ln w="12700">
+            <a:solidFill>
+              <a:srgbClr val="0F1B3D"/>
+            </a:solidFill>
+            <a:prstDash val="solid"/>
+          </a:ln>
+        </p:spPr>
+      </p:sp>
+      <p:sp>
+        <p:nvSpPr>
+          <p:cNvPr id="15" name="Text 13"/>
+          <p:cNvSpPr/>
+          <p:nvPr/>
+        </p:nvSpPr>
+        <p:spPr>
+          <a:xfrm>
+            <a:off x="731520" y="3410712"/>
+            <a:ext cx="3703320" cy="411480"/>
+          </a:xfrm>
+          <a:prstGeom prst="rect">
+            <a:avLst/>
+          </a:prstGeom>
+          <a:noFill/>
+          <a:ln/>
+        </p:spPr>
+        <p:txBody>
+          <a:bodyPr wrap="square" lIns="0" tIns="0" rIns="0" bIns="0" rtlCol="0" anchor="ctr"/>
+          <a:lstStyle/>
+          <a:p>
+            <a:pPr indent="0" marL="0">
+              <a:buNone/>
+            </a:pPr>
+            <a:r>
+              <a:rPr lang="en-US" sz="1700" b="1" dirty="0">
+                <a:solidFill>
+                  <a:srgbClr val="0F1B3D"/>
+                </a:solidFill>
+                <a:latin typeface="Georgia" pitchFamily="34" charset="0"/>
+                <a:ea typeface="Georgia" pitchFamily="34" charset="-122"/>
+                <a:cs typeface="Georgia" pitchFamily="34" charset="-120"/>
+              </a:rPr>
+              <a:t>Onboarding</a:t>
+            </a:r>
+            <a:endParaRPr lang="en-US" sz="1700" dirty="0"/>
+          </a:p>
+        </p:txBody>
+      </p:sp>
+      <p:sp>
+        <p:nvSpPr>
+          <p:cNvPr id="16" name="Text 14"/>
+          <p:cNvSpPr/>
+          <p:nvPr/>
+        </p:nvSpPr>
+        <p:spPr>
+          <a:xfrm>
+            <a:off x="731520" y="3867912"/>
+            <a:ext cx="3703320" cy="658368"/>
+          </a:xfrm>
+          <a:prstGeom prst="rect">
+            <a:avLst/>
+          </a:prstGeom>
+          <a:noFill/>
+          <a:ln/>
+        </p:spPr>
+        <p:txBody>
+          <a:bodyPr wrap="square" lIns="0" tIns="0" rIns="0" bIns="0" rtlCol="0" anchor="ctr"/>
+          <a:lstStyle/>
+          <a:p>
+            <a:pPr indent="0" marL="0">
+              <a:buNone/>
+            </a:pPr>
+            <a:r>
+              <a:rPr lang="en-US" sz="1100" dirty="0">
+                <a:solidFill>
+                  <a:srgbClr val="1A1F36"/>
+                </a:solidFill>
+                <a:latin typeface="Calibri" pitchFamily="34" charset="0"/>
+                <a:ea typeface="Calibri" pitchFamily="34" charset="-122"/>
+                <a:cs typeface="Calibri" pitchFamily="34" charset="-120"/>
+              </a:rPr>
+              <a:t>UI for connecting apps to the Gateway. Secured setup — self-service, not a services engagement.</a:t>
+            </a:r>
+            <a:endParaRPr lang="en-US" sz="1100" dirty="0"/>
+          </a:p>
+        </p:txBody>
+      </p:sp>
+      <p:sp>
+        <p:nvSpPr>
+          <p:cNvPr id="17" name="Shape 15"/>
+          <p:cNvSpPr/>
+          <p:nvPr/>
+        </p:nvSpPr>
+        <p:spPr>
+          <a:xfrm>
+            <a:off x="4800600" y="3246120"/>
+            <a:ext cx="4160520" cy="1371600"/>
+          </a:xfrm>
+          <a:prstGeom prst="rect">
+            <a:avLst/>
+          </a:prstGeom>
+          <a:solidFill>
+            <a:srgbClr val="E8EEFC"/>
+          </a:solidFill>
+          <a:ln w="12700">
+            <a:solidFill>
+              <a:srgbClr val="E8EEFC"/>
+            </a:solidFill>
+            <a:prstDash val="solid"/>
+          </a:ln>
+        </p:spPr>
+      </p:sp>
+      <p:sp>
+        <p:nvSpPr>
+          <p:cNvPr id="18" name="Shape 16"/>
+          <p:cNvSpPr/>
+          <p:nvPr/>
+        </p:nvSpPr>
+        <p:spPr>
+          <a:xfrm>
+            <a:off x="4800600" y="3246120"/>
+            <a:ext cx="73152" cy="1371600"/>
+          </a:xfrm>
+          <a:prstGeom prst="rect">
+            <a:avLst/>
+          </a:prstGeom>
+          <a:solidFill>
+            <a:srgbClr val="0F1B3D"/>
+          </a:solidFill>
+          <a:ln w="12700">
+            <a:solidFill>
+              <a:srgbClr val="0F1B3D"/>
+            </a:solidFill>
+            <a:prstDash val="solid"/>
+          </a:ln>
+        </p:spPr>
+      </p:sp>
+      <p:sp>
+        <p:nvSpPr>
+          <p:cNvPr id="19" name="Text 17"/>
+          <p:cNvSpPr/>
+          <p:nvPr/>
+        </p:nvSpPr>
+        <p:spPr>
+          <a:xfrm>
+            <a:off x="5074920" y="3410712"/>
+            <a:ext cx="3703320" cy="411480"/>
+          </a:xfrm>
+          <a:prstGeom prst="rect">
+            <a:avLst/>
+          </a:prstGeom>
+          <a:noFill/>
+          <a:ln/>
+        </p:spPr>
+        <p:txBody>
+          <a:bodyPr wrap="square" lIns="0" tIns="0" rIns="0" bIns="0" rtlCol="0" anchor="ctr"/>
+          <a:lstStyle/>
+          <a:p>
+            <a:pPr indent="0" marL="0">
+              <a:buNone/>
+            </a:pPr>
+            <a:r>
+              <a:rPr lang="en-US" sz="1700" b="1" dirty="0">
+                <a:solidFill>
+                  <a:srgbClr val="0F1B3D"/>
+                </a:solidFill>
+                <a:latin typeface="Georgia" pitchFamily="34" charset="0"/>
+                <a:ea typeface="Georgia" pitchFamily="34" charset="-122"/>
+                <a:cs typeface="Georgia" pitchFamily="34" charset="-120"/>
+              </a:rPr>
+              <a:t>Agent Intent</a:t>
+            </a:r>
+            <a:endParaRPr lang="en-US" sz="1700" dirty="0"/>
+          </a:p>
+        </p:txBody>
+      </p:sp>
+      <p:sp>
+        <p:nvSpPr>
+          <p:cNvPr id="20" name="Text 18"/>
+          <p:cNvSpPr/>
+          <p:nvPr/>
+        </p:nvSpPr>
+        <p:spPr>
+          <a:xfrm>
+            <a:off x="5074920" y="3867912"/>
+            <a:ext cx="3703320" cy="658368"/>
+          </a:xfrm>
+          <a:prstGeom prst="rect">
+            <a:avLst/>
+          </a:prstGeom>
+          <a:noFill/>
+          <a:ln/>
+        </p:spPr>
+        <p:txBody>
+          <a:bodyPr wrap="square" lIns="0" tIns="0" rIns="0" bIns="0" rtlCol="0" anchor="ctr"/>
+          <a:lstStyle/>
+          <a:p>
+            <a:pPr indent="0" marL="0">
+              <a:buNone/>
+            </a:pPr>
+            <a:r>
+              <a:rPr lang="en-US" sz="1100" dirty="0">
+                <a:solidFill>
+                  <a:srgbClr val="1A1F36"/>
+                </a:solidFill>
+                <a:latin typeface="Calibri" pitchFamily="34" charset="0"/>
+                <a:ea typeface="Calibri" pitchFamily="34" charset="-122"/>
+                <a:cs typeface="Calibri" pitchFamily="34" charset="-120"/>
+              </a:rPr>
+              <a:t>Identity + behavior + context + data sensitivity, continuously evaluated. The vision horizon.</a:t>
+            </a:r>
+            <a:endParaRPr lang="en-US" sz="1100" dirty="0"/>
+          </a:p>
+        </p:txBody>
+      </p:sp>
+      <p:sp>
+        <p:nvSpPr>
+          <p:cNvPr id="21" name="Text 19"/>
+          <p:cNvSpPr/>
+          <p:nvPr/>
+        </p:nvSpPr>
+        <p:spPr>
+          <a:xfrm>
+            <a:off x="457200" y="4617720"/>
+            <a:ext cx="8229600" cy="274320"/>
+          </a:xfrm>
+          <a:prstGeom prst="rect">
+            <a:avLst/>
+          </a:prstGeom>
+          <a:noFill/>
+          <a:ln/>
+        </p:spPr>
+        <p:txBody>
+          <a:bodyPr wrap="square" lIns="0" tIns="0" rIns="0" bIns="0" rtlCol="0" anchor="ctr"/>
+          <a:lstStyle/>
+          <a:p>
+            <a:pPr algn="ctr" indent="0" marL="0">
+              <a:buNone/>
+            </a:pPr>
+            <a:r>
+              <a:rPr lang="en-US" sz="1100" i="1" dirty="0">
+                <a:solidFill>
+                  <a:srgbClr val="64748B"/>
+                </a:solidFill>
+                <a:latin typeface="Calibri" pitchFamily="34" charset="0"/>
+                <a:ea typeface="Calibri" pitchFamily="34" charset="-122"/>
+                <a:cs typeface="Calibri" pitchFamily="34" charset="-120"/>
+              </a:rPr>
+              <a:t>Sequenced after P0. Omri scopes these in parallel with competitor research.</a:t>
+            </a:r>
+            <a:endParaRPr lang="en-US" sz="1100" dirty="0"/>
+          </a:p>
+        </p:txBody>
+      </p:sp>
+      <p:sp>
+        <p:nvSpPr>
+          <p:cNvPr id="22" name="Text 20"/>
+          <p:cNvSpPr/>
+          <p:nvPr/>
+        </p:nvSpPr>
+        <p:spPr>
+          <a:xfrm>
+            <a:off x="8321040" y="4823460"/>
+            <a:ext cx="457200" cy="228600"/>
+          </a:xfrm>
+          <a:prstGeom prst="rect">
+            <a:avLst/>
+          </a:prstGeom>
+          <a:noFill/>
+          <a:ln/>
+        </p:spPr>
+        <p:txBody>
+          <a:bodyPr wrap="square" lIns="0" tIns="0" rIns="0" bIns="0" rtlCol="0" anchor="ctr"/>
+          <a:lstStyle/>
+          <a:p>
+            <a:pPr algn="r" indent="0" marL="0">
+              <a:buNone/>
+            </a:pPr>
+            <a:r>
+              <a:rPr lang="en-US" sz="900" dirty="0">
+                <a:solidFill>
+                  <a:srgbClr val="64748B"/>
+                </a:solidFill>
+                <a:latin typeface="Calibri" pitchFamily="34" charset="0"/>
+                <a:ea typeface="Calibri" pitchFamily="34" charset="-122"/>
+                <a:cs typeface="Calibri" pitchFamily="34" charset="-120"/>
+              </a:rPr>
+              <a:t>8 / 9</a:t>
+            </a:r>
+            <a:endParaRPr lang="en-US" sz="900" dirty="0"/>
+          </a:p>
+        </p:txBody>
+      </p:sp>
+    </p:spTree>
+  </p:cSld>
+  <p:clrMapOvr>
+    <a:masterClrMapping/>
+  </p:clrMapOvr>
+</p:sld>
+</file>
+
+<file path=ppt/slides/slide9.xml><?xml version="1.0" encoding="utf-8"?>
+<p:sld xmlns:a="http://schemas.openxmlformats.org/drawingml/2006/main" xmlns:r="http://schemas.openxmlformats.org/officeDocument/2006/relationships" xmlns:p="http://schemas.openxmlformats.org/presentationml/2006/main">
+  <p:cSld name="Slide 9">
     <p:bg>
       <p:bgPr>
         <a:solidFill>
@@ -7326,7 +7976,7 @@
                 <a:ea typeface="Calibri" pitchFamily="34" charset="-122"/>
                 <a:cs typeface="Calibri" pitchFamily="34" charset="-120"/>
               </a:rPr>
-              <a:t>07 · What we leave with</a:t>
+              <a:t>08 · What we leave with</a:t>
             </a:r>
             <a:endParaRPr lang="en-US" sz="1100" dirty="0"/>
           </a:p>
@@ -7340,24 +7990,24 @@
         </p:nvSpPr>
         <p:spPr>
           <a:xfrm>
-            <a:off x="457200" y="777240"/>
-            <a:ext cx="8229600" cy="731520"/>
-          </a:xfrm>
-          <a:prstGeom prst="rect">
-            <a:avLst/>
-          </a:prstGeom>
-          <a:noFill/>
-          <a:ln/>
-        </p:spPr>
-        <p:txBody>
-          <a:bodyPr wrap="square" lIns="0" tIns="0" rIns="0" bIns="0" rtlCol="0" anchor="ctr"/>
-          <a:lstStyle/>
-          <a:p>
-            <a:pPr indent="0" marL="0">
-              <a:buNone/>
-            </a:pPr>
-            <a:r>
-              <a:rPr lang="en-US" sz="3200" b="1" dirty="0">
+            <a:off x="457200" y="731520"/>
+            <a:ext cx="8229600" cy="777240"/>
+          </a:xfrm>
+          <a:prstGeom prst="rect">
+            <a:avLst/>
+          </a:prstGeom>
+          <a:noFill/>
+          <a:ln/>
+        </p:spPr>
+        <p:txBody>
+          <a:bodyPr wrap="square" lIns="0" tIns="0" rIns="0" bIns="0" rtlCol="0" anchor="ctr"/>
+          <a:lstStyle/>
+          <a:p>
+            <a:pPr indent="0" marL="0">
+              <a:buNone/>
+            </a:pPr>
+            <a:r>
+              <a:rPr lang="en-US" sz="3400" b="1" dirty="0">
                 <a:solidFill>
                   <a:srgbClr val="FFFFFF"/>
                 </a:solidFill>
@@ -7367,7 +8017,7 @@
               </a:rPr>
               <a:t>Know · Don't know · Start.</a:t>
             </a:r>
-            <a:endParaRPr lang="en-US" sz="3200" dirty="0"/>
+            <a:endParaRPr lang="en-US" sz="3400" dirty="0"/>
           </a:p>
         </p:txBody>
       </p:sp>
@@ -7380,7 +8030,7 @@
         <p:spPr>
           <a:xfrm>
             <a:off x="320040" y="1737360"/>
-            <a:ext cx="2743200" cy="320040"/>
+            <a:ext cx="2743200" cy="347472"/>
           </a:xfrm>
           <a:prstGeom prst="rect">
             <a:avLst/>
@@ -7405,7 +8055,7 @@
         <p:spPr>
           <a:xfrm>
             <a:off x="320040" y="1737360"/>
-            <a:ext cx="2743200" cy="320040"/>
+            <a:ext cx="2743200" cy="347472"/>
           </a:xfrm>
           <a:prstGeom prst="rect">
             <a:avLst/>
@@ -7443,8 +8093,8 @@
         </p:nvSpPr>
         <p:spPr>
           <a:xfrm>
-            <a:off x="320040" y="2057400"/>
-            <a:ext cx="2743200" cy="2331720"/>
+            <a:off x="320040" y="2084832"/>
+            <a:ext cx="2743200" cy="2304288"/>
           </a:xfrm>
           <a:prstGeom prst="rect">
             <a:avLst/>
@@ -7468,8 +8118,8 @@
         </p:nvSpPr>
         <p:spPr>
           <a:xfrm>
-            <a:off x="502920" y="2194560"/>
-            <a:ext cx="2377440" cy="2148840"/>
+            <a:off x="502920" y="2221992"/>
+            <a:ext cx="2377440" cy="2029968"/>
           </a:xfrm>
           <a:prstGeom prst="rect">
             <a:avLst/>
@@ -7483,7 +8133,7 @@
           <a:p>
             <a:pPr marL="342900" indent="-342900">
               <a:spcAft>
-                <a:spcPts val="400"/>
+                <a:spcPts val="500"/>
               </a:spcAft>
               <a:buSzPct val="100000"/>
               <a:buChar char="■"/>
@@ -7504,7 +8154,7 @@
           <a:p>
             <a:pPr marL="342900" indent="-342900">
               <a:spcAft>
-                <a:spcPts val="400"/>
+                <a:spcPts val="500"/>
               </a:spcAft>
               <a:buSzPct val="100000"/>
               <a:buChar char="■"/>
@@ -7525,7 +8175,7 @@
           <a:p>
             <a:pPr marL="342900" indent="-342900">
               <a:spcAft>
-                <a:spcPts val="400"/>
+                <a:spcPts val="500"/>
               </a:spcAft>
               <a:buSzPct val="100000"/>
               <a:buChar char="■"/>
@@ -7539,14 +8189,14 @@
                 <a:ea typeface="Calibri" pitchFamily="34" charset="-122"/>
                 <a:cs typeface="Calibri" pitchFamily="34" charset="-120"/>
               </a:rPr>
-              <a:t>P0 target: Gateway Core, Policy Agent, Screens</a:t>
+              <a:t>P0: Gateway Core, Policy Agent, Screens</a:t>
             </a:r>
             <a:endParaRPr lang="en-US" sz="1100" dirty="0"/>
           </a:p>
           <a:p>
             <a:pPr marL="342900" indent="-342900">
               <a:spcAft>
-                <a:spcPts val="400"/>
+                <a:spcPts val="500"/>
               </a:spcAft>
               <a:buSzPct val="100000"/>
               <a:buChar char="■"/>
@@ -7560,7 +8210,7 @@
                 <a:ea typeface="Calibri" pitchFamily="34" charset="-122"/>
                 <a:cs typeface="Calibri" pitchFamily="34" charset="-120"/>
               </a:rPr>
-              <a:t>M1 is shipped &amp; real</a:t>
+              <a:t>Visibility layer started (M1 + M2 in flight)</a:t>
             </a:r>
             <a:endParaRPr lang="en-US" sz="1100" dirty="0"/>
           </a:p>
@@ -7575,7 +8225,7 @@
         <p:spPr>
           <a:xfrm>
             <a:off x="3200400" y="1737360"/>
-            <a:ext cx="2743200" cy="320040"/>
+            <a:ext cx="2743200" cy="347472"/>
           </a:xfrm>
           <a:prstGeom prst="rect">
             <a:avLst/>
@@ -7600,7 +8250,7 @@
         <p:spPr>
           <a:xfrm>
             <a:off x="3200400" y="1737360"/>
-            <a:ext cx="2743200" cy="320040"/>
+            <a:ext cx="2743200" cy="347472"/>
           </a:xfrm>
           <a:prstGeom prst="rect">
             <a:avLst/>
@@ -7638,8 +8288,8 @@
         </p:nvSpPr>
         <p:spPr>
           <a:xfrm>
-            <a:off x="3200400" y="2057400"/>
-            <a:ext cx="2743200" cy="2331720"/>
+            <a:off x="3200400" y="2084832"/>
+            <a:ext cx="2743200" cy="2304288"/>
           </a:xfrm>
           <a:prstGeom prst="rect">
             <a:avLst/>
@@ -7663,8 +8313,8 @@
         </p:nvSpPr>
         <p:spPr>
           <a:xfrm>
-            <a:off x="3383280" y="2194560"/>
-            <a:ext cx="2377440" cy="2148840"/>
+            <a:off x="3383280" y="2221992"/>
+            <a:ext cx="2377440" cy="2029968"/>
           </a:xfrm>
           <a:prstGeom prst="rect">
             <a:avLst/>
@@ -7678,7 +8328,7 @@
           <a:p>
             <a:pPr marL="342900" indent="-342900">
               <a:spcAft>
-                <a:spcPts val="400"/>
+                <a:spcPts val="500"/>
               </a:spcAft>
               <a:buSzPct val="100000"/>
               <a:buChar char="■"/>
@@ -7699,7 +8349,7 @@
           <a:p>
             <a:pPr marL="342900" indent="-342900">
               <a:spcAft>
-                <a:spcPts val="400"/>
+                <a:spcPts val="500"/>
               </a:spcAft>
               <a:buSzPct val="100000"/>
               <a:buChar char="■"/>
@@ -7720,7 +8370,7 @@
           <a:p>
             <a:pPr marL="342900" indent="-342900">
               <a:spcAft>
-                <a:spcPts val="400"/>
+                <a:spcPts val="500"/>
               </a:spcAft>
               <a:buSzPct val="100000"/>
               <a:buChar char="■"/>
@@ -7741,7 +8391,7 @@
           <a:p>
             <a:pPr marL="342900" indent="-342900">
               <a:spcAft>
-                <a:spcPts val="400"/>
+                <a:spcPts val="500"/>
               </a:spcAft>
               <a:buSzPct val="100000"/>
               <a:buChar char="■"/>
@@ -7755,7 +8405,7 @@
                 <a:ea typeface="Calibri" pitchFamily="34" charset="-122"/>
                 <a:cs typeface="Calibri" pitchFamily="34" charset="-120"/>
               </a:rPr>
-              <a:t>What from M1/M2 already covers P0 — Omri to map</a:t>
+              <a:t>Exact P0 status — what's done vs. started</a:t>
             </a:r>
             <a:endParaRPr lang="en-US" sz="1100" dirty="0"/>
           </a:p>
@@ -7770,7 +8420,7 @@
         <p:spPr>
           <a:xfrm>
             <a:off x="6080760" y="1737360"/>
-            <a:ext cx="2743200" cy="320040"/>
+            <a:ext cx="2743200" cy="347472"/>
           </a:xfrm>
           <a:prstGeom prst="rect">
             <a:avLst/>
@@ -7795,7 +8445,7 @@
         <p:spPr>
           <a:xfrm>
             <a:off x="6080760" y="1737360"/>
-            <a:ext cx="2743200" cy="320040"/>
+            <a:ext cx="2743200" cy="347472"/>
           </a:xfrm>
           <a:prstGeom prst="rect">
             <a:avLst/>
@@ -7833,8 +8483,8 @@
         </p:nvSpPr>
         <p:spPr>
           <a:xfrm>
-            <a:off x="6080760" y="2057400"/>
-            <a:ext cx="2743200" cy="2331720"/>
+            <a:off x="6080760" y="2084832"/>
+            <a:ext cx="2743200" cy="2304288"/>
           </a:xfrm>
           <a:prstGeom prst="rect">
             <a:avLst/>
@@ -7858,8 +8508,8 @@
         </p:nvSpPr>
         <p:spPr>
           <a:xfrm>
-            <a:off x="6263640" y="2194560"/>
-            <a:ext cx="2377440" cy="2148840"/>
+            <a:off x="6263640" y="2221992"/>
+            <a:ext cx="2377440" cy="2029968"/>
           </a:xfrm>
           <a:prstGeom prst="rect">
             <a:avLst/>
@@ -7873,7 +8523,7 @@
           <a:p>
             <a:pPr marL="342900" indent="-342900">
               <a:spcAft>
-                <a:spcPts val="400"/>
+                <a:spcPts val="500"/>
               </a:spcAft>
               <a:buSzPct val="100000"/>
               <a:buChar char="■"/>
@@ -7894,7 +8544,7 @@
           <a:p>
             <a:pPr marL="342900" indent="-342900">
               <a:spcAft>
-                <a:spcPts val="400"/>
+                <a:spcPts val="500"/>
               </a:spcAft>
               <a:buSzPct val="100000"/>
               <a:buChar char="■"/>
@@ -7908,14 +8558,14 @@
                 <a:ea typeface="Calibri" pitchFamily="34" charset="-122"/>
                 <a:cs typeface="Calibri" pitchFamily="34" charset="-120"/>
               </a:rPr>
-              <a:t>Omri: competitors + market scan (share what we already have)</a:t>
+              <a:t>Omri: market + competitor scan (share what we have)</a:t>
             </a:r>
             <a:endParaRPr lang="en-US" sz="1100" dirty="0"/>
           </a:p>
           <a:p>
             <a:pPr marL="342900" indent="-342900">
               <a:spcAft>
-                <a:spcPts val="400"/>
+                <a:spcPts val="500"/>
               </a:spcAft>
               <a:buSzPct val="100000"/>
               <a:buChar char="■"/>
@@ -7929,14 +8579,14 @@
                 <a:ea typeface="Calibri" pitchFamily="34" charset="-122"/>
                 <a:cs typeface="Calibri" pitchFamily="34" charset="-120"/>
               </a:rPr>
-              <a:t>Omri: scope rest of P0 + post-P0 in parallel</a:t>
+              <a:t>Omri: scope P0 remainder + post-P0 in parallel</a:t>
             </a:r>
             <a:endParaRPr lang="en-US" sz="1100" dirty="0"/>
           </a:p>
           <a:p>
             <a:pPr marL="342900" indent="-342900">
               <a:spcAft>
-                <a:spcPts val="400"/>
+                <a:spcPts val="500"/>
               </a:spcAft>
               <a:buSzPct val="100000"/>
               <a:buChar char="■"/>
@@ -7950,7 +8600,7 @@
                 <a:ea typeface="Calibri" pitchFamily="34" charset="-122"/>
                 <a:cs typeface="Calibri" pitchFamily="34" charset="-120"/>
               </a:rPr>
-              <a:t>Next sync: cycle in 2 weeks</a:t>
+              <a:t>Sync in 2 weeks — next cycle review</a:t>
             </a:r>
             <a:endParaRPr lang="en-US" sz="1100" dirty="0"/>
           </a:p>
@@ -8067,7 +8717,7 @@
                 <a:ea typeface="Calibri" pitchFamily="34" charset="-122"/>
                 <a:cs typeface="Calibri" pitchFamily="34" charset="-120"/>
               </a:rPr>
-              <a:t>8 / 8</a:t>
+              <a:t>9 / 9</a:t>
             </a:r>
             <a:endParaRPr lang="en-US" sz="900" dirty="0"/>
           </a:p>

--- a/artifacts/eng-prekickoff-2026-04-27.pptx
+++ b/artifacts/eng-prekickoff-2026-04-27.pptx
@@ -2724,7 +2724,7 @@
                 <a:ea typeface="Georgia" pitchFamily="34" charset="-122"/>
                 <a:cs typeface="Georgia" pitchFamily="34" charset="-120"/>
               </a:rPr>
-              <a:t>What “agent IAM” actually means.</a:t>
+              <a:t>10 capabilities. Three stages.</a:t>
             </a:r>
             <a:endParaRPr lang="en-US" sz="3400" dirty="0"/>
           </a:p>
@@ -2732,53 +2732,14 @@
       </p:sp>
       <p:sp>
         <p:nvSpPr>
-          <p:cNvPr id="5" name="Text 3"/>
-          <p:cNvSpPr/>
-          <p:nvPr/>
-        </p:nvSpPr>
-        <p:spPr>
-          <a:xfrm>
-            <a:off x="457200" y="1600200"/>
-            <a:ext cx="8229600" cy="320040"/>
-          </a:xfrm>
-          <a:prstGeom prst="rect">
-            <a:avLst/>
-          </a:prstGeom>
-          <a:noFill/>
-          <a:ln/>
-        </p:spPr>
-        <p:txBody>
-          <a:bodyPr wrap="square" lIns="0" tIns="0" rIns="0" bIns="0" rtlCol="0" anchor="ctr"/>
-          <a:lstStyle/>
-          <a:p>
-            <a:pPr indent="0" marL="0">
-              <a:buNone/>
-            </a:pPr>
-            <a:r>
-              <a:rPr lang="en-US" sz="1200" i="1" dirty="0">
-                <a:solidFill>
-                  <a:srgbClr val="64748B"/>
-                </a:solidFill>
-                <a:latin typeface="Calibri" pitchFamily="34" charset="0"/>
-                <a:ea typeface="Calibri" pitchFamily="34" charset="-122"/>
-                <a:cs typeface="Calibri" pitchFamily="34" charset="-120"/>
-              </a:rPr>
-              <a:t>10-capability framework (“IAM for LLM-Based AI Agents”). Grouped by theme — not phases.</a:t>
-            </a:r>
-            <a:endParaRPr lang="en-US" sz="1200" dirty="0"/>
-          </a:p>
-        </p:txBody>
-      </p:sp>
-      <p:sp>
-        <p:nvSpPr>
-          <p:cNvPr id="6" name="Shape 4"/>
-          <p:cNvSpPr/>
-          <p:nvPr/>
-        </p:nvSpPr>
-        <p:spPr>
-          <a:xfrm>
-            <a:off x="365760" y="2011680"/>
-            <a:ext cx="2743200" cy="384048"/>
+          <p:cNvPr id="5" name="Shape 3"/>
+          <p:cNvSpPr/>
+          <p:nvPr/>
+        </p:nvSpPr>
+        <p:spPr>
+          <a:xfrm>
+            <a:off x="365760" y="1691640"/>
+            <a:ext cx="2743200" cy="411480"/>
           </a:xfrm>
           <a:prstGeom prst="rect">
             <a:avLst/>
@@ -2796,14 +2757,14 @@
       </p:sp>
       <p:sp>
         <p:nvSpPr>
-          <p:cNvPr id="7" name="Text 5"/>
-          <p:cNvSpPr/>
-          <p:nvPr/>
-        </p:nvSpPr>
-        <p:spPr>
-          <a:xfrm>
-            <a:off x="365760" y="2011680"/>
-            <a:ext cx="2743200" cy="384048"/>
+          <p:cNvPr id="6" name="Text 4"/>
+          <p:cNvSpPr/>
+          <p:nvPr/>
+        </p:nvSpPr>
+        <p:spPr>
+          <a:xfrm>
+            <a:off x="365760" y="1691640"/>
+            <a:ext cx="2743200" cy="411480"/>
           </a:xfrm>
           <a:prstGeom prst="rect">
             <a:avLst/>
@@ -2819,7 +2780,7 @@
               <a:buNone/>
             </a:pPr>
             <a:r>
-              <a:rPr lang="en-US" sz="1300" b="1" spc="400" kern="0" dirty="0">
+              <a:rPr lang="en-US" sz="1400" b="1" spc="500" kern="0" dirty="0">
                 <a:solidFill>
                   <a:srgbClr val="FFFFFF"/>
                 </a:solidFill>
@@ -2827,22 +2788,22 @@
                 <a:ea typeface="Calibri" pitchFamily="34" charset="-122"/>
                 <a:cs typeface="Calibri" pitchFamily="34" charset="-120"/>
               </a:rPr>
-              <a:t>VISIBILITY</a:t>
-            </a:r>
-            <a:endParaRPr lang="en-US" sz="1300" dirty="0"/>
-          </a:p>
-        </p:txBody>
-      </p:sp>
-      <p:sp>
-        <p:nvSpPr>
-          <p:cNvPr id="8" name="Shape 6"/>
-          <p:cNvSpPr/>
-          <p:nvPr/>
-        </p:nvSpPr>
-        <p:spPr>
-          <a:xfrm>
-            <a:off x="365760" y="2395728"/>
-            <a:ext cx="2743200" cy="2176272"/>
+              <a:t>DISCOVER</a:t>
+            </a:r>
+            <a:endParaRPr lang="en-US" sz="1400" dirty="0"/>
+          </a:p>
+        </p:txBody>
+      </p:sp>
+      <p:sp>
+        <p:nvSpPr>
+          <p:cNvPr id="7" name="Shape 5"/>
+          <p:cNvSpPr/>
+          <p:nvPr/>
+        </p:nvSpPr>
+        <p:spPr>
+          <a:xfrm>
+            <a:off x="365760" y="2103120"/>
+            <a:ext cx="2743200" cy="2468880"/>
           </a:xfrm>
           <a:prstGeom prst="rect">
             <a:avLst/>
@@ -2860,14 +2821,14 @@
       </p:sp>
       <p:sp>
         <p:nvSpPr>
-          <p:cNvPr id="9" name="Shape 7"/>
-          <p:cNvSpPr/>
-          <p:nvPr/>
-        </p:nvSpPr>
-        <p:spPr>
-          <a:xfrm>
-            <a:off x="548640" y="2551176"/>
-            <a:ext cx="274320" cy="274320"/>
+          <p:cNvPr id="8" name="Shape 6"/>
+          <p:cNvSpPr/>
+          <p:nvPr/>
+        </p:nvSpPr>
+        <p:spPr>
+          <a:xfrm>
+            <a:off x="548640" y="2295144"/>
+            <a:ext cx="256032" cy="256032"/>
           </a:xfrm>
           <a:prstGeom prst="ellipse">
             <a:avLst/>
@@ -2885,53 +2846,53 @@
       </p:sp>
       <p:sp>
         <p:nvSpPr>
+          <p:cNvPr id="9" name="Text 7"/>
+          <p:cNvSpPr/>
+          <p:nvPr/>
+        </p:nvSpPr>
+        <p:spPr>
+          <a:xfrm>
+            <a:off x="548640" y="2295144"/>
+            <a:ext cx="256032" cy="256032"/>
+          </a:xfrm>
+          <a:prstGeom prst="rect">
+            <a:avLst/>
+          </a:prstGeom>
+          <a:noFill/>
+          <a:ln/>
+        </p:spPr>
+        <p:txBody>
+          <a:bodyPr wrap="square" lIns="0" tIns="0" rIns="0" bIns="0" rtlCol="0" anchor="ctr"/>
+          <a:lstStyle/>
+          <a:p>
+            <a:pPr algn="ctr" indent="0" marL="0">
+              <a:buNone/>
+            </a:pPr>
+            <a:r>
+              <a:rPr lang="en-US" sz="1000" b="1" dirty="0">
+                <a:solidFill>
+                  <a:srgbClr val="FFFFFF"/>
+                </a:solidFill>
+                <a:latin typeface="Calibri" pitchFamily="34" charset="0"/>
+                <a:ea typeface="Calibri" pitchFamily="34" charset="-122"/>
+                <a:cs typeface="Calibri" pitchFamily="34" charset="-120"/>
+              </a:rPr>
+              <a:t>1</a:t>
+            </a:r>
+            <a:endParaRPr lang="en-US" sz="1000" dirty="0"/>
+          </a:p>
+        </p:txBody>
+      </p:sp>
+      <p:sp>
+        <p:nvSpPr>
           <p:cNvPr id="10" name="Text 8"/>
           <p:cNvSpPr/>
           <p:nvPr/>
         </p:nvSpPr>
         <p:spPr>
           <a:xfrm>
-            <a:off x="548640" y="2551176"/>
-            <a:ext cx="274320" cy="274320"/>
-          </a:xfrm>
-          <a:prstGeom prst="rect">
-            <a:avLst/>
-          </a:prstGeom>
-          <a:noFill/>
-          <a:ln/>
-        </p:spPr>
-        <p:txBody>
-          <a:bodyPr wrap="square" lIns="0" tIns="0" rIns="0" bIns="0" rtlCol="0" anchor="ctr"/>
-          <a:lstStyle/>
-          <a:p>
-            <a:pPr algn="ctr" indent="0" marL="0">
-              <a:buNone/>
-            </a:pPr>
-            <a:r>
-              <a:rPr lang="en-US" sz="1100" b="1" dirty="0">
-                <a:solidFill>
-                  <a:srgbClr val="FFFFFF"/>
-                </a:solidFill>
-                <a:latin typeface="Calibri" pitchFamily="34" charset="0"/>
-                <a:ea typeface="Calibri" pitchFamily="34" charset="-122"/>
-                <a:cs typeface="Calibri" pitchFamily="34" charset="-120"/>
-              </a:rPr>
-              <a:t>1</a:t>
-            </a:r>
-            <a:endParaRPr lang="en-US" sz="1100" dirty="0"/>
-          </a:p>
-        </p:txBody>
-      </p:sp>
-      <p:sp>
-        <p:nvSpPr>
-          <p:cNvPr id="11" name="Text 9"/>
-          <p:cNvSpPr/>
-          <p:nvPr/>
-        </p:nvSpPr>
-        <p:spPr>
-          <a:xfrm>
-            <a:off x="914400" y="2514600"/>
-            <a:ext cx="2057400" cy="384048"/>
+            <a:off x="896112" y="2240280"/>
+            <a:ext cx="2084832" cy="457200"/>
           </a:xfrm>
           <a:prstGeom prst="rect">
             <a:avLst/>
@@ -2963,14 +2924,14 @@
       </p:sp>
       <p:sp>
         <p:nvSpPr>
-          <p:cNvPr id="12" name="Shape 10"/>
-          <p:cNvSpPr/>
-          <p:nvPr/>
-        </p:nvSpPr>
-        <p:spPr>
-          <a:xfrm>
-            <a:off x="548640" y="3072384"/>
-            <a:ext cx="274320" cy="274320"/>
+          <p:cNvPr id="11" name="Shape 9"/>
+          <p:cNvSpPr/>
+          <p:nvPr/>
+        </p:nvSpPr>
+        <p:spPr>
+          <a:xfrm>
+            <a:off x="548640" y="2880360"/>
+            <a:ext cx="256032" cy="256032"/>
           </a:xfrm>
           <a:prstGeom prst="ellipse">
             <a:avLst/>
@@ -2988,53 +2949,53 @@
       </p:sp>
       <p:sp>
         <p:nvSpPr>
+          <p:cNvPr id="12" name="Text 10"/>
+          <p:cNvSpPr/>
+          <p:nvPr/>
+        </p:nvSpPr>
+        <p:spPr>
+          <a:xfrm>
+            <a:off x="548640" y="2880360"/>
+            <a:ext cx="256032" cy="256032"/>
+          </a:xfrm>
+          <a:prstGeom prst="rect">
+            <a:avLst/>
+          </a:prstGeom>
+          <a:noFill/>
+          <a:ln/>
+        </p:spPr>
+        <p:txBody>
+          <a:bodyPr wrap="square" lIns="0" tIns="0" rIns="0" bIns="0" rtlCol="0" anchor="ctr"/>
+          <a:lstStyle/>
+          <a:p>
+            <a:pPr algn="ctr" indent="0" marL="0">
+              <a:buNone/>
+            </a:pPr>
+            <a:r>
+              <a:rPr lang="en-US" sz="1000" b="1" dirty="0">
+                <a:solidFill>
+                  <a:srgbClr val="FFFFFF"/>
+                </a:solidFill>
+                <a:latin typeface="Calibri" pitchFamily="34" charset="0"/>
+                <a:ea typeface="Calibri" pitchFamily="34" charset="-122"/>
+                <a:cs typeface="Calibri" pitchFamily="34" charset="-120"/>
+              </a:rPr>
+              <a:t>2</a:t>
+            </a:r>
+            <a:endParaRPr lang="en-US" sz="1000" dirty="0"/>
+          </a:p>
+        </p:txBody>
+      </p:sp>
+      <p:sp>
+        <p:nvSpPr>
           <p:cNvPr id="13" name="Text 11"/>
           <p:cNvSpPr/>
           <p:nvPr/>
         </p:nvSpPr>
         <p:spPr>
           <a:xfrm>
-            <a:off x="548640" y="3072384"/>
-            <a:ext cx="274320" cy="274320"/>
-          </a:xfrm>
-          <a:prstGeom prst="rect">
-            <a:avLst/>
-          </a:prstGeom>
-          <a:noFill/>
-          <a:ln/>
-        </p:spPr>
-        <p:txBody>
-          <a:bodyPr wrap="square" lIns="0" tIns="0" rIns="0" bIns="0" rtlCol="0" anchor="ctr"/>
-          <a:lstStyle/>
-          <a:p>
-            <a:pPr algn="ctr" indent="0" marL="0">
-              <a:buNone/>
-            </a:pPr>
-            <a:r>
-              <a:rPr lang="en-US" sz="1100" b="1" dirty="0">
-                <a:solidFill>
-                  <a:srgbClr val="FFFFFF"/>
-                </a:solidFill>
-                <a:latin typeface="Calibri" pitchFamily="34" charset="0"/>
-                <a:ea typeface="Calibri" pitchFamily="34" charset="-122"/>
-                <a:cs typeface="Calibri" pitchFamily="34" charset="-120"/>
-              </a:rPr>
-              <a:t>2</a:t>
-            </a:r>
-            <a:endParaRPr lang="en-US" sz="1100" dirty="0"/>
-          </a:p>
-        </p:txBody>
-      </p:sp>
-      <p:sp>
-        <p:nvSpPr>
-          <p:cNvPr id="14" name="Text 12"/>
-          <p:cNvSpPr/>
-          <p:nvPr/>
-        </p:nvSpPr>
-        <p:spPr>
-          <a:xfrm>
-            <a:off x="914400" y="3035808"/>
-            <a:ext cx="2057400" cy="384048"/>
+            <a:off x="896112" y="2825496"/>
+            <a:ext cx="2084832" cy="457200"/>
           </a:xfrm>
           <a:prstGeom prst="rect">
             <a:avLst/>
@@ -3066,14 +3027,14 @@
       </p:sp>
       <p:sp>
         <p:nvSpPr>
-          <p:cNvPr id="15" name="Shape 13"/>
-          <p:cNvSpPr/>
-          <p:nvPr/>
-        </p:nvSpPr>
-        <p:spPr>
-          <a:xfrm>
-            <a:off x="548640" y="3593592"/>
-            <a:ext cx="274320" cy="274320"/>
+          <p:cNvPr id="14" name="Shape 12"/>
+          <p:cNvSpPr/>
+          <p:nvPr/>
+        </p:nvSpPr>
+        <p:spPr>
+          <a:xfrm>
+            <a:off x="548640" y="3465576"/>
+            <a:ext cx="256032" cy="256032"/>
           </a:xfrm>
           <a:prstGeom prst="ellipse">
             <a:avLst/>
@@ -3091,53 +3052,53 @@
       </p:sp>
       <p:sp>
         <p:nvSpPr>
+          <p:cNvPr id="15" name="Text 13"/>
+          <p:cNvSpPr/>
+          <p:nvPr/>
+        </p:nvSpPr>
+        <p:spPr>
+          <a:xfrm>
+            <a:off x="548640" y="3465576"/>
+            <a:ext cx="256032" cy="256032"/>
+          </a:xfrm>
+          <a:prstGeom prst="rect">
+            <a:avLst/>
+          </a:prstGeom>
+          <a:noFill/>
+          <a:ln/>
+        </p:spPr>
+        <p:txBody>
+          <a:bodyPr wrap="square" lIns="0" tIns="0" rIns="0" bIns="0" rtlCol="0" anchor="ctr"/>
+          <a:lstStyle/>
+          <a:p>
+            <a:pPr algn="ctr" indent="0" marL="0">
+              <a:buNone/>
+            </a:pPr>
+            <a:r>
+              <a:rPr lang="en-US" sz="1000" b="1" dirty="0">
+                <a:solidFill>
+                  <a:srgbClr val="FFFFFF"/>
+                </a:solidFill>
+                <a:latin typeface="Calibri" pitchFamily="34" charset="0"/>
+                <a:ea typeface="Calibri" pitchFamily="34" charset="-122"/>
+                <a:cs typeface="Calibri" pitchFamily="34" charset="-120"/>
+              </a:rPr>
+              <a:t>10</a:t>
+            </a:r>
+            <a:endParaRPr lang="en-US" sz="1000" dirty="0"/>
+          </a:p>
+        </p:txBody>
+      </p:sp>
+      <p:sp>
+        <p:nvSpPr>
           <p:cNvPr id="16" name="Text 14"/>
           <p:cNvSpPr/>
           <p:nvPr/>
         </p:nvSpPr>
         <p:spPr>
           <a:xfrm>
-            <a:off x="548640" y="3593592"/>
-            <a:ext cx="274320" cy="274320"/>
-          </a:xfrm>
-          <a:prstGeom prst="rect">
-            <a:avLst/>
-          </a:prstGeom>
-          <a:noFill/>
-          <a:ln/>
-        </p:spPr>
-        <p:txBody>
-          <a:bodyPr wrap="square" lIns="0" tIns="0" rIns="0" bIns="0" rtlCol="0" anchor="ctr"/>
-          <a:lstStyle/>
-          <a:p>
-            <a:pPr algn="ctr" indent="0" marL="0">
-              <a:buNone/>
-            </a:pPr>
-            <a:r>
-              <a:rPr lang="en-US" sz="1100" b="1" dirty="0">
-                <a:solidFill>
-                  <a:srgbClr val="FFFFFF"/>
-                </a:solidFill>
-                <a:latin typeface="Calibri" pitchFamily="34" charset="0"/>
-                <a:ea typeface="Calibri" pitchFamily="34" charset="-122"/>
-                <a:cs typeface="Calibri" pitchFamily="34" charset="-120"/>
-              </a:rPr>
-              <a:t>3</a:t>
-            </a:r>
-            <a:endParaRPr lang="en-US" sz="1100" dirty="0"/>
-          </a:p>
-        </p:txBody>
-      </p:sp>
-      <p:sp>
-        <p:nvSpPr>
-          <p:cNvPr id="17" name="Text 15"/>
-          <p:cNvSpPr/>
-          <p:nvPr/>
-        </p:nvSpPr>
-        <p:spPr>
-          <a:xfrm>
-            <a:off x="914400" y="3557016"/>
-            <a:ext cx="2057400" cy="384048"/>
+            <a:off x="896112" y="3410712"/>
+            <a:ext cx="2084832" cy="457200"/>
           </a:xfrm>
           <a:prstGeom prst="rect">
             <a:avLst/>
@@ -3161,7 +3122,7 @@
                 <a:ea typeface="Calibri" pitchFamily="34" charset="-122"/>
                 <a:cs typeface="Calibri" pitchFamily="34" charset="-120"/>
               </a:rPr>
-              <a:t>Authentication</a:t>
+              <a:t>Visibility &amp; observability</a:t>
             </a:r>
             <a:endParaRPr lang="en-US" sz="1200" dirty="0"/>
           </a:p>
@@ -3169,117 +3130,38 @@
       </p:sp>
       <p:sp>
         <p:nvSpPr>
-          <p:cNvPr id="18" name="Shape 16"/>
-          <p:cNvSpPr/>
-          <p:nvPr/>
-        </p:nvSpPr>
-        <p:spPr>
-          <a:xfrm>
-            <a:off x="548640" y="4114800"/>
-            <a:ext cx="274320" cy="274320"/>
-          </a:xfrm>
-          <a:prstGeom prst="ellipse">
-            <a:avLst/>
-          </a:prstGeom>
-          <a:solidFill>
-            <a:srgbClr val="02C39A"/>
-          </a:solidFill>
-          <a:ln w="12700">
+          <p:cNvPr id="17" name="Shape 15"/>
+          <p:cNvSpPr/>
+          <p:nvPr/>
+        </p:nvSpPr>
+        <p:spPr>
+          <a:xfrm>
+            <a:off x="3118104" y="1892808"/>
+            <a:ext cx="82296" cy="0"/>
+          </a:xfrm>
+          <a:prstGeom prst="line">
+            <a:avLst/>
+          </a:prstGeom>
+          <a:noFill/>
+          <a:ln w="25400">
             <a:solidFill>
-              <a:srgbClr val="02C39A"/>
+              <a:srgbClr val="FFFFFF"/>
             </a:solidFill>
             <a:prstDash val="solid"/>
+            <a:tailEnd type="triangle"/>
           </a:ln>
         </p:spPr>
       </p:sp>
       <p:sp>
         <p:nvSpPr>
-          <p:cNvPr id="19" name="Text 17"/>
-          <p:cNvSpPr/>
-          <p:nvPr/>
-        </p:nvSpPr>
-        <p:spPr>
-          <a:xfrm>
-            <a:off x="548640" y="4114800"/>
-            <a:ext cx="274320" cy="274320"/>
-          </a:xfrm>
-          <a:prstGeom prst="rect">
-            <a:avLst/>
-          </a:prstGeom>
-          <a:noFill/>
-          <a:ln/>
-        </p:spPr>
-        <p:txBody>
-          <a:bodyPr wrap="square" lIns="0" tIns="0" rIns="0" bIns="0" rtlCol="0" anchor="ctr"/>
-          <a:lstStyle/>
-          <a:p>
-            <a:pPr algn="ctr" indent="0" marL="0">
-              <a:buNone/>
-            </a:pPr>
-            <a:r>
-              <a:rPr lang="en-US" sz="1100" b="1" dirty="0">
-                <a:solidFill>
-                  <a:srgbClr val="FFFFFF"/>
-                </a:solidFill>
-                <a:latin typeface="Calibri" pitchFamily="34" charset="0"/>
-                <a:ea typeface="Calibri" pitchFamily="34" charset="-122"/>
-                <a:cs typeface="Calibri" pitchFamily="34" charset="-120"/>
-              </a:rPr>
-              <a:t>10</a:t>
-            </a:r>
-            <a:endParaRPr lang="en-US" sz="1100" dirty="0"/>
-          </a:p>
-        </p:txBody>
-      </p:sp>
-      <p:sp>
-        <p:nvSpPr>
-          <p:cNvPr id="20" name="Text 18"/>
-          <p:cNvSpPr/>
-          <p:nvPr/>
-        </p:nvSpPr>
-        <p:spPr>
-          <a:xfrm>
-            <a:off x="914400" y="4078224"/>
-            <a:ext cx="2057400" cy="384048"/>
-          </a:xfrm>
-          <a:prstGeom prst="rect">
-            <a:avLst/>
-          </a:prstGeom>
-          <a:noFill/>
-          <a:ln/>
-        </p:spPr>
-        <p:txBody>
-          <a:bodyPr wrap="square" lIns="0" tIns="0" rIns="0" bIns="0" rtlCol="0" anchor="ctr"/>
-          <a:lstStyle/>
-          <a:p>
-            <a:pPr indent="0" marL="0">
-              <a:buNone/>
-            </a:pPr>
-            <a:r>
-              <a:rPr lang="en-US" sz="1200" dirty="0">
-                <a:solidFill>
-                  <a:srgbClr val="1A1F36"/>
-                </a:solidFill>
-                <a:latin typeface="Calibri" pitchFamily="34" charset="0"/>
-                <a:ea typeface="Calibri" pitchFamily="34" charset="-122"/>
-                <a:cs typeface="Calibri" pitchFamily="34" charset="-120"/>
-              </a:rPr>
-              <a:t>Visibility &amp; observability</a:t>
-            </a:r>
-            <a:endParaRPr lang="en-US" sz="1200" dirty="0"/>
-          </a:p>
-        </p:txBody>
-      </p:sp>
-      <p:sp>
-        <p:nvSpPr>
-          <p:cNvPr id="21" name="Shape 19"/>
-          <p:cNvSpPr/>
-          <p:nvPr/>
-        </p:nvSpPr>
-        <p:spPr>
-          <a:xfrm>
-            <a:off x="3200400" y="2011680"/>
-            <a:ext cx="2743200" cy="384048"/>
+          <p:cNvPr id="18" name="Shape 16"/>
+          <p:cNvSpPr/>
+          <p:nvPr/>
+        </p:nvSpPr>
+        <p:spPr>
+          <a:xfrm>
+            <a:off x="3200400" y="1691640"/>
+            <a:ext cx="2743200" cy="411480"/>
           </a:xfrm>
           <a:prstGeom prst="rect">
             <a:avLst/>
@@ -3297,14 +3179,14 @@
       </p:sp>
       <p:sp>
         <p:nvSpPr>
-          <p:cNvPr id="22" name="Text 20"/>
-          <p:cNvSpPr/>
-          <p:nvPr/>
-        </p:nvSpPr>
-        <p:spPr>
-          <a:xfrm>
-            <a:off x="3200400" y="2011680"/>
-            <a:ext cx="2743200" cy="384048"/>
+          <p:cNvPr id="19" name="Text 17"/>
+          <p:cNvSpPr/>
+          <p:nvPr/>
+        </p:nvSpPr>
+        <p:spPr>
+          <a:xfrm>
+            <a:off x="3200400" y="1691640"/>
+            <a:ext cx="2743200" cy="411480"/>
           </a:xfrm>
           <a:prstGeom prst="rect">
             <a:avLst/>
@@ -3320,7 +3202,7 @@
               <a:buNone/>
             </a:pPr>
             <a:r>
-              <a:rPr lang="en-US" sz="1300" b="1" spc="400" kern="0" dirty="0">
+              <a:rPr lang="en-US" sz="1400" b="1" spc="500" kern="0" dirty="0">
                 <a:solidFill>
                   <a:srgbClr val="FFFFFF"/>
                 </a:solidFill>
@@ -3328,22 +3210,22 @@
                 <a:ea typeface="Calibri" pitchFamily="34" charset="-122"/>
                 <a:cs typeface="Calibri" pitchFamily="34" charset="-120"/>
               </a:rPr>
-              <a:t>CONTROL</a:t>
-            </a:r>
-            <a:endParaRPr lang="en-US" sz="1300" dirty="0"/>
-          </a:p>
-        </p:txBody>
-      </p:sp>
-      <p:sp>
-        <p:nvSpPr>
-          <p:cNvPr id="23" name="Shape 21"/>
-          <p:cNvSpPr/>
-          <p:nvPr/>
-        </p:nvSpPr>
-        <p:spPr>
-          <a:xfrm>
-            <a:off x="3200400" y="2395728"/>
-            <a:ext cx="2743200" cy="2176272"/>
+              <a:t>ASSESS</a:t>
+            </a:r>
+            <a:endParaRPr lang="en-US" sz="1400" dirty="0"/>
+          </a:p>
+        </p:txBody>
+      </p:sp>
+      <p:sp>
+        <p:nvSpPr>
+          <p:cNvPr id="20" name="Shape 18"/>
+          <p:cNvSpPr/>
+          <p:nvPr/>
+        </p:nvSpPr>
+        <p:spPr>
+          <a:xfrm>
+            <a:off x="3200400" y="2103120"/>
+            <a:ext cx="2743200" cy="2468880"/>
           </a:xfrm>
           <a:prstGeom prst="rect">
             <a:avLst/>
@@ -3361,14 +3243,14 @@
       </p:sp>
       <p:sp>
         <p:nvSpPr>
-          <p:cNvPr id="24" name="Shape 22"/>
-          <p:cNvSpPr/>
-          <p:nvPr/>
-        </p:nvSpPr>
-        <p:spPr>
-          <a:xfrm>
-            <a:off x="3383280" y="2551176"/>
-            <a:ext cx="274320" cy="274320"/>
+          <p:cNvPr id="21" name="Shape 19"/>
+          <p:cNvSpPr/>
+          <p:nvPr/>
+        </p:nvSpPr>
+        <p:spPr>
+          <a:xfrm>
+            <a:off x="3383280" y="2295144"/>
+            <a:ext cx="256032" cy="256032"/>
           </a:xfrm>
           <a:prstGeom prst="ellipse">
             <a:avLst/>
@@ -3386,14 +3268,14 @@
       </p:sp>
       <p:sp>
         <p:nvSpPr>
-          <p:cNvPr id="25" name="Text 23"/>
-          <p:cNvSpPr/>
-          <p:nvPr/>
-        </p:nvSpPr>
-        <p:spPr>
-          <a:xfrm>
-            <a:off x="3383280" y="2551176"/>
-            <a:ext cx="274320" cy="274320"/>
+          <p:cNvPr id="22" name="Text 20"/>
+          <p:cNvSpPr/>
+          <p:nvPr/>
+        </p:nvSpPr>
+        <p:spPr>
+          <a:xfrm>
+            <a:off x="3383280" y="2295144"/>
+            <a:ext cx="256032" cy="256032"/>
           </a:xfrm>
           <a:prstGeom prst="rect">
             <a:avLst/>
@@ -3409,7 +3291,7 @@
               <a:buNone/>
             </a:pPr>
             <a:r>
-              <a:rPr lang="en-US" sz="1100" b="1" dirty="0">
+              <a:rPr lang="en-US" sz="1000" b="1" dirty="0">
                 <a:solidFill>
                   <a:srgbClr val="FFFFFF"/>
                 </a:solidFill>
@@ -3417,22 +3299,22 @@
                 <a:ea typeface="Calibri" pitchFamily="34" charset="-122"/>
                 <a:cs typeface="Calibri" pitchFamily="34" charset="-120"/>
               </a:rPr>
-              <a:t>4</a:t>
-            </a:r>
-            <a:endParaRPr lang="en-US" sz="1100" dirty="0"/>
-          </a:p>
-        </p:txBody>
-      </p:sp>
-      <p:sp>
-        <p:nvSpPr>
-          <p:cNvPr id="26" name="Text 24"/>
-          <p:cNvSpPr/>
-          <p:nvPr/>
-        </p:nvSpPr>
-        <p:spPr>
-          <a:xfrm>
-            <a:off x="3749040" y="2514600"/>
-            <a:ext cx="2057400" cy="384048"/>
+              <a:t>3</a:t>
+            </a:r>
+            <a:endParaRPr lang="en-US" sz="1000" dirty="0"/>
+          </a:p>
+        </p:txBody>
+      </p:sp>
+      <p:sp>
+        <p:nvSpPr>
+          <p:cNvPr id="23" name="Text 21"/>
+          <p:cNvSpPr/>
+          <p:nvPr/>
+        </p:nvSpPr>
+        <p:spPr>
+          <a:xfrm>
+            <a:off x="3730752" y="2240280"/>
+            <a:ext cx="2084832" cy="457200"/>
           </a:xfrm>
           <a:prstGeom prst="rect">
             <a:avLst/>
@@ -3456,7 +3338,7 @@
                 <a:ea typeface="Calibri" pitchFamily="34" charset="-122"/>
                 <a:cs typeface="Calibri" pitchFamily="34" charset="-120"/>
               </a:rPr>
-              <a:t>Authorization &amp; delegation</a:t>
+              <a:t>Authentication</a:t>
             </a:r>
             <a:endParaRPr lang="en-US" sz="1200" dirty="0"/>
           </a:p>
@@ -3464,14 +3346,14 @@
       </p:sp>
       <p:sp>
         <p:nvSpPr>
-          <p:cNvPr id="27" name="Shape 25"/>
-          <p:cNvSpPr/>
-          <p:nvPr/>
-        </p:nvSpPr>
-        <p:spPr>
-          <a:xfrm>
-            <a:off x="3383280" y="3072384"/>
-            <a:ext cx="274320" cy="274320"/>
+          <p:cNvPr id="24" name="Shape 22"/>
+          <p:cNvSpPr/>
+          <p:nvPr/>
+        </p:nvSpPr>
+        <p:spPr>
+          <a:xfrm>
+            <a:off x="3383280" y="2880360"/>
+            <a:ext cx="256032" cy="256032"/>
           </a:xfrm>
           <a:prstGeom prst="ellipse">
             <a:avLst/>
@@ -3489,14 +3371,14 @@
       </p:sp>
       <p:sp>
         <p:nvSpPr>
-          <p:cNvPr id="28" name="Text 26"/>
-          <p:cNvSpPr/>
-          <p:nvPr/>
-        </p:nvSpPr>
-        <p:spPr>
-          <a:xfrm>
-            <a:off x="3383280" y="3072384"/>
-            <a:ext cx="274320" cy="274320"/>
+          <p:cNvPr id="25" name="Text 23"/>
+          <p:cNvSpPr/>
+          <p:nvPr/>
+        </p:nvSpPr>
+        <p:spPr>
+          <a:xfrm>
+            <a:off x="3383280" y="2880360"/>
+            <a:ext cx="256032" cy="256032"/>
           </a:xfrm>
           <a:prstGeom prst="rect">
             <a:avLst/>
@@ -3512,7 +3394,7 @@
               <a:buNone/>
             </a:pPr>
             <a:r>
-              <a:rPr lang="en-US" sz="1100" b="1" dirty="0">
+              <a:rPr lang="en-US" sz="1000" b="1" dirty="0">
                 <a:solidFill>
                   <a:srgbClr val="FFFFFF"/>
                 </a:solidFill>
@@ -3520,22 +3402,22 @@
                 <a:ea typeface="Calibri" pitchFamily="34" charset="-122"/>
                 <a:cs typeface="Calibri" pitchFamily="34" charset="-120"/>
               </a:rPr>
-              <a:t>5</a:t>
-            </a:r>
-            <a:endParaRPr lang="en-US" sz="1100" dirty="0"/>
-          </a:p>
-        </p:txBody>
-      </p:sp>
-      <p:sp>
-        <p:nvSpPr>
-          <p:cNvPr id="29" name="Text 27"/>
-          <p:cNvSpPr/>
-          <p:nvPr/>
-        </p:nvSpPr>
-        <p:spPr>
-          <a:xfrm>
-            <a:off x="3749040" y="3035808"/>
-            <a:ext cx="2057400" cy="384048"/>
+              <a:t>4</a:t>
+            </a:r>
+            <a:endParaRPr lang="en-US" sz="1000" dirty="0"/>
+          </a:p>
+        </p:txBody>
+      </p:sp>
+      <p:sp>
+        <p:nvSpPr>
+          <p:cNvPr id="26" name="Text 24"/>
+          <p:cNvSpPr/>
+          <p:nvPr/>
+        </p:nvSpPr>
+        <p:spPr>
+          <a:xfrm>
+            <a:off x="3730752" y="2825496"/>
+            <a:ext cx="2084832" cy="457200"/>
           </a:xfrm>
           <a:prstGeom prst="rect">
             <a:avLst/>
@@ -3559,7 +3441,7 @@
                 <a:ea typeface="Calibri" pitchFamily="34" charset="-122"/>
                 <a:cs typeface="Calibri" pitchFamily="34" charset="-120"/>
               </a:rPr>
-              <a:t>Human oversight &amp; approval</a:t>
+              <a:t>Authorization &amp; delegation</a:t>
             </a:r>
             <a:endParaRPr lang="en-US" sz="1200" dirty="0"/>
           </a:p>
@@ -3567,14 +3449,14 @@
       </p:sp>
       <p:sp>
         <p:nvSpPr>
-          <p:cNvPr id="30" name="Shape 28"/>
-          <p:cNvSpPr/>
-          <p:nvPr/>
-        </p:nvSpPr>
-        <p:spPr>
-          <a:xfrm>
-            <a:off x="3383280" y="3593592"/>
-            <a:ext cx="274320" cy="274320"/>
+          <p:cNvPr id="27" name="Shape 25"/>
+          <p:cNvSpPr/>
+          <p:nvPr/>
+        </p:nvSpPr>
+        <p:spPr>
+          <a:xfrm>
+            <a:off x="3383280" y="3465576"/>
+            <a:ext cx="256032" cy="256032"/>
           </a:xfrm>
           <a:prstGeom prst="ellipse">
             <a:avLst/>
@@ -3592,14 +3474,14 @@
       </p:sp>
       <p:sp>
         <p:nvSpPr>
-          <p:cNvPr id="31" name="Text 29"/>
-          <p:cNvSpPr/>
-          <p:nvPr/>
-        </p:nvSpPr>
-        <p:spPr>
-          <a:xfrm>
-            <a:off x="3383280" y="3593592"/>
-            <a:ext cx="274320" cy="274320"/>
+          <p:cNvPr id="28" name="Text 26"/>
+          <p:cNvSpPr/>
+          <p:nvPr/>
+        </p:nvSpPr>
+        <p:spPr>
+          <a:xfrm>
+            <a:off x="3383280" y="3465576"/>
+            <a:ext cx="256032" cy="256032"/>
           </a:xfrm>
           <a:prstGeom prst="rect">
             <a:avLst/>
@@ -3615,7 +3497,7 @@
               <a:buNone/>
             </a:pPr>
             <a:r>
-              <a:rPr lang="en-US" sz="1100" b="1" dirty="0">
+              <a:rPr lang="en-US" sz="1000" b="1" dirty="0">
                 <a:solidFill>
                   <a:srgbClr val="FFFFFF"/>
                 </a:solidFill>
@@ -3623,22 +3505,22 @@
                 <a:ea typeface="Calibri" pitchFamily="34" charset="-122"/>
                 <a:cs typeface="Calibri" pitchFamily="34" charset="-120"/>
               </a:rPr>
-              <a:t>6</a:t>
-            </a:r>
-            <a:endParaRPr lang="en-US" sz="1100" dirty="0"/>
-          </a:p>
-        </p:txBody>
-      </p:sp>
-      <p:sp>
-        <p:nvSpPr>
-          <p:cNvPr id="32" name="Text 30"/>
-          <p:cNvSpPr/>
-          <p:nvPr/>
-        </p:nvSpPr>
-        <p:spPr>
-          <a:xfrm>
-            <a:off x="3749040" y="3557016"/>
-            <a:ext cx="2057400" cy="384048"/>
+              <a:t>9</a:t>
+            </a:r>
+            <a:endParaRPr lang="en-US" sz="1000" dirty="0"/>
+          </a:p>
+        </p:txBody>
+      </p:sp>
+      <p:sp>
+        <p:nvSpPr>
+          <p:cNvPr id="29" name="Text 27"/>
+          <p:cNvSpPr/>
+          <p:nvPr/>
+        </p:nvSpPr>
+        <p:spPr>
+          <a:xfrm>
+            <a:off x="3730752" y="3410712"/>
+            <a:ext cx="2084832" cy="457200"/>
           </a:xfrm>
           <a:prstGeom prst="rect">
             <a:avLst/>
@@ -3662,7 +3544,7 @@
                 <a:ea typeface="Calibri" pitchFamily="34" charset="-122"/>
                 <a:cs typeface="Calibri" pitchFamily="34" charset="-120"/>
               </a:rPr>
-              <a:t>Resource policy enforcement</a:t>
+              <a:t>Multi-agent collaboration</a:t>
             </a:r>
             <a:endParaRPr lang="en-US" sz="1200" dirty="0"/>
           </a:p>
@@ -3670,14 +3552,38 @@
       </p:sp>
       <p:sp>
         <p:nvSpPr>
-          <p:cNvPr id="33" name="Shape 31"/>
-          <p:cNvSpPr/>
-          <p:nvPr/>
-        </p:nvSpPr>
-        <p:spPr>
-          <a:xfrm>
-            <a:off x="6035040" y="2011680"/>
-            <a:ext cx="2743200" cy="384048"/>
+          <p:cNvPr id="30" name="Shape 28"/>
+          <p:cNvSpPr/>
+          <p:nvPr/>
+        </p:nvSpPr>
+        <p:spPr>
+          <a:xfrm>
+            <a:off x="5952744" y="1892808"/>
+            <a:ext cx="82296" cy="0"/>
+          </a:xfrm>
+          <a:prstGeom prst="line">
+            <a:avLst/>
+          </a:prstGeom>
+          <a:noFill/>
+          <a:ln w="25400">
+            <a:solidFill>
+              <a:srgbClr val="FFFFFF"/>
+            </a:solidFill>
+            <a:prstDash val="solid"/>
+            <a:tailEnd type="triangle"/>
+          </a:ln>
+        </p:spPr>
+      </p:sp>
+      <p:sp>
+        <p:nvSpPr>
+          <p:cNvPr id="31" name="Shape 29"/>
+          <p:cNvSpPr/>
+          <p:nvPr/>
+        </p:nvSpPr>
+        <p:spPr>
+          <a:xfrm>
+            <a:off x="6035040" y="1691640"/>
+            <a:ext cx="2743200" cy="411480"/>
           </a:xfrm>
           <a:prstGeom prst="rect">
             <a:avLst/>
@@ -3695,14 +3601,14 @@
       </p:sp>
       <p:sp>
         <p:nvSpPr>
-          <p:cNvPr id="34" name="Text 32"/>
-          <p:cNvSpPr/>
-          <p:nvPr/>
-        </p:nvSpPr>
-        <p:spPr>
-          <a:xfrm>
-            <a:off x="6035040" y="2011680"/>
-            <a:ext cx="2743200" cy="384048"/>
+          <p:cNvPr id="32" name="Text 30"/>
+          <p:cNvSpPr/>
+          <p:nvPr/>
+        </p:nvSpPr>
+        <p:spPr>
+          <a:xfrm>
+            <a:off x="6035040" y="1691640"/>
+            <a:ext cx="2743200" cy="411480"/>
           </a:xfrm>
           <a:prstGeom prst="rect">
             <a:avLst/>
@@ -3718,7 +3624,7 @@
               <a:buNone/>
             </a:pPr>
             <a:r>
-              <a:rPr lang="en-US" sz="1300" b="1" spc="400" kern="0" dirty="0">
+              <a:rPr lang="en-US" sz="1400" b="1" spc="500" kern="0" dirty="0">
                 <a:solidFill>
                   <a:srgbClr val="FFFFFF"/>
                 </a:solidFill>
@@ -3726,22 +3632,22 @@
                 <a:ea typeface="Calibri" pitchFamily="34" charset="-122"/>
                 <a:cs typeface="Calibri" pitchFamily="34" charset="-120"/>
               </a:rPr>
-              <a:t>LIFECYCLE</a:t>
-            </a:r>
-            <a:endParaRPr lang="en-US" sz="1300" dirty="0"/>
-          </a:p>
-        </p:txBody>
-      </p:sp>
-      <p:sp>
-        <p:nvSpPr>
-          <p:cNvPr id="35" name="Shape 33"/>
-          <p:cNvSpPr/>
-          <p:nvPr/>
-        </p:nvSpPr>
-        <p:spPr>
-          <a:xfrm>
-            <a:off x="6035040" y="2395728"/>
-            <a:ext cx="2743200" cy="2176272"/>
+              <a:t>ENFORCE</a:t>
+            </a:r>
+            <a:endParaRPr lang="en-US" sz="1400" dirty="0"/>
+          </a:p>
+        </p:txBody>
+      </p:sp>
+      <p:sp>
+        <p:nvSpPr>
+          <p:cNvPr id="33" name="Shape 31"/>
+          <p:cNvSpPr/>
+          <p:nvPr/>
+        </p:nvSpPr>
+        <p:spPr>
+          <a:xfrm>
+            <a:off x="6035040" y="2103120"/>
+            <a:ext cx="2743200" cy="2468880"/>
           </a:xfrm>
           <a:prstGeom prst="rect">
             <a:avLst/>
@@ -3759,14 +3665,14 @@
       </p:sp>
       <p:sp>
         <p:nvSpPr>
-          <p:cNvPr id="36" name="Shape 34"/>
-          <p:cNvSpPr/>
-          <p:nvPr/>
-        </p:nvSpPr>
-        <p:spPr>
-          <a:xfrm>
-            <a:off x="6217920" y="2551176"/>
-            <a:ext cx="274320" cy="274320"/>
+          <p:cNvPr id="34" name="Shape 32"/>
+          <p:cNvSpPr/>
+          <p:nvPr/>
+        </p:nvSpPr>
+        <p:spPr>
+          <a:xfrm>
+            <a:off x="6217920" y="2295144"/>
+            <a:ext cx="256032" cy="256032"/>
           </a:xfrm>
           <a:prstGeom prst="ellipse">
             <a:avLst/>
@@ -3784,14 +3690,14 @@
       </p:sp>
       <p:sp>
         <p:nvSpPr>
-          <p:cNvPr id="37" name="Text 35"/>
-          <p:cNvSpPr/>
-          <p:nvPr/>
-        </p:nvSpPr>
-        <p:spPr>
-          <a:xfrm>
-            <a:off x="6217920" y="2551176"/>
-            <a:ext cx="274320" cy="274320"/>
+          <p:cNvPr id="35" name="Text 33"/>
+          <p:cNvSpPr/>
+          <p:nvPr/>
+        </p:nvSpPr>
+        <p:spPr>
+          <a:xfrm>
+            <a:off x="6217920" y="2295144"/>
+            <a:ext cx="256032" cy="256032"/>
           </a:xfrm>
           <a:prstGeom prst="rect">
             <a:avLst/>
@@ -3807,7 +3713,7 @@
               <a:buNone/>
             </a:pPr>
             <a:r>
-              <a:rPr lang="en-US" sz="1100" b="1" dirty="0">
+              <a:rPr lang="en-US" sz="1000" b="1" dirty="0">
                 <a:solidFill>
                   <a:srgbClr val="FFFFFF"/>
                 </a:solidFill>
@@ -3815,22 +3721,22 @@
                 <a:ea typeface="Calibri" pitchFamily="34" charset="-122"/>
                 <a:cs typeface="Calibri" pitchFamily="34" charset="-120"/>
               </a:rPr>
-              <a:t>7</a:t>
-            </a:r>
-            <a:endParaRPr lang="en-US" sz="1100" dirty="0"/>
-          </a:p>
-        </p:txBody>
-      </p:sp>
-      <p:sp>
-        <p:nvSpPr>
-          <p:cNvPr id="38" name="Text 36"/>
-          <p:cNvSpPr/>
-          <p:nvPr/>
-        </p:nvSpPr>
-        <p:spPr>
-          <a:xfrm>
-            <a:off x="6583680" y="2514600"/>
-            <a:ext cx="2057400" cy="384048"/>
+              <a:t>5</a:t>
+            </a:r>
+            <a:endParaRPr lang="en-US" sz="1000" dirty="0"/>
+          </a:p>
+        </p:txBody>
+      </p:sp>
+      <p:sp>
+        <p:nvSpPr>
+          <p:cNvPr id="36" name="Text 34"/>
+          <p:cNvSpPr/>
+          <p:nvPr/>
+        </p:nvSpPr>
+        <p:spPr>
+          <a:xfrm>
+            <a:off x="6565392" y="2240280"/>
+            <a:ext cx="2084832" cy="457200"/>
           </a:xfrm>
           <a:prstGeom prst="rect">
             <a:avLst/>
@@ -3854,7 +3760,7 @@
                 <a:ea typeface="Calibri" pitchFamily="34" charset="-122"/>
                 <a:cs typeface="Calibri" pitchFamily="34" charset="-120"/>
               </a:rPr>
-              <a:t>Credential lifecycle</a:t>
+              <a:t>Human oversight &amp; approval</a:t>
             </a:r>
             <a:endParaRPr lang="en-US" sz="1200" dirty="0"/>
           </a:p>
@@ -3862,14 +3768,14 @@
       </p:sp>
       <p:sp>
         <p:nvSpPr>
-          <p:cNvPr id="39" name="Shape 37"/>
-          <p:cNvSpPr/>
-          <p:nvPr/>
-        </p:nvSpPr>
-        <p:spPr>
-          <a:xfrm>
-            <a:off x="6217920" y="3072384"/>
-            <a:ext cx="274320" cy="274320"/>
+          <p:cNvPr id="37" name="Shape 35"/>
+          <p:cNvSpPr/>
+          <p:nvPr/>
+        </p:nvSpPr>
+        <p:spPr>
+          <a:xfrm>
+            <a:off x="6217920" y="2880360"/>
+            <a:ext cx="256032" cy="256032"/>
           </a:xfrm>
           <a:prstGeom prst="ellipse">
             <a:avLst/>
@@ -3887,14 +3793,14 @@
       </p:sp>
       <p:sp>
         <p:nvSpPr>
-          <p:cNvPr id="40" name="Text 38"/>
-          <p:cNvSpPr/>
-          <p:nvPr/>
-        </p:nvSpPr>
-        <p:spPr>
-          <a:xfrm>
-            <a:off x="6217920" y="3072384"/>
-            <a:ext cx="274320" cy="274320"/>
+          <p:cNvPr id="38" name="Text 36"/>
+          <p:cNvSpPr/>
+          <p:nvPr/>
+        </p:nvSpPr>
+        <p:spPr>
+          <a:xfrm>
+            <a:off x="6217920" y="2880360"/>
+            <a:ext cx="256032" cy="256032"/>
           </a:xfrm>
           <a:prstGeom prst="rect">
             <a:avLst/>
@@ -3910,7 +3816,7 @@
               <a:buNone/>
             </a:pPr>
             <a:r>
-              <a:rPr lang="en-US" sz="1100" b="1" dirty="0">
+              <a:rPr lang="en-US" sz="1000" b="1" dirty="0">
                 <a:solidFill>
                   <a:srgbClr val="FFFFFF"/>
                 </a:solidFill>
@@ -3918,22 +3824,22 @@
                 <a:ea typeface="Calibri" pitchFamily="34" charset="-122"/>
                 <a:cs typeface="Calibri" pitchFamily="34" charset="-120"/>
               </a:rPr>
-              <a:t>8</a:t>
-            </a:r>
-            <a:endParaRPr lang="en-US" sz="1100" dirty="0"/>
-          </a:p>
-        </p:txBody>
-      </p:sp>
-      <p:sp>
-        <p:nvSpPr>
-          <p:cNvPr id="41" name="Text 39"/>
-          <p:cNvSpPr/>
-          <p:nvPr/>
-        </p:nvSpPr>
-        <p:spPr>
-          <a:xfrm>
-            <a:off x="6583680" y="3035808"/>
-            <a:ext cx="2057400" cy="384048"/>
+              <a:t>6</a:t>
+            </a:r>
+            <a:endParaRPr lang="en-US" sz="1000" dirty="0"/>
+          </a:p>
+        </p:txBody>
+      </p:sp>
+      <p:sp>
+        <p:nvSpPr>
+          <p:cNvPr id="39" name="Text 37"/>
+          <p:cNvSpPr/>
+          <p:nvPr/>
+        </p:nvSpPr>
+        <p:spPr>
+          <a:xfrm>
+            <a:off x="6565392" y="2825496"/>
+            <a:ext cx="2084832" cy="457200"/>
           </a:xfrm>
           <a:prstGeom prst="rect">
             <a:avLst/>
@@ -3957,7 +3863,7 @@
                 <a:ea typeface="Calibri" pitchFamily="34" charset="-122"/>
                 <a:cs typeface="Calibri" pitchFamily="34" charset="-120"/>
               </a:rPr>
-              <a:t>Auditability &amp; logging</a:t>
+              <a:t>Resource policy enforcement</a:t>
             </a:r>
             <a:endParaRPr lang="en-US" sz="1200" dirty="0"/>
           </a:p>
@@ -3965,14 +3871,14 @@
       </p:sp>
       <p:sp>
         <p:nvSpPr>
-          <p:cNvPr id="42" name="Shape 40"/>
-          <p:cNvSpPr/>
-          <p:nvPr/>
-        </p:nvSpPr>
-        <p:spPr>
-          <a:xfrm>
-            <a:off x="6217920" y="3593592"/>
-            <a:ext cx="274320" cy="274320"/>
+          <p:cNvPr id="40" name="Shape 38"/>
+          <p:cNvSpPr/>
+          <p:nvPr/>
+        </p:nvSpPr>
+        <p:spPr>
+          <a:xfrm>
+            <a:off x="6217920" y="3465576"/>
+            <a:ext cx="256032" cy="256032"/>
           </a:xfrm>
           <a:prstGeom prst="ellipse">
             <a:avLst/>
@@ -3990,14 +3896,14 @@
       </p:sp>
       <p:sp>
         <p:nvSpPr>
-          <p:cNvPr id="43" name="Text 41"/>
-          <p:cNvSpPr/>
-          <p:nvPr/>
-        </p:nvSpPr>
-        <p:spPr>
-          <a:xfrm>
-            <a:off x="6217920" y="3593592"/>
-            <a:ext cx="274320" cy="274320"/>
+          <p:cNvPr id="41" name="Text 39"/>
+          <p:cNvSpPr/>
+          <p:nvPr/>
+        </p:nvSpPr>
+        <p:spPr>
+          <a:xfrm>
+            <a:off x="6217920" y="3465576"/>
+            <a:ext cx="256032" cy="256032"/>
           </a:xfrm>
           <a:prstGeom prst="rect">
             <a:avLst/>
@@ -4013,7 +3919,7 @@
               <a:buNone/>
             </a:pPr>
             <a:r>
-              <a:rPr lang="en-US" sz="1100" b="1" dirty="0">
+              <a:rPr lang="en-US" sz="1000" b="1" dirty="0">
                 <a:solidFill>
                   <a:srgbClr val="FFFFFF"/>
                 </a:solidFill>
@@ -4021,11 +3927,75 @@
                 <a:ea typeface="Calibri" pitchFamily="34" charset="-122"/>
                 <a:cs typeface="Calibri" pitchFamily="34" charset="-120"/>
               </a:rPr>
-              <a:t>9</a:t>
-            </a:r>
-            <a:endParaRPr lang="en-US" sz="1100" dirty="0"/>
-          </a:p>
-        </p:txBody>
+              <a:t>7</a:t>
+            </a:r>
+            <a:endParaRPr lang="en-US" sz="1000" dirty="0"/>
+          </a:p>
+        </p:txBody>
+      </p:sp>
+      <p:sp>
+        <p:nvSpPr>
+          <p:cNvPr id="42" name="Text 40"/>
+          <p:cNvSpPr/>
+          <p:nvPr/>
+        </p:nvSpPr>
+        <p:spPr>
+          <a:xfrm>
+            <a:off x="6565392" y="3410712"/>
+            <a:ext cx="2084832" cy="457200"/>
+          </a:xfrm>
+          <a:prstGeom prst="rect">
+            <a:avLst/>
+          </a:prstGeom>
+          <a:noFill/>
+          <a:ln/>
+        </p:spPr>
+        <p:txBody>
+          <a:bodyPr wrap="square" lIns="0" tIns="0" rIns="0" bIns="0" rtlCol="0" anchor="ctr"/>
+          <a:lstStyle/>
+          <a:p>
+            <a:pPr indent="0" marL="0">
+              <a:buNone/>
+            </a:pPr>
+            <a:r>
+              <a:rPr lang="en-US" sz="1200" dirty="0">
+                <a:solidFill>
+                  <a:srgbClr val="1A1F36"/>
+                </a:solidFill>
+                <a:latin typeface="Calibri" pitchFamily="34" charset="0"/>
+                <a:ea typeface="Calibri" pitchFamily="34" charset="-122"/>
+                <a:cs typeface="Calibri" pitchFamily="34" charset="-120"/>
+              </a:rPr>
+              <a:t>Credential lifecycle</a:t>
+            </a:r>
+            <a:endParaRPr lang="en-US" sz="1200" dirty="0"/>
+          </a:p>
+        </p:txBody>
+      </p:sp>
+      <p:sp>
+        <p:nvSpPr>
+          <p:cNvPr id="43" name="Shape 41"/>
+          <p:cNvSpPr/>
+          <p:nvPr/>
+        </p:nvSpPr>
+        <p:spPr>
+          <a:xfrm>
+            <a:off x="6217920" y="4050792"/>
+            <a:ext cx="256032" cy="256032"/>
+          </a:xfrm>
+          <a:prstGeom prst="ellipse">
+            <a:avLst/>
+          </a:prstGeom>
+          <a:solidFill>
+            <a:srgbClr val="7C3AED"/>
+          </a:solidFill>
+          <a:ln w="12700">
+            <a:solidFill>
+              <a:srgbClr val="7C3AED"/>
+            </a:solidFill>
+            <a:prstDash val="solid"/>
+          </a:ln>
+        </p:spPr>
       </p:sp>
       <p:sp>
         <p:nvSpPr>
@@ -4035,8 +4005,47 @@
         </p:nvSpPr>
         <p:spPr>
           <a:xfrm>
-            <a:off x="6583680" y="3557016"/>
-            <a:ext cx="2057400" cy="384048"/>
+            <a:off x="6217920" y="4050792"/>
+            <a:ext cx="256032" cy="256032"/>
+          </a:xfrm>
+          <a:prstGeom prst="rect">
+            <a:avLst/>
+          </a:prstGeom>
+          <a:noFill/>
+          <a:ln/>
+        </p:spPr>
+        <p:txBody>
+          <a:bodyPr wrap="square" lIns="0" tIns="0" rIns="0" bIns="0" rtlCol="0" anchor="ctr"/>
+          <a:lstStyle/>
+          <a:p>
+            <a:pPr algn="ctr" indent="0" marL="0">
+              <a:buNone/>
+            </a:pPr>
+            <a:r>
+              <a:rPr lang="en-US" sz="1000" b="1" dirty="0">
+                <a:solidFill>
+                  <a:srgbClr val="FFFFFF"/>
+                </a:solidFill>
+                <a:latin typeface="Calibri" pitchFamily="34" charset="0"/>
+                <a:ea typeface="Calibri" pitchFamily="34" charset="-122"/>
+                <a:cs typeface="Calibri" pitchFamily="34" charset="-120"/>
+              </a:rPr>
+              <a:t>8</a:t>
+            </a:r>
+            <a:endParaRPr lang="en-US" sz="1000" dirty="0"/>
+          </a:p>
+        </p:txBody>
+      </p:sp>
+      <p:sp>
+        <p:nvSpPr>
+          <p:cNvPr id="45" name="Text 43"/>
+          <p:cNvSpPr/>
+          <p:nvPr/>
+        </p:nvSpPr>
+        <p:spPr>
+          <a:xfrm>
+            <a:off x="6565392" y="3995928"/>
+            <a:ext cx="2084832" cy="457200"/>
           </a:xfrm>
           <a:prstGeom prst="rect">
             <a:avLst/>
@@ -4060,7 +4069,7 @@
                 <a:ea typeface="Calibri" pitchFamily="34" charset="-122"/>
                 <a:cs typeface="Calibri" pitchFamily="34" charset="-120"/>
               </a:rPr>
-              <a:t>Multi-agent collaboration</a:t>
+              <a:t>Auditability &amp; logging</a:t>
             </a:r>
             <a:endParaRPr lang="en-US" sz="1200" dirty="0"/>
           </a:p>
@@ -4068,30 +4077,30 @@
       </p:sp>
       <p:sp>
         <p:nvSpPr>
-          <p:cNvPr id="45" name="Text 43"/>
-          <p:cNvSpPr/>
-          <p:nvPr/>
-        </p:nvSpPr>
-        <p:spPr>
-          <a:xfrm>
-            <a:off x="457200" y="4617720"/>
-            <a:ext cx="8229600" cy="320040"/>
-          </a:xfrm>
-          <a:prstGeom prst="rect">
-            <a:avLst/>
-          </a:prstGeom>
-          <a:noFill/>
-          <a:ln/>
-        </p:spPr>
-        <p:txBody>
-          <a:bodyPr wrap="square" lIns="0" tIns="0" rIns="0" bIns="0" rtlCol="0" anchor="ctr"/>
-          <a:lstStyle/>
-          <a:p>
-            <a:pPr algn="ctr" indent="0" marL="0">
-              <a:buNone/>
-            </a:pPr>
-            <a:r>
-              <a:rPr lang="en-US" sz="1100" i="1" dirty="0">
+          <p:cNvPr id="46" name="Text 44"/>
+          <p:cNvSpPr/>
+          <p:nvPr/>
+        </p:nvSpPr>
+        <p:spPr>
+          <a:xfrm>
+            <a:off x="457200" y="4663440"/>
+            <a:ext cx="8229600" cy="256032"/>
+          </a:xfrm>
+          <a:prstGeom prst="rect">
+            <a:avLst/>
+          </a:prstGeom>
+          <a:noFill/>
+          <a:ln/>
+        </p:spPr>
+        <p:txBody>
+          <a:bodyPr wrap="square" lIns="0" tIns="0" rIns="0" bIns="0" rtlCol="0" anchor="ctr"/>
+          <a:lstStyle/>
+          <a:p>
+            <a:pPr indent="0" marL="0">
+              <a:buNone/>
+            </a:pPr>
+            <a:r>
+              <a:rPr lang="en-US" sz="1000" i="1" dirty="0">
                 <a:solidFill>
                   <a:srgbClr val="64748B"/>
                 </a:solidFill>
@@ -4099,15 +4108,15 @@
                 <a:ea typeface="Calibri" pitchFamily="34" charset="-122"/>
                 <a:cs typeface="Calibri" pitchFamily="34" charset="-120"/>
               </a:rPr>
-              <a:t>P0 covers the full Visibility group + Authorization + Resource policy + Auditability. Everything else is post-P0.</a:t>
-            </a:r>
-            <a:endParaRPr lang="en-US" sz="1100" dirty="0"/>
-          </a:p>
-        </p:txBody>
-      </p:sp>
-      <p:sp>
-        <p:nvSpPr>
-          <p:cNvPr id="46" name="Text 44"/>
+              <a:t>Source: “IAM for LLM-Based AI Agents” framework.</a:t>
+            </a:r>
+            <a:endParaRPr lang="en-US" sz="1000" dirty="0"/>
+          </a:p>
+        </p:txBody>
+      </p:sp>
+      <p:sp>
+        <p:nvSpPr>
+          <p:cNvPr id="47" name="Text 45"/>
           <p:cNvSpPr/>
           <p:nvPr/>
         </p:nvSpPr>

--- a/artifacts/eng-prekickoff-2026-04-27.pptx
+++ b/artifacts/eng-prekickoff-2026-04-27.pptx
@@ -13,10 +13,9 @@
     <p:sldId id="261" r:id="rId7"/>
     <p:sldId id="262" r:id="rId8"/>
     <p:sldId id="263" r:id="rId9"/>
-    <p:sldId id="264" r:id="rId10"/>
   </p:sldIdLst>
   <p:notesMasterIdLst>
-    <p:notesMasterId r:id="rId11"/>
+    <p:notesMasterId r:id="rId10"/>
   </p:notesMasterIdLst>
   <p:sldSz cx="9144000" cy="5143500"/>
   <p:notesSz cx="5143500" cy="9144000"/>
@@ -1150,94 +1149,6 @@
             <a:fld id="{F7021451-1387-4CA6-816F-3879F97B5CBC}" type="slidenum">
               <a:rPr lang="en-US"/>
               <a:t>8</a:t>
-            </a:fld>
-            <a:endParaRPr lang="en-US"/>
-          </a:p>
-        </p:txBody>
-      </p:sp>
-    </p:spTree>
-    <p:extLst>
-      <p:ext uri="{BB962C8B-B14F-4D97-AF65-F5344CB8AC3E}">
-        <p14:creationId xmlns:p14="http://schemas.microsoft.com/office/powerpoint/2010/main" val="1024086991"/>
-      </p:ext>
-    </p:extLst>
-  </p:cSld>
-  <p:clrMapOvr>
-    <a:masterClrMapping/>
-  </p:clrMapOvr>
-</p:notes>
-</file>
-
-<file path=ppt/notesSlides/notesSlide9.xml><?xml version="1.0" encoding="utf-8"?>
-<p:notes xmlns:a="http://schemas.openxmlformats.org/drawingml/2006/main" xmlns:r="http://schemas.openxmlformats.org/officeDocument/2006/relationships" xmlns:p="http://schemas.openxmlformats.org/presentationml/2006/main">
-  <p:cSld>
-    <p:spTree>
-      <p:nvGrpSpPr>
-        <p:cNvPr id="1" name=""/>
-        <p:cNvGrpSpPr/>
-        <p:nvPr/>
-      </p:nvGrpSpPr>
-      <p:grpSpPr>
-        <a:xfrm>
-          <a:off x="0" y="0"/>
-          <a:ext cx="0" cy="0"/>
-          <a:chOff x="0" y="0"/>
-          <a:chExt cx="0" cy="0"/>
-        </a:xfrm>
-      </p:grpSpPr>
-      <p:sp>
-        <p:nvSpPr>
-          <p:cNvPr id="2" name="Slide Image Placeholder 1"/>
-          <p:cNvSpPr>
-            <a:spLocks noGrp="1" noRot="1" noChangeAspect="1"/>
-          </p:cNvSpPr>
-          <p:nvPr>
-            <p:ph type="sldImg"/>
-          </p:nvPr>
-        </p:nvSpPr>
-        <p:spPr/>
-      </p:sp>
-      <p:sp>
-        <p:nvSpPr>
-          <p:cNvPr id="3" name="Notes Placeholder 2"/>
-          <p:cNvSpPr>
-            <a:spLocks noGrp="1"/>
-          </p:cNvSpPr>
-          <p:nvPr>
-            <p:ph type="body" idx="1"/>
-          </p:nvPr>
-        </p:nvSpPr>
-        <p:spPr/>
-        <p:txBody>
-          <a:bodyPr/>
-          <a:lstStyle/>
-          <a:p>
-            <a:r>
-              <a:rPr lang="en-US" dirty="0"/>
-              <a:t/>
-            </a:r>
-            <a:endParaRPr lang="en-US" dirty="0"/>
-          </a:p>
-        </p:txBody>
-      </p:sp>
-      <p:sp>
-        <p:nvSpPr>
-          <p:cNvPr id="4" name="Slide Number Placeholder 3"/>
-          <p:cNvSpPr>
-            <a:spLocks noGrp="1"/>
-          </p:cNvSpPr>
-          <p:nvPr>
-            <p:ph type="sldNum" sz="quarter" idx="10"/>
-          </p:nvPr>
-        </p:nvSpPr>
-        <p:spPr/>
-        <p:txBody>
-          <a:bodyPr/>
-          <a:lstStyle/>
-          <a:p>
-            <a:fld id="{F7021451-1387-4CA6-816F-3879F97B5CBC}" type="slidenum">
-              <a:rPr lang="en-US"/>
-              <a:t>9</a:t>
             </a:fld>
             <a:endParaRPr lang="en-US"/>
           </a:p>
@@ -2589,7 +2500,7 @@
                 <a:ea typeface="Calibri" pitchFamily="34" charset="-122"/>
                 <a:cs typeface="Calibri" pitchFamily="34" charset="-120"/>
               </a:rPr>
-              <a:t>2 / 9</a:t>
+              <a:t>2 / 8</a:t>
             </a:r>
             <a:endParaRPr lang="en-US" sz="900" dirty="0"/>
           </a:p>
@@ -2738,8 +2649,8 @@
         </p:nvSpPr>
         <p:spPr>
           <a:xfrm>
-            <a:off x="365760" y="1691640"/>
-            <a:ext cx="2743200" cy="411480"/>
+            <a:off x="434340" y="1691640"/>
+            <a:ext cx="2697480" cy="411480"/>
           </a:xfrm>
           <a:prstGeom prst="rect">
             <a:avLst/>
@@ -2763,8 +2674,8 @@
         </p:nvSpPr>
         <p:spPr>
           <a:xfrm>
-            <a:off x="365760" y="1691640"/>
-            <a:ext cx="2743200" cy="411480"/>
+            <a:off x="434340" y="1691640"/>
+            <a:ext cx="2697480" cy="411480"/>
           </a:xfrm>
           <a:prstGeom prst="rect">
             <a:avLst/>
@@ -2802,8 +2713,8 @@
         </p:nvSpPr>
         <p:spPr>
           <a:xfrm>
-            <a:off x="365760" y="2103120"/>
-            <a:ext cx="2743200" cy="2468880"/>
+            <a:off x="434340" y="2103120"/>
+            <a:ext cx="2697480" cy="2468880"/>
           </a:xfrm>
           <a:prstGeom prst="rect">
             <a:avLst/>
@@ -2827,7 +2738,7 @@
         </p:nvSpPr>
         <p:spPr>
           <a:xfrm>
-            <a:off x="548640" y="2295144"/>
+            <a:off x="598932" y="2462784"/>
             <a:ext cx="256032" cy="256032"/>
           </a:xfrm>
           <a:prstGeom prst="ellipse">
@@ -2852,7 +2763,7 @@
         </p:nvSpPr>
         <p:spPr>
           <a:xfrm>
-            <a:off x="548640" y="2295144"/>
+            <a:off x="598932" y="2462784"/>
             <a:ext cx="256032" cy="256032"/>
           </a:xfrm>
           <a:prstGeom prst="rect">
@@ -2891,8 +2802,8 @@
         </p:nvSpPr>
         <p:spPr>
           <a:xfrm>
-            <a:off x="896112" y="2240280"/>
-            <a:ext cx="2084832" cy="457200"/>
+            <a:off x="928116" y="2194560"/>
+            <a:ext cx="1554480" cy="792480"/>
           </a:xfrm>
           <a:prstGeom prst="rect">
             <a:avLst/>
@@ -2908,7 +2819,7 @@
               <a:buNone/>
             </a:pPr>
             <a:r>
-              <a:rPr lang="en-US" sz="1200" dirty="0">
+              <a:rPr lang="en-US" sz="1100" dirty="0">
                 <a:solidFill>
                   <a:srgbClr val="1A1F36"/>
                 </a:solidFill>
@@ -2918,7 +2829,7 @@
               </a:rPr>
               <a:t>Registration &amp; identification</a:t>
             </a:r>
-            <a:endParaRPr lang="en-US" sz="1200" dirty="0"/>
+            <a:endParaRPr lang="en-US" sz="1100" dirty="0"/>
           </a:p>
         </p:txBody>
       </p:sp>
@@ -2930,10 +2841,10 @@
         </p:nvSpPr>
         <p:spPr>
           <a:xfrm>
-            <a:off x="548640" y="2880360"/>
-            <a:ext cx="256032" cy="256032"/>
-          </a:xfrm>
-          <a:prstGeom prst="ellipse">
+            <a:off x="2510028" y="2481072"/>
+            <a:ext cx="594360" cy="219456"/>
+          </a:xfrm>
+          <a:prstGeom prst="rect">
             <a:avLst/>
           </a:prstGeom>
           <a:solidFill>
@@ -2955,8 +2866,8 @@
         </p:nvSpPr>
         <p:spPr>
           <a:xfrm>
-            <a:off x="548640" y="2880360"/>
-            <a:ext cx="256032" cy="256032"/>
+            <a:off x="2510028" y="2481072"/>
+            <a:ext cx="594360" cy="219456"/>
           </a:xfrm>
           <a:prstGeom prst="rect">
             <a:avLst/>
@@ -2972,7 +2883,7 @@
               <a:buNone/>
             </a:pPr>
             <a:r>
-              <a:rPr lang="en-US" sz="1000" b="1" dirty="0">
+              <a:rPr lang="en-US" sz="900" b="1" dirty="0">
                 <a:solidFill>
                   <a:srgbClr val="FFFFFF"/>
                 </a:solidFill>
@@ -2980,60 +2891,21 @@
                 <a:ea typeface="Calibri" pitchFamily="34" charset="-122"/>
                 <a:cs typeface="Calibri" pitchFamily="34" charset="-120"/>
               </a:rPr>
-              <a:t>2</a:t>
-            </a:r>
-            <a:endParaRPr lang="en-US" sz="1000" dirty="0"/>
-          </a:p>
-        </p:txBody>
-      </p:sp>
-      <p:sp>
-        <p:nvSpPr>
-          <p:cNvPr id="13" name="Text 11"/>
-          <p:cNvSpPr/>
-          <p:nvPr/>
-        </p:nvSpPr>
-        <p:spPr>
-          <a:xfrm>
-            <a:off x="896112" y="2825496"/>
-            <a:ext cx="2084832" cy="457200"/>
-          </a:xfrm>
-          <a:prstGeom prst="rect">
-            <a:avLst/>
-          </a:prstGeom>
-          <a:noFill/>
-          <a:ln/>
-        </p:spPr>
-        <p:txBody>
-          <a:bodyPr wrap="square" lIns="0" tIns="0" rIns="0" bIns="0" rtlCol="0" anchor="ctr"/>
-          <a:lstStyle/>
-          <a:p>
-            <a:pPr indent="0" marL="0">
-              <a:buNone/>
-            </a:pPr>
-            <a:r>
-              <a:rPr lang="en-US" sz="1200" dirty="0">
-                <a:solidFill>
-                  <a:srgbClr val="1A1F36"/>
-                </a:solidFill>
-                <a:latin typeface="Calibri" pitchFamily="34" charset="0"/>
-                <a:ea typeface="Calibri" pitchFamily="34" charset="-122"/>
-                <a:cs typeface="Calibri" pitchFamily="34" charset="-120"/>
-              </a:rPr>
-              <a:t>Ownership assignment</a:t>
-            </a:r>
-            <a:endParaRPr lang="en-US" sz="1200" dirty="0"/>
-          </a:p>
-        </p:txBody>
-      </p:sp>
-      <p:sp>
-        <p:nvSpPr>
-          <p:cNvPr id="14" name="Shape 12"/>
-          <p:cNvSpPr/>
-          <p:nvPr/>
-        </p:nvSpPr>
-        <p:spPr>
-          <a:xfrm>
-            <a:off x="548640" y="3465576"/>
+              <a:t>M1 ✓</a:t>
+            </a:r>
+            <a:endParaRPr lang="en-US" sz="900" dirty="0"/>
+          </a:p>
+        </p:txBody>
+      </p:sp>
+      <p:sp>
+        <p:nvSpPr>
+          <p:cNvPr id="13" name="Shape 11"/>
+          <p:cNvSpPr/>
+          <p:nvPr/>
+        </p:nvSpPr>
+        <p:spPr>
+          <a:xfrm>
+            <a:off x="598932" y="3255264"/>
             <a:ext cx="256032" cy="256032"/>
           </a:xfrm>
           <a:prstGeom prst="ellipse">
@@ -3052,15 +2924,182 @@
       </p:sp>
       <p:sp>
         <p:nvSpPr>
+          <p:cNvPr id="14" name="Text 12"/>
+          <p:cNvSpPr/>
+          <p:nvPr/>
+        </p:nvSpPr>
+        <p:spPr>
+          <a:xfrm>
+            <a:off x="598932" y="3255264"/>
+            <a:ext cx="256032" cy="256032"/>
+          </a:xfrm>
+          <a:prstGeom prst="rect">
+            <a:avLst/>
+          </a:prstGeom>
+          <a:noFill/>
+          <a:ln/>
+        </p:spPr>
+        <p:txBody>
+          <a:bodyPr wrap="square" lIns="0" tIns="0" rIns="0" bIns="0" rtlCol="0" anchor="ctr"/>
+          <a:lstStyle/>
+          <a:p>
+            <a:pPr algn="ctr" indent="0" marL="0">
+              <a:buNone/>
+            </a:pPr>
+            <a:r>
+              <a:rPr lang="en-US" sz="1000" b="1" dirty="0">
+                <a:solidFill>
+                  <a:srgbClr val="FFFFFF"/>
+                </a:solidFill>
+                <a:latin typeface="Calibri" pitchFamily="34" charset="0"/>
+                <a:ea typeface="Calibri" pitchFamily="34" charset="-122"/>
+                <a:cs typeface="Calibri" pitchFamily="34" charset="-120"/>
+              </a:rPr>
+              <a:t>2</a:t>
+            </a:r>
+            <a:endParaRPr lang="en-US" sz="1000" dirty="0"/>
+          </a:p>
+        </p:txBody>
+      </p:sp>
+      <p:sp>
+        <p:nvSpPr>
           <p:cNvPr id="15" name="Text 13"/>
           <p:cNvSpPr/>
           <p:nvPr/>
         </p:nvSpPr>
         <p:spPr>
           <a:xfrm>
-            <a:off x="548640" y="3465576"/>
+            <a:off x="928116" y="2987040"/>
+            <a:ext cx="1554480" cy="792480"/>
+          </a:xfrm>
+          <a:prstGeom prst="rect">
+            <a:avLst/>
+          </a:prstGeom>
+          <a:noFill/>
+          <a:ln/>
+        </p:spPr>
+        <p:txBody>
+          <a:bodyPr wrap="square" lIns="0" tIns="0" rIns="0" bIns="0" rtlCol="0" anchor="ctr"/>
+          <a:lstStyle/>
+          <a:p>
+            <a:pPr indent="0" marL="0">
+              <a:buNone/>
+            </a:pPr>
+            <a:r>
+              <a:rPr lang="en-US" sz="1100" dirty="0">
+                <a:solidFill>
+                  <a:srgbClr val="1A1F36"/>
+                </a:solidFill>
+                <a:latin typeface="Calibri" pitchFamily="34" charset="0"/>
+                <a:ea typeface="Calibri" pitchFamily="34" charset="-122"/>
+                <a:cs typeface="Calibri" pitchFamily="34" charset="-120"/>
+              </a:rPr>
+              <a:t>Ownership assignment</a:t>
+            </a:r>
+            <a:endParaRPr lang="en-US" sz="1100" dirty="0"/>
+          </a:p>
+        </p:txBody>
+      </p:sp>
+      <p:sp>
+        <p:nvSpPr>
+          <p:cNvPr id="16" name="Shape 14"/>
+          <p:cNvSpPr/>
+          <p:nvPr/>
+        </p:nvSpPr>
+        <p:spPr>
+          <a:xfrm>
+            <a:off x="2510028" y="3273552"/>
+            <a:ext cx="594360" cy="219456"/>
+          </a:xfrm>
+          <a:prstGeom prst="rect">
+            <a:avLst/>
+          </a:prstGeom>
+          <a:solidFill>
+            <a:srgbClr val="02C39A"/>
+          </a:solidFill>
+          <a:ln w="12700">
+            <a:solidFill>
+              <a:srgbClr val="02C39A"/>
+            </a:solidFill>
+            <a:prstDash val="solid"/>
+          </a:ln>
+        </p:spPr>
+      </p:sp>
+      <p:sp>
+        <p:nvSpPr>
+          <p:cNvPr id="17" name="Text 15"/>
+          <p:cNvSpPr/>
+          <p:nvPr/>
+        </p:nvSpPr>
+        <p:spPr>
+          <a:xfrm>
+            <a:off x="2510028" y="3273552"/>
+            <a:ext cx="594360" cy="219456"/>
+          </a:xfrm>
+          <a:prstGeom prst="rect">
+            <a:avLst/>
+          </a:prstGeom>
+          <a:noFill/>
+          <a:ln/>
+        </p:spPr>
+        <p:txBody>
+          <a:bodyPr wrap="square" lIns="0" tIns="0" rIns="0" bIns="0" rtlCol="0" anchor="ctr"/>
+          <a:lstStyle/>
+          <a:p>
+            <a:pPr algn="ctr" indent="0" marL="0">
+              <a:buNone/>
+            </a:pPr>
+            <a:r>
+              <a:rPr lang="en-US" sz="900" b="1" dirty="0">
+                <a:solidFill>
+                  <a:srgbClr val="FFFFFF"/>
+                </a:solidFill>
+                <a:latin typeface="Calibri" pitchFamily="34" charset="0"/>
+                <a:ea typeface="Calibri" pitchFamily="34" charset="-122"/>
+                <a:cs typeface="Calibri" pitchFamily="34" charset="-120"/>
+              </a:rPr>
+              <a:t>M1 ✓</a:t>
+            </a:r>
+            <a:endParaRPr lang="en-US" sz="900" dirty="0"/>
+          </a:p>
+        </p:txBody>
+      </p:sp>
+      <p:sp>
+        <p:nvSpPr>
+          <p:cNvPr id="18" name="Shape 16"/>
+          <p:cNvSpPr/>
+          <p:nvPr/>
+        </p:nvSpPr>
+        <p:spPr>
+          <a:xfrm>
+            <a:off x="598932" y="4047744"/>
             <a:ext cx="256032" cy="256032"/>
           </a:xfrm>
+          <a:prstGeom prst="ellipse">
+            <a:avLst/>
+          </a:prstGeom>
+          <a:solidFill>
+            <a:srgbClr val="02C39A"/>
+          </a:solidFill>
+          <a:ln w="12700">
+            <a:solidFill>
+              <a:srgbClr val="02C39A"/>
+            </a:solidFill>
+            <a:prstDash val="solid"/>
+          </a:ln>
+        </p:spPr>
+      </p:sp>
+      <p:sp>
+        <p:nvSpPr>
+          <p:cNvPr id="19" name="Text 17"/>
+          <p:cNvSpPr/>
+          <p:nvPr/>
+        </p:nvSpPr>
+        <p:spPr>
+          <a:xfrm>
+            <a:off x="598932" y="4047744"/>
+            <a:ext cx="256032" cy="256032"/>
+          </a:xfrm>
           <a:prstGeom prst="rect">
             <a:avLst/>
           </a:prstGeom>
@@ -3091,14 +3130,14 @@
       </p:sp>
       <p:sp>
         <p:nvSpPr>
-          <p:cNvPr id="16" name="Text 14"/>
-          <p:cNvSpPr/>
-          <p:nvPr/>
-        </p:nvSpPr>
-        <p:spPr>
-          <a:xfrm>
-            <a:off x="896112" y="3410712"/>
-            <a:ext cx="2084832" cy="457200"/>
+          <p:cNvPr id="20" name="Text 18"/>
+          <p:cNvSpPr/>
+          <p:nvPr/>
+        </p:nvSpPr>
+        <p:spPr>
+          <a:xfrm>
+            <a:off x="928116" y="3779520"/>
+            <a:ext cx="1554480" cy="792480"/>
           </a:xfrm>
           <a:prstGeom prst="rect">
             <a:avLst/>
@@ -3114,7 +3153,7 @@
               <a:buNone/>
             </a:pPr>
             <a:r>
-              <a:rPr lang="en-US" sz="1200" dirty="0">
+              <a:rPr lang="en-US" sz="1100" dirty="0">
                 <a:solidFill>
                   <a:srgbClr val="1A1F36"/>
                 </a:solidFill>
@@ -3124,19 +3163,83 @@
               </a:rPr>
               <a:t>Visibility &amp; observability</a:t>
             </a:r>
-            <a:endParaRPr lang="en-US" sz="1200" dirty="0"/>
-          </a:p>
-        </p:txBody>
-      </p:sp>
-      <p:sp>
-        <p:nvSpPr>
-          <p:cNvPr id="17" name="Shape 15"/>
-          <p:cNvSpPr/>
-          <p:nvPr/>
-        </p:nvSpPr>
-        <p:spPr>
-          <a:xfrm>
-            <a:off x="3118104" y="1892808"/>
+            <a:endParaRPr lang="en-US" sz="1100" dirty="0"/>
+          </a:p>
+        </p:txBody>
+      </p:sp>
+      <p:sp>
+        <p:nvSpPr>
+          <p:cNvPr id="21" name="Shape 19"/>
+          <p:cNvSpPr/>
+          <p:nvPr/>
+        </p:nvSpPr>
+        <p:spPr>
+          <a:xfrm>
+            <a:off x="2510028" y="4066032"/>
+            <a:ext cx="594360" cy="219456"/>
+          </a:xfrm>
+          <a:prstGeom prst="rect">
+            <a:avLst/>
+          </a:prstGeom>
+          <a:solidFill>
+            <a:srgbClr val="02C39A"/>
+          </a:solidFill>
+          <a:ln w="12700">
+            <a:solidFill>
+              <a:srgbClr val="02C39A"/>
+            </a:solidFill>
+            <a:prstDash val="solid"/>
+          </a:ln>
+        </p:spPr>
+      </p:sp>
+      <p:sp>
+        <p:nvSpPr>
+          <p:cNvPr id="22" name="Text 20"/>
+          <p:cNvSpPr/>
+          <p:nvPr/>
+        </p:nvSpPr>
+        <p:spPr>
+          <a:xfrm>
+            <a:off x="2510028" y="4066032"/>
+            <a:ext cx="594360" cy="219456"/>
+          </a:xfrm>
+          <a:prstGeom prst="rect">
+            <a:avLst/>
+          </a:prstGeom>
+          <a:noFill/>
+          <a:ln/>
+        </p:spPr>
+        <p:txBody>
+          <a:bodyPr wrap="square" lIns="0" tIns="0" rIns="0" bIns="0" rtlCol="0" anchor="ctr"/>
+          <a:lstStyle/>
+          <a:p>
+            <a:pPr algn="ctr" indent="0" marL="0">
+              <a:buNone/>
+            </a:pPr>
+            <a:r>
+              <a:rPr lang="en-US" sz="900" b="1" dirty="0">
+                <a:solidFill>
+                  <a:srgbClr val="FFFFFF"/>
+                </a:solidFill>
+                <a:latin typeface="Calibri" pitchFamily="34" charset="0"/>
+                <a:ea typeface="Calibri" pitchFamily="34" charset="-122"/>
+                <a:cs typeface="Calibri" pitchFamily="34" charset="-120"/>
+              </a:rPr>
+              <a:t>M1 ✓</a:t>
+            </a:r>
+            <a:endParaRPr lang="en-US" sz="900" dirty="0"/>
+          </a:p>
+        </p:txBody>
+      </p:sp>
+      <p:sp>
+        <p:nvSpPr>
+          <p:cNvPr id="23" name="Shape 21"/>
+          <p:cNvSpPr/>
+          <p:nvPr/>
+        </p:nvSpPr>
+        <p:spPr>
+          <a:xfrm>
+            <a:off x="3140964" y="1892808"/>
             <a:ext cx="82296" cy="0"/>
           </a:xfrm>
           <a:prstGeom prst="line">
@@ -3145,7 +3248,7 @@
           <a:noFill/>
           <a:ln w="25400">
             <a:solidFill>
-              <a:srgbClr val="FFFFFF"/>
+              <a:srgbClr val="CBD5E1"/>
             </a:solidFill>
             <a:prstDash val="solid"/>
             <a:tailEnd type="triangle"/>
@@ -3154,14 +3257,14 @@
       </p:sp>
       <p:sp>
         <p:nvSpPr>
-          <p:cNvPr id="18" name="Shape 16"/>
-          <p:cNvSpPr/>
-          <p:nvPr/>
-        </p:nvSpPr>
-        <p:spPr>
-          <a:xfrm>
-            <a:off x="3200400" y="1691640"/>
-            <a:ext cx="2743200" cy="411480"/>
+          <p:cNvPr id="24" name="Shape 22"/>
+          <p:cNvSpPr/>
+          <p:nvPr/>
+        </p:nvSpPr>
+        <p:spPr>
+          <a:xfrm>
+            <a:off x="3223260" y="1691640"/>
+            <a:ext cx="2697480" cy="411480"/>
           </a:xfrm>
           <a:prstGeom prst="rect">
             <a:avLst/>
@@ -3179,14 +3282,14 @@
       </p:sp>
       <p:sp>
         <p:nvSpPr>
-          <p:cNvPr id="19" name="Text 17"/>
-          <p:cNvSpPr/>
-          <p:nvPr/>
-        </p:nvSpPr>
-        <p:spPr>
-          <a:xfrm>
-            <a:off x="3200400" y="1691640"/>
-            <a:ext cx="2743200" cy="411480"/>
+          <p:cNvPr id="25" name="Text 23"/>
+          <p:cNvSpPr/>
+          <p:nvPr/>
+        </p:nvSpPr>
+        <p:spPr>
+          <a:xfrm>
+            <a:off x="3223260" y="1691640"/>
+            <a:ext cx="2697480" cy="411480"/>
           </a:xfrm>
           <a:prstGeom prst="rect">
             <a:avLst/>
@@ -3218,14 +3321,14 @@
       </p:sp>
       <p:sp>
         <p:nvSpPr>
-          <p:cNvPr id="20" name="Shape 18"/>
-          <p:cNvSpPr/>
-          <p:nvPr/>
-        </p:nvSpPr>
-        <p:spPr>
-          <a:xfrm>
-            <a:off x="3200400" y="2103120"/>
-            <a:ext cx="2743200" cy="2468880"/>
+          <p:cNvPr id="26" name="Shape 24"/>
+          <p:cNvSpPr/>
+          <p:nvPr/>
+        </p:nvSpPr>
+        <p:spPr>
+          <a:xfrm>
+            <a:off x="3223260" y="2103120"/>
+            <a:ext cx="2697480" cy="2468880"/>
           </a:xfrm>
           <a:prstGeom prst="rect">
             <a:avLst/>
@@ -3243,13 +3346,13 @@
       </p:sp>
       <p:sp>
         <p:nvSpPr>
-          <p:cNvPr id="21" name="Shape 19"/>
-          <p:cNvSpPr/>
-          <p:nvPr/>
-        </p:nvSpPr>
-        <p:spPr>
-          <a:xfrm>
-            <a:off x="3383280" y="2295144"/>
+          <p:cNvPr id="27" name="Shape 25"/>
+          <p:cNvSpPr/>
+          <p:nvPr/>
+        </p:nvSpPr>
+        <p:spPr>
+          <a:xfrm>
+            <a:off x="3387852" y="2462784"/>
             <a:ext cx="256032" cy="256032"/>
           </a:xfrm>
           <a:prstGeom prst="ellipse">
@@ -3268,13 +3371,13 @@
       </p:sp>
       <p:sp>
         <p:nvSpPr>
-          <p:cNvPr id="22" name="Text 20"/>
-          <p:cNvSpPr/>
-          <p:nvPr/>
-        </p:nvSpPr>
-        <p:spPr>
-          <a:xfrm>
-            <a:off x="3383280" y="2295144"/>
+          <p:cNvPr id="28" name="Text 26"/>
+          <p:cNvSpPr/>
+          <p:nvPr/>
+        </p:nvSpPr>
+        <p:spPr>
+          <a:xfrm>
+            <a:off x="3387852" y="2462784"/>
             <a:ext cx="256032" cy="256032"/>
           </a:xfrm>
           <a:prstGeom prst="rect">
@@ -3307,14 +3410,14 @@
       </p:sp>
       <p:sp>
         <p:nvSpPr>
-          <p:cNvPr id="23" name="Text 21"/>
-          <p:cNvSpPr/>
-          <p:nvPr/>
-        </p:nvSpPr>
-        <p:spPr>
-          <a:xfrm>
-            <a:off x="3730752" y="2240280"/>
-            <a:ext cx="2084832" cy="457200"/>
+          <p:cNvPr id="29" name="Text 27"/>
+          <p:cNvSpPr/>
+          <p:nvPr/>
+        </p:nvSpPr>
+        <p:spPr>
+          <a:xfrm>
+            <a:off x="3717036" y="2194560"/>
+            <a:ext cx="1554480" cy="792480"/>
           </a:xfrm>
           <a:prstGeom prst="rect">
             <a:avLst/>
@@ -3330,7 +3433,7 @@
               <a:buNone/>
             </a:pPr>
             <a:r>
-              <a:rPr lang="en-US" sz="1200" dirty="0">
+              <a:rPr lang="en-US" sz="1100" dirty="0">
                 <a:solidFill>
                   <a:srgbClr val="1A1F36"/>
                 </a:solidFill>
@@ -3340,19 +3443,83 @@
               </a:rPr>
               <a:t>Authentication</a:t>
             </a:r>
-            <a:endParaRPr lang="en-US" sz="1200" dirty="0"/>
-          </a:p>
-        </p:txBody>
-      </p:sp>
-      <p:sp>
-        <p:nvSpPr>
-          <p:cNvPr id="24" name="Shape 22"/>
-          <p:cNvSpPr/>
-          <p:nvPr/>
-        </p:nvSpPr>
-        <p:spPr>
-          <a:xfrm>
-            <a:off x="3383280" y="2880360"/>
+            <a:endParaRPr lang="en-US" sz="1100" dirty="0"/>
+          </a:p>
+        </p:txBody>
+      </p:sp>
+      <p:sp>
+        <p:nvSpPr>
+          <p:cNvPr id="30" name="Shape 28"/>
+          <p:cNvSpPr/>
+          <p:nvPr/>
+        </p:nvSpPr>
+        <p:spPr>
+          <a:xfrm>
+            <a:off x="5298948" y="2481072"/>
+            <a:ext cx="594360" cy="219456"/>
+          </a:xfrm>
+          <a:prstGeom prst="rect">
+            <a:avLst/>
+          </a:prstGeom>
+          <a:solidFill>
+            <a:srgbClr val="F59E0B"/>
+          </a:solidFill>
+          <a:ln w="12700">
+            <a:solidFill>
+              <a:srgbClr val="F59E0B"/>
+            </a:solidFill>
+            <a:prstDash val="solid"/>
+          </a:ln>
+        </p:spPr>
+      </p:sp>
+      <p:sp>
+        <p:nvSpPr>
+          <p:cNvPr id="31" name="Text 29"/>
+          <p:cNvSpPr/>
+          <p:nvPr/>
+        </p:nvSpPr>
+        <p:spPr>
+          <a:xfrm>
+            <a:off x="5298948" y="2481072"/>
+            <a:ext cx="594360" cy="219456"/>
+          </a:xfrm>
+          <a:prstGeom prst="rect">
+            <a:avLst/>
+          </a:prstGeom>
+          <a:noFill/>
+          <a:ln/>
+        </p:spPr>
+        <p:txBody>
+          <a:bodyPr wrap="square" lIns="0" tIns="0" rIns="0" bIns="0" rtlCol="0" anchor="ctr"/>
+          <a:lstStyle/>
+          <a:p>
+            <a:pPr algn="ctr" indent="0" marL="0">
+              <a:buNone/>
+            </a:pPr>
+            <a:r>
+              <a:rPr lang="en-US" sz="900" b="1" dirty="0">
+                <a:solidFill>
+                  <a:srgbClr val="FFFFFF"/>
+                </a:solidFill>
+                <a:latin typeface="Calibri" pitchFamily="34" charset="0"/>
+                <a:ea typeface="Calibri" pitchFamily="34" charset="-122"/>
+                <a:cs typeface="Calibri" pitchFamily="34" charset="-120"/>
+              </a:rPr>
+              <a:t>M2</a:t>
+            </a:r>
+            <a:endParaRPr lang="en-US" sz="900" dirty="0"/>
+          </a:p>
+        </p:txBody>
+      </p:sp>
+      <p:sp>
+        <p:nvSpPr>
+          <p:cNvPr id="32" name="Shape 30"/>
+          <p:cNvSpPr/>
+          <p:nvPr/>
+        </p:nvSpPr>
+        <p:spPr>
+          <a:xfrm>
+            <a:off x="3387852" y="3255264"/>
             <a:ext cx="256032" cy="256032"/>
           </a:xfrm>
           <a:prstGeom prst="ellipse">
@@ -3371,13 +3538,13 @@
       </p:sp>
       <p:sp>
         <p:nvSpPr>
-          <p:cNvPr id="25" name="Text 23"/>
-          <p:cNvSpPr/>
-          <p:nvPr/>
-        </p:nvSpPr>
-        <p:spPr>
-          <a:xfrm>
-            <a:off x="3383280" y="2880360"/>
+          <p:cNvPr id="33" name="Text 31"/>
+          <p:cNvSpPr/>
+          <p:nvPr/>
+        </p:nvSpPr>
+        <p:spPr>
+          <a:xfrm>
+            <a:off x="3387852" y="3255264"/>
             <a:ext cx="256032" cy="256032"/>
           </a:xfrm>
           <a:prstGeom prst="rect">
@@ -3410,14 +3577,14 @@
       </p:sp>
       <p:sp>
         <p:nvSpPr>
-          <p:cNvPr id="26" name="Text 24"/>
-          <p:cNvSpPr/>
-          <p:nvPr/>
-        </p:nvSpPr>
-        <p:spPr>
-          <a:xfrm>
-            <a:off x="3730752" y="2825496"/>
-            <a:ext cx="2084832" cy="457200"/>
+          <p:cNvPr id="34" name="Text 32"/>
+          <p:cNvSpPr/>
+          <p:nvPr/>
+        </p:nvSpPr>
+        <p:spPr>
+          <a:xfrm>
+            <a:off x="3717036" y="2987040"/>
+            <a:ext cx="1554480" cy="792480"/>
           </a:xfrm>
           <a:prstGeom prst="rect">
             <a:avLst/>
@@ -3433,7 +3600,7 @@
               <a:buNone/>
             </a:pPr>
             <a:r>
-              <a:rPr lang="en-US" sz="1200" dirty="0">
+              <a:rPr lang="en-US" sz="1100" dirty="0">
                 <a:solidFill>
                   <a:srgbClr val="1A1F36"/>
                 </a:solidFill>
@@ -3443,22 +3610,22 @@
               </a:rPr>
               <a:t>Authorization &amp; delegation</a:t>
             </a:r>
-            <a:endParaRPr lang="en-US" sz="1200" dirty="0"/>
-          </a:p>
-        </p:txBody>
-      </p:sp>
-      <p:sp>
-        <p:nvSpPr>
-          <p:cNvPr id="27" name="Shape 25"/>
-          <p:cNvSpPr/>
-          <p:nvPr/>
-        </p:nvSpPr>
-        <p:spPr>
-          <a:xfrm>
-            <a:off x="3383280" y="3465576"/>
-            <a:ext cx="256032" cy="256032"/>
-          </a:xfrm>
-          <a:prstGeom prst="ellipse">
+            <a:endParaRPr lang="en-US" sz="1100" dirty="0"/>
+          </a:p>
+        </p:txBody>
+      </p:sp>
+      <p:sp>
+        <p:nvSpPr>
+          <p:cNvPr id="35" name="Shape 33"/>
+          <p:cNvSpPr/>
+          <p:nvPr/>
+        </p:nvSpPr>
+        <p:spPr>
+          <a:xfrm>
+            <a:off x="5298948" y="3273552"/>
+            <a:ext cx="594360" cy="219456"/>
+          </a:xfrm>
+          <a:prstGeom prst="rect">
             <a:avLst/>
           </a:prstGeom>
           <a:solidFill>
@@ -3474,15 +3641,79 @@
       </p:sp>
       <p:sp>
         <p:nvSpPr>
-          <p:cNvPr id="28" name="Text 26"/>
-          <p:cNvSpPr/>
-          <p:nvPr/>
-        </p:nvSpPr>
-        <p:spPr>
-          <a:xfrm>
-            <a:off x="3383280" y="3465576"/>
+          <p:cNvPr id="36" name="Text 34"/>
+          <p:cNvSpPr/>
+          <p:nvPr/>
+        </p:nvSpPr>
+        <p:spPr>
+          <a:xfrm>
+            <a:off x="5298948" y="3273552"/>
+            <a:ext cx="594360" cy="219456"/>
+          </a:xfrm>
+          <a:prstGeom prst="rect">
+            <a:avLst/>
+          </a:prstGeom>
+          <a:noFill/>
+          <a:ln/>
+        </p:spPr>
+        <p:txBody>
+          <a:bodyPr wrap="square" lIns="0" tIns="0" rIns="0" bIns="0" rtlCol="0" anchor="ctr"/>
+          <a:lstStyle/>
+          <a:p>
+            <a:pPr algn="ctr" indent="0" marL="0">
+              <a:buNone/>
+            </a:pPr>
+            <a:r>
+              <a:rPr lang="en-US" sz="900" b="1" dirty="0">
+                <a:solidFill>
+                  <a:srgbClr val="FFFFFF"/>
+                </a:solidFill>
+                <a:latin typeface="Calibri" pitchFamily="34" charset="0"/>
+                <a:ea typeface="Calibri" pitchFamily="34" charset="-122"/>
+                <a:cs typeface="Calibri" pitchFamily="34" charset="-120"/>
+              </a:rPr>
+              <a:t>P0</a:t>
+            </a:r>
+            <a:endParaRPr lang="en-US" sz="900" dirty="0"/>
+          </a:p>
+        </p:txBody>
+      </p:sp>
+      <p:sp>
+        <p:nvSpPr>
+          <p:cNvPr id="37" name="Shape 35"/>
+          <p:cNvSpPr/>
+          <p:nvPr/>
+        </p:nvSpPr>
+        <p:spPr>
+          <a:xfrm>
+            <a:off x="3387852" y="4047744"/>
             <a:ext cx="256032" cy="256032"/>
           </a:xfrm>
+          <a:prstGeom prst="ellipse">
+            <a:avLst/>
+          </a:prstGeom>
+          <a:solidFill>
+            <a:srgbClr val="0F1B3D"/>
+          </a:solidFill>
+          <a:ln w="12700">
+            <a:solidFill>
+              <a:srgbClr val="0F1B3D"/>
+            </a:solidFill>
+            <a:prstDash val="solid"/>
+          </a:ln>
+        </p:spPr>
+      </p:sp>
+      <p:sp>
+        <p:nvSpPr>
+          <p:cNvPr id="38" name="Text 36"/>
+          <p:cNvSpPr/>
+          <p:nvPr/>
+        </p:nvSpPr>
+        <p:spPr>
+          <a:xfrm>
+            <a:off x="3387852" y="4047744"/>
+            <a:ext cx="256032" cy="256032"/>
+          </a:xfrm>
           <a:prstGeom prst="rect">
             <a:avLst/>
           </a:prstGeom>
@@ -3513,14 +3744,14 @@
       </p:sp>
       <p:sp>
         <p:nvSpPr>
-          <p:cNvPr id="29" name="Text 27"/>
-          <p:cNvSpPr/>
-          <p:nvPr/>
-        </p:nvSpPr>
-        <p:spPr>
-          <a:xfrm>
-            <a:off x="3730752" y="3410712"/>
-            <a:ext cx="2084832" cy="457200"/>
+          <p:cNvPr id="39" name="Text 37"/>
+          <p:cNvSpPr/>
+          <p:nvPr/>
+        </p:nvSpPr>
+        <p:spPr>
+          <a:xfrm>
+            <a:off x="3717036" y="3779520"/>
+            <a:ext cx="1554480" cy="792480"/>
           </a:xfrm>
           <a:prstGeom prst="rect">
             <a:avLst/>
@@ -3536,7 +3767,7 @@
               <a:buNone/>
             </a:pPr>
             <a:r>
-              <a:rPr lang="en-US" sz="1200" dirty="0">
+              <a:rPr lang="en-US" sz="1100" dirty="0">
                 <a:solidFill>
                   <a:srgbClr val="1A1F36"/>
                 </a:solidFill>
@@ -3546,19 +3777,83 @@
               </a:rPr>
               <a:t>Multi-agent collaboration</a:t>
             </a:r>
-            <a:endParaRPr lang="en-US" sz="1200" dirty="0"/>
-          </a:p>
-        </p:txBody>
-      </p:sp>
-      <p:sp>
-        <p:nvSpPr>
-          <p:cNvPr id="30" name="Shape 28"/>
-          <p:cNvSpPr/>
-          <p:nvPr/>
-        </p:nvSpPr>
-        <p:spPr>
-          <a:xfrm>
-            <a:off x="5952744" y="1892808"/>
+            <a:endParaRPr lang="en-US" sz="1100" dirty="0"/>
+          </a:p>
+        </p:txBody>
+      </p:sp>
+      <p:sp>
+        <p:nvSpPr>
+          <p:cNvPr id="40" name="Shape 38"/>
+          <p:cNvSpPr/>
+          <p:nvPr/>
+        </p:nvSpPr>
+        <p:spPr>
+          <a:xfrm>
+            <a:off x="5298948" y="4066032"/>
+            <a:ext cx="594360" cy="219456"/>
+          </a:xfrm>
+          <a:prstGeom prst="rect">
+            <a:avLst/>
+          </a:prstGeom>
+          <a:solidFill>
+            <a:srgbClr val="64748B"/>
+          </a:solidFill>
+          <a:ln w="12700">
+            <a:solidFill>
+              <a:srgbClr val="64748B"/>
+            </a:solidFill>
+            <a:prstDash val="solid"/>
+          </a:ln>
+        </p:spPr>
+      </p:sp>
+      <p:sp>
+        <p:nvSpPr>
+          <p:cNvPr id="41" name="Text 39"/>
+          <p:cNvSpPr/>
+          <p:nvPr/>
+        </p:nvSpPr>
+        <p:spPr>
+          <a:xfrm>
+            <a:off x="5298948" y="4066032"/>
+            <a:ext cx="594360" cy="219456"/>
+          </a:xfrm>
+          <a:prstGeom prst="rect">
+            <a:avLst/>
+          </a:prstGeom>
+          <a:noFill/>
+          <a:ln/>
+        </p:spPr>
+        <p:txBody>
+          <a:bodyPr wrap="square" lIns="0" tIns="0" rIns="0" bIns="0" rtlCol="0" anchor="ctr"/>
+          <a:lstStyle/>
+          <a:p>
+            <a:pPr algn="ctr" indent="0" marL="0">
+              <a:buNone/>
+            </a:pPr>
+            <a:r>
+              <a:rPr lang="en-US" sz="900" b="1" dirty="0">
+                <a:solidFill>
+                  <a:srgbClr val="FFFFFF"/>
+                </a:solidFill>
+                <a:latin typeface="Calibri" pitchFamily="34" charset="0"/>
+                <a:ea typeface="Calibri" pitchFamily="34" charset="-122"/>
+                <a:cs typeface="Calibri" pitchFamily="34" charset="-120"/>
+              </a:rPr>
+              <a:t>Future</a:t>
+            </a:r>
+            <a:endParaRPr lang="en-US" sz="900" dirty="0"/>
+          </a:p>
+        </p:txBody>
+      </p:sp>
+      <p:sp>
+        <p:nvSpPr>
+          <p:cNvPr id="42" name="Shape 40"/>
+          <p:cNvSpPr/>
+          <p:nvPr/>
+        </p:nvSpPr>
+        <p:spPr>
+          <a:xfrm>
+            <a:off x="5929884" y="1892808"/>
             <a:ext cx="82296" cy="0"/>
           </a:xfrm>
           <a:prstGeom prst="line">
@@ -3567,7 +3862,7 @@
           <a:noFill/>
           <a:ln w="25400">
             <a:solidFill>
-              <a:srgbClr val="FFFFFF"/>
+              <a:srgbClr val="CBD5E1"/>
             </a:solidFill>
             <a:prstDash val="solid"/>
             <a:tailEnd type="triangle"/>
@@ -3576,14 +3871,14 @@
       </p:sp>
       <p:sp>
         <p:nvSpPr>
-          <p:cNvPr id="31" name="Shape 29"/>
-          <p:cNvSpPr/>
-          <p:nvPr/>
-        </p:nvSpPr>
-        <p:spPr>
-          <a:xfrm>
-            <a:off x="6035040" y="1691640"/>
-            <a:ext cx="2743200" cy="411480"/>
+          <p:cNvPr id="43" name="Shape 41"/>
+          <p:cNvSpPr/>
+          <p:nvPr/>
+        </p:nvSpPr>
+        <p:spPr>
+          <a:xfrm>
+            <a:off x="6012180" y="1691640"/>
+            <a:ext cx="2697480" cy="411480"/>
           </a:xfrm>
           <a:prstGeom prst="rect">
             <a:avLst/>
@@ -3601,14 +3896,14 @@
       </p:sp>
       <p:sp>
         <p:nvSpPr>
-          <p:cNvPr id="32" name="Text 30"/>
-          <p:cNvSpPr/>
-          <p:nvPr/>
-        </p:nvSpPr>
-        <p:spPr>
-          <a:xfrm>
-            <a:off x="6035040" y="1691640"/>
-            <a:ext cx="2743200" cy="411480"/>
+          <p:cNvPr id="44" name="Text 42"/>
+          <p:cNvSpPr/>
+          <p:nvPr/>
+        </p:nvSpPr>
+        <p:spPr>
+          <a:xfrm>
+            <a:off x="6012180" y="1691640"/>
+            <a:ext cx="2697480" cy="411480"/>
           </a:xfrm>
           <a:prstGeom prst="rect">
             <a:avLst/>
@@ -3640,14 +3935,14 @@
       </p:sp>
       <p:sp>
         <p:nvSpPr>
-          <p:cNvPr id="33" name="Shape 31"/>
-          <p:cNvSpPr/>
-          <p:nvPr/>
-        </p:nvSpPr>
-        <p:spPr>
-          <a:xfrm>
-            <a:off x="6035040" y="2103120"/>
-            <a:ext cx="2743200" cy="2468880"/>
+          <p:cNvPr id="45" name="Shape 43"/>
+          <p:cNvSpPr/>
+          <p:nvPr/>
+        </p:nvSpPr>
+        <p:spPr>
+          <a:xfrm>
+            <a:off x="6012180" y="2103120"/>
+            <a:ext cx="2697480" cy="2468880"/>
           </a:xfrm>
           <a:prstGeom prst="rect">
             <a:avLst/>
@@ -3665,13 +3960,13 @@
       </p:sp>
       <p:sp>
         <p:nvSpPr>
-          <p:cNvPr id="34" name="Shape 32"/>
-          <p:cNvSpPr/>
-          <p:nvPr/>
-        </p:nvSpPr>
-        <p:spPr>
-          <a:xfrm>
-            <a:off x="6217920" y="2295144"/>
+          <p:cNvPr id="46" name="Shape 44"/>
+          <p:cNvSpPr/>
+          <p:nvPr/>
+        </p:nvSpPr>
+        <p:spPr>
+          <a:xfrm>
+            <a:off x="6176772" y="2363724"/>
             <a:ext cx="256032" cy="256032"/>
           </a:xfrm>
           <a:prstGeom prst="ellipse">
@@ -3690,13 +3985,13 @@
       </p:sp>
       <p:sp>
         <p:nvSpPr>
-          <p:cNvPr id="35" name="Text 33"/>
-          <p:cNvSpPr/>
-          <p:nvPr/>
-        </p:nvSpPr>
-        <p:spPr>
-          <a:xfrm>
-            <a:off x="6217920" y="2295144"/>
+          <p:cNvPr id="47" name="Text 45"/>
+          <p:cNvSpPr/>
+          <p:nvPr/>
+        </p:nvSpPr>
+        <p:spPr>
+          <a:xfrm>
+            <a:off x="6176772" y="2363724"/>
             <a:ext cx="256032" cy="256032"/>
           </a:xfrm>
           <a:prstGeom prst="rect">
@@ -3729,14 +4024,14 @@
       </p:sp>
       <p:sp>
         <p:nvSpPr>
-          <p:cNvPr id="36" name="Text 34"/>
-          <p:cNvSpPr/>
-          <p:nvPr/>
-        </p:nvSpPr>
-        <p:spPr>
-          <a:xfrm>
-            <a:off x="6565392" y="2240280"/>
-            <a:ext cx="2084832" cy="457200"/>
+          <p:cNvPr id="48" name="Text 46"/>
+          <p:cNvSpPr/>
+          <p:nvPr/>
+        </p:nvSpPr>
+        <p:spPr>
+          <a:xfrm>
+            <a:off x="6505956" y="2194560"/>
+            <a:ext cx="1554480" cy="594360"/>
           </a:xfrm>
           <a:prstGeom prst="rect">
             <a:avLst/>
@@ -3752,7 +4047,7 @@
               <a:buNone/>
             </a:pPr>
             <a:r>
-              <a:rPr lang="en-US" sz="1200" dirty="0">
+              <a:rPr lang="en-US" sz="1100" dirty="0">
                 <a:solidFill>
                   <a:srgbClr val="1A1F36"/>
                 </a:solidFill>
@@ -3762,19 +4057,83 @@
               </a:rPr>
               <a:t>Human oversight &amp; approval</a:t>
             </a:r>
-            <a:endParaRPr lang="en-US" sz="1200" dirty="0"/>
-          </a:p>
-        </p:txBody>
-      </p:sp>
-      <p:sp>
-        <p:nvSpPr>
-          <p:cNvPr id="37" name="Shape 35"/>
-          <p:cNvSpPr/>
-          <p:nvPr/>
-        </p:nvSpPr>
-        <p:spPr>
-          <a:xfrm>
-            <a:off x="6217920" y="2880360"/>
+            <a:endParaRPr lang="en-US" sz="1100" dirty="0"/>
+          </a:p>
+        </p:txBody>
+      </p:sp>
+      <p:sp>
+        <p:nvSpPr>
+          <p:cNvPr id="49" name="Shape 47"/>
+          <p:cNvSpPr/>
+          <p:nvPr/>
+        </p:nvSpPr>
+        <p:spPr>
+          <a:xfrm>
+            <a:off x="8087868" y="2382012"/>
+            <a:ext cx="594360" cy="219456"/>
+          </a:xfrm>
+          <a:prstGeom prst="rect">
+            <a:avLst/>
+          </a:prstGeom>
+          <a:solidFill>
+            <a:srgbClr val="64748B"/>
+          </a:solidFill>
+          <a:ln w="12700">
+            <a:solidFill>
+              <a:srgbClr val="64748B"/>
+            </a:solidFill>
+            <a:prstDash val="solid"/>
+          </a:ln>
+        </p:spPr>
+      </p:sp>
+      <p:sp>
+        <p:nvSpPr>
+          <p:cNvPr id="50" name="Text 48"/>
+          <p:cNvSpPr/>
+          <p:nvPr/>
+        </p:nvSpPr>
+        <p:spPr>
+          <a:xfrm>
+            <a:off x="8087868" y="2382012"/>
+            <a:ext cx="594360" cy="219456"/>
+          </a:xfrm>
+          <a:prstGeom prst="rect">
+            <a:avLst/>
+          </a:prstGeom>
+          <a:noFill/>
+          <a:ln/>
+        </p:spPr>
+        <p:txBody>
+          <a:bodyPr wrap="square" lIns="0" tIns="0" rIns="0" bIns="0" rtlCol="0" anchor="ctr"/>
+          <a:lstStyle/>
+          <a:p>
+            <a:pPr algn="ctr" indent="0" marL="0">
+              <a:buNone/>
+            </a:pPr>
+            <a:r>
+              <a:rPr lang="en-US" sz="900" b="1" dirty="0">
+                <a:solidFill>
+                  <a:srgbClr val="FFFFFF"/>
+                </a:solidFill>
+                <a:latin typeface="Calibri" pitchFamily="34" charset="0"/>
+                <a:ea typeface="Calibri" pitchFamily="34" charset="-122"/>
+                <a:cs typeface="Calibri" pitchFamily="34" charset="-120"/>
+              </a:rPr>
+              <a:t>Future</a:t>
+            </a:r>
+            <a:endParaRPr lang="en-US" sz="900" dirty="0"/>
+          </a:p>
+        </p:txBody>
+      </p:sp>
+      <p:sp>
+        <p:nvSpPr>
+          <p:cNvPr id="51" name="Shape 49"/>
+          <p:cNvSpPr/>
+          <p:nvPr/>
+        </p:nvSpPr>
+        <p:spPr>
+          <a:xfrm>
+            <a:off x="6176772" y="2958084"/>
             <a:ext cx="256032" cy="256032"/>
           </a:xfrm>
           <a:prstGeom prst="ellipse">
@@ -3793,13 +4152,13 @@
       </p:sp>
       <p:sp>
         <p:nvSpPr>
-          <p:cNvPr id="38" name="Text 36"/>
-          <p:cNvSpPr/>
-          <p:nvPr/>
-        </p:nvSpPr>
-        <p:spPr>
-          <a:xfrm>
-            <a:off x="6217920" y="2880360"/>
+          <p:cNvPr id="52" name="Text 50"/>
+          <p:cNvSpPr/>
+          <p:nvPr/>
+        </p:nvSpPr>
+        <p:spPr>
+          <a:xfrm>
+            <a:off x="6176772" y="2958084"/>
             <a:ext cx="256032" cy="256032"/>
           </a:xfrm>
           <a:prstGeom prst="rect">
@@ -3832,14 +4191,14 @@
       </p:sp>
       <p:sp>
         <p:nvSpPr>
-          <p:cNvPr id="39" name="Text 37"/>
-          <p:cNvSpPr/>
-          <p:nvPr/>
-        </p:nvSpPr>
-        <p:spPr>
-          <a:xfrm>
-            <a:off x="6565392" y="2825496"/>
-            <a:ext cx="2084832" cy="457200"/>
+          <p:cNvPr id="53" name="Text 51"/>
+          <p:cNvSpPr/>
+          <p:nvPr/>
+        </p:nvSpPr>
+        <p:spPr>
+          <a:xfrm>
+            <a:off x="6505956" y="2788920"/>
+            <a:ext cx="1554480" cy="594360"/>
           </a:xfrm>
           <a:prstGeom prst="rect">
             <a:avLst/>
@@ -3855,7 +4214,7 @@
               <a:buNone/>
             </a:pPr>
             <a:r>
-              <a:rPr lang="en-US" sz="1200" dirty="0">
+              <a:rPr lang="en-US" sz="1100" dirty="0">
                 <a:solidFill>
                   <a:srgbClr val="1A1F36"/>
                 </a:solidFill>
@@ -3865,19 +4224,83 @@
               </a:rPr>
               <a:t>Resource policy enforcement</a:t>
             </a:r>
-            <a:endParaRPr lang="en-US" sz="1200" dirty="0"/>
-          </a:p>
-        </p:txBody>
-      </p:sp>
-      <p:sp>
-        <p:nvSpPr>
-          <p:cNvPr id="40" name="Shape 38"/>
-          <p:cNvSpPr/>
-          <p:nvPr/>
-        </p:nvSpPr>
-        <p:spPr>
-          <a:xfrm>
-            <a:off x="6217920" y="3465576"/>
+            <a:endParaRPr lang="en-US" sz="1100" dirty="0"/>
+          </a:p>
+        </p:txBody>
+      </p:sp>
+      <p:sp>
+        <p:nvSpPr>
+          <p:cNvPr id="54" name="Shape 52"/>
+          <p:cNvSpPr/>
+          <p:nvPr/>
+        </p:nvSpPr>
+        <p:spPr>
+          <a:xfrm>
+            <a:off x="8087868" y="2976372"/>
+            <a:ext cx="594360" cy="219456"/>
+          </a:xfrm>
+          <a:prstGeom prst="rect">
+            <a:avLst/>
+          </a:prstGeom>
+          <a:solidFill>
+            <a:srgbClr val="0F1B3D"/>
+          </a:solidFill>
+          <a:ln w="12700">
+            <a:solidFill>
+              <a:srgbClr val="0F1B3D"/>
+            </a:solidFill>
+            <a:prstDash val="solid"/>
+          </a:ln>
+        </p:spPr>
+      </p:sp>
+      <p:sp>
+        <p:nvSpPr>
+          <p:cNvPr id="55" name="Text 53"/>
+          <p:cNvSpPr/>
+          <p:nvPr/>
+        </p:nvSpPr>
+        <p:spPr>
+          <a:xfrm>
+            <a:off x="8087868" y="2976372"/>
+            <a:ext cx="594360" cy="219456"/>
+          </a:xfrm>
+          <a:prstGeom prst="rect">
+            <a:avLst/>
+          </a:prstGeom>
+          <a:noFill/>
+          <a:ln/>
+        </p:spPr>
+        <p:txBody>
+          <a:bodyPr wrap="square" lIns="0" tIns="0" rIns="0" bIns="0" rtlCol="0" anchor="ctr"/>
+          <a:lstStyle/>
+          <a:p>
+            <a:pPr algn="ctr" indent="0" marL="0">
+              <a:buNone/>
+            </a:pPr>
+            <a:r>
+              <a:rPr lang="en-US" sz="900" b="1" dirty="0">
+                <a:solidFill>
+                  <a:srgbClr val="FFFFFF"/>
+                </a:solidFill>
+                <a:latin typeface="Calibri" pitchFamily="34" charset="0"/>
+                <a:ea typeface="Calibri" pitchFamily="34" charset="-122"/>
+                <a:cs typeface="Calibri" pitchFamily="34" charset="-120"/>
+              </a:rPr>
+              <a:t>P0</a:t>
+            </a:r>
+            <a:endParaRPr lang="en-US" sz="900" dirty="0"/>
+          </a:p>
+        </p:txBody>
+      </p:sp>
+      <p:sp>
+        <p:nvSpPr>
+          <p:cNvPr id="56" name="Shape 54"/>
+          <p:cNvSpPr/>
+          <p:nvPr/>
+        </p:nvSpPr>
+        <p:spPr>
+          <a:xfrm>
+            <a:off x="6176772" y="3552444"/>
             <a:ext cx="256032" cy="256032"/>
           </a:xfrm>
           <a:prstGeom prst="ellipse">
@@ -3896,13 +4319,13 @@
       </p:sp>
       <p:sp>
         <p:nvSpPr>
-          <p:cNvPr id="41" name="Text 39"/>
-          <p:cNvSpPr/>
-          <p:nvPr/>
-        </p:nvSpPr>
-        <p:spPr>
-          <a:xfrm>
-            <a:off x="6217920" y="3465576"/>
+          <p:cNvPr id="57" name="Text 55"/>
+          <p:cNvSpPr/>
+          <p:nvPr/>
+        </p:nvSpPr>
+        <p:spPr>
+          <a:xfrm>
+            <a:off x="6176772" y="3552444"/>
             <a:ext cx="256032" cy="256032"/>
           </a:xfrm>
           <a:prstGeom prst="rect">
@@ -3935,14 +4358,14 @@
       </p:sp>
       <p:sp>
         <p:nvSpPr>
-          <p:cNvPr id="42" name="Text 40"/>
-          <p:cNvSpPr/>
-          <p:nvPr/>
-        </p:nvSpPr>
-        <p:spPr>
-          <a:xfrm>
-            <a:off x="6565392" y="3410712"/>
-            <a:ext cx="2084832" cy="457200"/>
+          <p:cNvPr id="58" name="Text 56"/>
+          <p:cNvSpPr/>
+          <p:nvPr/>
+        </p:nvSpPr>
+        <p:spPr>
+          <a:xfrm>
+            <a:off x="6505956" y="3383280"/>
+            <a:ext cx="1554480" cy="594360"/>
           </a:xfrm>
           <a:prstGeom prst="rect">
             <a:avLst/>
@@ -3958,7 +4381,7 @@
               <a:buNone/>
             </a:pPr>
             <a:r>
-              <a:rPr lang="en-US" sz="1200" dirty="0">
+              <a:rPr lang="en-US" sz="1100" dirty="0">
                 <a:solidFill>
                   <a:srgbClr val="1A1F36"/>
                 </a:solidFill>
@@ -3968,19 +4391,83 @@
               </a:rPr>
               <a:t>Credential lifecycle</a:t>
             </a:r>
-            <a:endParaRPr lang="en-US" sz="1200" dirty="0"/>
-          </a:p>
-        </p:txBody>
-      </p:sp>
-      <p:sp>
-        <p:nvSpPr>
-          <p:cNvPr id="43" name="Shape 41"/>
-          <p:cNvSpPr/>
-          <p:nvPr/>
-        </p:nvSpPr>
-        <p:spPr>
-          <a:xfrm>
-            <a:off x="6217920" y="4050792"/>
+            <a:endParaRPr lang="en-US" sz="1100" dirty="0"/>
+          </a:p>
+        </p:txBody>
+      </p:sp>
+      <p:sp>
+        <p:nvSpPr>
+          <p:cNvPr id="59" name="Shape 57"/>
+          <p:cNvSpPr/>
+          <p:nvPr/>
+        </p:nvSpPr>
+        <p:spPr>
+          <a:xfrm>
+            <a:off x="8087868" y="3570732"/>
+            <a:ext cx="594360" cy="219456"/>
+          </a:xfrm>
+          <a:prstGeom prst="rect">
+            <a:avLst/>
+          </a:prstGeom>
+          <a:solidFill>
+            <a:srgbClr val="64748B"/>
+          </a:solidFill>
+          <a:ln w="12700">
+            <a:solidFill>
+              <a:srgbClr val="64748B"/>
+            </a:solidFill>
+            <a:prstDash val="solid"/>
+          </a:ln>
+        </p:spPr>
+      </p:sp>
+      <p:sp>
+        <p:nvSpPr>
+          <p:cNvPr id="60" name="Text 58"/>
+          <p:cNvSpPr/>
+          <p:nvPr/>
+        </p:nvSpPr>
+        <p:spPr>
+          <a:xfrm>
+            <a:off x="8087868" y="3570732"/>
+            <a:ext cx="594360" cy="219456"/>
+          </a:xfrm>
+          <a:prstGeom prst="rect">
+            <a:avLst/>
+          </a:prstGeom>
+          <a:noFill/>
+          <a:ln/>
+        </p:spPr>
+        <p:txBody>
+          <a:bodyPr wrap="square" lIns="0" tIns="0" rIns="0" bIns="0" rtlCol="0" anchor="ctr"/>
+          <a:lstStyle/>
+          <a:p>
+            <a:pPr algn="ctr" indent="0" marL="0">
+              <a:buNone/>
+            </a:pPr>
+            <a:r>
+              <a:rPr lang="en-US" sz="900" b="1" dirty="0">
+                <a:solidFill>
+                  <a:srgbClr val="FFFFFF"/>
+                </a:solidFill>
+                <a:latin typeface="Calibri" pitchFamily="34" charset="0"/>
+                <a:ea typeface="Calibri" pitchFamily="34" charset="-122"/>
+                <a:cs typeface="Calibri" pitchFamily="34" charset="-120"/>
+              </a:rPr>
+              <a:t>Future</a:t>
+            </a:r>
+            <a:endParaRPr lang="en-US" sz="900" dirty="0"/>
+          </a:p>
+        </p:txBody>
+      </p:sp>
+      <p:sp>
+        <p:nvSpPr>
+          <p:cNvPr id="61" name="Shape 59"/>
+          <p:cNvSpPr/>
+          <p:nvPr/>
+        </p:nvSpPr>
+        <p:spPr>
+          <a:xfrm>
+            <a:off x="6176772" y="4146804"/>
             <a:ext cx="256032" cy="256032"/>
           </a:xfrm>
           <a:prstGeom prst="ellipse">
@@ -3999,13 +4486,13 @@
       </p:sp>
       <p:sp>
         <p:nvSpPr>
-          <p:cNvPr id="44" name="Text 42"/>
-          <p:cNvSpPr/>
-          <p:nvPr/>
-        </p:nvSpPr>
-        <p:spPr>
-          <a:xfrm>
-            <a:off x="6217920" y="4050792"/>
+          <p:cNvPr id="62" name="Text 60"/>
+          <p:cNvSpPr/>
+          <p:nvPr/>
+        </p:nvSpPr>
+        <p:spPr>
+          <a:xfrm>
+            <a:off x="6176772" y="4146804"/>
             <a:ext cx="256032" cy="256032"/>
           </a:xfrm>
           <a:prstGeom prst="rect">
@@ -4038,14 +4525,14 @@
       </p:sp>
       <p:sp>
         <p:nvSpPr>
-          <p:cNvPr id="45" name="Text 43"/>
-          <p:cNvSpPr/>
-          <p:nvPr/>
-        </p:nvSpPr>
-        <p:spPr>
-          <a:xfrm>
-            <a:off x="6565392" y="3995928"/>
-            <a:ext cx="2084832" cy="457200"/>
+          <p:cNvPr id="63" name="Text 61"/>
+          <p:cNvSpPr/>
+          <p:nvPr/>
+        </p:nvSpPr>
+        <p:spPr>
+          <a:xfrm>
+            <a:off x="6505956" y="3977640"/>
+            <a:ext cx="1554480" cy="594360"/>
           </a:xfrm>
           <a:prstGeom prst="rect">
             <a:avLst/>
@@ -4061,7 +4548,7 @@
               <a:buNone/>
             </a:pPr>
             <a:r>
-              <a:rPr lang="en-US" sz="1200" dirty="0">
+              <a:rPr lang="en-US" sz="1100" dirty="0">
                 <a:solidFill>
                   <a:srgbClr val="1A1F36"/>
                 </a:solidFill>
@@ -4071,13 +4558,77 @@
               </a:rPr>
               <a:t>Auditability &amp; logging</a:t>
             </a:r>
-            <a:endParaRPr lang="en-US" sz="1200" dirty="0"/>
-          </a:p>
-        </p:txBody>
-      </p:sp>
-      <p:sp>
-        <p:nvSpPr>
-          <p:cNvPr id="46" name="Text 44"/>
+            <a:endParaRPr lang="en-US" sz="1100" dirty="0"/>
+          </a:p>
+        </p:txBody>
+      </p:sp>
+      <p:sp>
+        <p:nvSpPr>
+          <p:cNvPr id="64" name="Shape 62"/>
+          <p:cNvSpPr/>
+          <p:nvPr/>
+        </p:nvSpPr>
+        <p:spPr>
+          <a:xfrm>
+            <a:off x="8087868" y="4165092"/>
+            <a:ext cx="594360" cy="219456"/>
+          </a:xfrm>
+          <a:prstGeom prst="rect">
+            <a:avLst/>
+          </a:prstGeom>
+          <a:solidFill>
+            <a:srgbClr val="0F1B3D"/>
+          </a:solidFill>
+          <a:ln w="12700">
+            <a:solidFill>
+              <a:srgbClr val="0F1B3D"/>
+            </a:solidFill>
+            <a:prstDash val="solid"/>
+          </a:ln>
+        </p:spPr>
+      </p:sp>
+      <p:sp>
+        <p:nvSpPr>
+          <p:cNvPr id="65" name="Text 63"/>
+          <p:cNvSpPr/>
+          <p:nvPr/>
+        </p:nvSpPr>
+        <p:spPr>
+          <a:xfrm>
+            <a:off x="8087868" y="4165092"/>
+            <a:ext cx="594360" cy="219456"/>
+          </a:xfrm>
+          <a:prstGeom prst="rect">
+            <a:avLst/>
+          </a:prstGeom>
+          <a:noFill/>
+          <a:ln/>
+        </p:spPr>
+        <p:txBody>
+          <a:bodyPr wrap="square" lIns="0" tIns="0" rIns="0" bIns="0" rtlCol="0" anchor="ctr"/>
+          <a:lstStyle/>
+          <a:p>
+            <a:pPr algn="ctr" indent="0" marL="0">
+              <a:buNone/>
+            </a:pPr>
+            <a:r>
+              <a:rPr lang="en-US" sz="900" b="1" dirty="0">
+                <a:solidFill>
+                  <a:srgbClr val="FFFFFF"/>
+                </a:solidFill>
+                <a:latin typeface="Calibri" pitchFamily="34" charset="0"/>
+                <a:ea typeface="Calibri" pitchFamily="34" charset="-122"/>
+                <a:cs typeface="Calibri" pitchFamily="34" charset="-120"/>
+              </a:rPr>
+              <a:t>P0</a:t>
+            </a:r>
+            <a:endParaRPr lang="en-US" sz="900" dirty="0"/>
+          </a:p>
+        </p:txBody>
+      </p:sp>
+      <p:sp>
+        <p:nvSpPr>
+          <p:cNvPr id="66" name="Text 64"/>
           <p:cNvSpPr/>
           <p:nvPr/>
         </p:nvSpPr>
@@ -4100,6 +4651,34 @@
               <a:buNone/>
             </a:pPr>
             <a:r>
+              <a:rPr lang="en-US" sz="1000" b="1" dirty="0">
+                <a:solidFill>
+                  <a:srgbClr val="0F1B3D"/>
+                </a:solidFill>
+                <a:latin typeface="Calibri" pitchFamily="34" charset="0"/>
+                <a:ea typeface="Calibri" pitchFamily="34" charset="-122"/>
+                <a:cs typeface="Calibri" pitchFamily="34" charset="-120"/>
+              </a:rPr>
+              <a:t>M1 connectors live: </a:t>
+            </a:r>
+            <a:pPr indent="0" marL="0">
+              <a:buNone/>
+            </a:pPr>
+            <a:r>
+              <a:rPr lang="en-US" sz="1000" dirty="0">
+                <a:solidFill>
+                  <a:srgbClr val="1A1F36"/>
+                </a:solidFill>
+                <a:latin typeface="Calibri" pitchFamily="34" charset="0"/>
+                <a:ea typeface="Calibri" pitchFamily="34" charset="-122"/>
+                <a:cs typeface="Calibri" pitchFamily="34" charset="-120"/>
+              </a:rPr>
+              <a:t>Gemini · Vertex AI · Bedrock · n8n  ·  </a:t>
+            </a:r>
+            <a:pPr indent="0" marL="0">
+              <a:buNone/>
+            </a:pPr>
+            <a:r>
               <a:rPr lang="en-US" sz="1000" i="1" dirty="0">
                 <a:solidFill>
                   <a:srgbClr val="64748B"/>
@@ -4108,7 +4687,7 @@
                 <a:ea typeface="Calibri" pitchFamily="34" charset="-122"/>
                 <a:cs typeface="Calibri" pitchFamily="34" charset="-120"/>
               </a:rPr>
-              <a:t>Source: “IAM for LLM-Based AI Agents” framework.</a:t>
+              <a:t>ChatGPT Enterprise: Backlog  ·  Copilot Studio: Canceled Jan 2026</a:t>
             </a:r>
             <a:endParaRPr lang="en-US" sz="1000" dirty="0"/>
           </a:p>
@@ -4116,7 +4695,7 @@
       </p:sp>
       <p:sp>
         <p:nvSpPr>
-          <p:cNvPr id="47" name="Text 45"/>
+          <p:cNvPr id="67" name="Text 65"/>
           <p:cNvSpPr/>
           <p:nvPr/>
         </p:nvSpPr>
@@ -4147,7 +4726,7 @@
                 <a:ea typeface="Calibri" pitchFamily="34" charset="-122"/>
                 <a:cs typeface="Calibri" pitchFamily="34" charset="-120"/>
               </a:rPr>
-              <a:t>3 / 9</a:t>
+              <a:t>3 / 8</a:t>
             </a:r>
             <a:endParaRPr lang="en-US" sz="900" dirty="0"/>
           </a:p>
@@ -4200,11 +4779,11 @@
             <a:avLst/>
           </a:prstGeom>
           <a:solidFill>
-            <a:srgbClr val="02C39A"/>
+            <a:srgbClr val="F59E0B"/>
           </a:solidFill>
           <a:ln w="12700">
             <a:solidFill>
-              <a:srgbClr val="02C39A"/>
+              <a:srgbClr val="F59E0B"/>
             </a:solidFill>
             <a:prstDash val="solid"/>
           </a:ln>
@@ -4243,7 +4822,7 @@
                 <a:ea typeface="Calibri" pitchFamily="34" charset="-122"/>
                 <a:cs typeface="Calibri" pitchFamily="34" charset="-120"/>
               </a:rPr>
-              <a:t>03 · Where we are</a:t>
+              <a:t>04 · What we tried first</a:t>
             </a:r>
             <a:endParaRPr lang="en-US" sz="1100" dirty="0"/>
           </a:p>
@@ -4282,7 +4861,7 @@
                 <a:ea typeface="Georgia" pitchFamily="34" charset="-122"/>
                 <a:cs typeface="Georgia" pitchFamily="34" charset="-120"/>
               </a:rPr>
-              <a:t>What's been started.</a:t>
+              <a:t>The original approach.</a:t>
             </a:r>
             <a:endParaRPr lang="en-US" sz="3400" dirty="0"/>
           </a:p>
@@ -4290,273 +4869,14 @@
       </p:sp>
       <p:sp>
         <p:nvSpPr>
-          <p:cNvPr id="5" name="Text 3"/>
-          <p:cNvSpPr/>
-          <p:nvPr/>
-        </p:nvSpPr>
-        <p:spPr>
-          <a:xfrm>
-            <a:off x="457200" y="1554480"/>
-            <a:ext cx="8229600" cy="365760"/>
-          </a:xfrm>
-          <a:prstGeom prst="rect">
-            <a:avLst/>
-          </a:prstGeom>
-          <a:noFill/>
-          <a:ln/>
-        </p:spPr>
-        <p:txBody>
-          <a:bodyPr wrap="square" lIns="0" tIns="0" rIns="0" bIns="0" rtlCol="0" anchor="ctr"/>
-          <a:lstStyle/>
-          <a:p>
-            <a:pPr indent="0" marL="0">
-              <a:buNone/>
-            </a:pPr>
-            <a:r>
-              <a:rPr lang="en-US" sz="1200" i="1" dirty="0">
-                <a:solidFill>
-                  <a:srgbClr val="64748B"/>
-                </a:solidFill>
-                <a:latin typeface="Calibri" pitchFamily="34" charset="0"/>
-                <a:ea typeface="Calibri" pitchFamily="34" charset="-122"/>
-                <a:cs typeface="Calibri" pitchFamily="34" charset="-120"/>
-              </a:rPr>
-              <a:t>M1 visibility layer is live. M2 is ~74% in. Some work may cover P0 needs — Omri will verify with Mor.</a:t>
-            </a:r>
-            <a:endParaRPr lang="en-US" sz="1200" dirty="0"/>
-          </a:p>
-        </p:txBody>
-      </p:sp>
-      <p:sp>
-        <p:nvSpPr>
-          <p:cNvPr id="6" name="Text 4"/>
-          <p:cNvSpPr/>
-          <p:nvPr/>
-        </p:nvSpPr>
-        <p:spPr>
-          <a:xfrm>
-            <a:off x="548640" y="1691640"/>
-            <a:ext cx="4114800" cy="2834640"/>
-          </a:xfrm>
-          <a:prstGeom prst="rect">
-            <a:avLst/>
-          </a:prstGeom>
-          <a:noFill/>
-          <a:ln/>
-        </p:spPr>
-        <p:txBody>
-          <a:bodyPr wrap="square" lIns="0" tIns="0" rIns="0" bIns="0" rtlCol="0" anchor="ctr"/>
-          <a:lstStyle/>
-          <a:p>
-            <a:pPr indent="0" marL="0">
-              <a:buNone/>
-            </a:pPr>
-            <a:r>
-              <a:rPr lang="en-US" sz="1400" b="1" dirty="0">
-                <a:solidFill>
-                  <a:srgbClr val="0F1B3D"/>
-                </a:solidFill>
-                <a:latin typeface="Calibri" pitchFamily="34" charset="0"/>
-                <a:ea typeface="Calibri" pitchFamily="34" charset="-122"/>
-                <a:cs typeface="Calibri" pitchFamily="34" charset="-120"/>
-              </a:rPr>
-              <a:t>M1 · Agent visibility layer</a:t>
-            </a:r>
-            <a:endParaRPr lang="en-US" sz="1400" dirty="0"/>
-          </a:p>
-          <a:p>
-            <a:pPr indent="0" marL="0">
-              <a:buNone/>
-            </a:pPr>
-            <a:r>
-              <a:rPr lang="en-US" sz="1200" dirty="0">
-                <a:solidFill>
-                  <a:srgbClr val="64748B"/>
-                </a:solidFill>
-                <a:latin typeface="Calibri" pitchFamily="34" charset="0"/>
-                <a:ea typeface="Calibri" pitchFamily="34" charset="-122"/>
-                <a:cs typeface="Calibri" pitchFamily="34" charset="-120"/>
-              </a:rPr>
-              <a:t>Agent graph model · Discovery &gt; Agents UI · agent entity page</a:t>
-            </a:r>
-            <a:endParaRPr lang="en-US" sz="1400" dirty="0"/>
-          </a:p>
-          <a:p>
-            <a:pPr indent="0" marL="0">
-              <a:buNone/>
-            </a:pPr>
-            <a:r>
-              <a:rPr lang="en-US" sz="1200" dirty="0">
-                <a:solidFill>
-                  <a:srgbClr val="64748B"/>
-                </a:solidFill>
-                <a:latin typeface="Calibri" pitchFamily="34" charset="0"/>
-                <a:ea typeface="Calibri" pitchFamily="34" charset="-122"/>
-                <a:cs typeface="Calibri" pitchFamily="34" charset="-120"/>
-              </a:rPr>
-              <a:t>Built-in issues: AGENT_EXCESSIVE_PERMISSIONS · AGENT_OWNER_OFFBOARDED</a:t>
-            </a:r>
-            <a:endParaRPr lang="en-US" sz="1400" dirty="0"/>
-          </a:p>
-          <a:p>
-            <a:pPr indent="0" marL="0">
-              <a:buNone/>
-            </a:pPr>
-            <a:r>
-              <a:rPr lang="en-US" sz="1200" dirty="0">
-                <a:solidFill>
-                  <a:srgbClr val="64748B"/>
-                </a:solidFill>
-                <a:latin typeface="Calibri" pitchFamily="34" charset="0"/>
-                <a:ea typeface="Calibri" pitchFamily="34" charset="-122"/>
-                <a:cs typeface="Calibri" pitchFamily="34" charset="-120"/>
-              </a:rPr>
-              <a:t>Connectors: Gemini · Vertex AI · Amazon Bedrock · n8n</a:t>
-            </a:r>
-            <a:endParaRPr lang="en-US" sz="1400" dirty="0"/>
-          </a:p>
-          <a:p>
-            <a:pPr indent="0" marL="0">
-              <a:buNone/>
-            </a:pPr>
-            <a:r>
-              <a:rPr lang="en-US" sz="500" dirty="0">
-                <a:solidFill>
-                  <a:srgbClr val="000000"/>
-                </a:solidFill>
-                <a:latin typeface="Calibri" pitchFamily="34" charset="0"/>
-                <a:ea typeface="Calibri" pitchFamily="34" charset="-122"/>
-                <a:cs typeface="Calibri" pitchFamily="34" charset="-120"/>
-              </a:rPr>
-              <a:t> </a:t>
-            </a:r>
-            <a:endParaRPr lang="en-US" sz="1400" dirty="0"/>
-          </a:p>
-          <a:p>
-            <a:pPr indent="0" marL="0">
-              <a:buNone/>
-            </a:pPr>
-            <a:r>
-              <a:rPr lang="en-US" sz="1400" b="1" dirty="0">
-                <a:solidFill>
-                  <a:srgbClr val="F59E0B"/>
-                </a:solidFill>
-                <a:latin typeface="Calibri" pitchFamily="34" charset="0"/>
-                <a:ea typeface="Calibri" pitchFamily="34" charset="-122"/>
-                <a:cs typeface="Calibri" pitchFamily="34" charset="-120"/>
-              </a:rPr>
-              <a:t>M2 · Access Intelligence</a:t>
-            </a:r>
-            <a:endParaRPr lang="en-US" sz="1400" dirty="0"/>
-          </a:p>
-          <a:p>
-            <a:pPr indent="0" marL="0">
-              <a:buNone/>
-            </a:pPr>
-            <a:r>
-              <a:rPr lang="en-US" sz="1200" dirty="0">
-                <a:solidFill>
-                  <a:srgbClr val="64748B"/>
-                </a:solidFill>
-                <a:latin typeface="Calibri" pitchFamily="34" charset="0"/>
-                <a:ea typeface="Calibri" pitchFamily="34" charset="-122"/>
-                <a:cs typeface="Calibri" pitchFamily="34" charset="-120"/>
-              </a:rPr>
-              <a:t>~74% in progress. Credential discovery, NHI→agent map, OAuth scope viz.</a:t>
-            </a:r>
-            <a:endParaRPr lang="en-US" sz="1400" dirty="0"/>
-          </a:p>
-          <a:p>
-            <a:pPr indent="0" marL="0">
-              <a:buNone/>
-            </a:pPr>
-            <a:r>
-              <a:rPr lang="en-US" sz="1200" dirty="0">
-                <a:solidFill>
-                  <a:srgbClr val="64748B"/>
-                </a:solidFill>
-                <a:latin typeface="Calibri" pitchFamily="34" charset="0"/>
-                <a:ea typeface="Calibri" pitchFamily="34" charset="-122"/>
-                <a:cs typeface="Calibri" pitchFamily="34" charset="-120"/>
-              </a:rPr>
-              <a:t>The remaining 26% is where the original approach hit the wall.</a:t>
-            </a:r>
-            <a:endParaRPr lang="en-US" sz="1400" dirty="0"/>
-          </a:p>
-        </p:txBody>
-      </p:sp>
-      <p:pic>
-        <p:nvPicPr>
-          <p:cNvPr id="7" name="Image 0" descr="/tmp/mor-pics/slide12_160.png">    </p:cNvPr>
-          <p:cNvPicPr>
-            <a:picLocks noChangeAspect="1"/>
-          </p:cNvPicPr>
-          <p:nvPr/>
-        </p:nvPicPr>
-        <p:blipFill>
-          <a:blip r:embed="rId1"/>
-          <a:srcRect l="0" r="0" t="0" b="0"/>
-          <a:stretch/>
-        </p:blipFill>
-        <p:spPr>
-          <a:xfrm>
-            <a:off x="4846320" y="1600200"/>
-            <a:ext cx="3840480" cy="2560320"/>
-          </a:xfrm>
-          <a:prstGeom prst="rect">
-            <a:avLst/>
-          </a:prstGeom>
-        </p:spPr>
-      </p:pic>
-      <p:sp>
-        <p:nvSpPr>
-          <p:cNvPr id="8" name="Text 5"/>
-          <p:cNvSpPr/>
-          <p:nvPr/>
-        </p:nvSpPr>
-        <p:spPr>
-          <a:xfrm>
-            <a:off x="4846320" y="4206240"/>
-            <a:ext cx="3840480" cy="228600"/>
-          </a:xfrm>
-          <a:prstGeom prst="rect">
-            <a:avLst/>
-          </a:prstGeom>
-          <a:noFill/>
-          <a:ln/>
-        </p:spPr>
-        <p:txBody>
-          <a:bodyPr wrap="square" lIns="0" tIns="0" rIns="0" bIns="0" rtlCol="0" anchor="ctr"/>
-          <a:lstStyle/>
-          <a:p>
-            <a:pPr algn="ctr" indent="0" marL="0">
-              <a:buNone/>
-            </a:pPr>
-            <a:r>
-              <a:rPr lang="en-US" sz="900" i="1" dirty="0">
-                <a:solidFill>
-                  <a:srgbClr val="64748B"/>
-                </a:solidFill>
-                <a:latin typeface="Calibri" pitchFamily="34" charset="0"/>
-                <a:ea typeface="Calibri" pitchFamily="34" charset="-122"/>
-                <a:cs typeface="Calibri" pitchFamily="34" charset="-120"/>
-              </a:rPr>
-              <a:t>Linx · agent detail page (in product)</a:t>
-            </a:r>
-            <a:endParaRPr lang="en-US" sz="900" dirty="0"/>
-          </a:p>
-        </p:txBody>
-      </p:sp>
-      <p:sp>
-        <p:nvSpPr>
-          <p:cNvPr id="9" name="Shape 6"/>
-          <p:cNvSpPr/>
-          <p:nvPr/>
-        </p:nvSpPr>
-        <p:spPr>
-          <a:xfrm>
-            <a:off x="457200" y="4617720"/>
-            <a:ext cx="8229600" cy="365760"/>
+          <p:cNvPr id="5" name="Shape 3"/>
+          <p:cNvSpPr/>
+          <p:nvPr/>
+        </p:nvSpPr>
+        <p:spPr>
+          <a:xfrm>
+            <a:off x="457200" y="1691640"/>
+            <a:ext cx="3931920" cy="2743200"/>
           </a:xfrm>
           <a:prstGeom prst="rect">
             <a:avLst/>
@@ -4566,7 +4886,7 @@
           </a:solidFill>
           <a:ln w="12700">
             <a:solidFill>
-              <a:srgbClr val="CBD5E1"/>
+              <a:srgbClr val="E8EEFC"/>
             </a:solidFill>
             <a:prstDash val="solid"/>
           </a:ln>
@@ -4574,7 +4894,473 @@
       </p:sp>
       <p:sp>
         <p:nvSpPr>
-          <p:cNvPr id="10" name="Text 7"/>
+          <p:cNvPr id="6" name="Shape 4"/>
+          <p:cNvSpPr/>
+          <p:nvPr/>
+        </p:nvSpPr>
+        <p:spPr>
+          <a:xfrm>
+            <a:off x="457200" y="1691640"/>
+            <a:ext cx="73152" cy="2743200"/>
+          </a:xfrm>
+          <a:prstGeom prst="rect">
+            <a:avLst/>
+          </a:prstGeom>
+          <a:solidFill>
+            <a:srgbClr val="F59E0B"/>
+          </a:solidFill>
+          <a:ln w="12700">
+            <a:solidFill>
+              <a:srgbClr val="F59E0B"/>
+            </a:solidFill>
+            <a:prstDash val="solid"/>
+          </a:ln>
+        </p:spPr>
+      </p:sp>
+      <p:sp>
+        <p:nvSpPr>
+          <p:cNvPr id="7" name="Text 5"/>
+          <p:cNvSpPr/>
+          <p:nvPr/>
+        </p:nvSpPr>
+        <p:spPr>
+          <a:xfrm>
+            <a:off x="640080" y="1783080"/>
+            <a:ext cx="3566160" cy="365760"/>
+          </a:xfrm>
+          <a:prstGeom prst="rect">
+            <a:avLst/>
+          </a:prstGeom>
+          <a:noFill/>
+          <a:ln/>
+        </p:spPr>
+        <p:txBody>
+          <a:bodyPr wrap="square" lIns="0" tIns="0" rIns="0" bIns="0" rtlCol="0" anchor="ctr"/>
+          <a:lstStyle/>
+          <a:p>
+            <a:pPr indent="0" marL="0">
+              <a:buNone/>
+            </a:pPr>
+            <a:r>
+              <a:rPr lang="en-US" sz="1500" b="1" dirty="0">
+                <a:solidFill>
+                  <a:srgbClr val="0F1B3D"/>
+                </a:solidFill>
+                <a:latin typeface="Georgia" pitchFamily="34" charset="0"/>
+                <a:ea typeface="Georgia" pitchFamily="34" charset="-122"/>
+                <a:cs typeface="Georgia" pitchFamily="34" charset="-120"/>
+              </a:rPr>
+              <a:t>The plan</a:t>
+            </a:r>
+            <a:endParaRPr lang="en-US" sz="1500" dirty="0"/>
+          </a:p>
+        </p:txBody>
+      </p:sp>
+      <p:sp>
+        <p:nvSpPr>
+          <p:cNvPr id="8" name="Text 6"/>
+          <p:cNvSpPr/>
+          <p:nvPr/>
+        </p:nvSpPr>
+        <p:spPr>
+          <a:xfrm>
+            <a:off x="640080" y="2240280"/>
+            <a:ext cx="3566160" cy="2011680"/>
+          </a:xfrm>
+          <a:prstGeom prst="rect">
+            <a:avLst/>
+          </a:prstGeom>
+          <a:noFill/>
+          <a:ln/>
+        </p:spPr>
+        <p:txBody>
+          <a:bodyPr wrap="square" lIns="0" tIns="0" rIns="0" bIns="0" rtlCol="0" anchor="ctr"/>
+          <a:lstStyle/>
+          <a:p>
+            <a:pPr indent="0" marL="0">
+              <a:buNone/>
+            </a:pPr>
+            <a:r>
+              <a:rPr lang="en-US" sz="1200" dirty="0">
+                <a:solidFill>
+                  <a:srgbClr val="1A1F36"/>
+                </a:solidFill>
+                <a:latin typeface="Calibri" pitchFamily="34" charset="0"/>
+                <a:ea typeface="Calibri" pitchFamily="34" charset="-122"/>
+                <a:cs typeface="Calibri" pitchFamily="34" charset="-120"/>
+              </a:rPr>
+              <a:t>Govern agents using the same IAM APIs that power human + NHI governance.</a:t>
+            </a:r>
+            <a:endParaRPr lang="en-US" sz="1200" dirty="0"/>
+          </a:p>
+          <a:p>
+            <a:pPr indent="0" marL="0">
+              <a:buNone/>
+            </a:pPr>
+            <a:r>
+              <a:rPr lang="en-US" sz="500" dirty="0">
+                <a:solidFill>
+                  <a:srgbClr val="000000"/>
+                </a:solidFill>
+                <a:latin typeface="Calibri" pitchFamily="34" charset="0"/>
+                <a:ea typeface="Calibri" pitchFamily="34" charset="-122"/>
+                <a:cs typeface="Calibri" pitchFamily="34" charset="-120"/>
+              </a:rPr>
+              <a:t> </a:t>
+            </a:r>
+            <a:endParaRPr lang="en-US" sz="1200" dirty="0"/>
+          </a:p>
+          <a:p>
+            <a:pPr indent="0" marL="0">
+              <a:buNone/>
+            </a:pPr>
+            <a:r>
+              <a:rPr lang="en-US" sz="1200" dirty="0">
+                <a:solidFill>
+                  <a:srgbClr val="1A1F36"/>
+                </a:solidFill>
+                <a:latin typeface="Calibri" pitchFamily="34" charset="0"/>
+                <a:ea typeface="Calibri" pitchFamily="34" charset="-122"/>
+                <a:cs typeface="Calibri" pitchFamily="34" charset="-120"/>
+              </a:rPr>
+              <a:t>Identity graph already connected to every app.</a:t>
+            </a:r>
+            <a:endParaRPr lang="en-US" sz="1200" dirty="0"/>
+          </a:p>
+          <a:p>
+            <a:pPr indent="0" marL="0">
+              <a:buNone/>
+            </a:pPr>
+            <a:r>
+              <a:rPr lang="en-US" sz="1200" dirty="0">
+                <a:solidFill>
+                  <a:srgbClr val="1A1F36"/>
+                </a:solidFill>
+                <a:latin typeface="Calibri" pitchFamily="34" charset="0"/>
+                <a:ea typeface="Calibri" pitchFamily="34" charset="-122"/>
+                <a:cs typeface="Calibri" pitchFamily="34" charset="-120"/>
+              </a:rPr>
+              <a:t>Access request flows already built.</a:t>
+            </a:r>
+            <a:endParaRPr lang="en-US" sz="1200" dirty="0"/>
+          </a:p>
+          <a:p>
+            <a:pPr indent="0" marL="0">
+              <a:buNone/>
+            </a:pPr>
+            <a:r>
+              <a:rPr lang="en-US" sz="1200" dirty="0">
+                <a:solidFill>
+                  <a:srgbClr val="1A1F36"/>
+                </a:solidFill>
+                <a:latin typeface="Calibri" pitchFamily="34" charset="0"/>
+                <a:ea typeface="Calibri" pitchFamily="34" charset="-122"/>
+                <a:cs typeface="Calibri" pitchFamily="34" charset="-120"/>
+              </a:rPr>
+              <a:t>Credential discovery already in motion (M2).</a:t>
+            </a:r>
+            <a:endParaRPr lang="en-US" sz="1200" dirty="0"/>
+          </a:p>
+          <a:p>
+            <a:pPr indent="0" marL="0">
+              <a:buNone/>
+            </a:pPr>
+            <a:r>
+              <a:rPr lang="en-US" sz="500" dirty="0">
+                <a:solidFill>
+                  <a:srgbClr val="000000"/>
+                </a:solidFill>
+                <a:latin typeface="Calibri" pitchFamily="34" charset="0"/>
+                <a:ea typeface="Calibri" pitchFamily="34" charset="-122"/>
+                <a:cs typeface="Calibri" pitchFamily="34" charset="-120"/>
+              </a:rPr>
+              <a:t> </a:t>
+            </a:r>
+            <a:endParaRPr lang="en-US" sz="1200" dirty="0"/>
+          </a:p>
+          <a:p>
+            <a:pPr indent="0" marL="0">
+              <a:buNone/>
+            </a:pPr>
+            <a:r>
+              <a:rPr lang="en-US" sz="1200" i="1" dirty="0">
+                <a:solidFill>
+                  <a:srgbClr val="64748B"/>
+                </a:solidFill>
+                <a:latin typeface="Calibri" pitchFamily="34" charset="0"/>
+                <a:ea typeface="Calibri" pitchFamily="34" charset="-122"/>
+                <a:cs typeface="Calibri" pitchFamily="34" charset="-120"/>
+              </a:rPr>
+              <a:t>Natural extension of what we already do for humans and NHIs.</a:t>
+            </a:r>
+            <a:endParaRPr lang="en-US" sz="1200" dirty="0"/>
+          </a:p>
+        </p:txBody>
+      </p:sp>
+      <p:sp>
+        <p:nvSpPr>
+          <p:cNvPr id="9" name="Shape 7"/>
+          <p:cNvSpPr/>
+          <p:nvPr/>
+        </p:nvSpPr>
+        <p:spPr>
+          <a:xfrm>
+            <a:off x="4453128" y="3063240"/>
+            <a:ext cx="502920" cy="0"/>
+          </a:xfrm>
+          <a:prstGeom prst="line">
+            <a:avLst/>
+          </a:prstGeom>
+          <a:noFill/>
+          <a:ln w="25400">
+            <a:solidFill>
+              <a:srgbClr val="0F1B3D"/>
+            </a:solidFill>
+            <a:prstDash val="solid"/>
+            <a:tailEnd type="triangle"/>
+          </a:ln>
+        </p:spPr>
+      </p:sp>
+      <p:sp>
+        <p:nvSpPr>
+          <p:cNvPr id="10" name="Shape 8"/>
+          <p:cNvSpPr/>
+          <p:nvPr/>
+        </p:nvSpPr>
+        <p:spPr>
+          <a:xfrm>
+            <a:off x="5029200" y="1691640"/>
+            <a:ext cx="3749040" cy="2743200"/>
+          </a:xfrm>
+          <a:prstGeom prst="rect">
+            <a:avLst/>
+          </a:prstGeom>
+          <a:solidFill>
+            <a:srgbClr val="E8EEFC"/>
+          </a:solidFill>
+          <a:ln w="12700">
+            <a:solidFill>
+              <a:srgbClr val="E8EEFC"/>
+            </a:solidFill>
+            <a:prstDash val="solid"/>
+          </a:ln>
+        </p:spPr>
+      </p:sp>
+      <p:sp>
+        <p:nvSpPr>
+          <p:cNvPr id="11" name="Shape 9"/>
+          <p:cNvSpPr/>
+          <p:nvPr/>
+        </p:nvSpPr>
+        <p:spPr>
+          <a:xfrm>
+            <a:off x="5029200" y="1691640"/>
+            <a:ext cx="73152" cy="2743200"/>
+          </a:xfrm>
+          <a:prstGeom prst="rect">
+            <a:avLst/>
+          </a:prstGeom>
+          <a:solidFill>
+            <a:srgbClr val="E11D48"/>
+          </a:solidFill>
+          <a:ln w="12700">
+            <a:solidFill>
+              <a:srgbClr val="E11D48"/>
+            </a:solidFill>
+            <a:prstDash val="solid"/>
+          </a:ln>
+        </p:spPr>
+      </p:sp>
+      <p:sp>
+        <p:nvSpPr>
+          <p:cNvPr id="12" name="Text 10"/>
+          <p:cNvSpPr/>
+          <p:nvPr/>
+        </p:nvSpPr>
+        <p:spPr>
+          <a:xfrm>
+            <a:off x="5212080" y="1783080"/>
+            <a:ext cx="3383280" cy="365760"/>
+          </a:xfrm>
+          <a:prstGeom prst="rect">
+            <a:avLst/>
+          </a:prstGeom>
+          <a:noFill/>
+          <a:ln/>
+        </p:spPr>
+        <p:txBody>
+          <a:bodyPr wrap="square" lIns="0" tIns="0" rIns="0" bIns="0" rtlCol="0" anchor="ctr"/>
+          <a:lstStyle/>
+          <a:p>
+            <a:pPr indent="0" marL="0">
+              <a:buNone/>
+            </a:pPr>
+            <a:r>
+              <a:rPr lang="en-US" sz="1500" b="1" dirty="0">
+                <a:solidFill>
+                  <a:srgbClr val="0F1B3D"/>
+                </a:solidFill>
+                <a:latin typeface="Georgia" pitchFamily="34" charset="0"/>
+                <a:ea typeface="Georgia" pitchFamily="34" charset="-122"/>
+                <a:cs typeface="Georgia" pitchFamily="34" charset="-120"/>
+              </a:rPr>
+              <a:t>What happened</a:t>
+            </a:r>
+            <a:endParaRPr lang="en-US" sz="1500" dirty="0"/>
+          </a:p>
+        </p:txBody>
+      </p:sp>
+      <p:sp>
+        <p:nvSpPr>
+          <p:cNvPr id="13" name="Text 11"/>
+          <p:cNvSpPr/>
+          <p:nvPr/>
+        </p:nvSpPr>
+        <p:spPr>
+          <a:xfrm>
+            <a:off x="5212080" y="2240280"/>
+            <a:ext cx="3383280" cy="2103120"/>
+          </a:xfrm>
+          <a:prstGeom prst="rect">
+            <a:avLst/>
+          </a:prstGeom>
+          <a:noFill/>
+          <a:ln/>
+        </p:spPr>
+        <p:txBody>
+          <a:bodyPr wrap="square" lIns="0" tIns="0" rIns="0" bIns="0" rtlCol="0" anchor="ctr"/>
+          <a:lstStyle/>
+          <a:p>
+            <a:pPr indent="0" marL="0">
+              <a:buNone/>
+            </a:pPr>
+            <a:r>
+              <a:rPr lang="en-US" sz="1200" b="1" dirty="0">
+                <a:solidFill>
+                  <a:srgbClr val="E11D48"/>
+                </a:solidFill>
+                <a:latin typeface="Calibri" pitchFamily="34" charset="0"/>
+                <a:ea typeface="Calibri" pitchFamily="34" charset="-122"/>
+                <a:cs typeface="Calibri" pitchFamily="34" charset="-120"/>
+              </a:rPr>
+              <a:t>The IAM API surface couldn't support the agent access flow.</a:t>
+            </a:r>
+            <a:endParaRPr lang="en-US" sz="1200" dirty="0"/>
+          </a:p>
+          <a:p>
+            <a:pPr indent="0" marL="0">
+              <a:buNone/>
+            </a:pPr>
+            <a:r>
+              <a:rPr lang="en-US" sz="800" dirty="0">
+                <a:solidFill>
+                  <a:srgbClr val="000000"/>
+                </a:solidFill>
+                <a:latin typeface="Calibri" pitchFamily="34" charset="0"/>
+                <a:ea typeface="Calibri" pitchFamily="34" charset="-122"/>
+                <a:cs typeface="Calibri" pitchFamily="34" charset="-120"/>
+              </a:rPr>
+              <a:t> </a:t>
+            </a:r>
+            <a:endParaRPr lang="en-US" sz="1200" dirty="0"/>
+          </a:p>
+          <a:p>
+            <a:pPr indent="0" marL="0">
+              <a:buNone/>
+            </a:pPr>
+            <a:r>
+              <a:rPr lang="en-US" sz="1200" i="1" dirty="0">
+                <a:solidFill>
+                  <a:srgbClr val="64748B"/>
+                </a:solidFill>
+                <a:latin typeface="Calibri" pitchFamily="34" charset="0"/>
+                <a:ea typeface="Calibri" pitchFamily="34" charset="-122"/>
+                <a:cs typeface="Calibri" pitchFamily="34" charset="-120"/>
+              </a:rPr>
+              <a:t>The exact failure mode is what Sarit + Amir are best placed to describe — and it's the foundation for the Gateway design.</a:t>
+            </a:r>
+            <a:endParaRPr lang="en-US" sz="1200" dirty="0"/>
+          </a:p>
+          <a:p>
+            <a:pPr indent="0" marL="0">
+              <a:buNone/>
+            </a:pPr>
+            <a:r>
+              <a:rPr lang="en-US" sz="800" dirty="0">
+                <a:solidFill>
+                  <a:srgbClr val="000000"/>
+                </a:solidFill>
+                <a:latin typeface="Calibri" pitchFamily="34" charset="0"/>
+                <a:ea typeface="Calibri" pitchFamily="34" charset="-122"/>
+                <a:cs typeface="Calibri" pitchFamily="34" charset="-120"/>
+              </a:rPr>
+              <a:t> </a:t>
+            </a:r>
+            <a:endParaRPr lang="en-US" sz="1200" dirty="0"/>
+          </a:p>
+          <a:p>
+            <a:pPr indent="0" marL="0">
+              <a:buNone/>
+            </a:pPr>
+            <a:r>
+              <a:rPr lang="en-US" sz="1200" b="1" dirty="0">
+                <a:solidFill>
+                  <a:srgbClr val="1A1F36"/>
+                </a:solidFill>
+                <a:latin typeface="Calibri" pitchFamily="34" charset="0"/>
+                <a:ea typeface="Calibri" pitchFamily="34" charset="-122"/>
+                <a:cs typeface="Calibri" pitchFamily="34" charset="-120"/>
+              </a:rPr>
+              <a:t>What we know: </a:t>
+            </a:r>
+            <a:pPr indent="0" marL="0">
+              <a:buNone/>
+            </a:pPr>
+            <a:r>
+              <a:rPr lang="en-US" sz="1200" dirty="0">
+                <a:solidFill>
+                  <a:srgbClr val="1A1F36"/>
+                </a:solidFill>
+                <a:latin typeface="Calibri" pitchFamily="34" charset="0"/>
+                <a:ea typeface="Calibri" pitchFamily="34" charset="-122"/>
+                <a:cs typeface="Calibri" pitchFamily="34" charset="-120"/>
+              </a:rPr>
+              <a:t>M2 stalled at the 26% that required deep access to the agent call flow — not user accounts, not static entitlements.</a:t>
+            </a:r>
+            <a:endParaRPr lang="en-US" sz="1200" dirty="0"/>
+          </a:p>
+        </p:txBody>
+      </p:sp>
+      <p:sp>
+        <p:nvSpPr>
+          <p:cNvPr id="14" name="Shape 12"/>
+          <p:cNvSpPr/>
+          <p:nvPr/>
+        </p:nvSpPr>
+        <p:spPr>
+          <a:xfrm>
+            <a:off x="457200" y="4617720"/>
+            <a:ext cx="8229600" cy="365760"/>
+          </a:xfrm>
+          <a:prstGeom prst="rect">
+            <a:avLst/>
+          </a:prstGeom>
+          <a:solidFill>
+            <a:srgbClr val="F59E0B">
+              <a:alpha val="25000"/>
+            </a:srgbClr>
+          </a:solidFill>
+          <a:ln w="12700">
+            <a:solidFill>
+              <a:srgbClr val="F59E0B"/>
+            </a:solidFill>
+            <a:prstDash val="solid"/>
+          </a:ln>
+        </p:spPr>
+      </p:sp>
+      <p:sp>
+        <p:nvSpPr>
+          <p:cNvPr id="15" name="Text 13"/>
           <p:cNvSpPr/>
           <p:nvPr/>
         </p:nvSpPr>
@@ -4597,23 +5383,23 @@
               <a:buNone/>
             </a:pPr>
             <a:r>
-              <a:rPr lang="en-US" sz="1100" i="1" dirty="0">
-                <a:solidFill>
-                  <a:srgbClr val="64748B"/>
-                </a:solidFill>
-                <a:latin typeface="Calibri" pitchFamily="34" charset="0"/>
-                <a:ea typeface="Calibri" pitchFamily="34" charset="-122"/>
-                <a:cs typeface="Calibri" pitchFamily="34" charset="-120"/>
-              </a:rPr>
-              <a:t>ChatGPT Enterprise: still in Backlog  ·  Copilot Studio direct connector: Canceled (Jan 2026)</a:t>
-            </a:r>
-            <a:endParaRPr lang="en-US" sz="1100" dirty="0"/>
-          </a:p>
-        </p:txBody>
-      </p:sp>
-      <p:sp>
-        <p:nvSpPr>
-          <p:cNvPr id="11" name="Text 8"/>
+              <a:rPr lang="en-US" sz="1200" b="1" i="1" dirty="0">
+                <a:solidFill>
+                  <a:srgbClr val="0F1B3D"/>
+                </a:solidFill>
+                <a:latin typeface="Calibri" pitchFamily="34" charset="0"/>
+                <a:ea typeface="Calibri" pitchFamily="34" charset="-122"/>
+                <a:cs typeface="Calibri" pitchFamily="34" charset="-120"/>
+              </a:rPr>
+              <a:t>This is a useful discovery. We now know exactly what the next layer must do.</a:t>
+            </a:r>
+            <a:endParaRPr lang="en-US" sz="1200" dirty="0"/>
+          </a:p>
+        </p:txBody>
+      </p:sp>
+      <p:sp>
+        <p:nvSpPr>
+          <p:cNvPr id="16" name="Text 14"/>
           <p:cNvSpPr/>
           <p:nvPr/>
         </p:nvSpPr>
@@ -4644,7 +5430,7 @@
                 <a:ea typeface="Calibri" pitchFamily="34" charset="-122"/>
                 <a:cs typeface="Calibri" pitchFamily="34" charset="-120"/>
               </a:rPr>
-              <a:t>4 / 9</a:t>
+              <a:t>4 / 8</a:t>
             </a:r>
             <a:endParaRPr lang="en-US" sz="900" dirty="0"/>
           </a:p>
@@ -4661,6 +5447,736 @@
 <file path=ppt/slides/slide5.xml><?xml version="1.0" encoding="utf-8"?>
 <p:sld xmlns:a="http://schemas.openxmlformats.org/drawingml/2006/main" xmlns:r="http://schemas.openxmlformats.org/officeDocument/2006/relationships" xmlns:p="http://schemas.openxmlformats.org/presentationml/2006/main">
   <p:cSld name="Slide 5">
+    <p:bg>
+      <p:bgPr>
+        <a:solidFill>
+          <a:srgbClr val="091230"/>
+        </a:solidFill>
+      </p:bgPr>
+    </p:bg>
+    <p:spTree>
+      <p:nvGrpSpPr>
+        <p:cNvPr id="1" name=""/>
+        <p:cNvGrpSpPr/>
+        <p:nvPr/>
+      </p:nvGrpSpPr>
+      <p:grpSpPr>
+        <a:xfrm>
+          <a:off x="0" y="0"/>
+          <a:ext cx="0" cy="0"/>
+          <a:chOff x="0" y="0"/>
+          <a:chExt cx="0" cy="0"/>
+        </a:xfrm>
+      </p:grpSpPr>
+      <p:sp>
+        <p:nvSpPr>
+          <p:cNvPr id="2" name="Shape 0"/>
+          <p:cNvSpPr/>
+          <p:nvPr/>
+        </p:nvSpPr>
+        <p:spPr>
+          <a:xfrm>
+            <a:off x="0" y="0"/>
+            <a:ext cx="109728" cy="5143500"/>
+          </a:xfrm>
+          <a:prstGeom prst="rect">
+            <a:avLst/>
+          </a:prstGeom>
+          <a:solidFill>
+            <a:srgbClr val="02C39A"/>
+          </a:solidFill>
+          <a:ln w="12700">
+            <a:solidFill>
+              <a:srgbClr val="02C39A"/>
+            </a:solidFill>
+            <a:prstDash val="solid"/>
+          </a:ln>
+        </p:spPr>
+      </p:sp>
+      <p:sp>
+        <p:nvSpPr>
+          <p:cNvPr id="3" name="Text 1"/>
+          <p:cNvSpPr/>
+          <p:nvPr/>
+        </p:nvSpPr>
+        <p:spPr>
+          <a:xfrm>
+            <a:off x="457200" y="365760"/>
+            <a:ext cx="7315200" cy="274320"/>
+          </a:xfrm>
+          <a:prstGeom prst="rect">
+            <a:avLst/>
+          </a:prstGeom>
+          <a:noFill/>
+          <a:ln/>
+        </p:spPr>
+        <p:txBody>
+          <a:bodyPr wrap="square" lIns="0" tIns="0" rIns="0" bIns="0" rtlCol="0" anchor="ctr"/>
+          <a:lstStyle/>
+          <a:p>
+            <a:pPr indent="0" marL="0">
+              <a:buNone/>
+            </a:pPr>
+            <a:r>
+              <a:rPr lang="en-US" sz="1100" b="1" spc="400" kern="0" dirty="0">
+                <a:solidFill>
+                  <a:srgbClr val="02C39A"/>
+                </a:solidFill>
+                <a:latin typeface="Calibri" pitchFamily="34" charset="0"/>
+                <a:ea typeface="Calibri" pitchFamily="34" charset="-122"/>
+                <a:cs typeface="Calibri" pitchFamily="34" charset="-120"/>
+              </a:rPr>
+              <a:t>05 · The new approach</a:t>
+            </a:r>
+            <a:endParaRPr lang="en-US" sz="1100" dirty="0"/>
+          </a:p>
+        </p:txBody>
+      </p:sp>
+      <p:sp>
+        <p:nvSpPr>
+          <p:cNvPr id="4" name="Text 2"/>
+          <p:cNvSpPr/>
+          <p:nvPr/>
+        </p:nvSpPr>
+        <p:spPr>
+          <a:xfrm>
+            <a:off x="457200" y="731520"/>
+            <a:ext cx="8229600" cy="777240"/>
+          </a:xfrm>
+          <a:prstGeom prst="rect">
+            <a:avLst/>
+          </a:prstGeom>
+          <a:noFill/>
+          <a:ln/>
+        </p:spPr>
+        <p:txBody>
+          <a:bodyPr wrap="square" lIns="0" tIns="0" rIns="0" bIns="0" rtlCol="0" anchor="ctr"/>
+          <a:lstStyle/>
+          <a:p>
+            <a:pPr indent="0" marL="0">
+              <a:buNone/>
+            </a:pPr>
+            <a:r>
+              <a:rPr lang="en-US" sz="3400" b="1" dirty="0">
+                <a:solidFill>
+                  <a:srgbClr val="FFFFFF"/>
+                </a:solidFill>
+                <a:latin typeface="Georgia" pitchFamily="34" charset="0"/>
+                <a:ea typeface="Georgia" pitchFamily="34" charset="-122"/>
+                <a:cs typeface="Georgia" pitchFamily="34" charset="-120"/>
+              </a:rPr>
+              <a:t>MCP Gateway.</a:t>
+            </a:r>
+            <a:endParaRPr lang="en-US" sz="3400" dirty="0"/>
+          </a:p>
+        </p:txBody>
+      </p:sp>
+      <p:sp>
+        <p:nvSpPr>
+          <p:cNvPr id="5" name="Text 3"/>
+          <p:cNvSpPr/>
+          <p:nvPr/>
+        </p:nvSpPr>
+        <p:spPr>
+          <a:xfrm>
+            <a:off x="457200" y="1600200"/>
+            <a:ext cx="8229600" cy="457200"/>
+          </a:xfrm>
+          <a:prstGeom prst="rect">
+            <a:avLst/>
+          </a:prstGeom>
+          <a:noFill/>
+          <a:ln/>
+        </p:spPr>
+        <p:txBody>
+          <a:bodyPr wrap="square" lIns="0" tIns="0" rIns="0" bIns="0" rtlCol="0" anchor="ctr"/>
+          <a:lstStyle/>
+          <a:p>
+            <a:pPr indent="0" marL="0">
+              <a:buNone/>
+            </a:pPr>
+            <a:r>
+              <a:rPr lang="en-US" sz="1500" i="1" dirty="0">
+                <a:solidFill>
+                  <a:srgbClr val="E8EEFC"/>
+                </a:solidFill>
+                <a:latin typeface="Calibri" pitchFamily="34" charset="0"/>
+                <a:ea typeface="Calibri" pitchFamily="34" charset="-122"/>
+                <a:cs typeface="Calibri" pitchFamily="34" charset="-120"/>
+              </a:rPr>
+              <a:t>Govern agents at the protocol layer — one enforcement point between every agent and every tool.</a:t>
+            </a:r>
+            <a:endParaRPr lang="en-US" sz="1500" dirty="0"/>
+          </a:p>
+        </p:txBody>
+      </p:sp>
+      <p:sp>
+        <p:nvSpPr>
+          <p:cNvPr id="6" name="Shape 4"/>
+          <p:cNvSpPr/>
+          <p:nvPr/>
+        </p:nvSpPr>
+        <p:spPr>
+          <a:xfrm>
+            <a:off x="457200" y="2331720"/>
+            <a:ext cx="1828800" cy="1188720"/>
+          </a:xfrm>
+          <a:prstGeom prst="roundRect">
+            <a:avLst>
+              <a:gd name="adj" fmla="val 6154"/>
+            </a:avLst>
+          </a:prstGeom>
+          <a:solidFill>
+            <a:srgbClr val="1A2545"/>
+          </a:solidFill>
+          <a:ln w="12700">
+            <a:solidFill>
+              <a:srgbClr val="E8EEFC"/>
+            </a:solidFill>
+            <a:prstDash val="solid"/>
+          </a:ln>
+        </p:spPr>
+      </p:sp>
+      <p:sp>
+        <p:nvSpPr>
+          <p:cNvPr id="7" name="Text 5"/>
+          <p:cNvSpPr/>
+          <p:nvPr/>
+        </p:nvSpPr>
+        <p:spPr>
+          <a:xfrm>
+            <a:off x="457200" y="2423160"/>
+            <a:ext cx="1828800" cy="320040"/>
+          </a:xfrm>
+          <a:prstGeom prst="rect">
+            <a:avLst/>
+          </a:prstGeom>
+          <a:noFill/>
+          <a:ln/>
+        </p:spPr>
+        <p:txBody>
+          <a:bodyPr wrap="square" lIns="0" tIns="0" rIns="0" bIns="0" rtlCol="0" anchor="ctr"/>
+          <a:lstStyle/>
+          <a:p>
+            <a:pPr algn="ctr" indent="0" marL="0">
+              <a:buNone/>
+            </a:pPr>
+            <a:r>
+              <a:rPr lang="en-US" sz="1000" b="1" spc="300" kern="0" dirty="0">
+                <a:solidFill>
+                  <a:srgbClr val="64748B"/>
+                </a:solidFill>
+                <a:latin typeface="Calibri" pitchFamily="34" charset="0"/>
+                <a:ea typeface="Calibri" pitchFamily="34" charset="-122"/>
+                <a:cs typeface="Calibri" pitchFamily="34" charset="-120"/>
+              </a:rPr>
+              <a:t>AGENT</a:t>
+            </a:r>
+            <a:endParaRPr lang="en-US" sz="1000" dirty="0"/>
+          </a:p>
+        </p:txBody>
+      </p:sp>
+      <p:sp>
+        <p:nvSpPr>
+          <p:cNvPr id="8" name="Text 6"/>
+          <p:cNvSpPr/>
+          <p:nvPr/>
+        </p:nvSpPr>
+        <p:spPr>
+          <a:xfrm>
+            <a:off x="457200" y="2788920"/>
+            <a:ext cx="1828800" cy="685800"/>
+          </a:xfrm>
+          <a:prstGeom prst="rect">
+            <a:avLst/>
+          </a:prstGeom>
+          <a:noFill/>
+          <a:ln/>
+        </p:spPr>
+        <p:txBody>
+          <a:bodyPr wrap="square" lIns="0" tIns="0" rIns="0" bIns="0" rtlCol="0" anchor="ctr"/>
+          <a:lstStyle/>
+          <a:p>
+            <a:pPr algn="ctr" indent="0" marL="0">
+              <a:buNone/>
+            </a:pPr>
+            <a:r>
+              <a:rPr lang="en-US" sz="1200" dirty="0">
+                <a:solidFill>
+                  <a:srgbClr val="FFFFFF"/>
+                </a:solidFill>
+                <a:latin typeface="Calibri" pitchFamily="34" charset="0"/>
+                <a:ea typeface="Calibri" pitchFamily="34" charset="-122"/>
+                <a:cs typeface="Calibri" pitchFamily="34" charset="-120"/>
+              </a:rPr>
+              <a:t>ChatGPT · Claude</a:t>
+            </a:r>
+            <a:endParaRPr lang="en-US" sz="1200" dirty="0"/>
+          </a:p>
+          <a:p>
+            <a:pPr algn="ctr" indent="0" marL="0">
+              <a:buNone/>
+            </a:pPr>
+            <a:r>
+              <a:rPr lang="en-US" sz="1200" dirty="0">
+                <a:solidFill>
+                  <a:srgbClr val="FFFFFF"/>
+                </a:solidFill>
+                <a:latin typeface="Calibri" pitchFamily="34" charset="0"/>
+                <a:ea typeface="Calibri" pitchFamily="34" charset="-122"/>
+                <a:cs typeface="Calibri" pitchFamily="34" charset="-120"/>
+              </a:rPr>
+              <a:t>Cursor · n8n</a:t>
+            </a:r>
+            <a:endParaRPr lang="en-US" sz="1200" dirty="0"/>
+          </a:p>
+        </p:txBody>
+      </p:sp>
+      <p:sp>
+        <p:nvSpPr>
+          <p:cNvPr id="9" name="Shape 7"/>
+          <p:cNvSpPr/>
+          <p:nvPr/>
+        </p:nvSpPr>
+        <p:spPr>
+          <a:xfrm>
+            <a:off x="2331720" y="2926080"/>
+            <a:ext cx="685800" cy="0"/>
+          </a:xfrm>
+          <a:prstGeom prst="line">
+            <a:avLst/>
+          </a:prstGeom>
+          <a:noFill/>
+          <a:ln w="25400">
+            <a:solidFill>
+              <a:srgbClr val="02C39A"/>
+            </a:solidFill>
+            <a:prstDash val="solid"/>
+            <a:tailEnd type="triangle"/>
+          </a:ln>
+        </p:spPr>
+      </p:sp>
+      <p:sp>
+        <p:nvSpPr>
+          <p:cNvPr id="10" name="Shape 8"/>
+          <p:cNvSpPr/>
+          <p:nvPr/>
+        </p:nvSpPr>
+        <p:spPr>
+          <a:xfrm>
+            <a:off x="3108960" y="2194560"/>
+            <a:ext cx="2926080" cy="1463040"/>
+          </a:xfrm>
+          <a:prstGeom prst="roundRect">
+            <a:avLst>
+              <a:gd name="adj" fmla="val 6250"/>
+            </a:avLst>
+          </a:prstGeom>
+          <a:solidFill>
+            <a:srgbClr val="0F1B3D"/>
+          </a:solidFill>
+          <a:ln w="38100">
+            <a:solidFill>
+              <a:srgbClr val="02C39A"/>
+            </a:solidFill>
+            <a:prstDash val="solid"/>
+          </a:ln>
+        </p:spPr>
+      </p:sp>
+      <p:sp>
+        <p:nvSpPr>
+          <p:cNvPr id="11" name="Text 9"/>
+          <p:cNvSpPr/>
+          <p:nvPr/>
+        </p:nvSpPr>
+        <p:spPr>
+          <a:xfrm>
+            <a:off x="3108960" y="2331720"/>
+            <a:ext cx="2926080" cy="365760"/>
+          </a:xfrm>
+          <a:prstGeom prst="rect">
+            <a:avLst/>
+          </a:prstGeom>
+          <a:noFill/>
+          <a:ln/>
+        </p:spPr>
+        <p:txBody>
+          <a:bodyPr wrap="square" lIns="0" tIns="0" rIns="0" bIns="0" rtlCol="0" anchor="ctr"/>
+          <a:lstStyle/>
+          <a:p>
+            <a:pPr algn="ctr" indent="0" marL="0">
+              <a:buNone/>
+            </a:pPr>
+            <a:r>
+              <a:rPr lang="en-US" sz="1300" b="1" spc="400" kern="0" dirty="0">
+                <a:solidFill>
+                  <a:srgbClr val="02C39A"/>
+                </a:solidFill>
+                <a:latin typeface="Calibri" pitchFamily="34" charset="0"/>
+                <a:ea typeface="Calibri" pitchFamily="34" charset="-122"/>
+                <a:cs typeface="Calibri" pitchFamily="34" charset="-120"/>
+              </a:rPr>
+              <a:t>MCP GATEWAY</a:t>
+            </a:r>
+            <a:endParaRPr lang="en-US" sz="1300" dirty="0"/>
+          </a:p>
+        </p:txBody>
+      </p:sp>
+      <p:sp>
+        <p:nvSpPr>
+          <p:cNvPr id="12" name="Text 10"/>
+          <p:cNvSpPr/>
+          <p:nvPr/>
+        </p:nvSpPr>
+        <p:spPr>
+          <a:xfrm>
+            <a:off x="3108960" y="2743200"/>
+            <a:ext cx="2926080" cy="274320"/>
+          </a:xfrm>
+          <a:prstGeom prst="rect">
+            <a:avLst/>
+          </a:prstGeom>
+          <a:noFill/>
+          <a:ln/>
+        </p:spPr>
+        <p:txBody>
+          <a:bodyPr wrap="square" lIns="0" tIns="0" rIns="0" bIns="0" rtlCol="0" anchor="ctr"/>
+          <a:lstStyle/>
+          <a:p>
+            <a:pPr algn="ctr" indent="0" marL="0">
+              <a:buNone/>
+            </a:pPr>
+            <a:r>
+              <a:rPr lang="en-US" sz="1300" i="1" dirty="0">
+                <a:solidFill>
+                  <a:srgbClr val="FFFFFF"/>
+                </a:solidFill>
+                <a:latin typeface="Calibri" pitchFamily="34" charset="0"/>
+                <a:ea typeface="Calibri" pitchFamily="34" charset="-122"/>
+                <a:cs typeface="Calibri" pitchFamily="34" charset="-120"/>
+              </a:rPr>
+              <a:t>identity · policy · audit</a:t>
+            </a:r>
+            <a:endParaRPr lang="en-US" sz="1300" dirty="0"/>
+          </a:p>
+        </p:txBody>
+      </p:sp>
+      <p:sp>
+        <p:nvSpPr>
+          <p:cNvPr id="13" name="Text 11"/>
+          <p:cNvSpPr/>
+          <p:nvPr/>
+        </p:nvSpPr>
+        <p:spPr>
+          <a:xfrm>
+            <a:off x="3108960" y="3108960"/>
+            <a:ext cx="2926080" cy="274320"/>
+          </a:xfrm>
+          <a:prstGeom prst="rect">
+            <a:avLst/>
+          </a:prstGeom>
+          <a:noFill/>
+          <a:ln/>
+        </p:spPr>
+        <p:txBody>
+          <a:bodyPr wrap="square" lIns="0" tIns="0" rIns="0" bIns="0" rtlCol="0" anchor="ctr"/>
+          <a:lstStyle/>
+          <a:p>
+            <a:pPr algn="ctr" indent="0" marL="0">
+              <a:buNone/>
+            </a:pPr>
+            <a:r>
+              <a:rPr lang="en-US" sz="1000" dirty="0">
+                <a:solidFill>
+                  <a:srgbClr val="E8EEFC"/>
+                </a:solidFill>
+                <a:latin typeface="Calibri" pitchFamily="34" charset="0"/>
+                <a:ea typeface="Calibri" pitchFamily="34" charset="-122"/>
+                <a:cs typeface="Calibri" pitchFamily="34" charset="-120"/>
+              </a:rPr>
+              <a:t>every call, policy-checked</a:t>
+            </a:r>
+            <a:endParaRPr lang="en-US" sz="1000" dirty="0"/>
+          </a:p>
+        </p:txBody>
+      </p:sp>
+      <p:sp>
+        <p:nvSpPr>
+          <p:cNvPr id="14" name="Shape 12"/>
+          <p:cNvSpPr/>
+          <p:nvPr/>
+        </p:nvSpPr>
+        <p:spPr>
+          <a:xfrm>
+            <a:off x="6080760" y="2926080"/>
+            <a:ext cx="685800" cy="0"/>
+          </a:xfrm>
+          <a:prstGeom prst="line">
+            <a:avLst/>
+          </a:prstGeom>
+          <a:noFill/>
+          <a:ln w="25400">
+            <a:solidFill>
+              <a:srgbClr val="02C39A"/>
+            </a:solidFill>
+            <a:prstDash val="solid"/>
+            <a:tailEnd type="triangle"/>
+          </a:ln>
+        </p:spPr>
+      </p:sp>
+      <p:sp>
+        <p:nvSpPr>
+          <p:cNvPr id="15" name="Shape 13"/>
+          <p:cNvSpPr/>
+          <p:nvPr/>
+        </p:nvSpPr>
+        <p:spPr>
+          <a:xfrm>
+            <a:off x="6858000" y="2331720"/>
+            <a:ext cx="1828800" cy="1188720"/>
+          </a:xfrm>
+          <a:prstGeom prst="roundRect">
+            <a:avLst>
+              <a:gd name="adj" fmla="val 6154"/>
+            </a:avLst>
+          </a:prstGeom>
+          <a:solidFill>
+            <a:srgbClr val="1A2545"/>
+          </a:solidFill>
+          <a:ln w="12700">
+            <a:solidFill>
+              <a:srgbClr val="E8EEFC"/>
+            </a:solidFill>
+            <a:prstDash val="solid"/>
+          </a:ln>
+        </p:spPr>
+      </p:sp>
+      <p:sp>
+        <p:nvSpPr>
+          <p:cNvPr id="16" name="Text 14"/>
+          <p:cNvSpPr/>
+          <p:nvPr/>
+        </p:nvSpPr>
+        <p:spPr>
+          <a:xfrm>
+            <a:off x="6858000" y="2423160"/>
+            <a:ext cx="1828800" cy="320040"/>
+          </a:xfrm>
+          <a:prstGeom prst="rect">
+            <a:avLst/>
+          </a:prstGeom>
+          <a:noFill/>
+          <a:ln/>
+        </p:spPr>
+        <p:txBody>
+          <a:bodyPr wrap="square" lIns="0" tIns="0" rIns="0" bIns="0" rtlCol="0" anchor="ctr"/>
+          <a:lstStyle/>
+          <a:p>
+            <a:pPr algn="ctr" indent="0" marL="0">
+              <a:buNone/>
+            </a:pPr>
+            <a:r>
+              <a:rPr lang="en-US" sz="1000" b="1" spc="200" kern="0" dirty="0">
+                <a:solidFill>
+                  <a:srgbClr val="64748B"/>
+                </a:solidFill>
+                <a:latin typeface="Calibri" pitchFamily="34" charset="0"/>
+                <a:ea typeface="Calibri" pitchFamily="34" charset="-122"/>
+                <a:cs typeface="Calibri" pitchFamily="34" charset="-120"/>
+              </a:rPr>
+              <a:t>APPS · TOOLS</a:t>
+            </a:r>
+            <a:endParaRPr lang="en-US" sz="1000" dirty="0"/>
+          </a:p>
+        </p:txBody>
+      </p:sp>
+      <p:sp>
+        <p:nvSpPr>
+          <p:cNvPr id="17" name="Text 15"/>
+          <p:cNvSpPr/>
+          <p:nvPr/>
+        </p:nvSpPr>
+        <p:spPr>
+          <a:xfrm>
+            <a:off x="6858000" y="2788920"/>
+            <a:ext cx="1828800" cy="685800"/>
+          </a:xfrm>
+          <a:prstGeom prst="rect">
+            <a:avLst/>
+          </a:prstGeom>
+          <a:noFill/>
+          <a:ln/>
+        </p:spPr>
+        <p:txBody>
+          <a:bodyPr wrap="square" lIns="0" tIns="0" rIns="0" bIns="0" rtlCol="0" anchor="ctr"/>
+          <a:lstStyle/>
+          <a:p>
+            <a:pPr algn="ctr" indent="0" marL="0">
+              <a:buNone/>
+            </a:pPr>
+            <a:r>
+              <a:rPr lang="en-US" sz="1200" dirty="0">
+                <a:solidFill>
+                  <a:srgbClr val="FFFFFF"/>
+                </a:solidFill>
+                <a:latin typeface="Calibri" pitchFamily="34" charset="0"/>
+                <a:ea typeface="Calibri" pitchFamily="34" charset="-122"/>
+                <a:cs typeface="Calibri" pitchFamily="34" charset="-120"/>
+              </a:rPr>
+              <a:t>Slack · Linear</a:t>
+            </a:r>
+            <a:endParaRPr lang="en-US" sz="1200" dirty="0"/>
+          </a:p>
+          <a:p>
+            <a:pPr algn="ctr" indent="0" marL="0">
+              <a:buNone/>
+            </a:pPr>
+            <a:r>
+              <a:rPr lang="en-US" sz="1200" dirty="0">
+                <a:solidFill>
+                  <a:srgbClr val="FFFFFF"/>
+                </a:solidFill>
+                <a:latin typeface="Calibri" pitchFamily="34" charset="0"/>
+                <a:ea typeface="Calibri" pitchFamily="34" charset="-122"/>
+                <a:cs typeface="Calibri" pitchFamily="34" charset="-120"/>
+              </a:rPr>
+              <a:t>Notions · Postgres</a:t>
+            </a:r>
+            <a:endParaRPr lang="en-US" sz="1200" dirty="0"/>
+          </a:p>
+        </p:txBody>
+      </p:sp>
+      <p:sp>
+        <p:nvSpPr>
+          <p:cNvPr id="18" name="Text 16"/>
+          <p:cNvSpPr/>
+          <p:nvPr/>
+        </p:nvSpPr>
+        <p:spPr>
+          <a:xfrm>
+            <a:off x="457200" y="3794760"/>
+            <a:ext cx="8229600" cy="365760"/>
+          </a:xfrm>
+          <a:prstGeom prst="rect">
+            <a:avLst/>
+          </a:prstGeom>
+          <a:noFill/>
+          <a:ln/>
+        </p:spPr>
+        <p:txBody>
+          <a:bodyPr wrap="square" lIns="0" tIns="0" rIns="0" bIns="0" rtlCol="0" anchor="ctr"/>
+          <a:lstStyle/>
+          <a:p>
+            <a:pPr indent="0" marL="0">
+              <a:buNone/>
+            </a:pPr>
+            <a:r>
+              <a:rPr lang="en-US" sz="1200" b="1" dirty="0">
+                <a:solidFill>
+                  <a:srgbClr val="F59E0B"/>
+                </a:solidFill>
+                <a:latin typeface="Calibri" pitchFamily="34" charset="0"/>
+                <a:ea typeface="Calibri" pitchFamily="34" charset="-122"/>
+                <a:cs typeface="Calibri" pitchFamily="34" charset="-120"/>
+              </a:rPr>
+              <a:t>Status: concept / whiteboard.  </a:t>
+            </a:r>
+            <a:pPr indent="0" marL="0">
+              <a:buNone/>
+            </a:pPr>
+            <a:r>
+              <a:rPr lang="en-US" sz="1200" dirty="0">
+                <a:solidFill>
+                  <a:srgbClr val="E8EEFC"/>
+                </a:solidFill>
+                <a:latin typeface="Calibri" pitchFamily="34" charset="0"/>
+                <a:ea typeface="Calibri" pitchFamily="34" charset="-122"/>
+                <a:cs typeface="Calibri" pitchFamily="34" charset="-120"/>
+              </a:rPr>
+              <a:t>Sarit + Amir Ben Ami leading architecture.  </a:t>
+            </a:r>
+            <a:pPr indent="0" marL="0">
+              <a:buNone/>
+            </a:pPr>
+            <a:r>
+              <a:rPr lang="en-US" sz="1200" dirty="0">
+                <a:solidFill>
+                  <a:srgbClr val="E8EEFC"/>
+                </a:solidFill>
+                <a:latin typeface="Calibri" pitchFamily="34" charset="0"/>
+                <a:ea typeface="Calibri" pitchFamily="34" charset="-122"/>
+                <a:cs typeface="Calibri" pitchFamily="34" charset="-120"/>
+              </a:rPr>
+              <a:t>Cycle 79 AI priority.  </a:t>
+            </a:r>
+            <a:pPr indent="0" marL="0">
+              <a:buNone/>
+            </a:pPr>
+            <a:r>
+              <a:rPr lang="en-US" sz="1200" i="1" dirty="0">
+                <a:solidFill>
+                  <a:srgbClr val="E8EEFC"/>
+                </a:solidFill>
+                <a:latin typeface="Calibri" pitchFamily="34" charset="0"/>
+                <a:ea typeface="Calibri" pitchFamily="34" charset="-122"/>
+                <a:cs typeface="Calibri" pitchFamily="34" charset="-120"/>
+              </a:rPr>
+              <a:t>Market: Saviynt, Token Security, Astrix converging here.</a:t>
+            </a:r>
+            <a:endParaRPr lang="en-US" sz="1200" dirty="0"/>
+          </a:p>
+        </p:txBody>
+      </p:sp>
+      <p:sp>
+        <p:nvSpPr>
+          <p:cNvPr id="19" name="Text 17"/>
+          <p:cNvSpPr/>
+          <p:nvPr/>
+        </p:nvSpPr>
+        <p:spPr>
+          <a:xfrm>
+            <a:off x="8321040" y="4823460"/>
+            <a:ext cx="457200" cy="228600"/>
+          </a:xfrm>
+          <a:prstGeom prst="rect">
+            <a:avLst/>
+          </a:prstGeom>
+          <a:noFill/>
+          <a:ln/>
+        </p:spPr>
+        <p:txBody>
+          <a:bodyPr wrap="square" lIns="0" tIns="0" rIns="0" bIns="0" rtlCol="0" anchor="ctr"/>
+          <a:lstStyle/>
+          <a:p>
+            <a:pPr algn="r" indent="0" marL="0">
+              <a:buNone/>
+            </a:pPr>
+            <a:r>
+              <a:rPr lang="en-US" sz="900" dirty="0">
+                <a:solidFill>
+                  <a:srgbClr val="E8EEFC"/>
+                </a:solidFill>
+                <a:latin typeface="Calibri" pitchFamily="34" charset="0"/>
+                <a:ea typeface="Calibri" pitchFamily="34" charset="-122"/>
+                <a:cs typeface="Calibri" pitchFamily="34" charset="-120"/>
+              </a:rPr>
+              <a:t>5 / 8</a:t>
+            </a:r>
+            <a:endParaRPr lang="en-US" sz="900" dirty="0"/>
+          </a:p>
+        </p:txBody>
+      </p:sp>
+    </p:spTree>
+  </p:cSld>
+  <p:clrMapOvr>
+    <a:masterClrMapping/>
+  </p:clrMapOvr>
+</p:sld>
+</file>
+
+<file path=ppt/slides/slide6.xml><?xml version="1.0" encoding="utf-8"?>
+<p:sld xmlns:a="http://schemas.openxmlformats.org/drawingml/2006/main" xmlns:r="http://schemas.openxmlformats.org/officeDocument/2006/relationships" xmlns:p="http://schemas.openxmlformats.org/presentationml/2006/main">
+  <p:cSld name="Slide 6">
     <p:bg>
       <p:bgPr>
         <a:solidFill>
@@ -4697,11 +6213,11 @@
             <a:avLst/>
           </a:prstGeom>
           <a:solidFill>
-            <a:srgbClr val="F59E0B"/>
+            <a:srgbClr val="02C39A"/>
           </a:solidFill>
           <a:ln w="12700">
             <a:solidFill>
-              <a:srgbClr val="F59E0B"/>
+              <a:srgbClr val="02C39A"/>
             </a:solidFill>
             <a:prstDash val="solid"/>
           </a:ln>
@@ -4740,7 +6256,7 @@
                 <a:ea typeface="Calibri" pitchFamily="34" charset="-122"/>
                 <a:cs typeface="Calibri" pitchFamily="34" charset="-120"/>
               </a:rPr>
-              <a:t>04 · What we tried first</a:t>
+              <a:t>06 · P0 scope — the demo target</a:t>
             </a:r>
             <a:endParaRPr lang="en-US" sz="1100" dirty="0"/>
           </a:p>
@@ -4779,7 +6295,7 @@
                 <a:ea typeface="Georgia" pitchFamily="34" charset="-122"/>
                 <a:cs typeface="Georgia" pitchFamily="34" charset="-120"/>
               </a:rPr>
-              <a:t>The original approach.</a:t>
+              <a:t>What we're building first.</a:t>
             </a:r>
             <a:endParaRPr lang="en-US" sz="3400" dirty="0"/>
           </a:p>
@@ -4787,24 +6303,63 @@
       </p:sp>
       <p:sp>
         <p:nvSpPr>
-          <p:cNvPr id="5" name="Shape 3"/>
-          <p:cNvSpPr/>
-          <p:nvPr/>
-        </p:nvSpPr>
-        <p:spPr>
-          <a:xfrm>
-            <a:off x="457200" y="1691640"/>
-            <a:ext cx="3931920" cy="2743200"/>
+          <p:cNvPr id="5" name="Text 3"/>
+          <p:cNvSpPr/>
+          <p:nvPr/>
+        </p:nvSpPr>
+        <p:spPr>
+          <a:xfrm>
+            <a:off x="457200" y="1554480"/>
+            <a:ext cx="8229600" cy="365760"/>
+          </a:xfrm>
+          <a:prstGeom prst="rect">
+            <a:avLst/>
+          </a:prstGeom>
+          <a:noFill/>
+          <a:ln/>
+        </p:spPr>
+        <p:txBody>
+          <a:bodyPr wrap="square" lIns="0" tIns="0" rIns="0" bIns="0" rtlCol="0" anchor="ctr"/>
+          <a:lstStyle/>
+          <a:p>
+            <a:pPr indent="0" marL="0">
+              <a:buNone/>
+            </a:pPr>
+            <a:r>
+              <a:rPr lang="en-US" sz="1200" i="1" dirty="0">
+                <a:solidFill>
+                  <a:srgbClr val="64748B"/>
+                </a:solidFill>
+                <a:latin typeface="Calibri" pitchFamily="34" charset="0"/>
+                <a:ea typeface="Calibri" pitchFamily="34" charset="-122"/>
+                <a:cs typeface="Calibri" pitchFamily="34" charset="-120"/>
+              </a:rPr>
+              <a:t>From Sarit's session. Some pieces may exist in M1/M2 — Omri will connect the dots.</a:t>
+            </a:r>
+            <a:endParaRPr lang="en-US" sz="1200" dirty="0"/>
+          </a:p>
+        </p:txBody>
+      </p:sp>
+      <p:sp>
+        <p:nvSpPr>
+          <p:cNvPr id="6" name="Shape 4"/>
+          <p:cNvSpPr/>
+          <p:nvPr/>
+        </p:nvSpPr>
+        <p:spPr>
+          <a:xfrm>
+            <a:off x="365760" y="2011680"/>
+            <a:ext cx="2743200" cy="2468880"/>
           </a:xfrm>
           <a:prstGeom prst="rect">
             <a:avLst/>
           </a:prstGeom>
           <a:solidFill>
-            <a:srgbClr val="E8EEFC"/>
+            <a:srgbClr val="FFFFFF"/>
           </a:solidFill>
           <a:ln w="12700">
             <a:solidFill>
-              <a:srgbClr val="E8EEFC"/>
+              <a:srgbClr val="CBD5E1"/>
             </a:solidFill>
             <a:prstDash val="solid"/>
           </a:ln>
@@ -4812,652 +6367,14 @@
       </p:sp>
       <p:sp>
         <p:nvSpPr>
-          <p:cNvPr id="6" name="Shape 4"/>
-          <p:cNvSpPr/>
-          <p:nvPr/>
-        </p:nvSpPr>
-        <p:spPr>
-          <a:xfrm>
-            <a:off x="457200" y="1691640"/>
-            <a:ext cx="73152" cy="2743200"/>
-          </a:xfrm>
-          <a:prstGeom prst="rect">
-            <a:avLst/>
-          </a:prstGeom>
-          <a:solidFill>
-            <a:srgbClr val="F59E0B"/>
-          </a:solidFill>
-          <a:ln w="12700">
-            <a:solidFill>
-              <a:srgbClr val="F59E0B"/>
-            </a:solidFill>
-            <a:prstDash val="solid"/>
-          </a:ln>
-        </p:spPr>
-      </p:sp>
-      <p:sp>
-        <p:nvSpPr>
-          <p:cNvPr id="7" name="Text 5"/>
-          <p:cNvSpPr/>
-          <p:nvPr/>
-        </p:nvSpPr>
-        <p:spPr>
-          <a:xfrm>
-            <a:off x="640080" y="1783080"/>
-            <a:ext cx="3566160" cy="365760"/>
-          </a:xfrm>
-          <a:prstGeom prst="rect">
-            <a:avLst/>
-          </a:prstGeom>
-          <a:noFill/>
-          <a:ln/>
-        </p:spPr>
-        <p:txBody>
-          <a:bodyPr wrap="square" lIns="0" tIns="0" rIns="0" bIns="0" rtlCol="0" anchor="ctr"/>
-          <a:lstStyle/>
-          <a:p>
-            <a:pPr indent="0" marL="0">
-              <a:buNone/>
-            </a:pPr>
-            <a:r>
-              <a:rPr lang="en-US" sz="1500" b="1" dirty="0">
-                <a:solidFill>
-                  <a:srgbClr val="0F1B3D"/>
-                </a:solidFill>
-                <a:latin typeface="Georgia" pitchFamily="34" charset="0"/>
-                <a:ea typeface="Georgia" pitchFamily="34" charset="-122"/>
-                <a:cs typeface="Georgia" pitchFamily="34" charset="-120"/>
-              </a:rPr>
-              <a:t>The plan</a:t>
-            </a:r>
-            <a:endParaRPr lang="en-US" sz="1500" dirty="0"/>
-          </a:p>
-        </p:txBody>
-      </p:sp>
-      <p:sp>
-        <p:nvSpPr>
-          <p:cNvPr id="8" name="Text 6"/>
-          <p:cNvSpPr/>
-          <p:nvPr/>
-        </p:nvSpPr>
-        <p:spPr>
-          <a:xfrm>
-            <a:off x="640080" y="2240280"/>
-            <a:ext cx="3566160" cy="2011680"/>
-          </a:xfrm>
-          <a:prstGeom prst="rect">
-            <a:avLst/>
-          </a:prstGeom>
-          <a:noFill/>
-          <a:ln/>
-        </p:spPr>
-        <p:txBody>
-          <a:bodyPr wrap="square" lIns="0" tIns="0" rIns="0" bIns="0" rtlCol="0" anchor="ctr"/>
-          <a:lstStyle/>
-          <a:p>
-            <a:pPr indent="0" marL="0">
-              <a:buNone/>
-            </a:pPr>
-            <a:r>
-              <a:rPr lang="en-US" sz="1200" dirty="0">
-                <a:solidFill>
-                  <a:srgbClr val="1A1F36"/>
-                </a:solidFill>
-                <a:latin typeface="Calibri" pitchFamily="34" charset="0"/>
-                <a:ea typeface="Calibri" pitchFamily="34" charset="-122"/>
-                <a:cs typeface="Calibri" pitchFamily="34" charset="-120"/>
-              </a:rPr>
-              <a:t>Govern agents using the same IAM APIs that power human + NHI governance.</a:t>
-            </a:r>
-            <a:endParaRPr lang="en-US" sz="1200" dirty="0"/>
-          </a:p>
-          <a:p>
-            <a:pPr indent="0" marL="0">
-              <a:buNone/>
-            </a:pPr>
-            <a:r>
-              <a:rPr lang="en-US" sz="500" dirty="0">
-                <a:solidFill>
-                  <a:srgbClr val="000000"/>
-                </a:solidFill>
-                <a:latin typeface="Calibri" pitchFamily="34" charset="0"/>
-                <a:ea typeface="Calibri" pitchFamily="34" charset="-122"/>
-                <a:cs typeface="Calibri" pitchFamily="34" charset="-120"/>
-              </a:rPr>
-              <a:t> </a:t>
-            </a:r>
-            <a:endParaRPr lang="en-US" sz="1200" dirty="0"/>
-          </a:p>
-          <a:p>
-            <a:pPr indent="0" marL="0">
-              <a:buNone/>
-            </a:pPr>
-            <a:r>
-              <a:rPr lang="en-US" sz="1200" dirty="0">
-                <a:solidFill>
-                  <a:srgbClr val="1A1F36"/>
-                </a:solidFill>
-                <a:latin typeface="Calibri" pitchFamily="34" charset="0"/>
-                <a:ea typeface="Calibri" pitchFamily="34" charset="-122"/>
-                <a:cs typeface="Calibri" pitchFamily="34" charset="-120"/>
-              </a:rPr>
-              <a:t>Identity graph already connected to every app.</a:t>
-            </a:r>
-            <a:endParaRPr lang="en-US" sz="1200" dirty="0"/>
-          </a:p>
-          <a:p>
-            <a:pPr indent="0" marL="0">
-              <a:buNone/>
-            </a:pPr>
-            <a:r>
-              <a:rPr lang="en-US" sz="1200" dirty="0">
-                <a:solidFill>
-                  <a:srgbClr val="1A1F36"/>
-                </a:solidFill>
-                <a:latin typeface="Calibri" pitchFamily="34" charset="0"/>
-                <a:ea typeface="Calibri" pitchFamily="34" charset="-122"/>
-                <a:cs typeface="Calibri" pitchFamily="34" charset="-120"/>
-              </a:rPr>
-              <a:t>Access request flows already built.</a:t>
-            </a:r>
-            <a:endParaRPr lang="en-US" sz="1200" dirty="0"/>
-          </a:p>
-          <a:p>
-            <a:pPr indent="0" marL="0">
-              <a:buNone/>
-            </a:pPr>
-            <a:r>
-              <a:rPr lang="en-US" sz="1200" dirty="0">
-                <a:solidFill>
-                  <a:srgbClr val="1A1F36"/>
-                </a:solidFill>
-                <a:latin typeface="Calibri" pitchFamily="34" charset="0"/>
-                <a:ea typeface="Calibri" pitchFamily="34" charset="-122"/>
-                <a:cs typeface="Calibri" pitchFamily="34" charset="-120"/>
-              </a:rPr>
-              <a:t>Credential discovery already in motion (M2).</a:t>
-            </a:r>
-            <a:endParaRPr lang="en-US" sz="1200" dirty="0"/>
-          </a:p>
-          <a:p>
-            <a:pPr indent="0" marL="0">
-              <a:buNone/>
-            </a:pPr>
-            <a:r>
-              <a:rPr lang="en-US" sz="500" dirty="0">
-                <a:solidFill>
-                  <a:srgbClr val="000000"/>
-                </a:solidFill>
-                <a:latin typeface="Calibri" pitchFamily="34" charset="0"/>
-                <a:ea typeface="Calibri" pitchFamily="34" charset="-122"/>
-                <a:cs typeface="Calibri" pitchFamily="34" charset="-120"/>
-              </a:rPr>
-              <a:t> </a:t>
-            </a:r>
-            <a:endParaRPr lang="en-US" sz="1200" dirty="0"/>
-          </a:p>
-          <a:p>
-            <a:pPr indent="0" marL="0">
-              <a:buNone/>
-            </a:pPr>
-            <a:r>
-              <a:rPr lang="en-US" sz="1200" i="1" dirty="0">
-                <a:solidFill>
-                  <a:srgbClr val="64748B"/>
-                </a:solidFill>
-                <a:latin typeface="Calibri" pitchFamily="34" charset="0"/>
-                <a:ea typeface="Calibri" pitchFamily="34" charset="-122"/>
-                <a:cs typeface="Calibri" pitchFamily="34" charset="-120"/>
-              </a:rPr>
-              <a:t>Natural extension of what we already do for humans and NHIs.</a:t>
-            </a:r>
-            <a:endParaRPr lang="en-US" sz="1200" dirty="0"/>
-          </a:p>
-        </p:txBody>
-      </p:sp>
-      <p:sp>
-        <p:nvSpPr>
-          <p:cNvPr id="9" name="Shape 7"/>
-          <p:cNvSpPr/>
-          <p:nvPr/>
-        </p:nvSpPr>
-        <p:spPr>
-          <a:xfrm>
-            <a:off x="4453128" y="3063240"/>
-            <a:ext cx="502920" cy="0"/>
-          </a:xfrm>
-          <a:prstGeom prst="line">
-            <a:avLst/>
-          </a:prstGeom>
-          <a:noFill/>
-          <a:ln w="25400">
-            <a:solidFill>
-              <a:srgbClr val="0F1B3D"/>
-            </a:solidFill>
-            <a:prstDash val="solid"/>
-            <a:tailEnd type="triangle"/>
-          </a:ln>
-        </p:spPr>
-      </p:sp>
-      <p:sp>
-        <p:nvSpPr>
-          <p:cNvPr id="10" name="Shape 8"/>
-          <p:cNvSpPr/>
-          <p:nvPr/>
-        </p:nvSpPr>
-        <p:spPr>
-          <a:xfrm>
-            <a:off x="5029200" y="1691640"/>
-            <a:ext cx="3749040" cy="2743200"/>
-          </a:xfrm>
-          <a:prstGeom prst="rect">
-            <a:avLst/>
-          </a:prstGeom>
-          <a:solidFill>
-            <a:srgbClr val="E8EEFC"/>
-          </a:solidFill>
-          <a:ln w="12700">
-            <a:solidFill>
-              <a:srgbClr val="E8EEFC"/>
-            </a:solidFill>
-            <a:prstDash val="solid"/>
-          </a:ln>
-        </p:spPr>
-      </p:sp>
-      <p:sp>
-        <p:nvSpPr>
-          <p:cNvPr id="11" name="Shape 9"/>
-          <p:cNvSpPr/>
-          <p:nvPr/>
-        </p:nvSpPr>
-        <p:spPr>
-          <a:xfrm>
-            <a:off x="5029200" y="1691640"/>
-            <a:ext cx="73152" cy="2743200"/>
-          </a:xfrm>
-          <a:prstGeom prst="rect">
-            <a:avLst/>
-          </a:prstGeom>
-          <a:solidFill>
-            <a:srgbClr val="E11D48"/>
-          </a:solidFill>
-          <a:ln w="12700">
-            <a:solidFill>
-              <a:srgbClr val="E11D48"/>
-            </a:solidFill>
-            <a:prstDash val="solid"/>
-          </a:ln>
-        </p:spPr>
-      </p:sp>
-      <p:sp>
-        <p:nvSpPr>
-          <p:cNvPr id="12" name="Text 10"/>
-          <p:cNvSpPr/>
-          <p:nvPr/>
-        </p:nvSpPr>
-        <p:spPr>
-          <a:xfrm>
-            <a:off x="5212080" y="1783080"/>
-            <a:ext cx="3383280" cy="365760"/>
-          </a:xfrm>
-          <a:prstGeom prst="rect">
-            <a:avLst/>
-          </a:prstGeom>
-          <a:noFill/>
-          <a:ln/>
-        </p:spPr>
-        <p:txBody>
-          <a:bodyPr wrap="square" lIns="0" tIns="0" rIns="0" bIns="0" rtlCol="0" anchor="ctr"/>
-          <a:lstStyle/>
-          <a:p>
-            <a:pPr indent="0" marL="0">
-              <a:buNone/>
-            </a:pPr>
-            <a:r>
-              <a:rPr lang="en-US" sz="1500" b="1" dirty="0">
-                <a:solidFill>
-                  <a:srgbClr val="0F1B3D"/>
-                </a:solidFill>
-                <a:latin typeface="Georgia" pitchFamily="34" charset="0"/>
-                <a:ea typeface="Georgia" pitchFamily="34" charset="-122"/>
-                <a:cs typeface="Georgia" pitchFamily="34" charset="-120"/>
-              </a:rPr>
-              <a:t>What happened</a:t>
-            </a:r>
-            <a:endParaRPr lang="en-US" sz="1500" dirty="0"/>
-          </a:p>
-        </p:txBody>
-      </p:sp>
-      <p:sp>
-        <p:nvSpPr>
-          <p:cNvPr id="13" name="Text 11"/>
-          <p:cNvSpPr/>
-          <p:nvPr/>
-        </p:nvSpPr>
-        <p:spPr>
-          <a:xfrm>
-            <a:off x="5212080" y="2240280"/>
-            <a:ext cx="3383280" cy="2103120"/>
-          </a:xfrm>
-          <a:prstGeom prst="rect">
-            <a:avLst/>
-          </a:prstGeom>
-          <a:noFill/>
-          <a:ln/>
-        </p:spPr>
-        <p:txBody>
-          <a:bodyPr wrap="square" lIns="0" tIns="0" rIns="0" bIns="0" rtlCol="0" anchor="ctr"/>
-          <a:lstStyle/>
-          <a:p>
-            <a:pPr indent="0" marL="0">
-              <a:buNone/>
-            </a:pPr>
-            <a:r>
-              <a:rPr lang="en-US" sz="1200" b="1" dirty="0">
-                <a:solidFill>
-                  <a:srgbClr val="E11D48"/>
-                </a:solidFill>
-                <a:latin typeface="Calibri" pitchFamily="34" charset="0"/>
-                <a:ea typeface="Calibri" pitchFamily="34" charset="-122"/>
-                <a:cs typeface="Calibri" pitchFamily="34" charset="-120"/>
-              </a:rPr>
-              <a:t>Agent access doesn't map to the IAM API surface.</a:t>
-            </a:r>
-            <a:endParaRPr lang="en-US" sz="1200" dirty="0"/>
-          </a:p>
-          <a:p>
-            <a:pPr indent="0" marL="0">
-              <a:buNone/>
-            </a:pPr>
-            <a:r>
-              <a:rPr lang="en-US" sz="500" dirty="0">
-                <a:solidFill>
-                  <a:srgbClr val="000000"/>
-                </a:solidFill>
-                <a:latin typeface="Calibri" pitchFamily="34" charset="0"/>
-                <a:ea typeface="Calibri" pitchFamily="34" charset="-122"/>
-                <a:cs typeface="Calibri" pitchFamily="34" charset="-120"/>
-              </a:rPr>
-              <a:t> </a:t>
-            </a:r>
-            <a:endParaRPr lang="en-US" sz="1200" dirty="0"/>
-          </a:p>
-          <a:p>
-            <a:pPr indent="0" marL="0">
-              <a:buNone/>
-            </a:pPr>
-            <a:r>
-              <a:rPr lang="en-US" sz="1200" b="1" dirty="0">
-                <a:solidFill>
-                  <a:srgbClr val="1A1F36"/>
-                </a:solidFill>
-                <a:latin typeface="Calibri" pitchFamily="34" charset="0"/>
-                <a:ea typeface="Calibri" pitchFamily="34" charset="-122"/>
-                <a:cs typeface="Calibri" pitchFamily="34" charset="-120"/>
-              </a:rPr>
-              <a:t>Ephemeral:</a:t>
-            </a:r>
-            <a:pPr indent="0" marL="0">
-              <a:buNone/>
-            </a:pPr>
-            <a:r>
-              <a:rPr lang="en-US" sz="1200" dirty="0">
-                <a:solidFill>
-                  <a:srgbClr val="1A1F36"/>
-                </a:solidFill>
-                <a:latin typeface="Calibri" pitchFamily="34" charset="0"/>
-                <a:ea typeface="Calibri" pitchFamily="34" charset="-122"/>
-                <a:cs typeface="Calibri" pitchFamily="34" charset="-120"/>
-              </a:rPr>
-              <a:t> sessions spin up/down in seconds — no persistent identity to track.</a:t>
-            </a:r>
-            <a:endParaRPr lang="en-US" sz="1200" dirty="0"/>
-          </a:p>
-          <a:p>
-            <a:pPr indent="0" marL="0">
-              <a:buNone/>
-            </a:pPr>
-            <a:r>
-              <a:rPr lang="en-US" sz="500" dirty="0">
-                <a:solidFill>
-                  <a:srgbClr val="000000"/>
-                </a:solidFill>
-                <a:latin typeface="Calibri" pitchFamily="34" charset="0"/>
-                <a:ea typeface="Calibri" pitchFamily="34" charset="-122"/>
-                <a:cs typeface="Calibri" pitchFamily="34" charset="-120"/>
-              </a:rPr>
-              <a:t> </a:t>
-            </a:r>
-            <a:endParaRPr lang="en-US" sz="1200" dirty="0"/>
-          </a:p>
-          <a:p>
-            <a:pPr indent="0" marL="0">
-              <a:buNone/>
-            </a:pPr>
-            <a:r>
-              <a:rPr lang="en-US" sz="1200" b="1" dirty="0">
-                <a:solidFill>
-                  <a:srgbClr val="1A1F36"/>
-                </a:solidFill>
-                <a:latin typeface="Calibri" pitchFamily="34" charset="0"/>
-                <a:ea typeface="Calibri" pitchFamily="34" charset="-122"/>
-                <a:cs typeface="Calibri" pitchFamily="34" charset="-120"/>
-              </a:rPr>
-              <a:t>Intent-driven:</a:t>
-            </a:r>
-            <a:pPr indent="0" marL="0">
-              <a:buNone/>
-            </a:pPr>
-            <a:r>
-              <a:rPr lang="en-US" sz="1200" dirty="0">
-                <a:solidFill>
-                  <a:srgbClr val="1A1F36"/>
-                </a:solidFill>
-                <a:latin typeface="Calibri" pitchFamily="34" charset="0"/>
-                <a:ea typeface="Calibri" pitchFamily="34" charset="-122"/>
-                <a:cs typeface="Calibri" pitchFamily="34" charset="-120"/>
-              </a:rPr>
-              <a:t> access isn't pre-declared — it's determined at runtime based on task context.</a:t>
-            </a:r>
-            <a:endParaRPr lang="en-US" sz="1200" dirty="0"/>
-          </a:p>
-          <a:p>
-            <a:pPr indent="0" marL="0">
-              <a:buNone/>
-            </a:pPr>
-            <a:r>
-              <a:rPr lang="en-US" sz="500" dirty="0">
-                <a:solidFill>
-                  <a:srgbClr val="000000"/>
-                </a:solidFill>
-                <a:latin typeface="Calibri" pitchFamily="34" charset="0"/>
-                <a:ea typeface="Calibri" pitchFamily="34" charset="-122"/>
-                <a:cs typeface="Calibri" pitchFamily="34" charset="-120"/>
-              </a:rPr>
-              <a:t> </a:t>
-            </a:r>
-            <a:endParaRPr lang="en-US" sz="1200" dirty="0"/>
-          </a:p>
-          <a:p>
-            <a:pPr indent="0" marL="0">
-              <a:buNone/>
-            </a:pPr>
-            <a:r>
-              <a:rPr lang="en-US" sz="1200" b="1" dirty="0">
-                <a:solidFill>
-                  <a:srgbClr val="1A1F36"/>
-                </a:solidFill>
-                <a:latin typeface="Calibri" pitchFamily="34" charset="0"/>
-                <a:ea typeface="Calibri" pitchFamily="34" charset="-122"/>
-                <a:cs typeface="Calibri" pitchFamily="34" charset="-120"/>
-              </a:rPr>
-              <a:t>Multi-hop:</a:t>
-            </a:r>
-            <a:pPr indent="0" marL="0">
-              <a:buNone/>
-            </a:pPr>
-            <a:r>
-              <a:rPr lang="en-US" sz="1200" dirty="0">
-                <a:solidFill>
-                  <a:srgbClr val="1A1F36"/>
-                </a:solidFill>
-                <a:latin typeface="Calibri" pitchFamily="34" charset="0"/>
-                <a:ea typeface="Calibri" pitchFamily="34" charset="-122"/>
-                <a:cs typeface="Calibri" pitchFamily="34" charset="-120"/>
-              </a:rPr>
-              <a:t> one agent call chains through tools, MCP servers, and downstream apps — not a single entitlement check.</a:t>
-            </a:r>
-            <a:endParaRPr lang="en-US" sz="1200" dirty="0"/>
-          </a:p>
-        </p:txBody>
-      </p:sp>
-      <p:sp>
-        <p:nvSpPr>
-          <p:cNvPr id="14" name="Shape 12"/>
-          <p:cNvSpPr/>
-          <p:nvPr/>
-        </p:nvSpPr>
-        <p:spPr>
-          <a:xfrm>
-            <a:off x="457200" y="4617720"/>
-            <a:ext cx="8229600" cy="365760"/>
-          </a:xfrm>
-          <a:prstGeom prst="rect">
-            <a:avLst/>
-          </a:prstGeom>
-          <a:solidFill>
-            <a:srgbClr val="F59E0B">
-              <a:alpha val="25000"/>
-            </a:srgbClr>
-          </a:solidFill>
-          <a:ln w="12700">
-            <a:solidFill>
-              <a:srgbClr val="F59E0B"/>
-            </a:solidFill>
-            <a:prstDash val="solid"/>
-          </a:ln>
-        </p:spPr>
-      </p:sp>
-      <p:sp>
-        <p:nvSpPr>
-          <p:cNvPr id="15" name="Text 13"/>
-          <p:cNvSpPr/>
-          <p:nvPr/>
-        </p:nvSpPr>
-        <p:spPr>
-          <a:xfrm>
-            <a:off x="640080" y="4617720"/>
-            <a:ext cx="7863840" cy="365760"/>
-          </a:xfrm>
-          <a:prstGeom prst="rect">
-            <a:avLst/>
-          </a:prstGeom>
-          <a:noFill/>
-          <a:ln/>
-        </p:spPr>
-        <p:txBody>
-          <a:bodyPr wrap="square" lIns="0" tIns="0" rIns="0" bIns="0" rtlCol="0" anchor="ctr"/>
-          <a:lstStyle/>
-          <a:p>
-            <a:pPr indent="0" marL="0">
-              <a:buNone/>
-            </a:pPr>
-            <a:r>
-              <a:rPr lang="en-US" sz="1200" b="1" i="1" dirty="0">
-                <a:solidFill>
-                  <a:srgbClr val="0F1B3D"/>
-                </a:solidFill>
-                <a:latin typeface="Calibri" pitchFamily="34" charset="0"/>
-                <a:ea typeface="Calibri" pitchFamily="34" charset="-122"/>
-                <a:cs typeface="Calibri" pitchFamily="34" charset="-120"/>
-              </a:rPr>
-              <a:t>This is a useful discovery. We now know exactly what the next layer must do.</a:t>
-            </a:r>
-            <a:endParaRPr lang="en-US" sz="1200" dirty="0"/>
-          </a:p>
-        </p:txBody>
-      </p:sp>
-      <p:sp>
-        <p:nvSpPr>
-          <p:cNvPr id="16" name="Text 14"/>
-          <p:cNvSpPr/>
-          <p:nvPr/>
-        </p:nvSpPr>
-        <p:spPr>
-          <a:xfrm>
-            <a:off x="8321040" y="4823460"/>
-            <a:ext cx="457200" cy="228600"/>
-          </a:xfrm>
-          <a:prstGeom prst="rect">
-            <a:avLst/>
-          </a:prstGeom>
-          <a:noFill/>
-          <a:ln/>
-        </p:spPr>
-        <p:txBody>
-          <a:bodyPr wrap="square" lIns="0" tIns="0" rIns="0" bIns="0" rtlCol="0" anchor="ctr"/>
-          <a:lstStyle/>
-          <a:p>
-            <a:pPr algn="r" indent="0" marL="0">
-              <a:buNone/>
-            </a:pPr>
-            <a:r>
-              <a:rPr lang="en-US" sz="900" dirty="0">
-                <a:solidFill>
-                  <a:srgbClr val="64748B"/>
-                </a:solidFill>
-                <a:latin typeface="Calibri" pitchFamily="34" charset="0"/>
-                <a:ea typeface="Calibri" pitchFamily="34" charset="-122"/>
-                <a:cs typeface="Calibri" pitchFamily="34" charset="-120"/>
-              </a:rPr>
-              <a:t>5 / 9</a:t>
-            </a:r>
-            <a:endParaRPr lang="en-US" sz="900" dirty="0"/>
-          </a:p>
-        </p:txBody>
-      </p:sp>
-    </p:spTree>
-  </p:cSld>
-  <p:clrMapOvr>
-    <a:masterClrMapping/>
-  </p:clrMapOvr>
-</p:sld>
-</file>
-
-<file path=ppt/slides/slide6.xml><?xml version="1.0" encoding="utf-8"?>
-<p:sld xmlns:a="http://schemas.openxmlformats.org/drawingml/2006/main" xmlns:r="http://schemas.openxmlformats.org/officeDocument/2006/relationships" xmlns:p="http://schemas.openxmlformats.org/presentationml/2006/main">
-  <p:cSld name="Slide 6">
-    <p:bg>
-      <p:bgPr>
-        <a:solidFill>
-          <a:srgbClr val="091230"/>
-        </a:solidFill>
-      </p:bgPr>
-    </p:bg>
-    <p:spTree>
-      <p:nvGrpSpPr>
-        <p:cNvPr id="1" name=""/>
-        <p:cNvGrpSpPr/>
-        <p:nvPr/>
-      </p:nvGrpSpPr>
-      <p:grpSpPr>
-        <a:xfrm>
-          <a:off x="0" y="0"/>
-          <a:ext cx="0" cy="0"/>
-          <a:chOff x="0" y="0"/>
-          <a:chExt cx="0" cy="0"/>
-        </a:xfrm>
-      </p:grpSpPr>
-      <p:sp>
-        <p:nvSpPr>
-          <p:cNvPr id="2" name="Shape 0"/>
-          <p:cNvSpPr/>
-          <p:nvPr/>
-        </p:nvSpPr>
-        <p:spPr>
-          <a:xfrm>
-            <a:off x="0" y="0"/>
-            <a:ext cx="109728" cy="5143500"/>
+          <p:cNvPr id="7" name="Shape 5"/>
+          <p:cNvSpPr/>
+          <p:nvPr/>
+        </p:nvSpPr>
+        <p:spPr>
+          <a:xfrm>
+            <a:off x="365760" y="2011680"/>
+            <a:ext cx="2743200" cy="73152"/>
           </a:xfrm>
           <a:prstGeom prst="rect">
             <a:avLst/>
@@ -5475,14 +6392,14 @@
       </p:sp>
       <p:sp>
         <p:nvSpPr>
-          <p:cNvPr id="3" name="Text 1"/>
-          <p:cNvSpPr/>
-          <p:nvPr/>
-        </p:nvSpPr>
-        <p:spPr>
-          <a:xfrm>
-            <a:off x="457200" y="365760"/>
-            <a:ext cx="7315200" cy="274320"/>
+          <p:cNvPr id="8" name="Text 6"/>
+          <p:cNvSpPr/>
+          <p:nvPr/>
+        </p:nvSpPr>
+        <p:spPr>
+          <a:xfrm>
+            <a:off x="640080" y="2194560"/>
+            <a:ext cx="914400" cy="320040"/>
           </a:xfrm>
           <a:prstGeom prst="rect">
             <a:avLst/>
@@ -5498,7 +6415,7 @@
               <a:buNone/>
             </a:pPr>
             <a:r>
-              <a:rPr lang="en-US" sz="1100" b="1" spc="400" kern="0" dirty="0">
+              <a:rPr lang="en-US" sz="1100" b="1" spc="300" kern="0" dirty="0">
                 <a:solidFill>
                   <a:srgbClr val="02C39A"/>
                 </a:solidFill>
@@ -5506,7 +6423,7 @@
                 <a:ea typeface="Calibri" pitchFamily="34" charset="-122"/>
                 <a:cs typeface="Calibri" pitchFamily="34" charset="-120"/>
               </a:rPr>
-              <a:t>05 · The new approach</a:t>
+              <a:t>01</a:t>
             </a:r>
             <a:endParaRPr lang="en-US" sz="1100" dirty="0"/>
           </a:p>
@@ -5514,14 +6431,14 @@
       </p:sp>
       <p:sp>
         <p:nvSpPr>
-          <p:cNvPr id="4" name="Text 2"/>
-          <p:cNvSpPr/>
-          <p:nvPr/>
-        </p:nvSpPr>
-        <p:spPr>
-          <a:xfrm>
-            <a:off x="457200" y="731520"/>
-            <a:ext cx="8229600" cy="777240"/>
+          <p:cNvPr id="9" name="Text 7"/>
+          <p:cNvSpPr/>
+          <p:nvPr/>
+        </p:nvSpPr>
+        <p:spPr>
+          <a:xfrm>
+            <a:off x="640080" y="2514600"/>
+            <a:ext cx="2194560" cy="457200"/>
           </a:xfrm>
           <a:prstGeom prst="rect">
             <a:avLst/>
@@ -5537,30 +6454,30 @@
               <a:buNone/>
             </a:pPr>
             <a:r>
-              <a:rPr lang="en-US" sz="3400" b="1" dirty="0">
-                <a:solidFill>
-                  <a:srgbClr val="FFFFFF"/>
+              <a:rPr lang="en-US" sz="1800" b="1" dirty="0">
+                <a:solidFill>
+                  <a:srgbClr val="0F1B3D"/>
                 </a:solidFill>
                 <a:latin typeface="Georgia" pitchFamily="34" charset="0"/>
                 <a:ea typeface="Georgia" pitchFamily="34" charset="-122"/>
                 <a:cs typeface="Georgia" pitchFamily="34" charset="-120"/>
               </a:rPr>
-              <a:t>MCP Gateway.</a:t>
-            </a:r>
-            <a:endParaRPr lang="en-US" sz="3400" dirty="0"/>
-          </a:p>
-        </p:txBody>
-      </p:sp>
-      <p:sp>
-        <p:nvSpPr>
-          <p:cNvPr id="5" name="Text 3"/>
-          <p:cNvSpPr/>
-          <p:nvPr/>
-        </p:nvSpPr>
-        <p:spPr>
-          <a:xfrm>
-            <a:off x="457200" y="1600200"/>
-            <a:ext cx="8229600" cy="457200"/>
+              <a:t>Gateway Core</a:t>
+            </a:r>
+            <a:endParaRPr lang="en-US" sz="1800" dirty="0"/>
+          </a:p>
+        </p:txBody>
+      </p:sp>
+      <p:sp>
+        <p:nvSpPr>
+          <p:cNvPr id="10" name="Text 8"/>
+          <p:cNvSpPr/>
+          <p:nvPr/>
+        </p:nvSpPr>
+        <p:spPr>
+          <a:xfrm>
+            <a:off x="640080" y="3017520"/>
+            <a:ext cx="2194560" cy="1325880"/>
           </a:xfrm>
           <a:prstGeom prst="rect">
             <a:avLst/>
@@ -5573,45 +6490,114 @@
           <a:lstStyle/>
           <a:p>
             <a:pPr indent="0" marL="0">
-              <a:buNone/>
-            </a:pPr>
-            <a:r>
-              <a:rPr lang="en-US" sz="1500" i="1" dirty="0">
-                <a:solidFill>
-                  <a:srgbClr val="E8EEFC"/>
-                </a:solidFill>
-                <a:latin typeface="Calibri" pitchFamily="34" charset="0"/>
-                <a:ea typeface="Calibri" pitchFamily="34" charset="-122"/>
-                <a:cs typeface="Calibri" pitchFamily="34" charset="-120"/>
-              </a:rPr>
-              <a:t>Govern agents at the protocol layer — one enforcement point between every agent and every tool.</a:t>
-            </a:r>
-            <a:endParaRPr lang="en-US" sz="1500" dirty="0"/>
-          </a:p>
-        </p:txBody>
-      </p:sp>
-      <p:sp>
-        <p:nvSpPr>
-          <p:cNvPr id="6" name="Shape 4"/>
-          <p:cNvSpPr/>
-          <p:nvPr/>
-        </p:nvSpPr>
-        <p:spPr>
-          <a:xfrm>
-            <a:off x="457200" y="2331720"/>
-            <a:ext cx="1828800" cy="1188720"/>
-          </a:xfrm>
-          <a:prstGeom prst="roundRect">
-            <a:avLst>
-              <a:gd name="adj" fmla="val 6154"/>
-            </a:avLst>
+              <a:spcAft>
+                <a:spcPts val="200"/>
+              </a:spcAft>
+              <a:buNone/>
+            </a:pPr>
+            <a:r>
+              <a:rPr lang="en-US" sz="1100" dirty="0">
+                <a:solidFill>
+                  <a:srgbClr val="1A1F36"/>
+                </a:solidFill>
+                <a:latin typeface="Calibri" pitchFamily="34" charset="0"/>
+                <a:ea typeface="Calibri" pitchFamily="34" charset="-122"/>
+                <a:cs typeface="Calibri" pitchFamily="34" charset="-120"/>
+              </a:rPr>
+              <a:t>The protocol-layer enforcement point. Every agent → tool call flows through it.</a:t>
+            </a:r>
+            <a:endParaRPr lang="en-US" sz="1100" dirty="0"/>
+          </a:p>
+          <a:p>
+            <a:pPr indent="0" marL="0">
+              <a:spcAft>
+                <a:spcPts val="200"/>
+              </a:spcAft>
+              <a:buNone/>
+            </a:pPr>
+            <a:endParaRPr lang="en-US" sz="1100" dirty="0"/>
+          </a:p>
+          <a:p>
+            <a:pPr indent="0" marL="0">
+              <a:spcAft>
+                <a:spcPts val="200"/>
+              </a:spcAft>
+              <a:buNone/>
+            </a:pPr>
+            <a:r>
+              <a:rPr lang="en-US" sz="1100" dirty="0">
+                <a:solidFill>
+                  <a:srgbClr val="1A1F36"/>
+                </a:solidFill>
+                <a:latin typeface="Calibri" pitchFamily="34" charset="0"/>
+                <a:ea typeface="Calibri" pitchFamily="34" charset="-122"/>
+                <a:cs typeface="Calibri" pitchFamily="34" charset="-120"/>
+              </a:rPr>
+              <a:t>Identity-aware, loggable, policy-checkable.</a:t>
+            </a:r>
+            <a:endParaRPr lang="en-US" sz="1100" dirty="0"/>
+          </a:p>
+        </p:txBody>
+      </p:sp>
+      <p:sp>
+        <p:nvSpPr>
+          <p:cNvPr id="11" name="Text 9"/>
+          <p:cNvSpPr/>
+          <p:nvPr/>
+        </p:nvSpPr>
+        <p:spPr>
+          <a:xfrm>
+            <a:off x="640080" y="4187952"/>
+            <a:ext cx="2194560" cy="256032"/>
+          </a:xfrm>
+          <a:prstGeom prst="rect">
+            <a:avLst/>
+          </a:prstGeom>
+          <a:noFill/>
+          <a:ln/>
+        </p:spPr>
+        <p:txBody>
+          <a:bodyPr wrap="square" lIns="0" tIns="0" rIns="0" bIns="0" rtlCol="0" anchor="ctr"/>
+          <a:lstStyle/>
+          <a:p>
+            <a:pPr indent="0" marL="0">
+              <a:buNone/>
+            </a:pPr>
+            <a:r>
+              <a:rPr lang="en-US" sz="1000" b="1" i="1" dirty="0">
+                <a:solidFill>
+                  <a:srgbClr val="02C39A"/>
+                </a:solidFill>
+                <a:latin typeface="Calibri" pitchFamily="34" charset="0"/>
+                <a:ea typeface="Calibri" pitchFamily="34" charset="-122"/>
+                <a:cs typeface="Calibri" pitchFamily="34" charset="-120"/>
+              </a:rPr>
+              <a:t>Eng research starts here.</a:t>
+            </a:r>
+            <a:endParaRPr lang="en-US" sz="1000" dirty="0"/>
+          </a:p>
+        </p:txBody>
+      </p:sp>
+      <p:sp>
+        <p:nvSpPr>
+          <p:cNvPr id="12" name="Shape 10"/>
+          <p:cNvSpPr/>
+          <p:nvPr/>
+        </p:nvSpPr>
+        <p:spPr>
+          <a:xfrm>
+            <a:off x="3200400" y="2011680"/>
+            <a:ext cx="2743200" cy="2468880"/>
+          </a:xfrm>
+          <a:prstGeom prst="rect">
+            <a:avLst/>
           </a:prstGeom>
           <a:solidFill>
-            <a:srgbClr val="1A2545"/>
+            <a:srgbClr val="FFFFFF"/>
           </a:solidFill>
           <a:ln w="12700">
             <a:solidFill>
-              <a:srgbClr val="E8EEFC"/>
+              <a:srgbClr val="CBD5E1"/>
             </a:solidFill>
             <a:prstDash val="solid"/>
           </a:ln>
@@ -5619,143 +6605,22 @@
       </p:sp>
       <p:sp>
         <p:nvSpPr>
-          <p:cNvPr id="7" name="Text 5"/>
-          <p:cNvSpPr/>
-          <p:nvPr/>
-        </p:nvSpPr>
-        <p:spPr>
-          <a:xfrm>
-            <a:off x="457200" y="2423160"/>
-            <a:ext cx="1828800" cy="320040"/>
-          </a:xfrm>
-          <a:prstGeom prst="rect">
-            <a:avLst/>
-          </a:prstGeom>
-          <a:noFill/>
-          <a:ln/>
-        </p:spPr>
-        <p:txBody>
-          <a:bodyPr wrap="square" lIns="0" tIns="0" rIns="0" bIns="0" rtlCol="0" anchor="ctr"/>
-          <a:lstStyle/>
-          <a:p>
-            <a:pPr algn="ctr" indent="0" marL="0">
-              <a:buNone/>
-            </a:pPr>
-            <a:r>
-              <a:rPr lang="en-US" sz="1000" b="1" spc="300" kern="0" dirty="0">
-                <a:solidFill>
-                  <a:srgbClr val="64748B"/>
-                </a:solidFill>
-                <a:latin typeface="Calibri" pitchFamily="34" charset="0"/>
-                <a:ea typeface="Calibri" pitchFamily="34" charset="-122"/>
-                <a:cs typeface="Calibri" pitchFamily="34" charset="-120"/>
-              </a:rPr>
-              <a:t>AGENT</a:t>
-            </a:r>
-            <a:endParaRPr lang="en-US" sz="1000" dirty="0"/>
-          </a:p>
-        </p:txBody>
-      </p:sp>
-      <p:sp>
-        <p:nvSpPr>
-          <p:cNvPr id="8" name="Text 6"/>
-          <p:cNvSpPr/>
-          <p:nvPr/>
-        </p:nvSpPr>
-        <p:spPr>
-          <a:xfrm>
-            <a:off x="457200" y="2788920"/>
-            <a:ext cx="1828800" cy="685800"/>
-          </a:xfrm>
-          <a:prstGeom prst="rect">
-            <a:avLst/>
-          </a:prstGeom>
-          <a:noFill/>
-          <a:ln/>
-        </p:spPr>
-        <p:txBody>
-          <a:bodyPr wrap="square" lIns="0" tIns="0" rIns="0" bIns="0" rtlCol="0" anchor="ctr"/>
-          <a:lstStyle/>
-          <a:p>
-            <a:pPr algn="ctr" indent="0" marL="0">
-              <a:buNone/>
-            </a:pPr>
-            <a:r>
-              <a:rPr lang="en-US" sz="1200" dirty="0">
-                <a:solidFill>
-                  <a:srgbClr val="FFFFFF"/>
-                </a:solidFill>
-                <a:latin typeface="Calibri" pitchFamily="34" charset="0"/>
-                <a:ea typeface="Calibri" pitchFamily="34" charset="-122"/>
-                <a:cs typeface="Calibri" pitchFamily="34" charset="-120"/>
-              </a:rPr>
-              <a:t>ChatGPT · Claude</a:t>
-            </a:r>
-            <a:endParaRPr lang="en-US" sz="1200" dirty="0"/>
-          </a:p>
-          <a:p>
-            <a:pPr algn="ctr" indent="0" marL="0">
-              <a:buNone/>
-            </a:pPr>
-            <a:r>
-              <a:rPr lang="en-US" sz="1200" dirty="0">
-                <a:solidFill>
-                  <a:srgbClr val="FFFFFF"/>
-                </a:solidFill>
-                <a:latin typeface="Calibri" pitchFamily="34" charset="0"/>
-                <a:ea typeface="Calibri" pitchFamily="34" charset="-122"/>
-                <a:cs typeface="Calibri" pitchFamily="34" charset="-120"/>
-              </a:rPr>
-              <a:t>Cursor · n8n</a:t>
-            </a:r>
-            <a:endParaRPr lang="en-US" sz="1200" dirty="0"/>
-          </a:p>
-        </p:txBody>
-      </p:sp>
-      <p:sp>
-        <p:nvSpPr>
-          <p:cNvPr id="9" name="Shape 7"/>
-          <p:cNvSpPr/>
-          <p:nvPr/>
-        </p:nvSpPr>
-        <p:spPr>
-          <a:xfrm>
-            <a:off x="2331720" y="2926080"/>
-            <a:ext cx="685800" cy="0"/>
-          </a:xfrm>
-          <a:prstGeom prst="line">
-            <a:avLst/>
-          </a:prstGeom>
-          <a:noFill/>
-          <a:ln w="25400">
-            <a:solidFill>
-              <a:srgbClr val="02C39A"/>
-            </a:solidFill>
-            <a:prstDash val="solid"/>
-            <a:tailEnd type="triangle"/>
-          </a:ln>
-        </p:spPr>
-      </p:sp>
-      <p:sp>
-        <p:nvSpPr>
-          <p:cNvPr id="10" name="Shape 8"/>
-          <p:cNvSpPr/>
-          <p:nvPr/>
-        </p:nvSpPr>
-        <p:spPr>
-          <a:xfrm>
-            <a:off x="3108960" y="2194560"/>
-            <a:ext cx="2926080" cy="1463040"/>
-          </a:xfrm>
-          <a:prstGeom prst="roundRect">
-            <a:avLst>
-              <a:gd name="adj" fmla="val 6250"/>
-            </a:avLst>
+          <p:cNvPr id="13" name="Shape 11"/>
+          <p:cNvSpPr/>
+          <p:nvPr/>
+        </p:nvSpPr>
+        <p:spPr>
+          <a:xfrm>
+            <a:off x="3200400" y="2011680"/>
+            <a:ext cx="2743200" cy="73152"/>
+          </a:xfrm>
+          <a:prstGeom prst="rect">
+            <a:avLst/>
           </a:prstGeom>
           <a:solidFill>
-            <a:srgbClr val="0F1B3D"/>
+            <a:srgbClr val="02C39A"/>
           </a:solidFill>
-          <a:ln w="38100">
+          <a:ln w="12700">
             <a:solidFill>
               <a:srgbClr val="02C39A"/>
             </a:solidFill>
@@ -5765,30 +6630,30 @@
       </p:sp>
       <p:sp>
         <p:nvSpPr>
-          <p:cNvPr id="11" name="Text 9"/>
-          <p:cNvSpPr/>
-          <p:nvPr/>
-        </p:nvSpPr>
-        <p:spPr>
-          <a:xfrm>
-            <a:off x="3108960" y="2331720"/>
-            <a:ext cx="2926080" cy="365760"/>
-          </a:xfrm>
-          <a:prstGeom prst="rect">
-            <a:avLst/>
-          </a:prstGeom>
-          <a:noFill/>
-          <a:ln/>
-        </p:spPr>
-        <p:txBody>
-          <a:bodyPr wrap="square" lIns="0" tIns="0" rIns="0" bIns="0" rtlCol="0" anchor="ctr"/>
-          <a:lstStyle/>
-          <a:p>
-            <a:pPr algn="ctr" indent="0" marL="0">
-              <a:buNone/>
-            </a:pPr>
-            <a:r>
-              <a:rPr lang="en-US" sz="1300" b="1" spc="400" kern="0" dirty="0">
+          <p:cNvPr id="14" name="Text 12"/>
+          <p:cNvSpPr/>
+          <p:nvPr/>
+        </p:nvSpPr>
+        <p:spPr>
+          <a:xfrm>
+            <a:off x="3474720" y="2194560"/>
+            <a:ext cx="914400" cy="320040"/>
+          </a:xfrm>
+          <a:prstGeom prst="rect">
+            <a:avLst/>
+          </a:prstGeom>
+          <a:noFill/>
+          <a:ln/>
+        </p:spPr>
+        <p:txBody>
+          <a:bodyPr wrap="square" lIns="0" tIns="0" rIns="0" bIns="0" rtlCol="0" anchor="ctr"/>
+          <a:lstStyle/>
+          <a:p>
+            <a:pPr indent="0" marL="0">
+              <a:buNone/>
+            </a:pPr>
+            <a:r>
+              <a:rPr lang="en-US" sz="1100" b="1" spc="300" kern="0" dirty="0">
                 <a:solidFill>
                   <a:srgbClr val="02C39A"/>
                 </a:solidFill>
@@ -5796,136 +6661,450 @@
                 <a:ea typeface="Calibri" pitchFamily="34" charset="-122"/>
                 <a:cs typeface="Calibri" pitchFamily="34" charset="-120"/>
               </a:rPr>
-              <a:t>MCP GATEWAY</a:t>
-            </a:r>
-            <a:endParaRPr lang="en-US" sz="1300" dirty="0"/>
-          </a:p>
-        </p:txBody>
-      </p:sp>
-      <p:sp>
-        <p:nvSpPr>
-          <p:cNvPr id="12" name="Text 10"/>
-          <p:cNvSpPr/>
-          <p:nvPr/>
-        </p:nvSpPr>
-        <p:spPr>
-          <a:xfrm>
-            <a:off x="3108960" y="2743200"/>
-            <a:ext cx="2926080" cy="274320"/>
-          </a:xfrm>
-          <a:prstGeom prst="rect">
-            <a:avLst/>
-          </a:prstGeom>
-          <a:noFill/>
-          <a:ln/>
-        </p:spPr>
-        <p:txBody>
-          <a:bodyPr wrap="square" lIns="0" tIns="0" rIns="0" bIns="0" rtlCol="0" anchor="ctr"/>
-          <a:lstStyle/>
-          <a:p>
-            <a:pPr algn="ctr" indent="0" marL="0">
-              <a:buNone/>
-            </a:pPr>
-            <a:r>
-              <a:rPr lang="en-US" sz="1300" i="1" dirty="0">
-                <a:solidFill>
-                  <a:srgbClr val="FFFFFF"/>
-                </a:solidFill>
-                <a:latin typeface="Calibri" pitchFamily="34" charset="0"/>
-                <a:ea typeface="Calibri" pitchFamily="34" charset="-122"/>
-                <a:cs typeface="Calibri" pitchFamily="34" charset="-120"/>
-              </a:rPr>
-              <a:t>identity · policy · audit</a:t>
-            </a:r>
-            <a:endParaRPr lang="en-US" sz="1300" dirty="0"/>
-          </a:p>
-        </p:txBody>
-      </p:sp>
-      <p:sp>
-        <p:nvSpPr>
-          <p:cNvPr id="13" name="Text 11"/>
-          <p:cNvSpPr/>
-          <p:nvPr/>
-        </p:nvSpPr>
-        <p:spPr>
-          <a:xfrm>
-            <a:off x="3108960" y="3108960"/>
-            <a:ext cx="2926080" cy="274320"/>
-          </a:xfrm>
-          <a:prstGeom prst="rect">
-            <a:avLst/>
-          </a:prstGeom>
-          <a:noFill/>
-          <a:ln/>
-        </p:spPr>
-        <p:txBody>
-          <a:bodyPr wrap="square" lIns="0" tIns="0" rIns="0" bIns="0" rtlCol="0" anchor="ctr"/>
-          <a:lstStyle/>
-          <a:p>
-            <a:pPr algn="ctr" indent="0" marL="0">
-              <a:buNone/>
-            </a:pPr>
-            <a:r>
-              <a:rPr lang="en-US" sz="1000" dirty="0">
-                <a:solidFill>
-                  <a:srgbClr val="E8EEFC"/>
-                </a:solidFill>
-                <a:latin typeface="Calibri" pitchFamily="34" charset="0"/>
-                <a:ea typeface="Calibri" pitchFamily="34" charset="-122"/>
-                <a:cs typeface="Calibri" pitchFamily="34" charset="-120"/>
-              </a:rPr>
-              <a:t>every call, policy-checked</a:t>
-            </a:r>
-            <a:endParaRPr lang="en-US" sz="1000" dirty="0"/>
-          </a:p>
-        </p:txBody>
-      </p:sp>
-      <p:sp>
-        <p:nvSpPr>
-          <p:cNvPr id="14" name="Shape 12"/>
-          <p:cNvSpPr/>
-          <p:nvPr/>
-        </p:nvSpPr>
-        <p:spPr>
-          <a:xfrm>
-            <a:off x="6080760" y="2926080"/>
-            <a:ext cx="685800" cy="0"/>
-          </a:xfrm>
-          <a:prstGeom prst="line">
-            <a:avLst/>
-          </a:prstGeom>
-          <a:noFill/>
-          <a:ln w="25400">
+              <a:t>02</a:t>
+            </a:r>
+            <a:endParaRPr lang="en-US" sz="1100" dirty="0"/>
+          </a:p>
+        </p:txBody>
+      </p:sp>
+      <p:sp>
+        <p:nvSpPr>
+          <p:cNvPr id="15" name="Text 13"/>
+          <p:cNvSpPr/>
+          <p:nvPr/>
+        </p:nvSpPr>
+        <p:spPr>
+          <a:xfrm>
+            <a:off x="3474720" y="2514600"/>
+            <a:ext cx="2194560" cy="457200"/>
+          </a:xfrm>
+          <a:prstGeom prst="rect">
+            <a:avLst/>
+          </a:prstGeom>
+          <a:noFill/>
+          <a:ln/>
+        </p:spPr>
+        <p:txBody>
+          <a:bodyPr wrap="square" lIns="0" tIns="0" rIns="0" bIns="0" rtlCol="0" anchor="ctr"/>
+          <a:lstStyle/>
+          <a:p>
+            <a:pPr indent="0" marL="0">
+              <a:buNone/>
+            </a:pPr>
+            <a:r>
+              <a:rPr lang="en-US" sz="1800" b="1" dirty="0">
+                <a:solidFill>
+                  <a:srgbClr val="0F1B3D"/>
+                </a:solidFill>
+                <a:latin typeface="Georgia" pitchFamily="34" charset="0"/>
+                <a:ea typeface="Georgia" pitchFamily="34" charset="-122"/>
+                <a:cs typeface="Georgia" pitchFamily="34" charset="-120"/>
+              </a:rPr>
+              <a:t>Policy Agent</a:t>
+            </a:r>
+            <a:endParaRPr lang="en-US" sz="1800" dirty="0"/>
+          </a:p>
+        </p:txBody>
+      </p:sp>
+      <p:sp>
+        <p:nvSpPr>
+          <p:cNvPr id="16" name="Text 14"/>
+          <p:cNvSpPr/>
+          <p:nvPr/>
+        </p:nvSpPr>
+        <p:spPr>
+          <a:xfrm>
+            <a:off x="3474720" y="3017520"/>
+            <a:ext cx="2194560" cy="1325880"/>
+          </a:xfrm>
+          <a:prstGeom prst="rect">
+            <a:avLst/>
+          </a:prstGeom>
+          <a:noFill/>
+          <a:ln/>
+        </p:spPr>
+        <p:txBody>
+          <a:bodyPr wrap="square" lIns="0" tIns="0" rIns="0" bIns="0" rtlCol="0" anchor="ctr"/>
+          <a:lstStyle/>
+          <a:p>
+            <a:pPr indent="0" marL="0">
+              <a:spcAft>
+                <a:spcPts val="200"/>
+              </a:spcAft>
+              <a:buNone/>
+            </a:pPr>
+            <a:r>
+              <a:rPr lang="en-US" sz="1100" dirty="0">
+                <a:solidFill>
+                  <a:srgbClr val="1A1F36"/>
+                </a:solidFill>
+                <a:latin typeface="Calibri" pitchFamily="34" charset="0"/>
+                <a:ea typeface="Calibri" pitchFamily="34" charset="-122"/>
+                <a:cs typeface="Calibri" pitchFamily="34" charset="-120"/>
+              </a:rPr>
+              <a:t>Access profiles for agents:</a:t>
+            </a:r>
+            <a:endParaRPr lang="en-US" sz="1100" dirty="0"/>
+          </a:p>
+          <a:p>
+            <a:pPr indent="0" marL="0">
+              <a:spcAft>
+                <a:spcPts val="200"/>
+              </a:spcAft>
+              <a:buNone/>
+            </a:pPr>
+            <a:endParaRPr lang="en-US" sz="1100" dirty="0"/>
+          </a:p>
+          <a:p>
+            <a:pPr indent="0" marL="0">
+              <a:spcAft>
+                <a:spcPts val="200"/>
+              </a:spcAft>
+              <a:buNone/>
+            </a:pPr>
+            <a:r>
+              <a:rPr lang="en-US" sz="1100" dirty="0">
+                <a:solidFill>
+                  <a:srgbClr val="1A1F36"/>
+                </a:solidFill>
+                <a:latin typeface="Calibri" pitchFamily="34" charset="0"/>
+                <a:ea typeface="Calibri" pitchFamily="34" charset="-122"/>
+                <a:cs typeface="Calibri" pitchFamily="34" charset="-120"/>
+              </a:rPr>
+              <a:t>• At the MCP / platform level</a:t>
+            </a:r>
+            <a:endParaRPr lang="en-US" sz="1100" dirty="0"/>
+          </a:p>
+          <a:p>
+            <a:pPr indent="0" marL="0">
+              <a:spcAft>
+                <a:spcPts val="200"/>
+              </a:spcAft>
+              <a:buNone/>
+            </a:pPr>
+            <a:r>
+              <a:rPr lang="en-US" sz="1100" dirty="0">
+                <a:solidFill>
+                  <a:srgbClr val="1A1F36"/>
+                </a:solidFill>
+                <a:latin typeface="Calibri" pitchFamily="34" charset="0"/>
+                <a:ea typeface="Calibri" pitchFamily="34" charset="-122"/>
+                <a:cs typeface="Calibri" pitchFamily="34" charset="-120"/>
+              </a:rPr>
+              <a:t>• AND at the individual tool level</a:t>
+            </a:r>
+            <a:endParaRPr lang="en-US" sz="1100" dirty="0"/>
+          </a:p>
+          <a:p>
+            <a:pPr indent="0" marL="0">
+              <a:spcAft>
+                <a:spcPts val="200"/>
+              </a:spcAft>
+              <a:buNone/>
+            </a:pPr>
+            <a:endParaRPr lang="en-US" sz="1100" dirty="0"/>
+          </a:p>
+          <a:p>
+            <a:pPr indent="0" marL="0">
+              <a:spcAft>
+                <a:spcPts val="200"/>
+              </a:spcAft>
+              <a:buNone/>
+            </a:pPr>
+            <a:r>
+              <a:rPr lang="en-US" sz="1100" dirty="0">
+                <a:solidFill>
+                  <a:srgbClr val="1A1F36"/>
+                </a:solidFill>
+                <a:latin typeface="Calibri" pitchFamily="34" charset="0"/>
+                <a:ea typeface="Calibri" pitchFamily="34" charset="-122"/>
+                <a:cs typeface="Calibri" pitchFamily="34" charset="-120"/>
+              </a:rPr>
+              <a:t>Granular, not binary.</a:t>
+            </a:r>
+            <a:endParaRPr lang="en-US" sz="1100" dirty="0"/>
+          </a:p>
+        </p:txBody>
+      </p:sp>
+      <p:sp>
+        <p:nvSpPr>
+          <p:cNvPr id="17" name="Shape 15"/>
+          <p:cNvSpPr/>
+          <p:nvPr/>
+        </p:nvSpPr>
+        <p:spPr>
+          <a:xfrm>
+            <a:off x="6035040" y="2011680"/>
+            <a:ext cx="2743200" cy="2468880"/>
+          </a:xfrm>
+          <a:prstGeom prst="rect">
+            <a:avLst/>
+          </a:prstGeom>
+          <a:solidFill>
+            <a:srgbClr val="FFFFFF"/>
+          </a:solidFill>
+          <a:ln w="12700">
+            <a:solidFill>
+              <a:srgbClr val="CBD5E1"/>
+            </a:solidFill>
+            <a:prstDash val="solid"/>
+          </a:ln>
+        </p:spPr>
+      </p:sp>
+      <p:sp>
+        <p:nvSpPr>
+          <p:cNvPr id="18" name="Shape 16"/>
+          <p:cNvSpPr/>
+          <p:nvPr/>
+        </p:nvSpPr>
+        <p:spPr>
+          <a:xfrm>
+            <a:off x="6035040" y="2011680"/>
+            <a:ext cx="2743200" cy="73152"/>
+          </a:xfrm>
+          <a:prstGeom prst="rect">
+            <a:avLst/>
+          </a:prstGeom>
+          <a:solidFill>
+            <a:srgbClr val="02C39A"/>
+          </a:solidFill>
+          <a:ln w="12700">
             <a:solidFill>
               <a:srgbClr val="02C39A"/>
             </a:solidFill>
             <a:prstDash val="solid"/>
-            <a:tailEnd type="triangle"/>
           </a:ln>
         </p:spPr>
       </p:sp>
       <p:sp>
         <p:nvSpPr>
-          <p:cNvPr id="15" name="Shape 13"/>
-          <p:cNvSpPr/>
-          <p:nvPr/>
-        </p:nvSpPr>
-        <p:spPr>
-          <a:xfrm>
-            <a:off x="6858000" y="2331720"/>
-            <a:ext cx="1828800" cy="1188720"/>
-          </a:xfrm>
-          <a:prstGeom prst="roundRect">
-            <a:avLst>
-              <a:gd name="adj" fmla="val 6154"/>
-            </a:avLst>
+          <p:cNvPr id="19" name="Text 17"/>
+          <p:cNvSpPr/>
+          <p:nvPr/>
+        </p:nvSpPr>
+        <p:spPr>
+          <a:xfrm>
+            <a:off x="6309360" y="2194560"/>
+            <a:ext cx="914400" cy="320040"/>
+          </a:xfrm>
+          <a:prstGeom prst="rect">
+            <a:avLst/>
+          </a:prstGeom>
+          <a:noFill/>
+          <a:ln/>
+        </p:spPr>
+        <p:txBody>
+          <a:bodyPr wrap="square" lIns="0" tIns="0" rIns="0" bIns="0" rtlCol="0" anchor="ctr"/>
+          <a:lstStyle/>
+          <a:p>
+            <a:pPr indent="0" marL="0">
+              <a:buNone/>
+            </a:pPr>
+            <a:r>
+              <a:rPr lang="en-US" sz="1100" b="1" spc="300" kern="0" dirty="0">
+                <a:solidFill>
+                  <a:srgbClr val="02C39A"/>
+                </a:solidFill>
+                <a:latin typeface="Calibri" pitchFamily="34" charset="0"/>
+                <a:ea typeface="Calibri" pitchFamily="34" charset="-122"/>
+                <a:cs typeface="Calibri" pitchFamily="34" charset="-120"/>
+              </a:rPr>
+              <a:t>03</a:t>
+            </a:r>
+            <a:endParaRPr lang="en-US" sz="1100" dirty="0"/>
+          </a:p>
+        </p:txBody>
+      </p:sp>
+      <p:sp>
+        <p:nvSpPr>
+          <p:cNvPr id="20" name="Text 18"/>
+          <p:cNvSpPr/>
+          <p:nvPr/>
+        </p:nvSpPr>
+        <p:spPr>
+          <a:xfrm>
+            <a:off x="6309360" y="2514600"/>
+            <a:ext cx="2194560" cy="457200"/>
+          </a:xfrm>
+          <a:prstGeom prst="rect">
+            <a:avLst/>
+          </a:prstGeom>
+          <a:noFill/>
+          <a:ln/>
+        </p:spPr>
+        <p:txBody>
+          <a:bodyPr wrap="square" lIns="0" tIns="0" rIns="0" bIns="0" rtlCol="0" anchor="ctr"/>
+          <a:lstStyle/>
+          <a:p>
+            <a:pPr indent="0" marL="0">
+              <a:buNone/>
+            </a:pPr>
+            <a:r>
+              <a:rPr lang="en-US" sz="1800" b="1" dirty="0">
+                <a:solidFill>
+                  <a:srgbClr val="0F1B3D"/>
+                </a:solidFill>
+                <a:latin typeface="Georgia" pitchFamily="34" charset="0"/>
+                <a:ea typeface="Georgia" pitchFamily="34" charset="-122"/>
+                <a:cs typeface="Georgia" pitchFamily="34" charset="-120"/>
+              </a:rPr>
+              <a:t>Screens</a:t>
+            </a:r>
+            <a:endParaRPr lang="en-US" sz="1800" dirty="0"/>
+          </a:p>
+        </p:txBody>
+      </p:sp>
+      <p:sp>
+        <p:nvSpPr>
+          <p:cNvPr id="21" name="Text 19"/>
+          <p:cNvSpPr/>
+          <p:nvPr/>
+        </p:nvSpPr>
+        <p:spPr>
+          <a:xfrm>
+            <a:off x="6309360" y="3017520"/>
+            <a:ext cx="2194560" cy="1325880"/>
+          </a:xfrm>
+          <a:prstGeom prst="rect">
+            <a:avLst/>
+          </a:prstGeom>
+          <a:noFill/>
+          <a:ln/>
+        </p:spPr>
+        <p:txBody>
+          <a:bodyPr wrap="square" lIns="0" tIns="0" rIns="0" bIns="0" rtlCol="0" anchor="ctr"/>
+          <a:lstStyle/>
+          <a:p>
+            <a:pPr indent="0" marL="0">
+              <a:spcAft>
+                <a:spcPts val="200"/>
+              </a:spcAft>
+              <a:buNone/>
+            </a:pPr>
+            <a:r>
+              <a:rPr lang="en-US" sz="1100" dirty="0">
+                <a:solidFill>
+                  <a:srgbClr val="1A1F36"/>
+                </a:solidFill>
+                <a:latin typeface="Calibri" pitchFamily="34" charset="0"/>
+                <a:ea typeface="Calibri" pitchFamily="34" charset="-122"/>
+                <a:cs typeface="Calibri" pitchFamily="34" charset="-120"/>
+              </a:rPr>
+              <a:t>"Integration" tab for MCPs</a:t>
+            </a:r>
+            <a:endParaRPr lang="en-US" sz="1100" dirty="0"/>
+          </a:p>
+          <a:p>
+            <a:pPr indent="0" marL="0">
+              <a:spcAft>
+                <a:spcPts val="200"/>
+              </a:spcAft>
+              <a:buNone/>
+            </a:pPr>
+            <a:endParaRPr lang="en-US" sz="1100" dirty="0"/>
+          </a:p>
+          <a:p>
+            <a:pPr indent="0" marL="0">
+              <a:spcAft>
+                <a:spcPts val="200"/>
+              </a:spcAft>
+              <a:buNone/>
+            </a:pPr>
+            <a:r>
+              <a:rPr lang="en-US" sz="1100" dirty="0">
+                <a:solidFill>
+                  <a:srgbClr val="1A1F36"/>
+                </a:solidFill>
+                <a:latin typeface="Calibri" pitchFamily="34" charset="0"/>
+                <a:ea typeface="Calibri" pitchFamily="34" charset="-122"/>
+                <a:cs typeface="Calibri" pitchFamily="34" charset="-120"/>
+              </a:rPr>
+              <a:t>Logs — three views:</a:t>
+            </a:r>
+            <a:endParaRPr lang="en-US" sz="1100" dirty="0"/>
+          </a:p>
+          <a:p>
+            <a:pPr indent="0" marL="0">
+              <a:spcAft>
+                <a:spcPts val="200"/>
+              </a:spcAft>
+              <a:buNone/>
+            </a:pPr>
+            <a:r>
+              <a:rPr lang="en-US" sz="1100" dirty="0">
+                <a:solidFill>
+                  <a:srgbClr val="1A1F36"/>
+                </a:solidFill>
+                <a:latin typeface="Calibri" pitchFamily="34" charset="0"/>
+                <a:ea typeface="Calibri" pitchFamily="34" charset="-122"/>
+                <a:cs typeface="Calibri" pitchFamily="34" charset="-120"/>
+              </a:rPr>
+              <a:t>• System Logs</a:t>
+            </a:r>
+            <a:endParaRPr lang="en-US" sz="1100" dirty="0"/>
+          </a:p>
+          <a:p>
+            <a:pPr indent="0" marL="0">
+              <a:spcAft>
+                <a:spcPts val="200"/>
+              </a:spcAft>
+              <a:buNone/>
+            </a:pPr>
+            <a:r>
+              <a:rPr lang="en-US" sz="1100" dirty="0">
+                <a:solidFill>
+                  <a:srgbClr val="1A1F36"/>
+                </a:solidFill>
+                <a:latin typeface="Calibri" pitchFamily="34" charset="0"/>
+                <a:ea typeface="Calibri" pitchFamily="34" charset="-122"/>
+                <a:cs typeface="Calibri" pitchFamily="34" charset="-120"/>
+              </a:rPr>
+              <a:t>• Governance Logs</a:t>
+            </a:r>
+            <a:endParaRPr lang="en-US" sz="1100" dirty="0"/>
+          </a:p>
+          <a:p>
+            <a:pPr indent="0" marL="0">
+              <a:spcAft>
+                <a:spcPts val="200"/>
+              </a:spcAft>
+              <a:buNone/>
+            </a:pPr>
+            <a:r>
+              <a:rPr lang="en-US" sz="1100" dirty="0">
+                <a:solidFill>
+                  <a:srgbClr val="1A1F36"/>
+                </a:solidFill>
+                <a:latin typeface="Calibri" pitchFamily="34" charset="0"/>
+                <a:ea typeface="Calibri" pitchFamily="34" charset="-122"/>
+                <a:cs typeface="Calibri" pitchFamily="34" charset="-120"/>
+              </a:rPr>
+              <a:t>• All Access Logs</a:t>
+            </a:r>
+            <a:endParaRPr lang="en-US" sz="1100" dirty="0"/>
+          </a:p>
+        </p:txBody>
+      </p:sp>
+      <p:sp>
+        <p:nvSpPr>
+          <p:cNvPr id="22" name="Shape 20"/>
+          <p:cNvSpPr/>
+          <p:nvPr/>
+        </p:nvSpPr>
+        <p:spPr>
+          <a:xfrm>
+            <a:off x="457200" y="4617720"/>
+            <a:ext cx="8229600" cy="365760"/>
+          </a:xfrm>
+          <a:prstGeom prst="rect">
+            <a:avLst/>
           </a:prstGeom>
           <a:solidFill>
-            <a:srgbClr val="1A2545"/>
+            <a:srgbClr val="0F1B3D"/>
           </a:solidFill>
           <a:ln w="12700">
             <a:solidFill>
-              <a:srgbClr val="E8EEFC"/>
+              <a:srgbClr val="0F1B3D"/>
             </a:solidFill>
             <a:prstDash val="solid"/>
           </a:ln>
@@ -5933,69 +7112,30 @@
       </p:sp>
       <p:sp>
         <p:nvSpPr>
-          <p:cNvPr id="16" name="Text 14"/>
-          <p:cNvSpPr/>
-          <p:nvPr/>
-        </p:nvSpPr>
-        <p:spPr>
-          <a:xfrm>
-            <a:off x="6858000" y="2423160"/>
-            <a:ext cx="1828800" cy="320040"/>
-          </a:xfrm>
-          <a:prstGeom prst="rect">
-            <a:avLst/>
-          </a:prstGeom>
-          <a:noFill/>
-          <a:ln/>
-        </p:spPr>
-        <p:txBody>
-          <a:bodyPr wrap="square" lIns="0" tIns="0" rIns="0" bIns="0" rtlCol="0" anchor="ctr"/>
-          <a:lstStyle/>
-          <a:p>
-            <a:pPr algn="ctr" indent="0" marL="0">
-              <a:buNone/>
-            </a:pPr>
-            <a:r>
-              <a:rPr lang="en-US" sz="1000" b="1" spc="200" kern="0" dirty="0">
-                <a:solidFill>
-                  <a:srgbClr val="64748B"/>
-                </a:solidFill>
-                <a:latin typeface="Calibri" pitchFamily="34" charset="0"/>
-                <a:ea typeface="Calibri" pitchFamily="34" charset="-122"/>
-                <a:cs typeface="Calibri" pitchFamily="34" charset="-120"/>
-              </a:rPr>
-              <a:t>APPS · TOOLS</a:t>
-            </a:r>
-            <a:endParaRPr lang="en-US" sz="1000" dirty="0"/>
-          </a:p>
-        </p:txBody>
-      </p:sp>
-      <p:sp>
-        <p:nvSpPr>
-          <p:cNvPr id="17" name="Text 15"/>
-          <p:cNvSpPr/>
-          <p:nvPr/>
-        </p:nvSpPr>
-        <p:spPr>
-          <a:xfrm>
-            <a:off x="6858000" y="2788920"/>
-            <a:ext cx="1828800" cy="685800"/>
-          </a:xfrm>
-          <a:prstGeom prst="rect">
-            <a:avLst/>
-          </a:prstGeom>
-          <a:noFill/>
-          <a:ln/>
-        </p:spPr>
-        <p:txBody>
-          <a:bodyPr wrap="square" lIns="0" tIns="0" rIns="0" bIns="0" rtlCol="0" anchor="ctr"/>
-          <a:lstStyle/>
-          <a:p>
-            <a:pPr algn="ctr" indent="0" marL="0">
-              <a:buNone/>
-            </a:pPr>
-            <a:r>
-              <a:rPr lang="en-US" sz="1200" dirty="0">
+          <p:cNvPr id="23" name="Text 21"/>
+          <p:cNvSpPr/>
+          <p:nvPr/>
+        </p:nvSpPr>
+        <p:spPr>
+          <a:xfrm>
+            <a:off x="640080" y="4617720"/>
+            <a:ext cx="7863840" cy="365760"/>
+          </a:xfrm>
+          <a:prstGeom prst="rect">
+            <a:avLst/>
+          </a:prstGeom>
+          <a:noFill/>
+          <a:ln/>
+        </p:spPr>
+        <p:txBody>
+          <a:bodyPr wrap="square" lIns="0" tIns="0" rIns="0" bIns="0" rtlCol="0" anchor="ctr"/>
+          <a:lstStyle/>
+          <a:p>
+            <a:pPr indent="0" marL="0">
+              <a:buNone/>
+            </a:pPr>
+            <a:r>
+              <a:rPr lang="en-US" sz="1200" b="1" dirty="0">
                 <a:solidFill>
                   <a:srgbClr val="FFFFFF"/>
                 </a:solidFill>
@@ -6003,113 +7143,15 @@
                 <a:ea typeface="Calibri" pitchFamily="34" charset="-122"/>
                 <a:cs typeface="Calibri" pitchFamily="34" charset="-120"/>
               </a:rPr>
-              <a:t>Slack · Linear</a:t>
+              <a:t>Identiverse · June 15 · harsh deadline.</a:t>
             </a:r>
             <a:endParaRPr lang="en-US" sz="1200" dirty="0"/>
           </a:p>
-          <a:p>
-            <a:pPr algn="ctr" indent="0" marL="0">
-              <a:buNone/>
-            </a:pPr>
-            <a:r>
-              <a:rPr lang="en-US" sz="1200" dirty="0">
-                <a:solidFill>
-                  <a:srgbClr val="FFFFFF"/>
-                </a:solidFill>
-                <a:latin typeface="Calibri" pitchFamily="34" charset="0"/>
-                <a:ea typeface="Calibri" pitchFamily="34" charset="-122"/>
-                <a:cs typeface="Calibri" pitchFamily="34" charset="-120"/>
-              </a:rPr>
-              <a:t>Notions · Postgres</a:t>
-            </a:r>
-            <a:endParaRPr lang="en-US" sz="1200" dirty="0"/>
-          </a:p>
-        </p:txBody>
-      </p:sp>
-      <p:sp>
-        <p:nvSpPr>
-          <p:cNvPr id="18" name="Text 16"/>
-          <p:cNvSpPr/>
-          <p:nvPr/>
-        </p:nvSpPr>
-        <p:spPr>
-          <a:xfrm>
-            <a:off x="457200" y="3794760"/>
-            <a:ext cx="8229600" cy="365760"/>
-          </a:xfrm>
-          <a:prstGeom prst="rect">
-            <a:avLst/>
-          </a:prstGeom>
-          <a:noFill/>
-          <a:ln/>
-        </p:spPr>
-        <p:txBody>
-          <a:bodyPr wrap="square" lIns="0" tIns="0" rIns="0" bIns="0" rtlCol="0" anchor="ctr"/>
-          <a:lstStyle/>
-          <a:p>
-            <a:pPr indent="0" marL="0">
-              <a:buNone/>
-            </a:pPr>
-            <a:r>
-              <a:rPr lang="en-US" sz="1200" b="1" dirty="0">
-                <a:solidFill>
-                  <a:srgbClr val="F59E0B"/>
-                </a:solidFill>
-                <a:latin typeface="Calibri" pitchFamily="34" charset="0"/>
-                <a:ea typeface="Calibri" pitchFamily="34" charset="-122"/>
-                <a:cs typeface="Calibri" pitchFamily="34" charset="-120"/>
-              </a:rPr>
-              <a:t>Status: concept / whiteboard.  </a:t>
-            </a:r>
-            <a:pPr indent="0" marL="0">
-              <a:buNone/>
-            </a:pPr>
-            <a:r>
-              <a:rPr lang="en-US" sz="1200" dirty="0">
-                <a:solidFill>
-                  <a:srgbClr val="E8EEFC"/>
-                </a:solidFill>
-                <a:latin typeface="Calibri" pitchFamily="34" charset="0"/>
-                <a:ea typeface="Calibri" pitchFamily="34" charset="-122"/>
-                <a:cs typeface="Calibri" pitchFamily="34" charset="-120"/>
-              </a:rPr>
-              <a:t>Sarit + Amir Ben Ami leading architecture.  </a:t>
-            </a:r>
-            <a:pPr indent="0" marL="0">
-              <a:buNone/>
-            </a:pPr>
-            <a:r>
-              <a:rPr lang="en-US" sz="1200" dirty="0">
-                <a:solidFill>
-                  <a:srgbClr val="E8EEFC"/>
-                </a:solidFill>
-                <a:latin typeface="Calibri" pitchFamily="34" charset="0"/>
-                <a:ea typeface="Calibri" pitchFamily="34" charset="-122"/>
-                <a:cs typeface="Calibri" pitchFamily="34" charset="-120"/>
-              </a:rPr>
-              <a:t>Cycle 79 AI priority.  </a:t>
-            </a:r>
-            <a:pPr indent="0" marL="0">
-              <a:buNone/>
-            </a:pPr>
-            <a:r>
-              <a:rPr lang="en-US" sz="1200" i="1" dirty="0">
-                <a:solidFill>
-                  <a:srgbClr val="E8EEFC"/>
-                </a:solidFill>
-                <a:latin typeface="Calibri" pitchFamily="34" charset="0"/>
-                <a:ea typeface="Calibri" pitchFamily="34" charset="-122"/>
-                <a:cs typeface="Calibri" pitchFamily="34" charset="-120"/>
-              </a:rPr>
-              <a:t>Market: Saviynt, Token Security, Astrix converging here.</a:t>
-            </a:r>
-            <a:endParaRPr lang="en-US" sz="1200" dirty="0"/>
-          </a:p>
-        </p:txBody>
-      </p:sp>
-      <p:sp>
-        <p:nvSpPr>
-          <p:cNvPr id="19" name="Text 17"/>
+        </p:txBody>
+      </p:sp>
+      <p:sp>
+        <p:nvSpPr>
+          <p:cNvPr id="24" name="Text 22"/>
           <p:cNvSpPr/>
           <p:nvPr/>
         </p:nvSpPr>
@@ -6134,13 +7176,13 @@
             <a:r>
               <a:rPr lang="en-US" sz="900" dirty="0">
                 <a:solidFill>
-                  <a:srgbClr val="E8EEFC"/>
-                </a:solidFill>
-                <a:latin typeface="Calibri" pitchFamily="34" charset="0"/>
-                <a:ea typeface="Calibri" pitchFamily="34" charset="-122"/>
-                <a:cs typeface="Calibri" pitchFamily="34" charset="-120"/>
-              </a:rPr>
-              <a:t>6 / 9</a:t>
+                  <a:srgbClr val="64748B"/>
+                </a:solidFill>
+                <a:latin typeface="Calibri" pitchFamily="34" charset="0"/>
+                <a:ea typeface="Calibri" pitchFamily="34" charset="-122"/>
+                <a:cs typeface="Calibri" pitchFamily="34" charset="-120"/>
+              </a:rPr>
+              <a:t>6 / 8</a:t>
             </a:r>
             <a:endParaRPr lang="en-US" sz="900" dirty="0"/>
           </a:p>
@@ -6236,7 +7278,7 @@
                 <a:ea typeface="Calibri" pitchFamily="34" charset="-122"/>
                 <a:cs typeface="Calibri" pitchFamily="34" charset="-120"/>
               </a:rPr>
-              <a:t>06 · P0 scope — the demo target</a:t>
+              <a:t>07 · Post-P0</a:t>
             </a:r>
             <a:endParaRPr lang="en-US" sz="1100" dirty="0"/>
           </a:p>
@@ -6275,7 +7317,7 @@
                 <a:ea typeface="Georgia" pitchFamily="34" charset="-122"/>
                 <a:cs typeface="Georgia" pitchFamily="34" charset="-120"/>
               </a:rPr>
-              <a:t>What we're building first.</a:t>
+              <a:t>Where this goes next.</a:t>
             </a:r>
             <a:endParaRPr lang="en-US" sz="3400" dirty="0"/>
           </a:p>
@@ -6283,63 +7325,24 @@
       </p:sp>
       <p:sp>
         <p:nvSpPr>
-          <p:cNvPr id="5" name="Text 3"/>
-          <p:cNvSpPr/>
-          <p:nvPr/>
-        </p:nvSpPr>
-        <p:spPr>
-          <a:xfrm>
-            <a:off x="457200" y="1554480"/>
-            <a:ext cx="8229600" cy="365760"/>
-          </a:xfrm>
-          <a:prstGeom prst="rect">
-            <a:avLst/>
-          </a:prstGeom>
-          <a:noFill/>
-          <a:ln/>
-        </p:spPr>
-        <p:txBody>
-          <a:bodyPr wrap="square" lIns="0" tIns="0" rIns="0" bIns="0" rtlCol="0" anchor="ctr"/>
-          <a:lstStyle/>
-          <a:p>
-            <a:pPr indent="0" marL="0">
-              <a:buNone/>
-            </a:pPr>
-            <a:r>
-              <a:rPr lang="en-US" sz="1200" i="1" dirty="0">
-                <a:solidFill>
-                  <a:srgbClr val="64748B"/>
-                </a:solidFill>
-                <a:latin typeface="Calibri" pitchFamily="34" charset="0"/>
-                <a:ea typeface="Calibri" pitchFamily="34" charset="-122"/>
-                <a:cs typeface="Calibri" pitchFamily="34" charset="-120"/>
-              </a:rPr>
-              <a:t>From Sarit's session. Some pieces may exist in M1/M2 — Omri will connect the dots.</a:t>
-            </a:r>
-            <a:endParaRPr lang="en-US" sz="1200" dirty="0"/>
-          </a:p>
-        </p:txBody>
-      </p:sp>
-      <p:sp>
-        <p:nvSpPr>
-          <p:cNvPr id="6" name="Shape 4"/>
-          <p:cNvSpPr/>
-          <p:nvPr/>
-        </p:nvSpPr>
-        <p:spPr>
-          <a:xfrm>
-            <a:off x="365760" y="2011680"/>
-            <a:ext cx="2743200" cy="2468880"/>
+          <p:cNvPr id="5" name="Shape 3"/>
+          <p:cNvSpPr/>
+          <p:nvPr/>
+        </p:nvSpPr>
+        <p:spPr>
+          <a:xfrm>
+            <a:off x="457200" y="1691640"/>
+            <a:ext cx="4160520" cy="1371600"/>
           </a:xfrm>
           <a:prstGeom prst="rect">
             <a:avLst/>
           </a:prstGeom>
           <a:solidFill>
-            <a:srgbClr val="FFFFFF"/>
+            <a:srgbClr val="E8EEFC"/>
           </a:solidFill>
           <a:ln w="12700">
             <a:solidFill>
-              <a:srgbClr val="CBD5E1"/>
+              <a:srgbClr val="E8EEFC"/>
             </a:solidFill>
             <a:prstDash val="solid"/>
           </a:ln>
@@ -6347,734 +7350,14 @@
       </p:sp>
       <p:sp>
         <p:nvSpPr>
-          <p:cNvPr id="7" name="Shape 5"/>
-          <p:cNvSpPr/>
-          <p:nvPr/>
-        </p:nvSpPr>
-        <p:spPr>
-          <a:xfrm>
-            <a:off x="365760" y="2011680"/>
-            <a:ext cx="2743200" cy="73152"/>
-          </a:xfrm>
-          <a:prstGeom prst="rect">
-            <a:avLst/>
-          </a:prstGeom>
-          <a:solidFill>
-            <a:srgbClr val="02C39A"/>
-          </a:solidFill>
-          <a:ln w="12700">
-            <a:solidFill>
-              <a:srgbClr val="02C39A"/>
-            </a:solidFill>
-            <a:prstDash val="solid"/>
-          </a:ln>
-        </p:spPr>
-      </p:sp>
-      <p:sp>
-        <p:nvSpPr>
-          <p:cNvPr id="8" name="Text 6"/>
-          <p:cNvSpPr/>
-          <p:nvPr/>
-        </p:nvSpPr>
-        <p:spPr>
-          <a:xfrm>
-            <a:off x="640080" y="2194560"/>
-            <a:ext cx="914400" cy="320040"/>
-          </a:xfrm>
-          <a:prstGeom prst="rect">
-            <a:avLst/>
-          </a:prstGeom>
-          <a:noFill/>
-          <a:ln/>
-        </p:spPr>
-        <p:txBody>
-          <a:bodyPr wrap="square" lIns="0" tIns="0" rIns="0" bIns="0" rtlCol="0" anchor="ctr"/>
-          <a:lstStyle/>
-          <a:p>
-            <a:pPr indent="0" marL="0">
-              <a:buNone/>
-            </a:pPr>
-            <a:r>
-              <a:rPr lang="en-US" sz="1100" b="1" spc="300" kern="0" dirty="0">
-                <a:solidFill>
-                  <a:srgbClr val="02C39A"/>
-                </a:solidFill>
-                <a:latin typeface="Calibri" pitchFamily="34" charset="0"/>
-                <a:ea typeface="Calibri" pitchFamily="34" charset="-122"/>
-                <a:cs typeface="Calibri" pitchFamily="34" charset="-120"/>
-              </a:rPr>
-              <a:t>01</a:t>
-            </a:r>
-            <a:endParaRPr lang="en-US" sz="1100" dirty="0"/>
-          </a:p>
-        </p:txBody>
-      </p:sp>
-      <p:sp>
-        <p:nvSpPr>
-          <p:cNvPr id="9" name="Text 7"/>
-          <p:cNvSpPr/>
-          <p:nvPr/>
-        </p:nvSpPr>
-        <p:spPr>
-          <a:xfrm>
-            <a:off x="640080" y="2514600"/>
-            <a:ext cx="2194560" cy="457200"/>
-          </a:xfrm>
-          <a:prstGeom prst="rect">
-            <a:avLst/>
-          </a:prstGeom>
-          <a:noFill/>
-          <a:ln/>
-        </p:spPr>
-        <p:txBody>
-          <a:bodyPr wrap="square" lIns="0" tIns="0" rIns="0" bIns="0" rtlCol="0" anchor="ctr"/>
-          <a:lstStyle/>
-          <a:p>
-            <a:pPr indent="0" marL="0">
-              <a:buNone/>
-            </a:pPr>
-            <a:r>
-              <a:rPr lang="en-US" sz="1800" b="1" dirty="0">
-                <a:solidFill>
-                  <a:srgbClr val="0F1B3D"/>
-                </a:solidFill>
-                <a:latin typeface="Georgia" pitchFamily="34" charset="0"/>
-                <a:ea typeface="Georgia" pitchFamily="34" charset="-122"/>
-                <a:cs typeface="Georgia" pitchFamily="34" charset="-120"/>
-              </a:rPr>
-              <a:t>Gateway Core</a:t>
-            </a:r>
-            <a:endParaRPr lang="en-US" sz="1800" dirty="0"/>
-          </a:p>
-        </p:txBody>
-      </p:sp>
-      <p:sp>
-        <p:nvSpPr>
-          <p:cNvPr id="10" name="Text 8"/>
-          <p:cNvSpPr/>
-          <p:nvPr/>
-        </p:nvSpPr>
-        <p:spPr>
-          <a:xfrm>
-            <a:off x="640080" y="3017520"/>
-            <a:ext cx="2194560" cy="1325880"/>
-          </a:xfrm>
-          <a:prstGeom prst="rect">
-            <a:avLst/>
-          </a:prstGeom>
-          <a:noFill/>
-          <a:ln/>
-        </p:spPr>
-        <p:txBody>
-          <a:bodyPr wrap="square" lIns="0" tIns="0" rIns="0" bIns="0" rtlCol="0" anchor="ctr"/>
-          <a:lstStyle/>
-          <a:p>
-            <a:pPr indent="0" marL="0">
-              <a:spcAft>
-                <a:spcPts val="200"/>
-              </a:spcAft>
-              <a:buNone/>
-            </a:pPr>
-            <a:r>
-              <a:rPr lang="en-US" sz="1100" dirty="0">
-                <a:solidFill>
-                  <a:srgbClr val="1A1F36"/>
-                </a:solidFill>
-                <a:latin typeface="Calibri" pitchFamily="34" charset="0"/>
-                <a:ea typeface="Calibri" pitchFamily="34" charset="-122"/>
-                <a:cs typeface="Calibri" pitchFamily="34" charset="-120"/>
-              </a:rPr>
-              <a:t>The protocol-layer enforcement point. Every agent → tool call flows through it.</a:t>
-            </a:r>
-            <a:endParaRPr lang="en-US" sz="1100" dirty="0"/>
-          </a:p>
-          <a:p>
-            <a:pPr indent="0" marL="0">
-              <a:spcAft>
-                <a:spcPts val="200"/>
-              </a:spcAft>
-              <a:buNone/>
-            </a:pPr>
-            <a:endParaRPr lang="en-US" sz="1100" dirty="0"/>
-          </a:p>
-          <a:p>
-            <a:pPr indent="0" marL="0">
-              <a:spcAft>
-                <a:spcPts val="200"/>
-              </a:spcAft>
-              <a:buNone/>
-            </a:pPr>
-            <a:r>
-              <a:rPr lang="en-US" sz="1100" dirty="0">
-                <a:solidFill>
-                  <a:srgbClr val="1A1F36"/>
-                </a:solidFill>
-                <a:latin typeface="Calibri" pitchFamily="34" charset="0"/>
-                <a:ea typeface="Calibri" pitchFamily="34" charset="-122"/>
-                <a:cs typeface="Calibri" pitchFamily="34" charset="-120"/>
-              </a:rPr>
-              <a:t>Identity-aware, loggable, policy-checkable.</a:t>
-            </a:r>
-            <a:endParaRPr lang="en-US" sz="1100" dirty="0"/>
-          </a:p>
-        </p:txBody>
-      </p:sp>
-      <p:sp>
-        <p:nvSpPr>
-          <p:cNvPr id="11" name="Text 9"/>
-          <p:cNvSpPr/>
-          <p:nvPr/>
-        </p:nvSpPr>
-        <p:spPr>
-          <a:xfrm>
-            <a:off x="640080" y="4187952"/>
-            <a:ext cx="2194560" cy="256032"/>
-          </a:xfrm>
-          <a:prstGeom prst="rect">
-            <a:avLst/>
-          </a:prstGeom>
-          <a:noFill/>
-          <a:ln/>
-        </p:spPr>
-        <p:txBody>
-          <a:bodyPr wrap="square" lIns="0" tIns="0" rIns="0" bIns="0" rtlCol="0" anchor="ctr"/>
-          <a:lstStyle/>
-          <a:p>
-            <a:pPr indent="0" marL="0">
-              <a:buNone/>
-            </a:pPr>
-            <a:r>
-              <a:rPr lang="en-US" sz="1000" b="1" i="1" dirty="0">
-                <a:solidFill>
-                  <a:srgbClr val="02C39A"/>
-                </a:solidFill>
-                <a:latin typeface="Calibri" pitchFamily="34" charset="0"/>
-                <a:ea typeface="Calibri" pitchFamily="34" charset="-122"/>
-                <a:cs typeface="Calibri" pitchFamily="34" charset="-120"/>
-              </a:rPr>
-              <a:t>Eng research starts here.</a:t>
-            </a:r>
-            <a:endParaRPr lang="en-US" sz="1000" dirty="0"/>
-          </a:p>
-        </p:txBody>
-      </p:sp>
-      <p:sp>
-        <p:nvSpPr>
-          <p:cNvPr id="12" name="Shape 10"/>
-          <p:cNvSpPr/>
-          <p:nvPr/>
-        </p:nvSpPr>
-        <p:spPr>
-          <a:xfrm>
-            <a:off x="3200400" y="2011680"/>
-            <a:ext cx="2743200" cy="2468880"/>
-          </a:xfrm>
-          <a:prstGeom prst="rect">
-            <a:avLst/>
-          </a:prstGeom>
-          <a:solidFill>
-            <a:srgbClr val="FFFFFF"/>
-          </a:solidFill>
-          <a:ln w="12700">
-            <a:solidFill>
-              <a:srgbClr val="CBD5E1"/>
-            </a:solidFill>
-            <a:prstDash val="solid"/>
-          </a:ln>
-        </p:spPr>
-      </p:sp>
-      <p:sp>
-        <p:nvSpPr>
-          <p:cNvPr id="13" name="Shape 11"/>
-          <p:cNvSpPr/>
-          <p:nvPr/>
-        </p:nvSpPr>
-        <p:spPr>
-          <a:xfrm>
-            <a:off x="3200400" y="2011680"/>
-            <a:ext cx="2743200" cy="73152"/>
-          </a:xfrm>
-          <a:prstGeom prst="rect">
-            <a:avLst/>
-          </a:prstGeom>
-          <a:solidFill>
-            <a:srgbClr val="02C39A"/>
-          </a:solidFill>
-          <a:ln w="12700">
-            <a:solidFill>
-              <a:srgbClr val="02C39A"/>
-            </a:solidFill>
-            <a:prstDash val="solid"/>
-          </a:ln>
-        </p:spPr>
-      </p:sp>
-      <p:sp>
-        <p:nvSpPr>
-          <p:cNvPr id="14" name="Text 12"/>
-          <p:cNvSpPr/>
-          <p:nvPr/>
-        </p:nvSpPr>
-        <p:spPr>
-          <a:xfrm>
-            <a:off x="3474720" y="2194560"/>
-            <a:ext cx="914400" cy="320040"/>
-          </a:xfrm>
-          <a:prstGeom prst="rect">
-            <a:avLst/>
-          </a:prstGeom>
-          <a:noFill/>
-          <a:ln/>
-        </p:spPr>
-        <p:txBody>
-          <a:bodyPr wrap="square" lIns="0" tIns="0" rIns="0" bIns="0" rtlCol="0" anchor="ctr"/>
-          <a:lstStyle/>
-          <a:p>
-            <a:pPr indent="0" marL="0">
-              <a:buNone/>
-            </a:pPr>
-            <a:r>
-              <a:rPr lang="en-US" sz="1100" b="1" spc="300" kern="0" dirty="0">
-                <a:solidFill>
-                  <a:srgbClr val="02C39A"/>
-                </a:solidFill>
-                <a:latin typeface="Calibri" pitchFamily="34" charset="0"/>
-                <a:ea typeface="Calibri" pitchFamily="34" charset="-122"/>
-                <a:cs typeface="Calibri" pitchFamily="34" charset="-120"/>
-              </a:rPr>
-              <a:t>02</a:t>
-            </a:r>
-            <a:endParaRPr lang="en-US" sz="1100" dirty="0"/>
-          </a:p>
-        </p:txBody>
-      </p:sp>
-      <p:sp>
-        <p:nvSpPr>
-          <p:cNvPr id="15" name="Text 13"/>
-          <p:cNvSpPr/>
-          <p:nvPr/>
-        </p:nvSpPr>
-        <p:spPr>
-          <a:xfrm>
-            <a:off x="3474720" y="2514600"/>
-            <a:ext cx="2194560" cy="457200"/>
-          </a:xfrm>
-          <a:prstGeom prst="rect">
-            <a:avLst/>
-          </a:prstGeom>
-          <a:noFill/>
-          <a:ln/>
-        </p:spPr>
-        <p:txBody>
-          <a:bodyPr wrap="square" lIns="0" tIns="0" rIns="0" bIns="0" rtlCol="0" anchor="ctr"/>
-          <a:lstStyle/>
-          <a:p>
-            <a:pPr indent="0" marL="0">
-              <a:buNone/>
-            </a:pPr>
-            <a:r>
-              <a:rPr lang="en-US" sz="1800" b="1" dirty="0">
-                <a:solidFill>
-                  <a:srgbClr val="0F1B3D"/>
-                </a:solidFill>
-                <a:latin typeface="Georgia" pitchFamily="34" charset="0"/>
-                <a:ea typeface="Georgia" pitchFamily="34" charset="-122"/>
-                <a:cs typeface="Georgia" pitchFamily="34" charset="-120"/>
-              </a:rPr>
-              <a:t>Policy Agent</a:t>
-            </a:r>
-            <a:endParaRPr lang="en-US" sz="1800" dirty="0"/>
-          </a:p>
-        </p:txBody>
-      </p:sp>
-      <p:sp>
-        <p:nvSpPr>
-          <p:cNvPr id="16" name="Text 14"/>
-          <p:cNvSpPr/>
-          <p:nvPr/>
-        </p:nvSpPr>
-        <p:spPr>
-          <a:xfrm>
-            <a:off x="3474720" y="3017520"/>
-            <a:ext cx="2194560" cy="1325880"/>
-          </a:xfrm>
-          <a:prstGeom prst="rect">
-            <a:avLst/>
-          </a:prstGeom>
-          <a:noFill/>
-          <a:ln/>
-        </p:spPr>
-        <p:txBody>
-          <a:bodyPr wrap="square" lIns="0" tIns="0" rIns="0" bIns="0" rtlCol="0" anchor="ctr"/>
-          <a:lstStyle/>
-          <a:p>
-            <a:pPr indent="0" marL="0">
-              <a:spcAft>
-                <a:spcPts val="200"/>
-              </a:spcAft>
-              <a:buNone/>
-            </a:pPr>
-            <a:r>
-              <a:rPr lang="en-US" sz="1100" dirty="0">
-                <a:solidFill>
-                  <a:srgbClr val="1A1F36"/>
-                </a:solidFill>
-                <a:latin typeface="Calibri" pitchFamily="34" charset="0"/>
-                <a:ea typeface="Calibri" pitchFamily="34" charset="-122"/>
-                <a:cs typeface="Calibri" pitchFamily="34" charset="-120"/>
-              </a:rPr>
-              <a:t>Access profiles for agents:</a:t>
-            </a:r>
-            <a:endParaRPr lang="en-US" sz="1100" dirty="0"/>
-          </a:p>
-          <a:p>
-            <a:pPr indent="0" marL="0">
-              <a:spcAft>
-                <a:spcPts val="200"/>
-              </a:spcAft>
-              <a:buNone/>
-            </a:pPr>
-            <a:endParaRPr lang="en-US" sz="1100" dirty="0"/>
-          </a:p>
-          <a:p>
-            <a:pPr indent="0" marL="0">
-              <a:spcAft>
-                <a:spcPts val="200"/>
-              </a:spcAft>
-              <a:buNone/>
-            </a:pPr>
-            <a:r>
-              <a:rPr lang="en-US" sz="1100" dirty="0">
-                <a:solidFill>
-                  <a:srgbClr val="1A1F36"/>
-                </a:solidFill>
-                <a:latin typeface="Calibri" pitchFamily="34" charset="0"/>
-                <a:ea typeface="Calibri" pitchFamily="34" charset="-122"/>
-                <a:cs typeface="Calibri" pitchFamily="34" charset="-120"/>
-              </a:rPr>
-              <a:t>• At the MCP / platform level</a:t>
-            </a:r>
-            <a:endParaRPr lang="en-US" sz="1100" dirty="0"/>
-          </a:p>
-          <a:p>
-            <a:pPr indent="0" marL="0">
-              <a:spcAft>
-                <a:spcPts val="200"/>
-              </a:spcAft>
-              <a:buNone/>
-            </a:pPr>
-            <a:r>
-              <a:rPr lang="en-US" sz="1100" dirty="0">
-                <a:solidFill>
-                  <a:srgbClr val="1A1F36"/>
-                </a:solidFill>
-                <a:latin typeface="Calibri" pitchFamily="34" charset="0"/>
-                <a:ea typeface="Calibri" pitchFamily="34" charset="-122"/>
-                <a:cs typeface="Calibri" pitchFamily="34" charset="-120"/>
-              </a:rPr>
-              <a:t>• AND at the individual tool level</a:t>
-            </a:r>
-            <a:endParaRPr lang="en-US" sz="1100" dirty="0"/>
-          </a:p>
-          <a:p>
-            <a:pPr indent="0" marL="0">
-              <a:spcAft>
-                <a:spcPts val="200"/>
-              </a:spcAft>
-              <a:buNone/>
-            </a:pPr>
-            <a:endParaRPr lang="en-US" sz="1100" dirty="0"/>
-          </a:p>
-          <a:p>
-            <a:pPr indent="0" marL="0">
-              <a:spcAft>
-                <a:spcPts val="200"/>
-              </a:spcAft>
-              <a:buNone/>
-            </a:pPr>
-            <a:r>
-              <a:rPr lang="en-US" sz="1100" dirty="0">
-                <a:solidFill>
-                  <a:srgbClr val="1A1F36"/>
-                </a:solidFill>
-                <a:latin typeface="Calibri" pitchFamily="34" charset="0"/>
-                <a:ea typeface="Calibri" pitchFamily="34" charset="-122"/>
-                <a:cs typeface="Calibri" pitchFamily="34" charset="-120"/>
-              </a:rPr>
-              <a:t>Granular, not binary.</a:t>
-            </a:r>
-            <a:endParaRPr lang="en-US" sz="1100" dirty="0"/>
-          </a:p>
-        </p:txBody>
-      </p:sp>
-      <p:sp>
-        <p:nvSpPr>
-          <p:cNvPr id="17" name="Shape 15"/>
-          <p:cNvSpPr/>
-          <p:nvPr/>
-        </p:nvSpPr>
-        <p:spPr>
-          <a:xfrm>
-            <a:off x="6035040" y="2011680"/>
-            <a:ext cx="2743200" cy="2468880"/>
-          </a:xfrm>
-          <a:prstGeom prst="rect">
-            <a:avLst/>
-          </a:prstGeom>
-          <a:solidFill>
-            <a:srgbClr val="FFFFFF"/>
-          </a:solidFill>
-          <a:ln w="12700">
-            <a:solidFill>
-              <a:srgbClr val="CBD5E1"/>
-            </a:solidFill>
-            <a:prstDash val="solid"/>
-          </a:ln>
-        </p:spPr>
-      </p:sp>
-      <p:sp>
-        <p:nvSpPr>
-          <p:cNvPr id="18" name="Shape 16"/>
-          <p:cNvSpPr/>
-          <p:nvPr/>
-        </p:nvSpPr>
-        <p:spPr>
-          <a:xfrm>
-            <a:off x="6035040" y="2011680"/>
-            <a:ext cx="2743200" cy="73152"/>
-          </a:xfrm>
-          <a:prstGeom prst="rect">
-            <a:avLst/>
-          </a:prstGeom>
-          <a:solidFill>
-            <a:srgbClr val="02C39A"/>
-          </a:solidFill>
-          <a:ln w="12700">
-            <a:solidFill>
-              <a:srgbClr val="02C39A"/>
-            </a:solidFill>
-            <a:prstDash val="solid"/>
-          </a:ln>
-        </p:spPr>
-      </p:sp>
-      <p:sp>
-        <p:nvSpPr>
-          <p:cNvPr id="19" name="Text 17"/>
-          <p:cNvSpPr/>
-          <p:nvPr/>
-        </p:nvSpPr>
-        <p:spPr>
-          <a:xfrm>
-            <a:off x="6309360" y="2194560"/>
-            <a:ext cx="914400" cy="320040"/>
-          </a:xfrm>
-          <a:prstGeom prst="rect">
-            <a:avLst/>
-          </a:prstGeom>
-          <a:noFill/>
-          <a:ln/>
-        </p:spPr>
-        <p:txBody>
-          <a:bodyPr wrap="square" lIns="0" tIns="0" rIns="0" bIns="0" rtlCol="0" anchor="ctr"/>
-          <a:lstStyle/>
-          <a:p>
-            <a:pPr indent="0" marL="0">
-              <a:buNone/>
-            </a:pPr>
-            <a:r>
-              <a:rPr lang="en-US" sz="1100" b="1" spc="300" kern="0" dirty="0">
-                <a:solidFill>
-                  <a:srgbClr val="02C39A"/>
-                </a:solidFill>
-                <a:latin typeface="Calibri" pitchFamily="34" charset="0"/>
-                <a:ea typeface="Calibri" pitchFamily="34" charset="-122"/>
-                <a:cs typeface="Calibri" pitchFamily="34" charset="-120"/>
-              </a:rPr>
-              <a:t>03</a:t>
-            </a:r>
-            <a:endParaRPr lang="en-US" sz="1100" dirty="0"/>
-          </a:p>
-        </p:txBody>
-      </p:sp>
-      <p:sp>
-        <p:nvSpPr>
-          <p:cNvPr id="20" name="Text 18"/>
-          <p:cNvSpPr/>
-          <p:nvPr/>
-        </p:nvSpPr>
-        <p:spPr>
-          <a:xfrm>
-            <a:off x="6309360" y="2514600"/>
-            <a:ext cx="2194560" cy="457200"/>
-          </a:xfrm>
-          <a:prstGeom prst="rect">
-            <a:avLst/>
-          </a:prstGeom>
-          <a:noFill/>
-          <a:ln/>
-        </p:spPr>
-        <p:txBody>
-          <a:bodyPr wrap="square" lIns="0" tIns="0" rIns="0" bIns="0" rtlCol="0" anchor="ctr"/>
-          <a:lstStyle/>
-          <a:p>
-            <a:pPr indent="0" marL="0">
-              <a:buNone/>
-            </a:pPr>
-            <a:r>
-              <a:rPr lang="en-US" sz="1800" b="1" dirty="0">
-                <a:solidFill>
-                  <a:srgbClr val="0F1B3D"/>
-                </a:solidFill>
-                <a:latin typeface="Georgia" pitchFamily="34" charset="0"/>
-                <a:ea typeface="Georgia" pitchFamily="34" charset="-122"/>
-                <a:cs typeface="Georgia" pitchFamily="34" charset="-120"/>
-              </a:rPr>
-              <a:t>Screens</a:t>
-            </a:r>
-            <a:endParaRPr lang="en-US" sz="1800" dirty="0"/>
-          </a:p>
-        </p:txBody>
-      </p:sp>
-      <p:sp>
-        <p:nvSpPr>
-          <p:cNvPr id="21" name="Text 19"/>
-          <p:cNvSpPr/>
-          <p:nvPr/>
-        </p:nvSpPr>
-        <p:spPr>
-          <a:xfrm>
-            <a:off x="6309360" y="3017520"/>
-            <a:ext cx="2194560" cy="1325880"/>
-          </a:xfrm>
-          <a:prstGeom prst="rect">
-            <a:avLst/>
-          </a:prstGeom>
-          <a:noFill/>
-          <a:ln/>
-        </p:spPr>
-        <p:txBody>
-          <a:bodyPr wrap="square" lIns="0" tIns="0" rIns="0" bIns="0" rtlCol="0" anchor="ctr"/>
-          <a:lstStyle/>
-          <a:p>
-            <a:pPr indent="0" marL="0">
-              <a:spcAft>
-                <a:spcPts val="200"/>
-              </a:spcAft>
-              <a:buNone/>
-            </a:pPr>
-            <a:r>
-              <a:rPr lang="en-US" sz="1100" dirty="0">
-                <a:solidFill>
-                  <a:srgbClr val="1A1F36"/>
-                </a:solidFill>
-                <a:latin typeface="Calibri" pitchFamily="34" charset="0"/>
-                <a:ea typeface="Calibri" pitchFamily="34" charset="-122"/>
-                <a:cs typeface="Calibri" pitchFamily="34" charset="-120"/>
-              </a:rPr>
-              <a:t>"Integration" tab for MCPs</a:t>
-            </a:r>
-            <a:endParaRPr lang="en-US" sz="1100" dirty="0"/>
-          </a:p>
-          <a:p>
-            <a:pPr indent="0" marL="0">
-              <a:spcAft>
-                <a:spcPts val="200"/>
-              </a:spcAft>
-              <a:buNone/>
-            </a:pPr>
-            <a:endParaRPr lang="en-US" sz="1100" dirty="0"/>
-          </a:p>
-          <a:p>
-            <a:pPr indent="0" marL="0">
-              <a:spcAft>
-                <a:spcPts val="200"/>
-              </a:spcAft>
-              <a:buNone/>
-            </a:pPr>
-            <a:r>
-              <a:rPr lang="en-US" sz="1100" dirty="0">
-                <a:solidFill>
-                  <a:srgbClr val="1A1F36"/>
-                </a:solidFill>
-                <a:latin typeface="Calibri" pitchFamily="34" charset="0"/>
-                <a:ea typeface="Calibri" pitchFamily="34" charset="-122"/>
-                <a:cs typeface="Calibri" pitchFamily="34" charset="-120"/>
-              </a:rPr>
-              <a:t>Logs — three views:</a:t>
-            </a:r>
-            <a:endParaRPr lang="en-US" sz="1100" dirty="0"/>
-          </a:p>
-          <a:p>
-            <a:pPr indent="0" marL="0">
-              <a:spcAft>
-                <a:spcPts val="200"/>
-              </a:spcAft>
-              <a:buNone/>
-            </a:pPr>
-            <a:r>
-              <a:rPr lang="en-US" sz="1100" dirty="0">
-                <a:solidFill>
-                  <a:srgbClr val="1A1F36"/>
-                </a:solidFill>
-                <a:latin typeface="Calibri" pitchFamily="34" charset="0"/>
-                <a:ea typeface="Calibri" pitchFamily="34" charset="-122"/>
-                <a:cs typeface="Calibri" pitchFamily="34" charset="-120"/>
-              </a:rPr>
-              <a:t>• System Logs</a:t>
-            </a:r>
-            <a:endParaRPr lang="en-US" sz="1100" dirty="0"/>
-          </a:p>
-          <a:p>
-            <a:pPr indent="0" marL="0">
-              <a:spcAft>
-                <a:spcPts val="200"/>
-              </a:spcAft>
-              <a:buNone/>
-            </a:pPr>
-            <a:r>
-              <a:rPr lang="en-US" sz="1100" dirty="0">
-                <a:solidFill>
-                  <a:srgbClr val="1A1F36"/>
-                </a:solidFill>
-                <a:latin typeface="Calibri" pitchFamily="34" charset="0"/>
-                <a:ea typeface="Calibri" pitchFamily="34" charset="-122"/>
-                <a:cs typeface="Calibri" pitchFamily="34" charset="-120"/>
-              </a:rPr>
-              <a:t>• Governance Logs</a:t>
-            </a:r>
-            <a:endParaRPr lang="en-US" sz="1100" dirty="0"/>
-          </a:p>
-          <a:p>
-            <a:pPr indent="0" marL="0">
-              <a:spcAft>
-                <a:spcPts val="200"/>
-              </a:spcAft>
-              <a:buNone/>
-            </a:pPr>
-            <a:r>
-              <a:rPr lang="en-US" sz="1100" dirty="0">
-                <a:solidFill>
-                  <a:srgbClr val="1A1F36"/>
-                </a:solidFill>
-                <a:latin typeface="Calibri" pitchFamily="34" charset="0"/>
-                <a:ea typeface="Calibri" pitchFamily="34" charset="-122"/>
-                <a:cs typeface="Calibri" pitchFamily="34" charset="-120"/>
-              </a:rPr>
-              <a:t>• All Access Logs</a:t>
-            </a:r>
-            <a:endParaRPr lang="en-US" sz="1100" dirty="0"/>
-          </a:p>
-        </p:txBody>
-      </p:sp>
-      <p:sp>
-        <p:nvSpPr>
-          <p:cNvPr id="22" name="Shape 20"/>
-          <p:cNvSpPr/>
-          <p:nvPr/>
-        </p:nvSpPr>
-        <p:spPr>
-          <a:xfrm>
-            <a:off x="457200" y="4617720"/>
-            <a:ext cx="8229600" cy="365760"/>
+          <p:cNvPr id="6" name="Shape 4"/>
+          <p:cNvSpPr/>
+          <p:nvPr/>
+        </p:nvSpPr>
+        <p:spPr>
+          <a:xfrm>
+            <a:off x="457200" y="1691640"/>
+            <a:ext cx="73152" cy="1371600"/>
           </a:xfrm>
           <a:prstGeom prst="rect">
             <a:avLst/>
@@ -7092,14 +7375,14 @@
       </p:sp>
       <p:sp>
         <p:nvSpPr>
-          <p:cNvPr id="23" name="Text 21"/>
-          <p:cNvSpPr/>
-          <p:nvPr/>
-        </p:nvSpPr>
-        <p:spPr>
-          <a:xfrm>
-            <a:off x="640080" y="4617720"/>
-            <a:ext cx="7863840" cy="365760"/>
+          <p:cNvPr id="7" name="Text 5"/>
+          <p:cNvSpPr/>
+          <p:nvPr/>
+        </p:nvSpPr>
+        <p:spPr>
+          <a:xfrm>
+            <a:off x="731520" y="1856232"/>
+            <a:ext cx="3703320" cy="411480"/>
           </a:xfrm>
           <a:prstGeom prst="rect">
             <a:avLst/>
@@ -7115,23 +7398,485 @@
               <a:buNone/>
             </a:pPr>
             <a:r>
-              <a:rPr lang="en-US" sz="1200" b="1" dirty="0">
-                <a:solidFill>
-                  <a:srgbClr val="FFFFFF"/>
-                </a:solidFill>
-                <a:latin typeface="Calibri" pitchFamily="34" charset="0"/>
-                <a:ea typeface="Calibri" pitchFamily="34" charset="-122"/>
-                <a:cs typeface="Calibri" pitchFamily="34" charset="-120"/>
-              </a:rPr>
-              <a:t>Identiverse · June 15 · harsh deadline.</a:t>
-            </a:r>
-            <a:endParaRPr lang="en-US" sz="1200" dirty="0"/>
-          </a:p>
-        </p:txBody>
-      </p:sp>
-      <p:sp>
-        <p:nvSpPr>
-          <p:cNvPr id="24" name="Text 22"/>
+              <a:rPr lang="en-US" sz="1700" b="1" dirty="0">
+                <a:solidFill>
+                  <a:srgbClr val="0F1B3D"/>
+                </a:solidFill>
+                <a:latin typeface="Georgia" pitchFamily="34" charset="0"/>
+                <a:ea typeface="Georgia" pitchFamily="34" charset="-122"/>
+                <a:cs typeface="Georgia" pitchFamily="34" charset="-120"/>
+              </a:rPr>
+              <a:t>JIT with Gateway</a:t>
+            </a:r>
+            <a:endParaRPr lang="en-US" sz="1700" dirty="0"/>
+          </a:p>
+        </p:txBody>
+      </p:sp>
+      <p:sp>
+        <p:nvSpPr>
+          <p:cNvPr id="8" name="Text 6"/>
+          <p:cNvSpPr/>
+          <p:nvPr/>
+        </p:nvSpPr>
+        <p:spPr>
+          <a:xfrm>
+            <a:off x="731520" y="2313432"/>
+            <a:ext cx="3703320" cy="658368"/>
+          </a:xfrm>
+          <a:prstGeom prst="rect">
+            <a:avLst/>
+          </a:prstGeom>
+          <a:noFill/>
+          <a:ln/>
+        </p:spPr>
+        <p:txBody>
+          <a:bodyPr wrap="square" lIns="0" tIns="0" rIns="0" bIns="0" rtlCol="0" anchor="ctr"/>
+          <a:lstStyle/>
+          <a:p>
+            <a:pPr indent="0" marL="0">
+              <a:buNone/>
+            </a:pPr>
+            <a:r>
+              <a:rPr lang="en-US" sz="1100" dirty="0">
+                <a:solidFill>
+                  <a:srgbClr val="1A1F36"/>
+                </a:solidFill>
+                <a:latin typeface="Calibri" pitchFamily="34" charset="0"/>
+                <a:ea typeface="Calibri" pitchFamily="34" charset="-122"/>
+                <a:cs typeface="Calibri" pitchFamily="34" charset="-120"/>
+              </a:rPr>
+              <a:t>On-the-fly access grants, with or without human-in-the-loop. Ephemeral, scoped per task.</a:t>
+            </a:r>
+            <a:endParaRPr lang="en-US" sz="1100" dirty="0"/>
+          </a:p>
+        </p:txBody>
+      </p:sp>
+      <p:sp>
+        <p:nvSpPr>
+          <p:cNvPr id="9" name="Shape 7"/>
+          <p:cNvSpPr/>
+          <p:nvPr/>
+        </p:nvSpPr>
+        <p:spPr>
+          <a:xfrm>
+            <a:off x="4800600" y="1691640"/>
+            <a:ext cx="4160520" cy="1371600"/>
+          </a:xfrm>
+          <a:prstGeom prst="rect">
+            <a:avLst/>
+          </a:prstGeom>
+          <a:solidFill>
+            <a:srgbClr val="E8EEFC"/>
+          </a:solidFill>
+          <a:ln w="12700">
+            <a:solidFill>
+              <a:srgbClr val="E8EEFC"/>
+            </a:solidFill>
+            <a:prstDash val="solid"/>
+          </a:ln>
+        </p:spPr>
+      </p:sp>
+      <p:sp>
+        <p:nvSpPr>
+          <p:cNvPr id="10" name="Shape 8"/>
+          <p:cNvSpPr/>
+          <p:nvPr/>
+        </p:nvSpPr>
+        <p:spPr>
+          <a:xfrm>
+            <a:off x="4800600" y="1691640"/>
+            <a:ext cx="73152" cy="1371600"/>
+          </a:xfrm>
+          <a:prstGeom prst="rect">
+            <a:avLst/>
+          </a:prstGeom>
+          <a:solidFill>
+            <a:srgbClr val="0F1B3D"/>
+          </a:solidFill>
+          <a:ln w="12700">
+            <a:solidFill>
+              <a:srgbClr val="0F1B3D"/>
+            </a:solidFill>
+            <a:prstDash val="solid"/>
+          </a:ln>
+        </p:spPr>
+      </p:sp>
+      <p:sp>
+        <p:nvSpPr>
+          <p:cNvPr id="11" name="Text 9"/>
+          <p:cNvSpPr/>
+          <p:nvPr/>
+        </p:nvSpPr>
+        <p:spPr>
+          <a:xfrm>
+            <a:off x="5074920" y="1856232"/>
+            <a:ext cx="3703320" cy="411480"/>
+          </a:xfrm>
+          <a:prstGeom prst="rect">
+            <a:avLst/>
+          </a:prstGeom>
+          <a:noFill/>
+          <a:ln/>
+        </p:spPr>
+        <p:txBody>
+          <a:bodyPr wrap="square" lIns="0" tIns="0" rIns="0" bIns="0" rtlCol="0" anchor="ctr"/>
+          <a:lstStyle/>
+          <a:p>
+            <a:pPr indent="0" marL="0">
+              <a:buNone/>
+            </a:pPr>
+            <a:r>
+              <a:rPr lang="en-US" sz="1700" b="1" dirty="0">
+                <a:solidFill>
+                  <a:srgbClr val="0F1B3D"/>
+                </a:solidFill>
+                <a:latin typeface="Georgia" pitchFamily="34" charset="0"/>
+                <a:ea typeface="Georgia" pitchFamily="34" charset="-122"/>
+                <a:cs typeface="Georgia" pitchFamily="34" charset="-120"/>
+              </a:rPr>
+              <a:t>JML for Agents</a:t>
+            </a:r>
+            <a:endParaRPr lang="en-US" sz="1700" dirty="0"/>
+          </a:p>
+        </p:txBody>
+      </p:sp>
+      <p:sp>
+        <p:nvSpPr>
+          <p:cNvPr id="12" name="Text 10"/>
+          <p:cNvSpPr/>
+          <p:nvPr/>
+        </p:nvSpPr>
+        <p:spPr>
+          <a:xfrm>
+            <a:off x="5074920" y="2313432"/>
+            <a:ext cx="3703320" cy="658368"/>
+          </a:xfrm>
+          <a:prstGeom prst="rect">
+            <a:avLst/>
+          </a:prstGeom>
+          <a:noFill/>
+          <a:ln/>
+        </p:spPr>
+        <p:txBody>
+          <a:bodyPr wrap="square" lIns="0" tIns="0" rIns="0" bIns="0" rtlCol="0" anchor="ctr"/>
+          <a:lstStyle/>
+          <a:p>
+            <a:pPr indent="0" marL="0">
+              <a:buNone/>
+            </a:pPr>
+            <a:r>
+              <a:rPr lang="en-US" sz="1100" dirty="0">
+                <a:solidFill>
+                  <a:srgbClr val="1A1F36"/>
+                </a:solidFill>
+                <a:latin typeface="Calibri" pitchFamily="34" charset="0"/>
+                <a:ea typeface="Calibri" pitchFamily="34" charset="-122"/>
+                <a:cs typeface="Calibri" pitchFamily="34" charset="-120"/>
+              </a:rPr>
+              <a:t>Joiner / mover / leaver lifecycle. Owner offboarded? Their agents don't linger.</a:t>
+            </a:r>
+            <a:endParaRPr lang="en-US" sz="1100" dirty="0"/>
+          </a:p>
+        </p:txBody>
+      </p:sp>
+      <p:sp>
+        <p:nvSpPr>
+          <p:cNvPr id="13" name="Shape 11"/>
+          <p:cNvSpPr/>
+          <p:nvPr/>
+        </p:nvSpPr>
+        <p:spPr>
+          <a:xfrm>
+            <a:off x="457200" y="3246120"/>
+            <a:ext cx="4160520" cy="1371600"/>
+          </a:xfrm>
+          <a:prstGeom prst="rect">
+            <a:avLst/>
+          </a:prstGeom>
+          <a:solidFill>
+            <a:srgbClr val="E8EEFC"/>
+          </a:solidFill>
+          <a:ln w="12700">
+            <a:solidFill>
+              <a:srgbClr val="E8EEFC"/>
+            </a:solidFill>
+            <a:prstDash val="solid"/>
+          </a:ln>
+        </p:spPr>
+      </p:sp>
+      <p:sp>
+        <p:nvSpPr>
+          <p:cNvPr id="14" name="Shape 12"/>
+          <p:cNvSpPr/>
+          <p:nvPr/>
+        </p:nvSpPr>
+        <p:spPr>
+          <a:xfrm>
+            <a:off x="457200" y="3246120"/>
+            <a:ext cx="73152" cy="1371600"/>
+          </a:xfrm>
+          <a:prstGeom prst="rect">
+            <a:avLst/>
+          </a:prstGeom>
+          <a:solidFill>
+            <a:srgbClr val="0F1B3D"/>
+          </a:solidFill>
+          <a:ln w="12700">
+            <a:solidFill>
+              <a:srgbClr val="0F1B3D"/>
+            </a:solidFill>
+            <a:prstDash val="solid"/>
+          </a:ln>
+        </p:spPr>
+      </p:sp>
+      <p:sp>
+        <p:nvSpPr>
+          <p:cNvPr id="15" name="Text 13"/>
+          <p:cNvSpPr/>
+          <p:nvPr/>
+        </p:nvSpPr>
+        <p:spPr>
+          <a:xfrm>
+            <a:off x="731520" y="3410712"/>
+            <a:ext cx="3703320" cy="411480"/>
+          </a:xfrm>
+          <a:prstGeom prst="rect">
+            <a:avLst/>
+          </a:prstGeom>
+          <a:noFill/>
+          <a:ln/>
+        </p:spPr>
+        <p:txBody>
+          <a:bodyPr wrap="square" lIns="0" tIns="0" rIns="0" bIns="0" rtlCol="0" anchor="ctr"/>
+          <a:lstStyle/>
+          <a:p>
+            <a:pPr indent="0" marL="0">
+              <a:buNone/>
+            </a:pPr>
+            <a:r>
+              <a:rPr lang="en-US" sz="1700" b="1" dirty="0">
+                <a:solidFill>
+                  <a:srgbClr val="0F1B3D"/>
+                </a:solidFill>
+                <a:latin typeface="Georgia" pitchFamily="34" charset="0"/>
+                <a:ea typeface="Georgia" pitchFamily="34" charset="-122"/>
+                <a:cs typeface="Georgia" pitchFamily="34" charset="-120"/>
+              </a:rPr>
+              <a:t>Onboarding</a:t>
+            </a:r>
+            <a:endParaRPr lang="en-US" sz="1700" dirty="0"/>
+          </a:p>
+        </p:txBody>
+      </p:sp>
+      <p:sp>
+        <p:nvSpPr>
+          <p:cNvPr id="16" name="Text 14"/>
+          <p:cNvSpPr/>
+          <p:nvPr/>
+        </p:nvSpPr>
+        <p:spPr>
+          <a:xfrm>
+            <a:off x="731520" y="3867912"/>
+            <a:ext cx="3703320" cy="658368"/>
+          </a:xfrm>
+          <a:prstGeom prst="rect">
+            <a:avLst/>
+          </a:prstGeom>
+          <a:noFill/>
+          <a:ln/>
+        </p:spPr>
+        <p:txBody>
+          <a:bodyPr wrap="square" lIns="0" tIns="0" rIns="0" bIns="0" rtlCol="0" anchor="ctr"/>
+          <a:lstStyle/>
+          <a:p>
+            <a:pPr indent="0" marL="0">
+              <a:buNone/>
+            </a:pPr>
+            <a:r>
+              <a:rPr lang="en-US" sz="1100" dirty="0">
+                <a:solidFill>
+                  <a:srgbClr val="1A1F36"/>
+                </a:solidFill>
+                <a:latin typeface="Calibri" pitchFamily="34" charset="0"/>
+                <a:ea typeface="Calibri" pitchFamily="34" charset="-122"/>
+                <a:cs typeface="Calibri" pitchFamily="34" charset="-120"/>
+              </a:rPr>
+              <a:t>UI for connecting apps to the Gateway. Secured setup — self-service, not a services engagement.</a:t>
+            </a:r>
+            <a:endParaRPr lang="en-US" sz="1100" dirty="0"/>
+          </a:p>
+        </p:txBody>
+      </p:sp>
+      <p:sp>
+        <p:nvSpPr>
+          <p:cNvPr id="17" name="Shape 15"/>
+          <p:cNvSpPr/>
+          <p:nvPr/>
+        </p:nvSpPr>
+        <p:spPr>
+          <a:xfrm>
+            <a:off x="4800600" y="3246120"/>
+            <a:ext cx="4160520" cy="1371600"/>
+          </a:xfrm>
+          <a:prstGeom prst="rect">
+            <a:avLst/>
+          </a:prstGeom>
+          <a:solidFill>
+            <a:srgbClr val="E8EEFC"/>
+          </a:solidFill>
+          <a:ln w="12700">
+            <a:solidFill>
+              <a:srgbClr val="E8EEFC"/>
+            </a:solidFill>
+            <a:prstDash val="solid"/>
+          </a:ln>
+        </p:spPr>
+      </p:sp>
+      <p:sp>
+        <p:nvSpPr>
+          <p:cNvPr id="18" name="Shape 16"/>
+          <p:cNvSpPr/>
+          <p:nvPr/>
+        </p:nvSpPr>
+        <p:spPr>
+          <a:xfrm>
+            <a:off x="4800600" y="3246120"/>
+            <a:ext cx="73152" cy="1371600"/>
+          </a:xfrm>
+          <a:prstGeom prst="rect">
+            <a:avLst/>
+          </a:prstGeom>
+          <a:solidFill>
+            <a:srgbClr val="0F1B3D"/>
+          </a:solidFill>
+          <a:ln w="12700">
+            <a:solidFill>
+              <a:srgbClr val="0F1B3D"/>
+            </a:solidFill>
+            <a:prstDash val="solid"/>
+          </a:ln>
+        </p:spPr>
+      </p:sp>
+      <p:sp>
+        <p:nvSpPr>
+          <p:cNvPr id="19" name="Text 17"/>
+          <p:cNvSpPr/>
+          <p:nvPr/>
+        </p:nvSpPr>
+        <p:spPr>
+          <a:xfrm>
+            <a:off x="5074920" y="3410712"/>
+            <a:ext cx="3703320" cy="411480"/>
+          </a:xfrm>
+          <a:prstGeom prst="rect">
+            <a:avLst/>
+          </a:prstGeom>
+          <a:noFill/>
+          <a:ln/>
+        </p:spPr>
+        <p:txBody>
+          <a:bodyPr wrap="square" lIns="0" tIns="0" rIns="0" bIns="0" rtlCol="0" anchor="ctr"/>
+          <a:lstStyle/>
+          <a:p>
+            <a:pPr indent="0" marL="0">
+              <a:buNone/>
+            </a:pPr>
+            <a:r>
+              <a:rPr lang="en-US" sz="1700" b="1" dirty="0">
+                <a:solidFill>
+                  <a:srgbClr val="0F1B3D"/>
+                </a:solidFill>
+                <a:latin typeface="Georgia" pitchFamily="34" charset="0"/>
+                <a:ea typeface="Georgia" pitchFamily="34" charset="-122"/>
+                <a:cs typeface="Georgia" pitchFamily="34" charset="-120"/>
+              </a:rPr>
+              <a:t>Agent Intent</a:t>
+            </a:r>
+            <a:endParaRPr lang="en-US" sz="1700" dirty="0"/>
+          </a:p>
+        </p:txBody>
+      </p:sp>
+      <p:sp>
+        <p:nvSpPr>
+          <p:cNvPr id="20" name="Text 18"/>
+          <p:cNvSpPr/>
+          <p:nvPr/>
+        </p:nvSpPr>
+        <p:spPr>
+          <a:xfrm>
+            <a:off x="5074920" y="3867912"/>
+            <a:ext cx="3703320" cy="658368"/>
+          </a:xfrm>
+          <a:prstGeom prst="rect">
+            <a:avLst/>
+          </a:prstGeom>
+          <a:noFill/>
+          <a:ln/>
+        </p:spPr>
+        <p:txBody>
+          <a:bodyPr wrap="square" lIns="0" tIns="0" rIns="0" bIns="0" rtlCol="0" anchor="ctr"/>
+          <a:lstStyle/>
+          <a:p>
+            <a:pPr indent="0" marL="0">
+              <a:buNone/>
+            </a:pPr>
+            <a:r>
+              <a:rPr lang="en-US" sz="1100" dirty="0">
+                <a:solidFill>
+                  <a:srgbClr val="1A1F36"/>
+                </a:solidFill>
+                <a:latin typeface="Calibri" pitchFamily="34" charset="0"/>
+                <a:ea typeface="Calibri" pitchFamily="34" charset="-122"/>
+                <a:cs typeface="Calibri" pitchFamily="34" charset="-120"/>
+              </a:rPr>
+              <a:t>Identity + behavior + context + data sensitivity, continuously evaluated. The vision horizon.</a:t>
+            </a:r>
+            <a:endParaRPr lang="en-US" sz="1100" dirty="0"/>
+          </a:p>
+        </p:txBody>
+      </p:sp>
+      <p:sp>
+        <p:nvSpPr>
+          <p:cNvPr id="21" name="Text 19"/>
+          <p:cNvSpPr/>
+          <p:nvPr/>
+        </p:nvSpPr>
+        <p:spPr>
+          <a:xfrm>
+            <a:off x="457200" y="4617720"/>
+            <a:ext cx="8229600" cy="274320"/>
+          </a:xfrm>
+          <a:prstGeom prst="rect">
+            <a:avLst/>
+          </a:prstGeom>
+          <a:noFill/>
+          <a:ln/>
+        </p:spPr>
+        <p:txBody>
+          <a:bodyPr wrap="square" lIns="0" tIns="0" rIns="0" bIns="0" rtlCol="0" anchor="ctr"/>
+          <a:lstStyle/>
+          <a:p>
+            <a:pPr algn="ctr" indent="0" marL="0">
+              <a:buNone/>
+            </a:pPr>
+            <a:r>
+              <a:rPr lang="en-US" sz="1100" i="1" dirty="0">
+                <a:solidFill>
+                  <a:srgbClr val="64748B"/>
+                </a:solidFill>
+                <a:latin typeface="Calibri" pitchFamily="34" charset="0"/>
+                <a:ea typeface="Calibri" pitchFamily="34" charset="-122"/>
+                <a:cs typeface="Calibri" pitchFamily="34" charset="-120"/>
+              </a:rPr>
+              <a:t>Sequenced after P0. Omri scopes these in parallel with competitor research.</a:t>
+            </a:r>
+            <a:endParaRPr lang="en-US" sz="1100" dirty="0"/>
+          </a:p>
+        </p:txBody>
+      </p:sp>
+      <p:sp>
+        <p:nvSpPr>
+          <p:cNvPr id="22" name="Text 20"/>
           <p:cNvSpPr/>
           <p:nvPr/>
         </p:nvSpPr>
@@ -7162,7 +7907,7 @@
                 <a:ea typeface="Calibri" pitchFamily="34" charset="-122"/>
                 <a:cs typeface="Calibri" pitchFamily="34" charset="-120"/>
               </a:rPr>
-              <a:t>7 / 9</a:t>
+              <a:t>7 / 8</a:t>
             </a:r>
             <a:endParaRPr lang="en-US" sz="900" dirty="0"/>
           </a:p>
@@ -7179,731 +7924,6 @@
 <file path=ppt/slides/slide8.xml><?xml version="1.0" encoding="utf-8"?>
 <p:sld xmlns:a="http://schemas.openxmlformats.org/drawingml/2006/main" xmlns:r="http://schemas.openxmlformats.org/officeDocument/2006/relationships" xmlns:p="http://schemas.openxmlformats.org/presentationml/2006/main">
   <p:cSld name="Slide 8">
-    <p:bg>
-      <p:bgPr>
-        <a:solidFill>
-          <a:srgbClr val="FFFFFF"/>
-        </a:solidFill>
-      </p:bgPr>
-    </p:bg>
-    <p:spTree>
-      <p:nvGrpSpPr>
-        <p:cNvPr id="1" name=""/>
-        <p:cNvGrpSpPr/>
-        <p:nvPr/>
-      </p:nvGrpSpPr>
-      <p:grpSpPr>
-        <a:xfrm>
-          <a:off x="0" y="0"/>
-          <a:ext cx="0" cy="0"/>
-          <a:chOff x="0" y="0"/>
-          <a:chExt cx="0" cy="0"/>
-        </a:xfrm>
-      </p:grpSpPr>
-      <p:sp>
-        <p:nvSpPr>
-          <p:cNvPr id="2" name="Shape 0"/>
-          <p:cNvSpPr/>
-          <p:nvPr/>
-        </p:nvSpPr>
-        <p:spPr>
-          <a:xfrm>
-            <a:off x="0" y="0"/>
-            <a:ext cx="109728" cy="5143500"/>
-          </a:xfrm>
-          <a:prstGeom prst="rect">
-            <a:avLst/>
-          </a:prstGeom>
-          <a:solidFill>
-            <a:srgbClr val="02C39A"/>
-          </a:solidFill>
-          <a:ln w="12700">
-            <a:solidFill>
-              <a:srgbClr val="02C39A"/>
-            </a:solidFill>
-            <a:prstDash val="solid"/>
-          </a:ln>
-        </p:spPr>
-      </p:sp>
-      <p:sp>
-        <p:nvSpPr>
-          <p:cNvPr id="3" name="Text 1"/>
-          <p:cNvSpPr/>
-          <p:nvPr/>
-        </p:nvSpPr>
-        <p:spPr>
-          <a:xfrm>
-            <a:off x="457200" y="365760"/>
-            <a:ext cx="7315200" cy="274320"/>
-          </a:xfrm>
-          <a:prstGeom prst="rect">
-            <a:avLst/>
-          </a:prstGeom>
-          <a:noFill/>
-          <a:ln/>
-        </p:spPr>
-        <p:txBody>
-          <a:bodyPr wrap="square" lIns="0" tIns="0" rIns="0" bIns="0" rtlCol="0" anchor="ctr"/>
-          <a:lstStyle/>
-          <a:p>
-            <a:pPr indent="0" marL="0">
-              <a:buNone/>
-            </a:pPr>
-            <a:r>
-              <a:rPr lang="en-US" sz="1100" b="1" spc="400" kern="0" dirty="0">
-                <a:solidFill>
-                  <a:srgbClr val="64748B"/>
-                </a:solidFill>
-                <a:latin typeface="Calibri" pitchFamily="34" charset="0"/>
-                <a:ea typeface="Calibri" pitchFamily="34" charset="-122"/>
-                <a:cs typeface="Calibri" pitchFamily="34" charset="-120"/>
-              </a:rPr>
-              <a:t>07 · Post-P0</a:t>
-            </a:r>
-            <a:endParaRPr lang="en-US" sz="1100" dirty="0"/>
-          </a:p>
-        </p:txBody>
-      </p:sp>
-      <p:sp>
-        <p:nvSpPr>
-          <p:cNvPr id="4" name="Text 2"/>
-          <p:cNvSpPr/>
-          <p:nvPr/>
-        </p:nvSpPr>
-        <p:spPr>
-          <a:xfrm>
-            <a:off x="457200" y="731520"/>
-            <a:ext cx="8229600" cy="777240"/>
-          </a:xfrm>
-          <a:prstGeom prst="rect">
-            <a:avLst/>
-          </a:prstGeom>
-          <a:noFill/>
-          <a:ln/>
-        </p:spPr>
-        <p:txBody>
-          <a:bodyPr wrap="square" lIns="0" tIns="0" rIns="0" bIns="0" rtlCol="0" anchor="ctr"/>
-          <a:lstStyle/>
-          <a:p>
-            <a:pPr indent="0" marL="0">
-              <a:buNone/>
-            </a:pPr>
-            <a:r>
-              <a:rPr lang="en-US" sz="3400" b="1" dirty="0">
-                <a:solidFill>
-                  <a:srgbClr val="1A1F36"/>
-                </a:solidFill>
-                <a:latin typeface="Georgia" pitchFamily="34" charset="0"/>
-                <a:ea typeface="Georgia" pitchFamily="34" charset="-122"/>
-                <a:cs typeface="Georgia" pitchFamily="34" charset="-120"/>
-              </a:rPr>
-              <a:t>Where this goes next.</a:t>
-            </a:r>
-            <a:endParaRPr lang="en-US" sz="3400" dirty="0"/>
-          </a:p>
-        </p:txBody>
-      </p:sp>
-      <p:sp>
-        <p:nvSpPr>
-          <p:cNvPr id="5" name="Shape 3"/>
-          <p:cNvSpPr/>
-          <p:nvPr/>
-        </p:nvSpPr>
-        <p:spPr>
-          <a:xfrm>
-            <a:off x="457200" y="1691640"/>
-            <a:ext cx="4160520" cy="1371600"/>
-          </a:xfrm>
-          <a:prstGeom prst="rect">
-            <a:avLst/>
-          </a:prstGeom>
-          <a:solidFill>
-            <a:srgbClr val="E8EEFC"/>
-          </a:solidFill>
-          <a:ln w="12700">
-            <a:solidFill>
-              <a:srgbClr val="E8EEFC"/>
-            </a:solidFill>
-            <a:prstDash val="solid"/>
-          </a:ln>
-        </p:spPr>
-      </p:sp>
-      <p:sp>
-        <p:nvSpPr>
-          <p:cNvPr id="6" name="Shape 4"/>
-          <p:cNvSpPr/>
-          <p:nvPr/>
-        </p:nvSpPr>
-        <p:spPr>
-          <a:xfrm>
-            <a:off x="457200" y="1691640"/>
-            <a:ext cx="73152" cy="1371600"/>
-          </a:xfrm>
-          <a:prstGeom prst="rect">
-            <a:avLst/>
-          </a:prstGeom>
-          <a:solidFill>
-            <a:srgbClr val="0F1B3D"/>
-          </a:solidFill>
-          <a:ln w="12700">
-            <a:solidFill>
-              <a:srgbClr val="0F1B3D"/>
-            </a:solidFill>
-            <a:prstDash val="solid"/>
-          </a:ln>
-        </p:spPr>
-      </p:sp>
-      <p:sp>
-        <p:nvSpPr>
-          <p:cNvPr id="7" name="Text 5"/>
-          <p:cNvSpPr/>
-          <p:nvPr/>
-        </p:nvSpPr>
-        <p:spPr>
-          <a:xfrm>
-            <a:off x="731520" y="1856232"/>
-            <a:ext cx="3703320" cy="411480"/>
-          </a:xfrm>
-          <a:prstGeom prst="rect">
-            <a:avLst/>
-          </a:prstGeom>
-          <a:noFill/>
-          <a:ln/>
-        </p:spPr>
-        <p:txBody>
-          <a:bodyPr wrap="square" lIns="0" tIns="0" rIns="0" bIns="0" rtlCol="0" anchor="ctr"/>
-          <a:lstStyle/>
-          <a:p>
-            <a:pPr indent="0" marL="0">
-              <a:buNone/>
-            </a:pPr>
-            <a:r>
-              <a:rPr lang="en-US" sz="1700" b="1" dirty="0">
-                <a:solidFill>
-                  <a:srgbClr val="0F1B3D"/>
-                </a:solidFill>
-                <a:latin typeface="Georgia" pitchFamily="34" charset="0"/>
-                <a:ea typeface="Georgia" pitchFamily="34" charset="-122"/>
-                <a:cs typeface="Georgia" pitchFamily="34" charset="-120"/>
-              </a:rPr>
-              <a:t>JIT with Gateway</a:t>
-            </a:r>
-            <a:endParaRPr lang="en-US" sz="1700" dirty="0"/>
-          </a:p>
-        </p:txBody>
-      </p:sp>
-      <p:sp>
-        <p:nvSpPr>
-          <p:cNvPr id="8" name="Text 6"/>
-          <p:cNvSpPr/>
-          <p:nvPr/>
-        </p:nvSpPr>
-        <p:spPr>
-          <a:xfrm>
-            <a:off x="731520" y="2313432"/>
-            <a:ext cx="3703320" cy="658368"/>
-          </a:xfrm>
-          <a:prstGeom prst="rect">
-            <a:avLst/>
-          </a:prstGeom>
-          <a:noFill/>
-          <a:ln/>
-        </p:spPr>
-        <p:txBody>
-          <a:bodyPr wrap="square" lIns="0" tIns="0" rIns="0" bIns="0" rtlCol="0" anchor="ctr"/>
-          <a:lstStyle/>
-          <a:p>
-            <a:pPr indent="0" marL="0">
-              <a:buNone/>
-            </a:pPr>
-            <a:r>
-              <a:rPr lang="en-US" sz="1100" dirty="0">
-                <a:solidFill>
-                  <a:srgbClr val="1A1F36"/>
-                </a:solidFill>
-                <a:latin typeface="Calibri" pitchFamily="34" charset="0"/>
-                <a:ea typeface="Calibri" pitchFamily="34" charset="-122"/>
-                <a:cs typeface="Calibri" pitchFamily="34" charset="-120"/>
-              </a:rPr>
-              <a:t>On-the-fly access grants, with or without human-in-the-loop. Ephemeral, scoped per task.</a:t>
-            </a:r>
-            <a:endParaRPr lang="en-US" sz="1100" dirty="0"/>
-          </a:p>
-        </p:txBody>
-      </p:sp>
-      <p:sp>
-        <p:nvSpPr>
-          <p:cNvPr id="9" name="Shape 7"/>
-          <p:cNvSpPr/>
-          <p:nvPr/>
-        </p:nvSpPr>
-        <p:spPr>
-          <a:xfrm>
-            <a:off x="4800600" y="1691640"/>
-            <a:ext cx="4160520" cy="1371600"/>
-          </a:xfrm>
-          <a:prstGeom prst="rect">
-            <a:avLst/>
-          </a:prstGeom>
-          <a:solidFill>
-            <a:srgbClr val="E8EEFC"/>
-          </a:solidFill>
-          <a:ln w="12700">
-            <a:solidFill>
-              <a:srgbClr val="E8EEFC"/>
-            </a:solidFill>
-            <a:prstDash val="solid"/>
-          </a:ln>
-        </p:spPr>
-      </p:sp>
-      <p:sp>
-        <p:nvSpPr>
-          <p:cNvPr id="10" name="Shape 8"/>
-          <p:cNvSpPr/>
-          <p:nvPr/>
-        </p:nvSpPr>
-        <p:spPr>
-          <a:xfrm>
-            <a:off x="4800600" y="1691640"/>
-            <a:ext cx="73152" cy="1371600"/>
-          </a:xfrm>
-          <a:prstGeom prst="rect">
-            <a:avLst/>
-          </a:prstGeom>
-          <a:solidFill>
-            <a:srgbClr val="0F1B3D"/>
-          </a:solidFill>
-          <a:ln w="12700">
-            <a:solidFill>
-              <a:srgbClr val="0F1B3D"/>
-            </a:solidFill>
-            <a:prstDash val="solid"/>
-          </a:ln>
-        </p:spPr>
-      </p:sp>
-      <p:sp>
-        <p:nvSpPr>
-          <p:cNvPr id="11" name="Text 9"/>
-          <p:cNvSpPr/>
-          <p:nvPr/>
-        </p:nvSpPr>
-        <p:spPr>
-          <a:xfrm>
-            <a:off x="5074920" y="1856232"/>
-            <a:ext cx="3703320" cy="411480"/>
-          </a:xfrm>
-          <a:prstGeom prst="rect">
-            <a:avLst/>
-          </a:prstGeom>
-          <a:noFill/>
-          <a:ln/>
-        </p:spPr>
-        <p:txBody>
-          <a:bodyPr wrap="square" lIns="0" tIns="0" rIns="0" bIns="0" rtlCol="0" anchor="ctr"/>
-          <a:lstStyle/>
-          <a:p>
-            <a:pPr indent="0" marL="0">
-              <a:buNone/>
-            </a:pPr>
-            <a:r>
-              <a:rPr lang="en-US" sz="1700" b="1" dirty="0">
-                <a:solidFill>
-                  <a:srgbClr val="0F1B3D"/>
-                </a:solidFill>
-                <a:latin typeface="Georgia" pitchFamily="34" charset="0"/>
-                <a:ea typeface="Georgia" pitchFamily="34" charset="-122"/>
-                <a:cs typeface="Georgia" pitchFamily="34" charset="-120"/>
-              </a:rPr>
-              <a:t>JML for Agents</a:t>
-            </a:r>
-            <a:endParaRPr lang="en-US" sz="1700" dirty="0"/>
-          </a:p>
-        </p:txBody>
-      </p:sp>
-      <p:sp>
-        <p:nvSpPr>
-          <p:cNvPr id="12" name="Text 10"/>
-          <p:cNvSpPr/>
-          <p:nvPr/>
-        </p:nvSpPr>
-        <p:spPr>
-          <a:xfrm>
-            <a:off x="5074920" y="2313432"/>
-            <a:ext cx="3703320" cy="658368"/>
-          </a:xfrm>
-          <a:prstGeom prst="rect">
-            <a:avLst/>
-          </a:prstGeom>
-          <a:noFill/>
-          <a:ln/>
-        </p:spPr>
-        <p:txBody>
-          <a:bodyPr wrap="square" lIns="0" tIns="0" rIns="0" bIns="0" rtlCol="0" anchor="ctr"/>
-          <a:lstStyle/>
-          <a:p>
-            <a:pPr indent="0" marL="0">
-              <a:buNone/>
-            </a:pPr>
-            <a:r>
-              <a:rPr lang="en-US" sz="1100" dirty="0">
-                <a:solidFill>
-                  <a:srgbClr val="1A1F36"/>
-                </a:solidFill>
-                <a:latin typeface="Calibri" pitchFamily="34" charset="0"/>
-                <a:ea typeface="Calibri" pitchFamily="34" charset="-122"/>
-                <a:cs typeface="Calibri" pitchFamily="34" charset="-120"/>
-              </a:rPr>
-              <a:t>Joiner / mover / leaver lifecycle. Owner offboarded? Their agents don't linger.</a:t>
-            </a:r>
-            <a:endParaRPr lang="en-US" sz="1100" dirty="0"/>
-          </a:p>
-        </p:txBody>
-      </p:sp>
-      <p:sp>
-        <p:nvSpPr>
-          <p:cNvPr id="13" name="Shape 11"/>
-          <p:cNvSpPr/>
-          <p:nvPr/>
-        </p:nvSpPr>
-        <p:spPr>
-          <a:xfrm>
-            <a:off x="457200" y="3246120"/>
-            <a:ext cx="4160520" cy="1371600"/>
-          </a:xfrm>
-          <a:prstGeom prst="rect">
-            <a:avLst/>
-          </a:prstGeom>
-          <a:solidFill>
-            <a:srgbClr val="E8EEFC"/>
-          </a:solidFill>
-          <a:ln w="12700">
-            <a:solidFill>
-              <a:srgbClr val="E8EEFC"/>
-            </a:solidFill>
-            <a:prstDash val="solid"/>
-          </a:ln>
-        </p:spPr>
-      </p:sp>
-      <p:sp>
-        <p:nvSpPr>
-          <p:cNvPr id="14" name="Shape 12"/>
-          <p:cNvSpPr/>
-          <p:nvPr/>
-        </p:nvSpPr>
-        <p:spPr>
-          <a:xfrm>
-            <a:off x="457200" y="3246120"/>
-            <a:ext cx="73152" cy="1371600"/>
-          </a:xfrm>
-          <a:prstGeom prst="rect">
-            <a:avLst/>
-          </a:prstGeom>
-          <a:solidFill>
-            <a:srgbClr val="0F1B3D"/>
-          </a:solidFill>
-          <a:ln w="12700">
-            <a:solidFill>
-              <a:srgbClr val="0F1B3D"/>
-            </a:solidFill>
-            <a:prstDash val="solid"/>
-          </a:ln>
-        </p:spPr>
-      </p:sp>
-      <p:sp>
-        <p:nvSpPr>
-          <p:cNvPr id="15" name="Text 13"/>
-          <p:cNvSpPr/>
-          <p:nvPr/>
-        </p:nvSpPr>
-        <p:spPr>
-          <a:xfrm>
-            <a:off x="731520" y="3410712"/>
-            <a:ext cx="3703320" cy="411480"/>
-          </a:xfrm>
-          <a:prstGeom prst="rect">
-            <a:avLst/>
-          </a:prstGeom>
-          <a:noFill/>
-          <a:ln/>
-        </p:spPr>
-        <p:txBody>
-          <a:bodyPr wrap="square" lIns="0" tIns="0" rIns="0" bIns="0" rtlCol="0" anchor="ctr"/>
-          <a:lstStyle/>
-          <a:p>
-            <a:pPr indent="0" marL="0">
-              <a:buNone/>
-            </a:pPr>
-            <a:r>
-              <a:rPr lang="en-US" sz="1700" b="1" dirty="0">
-                <a:solidFill>
-                  <a:srgbClr val="0F1B3D"/>
-                </a:solidFill>
-                <a:latin typeface="Georgia" pitchFamily="34" charset="0"/>
-                <a:ea typeface="Georgia" pitchFamily="34" charset="-122"/>
-                <a:cs typeface="Georgia" pitchFamily="34" charset="-120"/>
-              </a:rPr>
-              <a:t>Onboarding</a:t>
-            </a:r>
-            <a:endParaRPr lang="en-US" sz="1700" dirty="0"/>
-          </a:p>
-        </p:txBody>
-      </p:sp>
-      <p:sp>
-        <p:nvSpPr>
-          <p:cNvPr id="16" name="Text 14"/>
-          <p:cNvSpPr/>
-          <p:nvPr/>
-        </p:nvSpPr>
-        <p:spPr>
-          <a:xfrm>
-            <a:off x="731520" y="3867912"/>
-            <a:ext cx="3703320" cy="658368"/>
-          </a:xfrm>
-          <a:prstGeom prst="rect">
-            <a:avLst/>
-          </a:prstGeom>
-          <a:noFill/>
-          <a:ln/>
-        </p:spPr>
-        <p:txBody>
-          <a:bodyPr wrap="square" lIns="0" tIns="0" rIns="0" bIns="0" rtlCol="0" anchor="ctr"/>
-          <a:lstStyle/>
-          <a:p>
-            <a:pPr indent="0" marL="0">
-              <a:buNone/>
-            </a:pPr>
-            <a:r>
-              <a:rPr lang="en-US" sz="1100" dirty="0">
-                <a:solidFill>
-                  <a:srgbClr val="1A1F36"/>
-                </a:solidFill>
-                <a:latin typeface="Calibri" pitchFamily="34" charset="0"/>
-                <a:ea typeface="Calibri" pitchFamily="34" charset="-122"/>
-                <a:cs typeface="Calibri" pitchFamily="34" charset="-120"/>
-              </a:rPr>
-              <a:t>UI for connecting apps to the Gateway. Secured setup — self-service, not a services engagement.</a:t>
-            </a:r>
-            <a:endParaRPr lang="en-US" sz="1100" dirty="0"/>
-          </a:p>
-        </p:txBody>
-      </p:sp>
-      <p:sp>
-        <p:nvSpPr>
-          <p:cNvPr id="17" name="Shape 15"/>
-          <p:cNvSpPr/>
-          <p:nvPr/>
-        </p:nvSpPr>
-        <p:spPr>
-          <a:xfrm>
-            <a:off x="4800600" y="3246120"/>
-            <a:ext cx="4160520" cy="1371600"/>
-          </a:xfrm>
-          <a:prstGeom prst="rect">
-            <a:avLst/>
-          </a:prstGeom>
-          <a:solidFill>
-            <a:srgbClr val="E8EEFC"/>
-          </a:solidFill>
-          <a:ln w="12700">
-            <a:solidFill>
-              <a:srgbClr val="E8EEFC"/>
-            </a:solidFill>
-            <a:prstDash val="solid"/>
-          </a:ln>
-        </p:spPr>
-      </p:sp>
-      <p:sp>
-        <p:nvSpPr>
-          <p:cNvPr id="18" name="Shape 16"/>
-          <p:cNvSpPr/>
-          <p:nvPr/>
-        </p:nvSpPr>
-        <p:spPr>
-          <a:xfrm>
-            <a:off x="4800600" y="3246120"/>
-            <a:ext cx="73152" cy="1371600"/>
-          </a:xfrm>
-          <a:prstGeom prst="rect">
-            <a:avLst/>
-          </a:prstGeom>
-          <a:solidFill>
-            <a:srgbClr val="0F1B3D"/>
-          </a:solidFill>
-          <a:ln w="12700">
-            <a:solidFill>
-              <a:srgbClr val="0F1B3D"/>
-            </a:solidFill>
-            <a:prstDash val="solid"/>
-          </a:ln>
-        </p:spPr>
-      </p:sp>
-      <p:sp>
-        <p:nvSpPr>
-          <p:cNvPr id="19" name="Text 17"/>
-          <p:cNvSpPr/>
-          <p:nvPr/>
-        </p:nvSpPr>
-        <p:spPr>
-          <a:xfrm>
-            <a:off x="5074920" y="3410712"/>
-            <a:ext cx="3703320" cy="411480"/>
-          </a:xfrm>
-          <a:prstGeom prst="rect">
-            <a:avLst/>
-          </a:prstGeom>
-          <a:noFill/>
-          <a:ln/>
-        </p:spPr>
-        <p:txBody>
-          <a:bodyPr wrap="square" lIns="0" tIns="0" rIns="0" bIns="0" rtlCol="0" anchor="ctr"/>
-          <a:lstStyle/>
-          <a:p>
-            <a:pPr indent="0" marL="0">
-              <a:buNone/>
-            </a:pPr>
-            <a:r>
-              <a:rPr lang="en-US" sz="1700" b="1" dirty="0">
-                <a:solidFill>
-                  <a:srgbClr val="0F1B3D"/>
-                </a:solidFill>
-                <a:latin typeface="Georgia" pitchFamily="34" charset="0"/>
-                <a:ea typeface="Georgia" pitchFamily="34" charset="-122"/>
-                <a:cs typeface="Georgia" pitchFamily="34" charset="-120"/>
-              </a:rPr>
-              <a:t>Agent Intent</a:t>
-            </a:r>
-            <a:endParaRPr lang="en-US" sz="1700" dirty="0"/>
-          </a:p>
-        </p:txBody>
-      </p:sp>
-      <p:sp>
-        <p:nvSpPr>
-          <p:cNvPr id="20" name="Text 18"/>
-          <p:cNvSpPr/>
-          <p:nvPr/>
-        </p:nvSpPr>
-        <p:spPr>
-          <a:xfrm>
-            <a:off x="5074920" y="3867912"/>
-            <a:ext cx="3703320" cy="658368"/>
-          </a:xfrm>
-          <a:prstGeom prst="rect">
-            <a:avLst/>
-          </a:prstGeom>
-          <a:noFill/>
-          <a:ln/>
-        </p:spPr>
-        <p:txBody>
-          <a:bodyPr wrap="square" lIns="0" tIns="0" rIns="0" bIns="0" rtlCol="0" anchor="ctr"/>
-          <a:lstStyle/>
-          <a:p>
-            <a:pPr indent="0" marL="0">
-              <a:buNone/>
-            </a:pPr>
-            <a:r>
-              <a:rPr lang="en-US" sz="1100" dirty="0">
-                <a:solidFill>
-                  <a:srgbClr val="1A1F36"/>
-                </a:solidFill>
-                <a:latin typeface="Calibri" pitchFamily="34" charset="0"/>
-                <a:ea typeface="Calibri" pitchFamily="34" charset="-122"/>
-                <a:cs typeface="Calibri" pitchFamily="34" charset="-120"/>
-              </a:rPr>
-              <a:t>Identity + behavior + context + data sensitivity, continuously evaluated. The vision horizon.</a:t>
-            </a:r>
-            <a:endParaRPr lang="en-US" sz="1100" dirty="0"/>
-          </a:p>
-        </p:txBody>
-      </p:sp>
-      <p:sp>
-        <p:nvSpPr>
-          <p:cNvPr id="21" name="Text 19"/>
-          <p:cNvSpPr/>
-          <p:nvPr/>
-        </p:nvSpPr>
-        <p:spPr>
-          <a:xfrm>
-            <a:off x="457200" y="4617720"/>
-            <a:ext cx="8229600" cy="274320"/>
-          </a:xfrm>
-          <a:prstGeom prst="rect">
-            <a:avLst/>
-          </a:prstGeom>
-          <a:noFill/>
-          <a:ln/>
-        </p:spPr>
-        <p:txBody>
-          <a:bodyPr wrap="square" lIns="0" tIns="0" rIns="0" bIns="0" rtlCol="0" anchor="ctr"/>
-          <a:lstStyle/>
-          <a:p>
-            <a:pPr algn="ctr" indent="0" marL="0">
-              <a:buNone/>
-            </a:pPr>
-            <a:r>
-              <a:rPr lang="en-US" sz="1100" i="1" dirty="0">
-                <a:solidFill>
-                  <a:srgbClr val="64748B"/>
-                </a:solidFill>
-                <a:latin typeface="Calibri" pitchFamily="34" charset="0"/>
-                <a:ea typeface="Calibri" pitchFamily="34" charset="-122"/>
-                <a:cs typeface="Calibri" pitchFamily="34" charset="-120"/>
-              </a:rPr>
-              <a:t>Sequenced after P0. Omri scopes these in parallel with competitor research.</a:t>
-            </a:r>
-            <a:endParaRPr lang="en-US" sz="1100" dirty="0"/>
-          </a:p>
-        </p:txBody>
-      </p:sp>
-      <p:sp>
-        <p:nvSpPr>
-          <p:cNvPr id="22" name="Text 20"/>
-          <p:cNvSpPr/>
-          <p:nvPr/>
-        </p:nvSpPr>
-        <p:spPr>
-          <a:xfrm>
-            <a:off x="8321040" y="4823460"/>
-            <a:ext cx="457200" cy="228600"/>
-          </a:xfrm>
-          <a:prstGeom prst="rect">
-            <a:avLst/>
-          </a:prstGeom>
-          <a:noFill/>
-          <a:ln/>
-        </p:spPr>
-        <p:txBody>
-          <a:bodyPr wrap="square" lIns="0" tIns="0" rIns="0" bIns="0" rtlCol="0" anchor="ctr"/>
-          <a:lstStyle/>
-          <a:p>
-            <a:pPr algn="r" indent="0" marL="0">
-              <a:buNone/>
-            </a:pPr>
-            <a:r>
-              <a:rPr lang="en-US" sz="900" dirty="0">
-                <a:solidFill>
-                  <a:srgbClr val="64748B"/>
-                </a:solidFill>
-                <a:latin typeface="Calibri" pitchFamily="34" charset="0"/>
-                <a:ea typeface="Calibri" pitchFamily="34" charset="-122"/>
-                <a:cs typeface="Calibri" pitchFamily="34" charset="-120"/>
-              </a:rPr>
-              <a:t>8 / 9</a:t>
-            </a:r>
-            <a:endParaRPr lang="en-US" sz="900" dirty="0"/>
-          </a:p>
-        </p:txBody>
-      </p:sp>
-    </p:spTree>
-  </p:cSld>
-  <p:clrMapOvr>
-    <a:masterClrMapping/>
-  </p:clrMapOvr>
-</p:sld>
-</file>
-
-<file path=ppt/slides/slide9.xml><?xml version="1.0" encoding="utf-8"?>
-<p:sld xmlns:a="http://schemas.openxmlformats.org/drawingml/2006/main" xmlns:r="http://schemas.openxmlformats.org/officeDocument/2006/relationships" xmlns:p="http://schemas.openxmlformats.org/presentationml/2006/main">
-  <p:cSld name="Slide 9">
     <p:bg>
       <p:bgPr>
         <a:solidFill>
@@ -8726,7 +8746,7 @@
                 <a:ea typeface="Calibri" pitchFamily="34" charset="-122"/>
                 <a:cs typeface="Calibri" pitchFamily="34" charset="-120"/>
               </a:rPr>
-              <a:t>9 / 9</a:t>
+              <a:t>8 / 8</a:t>
             </a:r>
             <a:endParaRPr lang="en-US" sz="900" dirty="0"/>
           </a:p>

--- a/artifacts/eng-prekickoff-2026-04-27.pptx
+++ b/artifacts/eng-prekickoff-2026-04-27.pptx
@@ -12,10 +12,9 @@
     <p:sldId id="260" r:id="rId6"/>
     <p:sldId id="261" r:id="rId7"/>
     <p:sldId id="262" r:id="rId8"/>
-    <p:sldId id="263" r:id="rId9"/>
   </p:sldIdLst>
   <p:notesMasterIdLst>
-    <p:notesMasterId r:id="rId10"/>
+    <p:notesMasterId r:id="rId9"/>
   </p:notesMasterIdLst>
   <p:sldSz cx="9144000" cy="5143500"/>
   <p:notesSz cx="5143500" cy="9144000"/>
@@ -1079,94 +1078,6 @@
 </p:notes>
 </file>
 
-<file path=ppt/notesSlides/notesSlide8.xml><?xml version="1.0" encoding="utf-8"?>
-<p:notes xmlns:a="http://schemas.openxmlformats.org/drawingml/2006/main" xmlns:r="http://schemas.openxmlformats.org/officeDocument/2006/relationships" xmlns:p="http://schemas.openxmlformats.org/presentationml/2006/main">
-  <p:cSld>
-    <p:spTree>
-      <p:nvGrpSpPr>
-        <p:cNvPr id="1" name=""/>
-        <p:cNvGrpSpPr/>
-        <p:nvPr/>
-      </p:nvGrpSpPr>
-      <p:grpSpPr>
-        <a:xfrm>
-          <a:off x="0" y="0"/>
-          <a:ext cx="0" cy="0"/>
-          <a:chOff x="0" y="0"/>
-          <a:chExt cx="0" cy="0"/>
-        </a:xfrm>
-      </p:grpSpPr>
-      <p:sp>
-        <p:nvSpPr>
-          <p:cNvPr id="2" name="Slide Image Placeholder 1"/>
-          <p:cNvSpPr>
-            <a:spLocks noGrp="1" noRot="1" noChangeAspect="1"/>
-          </p:cNvSpPr>
-          <p:nvPr>
-            <p:ph type="sldImg"/>
-          </p:nvPr>
-        </p:nvSpPr>
-        <p:spPr/>
-      </p:sp>
-      <p:sp>
-        <p:nvSpPr>
-          <p:cNvPr id="3" name="Notes Placeholder 2"/>
-          <p:cNvSpPr>
-            <a:spLocks noGrp="1"/>
-          </p:cNvSpPr>
-          <p:nvPr>
-            <p:ph type="body" idx="1"/>
-          </p:nvPr>
-        </p:nvSpPr>
-        <p:spPr/>
-        <p:txBody>
-          <a:bodyPr/>
-          <a:lstStyle/>
-          <a:p>
-            <a:r>
-              <a:rPr lang="en-US" dirty="0"/>
-              <a:t/>
-            </a:r>
-            <a:endParaRPr lang="en-US" dirty="0"/>
-          </a:p>
-        </p:txBody>
-      </p:sp>
-      <p:sp>
-        <p:nvSpPr>
-          <p:cNvPr id="4" name="Slide Number Placeholder 3"/>
-          <p:cNvSpPr>
-            <a:spLocks noGrp="1"/>
-          </p:cNvSpPr>
-          <p:nvPr>
-            <p:ph type="sldNum" sz="quarter" idx="10"/>
-          </p:nvPr>
-        </p:nvSpPr>
-        <p:spPr/>
-        <p:txBody>
-          <a:bodyPr/>
-          <a:lstStyle/>
-          <a:p>
-            <a:fld id="{F7021451-1387-4CA6-816F-3879F97B5CBC}" type="slidenum">
-              <a:rPr lang="en-US"/>
-              <a:t>8</a:t>
-            </a:fld>
-            <a:endParaRPr lang="en-US"/>
-          </a:p>
-        </p:txBody>
-      </p:sp>
-    </p:spTree>
-    <p:extLst>
-      <p:ext uri="{BB962C8B-B14F-4D97-AF65-F5344CB8AC3E}">
-        <p14:creationId xmlns:p14="http://schemas.microsoft.com/office/powerpoint/2010/main" val="1024086991"/>
-      </p:ext>
-    </p:extLst>
-  </p:cSld>
-  <p:clrMapOvr>
-    <a:masterClrMapping/>
-  </p:clrMapOvr>
-</p:notes>
-</file>
-
 <file path=ppt/slideLayouts/slideLayout1.xml><?xml version="1.0" encoding="utf-8"?>
 <p:sldLayout xmlns:a="http://schemas.openxmlformats.org/drawingml/2006/main" xmlns:r="http://schemas.openxmlformats.org/officeDocument/2006/relationships" xmlns:p="http://schemas.openxmlformats.org/presentationml/2006/main" preserve="1">
   <p:cSld name="DEFAULT">
@@ -2500,7 +2411,7 @@
                 <a:ea typeface="Calibri" pitchFamily="34" charset="-122"/>
                 <a:cs typeface="Calibri" pitchFamily="34" charset="-120"/>
               </a:rPr>
-              <a:t>2 / 8</a:t>
+              <a:t>2 / 7</a:t>
             </a:r>
             <a:endParaRPr lang="en-US" sz="900" dirty="0"/>
           </a:p>
@@ -2596,7 +2507,7 @@
                 <a:ea typeface="Calibri" pitchFamily="34" charset="-122"/>
                 <a:cs typeface="Calibri" pitchFamily="34" charset="-120"/>
               </a:rPr>
-              <a:t>02 · The full map</a:t>
+              <a:t>02 · The problem</a:t>
             </a:r>
             <a:endParaRPr lang="en-US" sz="1100" dirty="0"/>
           </a:p>
@@ -2635,7 +2546,7 @@
                 <a:ea typeface="Georgia" pitchFamily="34" charset="-122"/>
                 <a:cs typeface="Georgia" pitchFamily="34" charset="-120"/>
               </a:rPr>
-              <a:t>10 capabilities. Three stages.</a:t>
+              <a:t>What we're solving.</a:t>
             </a:r>
             <a:endParaRPr lang="en-US" sz="3400" dirty="0"/>
           </a:p>
@@ -2649,8 +2560,33 @@
         </p:nvSpPr>
         <p:spPr>
           <a:xfrm>
-            <a:off x="434340" y="1691640"/>
-            <a:ext cx="2697480" cy="411480"/>
+            <a:off x="640080" y="1691640"/>
+            <a:ext cx="7863840" cy="2606040"/>
+          </a:xfrm>
+          <a:prstGeom prst="rect">
+            <a:avLst/>
+          </a:prstGeom>
+          <a:solidFill>
+            <a:srgbClr val="E8EEFC"/>
+          </a:solidFill>
+          <a:ln w="12700">
+            <a:solidFill>
+              <a:srgbClr val="E8EEFC"/>
+            </a:solidFill>
+            <a:prstDash val="solid"/>
+          </a:ln>
+        </p:spPr>
+      </p:sp>
+      <p:sp>
+        <p:nvSpPr>
+          <p:cNvPr id="6" name="Shape 4"/>
+          <p:cNvSpPr/>
+          <p:nvPr/>
+        </p:nvSpPr>
+        <p:spPr>
+          <a:xfrm>
+            <a:off x="640080" y="1691640"/>
+            <a:ext cx="73152" cy="2606040"/>
           </a:xfrm>
           <a:prstGeom prst="rect">
             <a:avLst/>
@@ -2668,67 +2604,193 @@
       </p:sp>
       <p:sp>
         <p:nvSpPr>
-          <p:cNvPr id="6" name="Text 4"/>
-          <p:cNvSpPr/>
-          <p:nvPr/>
-        </p:nvSpPr>
-        <p:spPr>
-          <a:xfrm>
-            <a:off x="434340" y="1691640"/>
-            <a:ext cx="2697480" cy="411480"/>
-          </a:xfrm>
-          <a:prstGeom prst="rect">
-            <a:avLst/>
-          </a:prstGeom>
-          <a:noFill/>
-          <a:ln/>
-        </p:spPr>
-        <p:txBody>
-          <a:bodyPr wrap="square" lIns="0" tIns="0" rIns="0" bIns="0" rtlCol="0" anchor="ctr"/>
-          <a:lstStyle/>
-          <a:p>
-            <a:pPr algn="ctr" indent="0" marL="0">
-              <a:buNone/>
-            </a:pPr>
-            <a:r>
-              <a:rPr lang="en-US" sz="1400" b="1" spc="500" kern="0" dirty="0">
-                <a:solidFill>
-                  <a:srgbClr val="FFFFFF"/>
-                </a:solidFill>
-                <a:latin typeface="Calibri" pitchFamily="34" charset="0"/>
-                <a:ea typeface="Calibri" pitchFamily="34" charset="-122"/>
-                <a:cs typeface="Calibri" pitchFamily="34" charset="-120"/>
-              </a:rPr>
-              <a:t>DISCOVER</a:t>
-            </a:r>
-            <a:endParaRPr lang="en-US" sz="1400" dirty="0"/>
-          </a:p>
-        </p:txBody>
-      </p:sp>
-      <p:sp>
-        <p:nvSpPr>
-          <p:cNvPr id="7" name="Shape 5"/>
-          <p:cNvSpPr/>
-          <p:nvPr/>
-        </p:nvSpPr>
-        <p:spPr>
-          <a:xfrm>
-            <a:off x="434340" y="2103120"/>
-            <a:ext cx="2697480" cy="2468880"/>
-          </a:xfrm>
-          <a:prstGeom prst="rect">
-            <a:avLst/>
-          </a:prstGeom>
-          <a:solidFill>
-            <a:srgbClr val="E8EEFC"/>
-          </a:solidFill>
-          <a:ln w="12700">
-            <a:solidFill>
-              <a:srgbClr val="02C39A"/>
-            </a:solidFill>
-            <a:prstDash val="solid"/>
-          </a:ln>
-        </p:spPr>
+          <p:cNvPr id="7" name="Text 5"/>
+          <p:cNvSpPr/>
+          <p:nvPr/>
+        </p:nvSpPr>
+        <p:spPr>
+          <a:xfrm>
+            <a:off x="1005840" y="1920240"/>
+            <a:ext cx="7315200" cy="2194560"/>
+          </a:xfrm>
+          <a:prstGeom prst="rect">
+            <a:avLst/>
+          </a:prstGeom>
+          <a:noFill/>
+          <a:ln/>
+        </p:spPr>
+        <p:txBody>
+          <a:bodyPr wrap="square" lIns="0" tIns="0" rIns="0" bIns="0" rtlCol="0" anchor="ctr"/>
+          <a:lstStyle/>
+          <a:p>
+            <a:pPr indent="0" marL="0">
+              <a:spcAft>
+                <a:spcPts val="400"/>
+              </a:spcAft>
+              <a:buNone/>
+            </a:pPr>
+            <a:r>
+              <a:rPr lang="en-US" sz="1700" b="1" dirty="0">
+                <a:solidFill>
+                  <a:srgbClr val="0F1B3D"/>
+                </a:solidFill>
+                <a:latin typeface="Calibri" pitchFamily="34" charset="0"/>
+                <a:ea typeface="Calibri" pitchFamily="34" charset="-122"/>
+                <a:cs typeface="Calibri" pitchFamily="34" charset="-120"/>
+              </a:rPr>
+              <a:t>For CISOs </a:t>
+            </a:r>
+            <a:pPr indent="0" marL="0">
+              <a:spcAft>
+                <a:spcPts val="400"/>
+              </a:spcAft>
+              <a:buNone/>
+            </a:pPr>
+            <a:r>
+              <a:rPr lang="en-US" sz="1700" dirty="0">
+                <a:solidFill>
+                  <a:srgbClr val="1A1F36"/>
+                </a:solidFill>
+                <a:latin typeface="Calibri" pitchFamily="34" charset="0"/>
+                <a:ea typeface="Calibri" pitchFamily="34" charset="-122"/>
+                <a:cs typeface="Calibri" pitchFamily="34" charset="-120"/>
+              </a:rPr>
+              <a:t>whose enterprises now run more agents than humans (144 : 1),</a:t>
+            </a:r>
+            <a:endParaRPr lang="en-US" sz="1700" dirty="0"/>
+          </a:p>
+          <a:p>
+            <a:pPr indent="0" marL="0">
+              <a:spcAft>
+                <a:spcPts val="400"/>
+              </a:spcAft>
+              <a:buNone/>
+            </a:pPr>
+            <a:r>
+              <a:rPr lang="en-US" sz="600" dirty="0">
+                <a:solidFill>
+                  <a:srgbClr val="000000"/>
+                </a:solidFill>
+                <a:latin typeface="Calibri" pitchFamily="34" charset="0"/>
+                <a:ea typeface="Calibri" pitchFamily="34" charset="-122"/>
+                <a:cs typeface="Calibri" pitchFamily="34" charset="-120"/>
+              </a:rPr>
+              <a:t> </a:t>
+            </a:r>
+            <a:endParaRPr lang="en-US" sz="1700" dirty="0"/>
+          </a:p>
+          <a:p>
+            <a:pPr indent="0" marL="0">
+              <a:spcAft>
+                <a:spcPts val="400"/>
+              </a:spcAft>
+              <a:buNone/>
+            </a:pPr>
+            <a:r>
+              <a:rPr lang="en-US" sz="1700" dirty="0">
+                <a:solidFill>
+                  <a:srgbClr val="1A1F36"/>
+                </a:solidFill>
+                <a:latin typeface="Calibri" pitchFamily="34" charset="0"/>
+                <a:ea typeface="Calibri" pitchFamily="34" charset="-122"/>
+                <a:cs typeface="Calibri" pitchFamily="34" charset="-120"/>
+              </a:rPr>
+              <a:t>there's no way to see </a:t>
+            </a:r>
+            <a:pPr indent="0" marL="0">
+              <a:spcAft>
+                <a:spcPts val="400"/>
+              </a:spcAft>
+              <a:buNone/>
+            </a:pPr>
+            <a:r>
+              <a:rPr lang="en-US" sz="1700" dirty="0">
+                <a:solidFill>
+                  <a:srgbClr val="1A1F36"/>
+                </a:solidFill>
+                <a:latin typeface="Calibri" pitchFamily="34" charset="0"/>
+                <a:ea typeface="Calibri" pitchFamily="34" charset="-122"/>
+                <a:cs typeface="Calibri" pitchFamily="34" charset="-120"/>
+              </a:rPr>
+              <a:t>what agents exist, who owns them, what they access, or what they did.</a:t>
+            </a:r>
+            <a:endParaRPr lang="en-US" sz="1700" dirty="0"/>
+          </a:p>
+          <a:p>
+            <a:pPr indent="0" marL="0">
+              <a:spcAft>
+                <a:spcPts val="400"/>
+              </a:spcAft>
+              <a:buNone/>
+            </a:pPr>
+            <a:r>
+              <a:rPr lang="en-US" sz="600" dirty="0">
+                <a:solidFill>
+                  <a:srgbClr val="000000"/>
+                </a:solidFill>
+                <a:latin typeface="Calibri" pitchFamily="34" charset="0"/>
+                <a:ea typeface="Calibri" pitchFamily="34" charset="-122"/>
+                <a:cs typeface="Calibri" pitchFamily="34" charset="-120"/>
+              </a:rPr>
+              <a:t> </a:t>
+            </a:r>
+            <a:endParaRPr lang="en-US" sz="1700" dirty="0"/>
+          </a:p>
+          <a:p>
+            <a:pPr indent="0" marL="0">
+              <a:spcAft>
+                <a:spcPts val="400"/>
+              </a:spcAft>
+              <a:buNone/>
+            </a:pPr>
+            <a:r>
+              <a:rPr lang="en-US" sz="1700" dirty="0">
+                <a:solidFill>
+                  <a:srgbClr val="1A1F36"/>
+                </a:solidFill>
+                <a:latin typeface="Calibri" pitchFamily="34" charset="0"/>
+                <a:ea typeface="Calibri" pitchFamily="34" charset="-122"/>
+                <a:cs typeface="Calibri" pitchFamily="34" charset="-120"/>
+              </a:rPr>
+              <a:t>The IAM and PAM tools they have </a:t>
+            </a:r>
+            <a:pPr indent="0" marL="0">
+              <a:spcAft>
+                <a:spcPts val="400"/>
+              </a:spcAft>
+              <a:buNone/>
+            </a:pPr>
+            <a:r>
+              <a:rPr lang="en-US" sz="1700" i="1" dirty="0">
+                <a:solidFill>
+                  <a:srgbClr val="1A1F36"/>
+                </a:solidFill>
+                <a:latin typeface="Calibri" pitchFamily="34" charset="0"/>
+                <a:ea typeface="Calibri" pitchFamily="34" charset="-122"/>
+                <a:cs typeface="Calibri" pitchFamily="34" charset="-120"/>
+              </a:rPr>
+              <a:t>were built for humans and NHIs — not agents</a:t>
+            </a:r>
+            <a:pPr indent="0" marL="0">
+              <a:spcAft>
+                <a:spcPts val="400"/>
+              </a:spcAft>
+              <a:buNone/>
+            </a:pPr>
+            <a:r>
+              <a:rPr lang="en-US" sz="1700" dirty="0">
+                <a:solidFill>
+                  <a:srgbClr val="1A1F36"/>
+                </a:solidFill>
+                <a:latin typeface="Calibri" pitchFamily="34" charset="0"/>
+                <a:ea typeface="Calibri" pitchFamily="34" charset="-122"/>
+                <a:cs typeface="Calibri" pitchFamily="34" charset="-120"/>
+              </a:rPr>
+              <a:t> that spin up in seconds, decide at runtime, and chain through tools and MCP servers.</a:t>
+            </a:r>
+            <a:endParaRPr lang="en-US" sz="1700" dirty="0"/>
+          </a:p>
+        </p:txBody>
       </p:sp>
       <p:sp>
         <p:nvSpPr>
@@ -2738,533 +2800,8 @@
         </p:nvSpPr>
         <p:spPr>
           <a:xfrm>
-            <a:off x="598932" y="2462784"/>
-            <a:ext cx="256032" cy="256032"/>
-          </a:xfrm>
-          <a:prstGeom prst="ellipse">
-            <a:avLst/>
-          </a:prstGeom>
-          <a:solidFill>
-            <a:srgbClr val="02C39A"/>
-          </a:solidFill>
-          <a:ln w="12700">
-            <a:solidFill>
-              <a:srgbClr val="02C39A"/>
-            </a:solidFill>
-            <a:prstDash val="solid"/>
-          </a:ln>
-        </p:spPr>
-      </p:sp>
-      <p:sp>
-        <p:nvSpPr>
-          <p:cNvPr id="9" name="Text 7"/>
-          <p:cNvSpPr/>
-          <p:nvPr/>
-        </p:nvSpPr>
-        <p:spPr>
-          <a:xfrm>
-            <a:off x="598932" y="2462784"/>
-            <a:ext cx="256032" cy="256032"/>
-          </a:xfrm>
-          <a:prstGeom prst="rect">
-            <a:avLst/>
-          </a:prstGeom>
-          <a:noFill/>
-          <a:ln/>
-        </p:spPr>
-        <p:txBody>
-          <a:bodyPr wrap="square" lIns="0" tIns="0" rIns="0" bIns="0" rtlCol="0" anchor="ctr"/>
-          <a:lstStyle/>
-          <a:p>
-            <a:pPr algn="ctr" indent="0" marL="0">
-              <a:buNone/>
-            </a:pPr>
-            <a:r>
-              <a:rPr lang="en-US" sz="1000" b="1" dirty="0">
-                <a:solidFill>
-                  <a:srgbClr val="FFFFFF"/>
-                </a:solidFill>
-                <a:latin typeface="Calibri" pitchFamily="34" charset="0"/>
-                <a:ea typeface="Calibri" pitchFamily="34" charset="-122"/>
-                <a:cs typeface="Calibri" pitchFamily="34" charset="-120"/>
-              </a:rPr>
-              <a:t>1</a:t>
-            </a:r>
-            <a:endParaRPr lang="en-US" sz="1000" dirty="0"/>
-          </a:p>
-        </p:txBody>
-      </p:sp>
-      <p:sp>
-        <p:nvSpPr>
-          <p:cNvPr id="10" name="Text 8"/>
-          <p:cNvSpPr/>
-          <p:nvPr/>
-        </p:nvSpPr>
-        <p:spPr>
-          <a:xfrm>
-            <a:off x="928116" y="2194560"/>
-            <a:ext cx="1554480" cy="792480"/>
-          </a:xfrm>
-          <a:prstGeom prst="rect">
-            <a:avLst/>
-          </a:prstGeom>
-          <a:noFill/>
-          <a:ln/>
-        </p:spPr>
-        <p:txBody>
-          <a:bodyPr wrap="square" lIns="0" tIns="0" rIns="0" bIns="0" rtlCol="0" anchor="ctr"/>
-          <a:lstStyle/>
-          <a:p>
-            <a:pPr indent="0" marL="0">
-              <a:buNone/>
-            </a:pPr>
-            <a:r>
-              <a:rPr lang="en-US" sz="1100" dirty="0">
-                <a:solidFill>
-                  <a:srgbClr val="1A1F36"/>
-                </a:solidFill>
-                <a:latin typeface="Calibri" pitchFamily="34" charset="0"/>
-                <a:ea typeface="Calibri" pitchFamily="34" charset="-122"/>
-                <a:cs typeface="Calibri" pitchFamily="34" charset="-120"/>
-              </a:rPr>
-              <a:t>Registration &amp; identification</a:t>
-            </a:r>
-            <a:endParaRPr lang="en-US" sz="1100" dirty="0"/>
-          </a:p>
-        </p:txBody>
-      </p:sp>
-      <p:sp>
-        <p:nvSpPr>
-          <p:cNvPr id="11" name="Shape 9"/>
-          <p:cNvSpPr/>
-          <p:nvPr/>
-        </p:nvSpPr>
-        <p:spPr>
-          <a:xfrm>
-            <a:off x="2510028" y="2481072"/>
-            <a:ext cx="594360" cy="219456"/>
-          </a:xfrm>
-          <a:prstGeom prst="rect">
-            <a:avLst/>
-          </a:prstGeom>
-          <a:solidFill>
-            <a:srgbClr val="02C39A"/>
-          </a:solidFill>
-          <a:ln w="12700">
-            <a:solidFill>
-              <a:srgbClr val="02C39A"/>
-            </a:solidFill>
-            <a:prstDash val="solid"/>
-          </a:ln>
-        </p:spPr>
-      </p:sp>
-      <p:sp>
-        <p:nvSpPr>
-          <p:cNvPr id="12" name="Text 10"/>
-          <p:cNvSpPr/>
-          <p:nvPr/>
-        </p:nvSpPr>
-        <p:spPr>
-          <a:xfrm>
-            <a:off x="2510028" y="2481072"/>
-            <a:ext cx="594360" cy="219456"/>
-          </a:xfrm>
-          <a:prstGeom prst="rect">
-            <a:avLst/>
-          </a:prstGeom>
-          <a:noFill/>
-          <a:ln/>
-        </p:spPr>
-        <p:txBody>
-          <a:bodyPr wrap="square" lIns="0" tIns="0" rIns="0" bIns="0" rtlCol="0" anchor="ctr"/>
-          <a:lstStyle/>
-          <a:p>
-            <a:pPr algn="ctr" indent="0" marL="0">
-              <a:buNone/>
-            </a:pPr>
-            <a:r>
-              <a:rPr lang="en-US" sz="900" b="1" dirty="0">
-                <a:solidFill>
-                  <a:srgbClr val="FFFFFF"/>
-                </a:solidFill>
-                <a:latin typeface="Calibri" pitchFamily="34" charset="0"/>
-                <a:ea typeface="Calibri" pitchFamily="34" charset="-122"/>
-                <a:cs typeface="Calibri" pitchFamily="34" charset="-120"/>
-              </a:rPr>
-              <a:t>M1 ✓</a:t>
-            </a:r>
-            <a:endParaRPr lang="en-US" sz="900" dirty="0"/>
-          </a:p>
-        </p:txBody>
-      </p:sp>
-      <p:sp>
-        <p:nvSpPr>
-          <p:cNvPr id="13" name="Shape 11"/>
-          <p:cNvSpPr/>
-          <p:nvPr/>
-        </p:nvSpPr>
-        <p:spPr>
-          <a:xfrm>
-            <a:off x="598932" y="3255264"/>
-            <a:ext cx="256032" cy="256032"/>
-          </a:xfrm>
-          <a:prstGeom prst="ellipse">
-            <a:avLst/>
-          </a:prstGeom>
-          <a:solidFill>
-            <a:srgbClr val="02C39A"/>
-          </a:solidFill>
-          <a:ln w="12700">
-            <a:solidFill>
-              <a:srgbClr val="02C39A"/>
-            </a:solidFill>
-            <a:prstDash val="solid"/>
-          </a:ln>
-        </p:spPr>
-      </p:sp>
-      <p:sp>
-        <p:nvSpPr>
-          <p:cNvPr id="14" name="Text 12"/>
-          <p:cNvSpPr/>
-          <p:nvPr/>
-        </p:nvSpPr>
-        <p:spPr>
-          <a:xfrm>
-            <a:off x="598932" y="3255264"/>
-            <a:ext cx="256032" cy="256032"/>
-          </a:xfrm>
-          <a:prstGeom prst="rect">
-            <a:avLst/>
-          </a:prstGeom>
-          <a:noFill/>
-          <a:ln/>
-        </p:spPr>
-        <p:txBody>
-          <a:bodyPr wrap="square" lIns="0" tIns="0" rIns="0" bIns="0" rtlCol="0" anchor="ctr"/>
-          <a:lstStyle/>
-          <a:p>
-            <a:pPr algn="ctr" indent="0" marL="0">
-              <a:buNone/>
-            </a:pPr>
-            <a:r>
-              <a:rPr lang="en-US" sz="1000" b="1" dirty="0">
-                <a:solidFill>
-                  <a:srgbClr val="FFFFFF"/>
-                </a:solidFill>
-                <a:latin typeface="Calibri" pitchFamily="34" charset="0"/>
-                <a:ea typeface="Calibri" pitchFamily="34" charset="-122"/>
-                <a:cs typeface="Calibri" pitchFamily="34" charset="-120"/>
-              </a:rPr>
-              <a:t>2</a:t>
-            </a:r>
-            <a:endParaRPr lang="en-US" sz="1000" dirty="0"/>
-          </a:p>
-        </p:txBody>
-      </p:sp>
-      <p:sp>
-        <p:nvSpPr>
-          <p:cNvPr id="15" name="Text 13"/>
-          <p:cNvSpPr/>
-          <p:nvPr/>
-        </p:nvSpPr>
-        <p:spPr>
-          <a:xfrm>
-            <a:off x="928116" y="2987040"/>
-            <a:ext cx="1554480" cy="792480"/>
-          </a:xfrm>
-          <a:prstGeom prst="rect">
-            <a:avLst/>
-          </a:prstGeom>
-          <a:noFill/>
-          <a:ln/>
-        </p:spPr>
-        <p:txBody>
-          <a:bodyPr wrap="square" lIns="0" tIns="0" rIns="0" bIns="0" rtlCol="0" anchor="ctr"/>
-          <a:lstStyle/>
-          <a:p>
-            <a:pPr indent="0" marL="0">
-              <a:buNone/>
-            </a:pPr>
-            <a:r>
-              <a:rPr lang="en-US" sz="1100" dirty="0">
-                <a:solidFill>
-                  <a:srgbClr val="1A1F36"/>
-                </a:solidFill>
-                <a:latin typeface="Calibri" pitchFamily="34" charset="0"/>
-                <a:ea typeface="Calibri" pitchFamily="34" charset="-122"/>
-                <a:cs typeface="Calibri" pitchFamily="34" charset="-120"/>
-              </a:rPr>
-              <a:t>Ownership assignment</a:t>
-            </a:r>
-            <a:endParaRPr lang="en-US" sz="1100" dirty="0"/>
-          </a:p>
-        </p:txBody>
-      </p:sp>
-      <p:sp>
-        <p:nvSpPr>
-          <p:cNvPr id="16" name="Shape 14"/>
-          <p:cNvSpPr/>
-          <p:nvPr/>
-        </p:nvSpPr>
-        <p:spPr>
-          <a:xfrm>
-            <a:off x="2510028" y="3273552"/>
-            <a:ext cx="594360" cy="219456"/>
-          </a:xfrm>
-          <a:prstGeom prst="rect">
-            <a:avLst/>
-          </a:prstGeom>
-          <a:solidFill>
-            <a:srgbClr val="02C39A"/>
-          </a:solidFill>
-          <a:ln w="12700">
-            <a:solidFill>
-              <a:srgbClr val="02C39A"/>
-            </a:solidFill>
-            <a:prstDash val="solid"/>
-          </a:ln>
-        </p:spPr>
-      </p:sp>
-      <p:sp>
-        <p:nvSpPr>
-          <p:cNvPr id="17" name="Text 15"/>
-          <p:cNvSpPr/>
-          <p:nvPr/>
-        </p:nvSpPr>
-        <p:spPr>
-          <a:xfrm>
-            <a:off x="2510028" y="3273552"/>
-            <a:ext cx="594360" cy="219456"/>
-          </a:xfrm>
-          <a:prstGeom prst="rect">
-            <a:avLst/>
-          </a:prstGeom>
-          <a:noFill/>
-          <a:ln/>
-        </p:spPr>
-        <p:txBody>
-          <a:bodyPr wrap="square" lIns="0" tIns="0" rIns="0" bIns="0" rtlCol="0" anchor="ctr"/>
-          <a:lstStyle/>
-          <a:p>
-            <a:pPr algn="ctr" indent="0" marL="0">
-              <a:buNone/>
-            </a:pPr>
-            <a:r>
-              <a:rPr lang="en-US" sz="900" b="1" dirty="0">
-                <a:solidFill>
-                  <a:srgbClr val="FFFFFF"/>
-                </a:solidFill>
-                <a:latin typeface="Calibri" pitchFamily="34" charset="0"/>
-                <a:ea typeface="Calibri" pitchFamily="34" charset="-122"/>
-                <a:cs typeface="Calibri" pitchFamily="34" charset="-120"/>
-              </a:rPr>
-              <a:t>M1 ✓</a:t>
-            </a:r>
-            <a:endParaRPr lang="en-US" sz="900" dirty="0"/>
-          </a:p>
-        </p:txBody>
-      </p:sp>
-      <p:sp>
-        <p:nvSpPr>
-          <p:cNvPr id="18" name="Shape 16"/>
-          <p:cNvSpPr/>
-          <p:nvPr/>
-        </p:nvSpPr>
-        <p:spPr>
-          <a:xfrm>
-            <a:off x="598932" y="4047744"/>
-            <a:ext cx="256032" cy="256032"/>
-          </a:xfrm>
-          <a:prstGeom prst="ellipse">
-            <a:avLst/>
-          </a:prstGeom>
-          <a:solidFill>
-            <a:srgbClr val="02C39A"/>
-          </a:solidFill>
-          <a:ln w="12700">
-            <a:solidFill>
-              <a:srgbClr val="02C39A"/>
-            </a:solidFill>
-            <a:prstDash val="solid"/>
-          </a:ln>
-        </p:spPr>
-      </p:sp>
-      <p:sp>
-        <p:nvSpPr>
-          <p:cNvPr id="19" name="Text 17"/>
-          <p:cNvSpPr/>
-          <p:nvPr/>
-        </p:nvSpPr>
-        <p:spPr>
-          <a:xfrm>
-            <a:off x="598932" y="4047744"/>
-            <a:ext cx="256032" cy="256032"/>
-          </a:xfrm>
-          <a:prstGeom prst="rect">
-            <a:avLst/>
-          </a:prstGeom>
-          <a:noFill/>
-          <a:ln/>
-        </p:spPr>
-        <p:txBody>
-          <a:bodyPr wrap="square" lIns="0" tIns="0" rIns="0" bIns="0" rtlCol="0" anchor="ctr"/>
-          <a:lstStyle/>
-          <a:p>
-            <a:pPr algn="ctr" indent="0" marL="0">
-              <a:buNone/>
-            </a:pPr>
-            <a:r>
-              <a:rPr lang="en-US" sz="1000" b="1" dirty="0">
-                <a:solidFill>
-                  <a:srgbClr val="FFFFFF"/>
-                </a:solidFill>
-                <a:latin typeface="Calibri" pitchFamily="34" charset="0"/>
-                <a:ea typeface="Calibri" pitchFamily="34" charset="-122"/>
-                <a:cs typeface="Calibri" pitchFamily="34" charset="-120"/>
-              </a:rPr>
-              <a:t>10</a:t>
-            </a:r>
-            <a:endParaRPr lang="en-US" sz="1000" dirty="0"/>
-          </a:p>
-        </p:txBody>
-      </p:sp>
-      <p:sp>
-        <p:nvSpPr>
-          <p:cNvPr id="20" name="Text 18"/>
-          <p:cNvSpPr/>
-          <p:nvPr/>
-        </p:nvSpPr>
-        <p:spPr>
-          <a:xfrm>
-            <a:off x="928116" y="3779520"/>
-            <a:ext cx="1554480" cy="792480"/>
-          </a:xfrm>
-          <a:prstGeom prst="rect">
-            <a:avLst/>
-          </a:prstGeom>
-          <a:noFill/>
-          <a:ln/>
-        </p:spPr>
-        <p:txBody>
-          <a:bodyPr wrap="square" lIns="0" tIns="0" rIns="0" bIns="0" rtlCol="0" anchor="ctr"/>
-          <a:lstStyle/>
-          <a:p>
-            <a:pPr indent="0" marL="0">
-              <a:buNone/>
-            </a:pPr>
-            <a:r>
-              <a:rPr lang="en-US" sz="1100" dirty="0">
-                <a:solidFill>
-                  <a:srgbClr val="1A1F36"/>
-                </a:solidFill>
-                <a:latin typeface="Calibri" pitchFamily="34" charset="0"/>
-                <a:ea typeface="Calibri" pitchFamily="34" charset="-122"/>
-                <a:cs typeface="Calibri" pitchFamily="34" charset="-120"/>
-              </a:rPr>
-              <a:t>Visibility &amp; observability</a:t>
-            </a:r>
-            <a:endParaRPr lang="en-US" sz="1100" dirty="0"/>
-          </a:p>
-        </p:txBody>
-      </p:sp>
-      <p:sp>
-        <p:nvSpPr>
-          <p:cNvPr id="21" name="Shape 19"/>
-          <p:cNvSpPr/>
-          <p:nvPr/>
-        </p:nvSpPr>
-        <p:spPr>
-          <a:xfrm>
-            <a:off x="2510028" y="4066032"/>
-            <a:ext cx="594360" cy="219456"/>
-          </a:xfrm>
-          <a:prstGeom prst="rect">
-            <a:avLst/>
-          </a:prstGeom>
-          <a:solidFill>
-            <a:srgbClr val="02C39A"/>
-          </a:solidFill>
-          <a:ln w="12700">
-            <a:solidFill>
-              <a:srgbClr val="02C39A"/>
-            </a:solidFill>
-            <a:prstDash val="solid"/>
-          </a:ln>
-        </p:spPr>
-      </p:sp>
-      <p:sp>
-        <p:nvSpPr>
-          <p:cNvPr id="22" name="Text 20"/>
-          <p:cNvSpPr/>
-          <p:nvPr/>
-        </p:nvSpPr>
-        <p:spPr>
-          <a:xfrm>
-            <a:off x="2510028" y="4066032"/>
-            <a:ext cx="594360" cy="219456"/>
-          </a:xfrm>
-          <a:prstGeom prst="rect">
-            <a:avLst/>
-          </a:prstGeom>
-          <a:noFill/>
-          <a:ln/>
-        </p:spPr>
-        <p:txBody>
-          <a:bodyPr wrap="square" lIns="0" tIns="0" rIns="0" bIns="0" rtlCol="0" anchor="ctr"/>
-          <a:lstStyle/>
-          <a:p>
-            <a:pPr algn="ctr" indent="0" marL="0">
-              <a:buNone/>
-            </a:pPr>
-            <a:r>
-              <a:rPr lang="en-US" sz="900" b="1" dirty="0">
-                <a:solidFill>
-                  <a:srgbClr val="FFFFFF"/>
-                </a:solidFill>
-                <a:latin typeface="Calibri" pitchFamily="34" charset="0"/>
-                <a:ea typeface="Calibri" pitchFamily="34" charset="-122"/>
-                <a:cs typeface="Calibri" pitchFamily="34" charset="-120"/>
-              </a:rPr>
-              <a:t>M1 ✓</a:t>
-            </a:r>
-            <a:endParaRPr lang="en-US" sz="900" dirty="0"/>
-          </a:p>
-        </p:txBody>
-      </p:sp>
-      <p:sp>
-        <p:nvSpPr>
-          <p:cNvPr id="23" name="Shape 21"/>
-          <p:cNvSpPr/>
-          <p:nvPr/>
-        </p:nvSpPr>
-        <p:spPr>
-          <a:xfrm>
-            <a:off x="3140964" y="1892808"/>
-            <a:ext cx="82296" cy="0"/>
-          </a:xfrm>
-          <a:prstGeom prst="line">
-            <a:avLst/>
-          </a:prstGeom>
-          <a:noFill/>
-          <a:ln w="25400">
-            <a:solidFill>
-              <a:srgbClr val="CBD5E1"/>
-            </a:solidFill>
-            <a:prstDash val="solid"/>
-            <a:tailEnd type="triangle"/>
-          </a:ln>
-        </p:spPr>
-      </p:sp>
-      <p:sp>
-        <p:nvSpPr>
-          <p:cNvPr id="24" name="Shape 22"/>
-          <p:cNvSpPr/>
-          <p:nvPr/>
-        </p:nvSpPr>
-        <p:spPr>
-          <a:xfrm>
-            <a:off x="3223260" y="1691640"/>
-            <a:ext cx="2697480" cy="411480"/>
+            <a:off x="640080" y="4526280"/>
+            <a:ext cx="7863840" cy="457200"/>
           </a:xfrm>
           <a:prstGeom prst="rect">
             <a:avLst/>
@@ -3282,30 +2819,44 @@
       </p:sp>
       <p:sp>
         <p:nvSpPr>
-          <p:cNvPr id="25" name="Text 23"/>
-          <p:cNvSpPr/>
-          <p:nvPr/>
-        </p:nvSpPr>
-        <p:spPr>
-          <a:xfrm>
-            <a:off x="3223260" y="1691640"/>
-            <a:ext cx="2697480" cy="411480"/>
-          </a:xfrm>
-          <a:prstGeom prst="rect">
-            <a:avLst/>
-          </a:prstGeom>
-          <a:noFill/>
-          <a:ln/>
-        </p:spPr>
-        <p:txBody>
-          <a:bodyPr wrap="square" lIns="0" tIns="0" rIns="0" bIns="0" rtlCol="0" anchor="ctr"/>
-          <a:lstStyle/>
-          <a:p>
-            <a:pPr algn="ctr" indent="0" marL="0">
-              <a:buNone/>
-            </a:pPr>
-            <a:r>
-              <a:rPr lang="en-US" sz="1400" b="1" spc="500" kern="0" dirty="0">
+          <p:cNvPr id="9" name="Text 7"/>
+          <p:cNvSpPr/>
+          <p:nvPr/>
+        </p:nvSpPr>
+        <p:spPr>
+          <a:xfrm>
+            <a:off x="868680" y="4526280"/>
+            <a:ext cx="7406640" cy="457200"/>
+          </a:xfrm>
+          <a:prstGeom prst="rect">
+            <a:avLst/>
+          </a:prstGeom>
+          <a:noFill/>
+          <a:ln/>
+        </p:spPr>
+        <p:txBody>
+          <a:bodyPr wrap="square" lIns="0" tIns="0" rIns="0" bIns="0" rtlCol="0" anchor="ctr"/>
+          <a:lstStyle/>
+          <a:p>
+            <a:pPr indent="0" marL="0">
+              <a:buNone/>
+            </a:pPr>
+            <a:r>
+              <a:rPr lang="en-US" sz="1100" b="1" spc="300" kern="0" dirty="0">
+                <a:solidFill>
+                  <a:srgbClr val="02C39A"/>
+                </a:solidFill>
+                <a:latin typeface="Calibri" pitchFamily="34" charset="0"/>
+                <a:ea typeface="Calibri" pitchFamily="34" charset="-122"/>
+                <a:cs typeface="Calibri" pitchFamily="34" charset="-120"/>
+              </a:rPr>
+              <a:t>LINX SOLVES THIS WITH  </a:t>
+            </a:r>
+            <a:pPr indent="0" marL="0">
+              <a:buNone/>
+            </a:pPr>
+            <a:r>
+              <a:rPr lang="en-US" sz="1400" dirty="0">
                 <a:solidFill>
                   <a:srgbClr val="FFFFFF"/>
                 </a:solidFill>
@@ -3313,88 +2864,13 @@
                 <a:ea typeface="Calibri" pitchFamily="34" charset="-122"/>
                 <a:cs typeface="Calibri" pitchFamily="34" charset="-120"/>
               </a:rPr>
-              <a:t>ASSESS</a:t>
-            </a:r>
-            <a:endParaRPr lang="en-US" sz="1400" dirty="0"/>
-          </a:p>
-        </p:txBody>
-      </p:sp>
-      <p:sp>
-        <p:nvSpPr>
-          <p:cNvPr id="26" name="Shape 24"/>
-          <p:cNvSpPr/>
-          <p:nvPr/>
-        </p:nvSpPr>
-        <p:spPr>
-          <a:xfrm>
-            <a:off x="3223260" y="2103120"/>
-            <a:ext cx="2697480" cy="2468880"/>
-          </a:xfrm>
-          <a:prstGeom prst="rect">
-            <a:avLst/>
-          </a:prstGeom>
-          <a:solidFill>
-            <a:srgbClr val="E8EEFC"/>
-          </a:solidFill>
-          <a:ln w="12700">
-            <a:solidFill>
-              <a:srgbClr val="0F1B3D"/>
-            </a:solidFill>
-            <a:prstDash val="solid"/>
-          </a:ln>
-        </p:spPr>
-      </p:sp>
-      <p:sp>
-        <p:nvSpPr>
-          <p:cNvPr id="27" name="Shape 25"/>
-          <p:cNvSpPr/>
-          <p:nvPr/>
-        </p:nvSpPr>
-        <p:spPr>
-          <a:xfrm>
-            <a:off x="3387852" y="2462784"/>
-            <a:ext cx="256032" cy="256032"/>
-          </a:xfrm>
-          <a:prstGeom prst="ellipse">
-            <a:avLst/>
-          </a:prstGeom>
-          <a:solidFill>
-            <a:srgbClr val="0F1B3D"/>
-          </a:solidFill>
-          <a:ln w="12700">
-            <a:solidFill>
-              <a:srgbClr val="0F1B3D"/>
-            </a:solidFill>
-            <a:prstDash val="solid"/>
-          </a:ln>
-        </p:spPr>
-      </p:sp>
-      <p:sp>
-        <p:nvSpPr>
-          <p:cNvPr id="28" name="Text 26"/>
-          <p:cNvSpPr/>
-          <p:nvPr/>
-        </p:nvSpPr>
-        <p:spPr>
-          <a:xfrm>
-            <a:off x="3387852" y="2462784"/>
-            <a:ext cx="256032" cy="256032"/>
-          </a:xfrm>
-          <a:prstGeom prst="rect">
-            <a:avLst/>
-          </a:prstGeom>
-          <a:noFill/>
-          <a:ln/>
-        </p:spPr>
-        <p:txBody>
-          <a:bodyPr wrap="square" lIns="0" tIns="0" rIns="0" bIns="0" rtlCol="0" anchor="ctr"/>
-          <a:lstStyle/>
-          <a:p>
-            <a:pPr algn="ctr" indent="0" marL="0">
-              <a:buNone/>
-            </a:pPr>
-            <a:r>
-              <a:rPr lang="en-US" sz="1000" b="1" dirty="0">
+              <a:t>agentic identity governance, end-to-end:  </a:t>
+            </a:r>
+            <a:pPr indent="0" marL="0">
+              <a:buNone/>
+            </a:pPr>
+            <a:r>
+              <a:rPr lang="en-US" sz="1400" b="1" dirty="0">
                 <a:solidFill>
                   <a:srgbClr val="FFFFFF"/>
                 </a:solidFill>
@@ -3402,46 +2878,7 @@
                 <a:ea typeface="Calibri" pitchFamily="34" charset="-122"/>
                 <a:cs typeface="Calibri" pitchFamily="34" charset="-120"/>
               </a:rPr>
-              <a:t>3</a:t>
-            </a:r>
-            <a:endParaRPr lang="en-US" sz="1000" dirty="0"/>
-          </a:p>
-        </p:txBody>
-      </p:sp>
-      <p:sp>
-        <p:nvSpPr>
-          <p:cNvPr id="29" name="Text 27"/>
-          <p:cNvSpPr/>
-          <p:nvPr/>
-        </p:nvSpPr>
-        <p:spPr>
-          <a:xfrm>
-            <a:off x="3717036" y="2194560"/>
-            <a:ext cx="1554480" cy="792480"/>
-          </a:xfrm>
-          <a:prstGeom prst="rect">
-            <a:avLst/>
-          </a:prstGeom>
-          <a:noFill/>
-          <a:ln/>
-        </p:spPr>
-        <p:txBody>
-          <a:bodyPr wrap="square" lIns="0" tIns="0" rIns="0" bIns="0" rtlCol="0" anchor="ctr"/>
-          <a:lstStyle/>
-          <a:p>
-            <a:pPr indent="0" marL="0">
-              <a:buNone/>
-            </a:pPr>
-            <a:r>
-              <a:rPr lang="en-US" sz="1100" dirty="0">
-                <a:solidFill>
-                  <a:srgbClr val="1A1F36"/>
-                </a:solidFill>
-                <a:latin typeface="Calibri" pitchFamily="34" charset="0"/>
-                <a:ea typeface="Calibri" pitchFamily="34" charset="-122"/>
-                <a:cs typeface="Calibri" pitchFamily="34" charset="-120"/>
-              </a:rPr>
-              <a:t>Authentication</a:t>
+              <a:t>Discover → Assess → Enforce.</a:t>
             </a:r>
             <a:endParaRPr lang="en-US" sz="1100" dirty="0"/>
           </a:p>
@@ -3449,1253 +2886,7 @@
       </p:sp>
       <p:sp>
         <p:nvSpPr>
-          <p:cNvPr id="30" name="Shape 28"/>
-          <p:cNvSpPr/>
-          <p:nvPr/>
-        </p:nvSpPr>
-        <p:spPr>
-          <a:xfrm>
-            <a:off x="5298948" y="2481072"/>
-            <a:ext cx="594360" cy="219456"/>
-          </a:xfrm>
-          <a:prstGeom prst="rect">
-            <a:avLst/>
-          </a:prstGeom>
-          <a:solidFill>
-            <a:srgbClr val="F59E0B"/>
-          </a:solidFill>
-          <a:ln w="12700">
-            <a:solidFill>
-              <a:srgbClr val="F59E0B"/>
-            </a:solidFill>
-            <a:prstDash val="solid"/>
-          </a:ln>
-        </p:spPr>
-      </p:sp>
-      <p:sp>
-        <p:nvSpPr>
-          <p:cNvPr id="31" name="Text 29"/>
-          <p:cNvSpPr/>
-          <p:nvPr/>
-        </p:nvSpPr>
-        <p:spPr>
-          <a:xfrm>
-            <a:off x="5298948" y="2481072"/>
-            <a:ext cx="594360" cy="219456"/>
-          </a:xfrm>
-          <a:prstGeom prst="rect">
-            <a:avLst/>
-          </a:prstGeom>
-          <a:noFill/>
-          <a:ln/>
-        </p:spPr>
-        <p:txBody>
-          <a:bodyPr wrap="square" lIns="0" tIns="0" rIns="0" bIns="0" rtlCol="0" anchor="ctr"/>
-          <a:lstStyle/>
-          <a:p>
-            <a:pPr algn="ctr" indent="0" marL="0">
-              <a:buNone/>
-            </a:pPr>
-            <a:r>
-              <a:rPr lang="en-US" sz="900" b="1" dirty="0">
-                <a:solidFill>
-                  <a:srgbClr val="FFFFFF"/>
-                </a:solidFill>
-                <a:latin typeface="Calibri" pitchFamily="34" charset="0"/>
-                <a:ea typeface="Calibri" pitchFamily="34" charset="-122"/>
-                <a:cs typeface="Calibri" pitchFamily="34" charset="-120"/>
-              </a:rPr>
-              <a:t>M2</a:t>
-            </a:r>
-            <a:endParaRPr lang="en-US" sz="900" dirty="0"/>
-          </a:p>
-        </p:txBody>
-      </p:sp>
-      <p:sp>
-        <p:nvSpPr>
-          <p:cNvPr id="32" name="Shape 30"/>
-          <p:cNvSpPr/>
-          <p:nvPr/>
-        </p:nvSpPr>
-        <p:spPr>
-          <a:xfrm>
-            <a:off x="3387852" y="3255264"/>
-            <a:ext cx="256032" cy="256032"/>
-          </a:xfrm>
-          <a:prstGeom prst="ellipse">
-            <a:avLst/>
-          </a:prstGeom>
-          <a:solidFill>
-            <a:srgbClr val="0F1B3D"/>
-          </a:solidFill>
-          <a:ln w="12700">
-            <a:solidFill>
-              <a:srgbClr val="0F1B3D"/>
-            </a:solidFill>
-            <a:prstDash val="solid"/>
-          </a:ln>
-        </p:spPr>
-      </p:sp>
-      <p:sp>
-        <p:nvSpPr>
-          <p:cNvPr id="33" name="Text 31"/>
-          <p:cNvSpPr/>
-          <p:nvPr/>
-        </p:nvSpPr>
-        <p:spPr>
-          <a:xfrm>
-            <a:off x="3387852" y="3255264"/>
-            <a:ext cx="256032" cy="256032"/>
-          </a:xfrm>
-          <a:prstGeom prst="rect">
-            <a:avLst/>
-          </a:prstGeom>
-          <a:noFill/>
-          <a:ln/>
-        </p:spPr>
-        <p:txBody>
-          <a:bodyPr wrap="square" lIns="0" tIns="0" rIns="0" bIns="0" rtlCol="0" anchor="ctr"/>
-          <a:lstStyle/>
-          <a:p>
-            <a:pPr algn="ctr" indent="0" marL="0">
-              <a:buNone/>
-            </a:pPr>
-            <a:r>
-              <a:rPr lang="en-US" sz="1000" b="1" dirty="0">
-                <a:solidFill>
-                  <a:srgbClr val="FFFFFF"/>
-                </a:solidFill>
-                <a:latin typeface="Calibri" pitchFamily="34" charset="0"/>
-                <a:ea typeface="Calibri" pitchFamily="34" charset="-122"/>
-                <a:cs typeface="Calibri" pitchFamily="34" charset="-120"/>
-              </a:rPr>
-              <a:t>4</a:t>
-            </a:r>
-            <a:endParaRPr lang="en-US" sz="1000" dirty="0"/>
-          </a:p>
-        </p:txBody>
-      </p:sp>
-      <p:sp>
-        <p:nvSpPr>
-          <p:cNvPr id="34" name="Text 32"/>
-          <p:cNvSpPr/>
-          <p:nvPr/>
-        </p:nvSpPr>
-        <p:spPr>
-          <a:xfrm>
-            <a:off x="3717036" y="2987040"/>
-            <a:ext cx="1554480" cy="792480"/>
-          </a:xfrm>
-          <a:prstGeom prst="rect">
-            <a:avLst/>
-          </a:prstGeom>
-          <a:noFill/>
-          <a:ln/>
-        </p:spPr>
-        <p:txBody>
-          <a:bodyPr wrap="square" lIns="0" tIns="0" rIns="0" bIns="0" rtlCol="0" anchor="ctr"/>
-          <a:lstStyle/>
-          <a:p>
-            <a:pPr indent="0" marL="0">
-              <a:buNone/>
-            </a:pPr>
-            <a:r>
-              <a:rPr lang="en-US" sz="1100" dirty="0">
-                <a:solidFill>
-                  <a:srgbClr val="1A1F36"/>
-                </a:solidFill>
-                <a:latin typeface="Calibri" pitchFamily="34" charset="0"/>
-                <a:ea typeface="Calibri" pitchFamily="34" charset="-122"/>
-                <a:cs typeface="Calibri" pitchFamily="34" charset="-120"/>
-              </a:rPr>
-              <a:t>Authorization &amp; delegation</a:t>
-            </a:r>
-            <a:endParaRPr lang="en-US" sz="1100" dirty="0"/>
-          </a:p>
-        </p:txBody>
-      </p:sp>
-      <p:sp>
-        <p:nvSpPr>
-          <p:cNvPr id="35" name="Shape 33"/>
-          <p:cNvSpPr/>
-          <p:nvPr/>
-        </p:nvSpPr>
-        <p:spPr>
-          <a:xfrm>
-            <a:off x="5298948" y="3273552"/>
-            <a:ext cx="594360" cy="219456"/>
-          </a:xfrm>
-          <a:prstGeom prst="rect">
-            <a:avLst/>
-          </a:prstGeom>
-          <a:solidFill>
-            <a:srgbClr val="0F1B3D"/>
-          </a:solidFill>
-          <a:ln w="12700">
-            <a:solidFill>
-              <a:srgbClr val="0F1B3D"/>
-            </a:solidFill>
-            <a:prstDash val="solid"/>
-          </a:ln>
-        </p:spPr>
-      </p:sp>
-      <p:sp>
-        <p:nvSpPr>
-          <p:cNvPr id="36" name="Text 34"/>
-          <p:cNvSpPr/>
-          <p:nvPr/>
-        </p:nvSpPr>
-        <p:spPr>
-          <a:xfrm>
-            <a:off x="5298948" y="3273552"/>
-            <a:ext cx="594360" cy="219456"/>
-          </a:xfrm>
-          <a:prstGeom prst="rect">
-            <a:avLst/>
-          </a:prstGeom>
-          <a:noFill/>
-          <a:ln/>
-        </p:spPr>
-        <p:txBody>
-          <a:bodyPr wrap="square" lIns="0" tIns="0" rIns="0" bIns="0" rtlCol="0" anchor="ctr"/>
-          <a:lstStyle/>
-          <a:p>
-            <a:pPr algn="ctr" indent="0" marL="0">
-              <a:buNone/>
-            </a:pPr>
-            <a:r>
-              <a:rPr lang="en-US" sz="900" b="1" dirty="0">
-                <a:solidFill>
-                  <a:srgbClr val="FFFFFF"/>
-                </a:solidFill>
-                <a:latin typeface="Calibri" pitchFamily="34" charset="0"/>
-                <a:ea typeface="Calibri" pitchFamily="34" charset="-122"/>
-                <a:cs typeface="Calibri" pitchFamily="34" charset="-120"/>
-              </a:rPr>
-              <a:t>P0</a:t>
-            </a:r>
-            <a:endParaRPr lang="en-US" sz="900" dirty="0"/>
-          </a:p>
-        </p:txBody>
-      </p:sp>
-      <p:sp>
-        <p:nvSpPr>
-          <p:cNvPr id="37" name="Shape 35"/>
-          <p:cNvSpPr/>
-          <p:nvPr/>
-        </p:nvSpPr>
-        <p:spPr>
-          <a:xfrm>
-            <a:off x="3387852" y="4047744"/>
-            <a:ext cx="256032" cy="256032"/>
-          </a:xfrm>
-          <a:prstGeom prst="ellipse">
-            <a:avLst/>
-          </a:prstGeom>
-          <a:solidFill>
-            <a:srgbClr val="0F1B3D"/>
-          </a:solidFill>
-          <a:ln w="12700">
-            <a:solidFill>
-              <a:srgbClr val="0F1B3D"/>
-            </a:solidFill>
-            <a:prstDash val="solid"/>
-          </a:ln>
-        </p:spPr>
-      </p:sp>
-      <p:sp>
-        <p:nvSpPr>
-          <p:cNvPr id="38" name="Text 36"/>
-          <p:cNvSpPr/>
-          <p:nvPr/>
-        </p:nvSpPr>
-        <p:spPr>
-          <a:xfrm>
-            <a:off x="3387852" y="4047744"/>
-            <a:ext cx="256032" cy="256032"/>
-          </a:xfrm>
-          <a:prstGeom prst="rect">
-            <a:avLst/>
-          </a:prstGeom>
-          <a:noFill/>
-          <a:ln/>
-        </p:spPr>
-        <p:txBody>
-          <a:bodyPr wrap="square" lIns="0" tIns="0" rIns="0" bIns="0" rtlCol="0" anchor="ctr"/>
-          <a:lstStyle/>
-          <a:p>
-            <a:pPr algn="ctr" indent="0" marL="0">
-              <a:buNone/>
-            </a:pPr>
-            <a:r>
-              <a:rPr lang="en-US" sz="1000" b="1" dirty="0">
-                <a:solidFill>
-                  <a:srgbClr val="FFFFFF"/>
-                </a:solidFill>
-                <a:latin typeface="Calibri" pitchFamily="34" charset="0"/>
-                <a:ea typeface="Calibri" pitchFamily="34" charset="-122"/>
-                <a:cs typeface="Calibri" pitchFamily="34" charset="-120"/>
-              </a:rPr>
-              <a:t>9</a:t>
-            </a:r>
-            <a:endParaRPr lang="en-US" sz="1000" dirty="0"/>
-          </a:p>
-        </p:txBody>
-      </p:sp>
-      <p:sp>
-        <p:nvSpPr>
-          <p:cNvPr id="39" name="Text 37"/>
-          <p:cNvSpPr/>
-          <p:nvPr/>
-        </p:nvSpPr>
-        <p:spPr>
-          <a:xfrm>
-            <a:off x="3717036" y="3779520"/>
-            <a:ext cx="1554480" cy="792480"/>
-          </a:xfrm>
-          <a:prstGeom prst="rect">
-            <a:avLst/>
-          </a:prstGeom>
-          <a:noFill/>
-          <a:ln/>
-        </p:spPr>
-        <p:txBody>
-          <a:bodyPr wrap="square" lIns="0" tIns="0" rIns="0" bIns="0" rtlCol="0" anchor="ctr"/>
-          <a:lstStyle/>
-          <a:p>
-            <a:pPr indent="0" marL="0">
-              <a:buNone/>
-            </a:pPr>
-            <a:r>
-              <a:rPr lang="en-US" sz="1100" dirty="0">
-                <a:solidFill>
-                  <a:srgbClr val="1A1F36"/>
-                </a:solidFill>
-                <a:latin typeface="Calibri" pitchFamily="34" charset="0"/>
-                <a:ea typeface="Calibri" pitchFamily="34" charset="-122"/>
-                <a:cs typeface="Calibri" pitchFamily="34" charset="-120"/>
-              </a:rPr>
-              <a:t>Multi-agent collaboration</a:t>
-            </a:r>
-            <a:endParaRPr lang="en-US" sz="1100" dirty="0"/>
-          </a:p>
-        </p:txBody>
-      </p:sp>
-      <p:sp>
-        <p:nvSpPr>
-          <p:cNvPr id="40" name="Shape 38"/>
-          <p:cNvSpPr/>
-          <p:nvPr/>
-        </p:nvSpPr>
-        <p:spPr>
-          <a:xfrm>
-            <a:off x="5298948" y="4066032"/>
-            <a:ext cx="594360" cy="219456"/>
-          </a:xfrm>
-          <a:prstGeom prst="rect">
-            <a:avLst/>
-          </a:prstGeom>
-          <a:solidFill>
-            <a:srgbClr val="64748B"/>
-          </a:solidFill>
-          <a:ln w="12700">
-            <a:solidFill>
-              <a:srgbClr val="64748B"/>
-            </a:solidFill>
-            <a:prstDash val="solid"/>
-          </a:ln>
-        </p:spPr>
-      </p:sp>
-      <p:sp>
-        <p:nvSpPr>
-          <p:cNvPr id="41" name="Text 39"/>
-          <p:cNvSpPr/>
-          <p:nvPr/>
-        </p:nvSpPr>
-        <p:spPr>
-          <a:xfrm>
-            <a:off x="5298948" y="4066032"/>
-            <a:ext cx="594360" cy="219456"/>
-          </a:xfrm>
-          <a:prstGeom prst="rect">
-            <a:avLst/>
-          </a:prstGeom>
-          <a:noFill/>
-          <a:ln/>
-        </p:spPr>
-        <p:txBody>
-          <a:bodyPr wrap="square" lIns="0" tIns="0" rIns="0" bIns="0" rtlCol="0" anchor="ctr"/>
-          <a:lstStyle/>
-          <a:p>
-            <a:pPr algn="ctr" indent="0" marL="0">
-              <a:buNone/>
-            </a:pPr>
-            <a:r>
-              <a:rPr lang="en-US" sz="900" b="1" dirty="0">
-                <a:solidFill>
-                  <a:srgbClr val="FFFFFF"/>
-                </a:solidFill>
-                <a:latin typeface="Calibri" pitchFamily="34" charset="0"/>
-                <a:ea typeface="Calibri" pitchFamily="34" charset="-122"/>
-                <a:cs typeface="Calibri" pitchFamily="34" charset="-120"/>
-              </a:rPr>
-              <a:t>Future</a:t>
-            </a:r>
-            <a:endParaRPr lang="en-US" sz="900" dirty="0"/>
-          </a:p>
-        </p:txBody>
-      </p:sp>
-      <p:sp>
-        <p:nvSpPr>
-          <p:cNvPr id="42" name="Shape 40"/>
-          <p:cNvSpPr/>
-          <p:nvPr/>
-        </p:nvSpPr>
-        <p:spPr>
-          <a:xfrm>
-            <a:off x="5929884" y="1892808"/>
-            <a:ext cx="82296" cy="0"/>
-          </a:xfrm>
-          <a:prstGeom prst="line">
-            <a:avLst/>
-          </a:prstGeom>
-          <a:noFill/>
-          <a:ln w="25400">
-            <a:solidFill>
-              <a:srgbClr val="CBD5E1"/>
-            </a:solidFill>
-            <a:prstDash val="solid"/>
-            <a:tailEnd type="triangle"/>
-          </a:ln>
-        </p:spPr>
-      </p:sp>
-      <p:sp>
-        <p:nvSpPr>
-          <p:cNvPr id="43" name="Shape 41"/>
-          <p:cNvSpPr/>
-          <p:nvPr/>
-        </p:nvSpPr>
-        <p:spPr>
-          <a:xfrm>
-            <a:off x="6012180" y="1691640"/>
-            <a:ext cx="2697480" cy="411480"/>
-          </a:xfrm>
-          <a:prstGeom prst="rect">
-            <a:avLst/>
-          </a:prstGeom>
-          <a:solidFill>
-            <a:srgbClr val="7C3AED"/>
-          </a:solidFill>
-          <a:ln w="12700">
-            <a:solidFill>
-              <a:srgbClr val="7C3AED"/>
-            </a:solidFill>
-            <a:prstDash val="solid"/>
-          </a:ln>
-        </p:spPr>
-      </p:sp>
-      <p:sp>
-        <p:nvSpPr>
-          <p:cNvPr id="44" name="Text 42"/>
-          <p:cNvSpPr/>
-          <p:nvPr/>
-        </p:nvSpPr>
-        <p:spPr>
-          <a:xfrm>
-            <a:off x="6012180" y="1691640"/>
-            <a:ext cx="2697480" cy="411480"/>
-          </a:xfrm>
-          <a:prstGeom prst="rect">
-            <a:avLst/>
-          </a:prstGeom>
-          <a:noFill/>
-          <a:ln/>
-        </p:spPr>
-        <p:txBody>
-          <a:bodyPr wrap="square" lIns="0" tIns="0" rIns="0" bIns="0" rtlCol="0" anchor="ctr"/>
-          <a:lstStyle/>
-          <a:p>
-            <a:pPr algn="ctr" indent="0" marL="0">
-              <a:buNone/>
-            </a:pPr>
-            <a:r>
-              <a:rPr lang="en-US" sz="1400" b="1" spc="500" kern="0" dirty="0">
-                <a:solidFill>
-                  <a:srgbClr val="FFFFFF"/>
-                </a:solidFill>
-                <a:latin typeface="Calibri" pitchFamily="34" charset="0"/>
-                <a:ea typeface="Calibri" pitchFamily="34" charset="-122"/>
-                <a:cs typeface="Calibri" pitchFamily="34" charset="-120"/>
-              </a:rPr>
-              <a:t>ENFORCE</a:t>
-            </a:r>
-            <a:endParaRPr lang="en-US" sz="1400" dirty="0"/>
-          </a:p>
-        </p:txBody>
-      </p:sp>
-      <p:sp>
-        <p:nvSpPr>
-          <p:cNvPr id="45" name="Shape 43"/>
-          <p:cNvSpPr/>
-          <p:nvPr/>
-        </p:nvSpPr>
-        <p:spPr>
-          <a:xfrm>
-            <a:off x="6012180" y="2103120"/>
-            <a:ext cx="2697480" cy="2468880"/>
-          </a:xfrm>
-          <a:prstGeom prst="rect">
-            <a:avLst/>
-          </a:prstGeom>
-          <a:solidFill>
-            <a:srgbClr val="E8EEFC"/>
-          </a:solidFill>
-          <a:ln w="12700">
-            <a:solidFill>
-              <a:srgbClr val="7C3AED"/>
-            </a:solidFill>
-            <a:prstDash val="solid"/>
-          </a:ln>
-        </p:spPr>
-      </p:sp>
-      <p:sp>
-        <p:nvSpPr>
-          <p:cNvPr id="46" name="Shape 44"/>
-          <p:cNvSpPr/>
-          <p:nvPr/>
-        </p:nvSpPr>
-        <p:spPr>
-          <a:xfrm>
-            <a:off x="6176772" y="2363724"/>
-            <a:ext cx="256032" cy="256032"/>
-          </a:xfrm>
-          <a:prstGeom prst="ellipse">
-            <a:avLst/>
-          </a:prstGeom>
-          <a:solidFill>
-            <a:srgbClr val="7C3AED"/>
-          </a:solidFill>
-          <a:ln w="12700">
-            <a:solidFill>
-              <a:srgbClr val="7C3AED"/>
-            </a:solidFill>
-            <a:prstDash val="solid"/>
-          </a:ln>
-        </p:spPr>
-      </p:sp>
-      <p:sp>
-        <p:nvSpPr>
-          <p:cNvPr id="47" name="Text 45"/>
-          <p:cNvSpPr/>
-          <p:nvPr/>
-        </p:nvSpPr>
-        <p:spPr>
-          <a:xfrm>
-            <a:off x="6176772" y="2363724"/>
-            <a:ext cx="256032" cy="256032"/>
-          </a:xfrm>
-          <a:prstGeom prst="rect">
-            <a:avLst/>
-          </a:prstGeom>
-          <a:noFill/>
-          <a:ln/>
-        </p:spPr>
-        <p:txBody>
-          <a:bodyPr wrap="square" lIns="0" tIns="0" rIns="0" bIns="0" rtlCol="0" anchor="ctr"/>
-          <a:lstStyle/>
-          <a:p>
-            <a:pPr algn="ctr" indent="0" marL="0">
-              <a:buNone/>
-            </a:pPr>
-            <a:r>
-              <a:rPr lang="en-US" sz="1000" b="1" dirty="0">
-                <a:solidFill>
-                  <a:srgbClr val="FFFFFF"/>
-                </a:solidFill>
-                <a:latin typeface="Calibri" pitchFamily="34" charset="0"/>
-                <a:ea typeface="Calibri" pitchFamily="34" charset="-122"/>
-                <a:cs typeface="Calibri" pitchFamily="34" charset="-120"/>
-              </a:rPr>
-              <a:t>5</a:t>
-            </a:r>
-            <a:endParaRPr lang="en-US" sz="1000" dirty="0"/>
-          </a:p>
-        </p:txBody>
-      </p:sp>
-      <p:sp>
-        <p:nvSpPr>
-          <p:cNvPr id="48" name="Text 46"/>
-          <p:cNvSpPr/>
-          <p:nvPr/>
-        </p:nvSpPr>
-        <p:spPr>
-          <a:xfrm>
-            <a:off x="6505956" y="2194560"/>
-            <a:ext cx="1554480" cy="594360"/>
-          </a:xfrm>
-          <a:prstGeom prst="rect">
-            <a:avLst/>
-          </a:prstGeom>
-          <a:noFill/>
-          <a:ln/>
-        </p:spPr>
-        <p:txBody>
-          <a:bodyPr wrap="square" lIns="0" tIns="0" rIns="0" bIns="0" rtlCol="0" anchor="ctr"/>
-          <a:lstStyle/>
-          <a:p>
-            <a:pPr indent="0" marL="0">
-              <a:buNone/>
-            </a:pPr>
-            <a:r>
-              <a:rPr lang="en-US" sz="1100" dirty="0">
-                <a:solidFill>
-                  <a:srgbClr val="1A1F36"/>
-                </a:solidFill>
-                <a:latin typeface="Calibri" pitchFamily="34" charset="0"/>
-                <a:ea typeface="Calibri" pitchFamily="34" charset="-122"/>
-                <a:cs typeface="Calibri" pitchFamily="34" charset="-120"/>
-              </a:rPr>
-              <a:t>Human oversight &amp; approval</a:t>
-            </a:r>
-            <a:endParaRPr lang="en-US" sz="1100" dirty="0"/>
-          </a:p>
-        </p:txBody>
-      </p:sp>
-      <p:sp>
-        <p:nvSpPr>
-          <p:cNvPr id="49" name="Shape 47"/>
-          <p:cNvSpPr/>
-          <p:nvPr/>
-        </p:nvSpPr>
-        <p:spPr>
-          <a:xfrm>
-            <a:off x="8087868" y="2382012"/>
-            <a:ext cx="594360" cy="219456"/>
-          </a:xfrm>
-          <a:prstGeom prst="rect">
-            <a:avLst/>
-          </a:prstGeom>
-          <a:solidFill>
-            <a:srgbClr val="64748B"/>
-          </a:solidFill>
-          <a:ln w="12700">
-            <a:solidFill>
-              <a:srgbClr val="64748B"/>
-            </a:solidFill>
-            <a:prstDash val="solid"/>
-          </a:ln>
-        </p:spPr>
-      </p:sp>
-      <p:sp>
-        <p:nvSpPr>
-          <p:cNvPr id="50" name="Text 48"/>
-          <p:cNvSpPr/>
-          <p:nvPr/>
-        </p:nvSpPr>
-        <p:spPr>
-          <a:xfrm>
-            <a:off x="8087868" y="2382012"/>
-            <a:ext cx="594360" cy="219456"/>
-          </a:xfrm>
-          <a:prstGeom prst="rect">
-            <a:avLst/>
-          </a:prstGeom>
-          <a:noFill/>
-          <a:ln/>
-        </p:spPr>
-        <p:txBody>
-          <a:bodyPr wrap="square" lIns="0" tIns="0" rIns="0" bIns="0" rtlCol="0" anchor="ctr"/>
-          <a:lstStyle/>
-          <a:p>
-            <a:pPr algn="ctr" indent="0" marL="0">
-              <a:buNone/>
-            </a:pPr>
-            <a:r>
-              <a:rPr lang="en-US" sz="900" b="1" dirty="0">
-                <a:solidFill>
-                  <a:srgbClr val="FFFFFF"/>
-                </a:solidFill>
-                <a:latin typeface="Calibri" pitchFamily="34" charset="0"/>
-                <a:ea typeface="Calibri" pitchFamily="34" charset="-122"/>
-                <a:cs typeface="Calibri" pitchFamily="34" charset="-120"/>
-              </a:rPr>
-              <a:t>Future</a:t>
-            </a:r>
-            <a:endParaRPr lang="en-US" sz="900" dirty="0"/>
-          </a:p>
-        </p:txBody>
-      </p:sp>
-      <p:sp>
-        <p:nvSpPr>
-          <p:cNvPr id="51" name="Shape 49"/>
-          <p:cNvSpPr/>
-          <p:nvPr/>
-        </p:nvSpPr>
-        <p:spPr>
-          <a:xfrm>
-            <a:off x="6176772" y="2958084"/>
-            <a:ext cx="256032" cy="256032"/>
-          </a:xfrm>
-          <a:prstGeom prst="ellipse">
-            <a:avLst/>
-          </a:prstGeom>
-          <a:solidFill>
-            <a:srgbClr val="7C3AED"/>
-          </a:solidFill>
-          <a:ln w="12700">
-            <a:solidFill>
-              <a:srgbClr val="7C3AED"/>
-            </a:solidFill>
-            <a:prstDash val="solid"/>
-          </a:ln>
-        </p:spPr>
-      </p:sp>
-      <p:sp>
-        <p:nvSpPr>
-          <p:cNvPr id="52" name="Text 50"/>
-          <p:cNvSpPr/>
-          <p:nvPr/>
-        </p:nvSpPr>
-        <p:spPr>
-          <a:xfrm>
-            <a:off x="6176772" y="2958084"/>
-            <a:ext cx="256032" cy="256032"/>
-          </a:xfrm>
-          <a:prstGeom prst="rect">
-            <a:avLst/>
-          </a:prstGeom>
-          <a:noFill/>
-          <a:ln/>
-        </p:spPr>
-        <p:txBody>
-          <a:bodyPr wrap="square" lIns="0" tIns="0" rIns="0" bIns="0" rtlCol="0" anchor="ctr"/>
-          <a:lstStyle/>
-          <a:p>
-            <a:pPr algn="ctr" indent="0" marL="0">
-              <a:buNone/>
-            </a:pPr>
-            <a:r>
-              <a:rPr lang="en-US" sz="1000" b="1" dirty="0">
-                <a:solidFill>
-                  <a:srgbClr val="FFFFFF"/>
-                </a:solidFill>
-                <a:latin typeface="Calibri" pitchFamily="34" charset="0"/>
-                <a:ea typeface="Calibri" pitchFamily="34" charset="-122"/>
-                <a:cs typeface="Calibri" pitchFamily="34" charset="-120"/>
-              </a:rPr>
-              <a:t>6</a:t>
-            </a:r>
-            <a:endParaRPr lang="en-US" sz="1000" dirty="0"/>
-          </a:p>
-        </p:txBody>
-      </p:sp>
-      <p:sp>
-        <p:nvSpPr>
-          <p:cNvPr id="53" name="Text 51"/>
-          <p:cNvSpPr/>
-          <p:nvPr/>
-        </p:nvSpPr>
-        <p:spPr>
-          <a:xfrm>
-            <a:off x="6505956" y="2788920"/>
-            <a:ext cx="1554480" cy="594360"/>
-          </a:xfrm>
-          <a:prstGeom prst="rect">
-            <a:avLst/>
-          </a:prstGeom>
-          <a:noFill/>
-          <a:ln/>
-        </p:spPr>
-        <p:txBody>
-          <a:bodyPr wrap="square" lIns="0" tIns="0" rIns="0" bIns="0" rtlCol="0" anchor="ctr"/>
-          <a:lstStyle/>
-          <a:p>
-            <a:pPr indent="0" marL="0">
-              <a:buNone/>
-            </a:pPr>
-            <a:r>
-              <a:rPr lang="en-US" sz="1100" dirty="0">
-                <a:solidFill>
-                  <a:srgbClr val="1A1F36"/>
-                </a:solidFill>
-                <a:latin typeface="Calibri" pitchFamily="34" charset="0"/>
-                <a:ea typeface="Calibri" pitchFamily="34" charset="-122"/>
-                <a:cs typeface="Calibri" pitchFamily="34" charset="-120"/>
-              </a:rPr>
-              <a:t>Resource policy enforcement</a:t>
-            </a:r>
-            <a:endParaRPr lang="en-US" sz="1100" dirty="0"/>
-          </a:p>
-        </p:txBody>
-      </p:sp>
-      <p:sp>
-        <p:nvSpPr>
-          <p:cNvPr id="54" name="Shape 52"/>
-          <p:cNvSpPr/>
-          <p:nvPr/>
-        </p:nvSpPr>
-        <p:spPr>
-          <a:xfrm>
-            <a:off x="8087868" y="2976372"/>
-            <a:ext cx="594360" cy="219456"/>
-          </a:xfrm>
-          <a:prstGeom prst="rect">
-            <a:avLst/>
-          </a:prstGeom>
-          <a:solidFill>
-            <a:srgbClr val="0F1B3D"/>
-          </a:solidFill>
-          <a:ln w="12700">
-            <a:solidFill>
-              <a:srgbClr val="0F1B3D"/>
-            </a:solidFill>
-            <a:prstDash val="solid"/>
-          </a:ln>
-        </p:spPr>
-      </p:sp>
-      <p:sp>
-        <p:nvSpPr>
-          <p:cNvPr id="55" name="Text 53"/>
-          <p:cNvSpPr/>
-          <p:nvPr/>
-        </p:nvSpPr>
-        <p:spPr>
-          <a:xfrm>
-            <a:off x="8087868" y="2976372"/>
-            <a:ext cx="594360" cy="219456"/>
-          </a:xfrm>
-          <a:prstGeom prst="rect">
-            <a:avLst/>
-          </a:prstGeom>
-          <a:noFill/>
-          <a:ln/>
-        </p:spPr>
-        <p:txBody>
-          <a:bodyPr wrap="square" lIns="0" tIns="0" rIns="0" bIns="0" rtlCol="0" anchor="ctr"/>
-          <a:lstStyle/>
-          <a:p>
-            <a:pPr algn="ctr" indent="0" marL="0">
-              <a:buNone/>
-            </a:pPr>
-            <a:r>
-              <a:rPr lang="en-US" sz="900" b="1" dirty="0">
-                <a:solidFill>
-                  <a:srgbClr val="FFFFFF"/>
-                </a:solidFill>
-                <a:latin typeface="Calibri" pitchFamily="34" charset="0"/>
-                <a:ea typeface="Calibri" pitchFamily="34" charset="-122"/>
-                <a:cs typeface="Calibri" pitchFamily="34" charset="-120"/>
-              </a:rPr>
-              <a:t>P0</a:t>
-            </a:r>
-            <a:endParaRPr lang="en-US" sz="900" dirty="0"/>
-          </a:p>
-        </p:txBody>
-      </p:sp>
-      <p:sp>
-        <p:nvSpPr>
-          <p:cNvPr id="56" name="Shape 54"/>
-          <p:cNvSpPr/>
-          <p:nvPr/>
-        </p:nvSpPr>
-        <p:spPr>
-          <a:xfrm>
-            <a:off x="6176772" y="3552444"/>
-            <a:ext cx="256032" cy="256032"/>
-          </a:xfrm>
-          <a:prstGeom prst="ellipse">
-            <a:avLst/>
-          </a:prstGeom>
-          <a:solidFill>
-            <a:srgbClr val="7C3AED"/>
-          </a:solidFill>
-          <a:ln w="12700">
-            <a:solidFill>
-              <a:srgbClr val="7C3AED"/>
-            </a:solidFill>
-            <a:prstDash val="solid"/>
-          </a:ln>
-        </p:spPr>
-      </p:sp>
-      <p:sp>
-        <p:nvSpPr>
-          <p:cNvPr id="57" name="Text 55"/>
-          <p:cNvSpPr/>
-          <p:nvPr/>
-        </p:nvSpPr>
-        <p:spPr>
-          <a:xfrm>
-            <a:off x="6176772" y="3552444"/>
-            <a:ext cx="256032" cy="256032"/>
-          </a:xfrm>
-          <a:prstGeom prst="rect">
-            <a:avLst/>
-          </a:prstGeom>
-          <a:noFill/>
-          <a:ln/>
-        </p:spPr>
-        <p:txBody>
-          <a:bodyPr wrap="square" lIns="0" tIns="0" rIns="0" bIns="0" rtlCol="0" anchor="ctr"/>
-          <a:lstStyle/>
-          <a:p>
-            <a:pPr algn="ctr" indent="0" marL="0">
-              <a:buNone/>
-            </a:pPr>
-            <a:r>
-              <a:rPr lang="en-US" sz="1000" b="1" dirty="0">
-                <a:solidFill>
-                  <a:srgbClr val="FFFFFF"/>
-                </a:solidFill>
-                <a:latin typeface="Calibri" pitchFamily="34" charset="0"/>
-                <a:ea typeface="Calibri" pitchFamily="34" charset="-122"/>
-                <a:cs typeface="Calibri" pitchFamily="34" charset="-120"/>
-              </a:rPr>
-              <a:t>7</a:t>
-            </a:r>
-            <a:endParaRPr lang="en-US" sz="1000" dirty="0"/>
-          </a:p>
-        </p:txBody>
-      </p:sp>
-      <p:sp>
-        <p:nvSpPr>
-          <p:cNvPr id="58" name="Text 56"/>
-          <p:cNvSpPr/>
-          <p:nvPr/>
-        </p:nvSpPr>
-        <p:spPr>
-          <a:xfrm>
-            <a:off x="6505956" y="3383280"/>
-            <a:ext cx="1554480" cy="594360"/>
-          </a:xfrm>
-          <a:prstGeom prst="rect">
-            <a:avLst/>
-          </a:prstGeom>
-          <a:noFill/>
-          <a:ln/>
-        </p:spPr>
-        <p:txBody>
-          <a:bodyPr wrap="square" lIns="0" tIns="0" rIns="0" bIns="0" rtlCol="0" anchor="ctr"/>
-          <a:lstStyle/>
-          <a:p>
-            <a:pPr indent="0" marL="0">
-              <a:buNone/>
-            </a:pPr>
-            <a:r>
-              <a:rPr lang="en-US" sz="1100" dirty="0">
-                <a:solidFill>
-                  <a:srgbClr val="1A1F36"/>
-                </a:solidFill>
-                <a:latin typeface="Calibri" pitchFamily="34" charset="0"/>
-                <a:ea typeface="Calibri" pitchFamily="34" charset="-122"/>
-                <a:cs typeface="Calibri" pitchFamily="34" charset="-120"/>
-              </a:rPr>
-              <a:t>Credential lifecycle</a:t>
-            </a:r>
-            <a:endParaRPr lang="en-US" sz="1100" dirty="0"/>
-          </a:p>
-        </p:txBody>
-      </p:sp>
-      <p:sp>
-        <p:nvSpPr>
-          <p:cNvPr id="59" name="Shape 57"/>
-          <p:cNvSpPr/>
-          <p:nvPr/>
-        </p:nvSpPr>
-        <p:spPr>
-          <a:xfrm>
-            <a:off x="8087868" y="3570732"/>
-            <a:ext cx="594360" cy="219456"/>
-          </a:xfrm>
-          <a:prstGeom prst="rect">
-            <a:avLst/>
-          </a:prstGeom>
-          <a:solidFill>
-            <a:srgbClr val="64748B"/>
-          </a:solidFill>
-          <a:ln w="12700">
-            <a:solidFill>
-              <a:srgbClr val="64748B"/>
-            </a:solidFill>
-            <a:prstDash val="solid"/>
-          </a:ln>
-        </p:spPr>
-      </p:sp>
-      <p:sp>
-        <p:nvSpPr>
-          <p:cNvPr id="60" name="Text 58"/>
-          <p:cNvSpPr/>
-          <p:nvPr/>
-        </p:nvSpPr>
-        <p:spPr>
-          <a:xfrm>
-            <a:off x="8087868" y="3570732"/>
-            <a:ext cx="594360" cy="219456"/>
-          </a:xfrm>
-          <a:prstGeom prst="rect">
-            <a:avLst/>
-          </a:prstGeom>
-          <a:noFill/>
-          <a:ln/>
-        </p:spPr>
-        <p:txBody>
-          <a:bodyPr wrap="square" lIns="0" tIns="0" rIns="0" bIns="0" rtlCol="0" anchor="ctr"/>
-          <a:lstStyle/>
-          <a:p>
-            <a:pPr algn="ctr" indent="0" marL="0">
-              <a:buNone/>
-            </a:pPr>
-            <a:r>
-              <a:rPr lang="en-US" sz="900" b="1" dirty="0">
-                <a:solidFill>
-                  <a:srgbClr val="FFFFFF"/>
-                </a:solidFill>
-                <a:latin typeface="Calibri" pitchFamily="34" charset="0"/>
-                <a:ea typeface="Calibri" pitchFamily="34" charset="-122"/>
-                <a:cs typeface="Calibri" pitchFamily="34" charset="-120"/>
-              </a:rPr>
-              <a:t>Future</a:t>
-            </a:r>
-            <a:endParaRPr lang="en-US" sz="900" dirty="0"/>
-          </a:p>
-        </p:txBody>
-      </p:sp>
-      <p:sp>
-        <p:nvSpPr>
-          <p:cNvPr id="61" name="Shape 59"/>
-          <p:cNvSpPr/>
-          <p:nvPr/>
-        </p:nvSpPr>
-        <p:spPr>
-          <a:xfrm>
-            <a:off x="6176772" y="4146804"/>
-            <a:ext cx="256032" cy="256032"/>
-          </a:xfrm>
-          <a:prstGeom prst="ellipse">
-            <a:avLst/>
-          </a:prstGeom>
-          <a:solidFill>
-            <a:srgbClr val="7C3AED"/>
-          </a:solidFill>
-          <a:ln w="12700">
-            <a:solidFill>
-              <a:srgbClr val="7C3AED"/>
-            </a:solidFill>
-            <a:prstDash val="solid"/>
-          </a:ln>
-        </p:spPr>
-      </p:sp>
-      <p:sp>
-        <p:nvSpPr>
-          <p:cNvPr id="62" name="Text 60"/>
-          <p:cNvSpPr/>
-          <p:nvPr/>
-        </p:nvSpPr>
-        <p:spPr>
-          <a:xfrm>
-            <a:off x="6176772" y="4146804"/>
-            <a:ext cx="256032" cy="256032"/>
-          </a:xfrm>
-          <a:prstGeom prst="rect">
-            <a:avLst/>
-          </a:prstGeom>
-          <a:noFill/>
-          <a:ln/>
-        </p:spPr>
-        <p:txBody>
-          <a:bodyPr wrap="square" lIns="0" tIns="0" rIns="0" bIns="0" rtlCol="0" anchor="ctr"/>
-          <a:lstStyle/>
-          <a:p>
-            <a:pPr algn="ctr" indent="0" marL="0">
-              <a:buNone/>
-            </a:pPr>
-            <a:r>
-              <a:rPr lang="en-US" sz="1000" b="1" dirty="0">
-                <a:solidFill>
-                  <a:srgbClr val="FFFFFF"/>
-                </a:solidFill>
-                <a:latin typeface="Calibri" pitchFamily="34" charset="0"/>
-                <a:ea typeface="Calibri" pitchFamily="34" charset="-122"/>
-                <a:cs typeface="Calibri" pitchFamily="34" charset="-120"/>
-              </a:rPr>
-              <a:t>8</a:t>
-            </a:r>
-            <a:endParaRPr lang="en-US" sz="1000" dirty="0"/>
-          </a:p>
-        </p:txBody>
-      </p:sp>
-      <p:sp>
-        <p:nvSpPr>
-          <p:cNvPr id="63" name="Text 61"/>
-          <p:cNvSpPr/>
-          <p:nvPr/>
-        </p:nvSpPr>
-        <p:spPr>
-          <a:xfrm>
-            <a:off x="6505956" y="3977640"/>
-            <a:ext cx="1554480" cy="594360"/>
-          </a:xfrm>
-          <a:prstGeom prst="rect">
-            <a:avLst/>
-          </a:prstGeom>
-          <a:noFill/>
-          <a:ln/>
-        </p:spPr>
-        <p:txBody>
-          <a:bodyPr wrap="square" lIns="0" tIns="0" rIns="0" bIns="0" rtlCol="0" anchor="ctr"/>
-          <a:lstStyle/>
-          <a:p>
-            <a:pPr indent="0" marL="0">
-              <a:buNone/>
-            </a:pPr>
-            <a:r>
-              <a:rPr lang="en-US" sz="1100" dirty="0">
-                <a:solidFill>
-                  <a:srgbClr val="1A1F36"/>
-                </a:solidFill>
-                <a:latin typeface="Calibri" pitchFamily="34" charset="0"/>
-                <a:ea typeface="Calibri" pitchFamily="34" charset="-122"/>
-                <a:cs typeface="Calibri" pitchFamily="34" charset="-120"/>
-              </a:rPr>
-              <a:t>Auditability &amp; logging</a:t>
-            </a:r>
-            <a:endParaRPr lang="en-US" sz="1100" dirty="0"/>
-          </a:p>
-        </p:txBody>
-      </p:sp>
-      <p:sp>
-        <p:nvSpPr>
-          <p:cNvPr id="64" name="Shape 62"/>
-          <p:cNvSpPr/>
-          <p:nvPr/>
-        </p:nvSpPr>
-        <p:spPr>
-          <a:xfrm>
-            <a:off x="8087868" y="4165092"/>
-            <a:ext cx="594360" cy="219456"/>
-          </a:xfrm>
-          <a:prstGeom prst="rect">
-            <a:avLst/>
-          </a:prstGeom>
-          <a:solidFill>
-            <a:srgbClr val="0F1B3D"/>
-          </a:solidFill>
-          <a:ln w="12700">
-            <a:solidFill>
-              <a:srgbClr val="0F1B3D"/>
-            </a:solidFill>
-            <a:prstDash val="solid"/>
-          </a:ln>
-        </p:spPr>
-      </p:sp>
-      <p:sp>
-        <p:nvSpPr>
-          <p:cNvPr id="65" name="Text 63"/>
-          <p:cNvSpPr/>
-          <p:nvPr/>
-        </p:nvSpPr>
-        <p:spPr>
-          <a:xfrm>
-            <a:off x="8087868" y="4165092"/>
-            <a:ext cx="594360" cy="219456"/>
-          </a:xfrm>
-          <a:prstGeom prst="rect">
-            <a:avLst/>
-          </a:prstGeom>
-          <a:noFill/>
-          <a:ln/>
-        </p:spPr>
-        <p:txBody>
-          <a:bodyPr wrap="square" lIns="0" tIns="0" rIns="0" bIns="0" rtlCol="0" anchor="ctr"/>
-          <a:lstStyle/>
-          <a:p>
-            <a:pPr algn="ctr" indent="0" marL="0">
-              <a:buNone/>
-            </a:pPr>
-            <a:r>
-              <a:rPr lang="en-US" sz="900" b="1" dirty="0">
-                <a:solidFill>
-                  <a:srgbClr val="FFFFFF"/>
-                </a:solidFill>
-                <a:latin typeface="Calibri" pitchFamily="34" charset="0"/>
-                <a:ea typeface="Calibri" pitchFamily="34" charset="-122"/>
-                <a:cs typeface="Calibri" pitchFamily="34" charset="-120"/>
-              </a:rPr>
-              <a:t>P0</a:t>
-            </a:r>
-            <a:endParaRPr lang="en-US" sz="900" dirty="0"/>
-          </a:p>
-        </p:txBody>
-      </p:sp>
-      <p:sp>
-        <p:nvSpPr>
-          <p:cNvPr id="66" name="Text 64"/>
-          <p:cNvSpPr/>
-          <p:nvPr/>
-        </p:nvSpPr>
-        <p:spPr>
-          <a:xfrm>
-            <a:off x="457200" y="4663440"/>
-            <a:ext cx="8229600" cy="256032"/>
-          </a:xfrm>
-          <a:prstGeom prst="rect">
-            <a:avLst/>
-          </a:prstGeom>
-          <a:noFill/>
-          <a:ln/>
-        </p:spPr>
-        <p:txBody>
-          <a:bodyPr wrap="square" lIns="0" tIns="0" rIns="0" bIns="0" rtlCol="0" anchor="ctr"/>
-          <a:lstStyle/>
-          <a:p>
-            <a:pPr indent="0" marL="0">
-              <a:buNone/>
-            </a:pPr>
-            <a:r>
-              <a:rPr lang="en-US" sz="1000" b="1" dirty="0">
-                <a:solidFill>
-                  <a:srgbClr val="0F1B3D"/>
-                </a:solidFill>
-                <a:latin typeface="Calibri" pitchFamily="34" charset="0"/>
-                <a:ea typeface="Calibri" pitchFamily="34" charset="-122"/>
-                <a:cs typeface="Calibri" pitchFamily="34" charset="-120"/>
-              </a:rPr>
-              <a:t>M1 connectors live: </a:t>
-            </a:r>
-            <a:pPr indent="0" marL="0">
-              <a:buNone/>
-            </a:pPr>
-            <a:r>
-              <a:rPr lang="en-US" sz="1000" dirty="0">
-                <a:solidFill>
-                  <a:srgbClr val="1A1F36"/>
-                </a:solidFill>
-                <a:latin typeface="Calibri" pitchFamily="34" charset="0"/>
-                <a:ea typeface="Calibri" pitchFamily="34" charset="-122"/>
-                <a:cs typeface="Calibri" pitchFamily="34" charset="-120"/>
-              </a:rPr>
-              <a:t>Gemini · Vertex AI · Bedrock · n8n  ·  </a:t>
-            </a:r>
-            <a:pPr indent="0" marL="0">
-              <a:buNone/>
-            </a:pPr>
-            <a:r>
-              <a:rPr lang="en-US" sz="1000" i="1" dirty="0">
-                <a:solidFill>
-                  <a:srgbClr val="64748B"/>
-                </a:solidFill>
-                <a:latin typeface="Calibri" pitchFamily="34" charset="0"/>
-                <a:ea typeface="Calibri" pitchFamily="34" charset="-122"/>
-                <a:cs typeface="Calibri" pitchFamily="34" charset="-120"/>
-              </a:rPr>
-              <a:t>ChatGPT Enterprise: Backlog  ·  Copilot Studio: Canceled Jan 2026</a:t>
-            </a:r>
-            <a:endParaRPr lang="en-US" sz="1000" dirty="0"/>
-          </a:p>
-        </p:txBody>
-      </p:sp>
-      <p:sp>
-        <p:nvSpPr>
-          <p:cNvPr id="67" name="Text 65"/>
+          <p:cNvPr id="10" name="Text 8"/>
           <p:cNvSpPr/>
           <p:nvPr/>
         </p:nvSpPr>
@@ -4726,7 +2917,7 @@
                 <a:ea typeface="Calibri" pitchFamily="34" charset="-122"/>
                 <a:cs typeface="Calibri" pitchFamily="34" charset="-120"/>
               </a:rPr>
-              <a:t>3 / 8</a:t>
+              <a:t>3 / 7</a:t>
             </a:r>
             <a:endParaRPr lang="en-US" sz="900" dirty="0"/>
           </a:p>
@@ -4779,6 +2970,915 @@
             <a:avLst/>
           </a:prstGeom>
           <a:solidFill>
+            <a:srgbClr val="02C39A"/>
+          </a:solidFill>
+          <a:ln w="12700">
+            <a:solidFill>
+              <a:srgbClr val="02C39A"/>
+            </a:solidFill>
+            <a:prstDash val="solid"/>
+          </a:ln>
+        </p:spPr>
+      </p:sp>
+      <p:sp>
+        <p:nvSpPr>
+          <p:cNvPr id="3" name="Text 1"/>
+          <p:cNvSpPr/>
+          <p:nvPr/>
+        </p:nvSpPr>
+        <p:spPr>
+          <a:xfrm>
+            <a:off x="457200" y="365760"/>
+            <a:ext cx="7315200" cy="274320"/>
+          </a:xfrm>
+          <a:prstGeom prst="rect">
+            <a:avLst/>
+          </a:prstGeom>
+          <a:noFill/>
+          <a:ln/>
+        </p:spPr>
+        <p:txBody>
+          <a:bodyPr wrap="square" lIns="0" tIns="0" rIns="0" bIns="0" rtlCol="0" anchor="ctr"/>
+          <a:lstStyle/>
+          <a:p>
+            <a:pPr indent="0" marL="0">
+              <a:buNone/>
+            </a:pPr>
+            <a:r>
+              <a:rPr lang="en-US" sz="1100" b="1" spc="400" kern="0" dirty="0">
+                <a:solidFill>
+                  <a:srgbClr val="64748B"/>
+                </a:solidFill>
+                <a:latin typeface="Calibri" pitchFamily="34" charset="0"/>
+                <a:ea typeface="Calibri" pitchFamily="34" charset="-122"/>
+                <a:cs typeface="Calibri" pitchFamily="34" charset="-120"/>
+              </a:rPr>
+              <a:t>03 · The full map</a:t>
+            </a:r>
+            <a:endParaRPr lang="en-US" sz="1100" dirty="0"/>
+          </a:p>
+        </p:txBody>
+      </p:sp>
+      <p:sp>
+        <p:nvSpPr>
+          <p:cNvPr id="4" name="Text 2"/>
+          <p:cNvSpPr/>
+          <p:nvPr/>
+        </p:nvSpPr>
+        <p:spPr>
+          <a:xfrm>
+            <a:off x="457200" y="731520"/>
+            <a:ext cx="8229600" cy="777240"/>
+          </a:xfrm>
+          <a:prstGeom prst="rect">
+            <a:avLst/>
+          </a:prstGeom>
+          <a:noFill/>
+          <a:ln/>
+        </p:spPr>
+        <p:txBody>
+          <a:bodyPr wrap="square" lIns="0" tIns="0" rIns="0" bIns="0" rtlCol="0" anchor="ctr"/>
+          <a:lstStyle/>
+          <a:p>
+            <a:pPr indent="0" marL="0">
+              <a:buNone/>
+            </a:pPr>
+            <a:r>
+              <a:rPr lang="en-US" sz="3400" b="1" dirty="0">
+                <a:solidFill>
+                  <a:srgbClr val="1A1F36"/>
+                </a:solidFill>
+                <a:latin typeface="Georgia" pitchFamily="34" charset="0"/>
+                <a:ea typeface="Georgia" pitchFamily="34" charset="-122"/>
+                <a:cs typeface="Georgia" pitchFamily="34" charset="-120"/>
+              </a:rPr>
+              <a:t>10 capabilities. Three stages.</a:t>
+            </a:r>
+            <a:endParaRPr lang="en-US" sz="3400" dirty="0"/>
+          </a:p>
+        </p:txBody>
+      </p:sp>
+      <p:sp>
+        <p:nvSpPr>
+          <p:cNvPr id="5" name="Shape 3"/>
+          <p:cNvSpPr/>
+          <p:nvPr/>
+        </p:nvSpPr>
+        <p:spPr>
+          <a:xfrm>
+            <a:off x="434340" y="1691640"/>
+            <a:ext cx="2697480" cy="411480"/>
+          </a:xfrm>
+          <a:prstGeom prst="rect">
+            <a:avLst/>
+          </a:prstGeom>
+          <a:solidFill>
+            <a:srgbClr val="02C39A"/>
+          </a:solidFill>
+          <a:ln w="12700">
+            <a:solidFill>
+              <a:srgbClr val="02C39A"/>
+            </a:solidFill>
+            <a:prstDash val="solid"/>
+          </a:ln>
+        </p:spPr>
+      </p:sp>
+      <p:sp>
+        <p:nvSpPr>
+          <p:cNvPr id="6" name="Text 4"/>
+          <p:cNvSpPr/>
+          <p:nvPr/>
+        </p:nvSpPr>
+        <p:spPr>
+          <a:xfrm>
+            <a:off x="434340" y="1691640"/>
+            <a:ext cx="2697480" cy="411480"/>
+          </a:xfrm>
+          <a:prstGeom prst="rect">
+            <a:avLst/>
+          </a:prstGeom>
+          <a:noFill/>
+          <a:ln/>
+        </p:spPr>
+        <p:txBody>
+          <a:bodyPr wrap="square" lIns="0" tIns="0" rIns="0" bIns="0" rtlCol="0" anchor="ctr"/>
+          <a:lstStyle/>
+          <a:p>
+            <a:pPr algn="ctr" indent="0" marL="0">
+              <a:buNone/>
+            </a:pPr>
+            <a:r>
+              <a:rPr lang="en-US" sz="1400" b="1" spc="500" kern="0" dirty="0">
+                <a:solidFill>
+                  <a:srgbClr val="FFFFFF"/>
+                </a:solidFill>
+                <a:latin typeface="Calibri" pitchFamily="34" charset="0"/>
+                <a:ea typeface="Calibri" pitchFamily="34" charset="-122"/>
+                <a:cs typeface="Calibri" pitchFamily="34" charset="-120"/>
+              </a:rPr>
+              <a:t>DISCOVER</a:t>
+            </a:r>
+            <a:endParaRPr lang="en-US" sz="1400" dirty="0"/>
+          </a:p>
+        </p:txBody>
+      </p:sp>
+      <p:sp>
+        <p:nvSpPr>
+          <p:cNvPr id="7" name="Shape 5"/>
+          <p:cNvSpPr/>
+          <p:nvPr/>
+        </p:nvSpPr>
+        <p:spPr>
+          <a:xfrm>
+            <a:off x="434340" y="2103120"/>
+            <a:ext cx="2697480" cy="2468880"/>
+          </a:xfrm>
+          <a:prstGeom prst="rect">
+            <a:avLst/>
+          </a:prstGeom>
+          <a:solidFill>
+            <a:srgbClr val="E8EEFC"/>
+          </a:solidFill>
+          <a:ln w="12700">
+            <a:solidFill>
+              <a:srgbClr val="02C39A"/>
+            </a:solidFill>
+            <a:prstDash val="solid"/>
+          </a:ln>
+        </p:spPr>
+      </p:sp>
+      <p:sp>
+        <p:nvSpPr>
+          <p:cNvPr id="8" name="Shape 6"/>
+          <p:cNvSpPr/>
+          <p:nvPr/>
+        </p:nvSpPr>
+        <p:spPr>
+          <a:xfrm>
+            <a:off x="598932" y="2462784"/>
+            <a:ext cx="256032" cy="256032"/>
+          </a:xfrm>
+          <a:prstGeom prst="ellipse">
+            <a:avLst/>
+          </a:prstGeom>
+          <a:solidFill>
+            <a:srgbClr val="02C39A"/>
+          </a:solidFill>
+          <a:ln w="12700">
+            <a:solidFill>
+              <a:srgbClr val="02C39A"/>
+            </a:solidFill>
+            <a:prstDash val="solid"/>
+          </a:ln>
+        </p:spPr>
+      </p:sp>
+      <p:sp>
+        <p:nvSpPr>
+          <p:cNvPr id="9" name="Text 7"/>
+          <p:cNvSpPr/>
+          <p:nvPr/>
+        </p:nvSpPr>
+        <p:spPr>
+          <a:xfrm>
+            <a:off x="598932" y="2462784"/>
+            <a:ext cx="256032" cy="256032"/>
+          </a:xfrm>
+          <a:prstGeom prst="rect">
+            <a:avLst/>
+          </a:prstGeom>
+          <a:noFill/>
+          <a:ln/>
+        </p:spPr>
+        <p:txBody>
+          <a:bodyPr wrap="square" lIns="0" tIns="0" rIns="0" bIns="0" rtlCol="0" anchor="ctr"/>
+          <a:lstStyle/>
+          <a:p>
+            <a:pPr algn="ctr" indent="0" marL="0">
+              <a:buNone/>
+            </a:pPr>
+            <a:r>
+              <a:rPr lang="en-US" sz="1000" b="1" dirty="0">
+                <a:solidFill>
+                  <a:srgbClr val="FFFFFF"/>
+                </a:solidFill>
+                <a:latin typeface="Calibri" pitchFamily="34" charset="0"/>
+                <a:ea typeface="Calibri" pitchFamily="34" charset="-122"/>
+                <a:cs typeface="Calibri" pitchFamily="34" charset="-120"/>
+              </a:rPr>
+              <a:t>1</a:t>
+            </a:r>
+            <a:endParaRPr lang="en-US" sz="1000" dirty="0"/>
+          </a:p>
+        </p:txBody>
+      </p:sp>
+      <p:sp>
+        <p:nvSpPr>
+          <p:cNvPr id="10" name="Text 8"/>
+          <p:cNvSpPr/>
+          <p:nvPr/>
+        </p:nvSpPr>
+        <p:spPr>
+          <a:xfrm>
+            <a:off x="928116" y="2194560"/>
+            <a:ext cx="1554480" cy="792480"/>
+          </a:xfrm>
+          <a:prstGeom prst="rect">
+            <a:avLst/>
+          </a:prstGeom>
+          <a:noFill/>
+          <a:ln/>
+        </p:spPr>
+        <p:txBody>
+          <a:bodyPr wrap="square" lIns="0" tIns="0" rIns="0" bIns="0" rtlCol="0" anchor="ctr"/>
+          <a:lstStyle/>
+          <a:p>
+            <a:pPr indent="0" marL="0">
+              <a:buNone/>
+            </a:pPr>
+            <a:r>
+              <a:rPr lang="en-US" sz="1100" dirty="0">
+                <a:solidFill>
+                  <a:srgbClr val="1A1F36"/>
+                </a:solidFill>
+                <a:latin typeface="Calibri" pitchFamily="34" charset="0"/>
+                <a:ea typeface="Calibri" pitchFamily="34" charset="-122"/>
+                <a:cs typeface="Calibri" pitchFamily="34" charset="-120"/>
+              </a:rPr>
+              <a:t>Registration &amp; identification</a:t>
+            </a:r>
+            <a:endParaRPr lang="en-US" sz="1100" dirty="0"/>
+          </a:p>
+        </p:txBody>
+      </p:sp>
+      <p:sp>
+        <p:nvSpPr>
+          <p:cNvPr id="11" name="Shape 9"/>
+          <p:cNvSpPr/>
+          <p:nvPr/>
+        </p:nvSpPr>
+        <p:spPr>
+          <a:xfrm>
+            <a:off x="2510028" y="2481072"/>
+            <a:ext cx="594360" cy="219456"/>
+          </a:xfrm>
+          <a:prstGeom prst="rect">
+            <a:avLst/>
+          </a:prstGeom>
+          <a:solidFill>
+            <a:srgbClr val="02C39A"/>
+          </a:solidFill>
+          <a:ln w="12700">
+            <a:solidFill>
+              <a:srgbClr val="02C39A"/>
+            </a:solidFill>
+            <a:prstDash val="solid"/>
+          </a:ln>
+        </p:spPr>
+      </p:sp>
+      <p:sp>
+        <p:nvSpPr>
+          <p:cNvPr id="12" name="Text 10"/>
+          <p:cNvSpPr/>
+          <p:nvPr/>
+        </p:nvSpPr>
+        <p:spPr>
+          <a:xfrm>
+            <a:off x="2510028" y="2481072"/>
+            <a:ext cx="594360" cy="219456"/>
+          </a:xfrm>
+          <a:prstGeom prst="rect">
+            <a:avLst/>
+          </a:prstGeom>
+          <a:noFill/>
+          <a:ln/>
+        </p:spPr>
+        <p:txBody>
+          <a:bodyPr wrap="square" lIns="0" tIns="0" rIns="0" bIns="0" rtlCol="0" anchor="ctr"/>
+          <a:lstStyle/>
+          <a:p>
+            <a:pPr algn="ctr" indent="0" marL="0">
+              <a:buNone/>
+            </a:pPr>
+            <a:r>
+              <a:rPr lang="en-US" sz="900" b="1" dirty="0">
+                <a:solidFill>
+                  <a:srgbClr val="FFFFFF"/>
+                </a:solidFill>
+                <a:latin typeface="Calibri" pitchFamily="34" charset="0"/>
+                <a:ea typeface="Calibri" pitchFamily="34" charset="-122"/>
+                <a:cs typeface="Calibri" pitchFamily="34" charset="-120"/>
+              </a:rPr>
+              <a:t>M1 ✓</a:t>
+            </a:r>
+            <a:endParaRPr lang="en-US" sz="900" dirty="0"/>
+          </a:p>
+        </p:txBody>
+      </p:sp>
+      <p:sp>
+        <p:nvSpPr>
+          <p:cNvPr id="13" name="Shape 11"/>
+          <p:cNvSpPr/>
+          <p:nvPr/>
+        </p:nvSpPr>
+        <p:spPr>
+          <a:xfrm>
+            <a:off x="598932" y="3255264"/>
+            <a:ext cx="256032" cy="256032"/>
+          </a:xfrm>
+          <a:prstGeom prst="ellipse">
+            <a:avLst/>
+          </a:prstGeom>
+          <a:solidFill>
+            <a:srgbClr val="02C39A"/>
+          </a:solidFill>
+          <a:ln w="12700">
+            <a:solidFill>
+              <a:srgbClr val="02C39A"/>
+            </a:solidFill>
+            <a:prstDash val="solid"/>
+          </a:ln>
+        </p:spPr>
+      </p:sp>
+      <p:sp>
+        <p:nvSpPr>
+          <p:cNvPr id="14" name="Text 12"/>
+          <p:cNvSpPr/>
+          <p:nvPr/>
+        </p:nvSpPr>
+        <p:spPr>
+          <a:xfrm>
+            <a:off x="598932" y="3255264"/>
+            <a:ext cx="256032" cy="256032"/>
+          </a:xfrm>
+          <a:prstGeom prst="rect">
+            <a:avLst/>
+          </a:prstGeom>
+          <a:noFill/>
+          <a:ln/>
+        </p:spPr>
+        <p:txBody>
+          <a:bodyPr wrap="square" lIns="0" tIns="0" rIns="0" bIns="0" rtlCol="0" anchor="ctr"/>
+          <a:lstStyle/>
+          <a:p>
+            <a:pPr algn="ctr" indent="0" marL="0">
+              <a:buNone/>
+            </a:pPr>
+            <a:r>
+              <a:rPr lang="en-US" sz="1000" b="1" dirty="0">
+                <a:solidFill>
+                  <a:srgbClr val="FFFFFF"/>
+                </a:solidFill>
+                <a:latin typeface="Calibri" pitchFamily="34" charset="0"/>
+                <a:ea typeface="Calibri" pitchFamily="34" charset="-122"/>
+                <a:cs typeface="Calibri" pitchFamily="34" charset="-120"/>
+              </a:rPr>
+              <a:t>2</a:t>
+            </a:r>
+            <a:endParaRPr lang="en-US" sz="1000" dirty="0"/>
+          </a:p>
+        </p:txBody>
+      </p:sp>
+      <p:sp>
+        <p:nvSpPr>
+          <p:cNvPr id="15" name="Text 13"/>
+          <p:cNvSpPr/>
+          <p:nvPr/>
+        </p:nvSpPr>
+        <p:spPr>
+          <a:xfrm>
+            <a:off x="928116" y="2987040"/>
+            <a:ext cx="1554480" cy="792480"/>
+          </a:xfrm>
+          <a:prstGeom prst="rect">
+            <a:avLst/>
+          </a:prstGeom>
+          <a:noFill/>
+          <a:ln/>
+        </p:spPr>
+        <p:txBody>
+          <a:bodyPr wrap="square" lIns="0" tIns="0" rIns="0" bIns="0" rtlCol="0" anchor="ctr"/>
+          <a:lstStyle/>
+          <a:p>
+            <a:pPr indent="0" marL="0">
+              <a:buNone/>
+            </a:pPr>
+            <a:r>
+              <a:rPr lang="en-US" sz="1100" dirty="0">
+                <a:solidFill>
+                  <a:srgbClr val="1A1F36"/>
+                </a:solidFill>
+                <a:latin typeface="Calibri" pitchFamily="34" charset="0"/>
+                <a:ea typeface="Calibri" pitchFamily="34" charset="-122"/>
+                <a:cs typeface="Calibri" pitchFamily="34" charset="-120"/>
+              </a:rPr>
+              <a:t>Ownership assignment</a:t>
+            </a:r>
+            <a:endParaRPr lang="en-US" sz="1100" dirty="0"/>
+          </a:p>
+        </p:txBody>
+      </p:sp>
+      <p:sp>
+        <p:nvSpPr>
+          <p:cNvPr id="16" name="Shape 14"/>
+          <p:cNvSpPr/>
+          <p:nvPr/>
+        </p:nvSpPr>
+        <p:spPr>
+          <a:xfrm>
+            <a:off x="2510028" y="3273552"/>
+            <a:ext cx="594360" cy="219456"/>
+          </a:xfrm>
+          <a:prstGeom prst="rect">
+            <a:avLst/>
+          </a:prstGeom>
+          <a:solidFill>
+            <a:srgbClr val="02C39A"/>
+          </a:solidFill>
+          <a:ln w="12700">
+            <a:solidFill>
+              <a:srgbClr val="02C39A"/>
+            </a:solidFill>
+            <a:prstDash val="solid"/>
+          </a:ln>
+        </p:spPr>
+      </p:sp>
+      <p:sp>
+        <p:nvSpPr>
+          <p:cNvPr id="17" name="Text 15"/>
+          <p:cNvSpPr/>
+          <p:nvPr/>
+        </p:nvSpPr>
+        <p:spPr>
+          <a:xfrm>
+            <a:off x="2510028" y="3273552"/>
+            <a:ext cx="594360" cy="219456"/>
+          </a:xfrm>
+          <a:prstGeom prst="rect">
+            <a:avLst/>
+          </a:prstGeom>
+          <a:noFill/>
+          <a:ln/>
+        </p:spPr>
+        <p:txBody>
+          <a:bodyPr wrap="square" lIns="0" tIns="0" rIns="0" bIns="0" rtlCol="0" anchor="ctr"/>
+          <a:lstStyle/>
+          <a:p>
+            <a:pPr algn="ctr" indent="0" marL="0">
+              <a:buNone/>
+            </a:pPr>
+            <a:r>
+              <a:rPr lang="en-US" sz="900" b="1" dirty="0">
+                <a:solidFill>
+                  <a:srgbClr val="FFFFFF"/>
+                </a:solidFill>
+                <a:latin typeface="Calibri" pitchFamily="34" charset="0"/>
+                <a:ea typeface="Calibri" pitchFamily="34" charset="-122"/>
+                <a:cs typeface="Calibri" pitchFamily="34" charset="-120"/>
+              </a:rPr>
+              <a:t>M1 ✓</a:t>
+            </a:r>
+            <a:endParaRPr lang="en-US" sz="900" dirty="0"/>
+          </a:p>
+        </p:txBody>
+      </p:sp>
+      <p:sp>
+        <p:nvSpPr>
+          <p:cNvPr id="18" name="Shape 16"/>
+          <p:cNvSpPr/>
+          <p:nvPr/>
+        </p:nvSpPr>
+        <p:spPr>
+          <a:xfrm>
+            <a:off x="598932" y="4047744"/>
+            <a:ext cx="256032" cy="256032"/>
+          </a:xfrm>
+          <a:prstGeom prst="ellipse">
+            <a:avLst/>
+          </a:prstGeom>
+          <a:solidFill>
+            <a:srgbClr val="02C39A"/>
+          </a:solidFill>
+          <a:ln w="12700">
+            <a:solidFill>
+              <a:srgbClr val="02C39A"/>
+            </a:solidFill>
+            <a:prstDash val="solid"/>
+          </a:ln>
+        </p:spPr>
+      </p:sp>
+      <p:sp>
+        <p:nvSpPr>
+          <p:cNvPr id="19" name="Text 17"/>
+          <p:cNvSpPr/>
+          <p:nvPr/>
+        </p:nvSpPr>
+        <p:spPr>
+          <a:xfrm>
+            <a:off x="598932" y="4047744"/>
+            <a:ext cx="256032" cy="256032"/>
+          </a:xfrm>
+          <a:prstGeom prst="rect">
+            <a:avLst/>
+          </a:prstGeom>
+          <a:noFill/>
+          <a:ln/>
+        </p:spPr>
+        <p:txBody>
+          <a:bodyPr wrap="square" lIns="0" tIns="0" rIns="0" bIns="0" rtlCol="0" anchor="ctr"/>
+          <a:lstStyle/>
+          <a:p>
+            <a:pPr algn="ctr" indent="0" marL="0">
+              <a:buNone/>
+            </a:pPr>
+            <a:r>
+              <a:rPr lang="en-US" sz="1000" b="1" dirty="0">
+                <a:solidFill>
+                  <a:srgbClr val="FFFFFF"/>
+                </a:solidFill>
+                <a:latin typeface="Calibri" pitchFamily="34" charset="0"/>
+                <a:ea typeface="Calibri" pitchFamily="34" charset="-122"/>
+                <a:cs typeface="Calibri" pitchFamily="34" charset="-120"/>
+              </a:rPr>
+              <a:t>10</a:t>
+            </a:r>
+            <a:endParaRPr lang="en-US" sz="1000" dirty="0"/>
+          </a:p>
+        </p:txBody>
+      </p:sp>
+      <p:sp>
+        <p:nvSpPr>
+          <p:cNvPr id="20" name="Text 18"/>
+          <p:cNvSpPr/>
+          <p:nvPr/>
+        </p:nvSpPr>
+        <p:spPr>
+          <a:xfrm>
+            <a:off x="928116" y="3779520"/>
+            <a:ext cx="1554480" cy="792480"/>
+          </a:xfrm>
+          <a:prstGeom prst="rect">
+            <a:avLst/>
+          </a:prstGeom>
+          <a:noFill/>
+          <a:ln/>
+        </p:spPr>
+        <p:txBody>
+          <a:bodyPr wrap="square" lIns="0" tIns="0" rIns="0" bIns="0" rtlCol="0" anchor="ctr"/>
+          <a:lstStyle/>
+          <a:p>
+            <a:pPr indent="0" marL="0">
+              <a:buNone/>
+            </a:pPr>
+            <a:r>
+              <a:rPr lang="en-US" sz="1100" dirty="0">
+                <a:solidFill>
+                  <a:srgbClr val="1A1F36"/>
+                </a:solidFill>
+                <a:latin typeface="Calibri" pitchFamily="34" charset="0"/>
+                <a:ea typeface="Calibri" pitchFamily="34" charset="-122"/>
+                <a:cs typeface="Calibri" pitchFamily="34" charset="-120"/>
+              </a:rPr>
+              <a:t>Visibility &amp; observability</a:t>
+            </a:r>
+            <a:endParaRPr lang="en-US" sz="1100" dirty="0"/>
+          </a:p>
+        </p:txBody>
+      </p:sp>
+      <p:sp>
+        <p:nvSpPr>
+          <p:cNvPr id="21" name="Shape 19"/>
+          <p:cNvSpPr/>
+          <p:nvPr/>
+        </p:nvSpPr>
+        <p:spPr>
+          <a:xfrm>
+            <a:off x="2510028" y="4066032"/>
+            <a:ext cx="594360" cy="219456"/>
+          </a:xfrm>
+          <a:prstGeom prst="rect">
+            <a:avLst/>
+          </a:prstGeom>
+          <a:solidFill>
+            <a:srgbClr val="02C39A"/>
+          </a:solidFill>
+          <a:ln w="12700">
+            <a:solidFill>
+              <a:srgbClr val="02C39A"/>
+            </a:solidFill>
+            <a:prstDash val="solid"/>
+          </a:ln>
+        </p:spPr>
+      </p:sp>
+      <p:sp>
+        <p:nvSpPr>
+          <p:cNvPr id="22" name="Text 20"/>
+          <p:cNvSpPr/>
+          <p:nvPr/>
+        </p:nvSpPr>
+        <p:spPr>
+          <a:xfrm>
+            <a:off x="2510028" y="4066032"/>
+            <a:ext cx="594360" cy="219456"/>
+          </a:xfrm>
+          <a:prstGeom prst="rect">
+            <a:avLst/>
+          </a:prstGeom>
+          <a:noFill/>
+          <a:ln/>
+        </p:spPr>
+        <p:txBody>
+          <a:bodyPr wrap="square" lIns="0" tIns="0" rIns="0" bIns="0" rtlCol="0" anchor="ctr"/>
+          <a:lstStyle/>
+          <a:p>
+            <a:pPr algn="ctr" indent="0" marL="0">
+              <a:buNone/>
+            </a:pPr>
+            <a:r>
+              <a:rPr lang="en-US" sz="900" b="1" dirty="0">
+                <a:solidFill>
+                  <a:srgbClr val="FFFFFF"/>
+                </a:solidFill>
+                <a:latin typeface="Calibri" pitchFamily="34" charset="0"/>
+                <a:ea typeface="Calibri" pitchFamily="34" charset="-122"/>
+                <a:cs typeface="Calibri" pitchFamily="34" charset="-120"/>
+              </a:rPr>
+              <a:t>M1 ✓</a:t>
+            </a:r>
+            <a:endParaRPr lang="en-US" sz="900" dirty="0"/>
+          </a:p>
+        </p:txBody>
+      </p:sp>
+      <p:sp>
+        <p:nvSpPr>
+          <p:cNvPr id="23" name="Shape 21"/>
+          <p:cNvSpPr/>
+          <p:nvPr/>
+        </p:nvSpPr>
+        <p:spPr>
+          <a:xfrm>
+            <a:off x="3140964" y="1892808"/>
+            <a:ext cx="82296" cy="0"/>
+          </a:xfrm>
+          <a:prstGeom prst="line">
+            <a:avLst/>
+          </a:prstGeom>
+          <a:noFill/>
+          <a:ln w="25400">
+            <a:solidFill>
+              <a:srgbClr val="CBD5E1"/>
+            </a:solidFill>
+            <a:prstDash val="solid"/>
+            <a:tailEnd type="triangle"/>
+          </a:ln>
+        </p:spPr>
+      </p:sp>
+      <p:sp>
+        <p:nvSpPr>
+          <p:cNvPr id="24" name="Shape 22"/>
+          <p:cNvSpPr/>
+          <p:nvPr/>
+        </p:nvSpPr>
+        <p:spPr>
+          <a:xfrm>
+            <a:off x="3223260" y="1691640"/>
+            <a:ext cx="2697480" cy="411480"/>
+          </a:xfrm>
+          <a:prstGeom prst="rect">
+            <a:avLst/>
+          </a:prstGeom>
+          <a:solidFill>
+            <a:srgbClr val="0F1B3D"/>
+          </a:solidFill>
+          <a:ln w="12700">
+            <a:solidFill>
+              <a:srgbClr val="0F1B3D"/>
+            </a:solidFill>
+            <a:prstDash val="solid"/>
+          </a:ln>
+        </p:spPr>
+      </p:sp>
+      <p:sp>
+        <p:nvSpPr>
+          <p:cNvPr id="25" name="Text 23"/>
+          <p:cNvSpPr/>
+          <p:nvPr/>
+        </p:nvSpPr>
+        <p:spPr>
+          <a:xfrm>
+            <a:off x="3223260" y="1691640"/>
+            <a:ext cx="2697480" cy="411480"/>
+          </a:xfrm>
+          <a:prstGeom prst="rect">
+            <a:avLst/>
+          </a:prstGeom>
+          <a:noFill/>
+          <a:ln/>
+        </p:spPr>
+        <p:txBody>
+          <a:bodyPr wrap="square" lIns="0" tIns="0" rIns="0" bIns="0" rtlCol="0" anchor="ctr"/>
+          <a:lstStyle/>
+          <a:p>
+            <a:pPr algn="ctr" indent="0" marL="0">
+              <a:buNone/>
+            </a:pPr>
+            <a:r>
+              <a:rPr lang="en-US" sz="1400" b="1" spc="500" kern="0" dirty="0">
+                <a:solidFill>
+                  <a:srgbClr val="FFFFFF"/>
+                </a:solidFill>
+                <a:latin typeface="Calibri" pitchFamily="34" charset="0"/>
+                <a:ea typeface="Calibri" pitchFamily="34" charset="-122"/>
+                <a:cs typeface="Calibri" pitchFamily="34" charset="-120"/>
+              </a:rPr>
+              <a:t>ASSESS</a:t>
+            </a:r>
+            <a:endParaRPr lang="en-US" sz="1400" dirty="0"/>
+          </a:p>
+        </p:txBody>
+      </p:sp>
+      <p:sp>
+        <p:nvSpPr>
+          <p:cNvPr id="26" name="Shape 24"/>
+          <p:cNvSpPr/>
+          <p:nvPr/>
+        </p:nvSpPr>
+        <p:spPr>
+          <a:xfrm>
+            <a:off x="3223260" y="2103120"/>
+            <a:ext cx="2697480" cy="2468880"/>
+          </a:xfrm>
+          <a:prstGeom prst="rect">
+            <a:avLst/>
+          </a:prstGeom>
+          <a:solidFill>
+            <a:srgbClr val="E8EEFC"/>
+          </a:solidFill>
+          <a:ln w="12700">
+            <a:solidFill>
+              <a:srgbClr val="0F1B3D"/>
+            </a:solidFill>
+            <a:prstDash val="solid"/>
+          </a:ln>
+        </p:spPr>
+      </p:sp>
+      <p:sp>
+        <p:nvSpPr>
+          <p:cNvPr id="27" name="Shape 25"/>
+          <p:cNvSpPr/>
+          <p:nvPr/>
+        </p:nvSpPr>
+        <p:spPr>
+          <a:xfrm>
+            <a:off x="3387852" y="2462784"/>
+            <a:ext cx="256032" cy="256032"/>
+          </a:xfrm>
+          <a:prstGeom prst="ellipse">
+            <a:avLst/>
+          </a:prstGeom>
+          <a:solidFill>
+            <a:srgbClr val="0F1B3D"/>
+          </a:solidFill>
+          <a:ln w="12700">
+            <a:solidFill>
+              <a:srgbClr val="0F1B3D"/>
+            </a:solidFill>
+            <a:prstDash val="solid"/>
+          </a:ln>
+        </p:spPr>
+      </p:sp>
+      <p:sp>
+        <p:nvSpPr>
+          <p:cNvPr id="28" name="Text 26"/>
+          <p:cNvSpPr/>
+          <p:nvPr/>
+        </p:nvSpPr>
+        <p:spPr>
+          <a:xfrm>
+            <a:off x="3387852" y="2462784"/>
+            <a:ext cx="256032" cy="256032"/>
+          </a:xfrm>
+          <a:prstGeom prst="rect">
+            <a:avLst/>
+          </a:prstGeom>
+          <a:noFill/>
+          <a:ln/>
+        </p:spPr>
+        <p:txBody>
+          <a:bodyPr wrap="square" lIns="0" tIns="0" rIns="0" bIns="0" rtlCol="0" anchor="ctr"/>
+          <a:lstStyle/>
+          <a:p>
+            <a:pPr algn="ctr" indent="0" marL="0">
+              <a:buNone/>
+            </a:pPr>
+            <a:r>
+              <a:rPr lang="en-US" sz="1000" b="1" dirty="0">
+                <a:solidFill>
+                  <a:srgbClr val="FFFFFF"/>
+                </a:solidFill>
+                <a:latin typeface="Calibri" pitchFamily="34" charset="0"/>
+                <a:ea typeface="Calibri" pitchFamily="34" charset="-122"/>
+                <a:cs typeface="Calibri" pitchFamily="34" charset="-120"/>
+              </a:rPr>
+              <a:t>3</a:t>
+            </a:r>
+            <a:endParaRPr lang="en-US" sz="1000" dirty="0"/>
+          </a:p>
+        </p:txBody>
+      </p:sp>
+      <p:sp>
+        <p:nvSpPr>
+          <p:cNvPr id="29" name="Text 27"/>
+          <p:cNvSpPr/>
+          <p:nvPr/>
+        </p:nvSpPr>
+        <p:spPr>
+          <a:xfrm>
+            <a:off x="3717036" y="2194560"/>
+            <a:ext cx="1554480" cy="792480"/>
+          </a:xfrm>
+          <a:prstGeom prst="rect">
+            <a:avLst/>
+          </a:prstGeom>
+          <a:noFill/>
+          <a:ln/>
+        </p:spPr>
+        <p:txBody>
+          <a:bodyPr wrap="square" lIns="0" tIns="0" rIns="0" bIns="0" rtlCol="0" anchor="ctr"/>
+          <a:lstStyle/>
+          <a:p>
+            <a:pPr indent="0" marL="0">
+              <a:buNone/>
+            </a:pPr>
+            <a:r>
+              <a:rPr lang="en-US" sz="1100" dirty="0">
+                <a:solidFill>
+                  <a:srgbClr val="1A1F36"/>
+                </a:solidFill>
+                <a:latin typeface="Calibri" pitchFamily="34" charset="0"/>
+                <a:ea typeface="Calibri" pitchFamily="34" charset="-122"/>
+                <a:cs typeface="Calibri" pitchFamily="34" charset="-120"/>
+              </a:rPr>
+              <a:t>Authentication</a:t>
+            </a:r>
+            <a:endParaRPr lang="en-US" sz="1100" dirty="0"/>
+          </a:p>
+        </p:txBody>
+      </p:sp>
+      <p:sp>
+        <p:nvSpPr>
+          <p:cNvPr id="30" name="Shape 28"/>
+          <p:cNvSpPr/>
+          <p:nvPr/>
+        </p:nvSpPr>
+        <p:spPr>
+          <a:xfrm>
+            <a:off x="5298948" y="2481072"/>
+            <a:ext cx="594360" cy="219456"/>
+          </a:xfrm>
+          <a:prstGeom prst="rect">
+            <a:avLst/>
+          </a:prstGeom>
+          <a:solidFill>
             <a:srgbClr val="F59E0B"/>
           </a:solidFill>
           <a:ln w="12700">
@@ -4791,356 +3891,166 @@
       </p:sp>
       <p:sp>
         <p:nvSpPr>
-          <p:cNvPr id="3" name="Text 1"/>
-          <p:cNvSpPr/>
-          <p:nvPr/>
-        </p:nvSpPr>
-        <p:spPr>
-          <a:xfrm>
-            <a:off x="457200" y="365760"/>
-            <a:ext cx="7315200" cy="274320"/>
-          </a:xfrm>
-          <a:prstGeom prst="rect">
-            <a:avLst/>
-          </a:prstGeom>
-          <a:noFill/>
-          <a:ln/>
-        </p:spPr>
-        <p:txBody>
-          <a:bodyPr wrap="square" lIns="0" tIns="0" rIns="0" bIns="0" rtlCol="0" anchor="ctr"/>
-          <a:lstStyle/>
-          <a:p>
-            <a:pPr indent="0" marL="0">
-              <a:buNone/>
-            </a:pPr>
-            <a:r>
-              <a:rPr lang="en-US" sz="1100" b="1" spc="400" kern="0" dirty="0">
-                <a:solidFill>
-                  <a:srgbClr val="64748B"/>
-                </a:solidFill>
-                <a:latin typeface="Calibri" pitchFamily="34" charset="0"/>
-                <a:ea typeface="Calibri" pitchFamily="34" charset="-122"/>
-                <a:cs typeface="Calibri" pitchFamily="34" charset="-120"/>
-              </a:rPr>
-              <a:t>04 · What we tried first</a:t>
-            </a:r>
-            <a:endParaRPr lang="en-US" sz="1100" dirty="0"/>
-          </a:p>
-        </p:txBody>
-      </p:sp>
-      <p:sp>
-        <p:nvSpPr>
-          <p:cNvPr id="4" name="Text 2"/>
-          <p:cNvSpPr/>
-          <p:nvPr/>
-        </p:nvSpPr>
-        <p:spPr>
-          <a:xfrm>
-            <a:off x="457200" y="731520"/>
-            <a:ext cx="8229600" cy="777240"/>
-          </a:xfrm>
-          <a:prstGeom prst="rect">
-            <a:avLst/>
-          </a:prstGeom>
-          <a:noFill/>
-          <a:ln/>
-        </p:spPr>
-        <p:txBody>
-          <a:bodyPr wrap="square" lIns="0" tIns="0" rIns="0" bIns="0" rtlCol="0" anchor="ctr"/>
-          <a:lstStyle/>
-          <a:p>
-            <a:pPr indent="0" marL="0">
-              <a:buNone/>
-            </a:pPr>
-            <a:r>
-              <a:rPr lang="en-US" sz="3400" b="1" dirty="0">
-                <a:solidFill>
-                  <a:srgbClr val="1A1F36"/>
-                </a:solidFill>
-                <a:latin typeface="Georgia" pitchFamily="34" charset="0"/>
-                <a:ea typeface="Georgia" pitchFamily="34" charset="-122"/>
-                <a:cs typeface="Georgia" pitchFamily="34" charset="-120"/>
-              </a:rPr>
-              <a:t>The original approach.</a:t>
-            </a:r>
-            <a:endParaRPr lang="en-US" sz="3400" dirty="0"/>
-          </a:p>
-        </p:txBody>
-      </p:sp>
-      <p:sp>
-        <p:nvSpPr>
-          <p:cNvPr id="5" name="Shape 3"/>
-          <p:cNvSpPr/>
-          <p:nvPr/>
-        </p:nvSpPr>
-        <p:spPr>
-          <a:xfrm>
-            <a:off x="457200" y="1691640"/>
-            <a:ext cx="3931920" cy="2743200"/>
-          </a:xfrm>
-          <a:prstGeom prst="rect">
-            <a:avLst/>
-          </a:prstGeom>
-          <a:solidFill>
-            <a:srgbClr val="E8EEFC"/>
+          <p:cNvPr id="31" name="Text 29"/>
+          <p:cNvSpPr/>
+          <p:nvPr/>
+        </p:nvSpPr>
+        <p:spPr>
+          <a:xfrm>
+            <a:off x="5298948" y="2481072"/>
+            <a:ext cx="594360" cy="219456"/>
+          </a:xfrm>
+          <a:prstGeom prst="rect">
+            <a:avLst/>
+          </a:prstGeom>
+          <a:noFill/>
+          <a:ln/>
+        </p:spPr>
+        <p:txBody>
+          <a:bodyPr wrap="square" lIns="0" tIns="0" rIns="0" bIns="0" rtlCol="0" anchor="ctr"/>
+          <a:lstStyle/>
+          <a:p>
+            <a:pPr algn="ctr" indent="0" marL="0">
+              <a:buNone/>
+            </a:pPr>
+            <a:r>
+              <a:rPr lang="en-US" sz="900" b="1" dirty="0">
+                <a:solidFill>
+                  <a:srgbClr val="FFFFFF"/>
+                </a:solidFill>
+                <a:latin typeface="Calibri" pitchFamily="34" charset="0"/>
+                <a:ea typeface="Calibri" pitchFamily="34" charset="-122"/>
+                <a:cs typeface="Calibri" pitchFamily="34" charset="-120"/>
+              </a:rPr>
+              <a:t>M2</a:t>
+            </a:r>
+            <a:endParaRPr lang="en-US" sz="900" dirty="0"/>
+          </a:p>
+        </p:txBody>
+      </p:sp>
+      <p:sp>
+        <p:nvSpPr>
+          <p:cNvPr id="32" name="Shape 30"/>
+          <p:cNvSpPr/>
+          <p:nvPr/>
+        </p:nvSpPr>
+        <p:spPr>
+          <a:xfrm>
+            <a:off x="3387852" y="3255264"/>
+            <a:ext cx="256032" cy="256032"/>
+          </a:xfrm>
+          <a:prstGeom prst="ellipse">
+            <a:avLst/>
+          </a:prstGeom>
+          <a:solidFill>
+            <a:srgbClr val="0F1B3D"/>
           </a:solidFill>
           <a:ln w="12700">
-            <a:solidFill>
-              <a:srgbClr val="E8EEFC"/>
-            </a:solidFill>
-            <a:prstDash val="solid"/>
-          </a:ln>
-        </p:spPr>
-      </p:sp>
-      <p:sp>
-        <p:nvSpPr>
-          <p:cNvPr id="6" name="Shape 4"/>
-          <p:cNvSpPr/>
-          <p:nvPr/>
-        </p:nvSpPr>
-        <p:spPr>
-          <a:xfrm>
-            <a:off x="457200" y="1691640"/>
-            <a:ext cx="73152" cy="2743200"/>
-          </a:xfrm>
-          <a:prstGeom prst="rect">
-            <a:avLst/>
-          </a:prstGeom>
-          <a:solidFill>
-            <a:srgbClr val="F59E0B"/>
-          </a:solidFill>
-          <a:ln w="12700">
-            <a:solidFill>
-              <a:srgbClr val="F59E0B"/>
-            </a:solidFill>
-            <a:prstDash val="solid"/>
-          </a:ln>
-        </p:spPr>
-      </p:sp>
-      <p:sp>
-        <p:nvSpPr>
-          <p:cNvPr id="7" name="Text 5"/>
-          <p:cNvSpPr/>
-          <p:nvPr/>
-        </p:nvSpPr>
-        <p:spPr>
-          <a:xfrm>
-            <a:off x="640080" y="1783080"/>
-            <a:ext cx="3566160" cy="365760"/>
-          </a:xfrm>
-          <a:prstGeom prst="rect">
-            <a:avLst/>
-          </a:prstGeom>
-          <a:noFill/>
-          <a:ln/>
-        </p:spPr>
-        <p:txBody>
-          <a:bodyPr wrap="square" lIns="0" tIns="0" rIns="0" bIns="0" rtlCol="0" anchor="ctr"/>
-          <a:lstStyle/>
-          <a:p>
-            <a:pPr indent="0" marL="0">
-              <a:buNone/>
-            </a:pPr>
-            <a:r>
-              <a:rPr lang="en-US" sz="1500" b="1" dirty="0">
-                <a:solidFill>
-                  <a:srgbClr val="0F1B3D"/>
-                </a:solidFill>
-                <a:latin typeface="Georgia" pitchFamily="34" charset="0"/>
-                <a:ea typeface="Georgia" pitchFamily="34" charset="-122"/>
-                <a:cs typeface="Georgia" pitchFamily="34" charset="-120"/>
-              </a:rPr>
-              <a:t>The plan</a:t>
-            </a:r>
-            <a:endParaRPr lang="en-US" sz="1500" dirty="0"/>
-          </a:p>
-        </p:txBody>
-      </p:sp>
-      <p:sp>
-        <p:nvSpPr>
-          <p:cNvPr id="8" name="Text 6"/>
-          <p:cNvSpPr/>
-          <p:nvPr/>
-        </p:nvSpPr>
-        <p:spPr>
-          <a:xfrm>
-            <a:off x="640080" y="2240280"/>
-            <a:ext cx="3566160" cy="2011680"/>
-          </a:xfrm>
-          <a:prstGeom prst="rect">
-            <a:avLst/>
-          </a:prstGeom>
-          <a:noFill/>
-          <a:ln/>
-        </p:spPr>
-        <p:txBody>
-          <a:bodyPr wrap="square" lIns="0" tIns="0" rIns="0" bIns="0" rtlCol="0" anchor="ctr"/>
-          <a:lstStyle/>
-          <a:p>
-            <a:pPr indent="0" marL="0">
-              <a:buNone/>
-            </a:pPr>
-            <a:r>
-              <a:rPr lang="en-US" sz="1200" dirty="0">
-                <a:solidFill>
-                  <a:srgbClr val="1A1F36"/>
-                </a:solidFill>
-                <a:latin typeface="Calibri" pitchFamily="34" charset="0"/>
-                <a:ea typeface="Calibri" pitchFamily="34" charset="-122"/>
-                <a:cs typeface="Calibri" pitchFamily="34" charset="-120"/>
-              </a:rPr>
-              <a:t>Govern agents using the same IAM APIs that power human + NHI governance.</a:t>
-            </a:r>
-            <a:endParaRPr lang="en-US" sz="1200" dirty="0"/>
-          </a:p>
-          <a:p>
-            <a:pPr indent="0" marL="0">
-              <a:buNone/>
-            </a:pPr>
-            <a:r>
-              <a:rPr lang="en-US" sz="500" dirty="0">
-                <a:solidFill>
-                  <a:srgbClr val="000000"/>
-                </a:solidFill>
-                <a:latin typeface="Calibri" pitchFamily="34" charset="0"/>
-                <a:ea typeface="Calibri" pitchFamily="34" charset="-122"/>
-                <a:cs typeface="Calibri" pitchFamily="34" charset="-120"/>
-              </a:rPr>
-              <a:t> </a:t>
-            </a:r>
-            <a:endParaRPr lang="en-US" sz="1200" dirty="0"/>
-          </a:p>
-          <a:p>
-            <a:pPr indent="0" marL="0">
-              <a:buNone/>
-            </a:pPr>
-            <a:r>
-              <a:rPr lang="en-US" sz="1200" dirty="0">
-                <a:solidFill>
-                  <a:srgbClr val="1A1F36"/>
-                </a:solidFill>
-                <a:latin typeface="Calibri" pitchFamily="34" charset="0"/>
-                <a:ea typeface="Calibri" pitchFamily="34" charset="-122"/>
-                <a:cs typeface="Calibri" pitchFamily="34" charset="-120"/>
-              </a:rPr>
-              <a:t>Identity graph already connected to every app.</a:t>
-            </a:r>
-            <a:endParaRPr lang="en-US" sz="1200" dirty="0"/>
-          </a:p>
-          <a:p>
-            <a:pPr indent="0" marL="0">
-              <a:buNone/>
-            </a:pPr>
-            <a:r>
-              <a:rPr lang="en-US" sz="1200" dirty="0">
-                <a:solidFill>
-                  <a:srgbClr val="1A1F36"/>
-                </a:solidFill>
-                <a:latin typeface="Calibri" pitchFamily="34" charset="0"/>
-                <a:ea typeface="Calibri" pitchFamily="34" charset="-122"/>
-                <a:cs typeface="Calibri" pitchFamily="34" charset="-120"/>
-              </a:rPr>
-              <a:t>Access request flows already built.</a:t>
-            </a:r>
-            <a:endParaRPr lang="en-US" sz="1200" dirty="0"/>
-          </a:p>
-          <a:p>
-            <a:pPr indent="0" marL="0">
-              <a:buNone/>
-            </a:pPr>
-            <a:r>
-              <a:rPr lang="en-US" sz="1200" dirty="0">
-                <a:solidFill>
-                  <a:srgbClr val="1A1F36"/>
-                </a:solidFill>
-                <a:latin typeface="Calibri" pitchFamily="34" charset="0"/>
-                <a:ea typeface="Calibri" pitchFamily="34" charset="-122"/>
-                <a:cs typeface="Calibri" pitchFamily="34" charset="-120"/>
-              </a:rPr>
-              <a:t>Credential discovery already in motion (M2).</a:t>
-            </a:r>
-            <a:endParaRPr lang="en-US" sz="1200" dirty="0"/>
-          </a:p>
-          <a:p>
-            <a:pPr indent="0" marL="0">
-              <a:buNone/>
-            </a:pPr>
-            <a:r>
-              <a:rPr lang="en-US" sz="500" dirty="0">
-                <a:solidFill>
-                  <a:srgbClr val="000000"/>
-                </a:solidFill>
-                <a:latin typeface="Calibri" pitchFamily="34" charset="0"/>
-                <a:ea typeface="Calibri" pitchFamily="34" charset="-122"/>
-                <a:cs typeface="Calibri" pitchFamily="34" charset="-120"/>
-              </a:rPr>
-              <a:t> </a:t>
-            </a:r>
-            <a:endParaRPr lang="en-US" sz="1200" dirty="0"/>
-          </a:p>
-          <a:p>
-            <a:pPr indent="0" marL="0">
-              <a:buNone/>
-            </a:pPr>
-            <a:r>
-              <a:rPr lang="en-US" sz="1200" i="1" dirty="0">
-                <a:solidFill>
-                  <a:srgbClr val="64748B"/>
-                </a:solidFill>
-                <a:latin typeface="Calibri" pitchFamily="34" charset="0"/>
-                <a:ea typeface="Calibri" pitchFamily="34" charset="-122"/>
-                <a:cs typeface="Calibri" pitchFamily="34" charset="-120"/>
-              </a:rPr>
-              <a:t>Natural extension of what we already do for humans and NHIs.</a:t>
-            </a:r>
-            <a:endParaRPr lang="en-US" sz="1200" dirty="0"/>
-          </a:p>
-        </p:txBody>
-      </p:sp>
-      <p:sp>
-        <p:nvSpPr>
-          <p:cNvPr id="9" name="Shape 7"/>
-          <p:cNvSpPr/>
-          <p:nvPr/>
-        </p:nvSpPr>
-        <p:spPr>
-          <a:xfrm>
-            <a:off x="4453128" y="3063240"/>
-            <a:ext cx="502920" cy="0"/>
-          </a:xfrm>
-          <a:prstGeom prst="line">
-            <a:avLst/>
-          </a:prstGeom>
-          <a:noFill/>
-          <a:ln w="25400">
             <a:solidFill>
               <a:srgbClr val="0F1B3D"/>
             </a:solidFill>
             <a:prstDash val="solid"/>
-            <a:tailEnd type="triangle"/>
           </a:ln>
         </p:spPr>
       </p:sp>
       <p:sp>
         <p:nvSpPr>
-          <p:cNvPr id="10" name="Shape 8"/>
-          <p:cNvSpPr/>
-          <p:nvPr/>
-        </p:nvSpPr>
-        <p:spPr>
-          <a:xfrm>
-            <a:off x="5029200" y="1691640"/>
-            <a:ext cx="3749040" cy="2743200"/>
-          </a:xfrm>
-          <a:prstGeom prst="rect">
-            <a:avLst/>
-          </a:prstGeom>
-          <a:solidFill>
-            <a:srgbClr val="E8EEFC"/>
+          <p:cNvPr id="33" name="Text 31"/>
+          <p:cNvSpPr/>
+          <p:nvPr/>
+        </p:nvSpPr>
+        <p:spPr>
+          <a:xfrm>
+            <a:off x="3387852" y="3255264"/>
+            <a:ext cx="256032" cy="256032"/>
+          </a:xfrm>
+          <a:prstGeom prst="rect">
+            <a:avLst/>
+          </a:prstGeom>
+          <a:noFill/>
+          <a:ln/>
+        </p:spPr>
+        <p:txBody>
+          <a:bodyPr wrap="square" lIns="0" tIns="0" rIns="0" bIns="0" rtlCol="0" anchor="ctr"/>
+          <a:lstStyle/>
+          <a:p>
+            <a:pPr algn="ctr" indent="0" marL="0">
+              <a:buNone/>
+            </a:pPr>
+            <a:r>
+              <a:rPr lang="en-US" sz="1000" b="1" dirty="0">
+                <a:solidFill>
+                  <a:srgbClr val="FFFFFF"/>
+                </a:solidFill>
+                <a:latin typeface="Calibri" pitchFamily="34" charset="0"/>
+                <a:ea typeface="Calibri" pitchFamily="34" charset="-122"/>
+                <a:cs typeface="Calibri" pitchFamily="34" charset="-120"/>
+              </a:rPr>
+              <a:t>4</a:t>
+            </a:r>
+            <a:endParaRPr lang="en-US" sz="1000" dirty="0"/>
+          </a:p>
+        </p:txBody>
+      </p:sp>
+      <p:sp>
+        <p:nvSpPr>
+          <p:cNvPr id="34" name="Text 32"/>
+          <p:cNvSpPr/>
+          <p:nvPr/>
+        </p:nvSpPr>
+        <p:spPr>
+          <a:xfrm>
+            <a:off x="3717036" y="2987040"/>
+            <a:ext cx="1554480" cy="792480"/>
+          </a:xfrm>
+          <a:prstGeom prst="rect">
+            <a:avLst/>
+          </a:prstGeom>
+          <a:noFill/>
+          <a:ln/>
+        </p:spPr>
+        <p:txBody>
+          <a:bodyPr wrap="square" lIns="0" tIns="0" rIns="0" bIns="0" rtlCol="0" anchor="ctr"/>
+          <a:lstStyle/>
+          <a:p>
+            <a:pPr indent="0" marL="0">
+              <a:buNone/>
+            </a:pPr>
+            <a:r>
+              <a:rPr lang="en-US" sz="1100" dirty="0">
+                <a:solidFill>
+                  <a:srgbClr val="1A1F36"/>
+                </a:solidFill>
+                <a:latin typeface="Calibri" pitchFamily="34" charset="0"/>
+                <a:ea typeface="Calibri" pitchFamily="34" charset="-122"/>
+                <a:cs typeface="Calibri" pitchFamily="34" charset="-120"/>
+              </a:rPr>
+              <a:t>Authorization &amp; delegation</a:t>
+            </a:r>
+            <a:endParaRPr lang="en-US" sz="1100" dirty="0"/>
+          </a:p>
+        </p:txBody>
+      </p:sp>
+      <p:sp>
+        <p:nvSpPr>
+          <p:cNvPr id="35" name="Shape 33"/>
+          <p:cNvSpPr/>
+          <p:nvPr/>
+        </p:nvSpPr>
+        <p:spPr>
+          <a:xfrm>
+            <a:off x="5298948" y="3273552"/>
+            <a:ext cx="594360" cy="219456"/>
+          </a:xfrm>
+          <a:prstGeom prst="rect">
+            <a:avLst/>
+          </a:prstGeom>
+          <a:solidFill>
+            <a:srgbClr val="0F1B3D"/>
           </a:solidFill>
           <a:ln w="12700">
             <a:solidFill>
-              <a:srgbClr val="E8EEFC"/>
+              <a:srgbClr val="0F1B3D"/>
             </a:solidFill>
             <a:prstDash val="solid"/>
           </a:ln>
@@ -5148,24 +4058,63 @@
       </p:sp>
       <p:sp>
         <p:nvSpPr>
-          <p:cNvPr id="11" name="Shape 9"/>
-          <p:cNvSpPr/>
-          <p:nvPr/>
-        </p:nvSpPr>
-        <p:spPr>
-          <a:xfrm>
-            <a:off x="5029200" y="1691640"/>
-            <a:ext cx="73152" cy="2743200"/>
-          </a:xfrm>
-          <a:prstGeom prst="rect">
-            <a:avLst/>
-          </a:prstGeom>
-          <a:solidFill>
-            <a:srgbClr val="E11D48"/>
+          <p:cNvPr id="36" name="Text 34"/>
+          <p:cNvSpPr/>
+          <p:nvPr/>
+        </p:nvSpPr>
+        <p:spPr>
+          <a:xfrm>
+            <a:off x="5298948" y="3273552"/>
+            <a:ext cx="594360" cy="219456"/>
+          </a:xfrm>
+          <a:prstGeom prst="rect">
+            <a:avLst/>
+          </a:prstGeom>
+          <a:noFill/>
+          <a:ln/>
+        </p:spPr>
+        <p:txBody>
+          <a:bodyPr wrap="square" lIns="0" tIns="0" rIns="0" bIns="0" rtlCol="0" anchor="ctr"/>
+          <a:lstStyle/>
+          <a:p>
+            <a:pPr algn="ctr" indent="0" marL="0">
+              <a:buNone/>
+            </a:pPr>
+            <a:r>
+              <a:rPr lang="en-US" sz="900" b="1" dirty="0">
+                <a:solidFill>
+                  <a:srgbClr val="FFFFFF"/>
+                </a:solidFill>
+                <a:latin typeface="Calibri" pitchFamily="34" charset="0"/>
+                <a:ea typeface="Calibri" pitchFamily="34" charset="-122"/>
+                <a:cs typeface="Calibri" pitchFamily="34" charset="-120"/>
+              </a:rPr>
+              <a:t>P0</a:t>
+            </a:r>
+            <a:endParaRPr lang="en-US" sz="900" dirty="0"/>
+          </a:p>
+        </p:txBody>
+      </p:sp>
+      <p:sp>
+        <p:nvSpPr>
+          <p:cNvPr id="37" name="Shape 35"/>
+          <p:cNvSpPr/>
+          <p:nvPr/>
+        </p:nvSpPr>
+        <p:spPr>
+          <a:xfrm>
+            <a:off x="3387852" y="4047744"/>
+            <a:ext cx="256032" cy="256032"/>
+          </a:xfrm>
+          <a:prstGeom prst="ellipse">
+            <a:avLst/>
+          </a:prstGeom>
+          <a:solidFill>
+            <a:srgbClr val="0F1B3D"/>
           </a:solidFill>
           <a:ln w="12700">
             <a:solidFill>
-              <a:srgbClr val="E11D48"/>
+              <a:srgbClr val="0F1B3D"/>
             </a:solidFill>
             <a:prstDash val="solid"/>
           </a:ln>
@@ -5173,14 +4122,53 @@
       </p:sp>
       <p:sp>
         <p:nvSpPr>
-          <p:cNvPr id="12" name="Text 10"/>
-          <p:cNvSpPr/>
-          <p:nvPr/>
-        </p:nvSpPr>
-        <p:spPr>
-          <a:xfrm>
-            <a:off x="5212080" y="1783080"/>
-            <a:ext cx="3383280" cy="365760"/>
+          <p:cNvPr id="38" name="Text 36"/>
+          <p:cNvSpPr/>
+          <p:nvPr/>
+        </p:nvSpPr>
+        <p:spPr>
+          <a:xfrm>
+            <a:off x="3387852" y="4047744"/>
+            <a:ext cx="256032" cy="256032"/>
+          </a:xfrm>
+          <a:prstGeom prst="rect">
+            <a:avLst/>
+          </a:prstGeom>
+          <a:noFill/>
+          <a:ln/>
+        </p:spPr>
+        <p:txBody>
+          <a:bodyPr wrap="square" lIns="0" tIns="0" rIns="0" bIns="0" rtlCol="0" anchor="ctr"/>
+          <a:lstStyle/>
+          <a:p>
+            <a:pPr algn="ctr" indent="0" marL="0">
+              <a:buNone/>
+            </a:pPr>
+            <a:r>
+              <a:rPr lang="en-US" sz="1000" b="1" dirty="0">
+                <a:solidFill>
+                  <a:srgbClr val="FFFFFF"/>
+                </a:solidFill>
+                <a:latin typeface="Calibri" pitchFamily="34" charset="0"/>
+                <a:ea typeface="Calibri" pitchFamily="34" charset="-122"/>
+                <a:cs typeface="Calibri" pitchFamily="34" charset="-120"/>
+              </a:rPr>
+              <a:t>9</a:t>
+            </a:r>
+            <a:endParaRPr lang="en-US" sz="1000" dirty="0"/>
+          </a:p>
+        </p:txBody>
+      </p:sp>
+      <p:sp>
+        <p:nvSpPr>
+          <p:cNvPr id="39" name="Text 37"/>
+          <p:cNvSpPr/>
+          <p:nvPr/>
+        </p:nvSpPr>
+        <p:spPr>
+          <a:xfrm>
+            <a:off x="3717036" y="3779520"/>
+            <a:ext cx="1554480" cy="792480"/>
           </a:xfrm>
           <a:prstGeom prst="rect">
             <a:avLst/>
@@ -5196,114 +4184,7 @@
               <a:buNone/>
             </a:pPr>
             <a:r>
-              <a:rPr lang="en-US" sz="1500" b="1" dirty="0">
-                <a:solidFill>
-                  <a:srgbClr val="0F1B3D"/>
-                </a:solidFill>
-                <a:latin typeface="Georgia" pitchFamily="34" charset="0"/>
-                <a:ea typeface="Georgia" pitchFamily="34" charset="-122"/>
-                <a:cs typeface="Georgia" pitchFamily="34" charset="-120"/>
-              </a:rPr>
-              <a:t>What happened</a:t>
-            </a:r>
-            <a:endParaRPr lang="en-US" sz="1500" dirty="0"/>
-          </a:p>
-        </p:txBody>
-      </p:sp>
-      <p:sp>
-        <p:nvSpPr>
-          <p:cNvPr id="13" name="Text 11"/>
-          <p:cNvSpPr/>
-          <p:nvPr/>
-        </p:nvSpPr>
-        <p:spPr>
-          <a:xfrm>
-            <a:off x="5212080" y="2240280"/>
-            <a:ext cx="3383280" cy="2103120"/>
-          </a:xfrm>
-          <a:prstGeom prst="rect">
-            <a:avLst/>
-          </a:prstGeom>
-          <a:noFill/>
-          <a:ln/>
-        </p:spPr>
-        <p:txBody>
-          <a:bodyPr wrap="square" lIns="0" tIns="0" rIns="0" bIns="0" rtlCol="0" anchor="ctr"/>
-          <a:lstStyle/>
-          <a:p>
-            <a:pPr indent="0" marL="0">
-              <a:buNone/>
-            </a:pPr>
-            <a:r>
-              <a:rPr lang="en-US" sz="1200" b="1" dirty="0">
-                <a:solidFill>
-                  <a:srgbClr val="E11D48"/>
-                </a:solidFill>
-                <a:latin typeface="Calibri" pitchFamily="34" charset="0"/>
-                <a:ea typeface="Calibri" pitchFamily="34" charset="-122"/>
-                <a:cs typeface="Calibri" pitchFamily="34" charset="-120"/>
-              </a:rPr>
-              <a:t>The IAM API surface couldn't support the agent access flow.</a:t>
-            </a:r>
-            <a:endParaRPr lang="en-US" sz="1200" dirty="0"/>
-          </a:p>
-          <a:p>
-            <a:pPr indent="0" marL="0">
-              <a:buNone/>
-            </a:pPr>
-            <a:r>
-              <a:rPr lang="en-US" sz="800" dirty="0">
-                <a:solidFill>
-                  <a:srgbClr val="000000"/>
-                </a:solidFill>
-                <a:latin typeface="Calibri" pitchFamily="34" charset="0"/>
-                <a:ea typeface="Calibri" pitchFamily="34" charset="-122"/>
-                <a:cs typeface="Calibri" pitchFamily="34" charset="-120"/>
-              </a:rPr>
-              <a:t> </a:t>
-            </a:r>
-            <a:endParaRPr lang="en-US" sz="1200" dirty="0"/>
-          </a:p>
-          <a:p>
-            <a:pPr indent="0" marL="0">
-              <a:buNone/>
-            </a:pPr>
-            <a:r>
-              <a:rPr lang="en-US" sz="1200" i="1" dirty="0">
-                <a:solidFill>
-                  <a:srgbClr val="64748B"/>
-                </a:solidFill>
-                <a:latin typeface="Calibri" pitchFamily="34" charset="0"/>
-                <a:ea typeface="Calibri" pitchFamily="34" charset="-122"/>
-                <a:cs typeface="Calibri" pitchFamily="34" charset="-120"/>
-              </a:rPr>
-              <a:t>The exact failure mode is what Sarit + Amir are best placed to describe — and it's the foundation for the Gateway design.</a:t>
-            </a:r>
-            <a:endParaRPr lang="en-US" sz="1200" dirty="0"/>
-          </a:p>
-          <a:p>
-            <a:pPr indent="0" marL="0">
-              <a:buNone/>
-            </a:pPr>
-            <a:r>
-              <a:rPr lang="en-US" sz="800" dirty="0">
-                <a:solidFill>
-                  <a:srgbClr val="000000"/>
-                </a:solidFill>
-                <a:latin typeface="Calibri" pitchFamily="34" charset="0"/>
-                <a:ea typeface="Calibri" pitchFamily="34" charset="-122"/>
-                <a:cs typeface="Calibri" pitchFamily="34" charset="-120"/>
-              </a:rPr>
-              <a:t> </a:t>
-            </a:r>
-            <a:endParaRPr lang="en-US" sz="1200" dirty="0"/>
-          </a:p>
-          <a:p>
-            <a:pPr indent="0" marL="0">
-              <a:buNone/>
-            </a:pPr>
-            <a:r>
-              <a:rPr lang="en-US" sz="1200" b="1" dirty="0">
+              <a:rPr lang="en-US" sz="1100" dirty="0">
                 <a:solidFill>
                   <a:srgbClr val="1A1F36"/>
                 </a:solidFill>
@@ -5311,48 +4192,32 @@
                 <a:ea typeface="Calibri" pitchFamily="34" charset="-122"/>
                 <a:cs typeface="Calibri" pitchFamily="34" charset="-120"/>
               </a:rPr>
-              <a:t>What we know: </a:t>
-            </a:r>
-            <a:pPr indent="0" marL="0">
-              <a:buNone/>
-            </a:pPr>
-            <a:r>
-              <a:rPr lang="en-US" sz="1200" dirty="0">
-                <a:solidFill>
-                  <a:srgbClr val="1A1F36"/>
-                </a:solidFill>
-                <a:latin typeface="Calibri" pitchFamily="34" charset="0"/>
-                <a:ea typeface="Calibri" pitchFamily="34" charset="-122"/>
-                <a:cs typeface="Calibri" pitchFamily="34" charset="-120"/>
-              </a:rPr>
-              <a:t>M2 stalled at the 26% that required deep access to the agent call flow — not user accounts, not static entitlements.</a:t>
-            </a:r>
-            <a:endParaRPr lang="en-US" sz="1200" dirty="0"/>
-          </a:p>
-        </p:txBody>
-      </p:sp>
-      <p:sp>
-        <p:nvSpPr>
-          <p:cNvPr id="14" name="Shape 12"/>
-          <p:cNvSpPr/>
-          <p:nvPr/>
-        </p:nvSpPr>
-        <p:spPr>
-          <a:xfrm>
-            <a:off x="457200" y="4617720"/>
-            <a:ext cx="8229600" cy="365760"/>
-          </a:xfrm>
-          <a:prstGeom prst="rect">
-            <a:avLst/>
-          </a:prstGeom>
-          <a:solidFill>
-            <a:srgbClr val="F59E0B">
-              <a:alpha val="25000"/>
-            </a:srgbClr>
+              <a:t>Multi-agent collaboration</a:t>
+            </a:r>
+            <a:endParaRPr lang="en-US" sz="1100" dirty="0"/>
+          </a:p>
+        </p:txBody>
+      </p:sp>
+      <p:sp>
+        <p:nvSpPr>
+          <p:cNvPr id="40" name="Shape 38"/>
+          <p:cNvSpPr/>
+          <p:nvPr/>
+        </p:nvSpPr>
+        <p:spPr>
+          <a:xfrm>
+            <a:off x="5298948" y="4066032"/>
+            <a:ext cx="594360" cy="219456"/>
+          </a:xfrm>
+          <a:prstGeom prst="rect">
+            <a:avLst/>
+          </a:prstGeom>
+          <a:solidFill>
+            <a:srgbClr val="64748B"/>
           </a:solidFill>
           <a:ln w="12700">
             <a:solidFill>
-              <a:srgbClr val="F59E0B"/>
+              <a:srgbClr val="64748B"/>
             </a:solidFill>
             <a:prstDash val="solid"/>
           </a:ln>
@@ -5360,14 +4225,230 @@
       </p:sp>
       <p:sp>
         <p:nvSpPr>
-          <p:cNvPr id="15" name="Text 13"/>
-          <p:cNvSpPr/>
-          <p:nvPr/>
-        </p:nvSpPr>
-        <p:spPr>
-          <a:xfrm>
-            <a:off x="640080" y="4617720"/>
-            <a:ext cx="7863840" cy="365760"/>
+          <p:cNvPr id="41" name="Text 39"/>
+          <p:cNvSpPr/>
+          <p:nvPr/>
+        </p:nvSpPr>
+        <p:spPr>
+          <a:xfrm>
+            <a:off x="5298948" y="4066032"/>
+            <a:ext cx="594360" cy="219456"/>
+          </a:xfrm>
+          <a:prstGeom prst="rect">
+            <a:avLst/>
+          </a:prstGeom>
+          <a:noFill/>
+          <a:ln/>
+        </p:spPr>
+        <p:txBody>
+          <a:bodyPr wrap="square" lIns="0" tIns="0" rIns="0" bIns="0" rtlCol="0" anchor="ctr"/>
+          <a:lstStyle/>
+          <a:p>
+            <a:pPr algn="ctr" indent="0" marL="0">
+              <a:buNone/>
+            </a:pPr>
+            <a:r>
+              <a:rPr lang="en-US" sz="900" b="1" dirty="0">
+                <a:solidFill>
+                  <a:srgbClr val="FFFFFF"/>
+                </a:solidFill>
+                <a:latin typeface="Calibri" pitchFamily="34" charset="0"/>
+                <a:ea typeface="Calibri" pitchFamily="34" charset="-122"/>
+                <a:cs typeface="Calibri" pitchFamily="34" charset="-120"/>
+              </a:rPr>
+              <a:t>Future</a:t>
+            </a:r>
+            <a:endParaRPr lang="en-US" sz="900" dirty="0"/>
+          </a:p>
+        </p:txBody>
+      </p:sp>
+      <p:sp>
+        <p:nvSpPr>
+          <p:cNvPr id="42" name="Shape 40"/>
+          <p:cNvSpPr/>
+          <p:nvPr/>
+        </p:nvSpPr>
+        <p:spPr>
+          <a:xfrm>
+            <a:off x="5929884" y="1892808"/>
+            <a:ext cx="82296" cy="0"/>
+          </a:xfrm>
+          <a:prstGeom prst="line">
+            <a:avLst/>
+          </a:prstGeom>
+          <a:noFill/>
+          <a:ln w="25400">
+            <a:solidFill>
+              <a:srgbClr val="CBD5E1"/>
+            </a:solidFill>
+            <a:prstDash val="solid"/>
+            <a:tailEnd type="triangle"/>
+          </a:ln>
+        </p:spPr>
+      </p:sp>
+      <p:sp>
+        <p:nvSpPr>
+          <p:cNvPr id="43" name="Shape 41"/>
+          <p:cNvSpPr/>
+          <p:nvPr/>
+        </p:nvSpPr>
+        <p:spPr>
+          <a:xfrm>
+            <a:off x="6012180" y="1691640"/>
+            <a:ext cx="2697480" cy="411480"/>
+          </a:xfrm>
+          <a:prstGeom prst="rect">
+            <a:avLst/>
+          </a:prstGeom>
+          <a:solidFill>
+            <a:srgbClr val="7C3AED"/>
+          </a:solidFill>
+          <a:ln w="12700">
+            <a:solidFill>
+              <a:srgbClr val="7C3AED"/>
+            </a:solidFill>
+            <a:prstDash val="solid"/>
+          </a:ln>
+        </p:spPr>
+      </p:sp>
+      <p:sp>
+        <p:nvSpPr>
+          <p:cNvPr id="44" name="Text 42"/>
+          <p:cNvSpPr/>
+          <p:nvPr/>
+        </p:nvSpPr>
+        <p:spPr>
+          <a:xfrm>
+            <a:off x="6012180" y="1691640"/>
+            <a:ext cx="2697480" cy="411480"/>
+          </a:xfrm>
+          <a:prstGeom prst="rect">
+            <a:avLst/>
+          </a:prstGeom>
+          <a:noFill/>
+          <a:ln/>
+        </p:spPr>
+        <p:txBody>
+          <a:bodyPr wrap="square" lIns="0" tIns="0" rIns="0" bIns="0" rtlCol="0" anchor="ctr"/>
+          <a:lstStyle/>
+          <a:p>
+            <a:pPr algn="ctr" indent="0" marL="0">
+              <a:buNone/>
+            </a:pPr>
+            <a:r>
+              <a:rPr lang="en-US" sz="1400" b="1" spc="500" kern="0" dirty="0">
+                <a:solidFill>
+                  <a:srgbClr val="FFFFFF"/>
+                </a:solidFill>
+                <a:latin typeface="Calibri" pitchFamily="34" charset="0"/>
+                <a:ea typeface="Calibri" pitchFamily="34" charset="-122"/>
+                <a:cs typeface="Calibri" pitchFamily="34" charset="-120"/>
+              </a:rPr>
+              <a:t>ENFORCE</a:t>
+            </a:r>
+            <a:endParaRPr lang="en-US" sz="1400" dirty="0"/>
+          </a:p>
+        </p:txBody>
+      </p:sp>
+      <p:sp>
+        <p:nvSpPr>
+          <p:cNvPr id="45" name="Shape 43"/>
+          <p:cNvSpPr/>
+          <p:nvPr/>
+        </p:nvSpPr>
+        <p:spPr>
+          <a:xfrm>
+            <a:off x="6012180" y="2103120"/>
+            <a:ext cx="2697480" cy="2468880"/>
+          </a:xfrm>
+          <a:prstGeom prst="rect">
+            <a:avLst/>
+          </a:prstGeom>
+          <a:solidFill>
+            <a:srgbClr val="E8EEFC"/>
+          </a:solidFill>
+          <a:ln w="12700">
+            <a:solidFill>
+              <a:srgbClr val="7C3AED"/>
+            </a:solidFill>
+            <a:prstDash val="solid"/>
+          </a:ln>
+        </p:spPr>
+      </p:sp>
+      <p:sp>
+        <p:nvSpPr>
+          <p:cNvPr id="46" name="Shape 44"/>
+          <p:cNvSpPr/>
+          <p:nvPr/>
+        </p:nvSpPr>
+        <p:spPr>
+          <a:xfrm>
+            <a:off x="6176772" y="2363724"/>
+            <a:ext cx="256032" cy="256032"/>
+          </a:xfrm>
+          <a:prstGeom prst="ellipse">
+            <a:avLst/>
+          </a:prstGeom>
+          <a:solidFill>
+            <a:srgbClr val="7C3AED"/>
+          </a:solidFill>
+          <a:ln w="12700">
+            <a:solidFill>
+              <a:srgbClr val="7C3AED"/>
+            </a:solidFill>
+            <a:prstDash val="solid"/>
+          </a:ln>
+        </p:spPr>
+      </p:sp>
+      <p:sp>
+        <p:nvSpPr>
+          <p:cNvPr id="47" name="Text 45"/>
+          <p:cNvSpPr/>
+          <p:nvPr/>
+        </p:nvSpPr>
+        <p:spPr>
+          <a:xfrm>
+            <a:off x="6176772" y="2363724"/>
+            <a:ext cx="256032" cy="256032"/>
+          </a:xfrm>
+          <a:prstGeom prst="rect">
+            <a:avLst/>
+          </a:prstGeom>
+          <a:noFill/>
+          <a:ln/>
+        </p:spPr>
+        <p:txBody>
+          <a:bodyPr wrap="square" lIns="0" tIns="0" rIns="0" bIns="0" rtlCol="0" anchor="ctr"/>
+          <a:lstStyle/>
+          <a:p>
+            <a:pPr algn="ctr" indent="0" marL="0">
+              <a:buNone/>
+            </a:pPr>
+            <a:r>
+              <a:rPr lang="en-US" sz="1000" b="1" dirty="0">
+                <a:solidFill>
+                  <a:srgbClr val="FFFFFF"/>
+                </a:solidFill>
+                <a:latin typeface="Calibri" pitchFamily="34" charset="0"/>
+                <a:ea typeface="Calibri" pitchFamily="34" charset="-122"/>
+                <a:cs typeface="Calibri" pitchFamily="34" charset="-120"/>
+              </a:rPr>
+              <a:t>5</a:t>
+            </a:r>
+            <a:endParaRPr lang="en-US" sz="1000" dirty="0"/>
+          </a:p>
+        </p:txBody>
+      </p:sp>
+      <p:sp>
+        <p:nvSpPr>
+          <p:cNvPr id="48" name="Text 46"/>
+          <p:cNvSpPr/>
+          <p:nvPr/>
+        </p:nvSpPr>
+        <p:spPr>
+          <a:xfrm>
+            <a:off x="6505956" y="2194560"/>
+            <a:ext cx="1554480" cy="594360"/>
           </a:xfrm>
           <a:prstGeom prst="rect">
             <a:avLst/>
@@ -5383,7 +4464,611 @@
               <a:buNone/>
             </a:pPr>
             <a:r>
-              <a:rPr lang="en-US" sz="1200" b="1" i="1" dirty="0">
+              <a:rPr lang="en-US" sz="1100" dirty="0">
+                <a:solidFill>
+                  <a:srgbClr val="1A1F36"/>
+                </a:solidFill>
+                <a:latin typeface="Calibri" pitchFamily="34" charset="0"/>
+                <a:ea typeface="Calibri" pitchFamily="34" charset="-122"/>
+                <a:cs typeface="Calibri" pitchFamily="34" charset="-120"/>
+              </a:rPr>
+              <a:t>Human oversight &amp; approval</a:t>
+            </a:r>
+            <a:endParaRPr lang="en-US" sz="1100" dirty="0"/>
+          </a:p>
+        </p:txBody>
+      </p:sp>
+      <p:sp>
+        <p:nvSpPr>
+          <p:cNvPr id="49" name="Shape 47"/>
+          <p:cNvSpPr/>
+          <p:nvPr/>
+        </p:nvSpPr>
+        <p:spPr>
+          <a:xfrm>
+            <a:off x="8087868" y="2382012"/>
+            <a:ext cx="594360" cy="219456"/>
+          </a:xfrm>
+          <a:prstGeom prst="rect">
+            <a:avLst/>
+          </a:prstGeom>
+          <a:solidFill>
+            <a:srgbClr val="64748B"/>
+          </a:solidFill>
+          <a:ln w="12700">
+            <a:solidFill>
+              <a:srgbClr val="64748B"/>
+            </a:solidFill>
+            <a:prstDash val="solid"/>
+          </a:ln>
+        </p:spPr>
+      </p:sp>
+      <p:sp>
+        <p:nvSpPr>
+          <p:cNvPr id="50" name="Text 48"/>
+          <p:cNvSpPr/>
+          <p:nvPr/>
+        </p:nvSpPr>
+        <p:spPr>
+          <a:xfrm>
+            <a:off x="8087868" y="2382012"/>
+            <a:ext cx="594360" cy="219456"/>
+          </a:xfrm>
+          <a:prstGeom prst="rect">
+            <a:avLst/>
+          </a:prstGeom>
+          <a:noFill/>
+          <a:ln/>
+        </p:spPr>
+        <p:txBody>
+          <a:bodyPr wrap="square" lIns="0" tIns="0" rIns="0" bIns="0" rtlCol="0" anchor="ctr"/>
+          <a:lstStyle/>
+          <a:p>
+            <a:pPr algn="ctr" indent="0" marL="0">
+              <a:buNone/>
+            </a:pPr>
+            <a:r>
+              <a:rPr lang="en-US" sz="900" b="1" dirty="0">
+                <a:solidFill>
+                  <a:srgbClr val="FFFFFF"/>
+                </a:solidFill>
+                <a:latin typeface="Calibri" pitchFamily="34" charset="0"/>
+                <a:ea typeface="Calibri" pitchFamily="34" charset="-122"/>
+                <a:cs typeface="Calibri" pitchFamily="34" charset="-120"/>
+              </a:rPr>
+              <a:t>Future</a:t>
+            </a:r>
+            <a:endParaRPr lang="en-US" sz="900" dirty="0"/>
+          </a:p>
+        </p:txBody>
+      </p:sp>
+      <p:sp>
+        <p:nvSpPr>
+          <p:cNvPr id="51" name="Shape 49"/>
+          <p:cNvSpPr/>
+          <p:nvPr/>
+        </p:nvSpPr>
+        <p:spPr>
+          <a:xfrm>
+            <a:off x="6176772" y="2958084"/>
+            <a:ext cx="256032" cy="256032"/>
+          </a:xfrm>
+          <a:prstGeom prst="ellipse">
+            <a:avLst/>
+          </a:prstGeom>
+          <a:solidFill>
+            <a:srgbClr val="7C3AED"/>
+          </a:solidFill>
+          <a:ln w="12700">
+            <a:solidFill>
+              <a:srgbClr val="7C3AED"/>
+            </a:solidFill>
+            <a:prstDash val="solid"/>
+          </a:ln>
+        </p:spPr>
+      </p:sp>
+      <p:sp>
+        <p:nvSpPr>
+          <p:cNvPr id="52" name="Text 50"/>
+          <p:cNvSpPr/>
+          <p:nvPr/>
+        </p:nvSpPr>
+        <p:spPr>
+          <a:xfrm>
+            <a:off x="6176772" y="2958084"/>
+            <a:ext cx="256032" cy="256032"/>
+          </a:xfrm>
+          <a:prstGeom prst="rect">
+            <a:avLst/>
+          </a:prstGeom>
+          <a:noFill/>
+          <a:ln/>
+        </p:spPr>
+        <p:txBody>
+          <a:bodyPr wrap="square" lIns="0" tIns="0" rIns="0" bIns="0" rtlCol="0" anchor="ctr"/>
+          <a:lstStyle/>
+          <a:p>
+            <a:pPr algn="ctr" indent="0" marL="0">
+              <a:buNone/>
+            </a:pPr>
+            <a:r>
+              <a:rPr lang="en-US" sz="1000" b="1" dirty="0">
+                <a:solidFill>
+                  <a:srgbClr val="FFFFFF"/>
+                </a:solidFill>
+                <a:latin typeface="Calibri" pitchFamily="34" charset="0"/>
+                <a:ea typeface="Calibri" pitchFamily="34" charset="-122"/>
+                <a:cs typeface="Calibri" pitchFamily="34" charset="-120"/>
+              </a:rPr>
+              <a:t>6</a:t>
+            </a:r>
+            <a:endParaRPr lang="en-US" sz="1000" dirty="0"/>
+          </a:p>
+        </p:txBody>
+      </p:sp>
+      <p:sp>
+        <p:nvSpPr>
+          <p:cNvPr id="53" name="Text 51"/>
+          <p:cNvSpPr/>
+          <p:nvPr/>
+        </p:nvSpPr>
+        <p:spPr>
+          <a:xfrm>
+            <a:off x="6505956" y="2788920"/>
+            <a:ext cx="1554480" cy="594360"/>
+          </a:xfrm>
+          <a:prstGeom prst="rect">
+            <a:avLst/>
+          </a:prstGeom>
+          <a:noFill/>
+          <a:ln/>
+        </p:spPr>
+        <p:txBody>
+          <a:bodyPr wrap="square" lIns="0" tIns="0" rIns="0" bIns="0" rtlCol="0" anchor="ctr"/>
+          <a:lstStyle/>
+          <a:p>
+            <a:pPr indent="0" marL="0">
+              <a:buNone/>
+            </a:pPr>
+            <a:r>
+              <a:rPr lang="en-US" sz="1100" dirty="0">
+                <a:solidFill>
+                  <a:srgbClr val="1A1F36"/>
+                </a:solidFill>
+                <a:latin typeface="Calibri" pitchFamily="34" charset="0"/>
+                <a:ea typeface="Calibri" pitchFamily="34" charset="-122"/>
+                <a:cs typeface="Calibri" pitchFamily="34" charset="-120"/>
+              </a:rPr>
+              <a:t>Resource policy enforcement</a:t>
+            </a:r>
+            <a:endParaRPr lang="en-US" sz="1100" dirty="0"/>
+          </a:p>
+        </p:txBody>
+      </p:sp>
+      <p:sp>
+        <p:nvSpPr>
+          <p:cNvPr id="54" name="Shape 52"/>
+          <p:cNvSpPr/>
+          <p:nvPr/>
+        </p:nvSpPr>
+        <p:spPr>
+          <a:xfrm>
+            <a:off x="8087868" y="2976372"/>
+            <a:ext cx="594360" cy="219456"/>
+          </a:xfrm>
+          <a:prstGeom prst="rect">
+            <a:avLst/>
+          </a:prstGeom>
+          <a:solidFill>
+            <a:srgbClr val="0F1B3D"/>
+          </a:solidFill>
+          <a:ln w="12700">
+            <a:solidFill>
+              <a:srgbClr val="0F1B3D"/>
+            </a:solidFill>
+            <a:prstDash val="solid"/>
+          </a:ln>
+        </p:spPr>
+      </p:sp>
+      <p:sp>
+        <p:nvSpPr>
+          <p:cNvPr id="55" name="Text 53"/>
+          <p:cNvSpPr/>
+          <p:nvPr/>
+        </p:nvSpPr>
+        <p:spPr>
+          <a:xfrm>
+            <a:off x="8087868" y="2976372"/>
+            <a:ext cx="594360" cy="219456"/>
+          </a:xfrm>
+          <a:prstGeom prst="rect">
+            <a:avLst/>
+          </a:prstGeom>
+          <a:noFill/>
+          <a:ln/>
+        </p:spPr>
+        <p:txBody>
+          <a:bodyPr wrap="square" lIns="0" tIns="0" rIns="0" bIns="0" rtlCol="0" anchor="ctr"/>
+          <a:lstStyle/>
+          <a:p>
+            <a:pPr algn="ctr" indent="0" marL="0">
+              <a:buNone/>
+            </a:pPr>
+            <a:r>
+              <a:rPr lang="en-US" sz="900" b="1" dirty="0">
+                <a:solidFill>
+                  <a:srgbClr val="FFFFFF"/>
+                </a:solidFill>
+                <a:latin typeface="Calibri" pitchFamily="34" charset="0"/>
+                <a:ea typeface="Calibri" pitchFamily="34" charset="-122"/>
+                <a:cs typeface="Calibri" pitchFamily="34" charset="-120"/>
+              </a:rPr>
+              <a:t>P0</a:t>
+            </a:r>
+            <a:endParaRPr lang="en-US" sz="900" dirty="0"/>
+          </a:p>
+        </p:txBody>
+      </p:sp>
+      <p:sp>
+        <p:nvSpPr>
+          <p:cNvPr id="56" name="Shape 54"/>
+          <p:cNvSpPr/>
+          <p:nvPr/>
+        </p:nvSpPr>
+        <p:spPr>
+          <a:xfrm>
+            <a:off x="6176772" y="3552444"/>
+            <a:ext cx="256032" cy="256032"/>
+          </a:xfrm>
+          <a:prstGeom prst="ellipse">
+            <a:avLst/>
+          </a:prstGeom>
+          <a:solidFill>
+            <a:srgbClr val="7C3AED"/>
+          </a:solidFill>
+          <a:ln w="12700">
+            <a:solidFill>
+              <a:srgbClr val="7C3AED"/>
+            </a:solidFill>
+            <a:prstDash val="solid"/>
+          </a:ln>
+        </p:spPr>
+      </p:sp>
+      <p:sp>
+        <p:nvSpPr>
+          <p:cNvPr id="57" name="Text 55"/>
+          <p:cNvSpPr/>
+          <p:nvPr/>
+        </p:nvSpPr>
+        <p:spPr>
+          <a:xfrm>
+            <a:off x="6176772" y="3552444"/>
+            <a:ext cx="256032" cy="256032"/>
+          </a:xfrm>
+          <a:prstGeom prst="rect">
+            <a:avLst/>
+          </a:prstGeom>
+          <a:noFill/>
+          <a:ln/>
+        </p:spPr>
+        <p:txBody>
+          <a:bodyPr wrap="square" lIns="0" tIns="0" rIns="0" bIns="0" rtlCol="0" anchor="ctr"/>
+          <a:lstStyle/>
+          <a:p>
+            <a:pPr algn="ctr" indent="0" marL="0">
+              <a:buNone/>
+            </a:pPr>
+            <a:r>
+              <a:rPr lang="en-US" sz="1000" b="1" dirty="0">
+                <a:solidFill>
+                  <a:srgbClr val="FFFFFF"/>
+                </a:solidFill>
+                <a:latin typeface="Calibri" pitchFamily="34" charset="0"/>
+                <a:ea typeface="Calibri" pitchFamily="34" charset="-122"/>
+                <a:cs typeface="Calibri" pitchFamily="34" charset="-120"/>
+              </a:rPr>
+              <a:t>7</a:t>
+            </a:r>
+            <a:endParaRPr lang="en-US" sz="1000" dirty="0"/>
+          </a:p>
+        </p:txBody>
+      </p:sp>
+      <p:sp>
+        <p:nvSpPr>
+          <p:cNvPr id="58" name="Text 56"/>
+          <p:cNvSpPr/>
+          <p:nvPr/>
+        </p:nvSpPr>
+        <p:spPr>
+          <a:xfrm>
+            <a:off x="6505956" y="3383280"/>
+            <a:ext cx="1554480" cy="594360"/>
+          </a:xfrm>
+          <a:prstGeom prst="rect">
+            <a:avLst/>
+          </a:prstGeom>
+          <a:noFill/>
+          <a:ln/>
+        </p:spPr>
+        <p:txBody>
+          <a:bodyPr wrap="square" lIns="0" tIns="0" rIns="0" bIns="0" rtlCol="0" anchor="ctr"/>
+          <a:lstStyle/>
+          <a:p>
+            <a:pPr indent="0" marL="0">
+              <a:buNone/>
+            </a:pPr>
+            <a:r>
+              <a:rPr lang="en-US" sz="1100" dirty="0">
+                <a:solidFill>
+                  <a:srgbClr val="1A1F36"/>
+                </a:solidFill>
+                <a:latin typeface="Calibri" pitchFamily="34" charset="0"/>
+                <a:ea typeface="Calibri" pitchFamily="34" charset="-122"/>
+                <a:cs typeface="Calibri" pitchFamily="34" charset="-120"/>
+              </a:rPr>
+              <a:t>Credential lifecycle</a:t>
+            </a:r>
+            <a:endParaRPr lang="en-US" sz="1100" dirty="0"/>
+          </a:p>
+        </p:txBody>
+      </p:sp>
+      <p:sp>
+        <p:nvSpPr>
+          <p:cNvPr id="59" name="Shape 57"/>
+          <p:cNvSpPr/>
+          <p:nvPr/>
+        </p:nvSpPr>
+        <p:spPr>
+          <a:xfrm>
+            <a:off x="8087868" y="3570732"/>
+            <a:ext cx="594360" cy="219456"/>
+          </a:xfrm>
+          <a:prstGeom prst="rect">
+            <a:avLst/>
+          </a:prstGeom>
+          <a:solidFill>
+            <a:srgbClr val="64748B"/>
+          </a:solidFill>
+          <a:ln w="12700">
+            <a:solidFill>
+              <a:srgbClr val="64748B"/>
+            </a:solidFill>
+            <a:prstDash val="solid"/>
+          </a:ln>
+        </p:spPr>
+      </p:sp>
+      <p:sp>
+        <p:nvSpPr>
+          <p:cNvPr id="60" name="Text 58"/>
+          <p:cNvSpPr/>
+          <p:nvPr/>
+        </p:nvSpPr>
+        <p:spPr>
+          <a:xfrm>
+            <a:off x="8087868" y="3570732"/>
+            <a:ext cx="594360" cy="219456"/>
+          </a:xfrm>
+          <a:prstGeom prst="rect">
+            <a:avLst/>
+          </a:prstGeom>
+          <a:noFill/>
+          <a:ln/>
+        </p:spPr>
+        <p:txBody>
+          <a:bodyPr wrap="square" lIns="0" tIns="0" rIns="0" bIns="0" rtlCol="0" anchor="ctr"/>
+          <a:lstStyle/>
+          <a:p>
+            <a:pPr algn="ctr" indent="0" marL="0">
+              <a:buNone/>
+            </a:pPr>
+            <a:r>
+              <a:rPr lang="en-US" sz="900" b="1" dirty="0">
+                <a:solidFill>
+                  <a:srgbClr val="FFFFFF"/>
+                </a:solidFill>
+                <a:latin typeface="Calibri" pitchFamily="34" charset="0"/>
+                <a:ea typeface="Calibri" pitchFamily="34" charset="-122"/>
+                <a:cs typeface="Calibri" pitchFamily="34" charset="-120"/>
+              </a:rPr>
+              <a:t>Future</a:t>
+            </a:r>
+            <a:endParaRPr lang="en-US" sz="900" dirty="0"/>
+          </a:p>
+        </p:txBody>
+      </p:sp>
+      <p:sp>
+        <p:nvSpPr>
+          <p:cNvPr id="61" name="Shape 59"/>
+          <p:cNvSpPr/>
+          <p:nvPr/>
+        </p:nvSpPr>
+        <p:spPr>
+          <a:xfrm>
+            <a:off x="6176772" y="4146804"/>
+            <a:ext cx="256032" cy="256032"/>
+          </a:xfrm>
+          <a:prstGeom prst="ellipse">
+            <a:avLst/>
+          </a:prstGeom>
+          <a:solidFill>
+            <a:srgbClr val="7C3AED"/>
+          </a:solidFill>
+          <a:ln w="12700">
+            <a:solidFill>
+              <a:srgbClr val="7C3AED"/>
+            </a:solidFill>
+            <a:prstDash val="solid"/>
+          </a:ln>
+        </p:spPr>
+      </p:sp>
+      <p:sp>
+        <p:nvSpPr>
+          <p:cNvPr id="62" name="Text 60"/>
+          <p:cNvSpPr/>
+          <p:nvPr/>
+        </p:nvSpPr>
+        <p:spPr>
+          <a:xfrm>
+            <a:off x="6176772" y="4146804"/>
+            <a:ext cx="256032" cy="256032"/>
+          </a:xfrm>
+          <a:prstGeom prst="rect">
+            <a:avLst/>
+          </a:prstGeom>
+          <a:noFill/>
+          <a:ln/>
+        </p:spPr>
+        <p:txBody>
+          <a:bodyPr wrap="square" lIns="0" tIns="0" rIns="0" bIns="0" rtlCol="0" anchor="ctr"/>
+          <a:lstStyle/>
+          <a:p>
+            <a:pPr algn="ctr" indent="0" marL="0">
+              <a:buNone/>
+            </a:pPr>
+            <a:r>
+              <a:rPr lang="en-US" sz="1000" b="1" dirty="0">
+                <a:solidFill>
+                  <a:srgbClr val="FFFFFF"/>
+                </a:solidFill>
+                <a:latin typeface="Calibri" pitchFamily="34" charset="0"/>
+                <a:ea typeface="Calibri" pitchFamily="34" charset="-122"/>
+                <a:cs typeface="Calibri" pitchFamily="34" charset="-120"/>
+              </a:rPr>
+              <a:t>8</a:t>
+            </a:r>
+            <a:endParaRPr lang="en-US" sz="1000" dirty="0"/>
+          </a:p>
+        </p:txBody>
+      </p:sp>
+      <p:sp>
+        <p:nvSpPr>
+          <p:cNvPr id="63" name="Text 61"/>
+          <p:cNvSpPr/>
+          <p:nvPr/>
+        </p:nvSpPr>
+        <p:spPr>
+          <a:xfrm>
+            <a:off x="6505956" y="3977640"/>
+            <a:ext cx="1554480" cy="594360"/>
+          </a:xfrm>
+          <a:prstGeom prst="rect">
+            <a:avLst/>
+          </a:prstGeom>
+          <a:noFill/>
+          <a:ln/>
+        </p:spPr>
+        <p:txBody>
+          <a:bodyPr wrap="square" lIns="0" tIns="0" rIns="0" bIns="0" rtlCol="0" anchor="ctr"/>
+          <a:lstStyle/>
+          <a:p>
+            <a:pPr indent="0" marL="0">
+              <a:buNone/>
+            </a:pPr>
+            <a:r>
+              <a:rPr lang="en-US" sz="1100" dirty="0">
+                <a:solidFill>
+                  <a:srgbClr val="1A1F36"/>
+                </a:solidFill>
+                <a:latin typeface="Calibri" pitchFamily="34" charset="0"/>
+                <a:ea typeface="Calibri" pitchFamily="34" charset="-122"/>
+                <a:cs typeface="Calibri" pitchFamily="34" charset="-120"/>
+              </a:rPr>
+              <a:t>Auditability &amp; logging</a:t>
+            </a:r>
+            <a:endParaRPr lang="en-US" sz="1100" dirty="0"/>
+          </a:p>
+        </p:txBody>
+      </p:sp>
+      <p:sp>
+        <p:nvSpPr>
+          <p:cNvPr id="64" name="Shape 62"/>
+          <p:cNvSpPr/>
+          <p:nvPr/>
+        </p:nvSpPr>
+        <p:spPr>
+          <a:xfrm>
+            <a:off x="8087868" y="4165092"/>
+            <a:ext cx="594360" cy="219456"/>
+          </a:xfrm>
+          <a:prstGeom prst="rect">
+            <a:avLst/>
+          </a:prstGeom>
+          <a:solidFill>
+            <a:srgbClr val="0F1B3D"/>
+          </a:solidFill>
+          <a:ln w="12700">
+            <a:solidFill>
+              <a:srgbClr val="0F1B3D"/>
+            </a:solidFill>
+            <a:prstDash val="solid"/>
+          </a:ln>
+        </p:spPr>
+      </p:sp>
+      <p:sp>
+        <p:nvSpPr>
+          <p:cNvPr id="65" name="Text 63"/>
+          <p:cNvSpPr/>
+          <p:nvPr/>
+        </p:nvSpPr>
+        <p:spPr>
+          <a:xfrm>
+            <a:off x="8087868" y="4165092"/>
+            <a:ext cx="594360" cy="219456"/>
+          </a:xfrm>
+          <a:prstGeom prst="rect">
+            <a:avLst/>
+          </a:prstGeom>
+          <a:noFill/>
+          <a:ln/>
+        </p:spPr>
+        <p:txBody>
+          <a:bodyPr wrap="square" lIns="0" tIns="0" rIns="0" bIns="0" rtlCol="0" anchor="ctr"/>
+          <a:lstStyle/>
+          <a:p>
+            <a:pPr algn="ctr" indent="0" marL="0">
+              <a:buNone/>
+            </a:pPr>
+            <a:r>
+              <a:rPr lang="en-US" sz="900" b="1" dirty="0">
+                <a:solidFill>
+                  <a:srgbClr val="FFFFFF"/>
+                </a:solidFill>
+                <a:latin typeface="Calibri" pitchFamily="34" charset="0"/>
+                <a:ea typeface="Calibri" pitchFamily="34" charset="-122"/>
+                <a:cs typeface="Calibri" pitchFamily="34" charset="-120"/>
+              </a:rPr>
+              <a:t>P0</a:t>
+            </a:r>
+            <a:endParaRPr lang="en-US" sz="900" dirty="0"/>
+          </a:p>
+        </p:txBody>
+      </p:sp>
+      <p:sp>
+        <p:nvSpPr>
+          <p:cNvPr id="66" name="Text 64"/>
+          <p:cNvSpPr/>
+          <p:nvPr/>
+        </p:nvSpPr>
+        <p:spPr>
+          <a:xfrm>
+            <a:off x="457200" y="4663440"/>
+            <a:ext cx="8229600" cy="256032"/>
+          </a:xfrm>
+          <a:prstGeom prst="rect">
+            <a:avLst/>
+          </a:prstGeom>
+          <a:noFill/>
+          <a:ln/>
+        </p:spPr>
+        <p:txBody>
+          <a:bodyPr wrap="square" lIns="0" tIns="0" rIns="0" bIns="0" rtlCol="0" anchor="ctr"/>
+          <a:lstStyle/>
+          <a:p>
+            <a:pPr indent="0" marL="0">
+              <a:buNone/>
+            </a:pPr>
+            <a:r>
+              <a:rPr lang="en-US" sz="1000" b="1" dirty="0">
                 <a:solidFill>
                   <a:srgbClr val="0F1B3D"/>
                 </a:solidFill>
@@ -5391,15 +5076,43 @@
                 <a:ea typeface="Calibri" pitchFamily="34" charset="-122"/>
                 <a:cs typeface="Calibri" pitchFamily="34" charset="-120"/>
               </a:rPr>
-              <a:t>This is a useful discovery. We now know exactly what the next layer must do.</a:t>
-            </a:r>
-            <a:endParaRPr lang="en-US" sz="1200" dirty="0"/>
-          </a:p>
-        </p:txBody>
-      </p:sp>
-      <p:sp>
-        <p:nvSpPr>
-          <p:cNvPr id="16" name="Text 14"/>
+              <a:t>M1 connectors live: </a:t>
+            </a:r>
+            <a:pPr indent="0" marL="0">
+              <a:buNone/>
+            </a:pPr>
+            <a:r>
+              <a:rPr lang="en-US" sz="1000" dirty="0">
+                <a:solidFill>
+                  <a:srgbClr val="1A1F36"/>
+                </a:solidFill>
+                <a:latin typeface="Calibri" pitchFamily="34" charset="0"/>
+                <a:ea typeface="Calibri" pitchFamily="34" charset="-122"/>
+                <a:cs typeface="Calibri" pitchFamily="34" charset="-120"/>
+              </a:rPr>
+              <a:t>Gemini · Vertex AI · Bedrock · n8n  ·  </a:t>
+            </a:r>
+            <a:pPr indent="0" marL="0">
+              <a:buNone/>
+            </a:pPr>
+            <a:r>
+              <a:rPr lang="en-US" sz="1000" i="1" dirty="0">
+                <a:solidFill>
+                  <a:srgbClr val="64748B"/>
+                </a:solidFill>
+                <a:latin typeface="Calibri" pitchFamily="34" charset="0"/>
+                <a:ea typeface="Calibri" pitchFamily="34" charset="-122"/>
+                <a:cs typeface="Calibri" pitchFamily="34" charset="-120"/>
+              </a:rPr>
+              <a:t>ChatGPT Enterprise: Backlog  ·  Copilot Studio: Canceled Jan 2026</a:t>
+            </a:r>
+            <a:endParaRPr lang="en-US" sz="1000" dirty="0"/>
+          </a:p>
+        </p:txBody>
+      </p:sp>
+      <p:sp>
+        <p:nvSpPr>
+          <p:cNvPr id="67" name="Text 65"/>
           <p:cNvSpPr/>
           <p:nvPr/>
         </p:nvSpPr>
@@ -5430,7 +5143,7 @@
                 <a:ea typeface="Calibri" pitchFamily="34" charset="-122"/>
                 <a:cs typeface="Calibri" pitchFamily="34" charset="-120"/>
               </a:rPr>
-              <a:t>4 / 8</a:t>
+              <a:t>4 / 7</a:t>
             </a:r>
             <a:endParaRPr lang="en-US" sz="900" dirty="0"/>
           </a:p>
@@ -5450,7 +5163,7 @@
     <p:bg>
       <p:bgPr>
         <a:solidFill>
-          <a:srgbClr val="091230"/>
+          <a:srgbClr val="FFFFFF"/>
         </a:solidFill>
       </p:bgPr>
     </p:bg>
@@ -5520,13 +5233,13 @@
             <a:r>
               <a:rPr lang="en-US" sz="1100" b="1" spc="400" kern="0" dirty="0">
                 <a:solidFill>
-                  <a:srgbClr val="02C39A"/>
-                </a:solidFill>
-                <a:latin typeface="Calibri" pitchFamily="34" charset="0"/>
-                <a:ea typeface="Calibri" pitchFamily="34" charset="-122"/>
-                <a:cs typeface="Calibri" pitchFamily="34" charset="-120"/>
-              </a:rPr>
-              <a:t>05 · The new approach</a:t>
+                  <a:srgbClr val="64748B"/>
+                </a:solidFill>
+                <a:latin typeface="Calibri" pitchFamily="34" charset="0"/>
+                <a:ea typeface="Calibri" pitchFamily="34" charset="-122"/>
+                <a:cs typeface="Calibri" pitchFamily="34" charset="-120"/>
+              </a:rPr>
+              <a:t>04 · From → To</a:t>
             </a:r>
             <a:endParaRPr lang="en-US" sz="1100" dirty="0"/>
           </a:p>
@@ -5559,13 +5272,13 @@
             <a:r>
               <a:rPr lang="en-US" sz="3400" b="1" dirty="0">
                 <a:solidFill>
-                  <a:srgbClr val="FFFFFF"/>
+                  <a:srgbClr val="1A1F36"/>
                 </a:solidFill>
                 <a:latin typeface="Georgia" pitchFamily="34" charset="0"/>
                 <a:ea typeface="Georgia" pitchFamily="34" charset="-122"/>
                 <a:cs typeface="Georgia" pitchFamily="34" charset="-120"/>
               </a:rPr>
-              <a:t>MCP Gateway.</a:t>
+              <a:t>From IdP-led to protocol-led.</a:t>
             </a:r>
             <a:endParaRPr lang="en-US" sz="3400" dirty="0"/>
           </a:p>
@@ -5573,61 +5286,20 @@
       </p:sp>
       <p:sp>
         <p:nvSpPr>
-          <p:cNvPr id="5" name="Text 3"/>
-          <p:cNvSpPr/>
-          <p:nvPr/>
-        </p:nvSpPr>
-        <p:spPr>
-          <a:xfrm>
-            <a:off x="457200" y="1600200"/>
-            <a:ext cx="8229600" cy="457200"/>
-          </a:xfrm>
-          <a:prstGeom prst="rect">
-            <a:avLst/>
-          </a:prstGeom>
-          <a:noFill/>
-          <a:ln/>
-        </p:spPr>
-        <p:txBody>
-          <a:bodyPr wrap="square" lIns="0" tIns="0" rIns="0" bIns="0" rtlCol="0" anchor="ctr"/>
-          <a:lstStyle/>
-          <a:p>
-            <a:pPr indent="0" marL="0">
-              <a:buNone/>
-            </a:pPr>
-            <a:r>
-              <a:rPr lang="en-US" sz="1500" i="1" dirty="0">
-                <a:solidFill>
-                  <a:srgbClr val="E8EEFC"/>
-                </a:solidFill>
-                <a:latin typeface="Calibri" pitchFamily="34" charset="0"/>
-                <a:ea typeface="Calibri" pitchFamily="34" charset="-122"/>
-                <a:cs typeface="Calibri" pitchFamily="34" charset="-120"/>
-              </a:rPr>
-              <a:t>Govern agents at the protocol layer — one enforcement point between every agent and every tool.</a:t>
-            </a:r>
-            <a:endParaRPr lang="en-US" sz="1500" dirty="0"/>
-          </a:p>
-        </p:txBody>
-      </p:sp>
-      <p:sp>
-        <p:nvSpPr>
-          <p:cNvPr id="6" name="Shape 4"/>
-          <p:cNvSpPr/>
-          <p:nvPr/>
-        </p:nvSpPr>
-        <p:spPr>
-          <a:xfrm>
-            <a:off x="457200" y="2331720"/>
-            <a:ext cx="1828800" cy="1188720"/>
-          </a:xfrm>
-          <a:prstGeom prst="roundRect">
-            <a:avLst>
-              <a:gd name="adj" fmla="val 6154"/>
-            </a:avLst>
-          </a:prstGeom>
-          <a:solidFill>
-            <a:srgbClr val="1A2545"/>
+          <p:cNvPr id="5" name="Shape 3"/>
+          <p:cNvSpPr/>
+          <p:nvPr/>
+        </p:nvSpPr>
+        <p:spPr>
+          <a:xfrm>
+            <a:off x="457200" y="1691640"/>
+            <a:ext cx="3749040" cy="2834640"/>
+          </a:xfrm>
+          <a:prstGeom prst="rect">
+            <a:avLst/>
+          </a:prstGeom>
+          <a:solidFill>
+            <a:srgbClr val="E8EEFC"/>
           </a:solidFill>
           <a:ln w="12700">
             <a:solidFill>
@@ -5639,14 +5311,456 @@
       </p:sp>
       <p:sp>
         <p:nvSpPr>
+          <p:cNvPr id="6" name="Shape 4"/>
+          <p:cNvSpPr/>
+          <p:nvPr/>
+        </p:nvSpPr>
+        <p:spPr>
+          <a:xfrm>
+            <a:off x="457200" y="1691640"/>
+            <a:ext cx="73152" cy="2834640"/>
+          </a:xfrm>
+          <a:prstGeom prst="rect">
+            <a:avLst/>
+          </a:prstGeom>
+          <a:solidFill>
+            <a:srgbClr val="F59E0B"/>
+          </a:solidFill>
+          <a:ln w="12700">
+            <a:solidFill>
+              <a:srgbClr val="F59E0B"/>
+            </a:solidFill>
+            <a:prstDash val="solid"/>
+          </a:ln>
+        </p:spPr>
+      </p:sp>
+      <p:sp>
+        <p:nvSpPr>
           <p:cNvPr id="7" name="Text 5"/>
           <p:cNvSpPr/>
           <p:nvPr/>
         </p:nvSpPr>
         <p:spPr>
           <a:xfrm>
-            <a:off x="457200" y="2423160"/>
-            <a:ext cx="1828800" cy="320040"/>
+            <a:off x="640080" y="1783080"/>
+            <a:ext cx="3383280" cy="274320"/>
+          </a:xfrm>
+          <a:prstGeom prst="rect">
+            <a:avLst/>
+          </a:prstGeom>
+          <a:noFill/>
+          <a:ln/>
+        </p:spPr>
+        <p:txBody>
+          <a:bodyPr wrap="square" lIns="0" tIns="0" rIns="0" bIns="0" rtlCol="0" anchor="ctr"/>
+          <a:lstStyle/>
+          <a:p>
+            <a:pPr indent="0" marL="0">
+              <a:buNone/>
+            </a:pPr>
+            <a:r>
+              <a:rPr lang="en-US" sz="1000" b="1" spc="300" kern="0" dirty="0">
+                <a:solidFill>
+                  <a:srgbClr val="F59E0B"/>
+                </a:solidFill>
+                <a:latin typeface="Calibri" pitchFamily="34" charset="0"/>
+                <a:ea typeface="Calibri" pitchFamily="34" charset="-122"/>
+                <a:cs typeface="Calibri" pitchFamily="34" charset="-120"/>
+              </a:rPr>
+              <a:t>WHAT WE TRIED</a:t>
+            </a:r>
+            <a:endParaRPr lang="en-US" sz="1000" dirty="0"/>
+          </a:p>
+        </p:txBody>
+      </p:sp>
+      <p:sp>
+        <p:nvSpPr>
+          <p:cNvPr id="8" name="Text 6"/>
+          <p:cNvSpPr/>
+          <p:nvPr/>
+        </p:nvSpPr>
+        <p:spPr>
+          <a:xfrm>
+            <a:off x="640080" y="2103120"/>
+            <a:ext cx="3383280" cy="777240"/>
+          </a:xfrm>
+          <a:prstGeom prst="rect">
+            <a:avLst/>
+          </a:prstGeom>
+          <a:noFill/>
+          <a:ln/>
+        </p:spPr>
+        <p:txBody>
+          <a:bodyPr wrap="square" lIns="0" tIns="0" rIns="0" bIns="0" rtlCol="0" anchor="ctr"/>
+          <a:lstStyle/>
+          <a:p>
+            <a:pPr indent="0" marL="0">
+              <a:buNone/>
+            </a:pPr>
+            <a:r>
+              <a:rPr lang="en-US" sz="1400" b="1" dirty="0">
+                <a:solidFill>
+                  <a:srgbClr val="0F1B3D"/>
+                </a:solidFill>
+                <a:latin typeface="Georgia" pitchFamily="34" charset="0"/>
+                <a:ea typeface="Georgia" pitchFamily="34" charset="-122"/>
+                <a:cs typeface="Georgia" pitchFamily="34" charset="-120"/>
+              </a:rPr>
+              <a:t>Govern agents through the same IAM APIs that govern humans + NHIs.</a:t>
+            </a:r>
+            <a:endParaRPr lang="en-US" sz="1400" dirty="0"/>
+          </a:p>
+        </p:txBody>
+      </p:sp>
+      <p:sp>
+        <p:nvSpPr>
+          <p:cNvPr id="9" name="Text 7"/>
+          <p:cNvSpPr/>
+          <p:nvPr/>
+        </p:nvSpPr>
+        <p:spPr>
+          <a:xfrm>
+            <a:off x="640080" y="2926080"/>
+            <a:ext cx="3383280" cy="1554480"/>
+          </a:xfrm>
+          <a:prstGeom prst="rect">
+            <a:avLst/>
+          </a:prstGeom>
+          <a:noFill/>
+          <a:ln/>
+        </p:spPr>
+        <p:txBody>
+          <a:bodyPr wrap="square" lIns="0" tIns="0" rIns="0" bIns="0" rtlCol="0" anchor="ctr"/>
+          <a:lstStyle/>
+          <a:p>
+            <a:pPr indent="0" marL="0">
+              <a:buNone/>
+            </a:pPr>
+            <a:r>
+              <a:rPr lang="en-US" sz="1100" b="1" dirty="0">
+                <a:solidFill>
+                  <a:srgbClr val="E11D48"/>
+                </a:solidFill>
+                <a:latin typeface="Calibri" pitchFamily="34" charset="0"/>
+                <a:ea typeface="Calibri" pitchFamily="34" charset="-122"/>
+                <a:cs typeface="Calibri" pitchFamily="34" charset="-120"/>
+              </a:rPr>
+              <a:t>The IAM API surface couldn't support the agent access flow.</a:t>
+            </a:r>
+            <a:endParaRPr lang="en-US" sz="1100" dirty="0"/>
+          </a:p>
+          <a:p>
+            <a:pPr indent="0" marL="0">
+              <a:buNone/>
+            </a:pPr>
+            <a:r>
+              <a:rPr lang="en-US" sz="600" dirty="0">
+                <a:solidFill>
+                  <a:srgbClr val="000000"/>
+                </a:solidFill>
+                <a:latin typeface="Calibri" pitchFamily="34" charset="0"/>
+                <a:ea typeface="Calibri" pitchFamily="34" charset="-122"/>
+                <a:cs typeface="Calibri" pitchFamily="34" charset="-120"/>
+              </a:rPr>
+              <a:t> </a:t>
+            </a:r>
+            <a:endParaRPr lang="en-US" sz="1100" dirty="0"/>
+          </a:p>
+          <a:p>
+            <a:pPr indent="0" marL="0">
+              <a:buNone/>
+            </a:pPr>
+            <a:r>
+              <a:rPr lang="en-US" sz="1100" i="1" dirty="0">
+                <a:solidFill>
+                  <a:srgbClr val="64748B"/>
+                </a:solidFill>
+                <a:latin typeface="Calibri" pitchFamily="34" charset="0"/>
+                <a:ea typeface="Calibri" pitchFamily="34" charset="-122"/>
+                <a:cs typeface="Calibri" pitchFamily="34" charset="-120"/>
+              </a:rPr>
+              <a:t>The exact failure mode is what Sarit + Amir are best placed to describe — and it's the foundation for the Gateway design.</a:t>
+            </a:r>
+            <a:endParaRPr lang="en-US" sz="1100" dirty="0"/>
+          </a:p>
+          <a:p>
+            <a:pPr indent="0" marL="0">
+              <a:buNone/>
+            </a:pPr>
+            <a:r>
+              <a:rPr lang="en-US" sz="600" dirty="0">
+                <a:solidFill>
+                  <a:srgbClr val="000000"/>
+                </a:solidFill>
+                <a:latin typeface="Calibri" pitchFamily="34" charset="0"/>
+                <a:ea typeface="Calibri" pitchFamily="34" charset="-122"/>
+                <a:cs typeface="Calibri" pitchFamily="34" charset="-120"/>
+              </a:rPr>
+              <a:t> </a:t>
+            </a:r>
+            <a:endParaRPr lang="en-US" sz="1100" dirty="0"/>
+          </a:p>
+          <a:p>
+            <a:pPr indent="0" marL="0">
+              <a:buNone/>
+            </a:pPr>
+            <a:r>
+              <a:rPr lang="en-US" sz="1100" b="1" dirty="0">
+                <a:solidFill>
+                  <a:srgbClr val="1A1F36"/>
+                </a:solidFill>
+                <a:latin typeface="Calibri" pitchFamily="34" charset="0"/>
+                <a:ea typeface="Calibri" pitchFamily="34" charset="-122"/>
+                <a:cs typeface="Calibri" pitchFamily="34" charset="-120"/>
+              </a:rPr>
+              <a:t>Signal: </a:t>
+            </a:r>
+            <a:pPr indent="0" marL="0">
+              <a:buNone/>
+            </a:pPr>
+            <a:r>
+              <a:rPr lang="en-US" sz="1100" dirty="0">
+                <a:solidFill>
+                  <a:srgbClr val="1A1F36"/>
+                </a:solidFill>
+                <a:latin typeface="Calibri" pitchFamily="34" charset="0"/>
+                <a:ea typeface="Calibri" pitchFamily="34" charset="-122"/>
+                <a:cs typeface="Calibri" pitchFamily="34" charset="-120"/>
+              </a:rPr>
+              <a:t>M2 stalled at the 26% that needed deep access to the agent call flow.</a:t>
+            </a:r>
+            <a:endParaRPr lang="en-US" sz="1100" dirty="0"/>
+          </a:p>
+        </p:txBody>
+      </p:sp>
+      <p:sp>
+        <p:nvSpPr>
+          <p:cNvPr id="10" name="Shape 8"/>
+          <p:cNvSpPr/>
+          <p:nvPr/>
+        </p:nvSpPr>
+        <p:spPr>
+          <a:xfrm>
+            <a:off x="4251960" y="3108960"/>
+            <a:ext cx="640080" cy="0"/>
+          </a:xfrm>
+          <a:prstGeom prst="line">
+            <a:avLst/>
+          </a:prstGeom>
+          <a:noFill/>
+          <a:ln w="38100">
+            <a:solidFill>
+              <a:srgbClr val="0F1B3D"/>
+            </a:solidFill>
+            <a:prstDash val="solid"/>
+            <a:tailEnd type="triangle"/>
+          </a:ln>
+        </p:spPr>
+      </p:sp>
+      <p:sp>
+        <p:nvSpPr>
+          <p:cNvPr id="11" name="Shape 9"/>
+          <p:cNvSpPr/>
+          <p:nvPr/>
+        </p:nvSpPr>
+        <p:spPr>
+          <a:xfrm>
+            <a:off x="4937760" y="1691640"/>
+            <a:ext cx="3749040" cy="2834640"/>
+          </a:xfrm>
+          <a:prstGeom prst="rect">
+            <a:avLst/>
+          </a:prstGeom>
+          <a:solidFill>
+            <a:srgbClr val="0F1B3D"/>
+          </a:solidFill>
+          <a:ln w="12700">
+            <a:solidFill>
+              <a:srgbClr val="0F1B3D"/>
+            </a:solidFill>
+            <a:prstDash val="solid"/>
+          </a:ln>
+        </p:spPr>
+      </p:sp>
+      <p:sp>
+        <p:nvSpPr>
+          <p:cNvPr id="12" name="Shape 10"/>
+          <p:cNvSpPr/>
+          <p:nvPr/>
+        </p:nvSpPr>
+        <p:spPr>
+          <a:xfrm>
+            <a:off x="4937760" y="1691640"/>
+            <a:ext cx="73152" cy="2834640"/>
+          </a:xfrm>
+          <a:prstGeom prst="rect">
+            <a:avLst/>
+          </a:prstGeom>
+          <a:solidFill>
+            <a:srgbClr val="02C39A"/>
+          </a:solidFill>
+          <a:ln w="12700">
+            <a:solidFill>
+              <a:srgbClr val="02C39A"/>
+            </a:solidFill>
+            <a:prstDash val="solid"/>
+          </a:ln>
+        </p:spPr>
+      </p:sp>
+      <p:sp>
+        <p:nvSpPr>
+          <p:cNvPr id="13" name="Text 11"/>
+          <p:cNvSpPr/>
+          <p:nvPr/>
+        </p:nvSpPr>
+        <p:spPr>
+          <a:xfrm>
+            <a:off x="5120640" y="1783080"/>
+            <a:ext cx="3383280" cy="274320"/>
+          </a:xfrm>
+          <a:prstGeom prst="rect">
+            <a:avLst/>
+          </a:prstGeom>
+          <a:noFill/>
+          <a:ln/>
+        </p:spPr>
+        <p:txBody>
+          <a:bodyPr wrap="square" lIns="0" tIns="0" rIns="0" bIns="0" rtlCol="0" anchor="ctr"/>
+          <a:lstStyle/>
+          <a:p>
+            <a:pPr indent="0" marL="0">
+              <a:buNone/>
+            </a:pPr>
+            <a:r>
+              <a:rPr lang="en-US" sz="1000" b="1" spc="300" kern="0" dirty="0">
+                <a:solidFill>
+                  <a:srgbClr val="02C39A"/>
+                </a:solidFill>
+                <a:latin typeface="Calibri" pitchFamily="34" charset="0"/>
+                <a:ea typeface="Calibri" pitchFamily="34" charset="-122"/>
+                <a:cs typeface="Calibri" pitchFamily="34" charset="-120"/>
+              </a:rPr>
+              <a:t>WHAT WE'RE DOING NOW</a:t>
+            </a:r>
+            <a:endParaRPr lang="en-US" sz="1000" dirty="0"/>
+          </a:p>
+        </p:txBody>
+      </p:sp>
+      <p:sp>
+        <p:nvSpPr>
+          <p:cNvPr id="14" name="Text 12"/>
+          <p:cNvSpPr/>
+          <p:nvPr/>
+        </p:nvSpPr>
+        <p:spPr>
+          <a:xfrm>
+            <a:off x="5120640" y="2103120"/>
+            <a:ext cx="3383280" cy="457200"/>
+          </a:xfrm>
+          <a:prstGeom prst="rect">
+            <a:avLst/>
+          </a:prstGeom>
+          <a:noFill/>
+          <a:ln/>
+        </p:spPr>
+        <p:txBody>
+          <a:bodyPr wrap="square" lIns="0" tIns="0" rIns="0" bIns="0" rtlCol="0" anchor="ctr"/>
+          <a:lstStyle/>
+          <a:p>
+            <a:pPr indent="0" marL="0">
+              <a:buNone/>
+            </a:pPr>
+            <a:r>
+              <a:rPr lang="en-US" sz="2200" b="1" dirty="0">
+                <a:solidFill>
+                  <a:srgbClr val="FFFFFF"/>
+                </a:solidFill>
+                <a:latin typeface="Georgia" pitchFamily="34" charset="0"/>
+                <a:ea typeface="Georgia" pitchFamily="34" charset="-122"/>
+                <a:cs typeface="Georgia" pitchFamily="34" charset="-120"/>
+              </a:rPr>
+              <a:t>MCP Gateway.</a:t>
+            </a:r>
+            <a:endParaRPr lang="en-US" sz="2200" dirty="0"/>
+          </a:p>
+        </p:txBody>
+      </p:sp>
+      <p:sp>
+        <p:nvSpPr>
+          <p:cNvPr id="15" name="Text 13"/>
+          <p:cNvSpPr/>
+          <p:nvPr/>
+        </p:nvSpPr>
+        <p:spPr>
+          <a:xfrm>
+            <a:off x="5120640" y="2606040"/>
+            <a:ext cx="3383280" cy="640080"/>
+          </a:xfrm>
+          <a:prstGeom prst="rect">
+            <a:avLst/>
+          </a:prstGeom>
+          <a:noFill/>
+          <a:ln/>
+        </p:spPr>
+        <p:txBody>
+          <a:bodyPr wrap="square" lIns="0" tIns="0" rIns="0" bIns="0" rtlCol="0" anchor="ctr"/>
+          <a:lstStyle/>
+          <a:p>
+            <a:pPr indent="0" marL="0">
+              <a:buNone/>
+            </a:pPr>
+            <a:r>
+              <a:rPr lang="en-US" sz="1200" i="1" dirty="0">
+                <a:solidFill>
+                  <a:srgbClr val="E8EEFC"/>
+                </a:solidFill>
+                <a:latin typeface="Calibri" pitchFamily="34" charset="0"/>
+                <a:ea typeface="Calibri" pitchFamily="34" charset="-122"/>
+                <a:cs typeface="Calibri" pitchFamily="34" charset="-120"/>
+              </a:rPr>
+              <a:t>Govern agents at the protocol layer — one enforcement point between every agent and every tool.</a:t>
+            </a:r>
+            <a:endParaRPr lang="en-US" sz="1200" dirty="0"/>
+          </a:p>
+        </p:txBody>
+      </p:sp>
+      <p:sp>
+        <p:nvSpPr>
+          <p:cNvPr id="16" name="Shape 14"/>
+          <p:cNvSpPr/>
+          <p:nvPr/>
+        </p:nvSpPr>
+        <p:spPr>
+          <a:xfrm>
+            <a:off x="5074920" y="3383280"/>
+            <a:ext cx="914400" cy="594360"/>
+          </a:xfrm>
+          <a:prstGeom prst="roundRect">
+            <a:avLst>
+              <a:gd name="adj" fmla="val 9231"/>
+            </a:avLst>
+          </a:prstGeom>
+          <a:solidFill>
+            <a:srgbClr val="1A2545"/>
+          </a:solidFill>
+          <a:ln w="9525">
+            <a:solidFill>
+              <a:srgbClr val="E8EEFC"/>
+            </a:solidFill>
+            <a:prstDash val="solid"/>
+          </a:ln>
+        </p:spPr>
+      </p:sp>
+      <p:sp>
+        <p:nvSpPr>
+          <p:cNvPr id="17" name="Text 15"/>
+          <p:cNvSpPr/>
+          <p:nvPr/>
+        </p:nvSpPr>
+        <p:spPr>
+          <a:xfrm>
+            <a:off x="5074920" y="3383280"/>
+            <a:ext cx="914400" cy="594360"/>
           </a:xfrm>
           <a:prstGeom prst="rect">
             <a:avLst/>
@@ -5662,46 +5776,7 @@
               <a:buNone/>
             </a:pPr>
             <a:r>
-              <a:rPr lang="en-US" sz="1000" b="1" spc="300" kern="0" dirty="0">
-                <a:solidFill>
-                  <a:srgbClr val="64748B"/>
-                </a:solidFill>
-                <a:latin typeface="Calibri" pitchFamily="34" charset="0"/>
-                <a:ea typeface="Calibri" pitchFamily="34" charset="-122"/>
-                <a:cs typeface="Calibri" pitchFamily="34" charset="-120"/>
-              </a:rPr>
-              <a:t>AGENT</a:t>
-            </a:r>
-            <a:endParaRPr lang="en-US" sz="1000" dirty="0"/>
-          </a:p>
-        </p:txBody>
-      </p:sp>
-      <p:sp>
-        <p:nvSpPr>
-          <p:cNvPr id="8" name="Text 6"/>
-          <p:cNvSpPr/>
-          <p:nvPr/>
-        </p:nvSpPr>
-        <p:spPr>
-          <a:xfrm>
-            <a:off x="457200" y="2788920"/>
-            <a:ext cx="1828800" cy="685800"/>
-          </a:xfrm>
-          <a:prstGeom prst="rect">
-            <a:avLst/>
-          </a:prstGeom>
-          <a:noFill/>
-          <a:ln/>
-        </p:spPr>
-        <p:txBody>
-          <a:bodyPr wrap="square" lIns="0" tIns="0" rIns="0" bIns="0" rtlCol="0" anchor="ctr"/>
-          <a:lstStyle/>
-          <a:p>
-            <a:pPr algn="ctr" indent="0" marL="0">
-              <a:buNone/>
-            </a:pPr>
-            <a:r>
-              <a:rPr lang="en-US" sz="1200" dirty="0">
+              <a:rPr lang="en-US" sz="1100" b="1" dirty="0">
                 <a:solidFill>
                   <a:srgbClr val="FFFFFF"/>
                 </a:solidFill>
@@ -5709,45 +5784,28 @@
                 <a:ea typeface="Calibri" pitchFamily="34" charset="-122"/>
                 <a:cs typeface="Calibri" pitchFamily="34" charset="-120"/>
               </a:rPr>
-              <a:t>ChatGPT · Claude</a:t>
-            </a:r>
-            <a:endParaRPr lang="en-US" sz="1200" dirty="0"/>
-          </a:p>
-          <a:p>
-            <a:pPr algn="ctr" indent="0" marL="0">
-              <a:buNone/>
-            </a:pPr>
-            <a:r>
-              <a:rPr lang="en-US" sz="1200" dirty="0">
-                <a:solidFill>
-                  <a:srgbClr val="FFFFFF"/>
-                </a:solidFill>
-                <a:latin typeface="Calibri" pitchFamily="34" charset="0"/>
-                <a:ea typeface="Calibri" pitchFamily="34" charset="-122"/>
-                <a:cs typeface="Calibri" pitchFamily="34" charset="-120"/>
-              </a:rPr>
-              <a:t>Cursor · n8n</a:t>
-            </a:r>
-            <a:endParaRPr lang="en-US" sz="1200" dirty="0"/>
-          </a:p>
-        </p:txBody>
-      </p:sp>
-      <p:sp>
-        <p:nvSpPr>
-          <p:cNvPr id="9" name="Shape 7"/>
-          <p:cNvSpPr/>
-          <p:nvPr/>
-        </p:nvSpPr>
-        <p:spPr>
-          <a:xfrm>
-            <a:off x="2331720" y="2926080"/>
-            <a:ext cx="685800" cy="0"/>
+              <a:t>Agent</a:t>
+            </a:r>
+            <a:endParaRPr lang="en-US" sz="1100" dirty="0"/>
+          </a:p>
+        </p:txBody>
+      </p:sp>
+      <p:sp>
+        <p:nvSpPr>
+          <p:cNvPr id="18" name="Shape 16"/>
+          <p:cNvSpPr/>
+          <p:nvPr/>
+        </p:nvSpPr>
+        <p:spPr>
+          <a:xfrm>
+            <a:off x="6035040" y="3680460"/>
+            <a:ext cx="274320" cy="0"/>
           </a:xfrm>
           <a:prstGeom prst="line">
             <a:avLst/>
           </a:prstGeom>
           <a:noFill/>
-          <a:ln w="25400">
+          <a:ln w="19050">
             <a:solidFill>
               <a:srgbClr val="02C39A"/>
             </a:solidFill>
@@ -5758,24 +5816,24 @@
       </p:sp>
       <p:sp>
         <p:nvSpPr>
-          <p:cNvPr id="10" name="Shape 8"/>
-          <p:cNvSpPr/>
-          <p:nvPr/>
-        </p:nvSpPr>
-        <p:spPr>
-          <a:xfrm>
-            <a:off x="3108960" y="2194560"/>
-            <a:ext cx="2926080" cy="1463040"/>
+          <p:cNvPr id="19" name="Shape 17"/>
+          <p:cNvSpPr/>
+          <p:nvPr/>
+        </p:nvSpPr>
+        <p:spPr>
+          <a:xfrm>
+            <a:off x="6355080" y="3337560"/>
+            <a:ext cx="1417320" cy="685800"/>
           </a:xfrm>
           <a:prstGeom prst="roundRect">
             <a:avLst>
-              <a:gd name="adj" fmla="val 6250"/>
+              <a:gd name="adj" fmla="val 8000"/>
             </a:avLst>
           </a:prstGeom>
           <a:solidFill>
-            <a:srgbClr val="0F1B3D"/>
-          </a:solidFill>
-          <a:ln w="38100">
+            <a:srgbClr val="091230"/>
+          </a:solidFill>
+          <a:ln w="19050">
             <a:solidFill>
               <a:srgbClr val="02C39A"/>
             </a:solidFill>
@@ -5785,14 +5843,14 @@
       </p:sp>
       <p:sp>
         <p:nvSpPr>
-          <p:cNvPr id="11" name="Text 9"/>
-          <p:cNvSpPr/>
-          <p:nvPr/>
-        </p:nvSpPr>
-        <p:spPr>
-          <a:xfrm>
-            <a:off x="3108960" y="2331720"/>
-            <a:ext cx="2926080" cy="365760"/>
+          <p:cNvPr id="20" name="Text 18"/>
+          <p:cNvSpPr/>
+          <p:nvPr/>
+        </p:nvSpPr>
+        <p:spPr>
+          <a:xfrm>
+            <a:off x="6355080" y="3337560"/>
+            <a:ext cx="1417320" cy="685800"/>
           </a:xfrm>
           <a:prstGeom prst="rect">
             <a:avLst/>
@@ -5808,7 +5866,7 @@
               <a:buNone/>
             </a:pPr>
             <a:r>
-              <a:rPr lang="en-US" sz="1300" b="1" spc="400" kern="0" dirty="0">
+              <a:rPr lang="en-US" sz="1100" b="1" dirty="0">
                 <a:solidFill>
                   <a:srgbClr val="02C39A"/>
                 </a:solidFill>
@@ -5816,106 +5874,28 @@
                 <a:ea typeface="Calibri" pitchFamily="34" charset="-122"/>
                 <a:cs typeface="Calibri" pitchFamily="34" charset="-120"/>
               </a:rPr>
-              <a:t>MCP GATEWAY</a:t>
-            </a:r>
-            <a:endParaRPr lang="en-US" sz="1300" dirty="0"/>
-          </a:p>
-        </p:txBody>
-      </p:sp>
-      <p:sp>
-        <p:nvSpPr>
-          <p:cNvPr id="12" name="Text 10"/>
-          <p:cNvSpPr/>
-          <p:nvPr/>
-        </p:nvSpPr>
-        <p:spPr>
-          <a:xfrm>
-            <a:off x="3108960" y="2743200"/>
-            <a:ext cx="2926080" cy="274320"/>
-          </a:xfrm>
-          <a:prstGeom prst="rect">
-            <a:avLst/>
-          </a:prstGeom>
-          <a:noFill/>
-          <a:ln/>
-        </p:spPr>
-        <p:txBody>
-          <a:bodyPr wrap="square" lIns="0" tIns="0" rIns="0" bIns="0" rtlCol="0" anchor="ctr"/>
-          <a:lstStyle/>
-          <a:p>
-            <a:pPr algn="ctr" indent="0" marL="0">
-              <a:buNone/>
-            </a:pPr>
-            <a:r>
-              <a:rPr lang="en-US" sz="1300" i="1" dirty="0">
-                <a:solidFill>
-                  <a:srgbClr val="FFFFFF"/>
-                </a:solidFill>
-                <a:latin typeface="Calibri" pitchFamily="34" charset="0"/>
-                <a:ea typeface="Calibri" pitchFamily="34" charset="-122"/>
-                <a:cs typeface="Calibri" pitchFamily="34" charset="-120"/>
-              </a:rPr>
-              <a:t>identity · policy · audit</a:t>
-            </a:r>
-            <a:endParaRPr lang="en-US" sz="1300" dirty="0"/>
-          </a:p>
-        </p:txBody>
-      </p:sp>
-      <p:sp>
-        <p:nvSpPr>
-          <p:cNvPr id="13" name="Text 11"/>
-          <p:cNvSpPr/>
-          <p:nvPr/>
-        </p:nvSpPr>
-        <p:spPr>
-          <a:xfrm>
-            <a:off x="3108960" y="3108960"/>
-            <a:ext cx="2926080" cy="274320"/>
-          </a:xfrm>
-          <a:prstGeom prst="rect">
-            <a:avLst/>
-          </a:prstGeom>
-          <a:noFill/>
-          <a:ln/>
-        </p:spPr>
-        <p:txBody>
-          <a:bodyPr wrap="square" lIns="0" tIns="0" rIns="0" bIns="0" rtlCol="0" anchor="ctr"/>
-          <a:lstStyle/>
-          <a:p>
-            <a:pPr algn="ctr" indent="0" marL="0">
-              <a:buNone/>
-            </a:pPr>
-            <a:r>
-              <a:rPr lang="en-US" sz="1000" dirty="0">
-                <a:solidFill>
-                  <a:srgbClr val="E8EEFC"/>
-                </a:solidFill>
-                <a:latin typeface="Calibri" pitchFamily="34" charset="0"/>
-                <a:ea typeface="Calibri" pitchFamily="34" charset="-122"/>
-                <a:cs typeface="Calibri" pitchFamily="34" charset="-120"/>
-              </a:rPr>
-              <a:t>every call, policy-checked</a:t>
-            </a:r>
-            <a:endParaRPr lang="en-US" sz="1000" dirty="0"/>
-          </a:p>
-        </p:txBody>
-      </p:sp>
-      <p:sp>
-        <p:nvSpPr>
-          <p:cNvPr id="14" name="Shape 12"/>
-          <p:cNvSpPr/>
-          <p:nvPr/>
-        </p:nvSpPr>
-        <p:spPr>
-          <a:xfrm>
-            <a:off x="6080760" y="2926080"/>
-            <a:ext cx="685800" cy="0"/>
+              <a:t>Gateway</a:t>
+            </a:r>
+            <a:endParaRPr lang="en-US" sz="1100" dirty="0"/>
+          </a:p>
+        </p:txBody>
+      </p:sp>
+      <p:sp>
+        <p:nvSpPr>
+          <p:cNvPr id="21" name="Shape 19"/>
+          <p:cNvSpPr/>
+          <p:nvPr/>
+        </p:nvSpPr>
+        <p:spPr>
+          <a:xfrm>
+            <a:off x="7818120" y="3680460"/>
+            <a:ext cx="274320" cy="0"/>
           </a:xfrm>
           <a:prstGeom prst="line">
             <a:avLst/>
           </a:prstGeom>
           <a:noFill/>
-          <a:ln w="25400">
+          <a:ln w="19050">
             <a:solidFill>
               <a:srgbClr val="02C39A"/>
             </a:solidFill>
@@ -5926,24 +5906,24 @@
       </p:sp>
       <p:sp>
         <p:nvSpPr>
-          <p:cNvPr id="15" name="Shape 13"/>
-          <p:cNvSpPr/>
-          <p:nvPr/>
-        </p:nvSpPr>
-        <p:spPr>
-          <a:xfrm>
-            <a:off x="6858000" y="2331720"/>
-            <a:ext cx="1828800" cy="1188720"/>
+          <p:cNvPr id="22" name="Shape 20"/>
+          <p:cNvSpPr/>
+          <p:nvPr/>
+        </p:nvSpPr>
+        <p:spPr>
+          <a:xfrm>
+            <a:off x="8138160" y="3383280"/>
+            <a:ext cx="502920" cy="594360"/>
           </a:xfrm>
           <a:prstGeom prst="roundRect">
             <a:avLst>
-              <a:gd name="adj" fmla="val 6154"/>
+              <a:gd name="adj" fmla="val 10909"/>
             </a:avLst>
           </a:prstGeom>
           <a:solidFill>
             <a:srgbClr val="1A2545"/>
           </a:solidFill>
-          <a:ln w="12700">
+          <a:ln w="9525">
             <a:solidFill>
               <a:srgbClr val="E8EEFC"/>
             </a:solidFill>
@@ -5953,14 +5933,14 @@
       </p:sp>
       <p:sp>
         <p:nvSpPr>
-          <p:cNvPr id="16" name="Text 14"/>
-          <p:cNvSpPr/>
-          <p:nvPr/>
-        </p:nvSpPr>
-        <p:spPr>
-          <a:xfrm>
-            <a:off x="6858000" y="2423160"/>
-            <a:ext cx="1828800" cy="320040"/>
+          <p:cNvPr id="23" name="Text 21"/>
+          <p:cNvSpPr/>
+          <p:nvPr/>
+        </p:nvSpPr>
+        <p:spPr>
+          <a:xfrm>
+            <a:off x="8138160" y="3383280"/>
+            <a:ext cx="502920" cy="594360"/>
           </a:xfrm>
           <a:prstGeom prst="rect">
             <a:avLst/>
@@ -5976,7 +5956,85 @@
               <a:buNone/>
             </a:pPr>
             <a:r>
-              <a:rPr lang="en-US" sz="1000" b="1" spc="200" kern="0" dirty="0">
+              <a:rPr lang="en-US" sz="900" b="1" dirty="0">
+                <a:solidFill>
+                  <a:srgbClr val="FFFFFF"/>
+                </a:solidFill>
+                <a:latin typeface="Calibri" pitchFamily="34" charset="0"/>
+                <a:ea typeface="Calibri" pitchFamily="34" charset="-122"/>
+                <a:cs typeface="Calibri" pitchFamily="34" charset="-120"/>
+              </a:rPr>
+              <a:t>Tools</a:t>
+            </a:r>
+            <a:endParaRPr lang="en-US" sz="900" dirty="0"/>
+          </a:p>
+        </p:txBody>
+      </p:sp>
+      <p:sp>
+        <p:nvSpPr>
+          <p:cNvPr id="24" name="Text 22"/>
+          <p:cNvSpPr/>
+          <p:nvPr/>
+        </p:nvSpPr>
+        <p:spPr>
+          <a:xfrm>
+            <a:off x="5120640" y="4069080"/>
+            <a:ext cx="3383280" cy="365760"/>
+          </a:xfrm>
+          <a:prstGeom prst="rect">
+            <a:avLst/>
+          </a:prstGeom>
+          <a:noFill/>
+          <a:ln/>
+        </p:spPr>
+        <p:txBody>
+          <a:bodyPr wrap="square" lIns="0" tIns="0" rIns="0" bIns="0" rtlCol="0" anchor="ctr"/>
+          <a:lstStyle/>
+          <a:p>
+            <a:pPr indent="0" marL="0">
+              <a:buNone/>
+            </a:pPr>
+            <a:r>
+              <a:rPr lang="en-US" sz="1000" i="1" dirty="0">
+                <a:solidFill>
+                  <a:srgbClr val="F59E0B"/>
+                </a:solidFill>
+                <a:latin typeface="Calibri" pitchFamily="34" charset="0"/>
+                <a:ea typeface="Calibri" pitchFamily="34" charset="-122"/>
+                <a:cs typeface="Calibri" pitchFamily="34" charset="-120"/>
+              </a:rPr>
+              <a:t>Lead: Sarit + Amir Ben Ami  ·  Status: concept / whiteboard</a:t>
+            </a:r>
+            <a:endParaRPr lang="en-US" sz="1000" dirty="0"/>
+          </a:p>
+        </p:txBody>
+      </p:sp>
+      <p:sp>
+        <p:nvSpPr>
+          <p:cNvPr id="25" name="Text 23"/>
+          <p:cNvSpPr/>
+          <p:nvPr/>
+        </p:nvSpPr>
+        <p:spPr>
+          <a:xfrm>
+            <a:off x="457200" y="4663440"/>
+            <a:ext cx="8229600" cy="274320"/>
+          </a:xfrm>
+          <a:prstGeom prst="rect">
+            <a:avLst/>
+          </a:prstGeom>
+          <a:noFill/>
+          <a:ln/>
+        </p:spPr>
+        <p:txBody>
+          <a:bodyPr wrap="square" lIns="0" tIns="0" rIns="0" bIns="0" rtlCol="0" anchor="ctr"/>
+          <a:lstStyle/>
+          <a:p>
+            <a:pPr algn="ctr" indent="0" marL="0">
+              <a:buNone/>
+            </a:pPr>
+            <a:r>
+              <a:rPr lang="en-US" sz="1100" i="1" dirty="0">
                 <a:solidFill>
                   <a:srgbClr val="64748B"/>
                 </a:solidFill>
@@ -5984,152 +6042,15 @@
                 <a:ea typeface="Calibri" pitchFamily="34" charset="-122"/>
                 <a:cs typeface="Calibri" pitchFamily="34" charset="-120"/>
               </a:rPr>
-              <a:t>APPS · TOOLS</a:t>
-            </a:r>
-            <a:endParaRPr lang="en-US" sz="1000" dirty="0"/>
-          </a:p>
-        </p:txBody>
-      </p:sp>
-      <p:sp>
-        <p:nvSpPr>
-          <p:cNvPr id="17" name="Text 15"/>
-          <p:cNvSpPr/>
-          <p:nvPr/>
-        </p:nvSpPr>
-        <p:spPr>
-          <a:xfrm>
-            <a:off x="6858000" y="2788920"/>
-            <a:ext cx="1828800" cy="685800"/>
-          </a:xfrm>
-          <a:prstGeom prst="rect">
-            <a:avLst/>
-          </a:prstGeom>
-          <a:noFill/>
-          <a:ln/>
-        </p:spPr>
-        <p:txBody>
-          <a:bodyPr wrap="square" lIns="0" tIns="0" rIns="0" bIns="0" rtlCol="0" anchor="ctr"/>
-          <a:lstStyle/>
-          <a:p>
-            <a:pPr algn="ctr" indent="0" marL="0">
-              <a:buNone/>
-            </a:pPr>
-            <a:r>
-              <a:rPr lang="en-US" sz="1200" dirty="0">
-                <a:solidFill>
-                  <a:srgbClr val="FFFFFF"/>
-                </a:solidFill>
-                <a:latin typeface="Calibri" pitchFamily="34" charset="0"/>
-                <a:ea typeface="Calibri" pitchFamily="34" charset="-122"/>
-                <a:cs typeface="Calibri" pitchFamily="34" charset="-120"/>
-              </a:rPr>
-              <a:t>Slack · Linear</a:t>
-            </a:r>
-            <a:endParaRPr lang="en-US" sz="1200" dirty="0"/>
-          </a:p>
-          <a:p>
-            <a:pPr algn="ctr" indent="0" marL="0">
-              <a:buNone/>
-            </a:pPr>
-            <a:r>
-              <a:rPr lang="en-US" sz="1200" dirty="0">
-                <a:solidFill>
-                  <a:srgbClr val="FFFFFF"/>
-                </a:solidFill>
-                <a:latin typeface="Calibri" pitchFamily="34" charset="0"/>
-                <a:ea typeface="Calibri" pitchFamily="34" charset="-122"/>
-                <a:cs typeface="Calibri" pitchFamily="34" charset="-120"/>
-              </a:rPr>
-              <a:t>Notions · Postgres</a:t>
-            </a:r>
-            <a:endParaRPr lang="en-US" sz="1200" dirty="0"/>
-          </a:p>
-        </p:txBody>
-      </p:sp>
-      <p:sp>
-        <p:nvSpPr>
-          <p:cNvPr id="18" name="Text 16"/>
-          <p:cNvSpPr/>
-          <p:nvPr/>
-        </p:nvSpPr>
-        <p:spPr>
-          <a:xfrm>
-            <a:off x="457200" y="3794760"/>
-            <a:ext cx="8229600" cy="365760"/>
-          </a:xfrm>
-          <a:prstGeom prst="rect">
-            <a:avLst/>
-          </a:prstGeom>
-          <a:noFill/>
-          <a:ln/>
-        </p:spPr>
-        <p:txBody>
-          <a:bodyPr wrap="square" lIns="0" tIns="0" rIns="0" bIns="0" rtlCol="0" anchor="ctr"/>
-          <a:lstStyle/>
-          <a:p>
-            <a:pPr indent="0" marL="0">
-              <a:buNone/>
-            </a:pPr>
-            <a:r>
-              <a:rPr lang="en-US" sz="1200" b="1" dirty="0">
-                <a:solidFill>
-                  <a:srgbClr val="F59E0B"/>
-                </a:solidFill>
-                <a:latin typeface="Calibri" pitchFamily="34" charset="0"/>
-                <a:ea typeface="Calibri" pitchFamily="34" charset="-122"/>
-                <a:cs typeface="Calibri" pitchFamily="34" charset="-120"/>
-              </a:rPr>
-              <a:t>Status: concept / whiteboard.  </a:t>
-            </a:r>
-            <a:pPr indent="0" marL="0">
-              <a:buNone/>
-            </a:pPr>
-            <a:r>
-              <a:rPr lang="en-US" sz="1200" dirty="0">
-                <a:solidFill>
-                  <a:srgbClr val="E8EEFC"/>
-                </a:solidFill>
-                <a:latin typeface="Calibri" pitchFamily="34" charset="0"/>
-                <a:ea typeface="Calibri" pitchFamily="34" charset="-122"/>
-                <a:cs typeface="Calibri" pitchFamily="34" charset="-120"/>
-              </a:rPr>
-              <a:t>Sarit + Amir Ben Ami leading architecture.  </a:t>
-            </a:r>
-            <a:pPr indent="0" marL="0">
-              <a:buNone/>
-            </a:pPr>
-            <a:r>
-              <a:rPr lang="en-US" sz="1200" dirty="0">
-                <a:solidFill>
-                  <a:srgbClr val="E8EEFC"/>
-                </a:solidFill>
-                <a:latin typeface="Calibri" pitchFamily="34" charset="0"/>
-                <a:ea typeface="Calibri" pitchFamily="34" charset="-122"/>
-                <a:cs typeface="Calibri" pitchFamily="34" charset="-120"/>
-              </a:rPr>
-              <a:t>Cycle 79 AI priority.  </a:t>
-            </a:r>
-            <a:pPr indent="0" marL="0">
-              <a:buNone/>
-            </a:pPr>
-            <a:r>
-              <a:rPr lang="en-US" sz="1200" i="1" dirty="0">
-                <a:solidFill>
-                  <a:srgbClr val="E8EEFC"/>
-                </a:solidFill>
-                <a:latin typeface="Calibri" pitchFamily="34" charset="0"/>
-                <a:ea typeface="Calibri" pitchFamily="34" charset="-122"/>
-                <a:cs typeface="Calibri" pitchFamily="34" charset="-120"/>
-              </a:rPr>
-              <a:t>Market: Saviynt, Token Security, Astrix converging here.</a:t>
-            </a:r>
-            <a:endParaRPr lang="en-US" sz="1200" dirty="0"/>
-          </a:p>
-        </p:txBody>
-      </p:sp>
-      <p:sp>
-        <p:nvSpPr>
-          <p:cNvPr id="19" name="Text 17"/>
+              <a:t>Market tailwind: Saviynt, Token Security, Astrix all converging on MCP-layer governance.</a:t>
+            </a:r>
+            <a:endParaRPr lang="en-US" sz="1100" dirty="0"/>
+          </a:p>
+        </p:txBody>
+      </p:sp>
+      <p:sp>
+        <p:nvSpPr>
+          <p:cNvPr id="26" name="Text 24"/>
           <p:cNvSpPr/>
           <p:nvPr/>
         </p:nvSpPr>
@@ -6154,13 +6075,13 @@
             <a:r>
               <a:rPr lang="en-US" sz="900" dirty="0">
                 <a:solidFill>
-                  <a:srgbClr val="E8EEFC"/>
-                </a:solidFill>
-                <a:latin typeface="Calibri" pitchFamily="34" charset="0"/>
-                <a:ea typeface="Calibri" pitchFamily="34" charset="-122"/>
-                <a:cs typeface="Calibri" pitchFamily="34" charset="-120"/>
-              </a:rPr>
-              <a:t>5 / 8</a:t>
+                  <a:srgbClr val="64748B"/>
+                </a:solidFill>
+                <a:latin typeface="Calibri" pitchFamily="34" charset="0"/>
+                <a:ea typeface="Calibri" pitchFamily="34" charset="-122"/>
+                <a:cs typeface="Calibri" pitchFamily="34" charset="-120"/>
+              </a:rPr>
+              <a:t>5 / 7</a:t>
             </a:r>
             <a:endParaRPr lang="en-US" sz="900" dirty="0"/>
           </a:p>
@@ -6256,7 +6177,7 @@
                 <a:ea typeface="Calibri" pitchFamily="34" charset="-122"/>
                 <a:cs typeface="Calibri" pitchFamily="34" charset="-120"/>
               </a:rPr>
-              <a:t>06 · P0 scope — the demo target</a:t>
+              <a:t>05 · Roadmap</a:t>
             </a:r>
             <a:endParaRPr lang="en-US" sz="1100" dirty="0"/>
           </a:p>
@@ -6295,7 +6216,7 @@
                 <a:ea typeface="Georgia" pitchFamily="34" charset="-122"/>
                 <a:cs typeface="Georgia" pitchFamily="34" charset="-120"/>
               </a:rPr>
-              <a:t>What we're building first.</a:t>
+              <a:t>P0 first. Then in sequence.</a:t>
             </a:r>
             <a:endParaRPr lang="en-US" sz="3400" dirty="0"/>
           </a:p>
@@ -6303,14 +6224,78 @@
       </p:sp>
       <p:sp>
         <p:nvSpPr>
-          <p:cNvPr id="5" name="Text 3"/>
+          <p:cNvPr id="5" name="Shape 3"/>
           <p:cNvSpPr/>
           <p:nvPr/>
         </p:nvSpPr>
         <p:spPr>
           <a:xfrm>
             <a:off x="457200" y="1554480"/>
-            <a:ext cx="8229600" cy="365760"/>
+            <a:ext cx="914400" cy="292608"/>
+          </a:xfrm>
+          <a:prstGeom prst="rect">
+            <a:avLst/>
+          </a:prstGeom>
+          <a:solidFill>
+            <a:srgbClr val="0F1B3D"/>
+          </a:solidFill>
+          <a:ln w="12700">
+            <a:solidFill>
+              <a:srgbClr val="0F1B3D"/>
+            </a:solidFill>
+            <a:prstDash val="solid"/>
+          </a:ln>
+        </p:spPr>
+      </p:sp>
+      <p:sp>
+        <p:nvSpPr>
+          <p:cNvPr id="6" name="Text 4"/>
+          <p:cNvSpPr/>
+          <p:nvPr/>
+        </p:nvSpPr>
+        <p:spPr>
+          <a:xfrm>
+            <a:off x="457200" y="1554480"/>
+            <a:ext cx="914400" cy="292608"/>
+          </a:xfrm>
+          <a:prstGeom prst="rect">
+            <a:avLst/>
+          </a:prstGeom>
+          <a:noFill/>
+          <a:ln/>
+        </p:spPr>
+        <p:txBody>
+          <a:bodyPr wrap="square" lIns="0" tIns="0" rIns="0" bIns="0" rtlCol="0" anchor="ctr"/>
+          <a:lstStyle/>
+          <a:p>
+            <a:pPr algn="ctr" indent="0" marL="0">
+              <a:buNone/>
+            </a:pPr>
+            <a:r>
+              <a:rPr lang="en-US" sz="1200" b="1" spc="300" kern="0" dirty="0">
+                <a:solidFill>
+                  <a:srgbClr val="FFFFFF"/>
+                </a:solidFill>
+                <a:latin typeface="Calibri" pitchFamily="34" charset="0"/>
+                <a:ea typeface="Calibri" pitchFamily="34" charset="-122"/>
+                <a:cs typeface="Calibri" pitchFamily="34" charset="-120"/>
+              </a:rPr>
+              <a:t>P0</a:t>
+            </a:r>
+            <a:endParaRPr lang="en-US" sz="1200" dirty="0"/>
+          </a:p>
+        </p:txBody>
+      </p:sp>
+      <p:sp>
+        <p:nvSpPr>
+          <p:cNvPr id="7" name="Text 5"/>
+          <p:cNvSpPr/>
+          <p:nvPr/>
+        </p:nvSpPr>
+        <p:spPr>
+          <a:xfrm>
+            <a:off x="1463040" y="1572768"/>
+            <a:ext cx="7315200" cy="274320"/>
           </a:xfrm>
           <a:prstGeom prst="rect">
             <a:avLst/>
@@ -6326,7 +6311,7 @@
               <a:buNone/>
             </a:pPr>
             <a:r>
-              <a:rPr lang="en-US" sz="1200" i="1" dirty="0">
+              <a:rPr lang="en-US" sz="1100" i="1" dirty="0">
                 <a:solidFill>
                   <a:srgbClr val="64748B"/>
                 </a:solidFill>
@@ -6334,22 +6319,22 @@
                 <a:ea typeface="Calibri" pitchFamily="34" charset="-122"/>
                 <a:cs typeface="Calibri" pitchFamily="34" charset="-120"/>
               </a:rPr>
-              <a:t>From Sarit's session. Some pieces may exist in M1/M2 — Omri will connect the dots.</a:t>
-            </a:r>
-            <a:endParaRPr lang="en-US" sz="1200" dirty="0"/>
-          </a:p>
-        </p:txBody>
-      </p:sp>
-      <p:sp>
-        <p:nvSpPr>
-          <p:cNvPr id="6" name="Shape 4"/>
-          <p:cNvSpPr/>
-          <p:nvPr/>
-        </p:nvSpPr>
-        <p:spPr>
-          <a:xfrm>
-            <a:off x="365760" y="2011680"/>
-            <a:ext cx="2743200" cy="2468880"/>
+              <a:t>the demo target</a:t>
+            </a:r>
+            <a:endParaRPr lang="en-US" sz="1100" dirty="0"/>
+          </a:p>
+        </p:txBody>
+      </p:sp>
+      <p:sp>
+        <p:nvSpPr>
+          <p:cNvPr id="8" name="Shape 6"/>
+          <p:cNvSpPr/>
+          <p:nvPr/>
+        </p:nvSpPr>
+        <p:spPr>
+          <a:xfrm>
+            <a:off x="365760" y="1965960"/>
+            <a:ext cx="2743200" cy="1691640"/>
           </a:xfrm>
           <a:prstGeom prst="rect">
             <a:avLst/>
@@ -6367,14 +6352,14 @@
       </p:sp>
       <p:sp>
         <p:nvSpPr>
-          <p:cNvPr id="7" name="Shape 5"/>
-          <p:cNvSpPr/>
-          <p:nvPr/>
-        </p:nvSpPr>
-        <p:spPr>
-          <a:xfrm>
-            <a:off x="365760" y="2011680"/>
-            <a:ext cx="2743200" cy="73152"/>
+          <p:cNvPr id="9" name="Shape 7"/>
+          <p:cNvSpPr/>
+          <p:nvPr/>
+        </p:nvSpPr>
+        <p:spPr>
+          <a:xfrm>
+            <a:off x="365760" y="1965960"/>
+            <a:ext cx="2743200" cy="54864"/>
           </a:xfrm>
           <a:prstGeom prst="rect">
             <a:avLst/>
@@ -6392,14 +6377,14 @@
       </p:sp>
       <p:sp>
         <p:nvSpPr>
-          <p:cNvPr id="8" name="Text 6"/>
-          <p:cNvSpPr/>
-          <p:nvPr/>
-        </p:nvSpPr>
-        <p:spPr>
-          <a:xfrm>
-            <a:off x="640080" y="2194560"/>
-            <a:ext cx="914400" cy="320040"/>
+          <p:cNvPr id="10" name="Text 8"/>
+          <p:cNvSpPr/>
+          <p:nvPr/>
+        </p:nvSpPr>
+        <p:spPr>
+          <a:xfrm>
+            <a:off x="594360" y="2103120"/>
+            <a:ext cx="731520" cy="274320"/>
           </a:xfrm>
           <a:prstGeom prst="rect">
             <a:avLst/>
@@ -6415,7 +6400,7 @@
               <a:buNone/>
             </a:pPr>
             <a:r>
-              <a:rPr lang="en-US" sz="1100" b="1" spc="300" kern="0" dirty="0">
+              <a:rPr lang="en-US" sz="1000" b="1" spc="300" kern="0" dirty="0">
                 <a:solidFill>
                   <a:srgbClr val="02C39A"/>
                 </a:solidFill>
@@ -6425,20 +6410,20 @@
               </a:rPr>
               <a:t>01</a:t>
             </a:r>
-            <a:endParaRPr lang="en-US" sz="1100" dirty="0"/>
-          </a:p>
-        </p:txBody>
-      </p:sp>
-      <p:sp>
-        <p:nvSpPr>
-          <p:cNvPr id="9" name="Text 7"/>
-          <p:cNvSpPr/>
-          <p:nvPr/>
-        </p:nvSpPr>
-        <p:spPr>
-          <a:xfrm>
-            <a:off x="640080" y="2514600"/>
-            <a:ext cx="2194560" cy="457200"/>
+            <a:endParaRPr lang="en-US" sz="1000" dirty="0"/>
+          </a:p>
+        </p:txBody>
+      </p:sp>
+      <p:sp>
+        <p:nvSpPr>
+          <p:cNvPr id="11" name="Text 9"/>
+          <p:cNvSpPr/>
+          <p:nvPr/>
+        </p:nvSpPr>
+        <p:spPr>
+          <a:xfrm>
+            <a:off x="594360" y="2377440"/>
+            <a:ext cx="2286000" cy="365760"/>
           </a:xfrm>
           <a:prstGeom prst="rect">
             <a:avLst/>
@@ -6454,7 +6439,7 @@
               <a:buNone/>
             </a:pPr>
             <a:r>
-              <a:rPr lang="en-US" sz="1800" b="1" dirty="0">
+              <a:rPr lang="en-US" sz="1600" b="1" dirty="0">
                 <a:solidFill>
                   <a:srgbClr val="0F1B3D"/>
                 </a:solidFill>
@@ -6464,20 +6449,20 @@
               </a:rPr>
               <a:t>Gateway Core</a:t>
             </a:r>
-            <a:endParaRPr lang="en-US" sz="1800" dirty="0"/>
-          </a:p>
-        </p:txBody>
-      </p:sp>
-      <p:sp>
-        <p:nvSpPr>
-          <p:cNvPr id="10" name="Text 8"/>
-          <p:cNvSpPr/>
-          <p:nvPr/>
-        </p:nvSpPr>
-        <p:spPr>
-          <a:xfrm>
-            <a:off x="640080" y="3017520"/>
-            <a:ext cx="2194560" cy="1325880"/>
+            <a:endParaRPr lang="en-US" sz="1600" dirty="0"/>
+          </a:p>
+        </p:txBody>
+      </p:sp>
+      <p:sp>
+        <p:nvSpPr>
+          <p:cNvPr id="12" name="Text 10"/>
+          <p:cNvSpPr/>
+          <p:nvPr/>
+        </p:nvSpPr>
+        <p:spPr>
+          <a:xfrm>
+            <a:off x="594360" y="2788920"/>
+            <a:ext cx="2286000" cy="640080"/>
           </a:xfrm>
           <a:prstGeom prst="rect">
             <a:avLst/>
@@ -6490,9 +6475,6 @@
           <a:lstStyle/>
           <a:p>
             <a:pPr indent="0" marL="0">
-              <a:spcAft>
-                <a:spcPts val="200"/>
-              </a:spcAft>
               <a:buNone/>
             </a:pPr>
             <a:r>
@@ -6504,67 +6486,38 @@
                 <a:ea typeface="Calibri" pitchFamily="34" charset="-122"/>
                 <a:cs typeface="Calibri" pitchFamily="34" charset="-120"/>
               </a:rPr>
-              <a:t>The protocol-layer enforcement point. Every agent → tool call flows through it.</a:t>
+              <a:t>Protocol-layer enforcement point. Every agent → tool call flows through it.</a:t>
             </a:r>
             <a:endParaRPr lang="en-US" sz="1100" dirty="0"/>
           </a:p>
+        </p:txBody>
+      </p:sp>
+      <p:sp>
+        <p:nvSpPr>
+          <p:cNvPr id="13" name="Text 11"/>
+          <p:cNvSpPr/>
+          <p:nvPr/>
+        </p:nvSpPr>
+        <p:spPr>
+          <a:xfrm>
+            <a:off x="594360" y="3383280"/>
+            <a:ext cx="2286000" cy="228600"/>
+          </a:xfrm>
+          <a:prstGeom prst="rect">
+            <a:avLst/>
+          </a:prstGeom>
+          <a:noFill/>
+          <a:ln/>
+        </p:spPr>
+        <p:txBody>
+          <a:bodyPr wrap="square" lIns="0" tIns="0" rIns="0" bIns="0" rtlCol="0" anchor="ctr"/>
+          <a:lstStyle/>
           <a:p>
             <a:pPr indent="0" marL="0">
-              <a:spcAft>
-                <a:spcPts val="200"/>
-              </a:spcAft>
-              <a:buNone/>
-            </a:pPr>
-            <a:endParaRPr lang="en-US" sz="1100" dirty="0"/>
-          </a:p>
-          <a:p>
-            <a:pPr indent="0" marL="0">
-              <a:spcAft>
-                <a:spcPts val="200"/>
-              </a:spcAft>
-              <a:buNone/>
-            </a:pPr>
-            <a:r>
-              <a:rPr lang="en-US" sz="1100" dirty="0">
-                <a:solidFill>
-                  <a:srgbClr val="1A1F36"/>
-                </a:solidFill>
-                <a:latin typeface="Calibri" pitchFamily="34" charset="0"/>
-                <a:ea typeface="Calibri" pitchFamily="34" charset="-122"/>
-                <a:cs typeface="Calibri" pitchFamily="34" charset="-120"/>
-              </a:rPr>
-              <a:t>Identity-aware, loggable, policy-checkable.</a:t>
-            </a:r>
-            <a:endParaRPr lang="en-US" sz="1100" dirty="0"/>
-          </a:p>
-        </p:txBody>
-      </p:sp>
-      <p:sp>
-        <p:nvSpPr>
-          <p:cNvPr id="11" name="Text 9"/>
-          <p:cNvSpPr/>
-          <p:nvPr/>
-        </p:nvSpPr>
-        <p:spPr>
-          <a:xfrm>
-            <a:off x="640080" y="4187952"/>
-            <a:ext cx="2194560" cy="256032"/>
-          </a:xfrm>
-          <a:prstGeom prst="rect">
-            <a:avLst/>
-          </a:prstGeom>
-          <a:noFill/>
-          <a:ln/>
-        </p:spPr>
-        <p:txBody>
-          <a:bodyPr wrap="square" lIns="0" tIns="0" rIns="0" bIns="0" rtlCol="0" anchor="ctr"/>
-          <a:lstStyle/>
-          <a:p>
-            <a:pPr indent="0" marL="0">
-              <a:buNone/>
-            </a:pPr>
-            <a:r>
-              <a:rPr lang="en-US" sz="1000" b="1" i="1" dirty="0">
+              <a:buNone/>
+            </a:pPr>
+            <a:r>
+              <a:rPr lang="en-US" sz="900" b="1" i="1" dirty="0">
                 <a:solidFill>
                   <a:srgbClr val="02C39A"/>
                 </a:solidFill>
@@ -6574,20 +6527,20 @@
               </a:rPr>
               <a:t>Eng research starts here.</a:t>
             </a:r>
-            <a:endParaRPr lang="en-US" sz="1000" dirty="0"/>
-          </a:p>
-        </p:txBody>
-      </p:sp>
-      <p:sp>
-        <p:nvSpPr>
-          <p:cNvPr id="12" name="Shape 10"/>
-          <p:cNvSpPr/>
-          <p:nvPr/>
-        </p:nvSpPr>
-        <p:spPr>
-          <a:xfrm>
-            <a:off x="3200400" y="2011680"/>
-            <a:ext cx="2743200" cy="2468880"/>
+            <a:endParaRPr lang="en-US" sz="900" dirty="0"/>
+          </a:p>
+        </p:txBody>
+      </p:sp>
+      <p:sp>
+        <p:nvSpPr>
+          <p:cNvPr id="14" name="Shape 12"/>
+          <p:cNvSpPr/>
+          <p:nvPr/>
+        </p:nvSpPr>
+        <p:spPr>
+          <a:xfrm>
+            <a:off x="3200400" y="1965960"/>
+            <a:ext cx="2743200" cy="1691640"/>
           </a:xfrm>
           <a:prstGeom prst="rect">
             <a:avLst/>
@@ -6605,14 +6558,14 @@
       </p:sp>
       <p:sp>
         <p:nvSpPr>
-          <p:cNvPr id="13" name="Shape 11"/>
-          <p:cNvSpPr/>
-          <p:nvPr/>
-        </p:nvSpPr>
-        <p:spPr>
-          <a:xfrm>
-            <a:off x="3200400" y="2011680"/>
-            <a:ext cx="2743200" cy="73152"/>
+          <p:cNvPr id="15" name="Shape 13"/>
+          <p:cNvSpPr/>
+          <p:nvPr/>
+        </p:nvSpPr>
+        <p:spPr>
+          <a:xfrm>
+            <a:off x="3200400" y="1965960"/>
+            <a:ext cx="2743200" cy="54864"/>
           </a:xfrm>
           <a:prstGeom prst="rect">
             <a:avLst/>
@@ -6630,14 +6583,14 @@
       </p:sp>
       <p:sp>
         <p:nvSpPr>
-          <p:cNvPr id="14" name="Text 12"/>
-          <p:cNvSpPr/>
-          <p:nvPr/>
-        </p:nvSpPr>
-        <p:spPr>
-          <a:xfrm>
-            <a:off x="3474720" y="2194560"/>
-            <a:ext cx="914400" cy="320040"/>
+          <p:cNvPr id="16" name="Text 14"/>
+          <p:cNvSpPr/>
+          <p:nvPr/>
+        </p:nvSpPr>
+        <p:spPr>
+          <a:xfrm>
+            <a:off x="3429000" y="2103120"/>
+            <a:ext cx="731520" cy="274320"/>
           </a:xfrm>
           <a:prstGeom prst="rect">
             <a:avLst/>
@@ -6653,7 +6606,7 @@
               <a:buNone/>
             </a:pPr>
             <a:r>
-              <a:rPr lang="en-US" sz="1100" b="1" spc="300" kern="0" dirty="0">
+              <a:rPr lang="en-US" sz="1000" b="1" spc="300" kern="0" dirty="0">
                 <a:solidFill>
                   <a:srgbClr val="02C39A"/>
                 </a:solidFill>
@@ -6663,20 +6616,20 @@
               </a:rPr>
               <a:t>02</a:t>
             </a:r>
-            <a:endParaRPr lang="en-US" sz="1100" dirty="0"/>
-          </a:p>
-        </p:txBody>
-      </p:sp>
-      <p:sp>
-        <p:nvSpPr>
-          <p:cNvPr id="15" name="Text 13"/>
-          <p:cNvSpPr/>
-          <p:nvPr/>
-        </p:nvSpPr>
-        <p:spPr>
-          <a:xfrm>
-            <a:off x="3474720" y="2514600"/>
-            <a:ext cx="2194560" cy="457200"/>
+            <a:endParaRPr lang="en-US" sz="1000" dirty="0"/>
+          </a:p>
+        </p:txBody>
+      </p:sp>
+      <p:sp>
+        <p:nvSpPr>
+          <p:cNvPr id="17" name="Text 15"/>
+          <p:cNvSpPr/>
+          <p:nvPr/>
+        </p:nvSpPr>
+        <p:spPr>
+          <a:xfrm>
+            <a:off x="3429000" y="2377440"/>
+            <a:ext cx="2286000" cy="365760"/>
           </a:xfrm>
           <a:prstGeom prst="rect">
             <a:avLst/>
@@ -6692,7 +6645,7 @@
               <a:buNone/>
             </a:pPr>
             <a:r>
-              <a:rPr lang="en-US" sz="1800" b="1" dirty="0">
+              <a:rPr lang="en-US" sz="1600" b="1" dirty="0">
                 <a:solidFill>
                   <a:srgbClr val="0F1B3D"/>
                 </a:solidFill>
@@ -6702,20 +6655,20 @@
               </a:rPr>
               <a:t>Policy Agent</a:t>
             </a:r>
-            <a:endParaRPr lang="en-US" sz="1800" dirty="0"/>
-          </a:p>
-        </p:txBody>
-      </p:sp>
-      <p:sp>
-        <p:nvSpPr>
-          <p:cNvPr id="16" name="Text 14"/>
-          <p:cNvSpPr/>
-          <p:nvPr/>
-        </p:nvSpPr>
-        <p:spPr>
-          <a:xfrm>
-            <a:off x="3474720" y="3017520"/>
-            <a:ext cx="2194560" cy="1325880"/>
+            <a:endParaRPr lang="en-US" sz="1600" dirty="0"/>
+          </a:p>
+        </p:txBody>
+      </p:sp>
+      <p:sp>
+        <p:nvSpPr>
+          <p:cNvPr id="18" name="Text 16"/>
+          <p:cNvSpPr/>
+          <p:nvPr/>
+        </p:nvSpPr>
+        <p:spPr>
+          <a:xfrm>
+            <a:off x="3429000" y="2788920"/>
+            <a:ext cx="2286000" cy="640080"/>
           </a:xfrm>
           <a:prstGeom prst="rect">
             <a:avLst/>
@@ -6728,9 +6681,6 @@
           <a:lstStyle/>
           <a:p>
             <a:pPr indent="0" marL="0">
-              <a:spcAft>
-                <a:spcPts val="200"/>
-              </a:spcAft>
               <a:buNone/>
             </a:pPr>
             <a:r>
@@ -6742,100 +6692,22 @@
                 <a:ea typeface="Calibri" pitchFamily="34" charset="-122"/>
                 <a:cs typeface="Calibri" pitchFamily="34" charset="-120"/>
               </a:rPr>
-              <a:t>Access profiles for agents:</a:t>
+              <a:t>Access profiles per agent — at MCP/platform level AND tool level. Granular, not binary.</a:t>
             </a:r>
             <a:endParaRPr lang="en-US" sz="1100" dirty="0"/>
           </a:p>
-          <a:p>
-            <a:pPr indent="0" marL="0">
-              <a:spcAft>
-                <a:spcPts val="200"/>
-              </a:spcAft>
-              <a:buNone/>
-            </a:pPr>
-            <a:endParaRPr lang="en-US" sz="1100" dirty="0"/>
-          </a:p>
-          <a:p>
-            <a:pPr indent="0" marL="0">
-              <a:spcAft>
-                <a:spcPts val="200"/>
-              </a:spcAft>
-              <a:buNone/>
-            </a:pPr>
-            <a:r>
-              <a:rPr lang="en-US" sz="1100" dirty="0">
-                <a:solidFill>
-                  <a:srgbClr val="1A1F36"/>
-                </a:solidFill>
-                <a:latin typeface="Calibri" pitchFamily="34" charset="0"/>
-                <a:ea typeface="Calibri" pitchFamily="34" charset="-122"/>
-                <a:cs typeface="Calibri" pitchFamily="34" charset="-120"/>
-              </a:rPr>
-              <a:t>• At the MCP / platform level</a:t>
-            </a:r>
-            <a:endParaRPr lang="en-US" sz="1100" dirty="0"/>
-          </a:p>
-          <a:p>
-            <a:pPr indent="0" marL="0">
-              <a:spcAft>
-                <a:spcPts val="200"/>
-              </a:spcAft>
-              <a:buNone/>
-            </a:pPr>
-            <a:r>
-              <a:rPr lang="en-US" sz="1100" dirty="0">
-                <a:solidFill>
-                  <a:srgbClr val="1A1F36"/>
-                </a:solidFill>
-                <a:latin typeface="Calibri" pitchFamily="34" charset="0"/>
-                <a:ea typeface="Calibri" pitchFamily="34" charset="-122"/>
-                <a:cs typeface="Calibri" pitchFamily="34" charset="-120"/>
-              </a:rPr>
-              <a:t>• AND at the individual tool level</a:t>
-            </a:r>
-            <a:endParaRPr lang="en-US" sz="1100" dirty="0"/>
-          </a:p>
-          <a:p>
-            <a:pPr indent="0" marL="0">
-              <a:spcAft>
-                <a:spcPts val="200"/>
-              </a:spcAft>
-              <a:buNone/>
-            </a:pPr>
-            <a:endParaRPr lang="en-US" sz="1100" dirty="0"/>
-          </a:p>
-          <a:p>
-            <a:pPr indent="0" marL="0">
-              <a:spcAft>
-                <a:spcPts val="200"/>
-              </a:spcAft>
-              <a:buNone/>
-            </a:pPr>
-            <a:r>
-              <a:rPr lang="en-US" sz="1100" dirty="0">
-                <a:solidFill>
-                  <a:srgbClr val="1A1F36"/>
-                </a:solidFill>
-                <a:latin typeface="Calibri" pitchFamily="34" charset="0"/>
-                <a:ea typeface="Calibri" pitchFamily="34" charset="-122"/>
-                <a:cs typeface="Calibri" pitchFamily="34" charset="-120"/>
-              </a:rPr>
-              <a:t>Granular, not binary.</a:t>
-            </a:r>
-            <a:endParaRPr lang="en-US" sz="1100" dirty="0"/>
-          </a:p>
-        </p:txBody>
-      </p:sp>
-      <p:sp>
-        <p:nvSpPr>
-          <p:cNvPr id="17" name="Shape 15"/>
-          <p:cNvSpPr/>
-          <p:nvPr/>
-        </p:nvSpPr>
-        <p:spPr>
-          <a:xfrm>
-            <a:off x="6035040" y="2011680"/>
-            <a:ext cx="2743200" cy="2468880"/>
+        </p:txBody>
+      </p:sp>
+      <p:sp>
+        <p:nvSpPr>
+          <p:cNvPr id="19" name="Shape 17"/>
+          <p:cNvSpPr/>
+          <p:nvPr/>
+        </p:nvSpPr>
+        <p:spPr>
+          <a:xfrm>
+            <a:off x="6035040" y="1965960"/>
+            <a:ext cx="2743200" cy="1691640"/>
           </a:xfrm>
           <a:prstGeom prst="rect">
             <a:avLst/>
@@ -6853,14 +6725,14 @@
       </p:sp>
       <p:sp>
         <p:nvSpPr>
-          <p:cNvPr id="18" name="Shape 16"/>
-          <p:cNvSpPr/>
-          <p:nvPr/>
-        </p:nvSpPr>
-        <p:spPr>
-          <a:xfrm>
-            <a:off x="6035040" y="2011680"/>
-            <a:ext cx="2743200" cy="73152"/>
+          <p:cNvPr id="20" name="Shape 18"/>
+          <p:cNvSpPr/>
+          <p:nvPr/>
+        </p:nvSpPr>
+        <p:spPr>
+          <a:xfrm>
+            <a:off x="6035040" y="1965960"/>
+            <a:ext cx="2743200" cy="54864"/>
           </a:xfrm>
           <a:prstGeom prst="rect">
             <a:avLst/>
@@ -6878,14 +6750,14 @@
       </p:sp>
       <p:sp>
         <p:nvSpPr>
-          <p:cNvPr id="19" name="Text 17"/>
-          <p:cNvSpPr/>
-          <p:nvPr/>
-        </p:nvSpPr>
-        <p:spPr>
-          <a:xfrm>
-            <a:off x="6309360" y="2194560"/>
-            <a:ext cx="914400" cy="320040"/>
+          <p:cNvPr id="21" name="Text 19"/>
+          <p:cNvSpPr/>
+          <p:nvPr/>
+        </p:nvSpPr>
+        <p:spPr>
+          <a:xfrm>
+            <a:off x="6263640" y="2103120"/>
+            <a:ext cx="731520" cy="274320"/>
           </a:xfrm>
           <a:prstGeom prst="rect">
             <a:avLst/>
@@ -6901,7 +6773,7 @@
               <a:buNone/>
             </a:pPr>
             <a:r>
-              <a:rPr lang="en-US" sz="1100" b="1" spc="300" kern="0" dirty="0">
+              <a:rPr lang="en-US" sz="1000" b="1" spc="300" kern="0" dirty="0">
                 <a:solidFill>
                   <a:srgbClr val="02C39A"/>
                 </a:solidFill>
@@ -6911,20 +6783,20 @@
               </a:rPr>
               <a:t>03</a:t>
             </a:r>
-            <a:endParaRPr lang="en-US" sz="1100" dirty="0"/>
-          </a:p>
-        </p:txBody>
-      </p:sp>
-      <p:sp>
-        <p:nvSpPr>
-          <p:cNvPr id="20" name="Text 18"/>
-          <p:cNvSpPr/>
-          <p:nvPr/>
-        </p:nvSpPr>
-        <p:spPr>
-          <a:xfrm>
-            <a:off x="6309360" y="2514600"/>
-            <a:ext cx="2194560" cy="457200"/>
+            <a:endParaRPr lang="en-US" sz="1000" dirty="0"/>
+          </a:p>
+        </p:txBody>
+      </p:sp>
+      <p:sp>
+        <p:nvSpPr>
+          <p:cNvPr id="22" name="Text 20"/>
+          <p:cNvSpPr/>
+          <p:nvPr/>
+        </p:nvSpPr>
+        <p:spPr>
+          <a:xfrm>
+            <a:off x="6263640" y="2377440"/>
+            <a:ext cx="2286000" cy="365760"/>
           </a:xfrm>
           <a:prstGeom prst="rect">
             <a:avLst/>
@@ -6940,7 +6812,7 @@
               <a:buNone/>
             </a:pPr>
             <a:r>
-              <a:rPr lang="en-US" sz="1800" b="1" dirty="0">
+              <a:rPr lang="en-US" sz="1600" b="1" dirty="0">
                 <a:solidFill>
                   <a:srgbClr val="0F1B3D"/>
                 </a:solidFill>
@@ -6950,20 +6822,20 @@
               </a:rPr>
               <a:t>Screens</a:t>
             </a:r>
-            <a:endParaRPr lang="en-US" sz="1800" dirty="0"/>
-          </a:p>
-        </p:txBody>
-      </p:sp>
-      <p:sp>
-        <p:nvSpPr>
-          <p:cNvPr id="21" name="Text 19"/>
-          <p:cNvSpPr/>
-          <p:nvPr/>
-        </p:nvSpPr>
-        <p:spPr>
-          <a:xfrm>
-            <a:off x="6309360" y="3017520"/>
-            <a:ext cx="2194560" cy="1325880"/>
+            <a:endParaRPr lang="en-US" sz="1600" dirty="0"/>
+          </a:p>
+        </p:txBody>
+      </p:sp>
+      <p:sp>
+        <p:nvSpPr>
+          <p:cNvPr id="23" name="Text 21"/>
+          <p:cNvSpPr/>
+          <p:nvPr/>
+        </p:nvSpPr>
+        <p:spPr>
+          <a:xfrm>
+            <a:off x="6263640" y="2788920"/>
+            <a:ext cx="2286000" cy="640080"/>
           </a:xfrm>
           <a:prstGeom prst="rect">
             <a:avLst/>
@@ -6976,9 +6848,6 @@
           <a:lstStyle/>
           <a:p>
             <a:pPr indent="0" marL="0">
-              <a:spcAft>
-                <a:spcPts val="200"/>
-              </a:spcAft>
               <a:buNone/>
             </a:pPr>
             <a:r>
@@ -6990,111 +6859,150 @@
                 <a:ea typeface="Calibri" pitchFamily="34" charset="-122"/>
                 <a:cs typeface="Calibri" pitchFamily="34" charset="-120"/>
               </a:rPr>
-              <a:t>"Integration" tab for MCPs</a:t>
+              <a:t>“Integration” tab for MCPs + 3 log views: System · Governance · All Access.</a:t>
             </a:r>
             <a:endParaRPr lang="en-US" sz="1100" dirty="0"/>
           </a:p>
+        </p:txBody>
+      </p:sp>
+      <p:sp>
+        <p:nvSpPr>
+          <p:cNvPr id="24" name="Shape 22"/>
+          <p:cNvSpPr/>
+          <p:nvPr/>
+        </p:nvSpPr>
+        <p:spPr>
+          <a:xfrm>
+            <a:off x="457200" y="3840480"/>
+            <a:ext cx="914400" cy="292608"/>
+          </a:xfrm>
+          <a:prstGeom prst="rect">
+            <a:avLst/>
+          </a:prstGeom>
+          <a:solidFill>
+            <a:srgbClr val="64748B"/>
+          </a:solidFill>
+          <a:ln w="12700">
+            <a:solidFill>
+              <a:srgbClr val="64748B"/>
+            </a:solidFill>
+            <a:prstDash val="solid"/>
+          </a:ln>
+        </p:spPr>
+      </p:sp>
+      <p:sp>
+        <p:nvSpPr>
+          <p:cNvPr id="25" name="Text 23"/>
+          <p:cNvSpPr/>
+          <p:nvPr/>
+        </p:nvSpPr>
+        <p:spPr>
+          <a:xfrm>
+            <a:off x="457200" y="3840480"/>
+            <a:ext cx="914400" cy="292608"/>
+          </a:xfrm>
+          <a:prstGeom prst="rect">
+            <a:avLst/>
+          </a:prstGeom>
+          <a:noFill/>
+          <a:ln/>
+        </p:spPr>
+        <p:txBody>
+          <a:bodyPr wrap="square" lIns="0" tIns="0" rIns="0" bIns="0" rtlCol="0" anchor="ctr"/>
+          <a:lstStyle/>
+          <a:p>
+            <a:pPr algn="ctr" indent="0" marL="0">
+              <a:buNone/>
+            </a:pPr>
+            <a:r>
+              <a:rPr lang="en-US" sz="1000" b="1" spc="200" kern="0" dirty="0">
+                <a:solidFill>
+                  <a:srgbClr val="FFFFFF"/>
+                </a:solidFill>
+                <a:latin typeface="Calibri" pitchFamily="34" charset="0"/>
+                <a:ea typeface="Calibri" pitchFamily="34" charset="-122"/>
+                <a:cs typeface="Calibri" pitchFamily="34" charset="-120"/>
+              </a:rPr>
+              <a:t>POST-P0</a:t>
+            </a:r>
+            <a:endParaRPr lang="en-US" sz="1000" dirty="0"/>
+          </a:p>
+        </p:txBody>
+      </p:sp>
+      <p:sp>
+        <p:nvSpPr>
+          <p:cNvPr id="26" name="Text 24"/>
+          <p:cNvSpPr/>
+          <p:nvPr/>
+        </p:nvSpPr>
+        <p:spPr>
+          <a:xfrm>
+            <a:off x="1463040" y="3858768"/>
+            <a:ext cx="7315200" cy="274320"/>
+          </a:xfrm>
+          <a:prstGeom prst="rect">
+            <a:avLst/>
+          </a:prstGeom>
+          <a:noFill/>
+          <a:ln/>
+        </p:spPr>
+        <p:txBody>
+          <a:bodyPr wrap="square" lIns="0" tIns="0" rIns="0" bIns="0" rtlCol="0" anchor="ctr"/>
+          <a:lstStyle/>
           <a:p>
             <a:pPr indent="0" marL="0">
-              <a:spcAft>
-                <a:spcPts val="200"/>
-              </a:spcAft>
-              <a:buNone/>
-            </a:pPr>
+              <a:buNone/>
+            </a:pPr>
+            <a:r>
+              <a:rPr lang="en-US" sz="1100" i="1" dirty="0">
+                <a:solidFill>
+                  <a:srgbClr val="64748B"/>
+                </a:solidFill>
+                <a:latin typeface="Calibri" pitchFamily="34" charset="0"/>
+                <a:ea typeface="Calibri" pitchFamily="34" charset="-122"/>
+                <a:cs typeface="Calibri" pitchFamily="34" charset="-120"/>
+              </a:rPr>
+              <a:t>in sequence after the demo lands</a:t>
+            </a:r>
             <a:endParaRPr lang="en-US" sz="1100" dirty="0"/>
           </a:p>
-          <a:p>
-            <a:pPr indent="0" marL="0">
-              <a:spcAft>
-                <a:spcPts val="200"/>
-              </a:spcAft>
-              <a:buNone/>
-            </a:pPr>
-            <a:r>
-              <a:rPr lang="en-US" sz="1100" dirty="0">
-                <a:solidFill>
-                  <a:srgbClr val="1A1F36"/>
-                </a:solidFill>
-                <a:latin typeface="Calibri" pitchFamily="34" charset="0"/>
-                <a:ea typeface="Calibri" pitchFamily="34" charset="-122"/>
-                <a:cs typeface="Calibri" pitchFamily="34" charset="-120"/>
-              </a:rPr>
-              <a:t>Logs — three views:</a:t>
-            </a:r>
-            <a:endParaRPr lang="en-US" sz="1100" dirty="0"/>
-          </a:p>
-          <a:p>
-            <a:pPr indent="0" marL="0">
-              <a:spcAft>
-                <a:spcPts val="200"/>
-              </a:spcAft>
-              <a:buNone/>
-            </a:pPr>
-            <a:r>
-              <a:rPr lang="en-US" sz="1100" dirty="0">
-                <a:solidFill>
-                  <a:srgbClr val="1A1F36"/>
-                </a:solidFill>
-                <a:latin typeface="Calibri" pitchFamily="34" charset="0"/>
-                <a:ea typeface="Calibri" pitchFamily="34" charset="-122"/>
-                <a:cs typeface="Calibri" pitchFamily="34" charset="-120"/>
-              </a:rPr>
-              <a:t>• System Logs</a:t>
-            </a:r>
-            <a:endParaRPr lang="en-US" sz="1100" dirty="0"/>
-          </a:p>
-          <a:p>
-            <a:pPr indent="0" marL="0">
-              <a:spcAft>
-                <a:spcPts val="200"/>
-              </a:spcAft>
-              <a:buNone/>
-            </a:pPr>
-            <a:r>
-              <a:rPr lang="en-US" sz="1100" dirty="0">
-                <a:solidFill>
-                  <a:srgbClr val="1A1F36"/>
-                </a:solidFill>
-                <a:latin typeface="Calibri" pitchFamily="34" charset="0"/>
-                <a:ea typeface="Calibri" pitchFamily="34" charset="-122"/>
-                <a:cs typeface="Calibri" pitchFamily="34" charset="-120"/>
-              </a:rPr>
-              <a:t>• Governance Logs</a:t>
-            </a:r>
-            <a:endParaRPr lang="en-US" sz="1100" dirty="0"/>
-          </a:p>
-          <a:p>
-            <a:pPr indent="0" marL="0">
-              <a:spcAft>
-                <a:spcPts val="200"/>
-              </a:spcAft>
-              <a:buNone/>
-            </a:pPr>
-            <a:r>
-              <a:rPr lang="en-US" sz="1100" dirty="0">
-                <a:solidFill>
-                  <a:srgbClr val="1A1F36"/>
-                </a:solidFill>
-                <a:latin typeface="Calibri" pitchFamily="34" charset="0"/>
-                <a:ea typeface="Calibri" pitchFamily="34" charset="-122"/>
-                <a:cs typeface="Calibri" pitchFamily="34" charset="-120"/>
-              </a:rPr>
-              <a:t>• All Access Logs</a:t>
-            </a:r>
-            <a:endParaRPr lang="en-US" sz="1100" dirty="0"/>
-          </a:p>
-        </p:txBody>
-      </p:sp>
-      <p:sp>
-        <p:nvSpPr>
-          <p:cNvPr id="22" name="Shape 20"/>
-          <p:cNvSpPr/>
-          <p:nvPr/>
-        </p:nvSpPr>
-        <p:spPr>
-          <a:xfrm>
-            <a:off x="457200" y="4617720"/>
-            <a:ext cx="8229600" cy="365760"/>
+        </p:txBody>
+      </p:sp>
+      <p:sp>
+        <p:nvSpPr>
+          <p:cNvPr id="27" name="Shape 25"/>
+          <p:cNvSpPr/>
+          <p:nvPr/>
+        </p:nvSpPr>
+        <p:spPr>
+          <a:xfrm>
+            <a:off x="278892" y="4224528"/>
+            <a:ext cx="2057400" cy="502920"/>
+          </a:xfrm>
+          <a:prstGeom prst="rect">
+            <a:avLst/>
+          </a:prstGeom>
+          <a:solidFill>
+            <a:srgbClr val="E8EEFC"/>
+          </a:solidFill>
+          <a:ln w="12700">
+            <a:solidFill>
+              <a:srgbClr val="E8EEFC"/>
+            </a:solidFill>
+            <a:prstDash val="solid"/>
+          </a:ln>
+        </p:spPr>
+      </p:sp>
+      <p:sp>
+        <p:nvSpPr>
+          <p:cNvPr id="28" name="Shape 26"/>
+          <p:cNvSpPr/>
+          <p:nvPr/>
+        </p:nvSpPr>
+        <p:spPr>
+          <a:xfrm>
+            <a:off x="278892" y="4224528"/>
+            <a:ext cx="54864" cy="502920"/>
           </a:xfrm>
           <a:prstGeom prst="rect">
             <a:avLst/>
@@ -7112,14 +7020,14 @@
       </p:sp>
       <p:sp>
         <p:nvSpPr>
-          <p:cNvPr id="23" name="Text 21"/>
-          <p:cNvSpPr/>
-          <p:nvPr/>
-        </p:nvSpPr>
-        <p:spPr>
-          <a:xfrm>
-            <a:off x="640080" y="4617720"/>
-            <a:ext cx="7863840" cy="365760"/>
+          <p:cNvPr id="29" name="Text 27"/>
+          <p:cNvSpPr/>
+          <p:nvPr/>
+        </p:nvSpPr>
+        <p:spPr>
+          <a:xfrm>
+            <a:off x="416052" y="4270248"/>
+            <a:ext cx="1874520" cy="411480"/>
           </a:xfrm>
           <a:prstGeom prst="rect">
             <a:avLst/>
@@ -7135,23 +7043,397 @@
               <a:buNone/>
             </a:pPr>
             <a:r>
-              <a:rPr lang="en-US" sz="1200" b="1" dirty="0">
-                <a:solidFill>
-                  <a:srgbClr val="FFFFFF"/>
-                </a:solidFill>
-                <a:latin typeface="Calibri" pitchFamily="34" charset="0"/>
-                <a:ea typeface="Calibri" pitchFamily="34" charset="-122"/>
-                <a:cs typeface="Calibri" pitchFamily="34" charset="-120"/>
-              </a:rPr>
-              <a:t>Identiverse · June 15 · harsh deadline.</a:t>
-            </a:r>
-            <a:endParaRPr lang="en-US" sz="1200" dirty="0"/>
-          </a:p>
-        </p:txBody>
-      </p:sp>
-      <p:sp>
-        <p:nvSpPr>
-          <p:cNvPr id="24" name="Text 22"/>
+              <a:rPr lang="en-US" sz="1100" b="1" dirty="0">
+                <a:solidFill>
+                  <a:srgbClr val="0F1B3D"/>
+                </a:solidFill>
+                <a:latin typeface="Calibri" pitchFamily="34" charset="0"/>
+                <a:ea typeface="Calibri" pitchFamily="34" charset="-122"/>
+                <a:cs typeface="Calibri" pitchFamily="34" charset="-120"/>
+              </a:rPr>
+              <a:t>JIT with Gateway</a:t>
+            </a:r>
+            <a:endParaRPr lang="en-US" sz="1100" dirty="0"/>
+          </a:p>
+          <a:p>
+            <a:pPr indent="0" marL="0">
+              <a:buNone/>
+            </a:pPr>
+            <a:r>
+              <a:rPr lang="en-US" sz="900" dirty="0">
+                <a:solidFill>
+                  <a:srgbClr val="64748B"/>
+                </a:solidFill>
+                <a:latin typeface="Calibri" pitchFamily="34" charset="0"/>
+                <a:ea typeface="Calibri" pitchFamily="34" charset="-122"/>
+                <a:cs typeface="Calibri" pitchFamily="34" charset="-120"/>
+              </a:rPr>
+              <a:t>On-the-fly grants. With/without HITL.</a:t>
+            </a:r>
+            <a:endParaRPr lang="en-US" sz="1100" dirty="0"/>
+          </a:p>
+        </p:txBody>
+      </p:sp>
+      <p:sp>
+        <p:nvSpPr>
+          <p:cNvPr id="30" name="Shape 28"/>
+          <p:cNvSpPr/>
+          <p:nvPr/>
+        </p:nvSpPr>
+        <p:spPr>
+          <a:xfrm>
+            <a:off x="2455164" y="4224528"/>
+            <a:ext cx="2057400" cy="502920"/>
+          </a:xfrm>
+          <a:prstGeom prst="rect">
+            <a:avLst/>
+          </a:prstGeom>
+          <a:solidFill>
+            <a:srgbClr val="E8EEFC"/>
+          </a:solidFill>
+          <a:ln w="12700">
+            <a:solidFill>
+              <a:srgbClr val="E8EEFC"/>
+            </a:solidFill>
+            <a:prstDash val="solid"/>
+          </a:ln>
+        </p:spPr>
+      </p:sp>
+      <p:sp>
+        <p:nvSpPr>
+          <p:cNvPr id="31" name="Shape 29"/>
+          <p:cNvSpPr/>
+          <p:nvPr/>
+        </p:nvSpPr>
+        <p:spPr>
+          <a:xfrm>
+            <a:off x="2455164" y="4224528"/>
+            <a:ext cx="54864" cy="502920"/>
+          </a:xfrm>
+          <a:prstGeom prst="rect">
+            <a:avLst/>
+          </a:prstGeom>
+          <a:solidFill>
+            <a:srgbClr val="0F1B3D"/>
+          </a:solidFill>
+          <a:ln w="12700">
+            <a:solidFill>
+              <a:srgbClr val="0F1B3D"/>
+            </a:solidFill>
+            <a:prstDash val="solid"/>
+          </a:ln>
+        </p:spPr>
+      </p:sp>
+      <p:sp>
+        <p:nvSpPr>
+          <p:cNvPr id="32" name="Text 30"/>
+          <p:cNvSpPr/>
+          <p:nvPr/>
+        </p:nvSpPr>
+        <p:spPr>
+          <a:xfrm>
+            <a:off x="2592324" y="4270248"/>
+            <a:ext cx="1874520" cy="411480"/>
+          </a:xfrm>
+          <a:prstGeom prst="rect">
+            <a:avLst/>
+          </a:prstGeom>
+          <a:noFill/>
+          <a:ln/>
+        </p:spPr>
+        <p:txBody>
+          <a:bodyPr wrap="square" lIns="0" tIns="0" rIns="0" bIns="0" rtlCol="0" anchor="ctr"/>
+          <a:lstStyle/>
+          <a:p>
+            <a:pPr indent="0" marL="0">
+              <a:buNone/>
+            </a:pPr>
+            <a:r>
+              <a:rPr lang="en-US" sz="1100" b="1" dirty="0">
+                <a:solidFill>
+                  <a:srgbClr val="0F1B3D"/>
+                </a:solidFill>
+                <a:latin typeface="Calibri" pitchFamily="34" charset="0"/>
+                <a:ea typeface="Calibri" pitchFamily="34" charset="-122"/>
+                <a:cs typeface="Calibri" pitchFamily="34" charset="-120"/>
+              </a:rPr>
+              <a:t>JML for Agents</a:t>
+            </a:r>
+            <a:endParaRPr lang="en-US" sz="1100" dirty="0"/>
+          </a:p>
+          <a:p>
+            <a:pPr indent="0" marL="0">
+              <a:buNone/>
+            </a:pPr>
+            <a:r>
+              <a:rPr lang="en-US" sz="900" dirty="0">
+                <a:solidFill>
+                  <a:srgbClr val="64748B"/>
+                </a:solidFill>
+                <a:latin typeface="Calibri" pitchFamily="34" charset="0"/>
+                <a:ea typeface="Calibri" pitchFamily="34" charset="-122"/>
+                <a:cs typeface="Calibri" pitchFamily="34" charset="-120"/>
+              </a:rPr>
+              <a:t>Joiner / mover / leaver lifecycle.</a:t>
+            </a:r>
+            <a:endParaRPr lang="en-US" sz="1100" dirty="0"/>
+          </a:p>
+        </p:txBody>
+      </p:sp>
+      <p:sp>
+        <p:nvSpPr>
+          <p:cNvPr id="33" name="Shape 31"/>
+          <p:cNvSpPr/>
+          <p:nvPr/>
+        </p:nvSpPr>
+        <p:spPr>
+          <a:xfrm>
+            <a:off x="4631436" y="4224528"/>
+            <a:ext cx="2057400" cy="502920"/>
+          </a:xfrm>
+          <a:prstGeom prst="rect">
+            <a:avLst/>
+          </a:prstGeom>
+          <a:solidFill>
+            <a:srgbClr val="E8EEFC"/>
+          </a:solidFill>
+          <a:ln w="12700">
+            <a:solidFill>
+              <a:srgbClr val="E8EEFC"/>
+            </a:solidFill>
+            <a:prstDash val="solid"/>
+          </a:ln>
+        </p:spPr>
+      </p:sp>
+      <p:sp>
+        <p:nvSpPr>
+          <p:cNvPr id="34" name="Shape 32"/>
+          <p:cNvSpPr/>
+          <p:nvPr/>
+        </p:nvSpPr>
+        <p:spPr>
+          <a:xfrm>
+            <a:off x="4631436" y="4224528"/>
+            <a:ext cx="54864" cy="502920"/>
+          </a:xfrm>
+          <a:prstGeom prst="rect">
+            <a:avLst/>
+          </a:prstGeom>
+          <a:solidFill>
+            <a:srgbClr val="0F1B3D"/>
+          </a:solidFill>
+          <a:ln w="12700">
+            <a:solidFill>
+              <a:srgbClr val="0F1B3D"/>
+            </a:solidFill>
+            <a:prstDash val="solid"/>
+          </a:ln>
+        </p:spPr>
+      </p:sp>
+      <p:sp>
+        <p:nvSpPr>
+          <p:cNvPr id="35" name="Text 33"/>
+          <p:cNvSpPr/>
+          <p:nvPr/>
+        </p:nvSpPr>
+        <p:spPr>
+          <a:xfrm>
+            <a:off x="4768596" y="4270248"/>
+            <a:ext cx="1874520" cy="411480"/>
+          </a:xfrm>
+          <a:prstGeom prst="rect">
+            <a:avLst/>
+          </a:prstGeom>
+          <a:noFill/>
+          <a:ln/>
+        </p:spPr>
+        <p:txBody>
+          <a:bodyPr wrap="square" lIns="0" tIns="0" rIns="0" bIns="0" rtlCol="0" anchor="ctr"/>
+          <a:lstStyle/>
+          <a:p>
+            <a:pPr indent="0" marL="0">
+              <a:buNone/>
+            </a:pPr>
+            <a:r>
+              <a:rPr lang="en-US" sz="1100" b="1" dirty="0">
+                <a:solidFill>
+                  <a:srgbClr val="0F1B3D"/>
+                </a:solidFill>
+                <a:latin typeface="Calibri" pitchFamily="34" charset="0"/>
+                <a:ea typeface="Calibri" pitchFamily="34" charset="-122"/>
+                <a:cs typeface="Calibri" pitchFamily="34" charset="-120"/>
+              </a:rPr>
+              <a:t>Onboarding</a:t>
+            </a:r>
+            <a:endParaRPr lang="en-US" sz="1100" dirty="0"/>
+          </a:p>
+          <a:p>
+            <a:pPr indent="0" marL="0">
+              <a:buNone/>
+            </a:pPr>
+            <a:r>
+              <a:rPr lang="en-US" sz="900" dirty="0">
+                <a:solidFill>
+                  <a:srgbClr val="64748B"/>
+                </a:solidFill>
+                <a:latin typeface="Calibri" pitchFamily="34" charset="0"/>
+                <a:ea typeface="Calibri" pitchFamily="34" charset="-122"/>
+                <a:cs typeface="Calibri" pitchFamily="34" charset="-120"/>
+              </a:rPr>
+              <a:t>UI to connect apps. Secured setup.</a:t>
+            </a:r>
+            <a:endParaRPr lang="en-US" sz="1100" dirty="0"/>
+          </a:p>
+        </p:txBody>
+      </p:sp>
+      <p:sp>
+        <p:nvSpPr>
+          <p:cNvPr id="36" name="Shape 34"/>
+          <p:cNvSpPr/>
+          <p:nvPr/>
+        </p:nvSpPr>
+        <p:spPr>
+          <a:xfrm>
+            <a:off x="6807708" y="4224528"/>
+            <a:ext cx="2057400" cy="502920"/>
+          </a:xfrm>
+          <a:prstGeom prst="rect">
+            <a:avLst/>
+          </a:prstGeom>
+          <a:solidFill>
+            <a:srgbClr val="E8EEFC"/>
+          </a:solidFill>
+          <a:ln w="12700">
+            <a:solidFill>
+              <a:srgbClr val="E8EEFC"/>
+            </a:solidFill>
+            <a:prstDash val="solid"/>
+          </a:ln>
+        </p:spPr>
+      </p:sp>
+      <p:sp>
+        <p:nvSpPr>
+          <p:cNvPr id="37" name="Shape 35"/>
+          <p:cNvSpPr/>
+          <p:nvPr/>
+        </p:nvSpPr>
+        <p:spPr>
+          <a:xfrm>
+            <a:off x="6807708" y="4224528"/>
+            <a:ext cx="54864" cy="502920"/>
+          </a:xfrm>
+          <a:prstGeom prst="rect">
+            <a:avLst/>
+          </a:prstGeom>
+          <a:solidFill>
+            <a:srgbClr val="0F1B3D"/>
+          </a:solidFill>
+          <a:ln w="12700">
+            <a:solidFill>
+              <a:srgbClr val="0F1B3D"/>
+            </a:solidFill>
+            <a:prstDash val="solid"/>
+          </a:ln>
+        </p:spPr>
+      </p:sp>
+      <p:sp>
+        <p:nvSpPr>
+          <p:cNvPr id="38" name="Text 36"/>
+          <p:cNvSpPr/>
+          <p:nvPr/>
+        </p:nvSpPr>
+        <p:spPr>
+          <a:xfrm>
+            <a:off x="6944868" y="4270248"/>
+            <a:ext cx="1874520" cy="411480"/>
+          </a:xfrm>
+          <a:prstGeom prst="rect">
+            <a:avLst/>
+          </a:prstGeom>
+          <a:noFill/>
+          <a:ln/>
+        </p:spPr>
+        <p:txBody>
+          <a:bodyPr wrap="square" lIns="0" tIns="0" rIns="0" bIns="0" rtlCol="0" anchor="ctr"/>
+          <a:lstStyle/>
+          <a:p>
+            <a:pPr indent="0" marL="0">
+              <a:buNone/>
+            </a:pPr>
+            <a:r>
+              <a:rPr lang="en-US" sz="1100" b="1" dirty="0">
+                <a:solidFill>
+                  <a:srgbClr val="0F1B3D"/>
+                </a:solidFill>
+                <a:latin typeface="Calibri" pitchFamily="34" charset="0"/>
+                <a:ea typeface="Calibri" pitchFamily="34" charset="-122"/>
+                <a:cs typeface="Calibri" pitchFamily="34" charset="-120"/>
+              </a:rPr>
+              <a:t>Agent Intent</a:t>
+            </a:r>
+            <a:endParaRPr lang="en-US" sz="1100" dirty="0"/>
+          </a:p>
+          <a:p>
+            <a:pPr indent="0" marL="0">
+              <a:buNone/>
+            </a:pPr>
+            <a:r>
+              <a:rPr lang="en-US" sz="900" dirty="0">
+                <a:solidFill>
+                  <a:srgbClr val="64748B"/>
+                </a:solidFill>
+                <a:latin typeface="Calibri" pitchFamily="34" charset="0"/>
+                <a:ea typeface="Calibri" pitchFamily="34" charset="-122"/>
+                <a:cs typeface="Calibri" pitchFamily="34" charset="-120"/>
+              </a:rPr>
+              <a:t>Behavior + context + sensitivity.</a:t>
+            </a:r>
+            <a:endParaRPr lang="en-US" sz="1100" dirty="0"/>
+          </a:p>
+        </p:txBody>
+      </p:sp>
+      <p:sp>
+        <p:nvSpPr>
+          <p:cNvPr id="39" name="Text 37"/>
+          <p:cNvSpPr/>
+          <p:nvPr/>
+        </p:nvSpPr>
+        <p:spPr>
+          <a:xfrm>
+            <a:off x="457200" y="4846320"/>
+            <a:ext cx="8229600" cy="274320"/>
+          </a:xfrm>
+          <a:prstGeom prst="rect">
+            <a:avLst/>
+          </a:prstGeom>
+          <a:noFill/>
+          <a:ln/>
+        </p:spPr>
+        <p:txBody>
+          <a:bodyPr wrap="square" lIns="0" tIns="0" rIns="0" bIns="0" rtlCol="0" anchor="ctr"/>
+          <a:lstStyle/>
+          <a:p>
+            <a:pPr algn="ctr" indent="0" marL="0">
+              <a:buNone/>
+            </a:pPr>
+            <a:r>
+              <a:rPr lang="en-US" sz="1100" b="1" i="1" dirty="0">
+                <a:solidFill>
+                  <a:srgbClr val="F59E0B"/>
+                </a:solidFill>
+                <a:latin typeface="Calibri" pitchFamily="34" charset="0"/>
+                <a:ea typeface="Calibri" pitchFamily="34" charset="-122"/>
+                <a:cs typeface="Calibri" pitchFamily="34" charset="-120"/>
+              </a:rPr>
+              <a:t>Identiverse  ·  June 15  ·  harsh deadline</a:t>
+            </a:r>
+            <a:endParaRPr lang="en-US" sz="1100" dirty="0"/>
+          </a:p>
+        </p:txBody>
+      </p:sp>
+      <p:sp>
+        <p:nvSpPr>
+          <p:cNvPr id="40" name="Text 38"/>
           <p:cNvSpPr/>
           <p:nvPr/>
         </p:nvSpPr>
@@ -7182,7 +7464,7 @@
                 <a:ea typeface="Calibri" pitchFamily="34" charset="-122"/>
                 <a:cs typeface="Calibri" pitchFamily="34" charset="-120"/>
               </a:rPr>
-              <a:t>6 / 8</a:t>
+              <a:t>6 / 7</a:t>
             </a:r>
             <a:endParaRPr lang="en-US" sz="900" dirty="0"/>
           </a:p>
@@ -7199,731 +7481,6 @@
 <file path=ppt/slides/slide7.xml><?xml version="1.0" encoding="utf-8"?>
 <p:sld xmlns:a="http://schemas.openxmlformats.org/drawingml/2006/main" xmlns:r="http://schemas.openxmlformats.org/officeDocument/2006/relationships" xmlns:p="http://schemas.openxmlformats.org/presentationml/2006/main">
   <p:cSld name="Slide 7">
-    <p:bg>
-      <p:bgPr>
-        <a:solidFill>
-          <a:srgbClr val="FFFFFF"/>
-        </a:solidFill>
-      </p:bgPr>
-    </p:bg>
-    <p:spTree>
-      <p:nvGrpSpPr>
-        <p:cNvPr id="1" name=""/>
-        <p:cNvGrpSpPr/>
-        <p:nvPr/>
-      </p:nvGrpSpPr>
-      <p:grpSpPr>
-        <a:xfrm>
-          <a:off x="0" y="0"/>
-          <a:ext cx="0" cy="0"/>
-          <a:chOff x="0" y="0"/>
-          <a:chExt cx="0" cy="0"/>
-        </a:xfrm>
-      </p:grpSpPr>
-      <p:sp>
-        <p:nvSpPr>
-          <p:cNvPr id="2" name="Shape 0"/>
-          <p:cNvSpPr/>
-          <p:nvPr/>
-        </p:nvSpPr>
-        <p:spPr>
-          <a:xfrm>
-            <a:off x="0" y="0"/>
-            <a:ext cx="109728" cy="5143500"/>
-          </a:xfrm>
-          <a:prstGeom prst="rect">
-            <a:avLst/>
-          </a:prstGeom>
-          <a:solidFill>
-            <a:srgbClr val="02C39A"/>
-          </a:solidFill>
-          <a:ln w="12700">
-            <a:solidFill>
-              <a:srgbClr val="02C39A"/>
-            </a:solidFill>
-            <a:prstDash val="solid"/>
-          </a:ln>
-        </p:spPr>
-      </p:sp>
-      <p:sp>
-        <p:nvSpPr>
-          <p:cNvPr id="3" name="Text 1"/>
-          <p:cNvSpPr/>
-          <p:nvPr/>
-        </p:nvSpPr>
-        <p:spPr>
-          <a:xfrm>
-            <a:off x="457200" y="365760"/>
-            <a:ext cx="7315200" cy="274320"/>
-          </a:xfrm>
-          <a:prstGeom prst="rect">
-            <a:avLst/>
-          </a:prstGeom>
-          <a:noFill/>
-          <a:ln/>
-        </p:spPr>
-        <p:txBody>
-          <a:bodyPr wrap="square" lIns="0" tIns="0" rIns="0" bIns="0" rtlCol="0" anchor="ctr"/>
-          <a:lstStyle/>
-          <a:p>
-            <a:pPr indent="0" marL="0">
-              <a:buNone/>
-            </a:pPr>
-            <a:r>
-              <a:rPr lang="en-US" sz="1100" b="1" spc="400" kern="0" dirty="0">
-                <a:solidFill>
-                  <a:srgbClr val="64748B"/>
-                </a:solidFill>
-                <a:latin typeface="Calibri" pitchFamily="34" charset="0"/>
-                <a:ea typeface="Calibri" pitchFamily="34" charset="-122"/>
-                <a:cs typeface="Calibri" pitchFamily="34" charset="-120"/>
-              </a:rPr>
-              <a:t>07 · Post-P0</a:t>
-            </a:r>
-            <a:endParaRPr lang="en-US" sz="1100" dirty="0"/>
-          </a:p>
-        </p:txBody>
-      </p:sp>
-      <p:sp>
-        <p:nvSpPr>
-          <p:cNvPr id="4" name="Text 2"/>
-          <p:cNvSpPr/>
-          <p:nvPr/>
-        </p:nvSpPr>
-        <p:spPr>
-          <a:xfrm>
-            <a:off x="457200" y="731520"/>
-            <a:ext cx="8229600" cy="777240"/>
-          </a:xfrm>
-          <a:prstGeom prst="rect">
-            <a:avLst/>
-          </a:prstGeom>
-          <a:noFill/>
-          <a:ln/>
-        </p:spPr>
-        <p:txBody>
-          <a:bodyPr wrap="square" lIns="0" tIns="0" rIns="0" bIns="0" rtlCol="0" anchor="ctr"/>
-          <a:lstStyle/>
-          <a:p>
-            <a:pPr indent="0" marL="0">
-              <a:buNone/>
-            </a:pPr>
-            <a:r>
-              <a:rPr lang="en-US" sz="3400" b="1" dirty="0">
-                <a:solidFill>
-                  <a:srgbClr val="1A1F36"/>
-                </a:solidFill>
-                <a:latin typeface="Georgia" pitchFamily="34" charset="0"/>
-                <a:ea typeface="Georgia" pitchFamily="34" charset="-122"/>
-                <a:cs typeface="Georgia" pitchFamily="34" charset="-120"/>
-              </a:rPr>
-              <a:t>Where this goes next.</a:t>
-            </a:r>
-            <a:endParaRPr lang="en-US" sz="3400" dirty="0"/>
-          </a:p>
-        </p:txBody>
-      </p:sp>
-      <p:sp>
-        <p:nvSpPr>
-          <p:cNvPr id="5" name="Shape 3"/>
-          <p:cNvSpPr/>
-          <p:nvPr/>
-        </p:nvSpPr>
-        <p:spPr>
-          <a:xfrm>
-            <a:off x="457200" y="1691640"/>
-            <a:ext cx="4160520" cy="1371600"/>
-          </a:xfrm>
-          <a:prstGeom prst="rect">
-            <a:avLst/>
-          </a:prstGeom>
-          <a:solidFill>
-            <a:srgbClr val="E8EEFC"/>
-          </a:solidFill>
-          <a:ln w="12700">
-            <a:solidFill>
-              <a:srgbClr val="E8EEFC"/>
-            </a:solidFill>
-            <a:prstDash val="solid"/>
-          </a:ln>
-        </p:spPr>
-      </p:sp>
-      <p:sp>
-        <p:nvSpPr>
-          <p:cNvPr id="6" name="Shape 4"/>
-          <p:cNvSpPr/>
-          <p:nvPr/>
-        </p:nvSpPr>
-        <p:spPr>
-          <a:xfrm>
-            <a:off x="457200" y="1691640"/>
-            <a:ext cx="73152" cy="1371600"/>
-          </a:xfrm>
-          <a:prstGeom prst="rect">
-            <a:avLst/>
-          </a:prstGeom>
-          <a:solidFill>
-            <a:srgbClr val="0F1B3D"/>
-          </a:solidFill>
-          <a:ln w="12700">
-            <a:solidFill>
-              <a:srgbClr val="0F1B3D"/>
-            </a:solidFill>
-            <a:prstDash val="solid"/>
-          </a:ln>
-        </p:spPr>
-      </p:sp>
-      <p:sp>
-        <p:nvSpPr>
-          <p:cNvPr id="7" name="Text 5"/>
-          <p:cNvSpPr/>
-          <p:nvPr/>
-        </p:nvSpPr>
-        <p:spPr>
-          <a:xfrm>
-            <a:off x="731520" y="1856232"/>
-            <a:ext cx="3703320" cy="411480"/>
-          </a:xfrm>
-          <a:prstGeom prst="rect">
-            <a:avLst/>
-          </a:prstGeom>
-          <a:noFill/>
-          <a:ln/>
-        </p:spPr>
-        <p:txBody>
-          <a:bodyPr wrap="square" lIns="0" tIns="0" rIns="0" bIns="0" rtlCol="0" anchor="ctr"/>
-          <a:lstStyle/>
-          <a:p>
-            <a:pPr indent="0" marL="0">
-              <a:buNone/>
-            </a:pPr>
-            <a:r>
-              <a:rPr lang="en-US" sz="1700" b="1" dirty="0">
-                <a:solidFill>
-                  <a:srgbClr val="0F1B3D"/>
-                </a:solidFill>
-                <a:latin typeface="Georgia" pitchFamily="34" charset="0"/>
-                <a:ea typeface="Georgia" pitchFamily="34" charset="-122"/>
-                <a:cs typeface="Georgia" pitchFamily="34" charset="-120"/>
-              </a:rPr>
-              <a:t>JIT with Gateway</a:t>
-            </a:r>
-            <a:endParaRPr lang="en-US" sz="1700" dirty="0"/>
-          </a:p>
-        </p:txBody>
-      </p:sp>
-      <p:sp>
-        <p:nvSpPr>
-          <p:cNvPr id="8" name="Text 6"/>
-          <p:cNvSpPr/>
-          <p:nvPr/>
-        </p:nvSpPr>
-        <p:spPr>
-          <a:xfrm>
-            <a:off x="731520" y="2313432"/>
-            <a:ext cx="3703320" cy="658368"/>
-          </a:xfrm>
-          <a:prstGeom prst="rect">
-            <a:avLst/>
-          </a:prstGeom>
-          <a:noFill/>
-          <a:ln/>
-        </p:spPr>
-        <p:txBody>
-          <a:bodyPr wrap="square" lIns="0" tIns="0" rIns="0" bIns="0" rtlCol="0" anchor="ctr"/>
-          <a:lstStyle/>
-          <a:p>
-            <a:pPr indent="0" marL="0">
-              <a:buNone/>
-            </a:pPr>
-            <a:r>
-              <a:rPr lang="en-US" sz="1100" dirty="0">
-                <a:solidFill>
-                  <a:srgbClr val="1A1F36"/>
-                </a:solidFill>
-                <a:latin typeface="Calibri" pitchFamily="34" charset="0"/>
-                <a:ea typeface="Calibri" pitchFamily="34" charset="-122"/>
-                <a:cs typeface="Calibri" pitchFamily="34" charset="-120"/>
-              </a:rPr>
-              <a:t>On-the-fly access grants, with or without human-in-the-loop. Ephemeral, scoped per task.</a:t>
-            </a:r>
-            <a:endParaRPr lang="en-US" sz="1100" dirty="0"/>
-          </a:p>
-        </p:txBody>
-      </p:sp>
-      <p:sp>
-        <p:nvSpPr>
-          <p:cNvPr id="9" name="Shape 7"/>
-          <p:cNvSpPr/>
-          <p:nvPr/>
-        </p:nvSpPr>
-        <p:spPr>
-          <a:xfrm>
-            <a:off x="4800600" y="1691640"/>
-            <a:ext cx="4160520" cy="1371600"/>
-          </a:xfrm>
-          <a:prstGeom prst="rect">
-            <a:avLst/>
-          </a:prstGeom>
-          <a:solidFill>
-            <a:srgbClr val="E8EEFC"/>
-          </a:solidFill>
-          <a:ln w="12700">
-            <a:solidFill>
-              <a:srgbClr val="E8EEFC"/>
-            </a:solidFill>
-            <a:prstDash val="solid"/>
-          </a:ln>
-        </p:spPr>
-      </p:sp>
-      <p:sp>
-        <p:nvSpPr>
-          <p:cNvPr id="10" name="Shape 8"/>
-          <p:cNvSpPr/>
-          <p:nvPr/>
-        </p:nvSpPr>
-        <p:spPr>
-          <a:xfrm>
-            <a:off x="4800600" y="1691640"/>
-            <a:ext cx="73152" cy="1371600"/>
-          </a:xfrm>
-          <a:prstGeom prst="rect">
-            <a:avLst/>
-          </a:prstGeom>
-          <a:solidFill>
-            <a:srgbClr val="0F1B3D"/>
-          </a:solidFill>
-          <a:ln w="12700">
-            <a:solidFill>
-              <a:srgbClr val="0F1B3D"/>
-            </a:solidFill>
-            <a:prstDash val="solid"/>
-          </a:ln>
-        </p:spPr>
-      </p:sp>
-      <p:sp>
-        <p:nvSpPr>
-          <p:cNvPr id="11" name="Text 9"/>
-          <p:cNvSpPr/>
-          <p:nvPr/>
-        </p:nvSpPr>
-        <p:spPr>
-          <a:xfrm>
-            <a:off x="5074920" y="1856232"/>
-            <a:ext cx="3703320" cy="411480"/>
-          </a:xfrm>
-          <a:prstGeom prst="rect">
-            <a:avLst/>
-          </a:prstGeom>
-          <a:noFill/>
-          <a:ln/>
-        </p:spPr>
-        <p:txBody>
-          <a:bodyPr wrap="square" lIns="0" tIns="0" rIns="0" bIns="0" rtlCol="0" anchor="ctr"/>
-          <a:lstStyle/>
-          <a:p>
-            <a:pPr indent="0" marL="0">
-              <a:buNone/>
-            </a:pPr>
-            <a:r>
-              <a:rPr lang="en-US" sz="1700" b="1" dirty="0">
-                <a:solidFill>
-                  <a:srgbClr val="0F1B3D"/>
-                </a:solidFill>
-                <a:latin typeface="Georgia" pitchFamily="34" charset="0"/>
-                <a:ea typeface="Georgia" pitchFamily="34" charset="-122"/>
-                <a:cs typeface="Georgia" pitchFamily="34" charset="-120"/>
-              </a:rPr>
-              <a:t>JML for Agents</a:t>
-            </a:r>
-            <a:endParaRPr lang="en-US" sz="1700" dirty="0"/>
-          </a:p>
-        </p:txBody>
-      </p:sp>
-      <p:sp>
-        <p:nvSpPr>
-          <p:cNvPr id="12" name="Text 10"/>
-          <p:cNvSpPr/>
-          <p:nvPr/>
-        </p:nvSpPr>
-        <p:spPr>
-          <a:xfrm>
-            <a:off x="5074920" y="2313432"/>
-            <a:ext cx="3703320" cy="658368"/>
-          </a:xfrm>
-          <a:prstGeom prst="rect">
-            <a:avLst/>
-          </a:prstGeom>
-          <a:noFill/>
-          <a:ln/>
-        </p:spPr>
-        <p:txBody>
-          <a:bodyPr wrap="square" lIns="0" tIns="0" rIns="0" bIns="0" rtlCol="0" anchor="ctr"/>
-          <a:lstStyle/>
-          <a:p>
-            <a:pPr indent="0" marL="0">
-              <a:buNone/>
-            </a:pPr>
-            <a:r>
-              <a:rPr lang="en-US" sz="1100" dirty="0">
-                <a:solidFill>
-                  <a:srgbClr val="1A1F36"/>
-                </a:solidFill>
-                <a:latin typeface="Calibri" pitchFamily="34" charset="0"/>
-                <a:ea typeface="Calibri" pitchFamily="34" charset="-122"/>
-                <a:cs typeface="Calibri" pitchFamily="34" charset="-120"/>
-              </a:rPr>
-              <a:t>Joiner / mover / leaver lifecycle. Owner offboarded? Their agents don't linger.</a:t>
-            </a:r>
-            <a:endParaRPr lang="en-US" sz="1100" dirty="0"/>
-          </a:p>
-        </p:txBody>
-      </p:sp>
-      <p:sp>
-        <p:nvSpPr>
-          <p:cNvPr id="13" name="Shape 11"/>
-          <p:cNvSpPr/>
-          <p:nvPr/>
-        </p:nvSpPr>
-        <p:spPr>
-          <a:xfrm>
-            <a:off x="457200" y="3246120"/>
-            <a:ext cx="4160520" cy="1371600"/>
-          </a:xfrm>
-          <a:prstGeom prst="rect">
-            <a:avLst/>
-          </a:prstGeom>
-          <a:solidFill>
-            <a:srgbClr val="E8EEFC"/>
-          </a:solidFill>
-          <a:ln w="12700">
-            <a:solidFill>
-              <a:srgbClr val="E8EEFC"/>
-            </a:solidFill>
-            <a:prstDash val="solid"/>
-          </a:ln>
-        </p:spPr>
-      </p:sp>
-      <p:sp>
-        <p:nvSpPr>
-          <p:cNvPr id="14" name="Shape 12"/>
-          <p:cNvSpPr/>
-          <p:nvPr/>
-        </p:nvSpPr>
-        <p:spPr>
-          <a:xfrm>
-            <a:off x="457200" y="3246120"/>
-            <a:ext cx="73152" cy="1371600"/>
-          </a:xfrm>
-          <a:prstGeom prst="rect">
-            <a:avLst/>
-          </a:prstGeom>
-          <a:solidFill>
-            <a:srgbClr val="0F1B3D"/>
-          </a:solidFill>
-          <a:ln w="12700">
-            <a:solidFill>
-              <a:srgbClr val="0F1B3D"/>
-            </a:solidFill>
-            <a:prstDash val="solid"/>
-          </a:ln>
-        </p:spPr>
-      </p:sp>
-      <p:sp>
-        <p:nvSpPr>
-          <p:cNvPr id="15" name="Text 13"/>
-          <p:cNvSpPr/>
-          <p:nvPr/>
-        </p:nvSpPr>
-        <p:spPr>
-          <a:xfrm>
-            <a:off x="731520" y="3410712"/>
-            <a:ext cx="3703320" cy="411480"/>
-          </a:xfrm>
-          <a:prstGeom prst="rect">
-            <a:avLst/>
-          </a:prstGeom>
-          <a:noFill/>
-          <a:ln/>
-        </p:spPr>
-        <p:txBody>
-          <a:bodyPr wrap="square" lIns="0" tIns="0" rIns="0" bIns="0" rtlCol="0" anchor="ctr"/>
-          <a:lstStyle/>
-          <a:p>
-            <a:pPr indent="0" marL="0">
-              <a:buNone/>
-            </a:pPr>
-            <a:r>
-              <a:rPr lang="en-US" sz="1700" b="1" dirty="0">
-                <a:solidFill>
-                  <a:srgbClr val="0F1B3D"/>
-                </a:solidFill>
-                <a:latin typeface="Georgia" pitchFamily="34" charset="0"/>
-                <a:ea typeface="Georgia" pitchFamily="34" charset="-122"/>
-                <a:cs typeface="Georgia" pitchFamily="34" charset="-120"/>
-              </a:rPr>
-              <a:t>Onboarding</a:t>
-            </a:r>
-            <a:endParaRPr lang="en-US" sz="1700" dirty="0"/>
-          </a:p>
-        </p:txBody>
-      </p:sp>
-      <p:sp>
-        <p:nvSpPr>
-          <p:cNvPr id="16" name="Text 14"/>
-          <p:cNvSpPr/>
-          <p:nvPr/>
-        </p:nvSpPr>
-        <p:spPr>
-          <a:xfrm>
-            <a:off x="731520" y="3867912"/>
-            <a:ext cx="3703320" cy="658368"/>
-          </a:xfrm>
-          <a:prstGeom prst="rect">
-            <a:avLst/>
-          </a:prstGeom>
-          <a:noFill/>
-          <a:ln/>
-        </p:spPr>
-        <p:txBody>
-          <a:bodyPr wrap="square" lIns="0" tIns="0" rIns="0" bIns="0" rtlCol="0" anchor="ctr"/>
-          <a:lstStyle/>
-          <a:p>
-            <a:pPr indent="0" marL="0">
-              <a:buNone/>
-            </a:pPr>
-            <a:r>
-              <a:rPr lang="en-US" sz="1100" dirty="0">
-                <a:solidFill>
-                  <a:srgbClr val="1A1F36"/>
-                </a:solidFill>
-                <a:latin typeface="Calibri" pitchFamily="34" charset="0"/>
-                <a:ea typeface="Calibri" pitchFamily="34" charset="-122"/>
-                <a:cs typeface="Calibri" pitchFamily="34" charset="-120"/>
-              </a:rPr>
-              <a:t>UI for connecting apps to the Gateway. Secured setup — self-service, not a services engagement.</a:t>
-            </a:r>
-            <a:endParaRPr lang="en-US" sz="1100" dirty="0"/>
-          </a:p>
-        </p:txBody>
-      </p:sp>
-      <p:sp>
-        <p:nvSpPr>
-          <p:cNvPr id="17" name="Shape 15"/>
-          <p:cNvSpPr/>
-          <p:nvPr/>
-        </p:nvSpPr>
-        <p:spPr>
-          <a:xfrm>
-            <a:off x="4800600" y="3246120"/>
-            <a:ext cx="4160520" cy="1371600"/>
-          </a:xfrm>
-          <a:prstGeom prst="rect">
-            <a:avLst/>
-          </a:prstGeom>
-          <a:solidFill>
-            <a:srgbClr val="E8EEFC"/>
-          </a:solidFill>
-          <a:ln w="12700">
-            <a:solidFill>
-              <a:srgbClr val="E8EEFC"/>
-            </a:solidFill>
-            <a:prstDash val="solid"/>
-          </a:ln>
-        </p:spPr>
-      </p:sp>
-      <p:sp>
-        <p:nvSpPr>
-          <p:cNvPr id="18" name="Shape 16"/>
-          <p:cNvSpPr/>
-          <p:nvPr/>
-        </p:nvSpPr>
-        <p:spPr>
-          <a:xfrm>
-            <a:off x="4800600" y="3246120"/>
-            <a:ext cx="73152" cy="1371600"/>
-          </a:xfrm>
-          <a:prstGeom prst="rect">
-            <a:avLst/>
-          </a:prstGeom>
-          <a:solidFill>
-            <a:srgbClr val="0F1B3D"/>
-          </a:solidFill>
-          <a:ln w="12700">
-            <a:solidFill>
-              <a:srgbClr val="0F1B3D"/>
-            </a:solidFill>
-            <a:prstDash val="solid"/>
-          </a:ln>
-        </p:spPr>
-      </p:sp>
-      <p:sp>
-        <p:nvSpPr>
-          <p:cNvPr id="19" name="Text 17"/>
-          <p:cNvSpPr/>
-          <p:nvPr/>
-        </p:nvSpPr>
-        <p:spPr>
-          <a:xfrm>
-            <a:off x="5074920" y="3410712"/>
-            <a:ext cx="3703320" cy="411480"/>
-          </a:xfrm>
-          <a:prstGeom prst="rect">
-            <a:avLst/>
-          </a:prstGeom>
-          <a:noFill/>
-          <a:ln/>
-        </p:spPr>
-        <p:txBody>
-          <a:bodyPr wrap="square" lIns="0" tIns="0" rIns="0" bIns="0" rtlCol="0" anchor="ctr"/>
-          <a:lstStyle/>
-          <a:p>
-            <a:pPr indent="0" marL="0">
-              <a:buNone/>
-            </a:pPr>
-            <a:r>
-              <a:rPr lang="en-US" sz="1700" b="1" dirty="0">
-                <a:solidFill>
-                  <a:srgbClr val="0F1B3D"/>
-                </a:solidFill>
-                <a:latin typeface="Georgia" pitchFamily="34" charset="0"/>
-                <a:ea typeface="Georgia" pitchFamily="34" charset="-122"/>
-                <a:cs typeface="Georgia" pitchFamily="34" charset="-120"/>
-              </a:rPr>
-              <a:t>Agent Intent</a:t>
-            </a:r>
-            <a:endParaRPr lang="en-US" sz="1700" dirty="0"/>
-          </a:p>
-        </p:txBody>
-      </p:sp>
-      <p:sp>
-        <p:nvSpPr>
-          <p:cNvPr id="20" name="Text 18"/>
-          <p:cNvSpPr/>
-          <p:nvPr/>
-        </p:nvSpPr>
-        <p:spPr>
-          <a:xfrm>
-            <a:off x="5074920" y="3867912"/>
-            <a:ext cx="3703320" cy="658368"/>
-          </a:xfrm>
-          <a:prstGeom prst="rect">
-            <a:avLst/>
-          </a:prstGeom>
-          <a:noFill/>
-          <a:ln/>
-        </p:spPr>
-        <p:txBody>
-          <a:bodyPr wrap="square" lIns="0" tIns="0" rIns="0" bIns="0" rtlCol="0" anchor="ctr"/>
-          <a:lstStyle/>
-          <a:p>
-            <a:pPr indent="0" marL="0">
-              <a:buNone/>
-            </a:pPr>
-            <a:r>
-              <a:rPr lang="en-US" sz="1100" dirty="0">
-                <a:solidFill>
-                  <a:srgbClr val="1A1F36"/>
-                </a:solidFill>
-                <a:latin typeface="Calibri" pitchFamily="34" charset="0"/>
-                <a:ea typeface="Calibri" pitchFamily="34" charset="-122"/>
-                <a:cs typeface="Calibri" pitchFamily="34" charset="-120"/>
-              </a:rPr>
-              <a:t>Identity + behavior + context + data sensitivity, continuously evaluated. The vision horizon.</a:t>
-            </a:r>
-            <a:endParaRPr lang="en-US" sz="1100" dirty="0"/>
-          </a:p>
-        </p:txBody>
-      </p:sp>
-      <p:sp>
-        <p:nvSpPr>
-          <p:cNvPr id="21" name="Text 19"/>
-          <p:cNvSpPr/>
-          <p:nvPr/>
-        </p:nvSpPr>
-        <p:spPr>
-          <a:xfrm>
-            <a:off x="457200" y="4617720"/>
-            <a:ext cx="8229600" cy="274320"/>
-          </a:xfrm>
-          <a:prstGeom prst="rect">
-            <a:avLst/>
-          </a:prstGeom>
-          <a:noFill/>
-          <a:ln/>
-        </p:spPr>
-        <p:txBody>
-          <a:bodyPr wrap="square" lIns="0" tIns="0" rIns="0" bIns="0" rtlCol="0" anchor="ctr"/>
-          <a:lstStyle/>
-          <a:p>
-            <a:pPr algn="ctr" indent="0" marL="0">
-              <a:buNone/>
-            </a:pPr>
-            <a:r>
-              <a:rPr lang="en-US" sz="1100" i="1" dirty="0">
-                <a:solidFill>
-                  <a:srgbClr val="64748B"/>
-                </a:solidFill>
-                <a:latin typeface="Calibri" pitchFamily="34" charset="0"/>
-                <a:ea typeface="Calibri" pitchFamily="34" charset="-122"/>
-                <a:cs typeface="Calibri" pitchFamily="34" charset="-120"/>
-              </a:rPr>
-              <a:t>Sequenced after P0. Omri scopes these in parallel with competitor research.</a:t>
-            </a:r>
-            <a:endParaRPr lang="en-US" sz="1100" dirty="0"/>
-          </a:p>
-        </p:txBody>
-      </p:sp>
-      <p:sp>
-        <p:nvSpPr>
-          <p:cNvPr id="22" name="Text 20"/>
-          <p:cNvSpPr/>
-          <p:nvPr/>
-        </p:nvSpPr>
-        <p:spPr>
-          <a:xfrm>
-            <a:off x="8321040" y="4823460"/>
-            <a:ext cx="457200" cy="228600"/>
-          </a:xfrm>
-          <a:prstGeom prst="rect">
-            <a:avLst/>
-          </a:prstGeom>
-          <a:noFill/>
-          <a:ln/>
-        </p:spPr>
-        <p:txBody>
-          <a:bodyPr wrap="square" lIns="0" tIns="0" rIns="0" bIns="0" rtlCol="0" anchor="ctr"/>
-          <a:lstStyle/>
-          <a:p>
-            <a:pPr algn="r" indent="0" marL="0">
-              <a:buNone/>
-            </a:pPr>
-            <a:r>
-              <a:rPr lang="en-US" sz="900" dirty="0">
-                <a:solidFill>
-                  <a:srgbClr val="64748B"/>
-                </a:solidFill>
-                <a:latin typeface="Calibri" pitchFamily="34" charset="0"/>
-                <a:ea typeface="Calibri" pitchFamily="34" charset="-122"/>
-                <a:cs typeface="Calibri" pitchFamily="34" charset="-120"/>
-              </a:rPr>
-              <a:t>7 / 8</a:t>
-            </a:r>
-            <a:endParaRPr lang="en-US" sz="900" dirty="0"/>
-          </a:p>
-        </p:txBody>
-      </p:sp>
-    </p:spTree>
-  </p:cSld>
-  <p:clrMapOvr>
-    <a:masterClrMapping/>
-  </p:clrMapOvr>
-</p:sld>
-</file>
-
-<file path=ppt/slides/slide8.xml><?xml version="1.0" encoding="utf-8"?>
-<p:sld xmlns:a="http://schemas.openxmlformats.org/drawingml/2006/main" xmlns:r="http://schemas.openxmlformats.org/officeDocument/2006/relationships" xmlns:p="http://schemas.openxmlformats.org/presentationml/2006/main">
-  <p:cSld name="Slide 8">
     <p:bg>
       <p:bgPr>
         <a:solidFill>
@@ -8005,7 +7562,7 @@
                 <a:ea typeface="Calibri" pitchFamily="34" charset="-122"/>
                 <a:cs typeface="Calibri" pitchFamily="34" charset="-120"/>
               </a:rPr>
-              <a:t>08 · What we leave with</a:t>
+              <a:t>06 · What we leave with</a:t>
             </a:r>
             <a:endParaRPr lang="en-US" sz="1100" dirty="0"/>
           </a:p>
@@ -8239,7 +7796,7 @@
                 <a:ea typeface="Calibri" pitchFamily="34" charset="-122"/>
                 <a:cs typeface="Calibri" pitchFamily="34" charset="-120"/>
               </a:rPr>
-              <a:t>Visibility layer started (M1 + M2 in flight)</a:t>
+              <a:t>Discover layer (M1) is done — needs validation against P0</a:t>
             </a:r>
             <a:endParaRPr lang="en-US" sz="1100" dirty="0"/>
           </a:p>
@@ -8746,7 +8303,7 @@
                 <a:ea typeface="Calibri" pitchFamily="34" charset="-122"/>
                 <a:cs typeface="Calibri" pitchFamily="34" charset="-120"/>
               </a:rPr>
-              <a:t>8 / 8</a:t>
+              <a:t>7 / 7</a:t>
             </a:r>
             <a:endParaRPr lang="en-US" sz="900" dirty="0"/>
           </a:p>

--- a/artifacts/eng-prekickoff-2026-04-27.pptx
+++ b/artifacts/eng-prekickoff-2026-04-27.pptx
@@ -3216,7 +3216,7 @@
                 <a:ea typeface="Calibri" pitchFamily="34" charset="-122"/>
                 <a:cs typeface="Calibri" pitchFamily="34" charset="-120"/>
               </a:rPr>
-              <a:t>Race is on: Saviynt, Token Security, Astrix all moving on MCP-layer governance. No customer has asked by name — yet.</a:t>
+              <a:t>Agents are the fastest-growing identity category. We want to be the one-stop shop — this is the moment. Race is on: Saviynt, Token Security, Astrix all converging here.</a:t>
             </a:r>
             <a:endParaRPr lang="en-US" sz="1000" dirty="0"/>
           </a:p>
@@ -3596,7 +3596,7 @@
                 <a:ea typeface="Calibri" pitchFamily="34" charset="-122"/>
                 <a:cs typeface="Calibri" pitchFamily="34" charset="-120"/>
               </a:rPr>
-              <a:t>Eng research starts here</a:t>
+              <a:t>Javier + Omer Blechman · research starts here · what feeds in from M1/M2 = part of this discovery</a:t>
             </a:r>
             <a:endParaRPr lang="en-US" sz="900" dirty="0"/>
           </a:p>
@@ -5047,7 +5047,7 @@
                 <a:ea typeface="Georgia" pitchFamily="34" charset="-122"/>
                 <a:cs typeface="Georgia" pitchFamily="34" charset="-120"/>
               </a:rPr>
-              <a:t>Eng owns Gateway Core POC</a:t>
+              <a:t>Gateway Core POC plan</a:t>
             </a:r>
             <a:endParaRPr lang="en-US" sz="1400" dirty="0"/>
           </a:p>
@@ -5115,7 +5115,7 @@
                 <a:ea typeface="Calibri" pitchFamily="34" charset="-122"/>
                 <a:cs typeface="Calibri" pitchFamily="34" charset="-120"/>
               </a:rPr>
-              <a:t>Options mapped: build vs. adopt</a:t>
+              <a:t>Owners: Javier + Omer Blechman</a:t>
             </a:r>
             <a:endParaRPr lang="en-US" sz="1100" dirty="0"/>
           </a:p>
@@ -5136,7 +5136,7 @@
                 <a:ea typeface="Calibri" pitchFamily="34" charset="-122"/>
                 <a:cs typeface="Calibri" pitchFamily="34" charset="-120"/>
               </a:rPr>
-              <a:t>Coverage trade-offs understood</a:t>
+              <a:t>Options mapped: build vs. adopt</a:t>
             </a:r>
             <a:endParaRPr lang="en-US" sz="1100" dirty="0"/>
           </a:p>
@@ -5157,28 +5157,27 @@
                 <a:ea typeface="Calibri" pitchFamily="34" charset="-122"/>
                 <a:cs typeface="Calibri" pitchFamily="34" charset="-120"/>
               </a:rPr>
-              <a:t>Checkpoint date set (2 weeks out)</a:t>
+              <a:t>What from M1/M2 feeds in</a:t>
             </a:r>
             <a:endParaRPr lang="en-US" sz="1100" dirty="0"/>
           </a:p>
           <a:p>
-            <a:pPr marL="342900" indent="-342900">
+            <a:pPr indent="0" marL="0">
               <a:spcAft>
                 <a:spcPts val="500"/>
               </a:spcAft>
-              <a:buSzPct val="100000"/>
-              <a:buChar char="■"/>
-            </a:pPr>
-            <a:r>
-              <a:rPr lang="en-US" sz="1100" dirty="0">
-                <a:solidFill>
-                  <a:srgbClr val="FFFFFF"/>
-                </a:solidFill>
-                <a:latin typeface="Calibri" pitchFamily="34" charset="0"/>
-                <a:ea typeface="Calibri" pitchFamily="34" charset="-122"/>
-                <a:cs typeface="Calibri" pitchFamily="34" charset="-120"/>
-              </a:rPr>
-              <a:t>Owner named</a:t>
+              <a:buNone/>
+            </a:pPr>
+            <a:r>
+              <a:rPr lang="en-US" sz="1100" b="1" dirty="0">
+                <a:solidFill>
+                  <a:srgbClr val="F59E0B"/>
+                </a:solidFill>
+                <a:latin typeface="Calibri" pitchFamily="34" charset="0"/>
+                <a:ea typeface="Calibri" pitchFamily="34" charset="-122"/>
+                <a:cs typeface="Calibri" pitchFamily="34" charset="-120"/>
+              </a:rPr>
+              <a:t>→ First sync: Wednesday</a:t>
             </a:r>
             <a:endParaRPr lang="en-US" sz="1100" dirty="0"/>
           </a:p>

--- a/artifacts/eng-prekickoff-2026-04-27.pptx
+++ b/artifacts/eng-prekickoff-2026-04-27.pptx
@@ -1691,6 +1691,407 @@
         <p:spPr>
           <a:xfrm>
             <a:off x="457200" y="1554480"/>
+            <a:ext cx="3931920" cy="2560320"/>
+          </a:xfrm>
+          <a:prstGeom prst="rect">
+            <a:avLst/>
+          </a:prstGeom>
+          <a:solidFill>
+            <a:srgbClr val="0F1B3D"/>
+          </a:solidFill>
+          <a:ln w="12700">
+            <a:solidFill>
+              <a:srgbClr val="0F1B3D"/>
+            </a:solidFill>
+            <a:prstDash val="solid"/>
+          </a:ln>
+        </p:spPr>
+      </p:sp>
+      <p:sp>
+        <p:nvSpPr>
+          <p:cNvPr id="6" name="Shape 4"/>
+          <p:cNvSpPr/>
+          <p:nvPr/>
+        </p:nvSpPr>
+        <p:spPr>
+          <a:xfrm>
+            <a:off x="457200" y="1554480"/>
+            <a:ext cx="73152" cy="2560320"/>
+          </a:xfrm>
+          <a:prstGeom prst="rect">
+            <a:avLst/>
+          </a:prstGeom>
+          <a:solidFill>
+            <a:srgbClr val="02C39A"/>
+          </a:solidFill>
+          <a:ln w="12700">
+            <a:solidFill>
+              <a:srgbClr val="02C39A"/>
+            </a:solidFill>
+            <a:prstDash val="solid"/>
+          </a:ln>
+        </p:spPr>
+      </p:sp>
+      <p:sp>
+        <p:nvSpPr>
+          <p:cNvPr id="7" name="Text 5"/>
+          <p:cNvSpPr/>
+          <p:nvPr/>
+        </p:nvSpPr>
+        <p:spPr>
+          <a:xfrm>
+            <a:off x="685800" y="1664208"/>
+            <a:ext cx="3474720" cy="256032"/>
+          </a:xfrm>
+          <a:prstGeom prst="rect">
+            <a:avLst/>
+          </a:prstGeom>
+          <a:noFill/>
+          <a:ln/>
+        </p:spPr>
+        <p:txBody>
+          <a:bodyPr wrap="square" lIns="0" tIns="0" rIns="0" bIns="0" rtlCol="0" anchor="ctr"/>
+          <a:lstStyle/>
+          <a:p>
+            <a:pPr indent="0" marL="0">
+              <a:buNone/>
+            </a:pPr>
+            <a:r>
+              <a:rPr lang="en-US" sz="1000" b="1" spc="300" kern="0" dirty="0">
+                <a:solidFill>
+                  <a:srgbClr val="02C39A"/>
+                </a:solidFill>
+                <a:latin typeface="Calibri" pitchFamily="34" charset="0"/>
+                <a:ea typeface="Calibri" pitchFamily="34" charset="-122"/>
+                <a:cs typeface="Calibri" pitchFamily="34" charset="-120"/>
+              </a:rPr>
+              <a:t>WHAT WE'VE BUILT</a:t>
+            </a:r>
+            <a:endParaRPr lang="en-US" sz="1000" dirty="0"/>
+          </a:p>
+        </p:txBody>
+      </p:sp>
+      <p:sp>
+        <p:nvSpPr>
+          <p:cNvPr id="8" name="Shape 6"/>
+          <p:cNvSpPr/>
+          <p:nvPr/>
+        </p:nvSpPr>
+        <p:spPr>
+          <a:xfrm>
+            <a:off x="713232" y="2075688"/>
+            <a:ext cx="201168" cy="201168"/>
+          </a:xfrm>
+          <a:prstGeom prst="ellipse">
+            <a:avLst/>
+          </a:prstGeom>
+          <a:solidFill>
+            <a:srgbClr val="02C39A"/>
+          </a:solidFill>
+          <a:ln w="12700">
+            <a:solidFill>
+              <a:srgbClr val="02C39A"/>
+            </a:solidFill>
+            <a:prstDash val="solid"/>
+          </a:ln>
+        </p:spPr>
+      </p:sp>
+      <p:sp>
+        <p:nvSpPr>
+          <p:cNvPr id="9" name="Text 7"/>
+          <p:cNvSpPr/>
+          <p:nvPr/>
+        </p:nvSpPr>
+        <p:spPr>
+          <a:xfrm>
+            <a:off x="1005840" y="2011680"/>
+            <a:ext cx="3200400" cy="457200"/>
+          </a:xfrm>
+          <a:prstGeom prst="rect">
+            <a:avLst/>
+          </a:prstGeom>
+          <a:noFill/>
+          <a:ln/>
+        </p:spPr>
+        <p:txBody>
+          <a:bodyPr wrap="square" lIns="0" tIns="0" rIns="0" bIns="0" rtlCol="0" anchor="ctr"/>
+          <a:lstStyle/>
+          <a:p>
+            <a:pPr indent="0" marL="0">
+              <a:buNone/>
+            </a:pPr>
+            <a:r>
+              <a:rPr lang="en-US" sz="1200" b="1" dirty="0">
+                <a:solidFill>
+                  <a:srgbClr val="FFFFFF"/>
+                </a:solidFill>
+                <a:latin typeface="Calibri" pitchFamily="34" charset="0"/>
+                <a:ea typeface="Calibri" pitchFamily="34" charset="-122"/>
+                <a:cs typeface="Calibri" pitchFamily="34" charset="-120"/>
+              </a:rPr>
+              <a:t>Agent graph model  </a:t>
+            </a:r>
+            <a:pPr indent="0" marL="0">
+              <a:buNone/>
+            </a:pPr>
+            <a:r>
+              <a:rPr lang="en-US" sz="1100" dirty="0">
+                <a:solidFill>
+                  <a:srgbClr val="E8EEFC"/>
+                </a:solidFill>
+                <a:latin typeface="Calibri" pitchFamily="34" charset="0"/>
+                <a:ea typeface="Calibri" pitchFamily="34" charset="-122"/>
+                <a:cs typeface="Calibri" pitchFamily="34" charset="-120"/>
+              </a:rPr>
+              <a:t>First-class entity</a:t>
+            </a:r>
+            <a:endParaRPr lang="en-US" sz="1200" dirty="0"/>
+          </a:p>
+        </p:txBody>
+      </p:sp>
+      <p:sp>
+        <p:nvSpPr>
+          <p:cNvPr id="10" name="Shape 8"/>
+          <p:cNvSpPr/>
+          <p:nvPr/>
+        </p:nvSpPr>
+        <p:spPr>
+          <a:xfrm>
+            <a:off x="713232" y="2578608"/>
+            <a:ext cx="201168" cy="201168"/>
+          </a:xfrm>
+          <a:prstGeom prst="ellipse">
+            <a:avLst/>
+          </a:prstGeom>
+          <a:solidFill>
+            <a:srgbClr val="02C39A"/>
+          </a:solidFill>
+          <a:ln w="12700">
+            <a:solidFill>
+              <a:srgbClr val="02C39A"/>
+            </a:solidFill>
+            <a:prstDash val="solid"/>
+          </a:ln>
+        </p:spPr>
+      </p:sp>
+      <p:sp>
+        <p:nvSpPr>
+          <p:cNvPr id="11" name="Text 9"/>
+          <p:cNvSpPr/>
+          <p:nvPr/>
+        </p:nvSpPr>
+        <p:spPr>
+          <a:xfrm>
+            <a:off x="1005840" y="2514600"/>
+            <a:ext cx="3200400" cy="457200"/>
+          </a:xfrm>
+          <a:prstGeom prst="rect">
+            <a:avLst/>
+          </a:prstGeom>
+          <a:noFill/>
+          <a:ln/>
+        </p:spPr>
+        <p:txBody>
+          <a:bodyPr wrap="square" lIns="0" tIns="0" rIns="0" bIns="0" rtlCol="0" anchor="ctr"/>
+          <a:lstStyle/>
+          <a:p>
+            <a:pPr indent="0" marL="0">
+              <a:buNone/>
+            </a:pPr>
+            <a:r>
+              <a:rPr lang="en-US" sz="1200" b="1" dirty="0">
+                <a:solidFill>
+                  <a:srgbClr val="FFFFFF"/>
+                </a:solidFill>
+                <a:latin typeface="Calibri" pitchFamily="34" charset="0"/>
+                <a:ea typeface="Calibri" pitchFamily="34" charset="-122"/>
+                <a:cs typeface="Calibri" pitchFamily="34" charset="-120"/>
+              </a:rPr>
+              <a:t>Discovery &gt; Agents UI  </a:t>
+            </a:r>
+            <a:pPr indent="0" marL="0">
+              <a:buNone/>
+            </a:pPr>
+            <a:r>
+              <a:rPr lang="en-US" sz="1100" dirty="0">
+                <a:solidFill>
+                  <a:srgbClr val="E8EEFC"/>
+                </a:solidFill>
+                <a:latin typeface="Calibri" pitchFamily="34" charset="0"/>
+                <a:ea typeface="Calibri" pitchFamily="34" charset="-122"/>
+                <a:cs typeface="Calibri" pitchFamily="34" charset="-120"/>
+              </a:rPr>
+              <a:t>Live data</a:t>
+            </a:r>
+            <a:endParaRPr lang="en-US" sz="1200" dirty="0"/>
+          </a:p>
+        </p:txBody>
+      </p:sp>
+      <p:sp>
+        <p:nvSpPr>
+          <p:cNvPr id="12" name="Shape 10"/>
+          <p:cNvSpPr/>
+          <p:nvPr/>
+        </p:nvSpPr>
+        <p:spPr>
+          <a:xfrm>
+            <a:off x="713232" y="3081528"/>
+            <a:ext cx="201168" cy="201168"/>
+          </a:xfrm>
+          <a:prstGeom prst="ellipse">
+            <a:avLst/>
+          </a:prstGeom>
+          <a:solidFill>
+            <a:srgbClr val="02C39A"/>
+          </a:solidFill>
+          <a:ln w="12700">
+            <a:solidFill>
+              <a:srgbClr val="02C39A"/>
+            </a:solidFill>
+            <a:prstDash val="solid"/>
+          </a:ln>
+        </p:spPr>
+      </p:sp>
+      <p:sp>
+        <p:nvSpPr>
+          <p:cNvPr id="13" name="Text 11"/>
+          <p:cNvSpPr/>
+          <p:nvPr/>
+        </p:nvSpPr>
+        <p:spPr>
+          <a:xfrm>
+            <a:off x="1005840" y="3017520"/>
+            <a:ext cx="3200400" cy="457200"/>
+          </a:xfrm>
+          <a:prstGeom prst="rect">
+            <a:avLst/>
+          </a:prstGeom>
+          <a:noFill/>
+          <a:ln/>
+        </p:spPr>
+        <p:txBody>
+          <a:bodyPr wrap="square" lIns="0" tIns="0" rIns="0" bIns="0" rtlCol="0" anchor="ctr"/>
+          <a:lstStyle/>
+          <a:p>
+            <a:pPr indent="0" marL="0">
+              <a:buNone/>
+            </a:pPr>
+            <a:r>
+              <a:rPr lang="en-US" sz="1200" b="1" dirty="0">
+                <a:solidFill>
+                  <a:srgbClr val="FFFFFF"/>
+                </a:solidFill>
+                <a:latin typeface="Calibri" pitchFamily="34" charset="0"/>
+                <a:ea typeface="Calibri" pitchFamily="34" charset="-122"/>
+                <a:cs typeface="Calibri" pitchFamily="34" charset="-120"/>
+              </a:rPr>
+              <a:t>Connectors  </a:t>
+            </a:r>
+            <a:pPr indent="0" marL="0">
+              <a:buNone/>
+            </a:pPr>
+            <a:r>
+              <a:rPr lang="en-US" sz="1100" dirty="0">
+                <a:solidFill>
+                  <a:srgbClr val="E8EEFC"/>
+                </a:solidFill>
+                <a:latin typeface="Calibri" pitchFamily="34" charset="0"/>
+                <a:ea typeface="Calibri" pitchFamily="34" charset="-122"/>
+                <a:cs typeface="Calibri" pitchFamily="34" charset="-120"/>
+              </a:rPr>
+              <a:t>Gemini · Vertex AI · Bedrock · n8n</a:t>
+            </a:r>
+            <a:endParaRPr lang="en-US" sz="1200" dirty="0"/>
+          </a:p>
+        </p:txBody>
+      </p:sp>
+      <p:sp>
+        <p:nvSpPr>
+          <p:cNvPr id="14" name="Shape 12"/>
+          <p:cNvSpPr/>
+          <p:nvPr/>
+        </p:nvSpPr>
+        <p:spPr>
+          <a:xfrm>
+            <a:off x="713232" y="3584448"/>
+            <a:ext cx="201168" cy="201168"/>
+          </a:xfrm>
+          <a:prstGeom prst="ellipse">
+            <a:avLst/>
+          </a:prstGeom>
+          <a:solidFill>
+            <a:srgbClr val="02C39A"/>
+          </a:solidFill>
+          <a:ln w="12700">
+            <a:solidFill>
+              <a:srgbClr val="02C39A"/>
+            </a:solidFill>
+            <a:prstDash val="solid"/>
+          </a:ln>
+        </p:spPr>
+      </p:sp>
+      <p:sp>
+        <p:nvSpPr>
+          <p:cNvPr id="15" name="Text 13"/>
+          <p:cNvSpPr/>
+          <p:nvPr/>
+        </p:nvSpPr>
+        <p:spPr>
+          <a:xfrm>
+            <a:off x="1005840" y="3520440"/>
+            <a:ext cx="3200400" cy="457200"/>
+          </a:xfrm>
+          <a:prstGeom prst="rect">
+            <a:avLst/>
+          </a:prstGeom>
+          <a:noFill/>
+          <a:ln/>
+        </p:spPr>
+        <p:txBody>
+          <a:bodyPr wrap="square" lIns="0" tIns="0" rIns="0" bIns="0" rtlCol="0" anchor="ctr"/>
+          <a:lstStyle/>
+          <a:p>
+            <a:pPr indent="0" marL="0">
+              <a:buNone/>
+            </a:pPr>
+            <a:r>
+              <a:rPr lang="en-US" sz="1200" b="1" dirty="0">
+                <a:solidFill>
+                  <a:srgbClr val="FFFFFF"/>
+                </a:solidFill>
+                <a:latin typeface="Calibri" pitchFamily="34" charset="0"/>
+                <a:ea typeface="Calibri" pitchFamily="34" charset="-122"/>
+                <a:cs typeface="Calibri" pitchFamily="34" charset="-120"/>
+              </a:rPr>
+              <a:t>Built-in issues  </a:t>
+            </a:r>
+            <a:pPr indent="0" marL="0">
+              <a:buNone/>
+            </a:pPr>
+            <a:r>
+              <a:rPr lang="en-US" sz="1100" dirty="0">
+                <a:solidFill>
+                  <a:srgbClr val="E8EEFC"/>
+                </a:solidFill>
+                <a:latin typeface="Calibri" pitchFamily="34" charset="0"/>
+                <a:ea typeface="Calibri" pitchFamily="34" charset="-122"/>
+                <a:cs typeface="Calibri" pitchFamily="34" charset="-120"/>
+              </a:rPr>
+              <a:t>AGENT_EXCESSIVE_PERMISSIONS, AGENT_OWNER_OFFBOARDED</a:t>
+            </a:r>
+            <a:endParaRPr lang="en-US" sz="1200" dirty="0"/>
+          </a:p>
+        </p:txBody>
+      </p:sp>
+      <p:sp>
+        <p:nvSpPr>
+          <p:cNvPr id="16" name="Shape 14"/>
+          <p:cNvSpPr/>
+          <p:nvPr/>
+        </p:nvSpPr>
+        <p:spPr>
+          <a:xfrm>
+            <a:off x="4572000" y="1554480"/>
             <a:ext cx="4114800" cy="2560320"/>
           </a:xfrm>
           <a:prstGeom prst="rect">
@@ -1709,13 +2110,13 @@
       </p:sp>
       <p:sp>
         <p:nvSpPr>
-          <p:cNvPr id="6" name="Shape 4"/>
-          <p:cNvSpPr/>
-          <p:nvPr/>
-        </p:nvSpPr>
-        <p:spPr>
-          <a:xfrm>
-            <a:off x="457200" y="1554480"/>
+          <p:cNvPr id="17" name="Shape 15"/>
+          <p:cNvSpPr/>
+          <p:nvPr/>
+        </p:nvSpPr>
+        <p:spPr>
+          <a:xfrm>
+            <a:off x="4572000" y="1554480"/>
             <a:ext cx="73152" cy="2560320"/>
           </a:xfrm>
           <a:prstGeom prst="rect">
@@ -1734,13 +2135,13 @@
       </p:sp>
       <p:sp>
         <p:nvSpPr>
-          <p:cNvPr id="7" name="Text 5"/>
-          <p:cNvSpPr/>
-          <p:nvPr/>
-        </p:nvSpPr>
-        <p:spPr>
-          <a:xfrm>
-            <a:off x="685800" y="1664208"/>
+          <p:cNvPr id="18" name="Text 16"/>
+          <p:cNvSpPr/>
+          <p:nvPr/>
+        </p:nvSpPr>
+        <p:spPr>
+          <a:xfrm>
+            <a:off x="4800600" y="1664208"/>
             <a:ext cx="3657600" cy="256032"/>
           </a:xfrm>
           <a:prstGeom prst="rect">
@@ -1765,7 +2166,7 @@
                 <a:ea typeface="Calibri" pitchFamily="34" charset="-122"/>
                 <a:cs typeface="Calibri" pitchFamily="34" charset="-120"/>
               </a:rPr>
-              <a:t>THE PROBLEM</a:t>
+              <a:t>THE GAP</a:t>
             </a:r>
             <a:endParaRPr lang="en-US" sz="1000" dirty="0"/>
           </a:p>
@@ -1773,13 +2174,13 @@
       </p:sp>
       <p:sp>
         <p:nvSpPr>
-          <p:cNvPr id="8" name="Text 6"/>
-          <p:cNvSpPr/>
-          <p:nvPr/>
-        </p:nvSpPr>
-        <p:spPr>
-          <a:xfrm>
-            <a:off x="685800" y="1993392"/>
+          <p:cNvPr id="19" name="Text 17"/>
+          <p:cNvSpPr/>
+          <p:nvPr/>
+        </p:nvSpPr>
+        <p:spPr>
+          <a:xfrm>
+            <a:off x="4800600" y="1993392"/>
             <a:ext cx="3657600" cy="1920240"/>
           </a:xfrm>
           <a:prstGeom prst="rect">
@@ -1804,7 +2205,7 @@
                 <a:ea typeface="Calibri" pitchFamily="34" charset="-122"/>
                 <a:cs typeface="Calibri" pitchFamily="34" charset="-120"/>
               </a:rPr>
-              <a:t>Enterprises now run more agents than humans — 144 : 1.</a:t>
+              <a:t>144 : 1 — more agents than humans in the average enterprise.</a:t>
             </a:r>
             <a:endParaRPr lang="en-US" sz="1300" dirty="0"/>
           </a:p>
@@ -1838,7 +2239,7 @@
                 <a:ea typeface="Calibri" pitchFamily="34" charset="-122"/>
                 <a:cs typeface="Calibri" pitchFamily="34" charset="-120"/>
               </a:rPr>
-              <a:t>Existing IAM and PAM tools were built for humans and NHIs. They don't govern agents that spin up in seconds, chain through tools, and decide at runtime.</a:t>
+              <a:t>IAM and PAM tools were built for humans and NHIs. They don't govern agents that spin up in seconds, chain through tools, and decide at runtime.</a:t>
             </a:r>
             <a:endParaRPr lang="en-US" sz="1300" dirty="0"/>
           </a:p>
@@ -1875,407 +2276,6 @@
               <a:t>No visibility. No policy. No audit trail.</a:t>
             </a:r>
             <a:endParaRPr lang="en-US" sz="1300" dirty="0"/>
-          </a:p>
-        </p:txBody>
-      </p:sp>
-      <p:sp>
-        <p:nvSpPr>
-          <p:cNvPr id="9" name="Shape 7"/>
-          <p:cNvSpPr/>
-          <p:nvPr/>
-        </p:nvSpPr>
-        <p:spPr>
-          <a:xfrm>
-            <a:off x="4754880" y="1554480"/>
-            <a:ext cx="3931920" cy="2560320"/>
-          </a:xfrm>
-          <a:prstGeom prst="rect">
-            <a:avLst/>
-          </a:prstGeom>
-          <a:solidFill>
-            <a:srgbClr val="0F1B3D"/>
-          </a:solidFill>
-          <a:ln w="12700">
-            <a:solidFill>
-              <a:srgbClr val="0F1B3D"/>
-            </a:solidFill>
-            <a:prstDash val="solid"/>
-          </a:ln>
-        </p:spPr>
-      </p:sp>
-      <p:sp>
-        <p:nvSpPr>
-          <p:cNvPr id="10" name="Shape 8"/>
-          <p:cNvSpPr/>
-          <p:nvPr/>
-        </p:nvSpPr>
-        <p:spPr>
-          <a:xfrm>
-            <a:off x="4754880" y="1554480"/>
-            <a:ext cx="73152" cy="2560320"/>
-          </a:xfrm>
-          <a:prstGeom prst="rect">
-            <a:avLst/>
-          </a:prstGeom>
-          <a:solidFill>
-            <a:srgbClr val="02C39A"/>
-          </a:solidFill>
-          <a:ln w="12700">
-            <a:solidFill>
-              <a:srgbClr val="02C39A"/>
-            </a:solidFill>
-            <a:prstDash val="solid"/>
-          </a:ln>
-        </p:spPr>
-      </p:sp>
-      <p:sp>
-        <p:nvSpPr>
-          <p:cNvPr id="11" name="Text 9"/>
-          <p:cNvSpPr/>
-          <p:nvPr/>
-        </p:nvSpPr>
-        <p:spPr>
-          <a:xfrm>
-            <a:off x="4983480" y="1664208"/>
-            <a:ext cx="3474720" cy="256032"/>
-          </a:xfrm>
-          <a:prstGeom prst="rect">
-            <a:avLst/>
-          </a:prstGeom>
-          <a:noFill/>
-          <a:ln/>
-        </p:spPr>
-        <p:txBody>
-          <a:bodyPr wrap="square" lIns="0" tIns="0" rIns="0" bIns="0" rtlCol="0" anchor="ctr"/>
-          <a:lstStyle/>
-          <a:p>
-            <a:pPr indent="0" marL="0">
-              <a:buNone/>
-            </a:pPr>
-            <a:r>
-              <a:rPr lang="en-US" sz="1000" b="1" spc="300" kern="0" dirty="0">
-                <a:solidFill>
-                  <a:srgbClr val="02C39A"/>
-                </a:solidFill>
-                <a:latin typeface="Calibri" pitchFamily="34" charset="0"/>
-                <a:ea typeface="Calibri" pitchFamily="34" charset="-122"/>
-                <a:cs typeface="Calibri" pitchFamily="34" charset="-120"/>
-              </a:rPr>
-              <a:t>WHAT WE'VE BUILT</a:t>
-            </a:r>
-            <a:endParaRPr lang="en-US" sz="1000" dirty="0"/>
-          </a:p>
-        </p:txBody>
-      </p:sp>
-      <p:sp>
-        <p:nvSpPr>
-          <p:cNvPr id="12" name="Shape 10"/>
-          <p:cNvSpPr/>
-          <p:nvPr/>
-        </p:nvSpPr>
-        <p:spPr>
-          <a:xfrm>
-            <a:off x="5010912" y="2075688"/>
-            <a:ext cx="201168" cy="201168"/>
-          </a:xfrm>
-          <a:prstGeom prst="ellipse">
-            <a:avLst/>
-          </a:prstGeom>
-          <a:solidFill>
-            <a:srgbClr val="02C39A"/>
-          </a:solidFill>
-          <a:ln w="12700">
-            <a:solidFill>
-              <a:srgbClr val="02C39A"/>
-            </a:solidFill>
-            <a:prstDash val="solid"/>
-          </a:ln>
-        </p:spPr>
-      </p:sp>
-      <p:sp>
-        <p:nvSpPr>
-          <p:cNvPr id="13" name="Text 11"/>
-          <p:cNvSpPr/>
-          <p:nvPr/>
-        </p:nvSpPr>
-        <p:spPr>
-          <a:xfrm>
-            <a:off x="5303520" y="2011680"/>
-            <a:ext cx="3200400" cy="457200"/>
-          </a:xfrm>
-          <a:prstGeom prst="rect">
-            <a:avLst/>
-          </a:prstGeom>
-          <a:noFill/>
-          <a:ln/>
-        </p:spPr>
-        <p:txBody>
-          <a:bodyPr wrap="square" lIns="0" tIns="0" rIns="0" bIns="0" rtlCol="0" anchor="ctr"/>
-          <a:lstStyle/>
-          <a:p>
-            <a:pPr indent="0" marL="0">
-              <a:buNone/>
-            </a:pPr>
-            <a:r>
-              <a:rPr lang="en-US" sz="1200" b="1" dirty="0">
-                <a:solidFill>
-                  <a:srgbClr val="FFFFFF"/>
-                </a:solidFill>
-                <a:latin typeface="Calibri" pitchFamily="34" charset="0"/>
-                <a:ea typeface="Calibri" pitchFamily="34" charset="-122"/>
-                <a:cs typeface="Calibri" pitchFamily="34" charset="-120"/>
-              </a:rPr>
-              <a:t>Agent graph model  </a:t>
-            </a:r>
-            <a:pPr indent="0" marL="0">
-              <a:buNone/>
-            </a:pPr>
-            <a:r>
-              <a:rPr lang="en-US" sz="1100" dirty="0">
-                <a:solidFill>
-                  <a:srgbClr val="E8EEFC"/>
-                </a:solidFill>
-                <a:latin typeface="Calibri" pitchFamily="34" charset="0"/>
-                <a:ea typeface="Calibri" pitchFamily="34" charset="-122"/>
-                <a:cs typeface="Calibri" pitchFamily="34" charset="-120"/>
-              </a:rPr>
-              <a:t>First-class entity</a:t>
-            </a:r>
-            <a:endParaRPr lang="en-US" sz="1200" dirty="0"/>
-          </a:p>
-        </p:txBody>
-      </p:sp>
-      <p:sp>
-        <p:nvSpPr>
-          <p:cNvPr id="14" name="Shape 12"/>
-          <p:cNvSpPr/>
-          <p:nvPr/>
-        </p:nvSpPr>
-        <p:spPr>
-          <a:xfrm>
-            <a:off x="5010912" y="2578608"/>
-            <a:ext cx="201168" cy="201168"/>
-          </a:xfrm>
-          <a:prstGeom prst="ellipse">
-            <a:avLst/>
-          </a:prstGeom>
-          <a:solidFill>
-            <a:srgbClr val="02C39A"/>
-          </a:solidFill>
-          <a:ln w="12700">
-            <a:solidFill>
-              <a:srgbClr val="02C39A"/>
-            </a:solidFill>
-            <a:prstDash val="solid"/>
-          </a:ln>
-        </p:spPr>
-      </p:sp>
-      <p:sp>
-        <p:nvSpPr>
-          <p:cNvPr id="15" name="Text 13"/>
-          <p:cNvSpPr/>
-          <p:nvPr/>
-        </p:nvSpPr>
-        <p:spPr>
-          <a:xfrm>
-            <a:off x="5303520" y="2514600"/>
-            <a:ext cx="3200400" cy="457200"/>
-          </a:xfrm>
-          <a:prstGeom prst="rect">
-            <a:avLst/>
-          </a:prstGeom>
-          <a:noFill/>
-          <a:ln/>
-        </p:spPr>
-        <p:txBody>
-          <a:bodyPr wrap="square" lIns="0" tIns="0" rIns="0" bIns="0" rtlCol="0" anchor="ctr"/>
-          <a:lstStyle/>
-          <a:p>
-            <a:pPr indent="0" marL="0">
-              <a:buNone/>
-            </a:pPr>
-            <a:r>
-              <a:rPr lang="en-US" sz="1200" b="1" dirty="0">
-                <a:solidFill>
-                  <a:srgbClr val="FFFFFF"/>
-                </a:solidFill>
-                <a:latin typeface="Calibri" pitchFamily="34" charset="0"/>
-                <a:ea typeface="Calibri" pitchFamily="34" charset="-122"/>
-                <a:cs typeface="Calibri" pitchFamily="34" charset="-120"/>
-              </a:rPr>
-              <a:t>Discovery &gt; Agents UI  </a:t>
-            </a:r>
-            <a:pPr indent="0" marL="0">
-              <a:buNone/>
-            </a:pPr>
-            <a:r>
-              <a:rPr lang="en-US" sz="1100" dirty="0">
-                <a:solidFill>
-                  <a:srgbClr val="E8EEFC"/>
-                </a:solidFill>
-                <a:latin typeface="Calibri" pitchFamily="34" charset="0"/>
-                <a:ea typeface="Calibri" pitchFamily="34" charset="-122"/>
-                <a:cs typeface="Calibri" pitchFamily="34" charset="-120"/>
-              </a:rPr>
-              <a:t>Live data</a:t>
-            </a:r>
-            <a:endParaRPr lang="en-US" sz="1200" dirty="0"/>
-          </a:p>
-        </p:txBody>
-      </p:sp>
-      <p:sp>
-        <p:nvSpPr>
-          <p:cNvPr id="16" name="Shape 14"/>
-          <p:cNvSpPr/>
-          <p:nvPr/>
-        </p:nvSpPr>
-        <p:spPr>
-          <a:xfrm>
-            <a:off x="5010912" y="3081528"/>
-            <a:ext cx="201168" cy="201168"/>
-          </a:xfrm>
-          <a:prstGeom prst="ellipse">
-            <a:avLst/>
-          </a:prstGeom>
-          <a:solidFill>
-            <a:srgbClr val="02C39A"/>
-          </a:solidFill>
-          <a:ln w="12700">
-            <a:solidFill>
-              <a:srgbClr val="02C39A"/>
-            </a:solidFill>
-            <a:prstDash val="solid"/>
-          </a:ln>
-        </p:spPr>
-      </p:sp>
-      <p:sp>
-        <p:nvSpPr>
-          <p:cNvPr id="17" name="Text 15"/>
-          <p:cNvSpPr/>
-          <p:nvPr/>
-        </p:nvSpPr>
-        <p:spPr>
-          <a:xfrm>
-            <a:off x="5303520" y="3017520"/>
-            <a:ext cx="3200400" cy="457200"/>
-          </a:xfrm>
-          <a:prstGeom prst="rect">
-            <a:avLst/>
-          </a:prstGeom>
-          <a:noFill/>
-          <a:ln/>
-        </p:spPr>
-        <p:txBody>
-          <a:bodyPr wrap="square" lIns="0" tIns="0" rIns="0" bIns="0" rtlCol="0" anchor="ctr"/>
-          <a:lstStyle/>
-          <a:p>
-            <a:pPr indent="0" marL="0">
-              <a:buNone/>
-            </a:pPr>
-            <a:r>
-              <a:rPr lang="en-US" sz="1200" b="1" dirty="0">
-                <a:solidFill>
-                  <a:srgbClr val="FFFFFF"/>
-                </a:solidFill>
-                <a:latin typeface="Calibri" pitchFamily="34" charset="0"/>
-                <a:ea typeface="Calibri" pitchFamily="34" charset="-122"/>
-                <a:cs typeface="Calibri" pitchFamily="34" charset="-120"/>
-              </a:rPr>
-              <a:t>Connectors  </a:t>
-            </a:r>
-            <a:pPr indent="0" marL="0">
-              <a:buNone/>
-            </a:pPr>
-            <a:r>
-              <a:rPr lang="en-US" sz="1100" dirty="0">
-                <a:solidFill>
-                  <a:srgbClr val="E8EEFC"/>
-                </a:solidFill>
-                <a:latin typeface="Calibri" pitchFamily="34" charset="0"/>
-                <a:ea typeface="Calibri" pitchFamily="34" charset="-122"/>
-                <a:cs typeface="Calibri" pitchFamily="34" charset="-120"/>
-              </a:rPr>
-              <a:t>Gemini · Vertex AI · Bedrock · n8n</a:t>
-            </a:r>
-            <a:endParaRPr lang="en-US" sz="1200" dirty="0"/>
-          </a:p>
-        </p:txBody>
-      </p:sp>
-      <p:sp>
-        <p:nvSpPr>
-          <p:cNvPr id="18" name="Shape 16"/>
-          <p:cNvSpPr/>
-          <p:nvPr/>
-        </p:nvSpPr>
-        <p:spPr>
-          <a:xfrm>
-            <a:off x="5010912" y="3584448"/>
-            <a:ext cx="201168" cy="201168"/>
-          </a:xfrm>
-          <a:prstGeom prst="ellipse">
-            <a:avLst/>
-          </a:prstGeom>
-          <a:solidFill>
-            <a:srgbClr val="02C39A"/>
-          </a:solidFill>
-          <a:ln w="12700">
-            <a:solidFill>
-              <a:srgbClr val="02C39A"/>
-            </a:solidFill>
-            <a:prstDash val="solid"/>
-          </a:ln>
-        </p:spPr>
-      </p:sp>
-      <p:sp>
-        <p:nvSpPr>
-          <p:cNvPr id="19" name="Text 17"/>
-          <p:cNvSpPr/>
-          <p:nvPr/>
-        </p:nvSpPr>
-        <p:spPr>
-          <a:xfrm>
-            <a:off x="5303520" y="3520440"/>
-            <a:ext cx="3200400" cy="457200"/>
-          </a:xfrm>
-          <a:prstGeom prst="rect">
-            <a:avLst/>
-          </a:prstGeom>
-          <a:noFill/>
-          <a:ln/>
-        </p:spPr>
-        <p:txBody>
-          <a:bodyPr wrap="square" lIns="0" tIns="0" rIns="0" bIns="0" rtlCol="0" anchor="ctr"/>
-          <a:lstStyle/>
-          <a:p>
-            <a:pPr indent="0" marL="0">
-              <a:buNone/>
-            </a:pPr>
-            <a:r>
-              <a:rPr lang="en-US" sz="1200" b="1" dirty="0">
-                <a:solidFill>
-                  <a:srgbClr val="FFFFFF"/>
-                </a:solidFill>
-                <a:latin typeface="Calibri" pitchFamily="34" charset="0"/>
-                <a:ea typeface="Calibri" pitchFamily="34" charset="-122"/>
-                <a:cs typeface="Calibri" pitchFamily="34" charset="-120"/>
-              </a:rPr>
-              <a:t>Built-in issues  </a:t>
-            </a:r>
-            <a:pPr indent="0" marL="0">
-              <a:buNone/>
-            </a:pPr>
-            <a:r>
-              <a:rPr lang="en-US" sz="1100" dirty="0">
-                <a:solidFill>
-                  <a:srgbClr val="E8EEFC"/>
-                </a:solidFill>
-                <a:latin typeface="Calibri" pitchFamily="34" charset="0"/>
-                <a:ea typeface="Calibri" pitchFamily="34" charset="-122"/>
-                <a:cs typeface="Calibri" pitchFamily="34" charset="-120"/>
-              </a:rPr>
-              <a:t>AGENT_EXCESSIVE_PERMISSIONS, AGENT_OWNER_OFFBOARDED</a:t>
-            </a:r>
-            <a:endParaRPr lang="en-US" sz="1200" dirty="0"/>
           </a:p>
         </p:txBody>
       </p:sp>
@@ -3216,7 +3216,7 @@
                 <a:ea typeface="Calibri" pitchFamily="34" charset="-122"/>
                 <a:cs typeface="Calibri" pitchFamily="34" charset="-120"/>
               </a:rPr>
-              <a:t>Agents are the fastest-growing identity category. We want to be the one-stop shop — this is the moment. Race is on: Saviynt, Token Security, Astrix all converging here.</a:t>
+              <a:t>Agents are the fastest-growing identity category — we want to be the one-stop shop. If Saviynt or Token Security defines MCP governance at Identiverse and we don't show up, that category is theirs.</a:t>
             </a:r>
             <a:endParaRPr lang="en-US" sz="1000" dirty="0"/>
           </a:p>
@@ -5136,7 +5136,7 @@
                 <a:ea typeface="Calibri" pitchFamily="34" charset="-122"/>
                 <a:cs typeface="Calibri" pitchFamily="34" charset="-120"/>
               </a:rPr>
-              <a:t>Options mapped: build vs. adopt</a:t>
+              <a:t>Options: build vs. adopt · M1/M2 inputs</a:t>
             </a:r>
             <a:endParaRPr lang="en-US" sz="1100" dirty="0"/>
           </a:p>
@@ -5157,7 +5157,7 @@
                 <a:ea typeface="Calibri" pitchFamily="34" charset="-122"/>
                 <a:cs typeface="Calibri" pitchFamily="34" charset="-120"/>
               </a:rPr>
-              <a:t>What from M1/M2 feeds in</a:t>
+              <a:t>Apr 27 research → May 11 POC check</a:t>
             </a:r>
             <a:endParaRPr lang="en-US" sz="1100" dirty="0"/>
           </a:p>
@@ -5177,7 +5177,7 @@
                 <a:ea typeface="Calibri" pitchFamily="34" charset="-122"/>
                 <a:cs typeface="Calibri" pitchFamily="34" charset="-120"/>
               </a:rPr>
-              <a:t>→ First sync: Wednesday</a:t>
+              <a:t>→ Jun 1 integration · Jun 15 demo</a:t>
             </a:r>
             <a:endParaRPr lang="en-US" sz="1100" dirty="0"/>
           </a:p>
@@ -5280,7 +5280,7 @@
                 <a:ea typeface="Georgia" pitchFamily="34" charset="-122"/>
                 <a:cs typeface="Georgia" pitchFamily="34" charset="-120"/>
               </a:rPr>
-              <a:t>Demo defined</a:t>
+              <a:t>Demo format picked</a:t>
             </a:r>
             <a:endParaRPr lang="en-US" sz="1400" dirty="0"/>
           </a:p>
@@ -5348,7 +5348,7 @@
                 <a:ea typeface="Calibri" pitchFamily="34" charset="-122"/>
                 <a:cs typeface="Calibri" pitchFamily="34" charset="-120"/>
               </a:rPr>
-              <a:t>What does "works on June 15" mean?</a:t>
+              <a:t>Thin live: Gateway + 1 connector + 1 policy, live</a:t>
             </a:r>
             <a:endParaRPr lang="en-US" sz="1100" dirty="0"/>
           </a:p>
@@ -5369,7 +5369,7 @@
                 <a:ea typeface="Calibri" pitchFamily="34" charset="-122"/>
                 <a:cs typeface="Calibri" pitchFamily="34" charset="-120"/>
               </a:rPr>
-              <a:t>Live integration or canned flow?</a:t>
+              <a:t>Wide canned: all 3 components, scripted</a:t>
             </a:r>
             <a:endParaRPr lang="en-US" sz="1100" dirty="0"/>
           </a:p>
@@ -5390,7 +5390,7 @@
                 <a:ea typeface="Calibri" pitchFamily="34" charset="-122"/>
                 <a:cs typeface="Calibri" pitchFamily="34" charset="-120"/>
               </a:rPr>
-              <a:t>Which agent? Which tools?</a:t>
+              <a:t>Hybrid: Gateway live, rest scripted</a:t>
             </a:r>
             <a:endParaRPr lang="en-US" sz="1100" dirty="0"/>
           </a:p>
@@ -5410,7 +5410,7 @@
                 <a:ea typeface="Calibri" pitchFamily="34" charset="-122"/>
                 <a:cs typeface="Calibri" pitchFamily="34" charset="-120"/>
               </a:rPr>
-              <a:t>→ Scope locked, not aspirational</a:t>
+              <a:t>→ Room picks one</a:t>
             </a:r>
             <a:endParaRPr lang="en-US" sz="1100" dirty="0"/>
           </a:p>

--- a/artifacts/eng-prekickoff-2026-04-27.pptx
+++ b/artifacts/eng-prekickoff-2026-04-27.pptx
@@ -3216,7 +3216,7 @@
                 <a:ea typeface="Calibri" pitchFamily="34" charset="-122"/>
                 <a:cs typeface="Calibri" pitchFamily="34" charset="-120"/>
               </a:rPr>
-              <a:t>Agents are the fastest-growing identity category — we want to be the one-stop shop. If Saviynt or Token Security defines MCP governance at Identiverse and we don't show up, that category is theirs.</a:t>
+              <a:t>Agent identities now outpace every other identity class — 144:1 in deployed enterprises (SACR, 2026). If Saviynt or Token Security defines MCP governance at Identiverse and we don't show up, that category is theirs.</a:t>
             </a:r>
             <a:endParaRPr lang="en-US" sz="1000" dirty="0"/>
           </a:p>
@@ -4620,7 +4620,7 @@
         </p:nvSpPr>
         <p:spPr>
           <a:xfrm>
-            <a:off x="-1371600" y="3200400"/>
+            <a:off x="6858000" y="2286000"/>
             <a:ext cx="4572000" cy="4572000"/>
           </a:xfrm>
           <a:prstGeom prst="ellipse">
@@ -4628,7 +4628,7 @@
           </a:prstGeom>
           <a:solidFill>
             <a:srgbClr val="02C39A">
-              <a:alpha val="15000"/>
+              <a:alpha val="12000"/>
             </a:srgbClr>
           </a:solidFill>
           <a:ln w="12700">
@@ -4672,7 +4672,7 @@
                 <a:ea typeface="Calibri" pitchFamily="34" charset="-122"/>
                 <a:cs typeface="Calibri" pitchFamily="34" charset="-120"/>
               </a:rPr>
-              <a:t>04 · We leave with</a:t>
+              <a:t>05 · Aligned. Now go.</a:t>
             </a:r>
             <a:endParaRPr lang="en-US" sz="1100" dirty="0"/>
           </a:p>
@@ -4686,24 +4686,24 @@
         </p:nvSpPr>
         <p:spPr>
           <a:xfrm>
-            <a:off x="457200" y="685800"/>
-            <a:ext cx="8229600" cy="685800"/>
-          </a:xfrm>
-          <a:prstGeom prst="rect">
-            <a:avLst/>
-          </a:prstGeom>
-          <a:noFill/>
-          <a:ln/>
-        </p:spPr>
-        <p:txBody>
-          <a:bodyPr wrap="square" lIns="0" tIns="0" rIns="0" bIns="0" rtlCol="0" anchor="ctr"/>
-          <a:lstStyle/>
-          <a:p>
-            <a:pPr indent="0" marL="0">
-              <a:buNone/>
-            </a:pPr>
-            <a:r>
-              <a:rPr lang="en-US" sz="3000" b="1" dirty="0">
+            <a:off x="457200" y="658368"/>
+            <a:ext cx="2743200" cy="914400"/>
+          </a:xfrm>
+          <a:prstGeom prst="rect">
+            <a:avLst/>
+          </a:prstGeom>
+          <a:noFill/>
+          <a:ln/>
+        </p:spPr>
+        <p:txBody>
+          <a:bodyPr wrap="square" lIns="0" tIns="0" rIns="0" bIns="0" rtlCol="0" anchor="ctr"/>
+          <a:lstStyle/>
+          <a:p>
+            <a:pPr indent="0" marL="0">
+              <a:buNone/>
+            </a:pPr>
+            <a:r>
+              <a:rPr lang="en-US" sz="7200" b="1" dirty="0">
                 <a:solidFill>
                   <a:srgbClr val="FFFFFF"/>
                 </a:solidFill>
@@ -4711,22 +4711,61 @@
                 <a:ea typeface="Georgia" pitchFamily="34" charset="-122"/>
                 <a:cs typeface="Georgia" pitchFamily="34" charset="-120"/>
               </a:rPr>
-              <a:t>Three outputs. Not discussion topics.</a:t>
-            </a:r>
-            <a:endParaRPr lang="en-US" sz="3000" dirty="0"/>
-          </a:p>
-        </p:txBody>
-      </p:sp>
-      <p:sp>
-        <p:nvSpPr>
-          <p:cNvPr id="5" name="Shape 3"/>
-          <p:cNvSpPr/>
-          <p:nvPr/>
-        </p:nvSpPr>
-        <p:spPr>
-          <a:xfrm>
-            <a:off x="406908" y="1645920"/>
-            <a:ext cx="2697480" cy="475488"/>
+              <a:t>Go.</a:t>
+            </a:r>
+            <a:endParaRPr lang="en-US" sz="7200" dirty="0"/>
+          </a:p>
+        </p:txBody>
+      </p:sp>
+      <p:sp>
+        <p:nvSpPr>
+          <p:cNvPr id="5" name="Text 3"/>
+          <p:cNvSpPr/>
+          <p:nvPr/>
+        </p:nvSpPr>
+        <p:spPr>
+          <a:xfrm>
+            <a:off x="457200" y="1572768"/>
+            <a:ext cx="7772400" cy="365760"/>
+          </a:xfrm>
+          <a:prstGeom prst="rect">
+            <a:avLst/>
+          </a:prstGeom>
+          <a:noFill/>
+          <a:ln/>
+        </p:spPr>
+        <p:txBody>
+          <a:bodyPr wrap="square" lIns="0" tIns="0" rIns="0" bIns="0" rtlCol="0" anchor="ctr"/>
+          <a:lstStyle/>
+          <a:p>
+            <a:pPr indent="0" marL="0">
+              <a:buNone/>
+            </a:pPr>
+            <a:r>
+              <a:rPr lang="en-US" sz="1500" i="1" dirty="0">
+                <a:solidFill>
+                  <a:srgbClr val="E8EEFC"/>
+                </a:solidFill>
+                <a:latin typeface="Calibri" pitchFamily="34" charset="0"/>
+                <a:ea typeface="Calibri" pitchFamily="34" charset="-122"/>
+                <a:cs typeface="Calibri" pitchFamily="34" charset="-120"/>
+              </a:rPr>
+              <a:t>Three workstreams start today. One cadence. June 15.</a:t>
+            </a:r>
+            <a:endParaRPr lang="en-US" sz="1500" dirty="0"/>
+          </a:p>
+        </p:txBody>
+      </p:sp>
+      <p:sp>
+        <p:nvSpPr>
+          <p:cNvPr id="6" name="Shape 4"/>
+          <p:cNvSpPr/>
+          <p:nvPr/>
+        </p:nvSpPr>
+        <p:spPr>
+          <a:xfrm>
+            <a:off x="434340" y="2103120"/>
+            <a:ext cx="2697480" cy="658368"/>
           </a:xfrm>
           <a:prstGeom prst="rect">
             <a:avLst/>
@@ -4744,92 +4783,92 @@
       </p:sp>
       <p:sp>
         <p:nvSpPr>
-          <p:cNvPr id="6" name="Text 4"/>
-          <p:cNvSpPr/>
-          <p:nvPr/>
-        </p:nvSpPr>
-        <p:spPr>
-          <a:xfrm>
-            <a:off x="406908" y="1645920"/>
-            <a:ext cx="475488" cy="475488"/>
-          </a:xfrm>
-          <a:prstGeom prst="rect">
-            <a:avLst/>
-          </a:prstGeom>
-          <a:noFill/>
-          <a:ln/>
-        </p:spPr>
-        <p:txBody>
-          <a:bodyPr wrap="square" lIns="0" tIns="0" rIns="0" bIns="0" rtlCol="0" anchor="ctr"/>
-          <a:lstStyle/>
-          <a:p>
-            <a:pPr algn="ctr" indent="0" marL="0">
-              <a:buNone/>
-            </a:pPr>
-            <a:r>
-              <a:rPr lang="en-US" sz="2200" b="1" dirty="0">
+          <p:cNvPr id="7" name="Text 5"/>
+          <p:cNvSpPr/>
+          <p:nvPr/>
+        </p:nvSpPr>
+        <p:spPr>
+          <a:xfrm>
+            <a:off x="571500" y="2148840"/>
+            <a:ext cx="2423160" cy="256032"/>
+          </a:xfrm>
+          <a:prstGeom prst="rect">
+            <a:avLst/>
+          </a:prstGeom>
+          <a:noFill/>
+          <a:ln/>
+        </p:spPr>
+        <p:txBody>
+          <a:bodyPr wrap="square" lIns="0" tIns="0" rIns="0" bIns="0" rtlCol="0" anchor="ctr"/>
+          <a:lstStyle/>
+          <a:p>
+            <a:pPr indent="0" marL="0">
+              <a:buNone/>
+            </a:pPr>
+            <a:r>
+              <a:rPr lang="en-US" sz="1000" b="1" spc="300" kern="0" dirty="0">
                 <a:solidFill>
                   <a:srgbClr val="0F1B3D"/>
+                </a:solidFill>
+                <a:latin typeface="Calibri" pitchFamily="34" charset="0"/>
+                <a:ea typeface="Calibri" pitchFamily="34" charset="-122"/>
+                <a:cs typeface="Calibri" pitchFamily="34" charset="-120"/>
+              </a:rPr>
+              <a:t>GATEWAY CORE</a:t>
+            </a:r>
+            <a:endParaRPr lang="en-US" sz="1000" dirty="0"/>
+          </a:p>
+        </p:txBody>
+      </p:sp>
+      <p:sp>
+        <p:nvSpPr>
+          <p:cNvPr id="8" name="Text 6"/>
+          <p:cNvSpPr/>
+          <p:nvPr/>
+        </p:nvSpPr>
+        <p:spPr>
+          <a:xfrm>
+            <a:off x="571500" y="2450592"/>
+            <a:ext cx="2423160" cy="256032"/>
+          </a:xfrm>
+          <a:prstGeom prst="rect">
+            <a:avLst/>
+          </a:prstGeom>
+          <a:noFill/>
+          <a:ln/>
+        </p:spPr>
+        <p:txBody>
+          <a:bodyPr wrap="square" lIns="0" tIns="0" rIns="0" bIns="0" rtlCol="0" anchor="ctr"/>
+          <a:lstStyle/>
+          <a:p>
+            <a:pPr indent="0" marL="0">
+              <a:buNone/>
+            </a:pPr>
+            <a:r>
+              <a:rPr lang="en-US" sz="1200" b="1" dirty="0">
+                <a:solidFill>
+                  <a:srgbClr val="091230"/>
                 </a:solidFill>
                 <a:latin typeface="Georgia" pitchFamily="34" charset="0"/>
                 <a:ea typeface="Georgia" pitchFamily="34" charset="-122"/>
                 <a:cs typeface="Georgia" pitchFamily="34" charset="-120"/>
               </a:rPr>
-              <a:t>A</a:t>
-            </a:r>
-            <a:endParaRPr lang="en-US" sz="2200" dirty="0"/>
-          </a:p>
-        </p:txBody>
-      </p:sp>
-      <p:sp>
-        <p:nvSpPr>
-          <p:cNvPr id="7" name="Text 5"/>
-          <p:cNvSpPr/>
-          <p:nvPr/>
-        </p:nvSpPr>
-        <p:spPr>
-          <a:xfrm>
-            <a:off x="937260" y="1709928"/>
-            <a:ext cx="2103120" cy="384048"/>
-          </a:xfrm>
-          <a:prstGeom prst="rect">
-            <a:avLst/>
-          </a:prstGeom>
-          <a:noFill/>
-          <a:ln/>
-        </p:spPr>
-        <p:txBody>
-          <a:bodyPr wrap="square" lIns="0" tIns="0" rIns="0" bIns="0" rtlCol="0" anchor="ctr"/>
-          <a:lstStyle/>
-          <a:p>
-            <a:pPr indent="0" marL="0">
-              <a:buNone/>
-            </a:pPr>
-            <a:r>
-              <a:rPr lang="en-US" sz="1400" b="1" dirty="0">
-                <a:solidFill>
-                  <a:srgbClr val="0F1B3D"/>
-                </a:solidFill>
-                <a:latin typeface="Georgia" pitchFamily="34" charset="0"/>
-                <a:ea typeface="Georgia" pitchFamily="34" charset="-122"/>
-                <a:cs typeface="Georgia" pitchFamily="34" charset="-120"/>
-              </a:rPr>
-              <a:t>P0 status snapshot</a:t>
-            </a:r>
-            <a:endParaRPr lang="en-US" sz="1400" dirty="0"/>
-          </a:p>
-        </p:txBody>
-      </p:sp>
-      <p:sp>
-        <p:nvSpPr>
-          <p:cNvPr id="8" name="Shape 6"/>
-          <p:cNvSpPr/>
-          <p:nvPr/>
-        </p:nvSpPr>
-        <p:spPr>
-          <a:xfrm>
-            <a:off x="406908" y="2121408"/>
-            <a:ext cx="2697480" cy="2267712"/>
+              <a:t>Javier + Omer Blechman</a:t>
+            </a:r>
+            <a:endParaRPr lang="en-US" sz="1200" dirty="0"/>
+          </a:p>
+        </p:txBody>
+      </p:sp>
+      <p:sp>
+        <p:nvSpPr>
+          <p:cNvPr id="9" name="Shape 7"/>
+          <p:cNvSpPr/>
+          <p:nvPr/>
+        </p:nvSpPr>
+        <p:spPr>
+          <a:xfrm>
+            <a:off x="434340" y="2761488"/>
+            <a:ext cx="2697480" cy="1673352"/>
           </a:xfrm>
           <a:prstGeom prst="rect">
             <a:avLst/>
@@ -4847,14 +4886,14 @@
       </p:sp>
       <p:sp>
         <p:nvSpPr>
-          <p:cNvPr id="9" name="Text 7"/>
-          <p:cNvSpPr/>
-          <p:nvPr/>
-        </p:nvSpPr>
-        <p:spPr>
-          <a:xfrm>
-            <a:off x="589788" y="2267712"/>
-            <a:ext cx="2331720" cy="1993392"/>
+          <p:cNvPr id="10" name="Text 8"/>
+          <p:cNvSpPr/>
+          <p:nvPr/>
+        </p:nvSpPr>
+        <p:spPr>
+          <a:xfrm>
+            <a:off x="598932" y="2907792"/>
+            <a:ext cx="2368296" cy="1417320"/>
           </a:xfrm>
           <a:prstGeom prst="rect">
             <a:avLst/>
@@ -4868,7 +4907,7 @@
           <a:p>
             <a:pPr marL="342900" indent="-342900">
               <a:spcAft>
-                <a:spcPts val="500"/>
+                <a:spcPts val="400"/>
               </a:spcAft>
               <a:buSzPct val="100000"/>
               <a:buChar char="■"/>
@@ -4882,14 +4921,14 @@
                 <a:ea typeface="Calibri" pitchFamily="34" charset="-122"/>
                 <a:cs typeface="Calibri" pitchFamily="34" charset="-120"/>
               </a:rPr>
-              <a:t>Gateway Core: what exists, what doesn't</a:t>
+              <a:t>Research: build vs. adopt, options + coverage</a:t>
             </a:r>
             <a:endParaRPr lang="en-US" sz="1100" dirty="0"/>
           </a:p>
           <a:p>
             <a:pPr marL="342900" indent="-342900">
               <a:spcAft>
-                <a:spcPts val="500"/>
+                <a:spcPts val="400"/>
               </a:spcAft>
               <a:buSzPct val="100000"/>
               <a:buChar char="■"/>
@@ -4903,14 +4942,14 @@
                 <a:ea typeface="Calibri" pitchFamily="34" charset="-122"/>
                 <a:cs typeface="Calibri" pitchFamily="34" charset="-120"/>
               </a:rPr>
-              <a:t>Policy Agent: same</a:t>
+              <a:t>Map what existing work feeds in</a:t>
             </a:r>
             <a:endParaRPr lang="en-US" sz="1100" dirty="0"/>
           </a:p>
           <a:p>
             <a:pPr marL="342900" indent="-342900">
               <a:spcAft>
-                <a:spcPts val="500"/>
+                <a:spcPts val="400"/>
               </a:spcAft>
               <a:buSzPct val="100000"/>
               <a:buChar char="■"/>
@@ -4924,14 +4963,14 @@
                 <a:ea typeface="Calibri" pitchFamily="34" charset="-122"/>
                 <a:cs typeface="Calibri" pitchFamily="34" charset="-120"/>
               </a:rPr>
-              <a:t>Screens: design started?</a:t>
+              <a:t>Draft POC plan</a:t>
             </a:r>
             <a:endParaRPr lang="en-US" sz="1100" dirty="0"/>
           </a:p>
           <a:p>
             <a:pPr indent="0" marL="0">
               <a:spcAft>
-                <a:spcPts val="500"/>
+                <a:spcPts val="400"/>
               </a:spcAft>
               <a:buNone/>
             </a:pPr>
@@ -4944,7 +4983,7 @@
                 <a:ea typeface="Calibri" pitchFamily="34" charset="-122"/>
                 <a:cs typeface="Calibri" pitchFamily="34" charset="-120"/>
               </a:rPr>
-              <a:t>→ Shared picture, no gaps</a:t>
+              <a:t>→ First sync: Wednesday</a:t>
             </a:r>
             <a:endParaRPr lang="en-US" sz="1100" dirty="0"/>
           </a:p>
@@ -4952,14 +4991,14 @@
       </p:sp>
       <p:sp>
         <p:nvSpPr>
-          <p:cNvPr id="10" name="Shape 8"/>
-          <p:cNvSpPr/>
-          <p:nvPr/>
-        </p:nvSpPr>
-        <p:spPr>
-          <a:xfrm>
-            <a:off x="3223260" y="1645920"/>
-            <a:ext cx="2697480" cy="475488"/>
+          <p:cNvPr id="11" name="Shape 9"/>
+          <p:cNvSpPr/>
+          <p:nvPr/>
+        </p:nvSpPr>
+        <p:spPr>
+          <a:xfrm>
+            <a:off x="3223260" y="2103120"/>
+            <a:ext cx="2697480" cy="658368"/>
           </a:xfrm>
           <a:prstGeom prst="rect">
             <a:avLst/>
@@ -4977,92 +5016,92 @@
       </p:sp>
       <p:sp>
         <p:nvSpPr>
-          <p:cNvPr id="11" name="Text 9"/>
-          <p:cNvSpPr/>
-          <p:nvPr/>
-        </p:nvSpPr>
-        <p:spPr>
-          <a:xfrm>
-            <a:off x="3223260" y="1645920"/>
-            <a:ext cx="475488" cy="475488"/>
-          </a:xfrm>
-          <a:prstGeom prst="rect">
-            <a:avLst/>
-          </a:prstGeom>
-          <a:noFill/>
-          <a:ln/>
-        </p:spPr>
-        <p:txBody>
-          <a:bodyPr wrap="square" lIns="0" tIns="0" rIns="0" bIns="0" rtlCol="0" anchor="ctr"/>
-          <a:lstStyle/>
-          <a:p>
-            <a:pPr algn="ctr" indent="0" marL="0">
-              <a:buNone/>
-            </a:pPr>
-            <a:r>
-              <a:rPr lang="en-US" sz="2200" b="1" dirty="0">
+          <p:cNvPr id="12" name="Text 10"/>
+          <p:cNvSpPr/>
+          <p:nvPr/>
+        </p:nvSpPr>
+        <p:spPr>
+          <a:xfrm>
+            <a:off x="3360420" y="2148840"/>
+            <a:ext cx="2423160" cy="256032"/>
+          </a:xfrm>
+          <a:prstGeom prst="rect">
+            <a:avLst/>
+          </a:prstGeom>
+          <a:noFill/>
+          <a:ln/>
+        </p:spPr>
+        <p:txBody>
+          <a:bodyPr wrap="square" lIns="0" tIns="0" rIns="0" bIns="0" rtlCol="0" anchor="ctr"/>
+          <a:lstStyle/>
+          <a:p>
+            <a:pPr indent="0" marL="0">
+              <a:buNone/>
+            </a:pPr>
+            <a:r>
+              <a:rPr lang="en-US" sz="1000" b="1" spc="300" kern="0" dirty="0">
                 <a:solidFill>
                   <a:srgbClr val="0F1B3D"/>
+                </a:solidFill>
+                <a:latin typeface="Calibri" pitchFamily="34" charset="0"/>
+                <a:ea typeface="Calibri" pitchFamily="34" charset="-122"/>
+                <a:cs typeface="Calibri" pitchFamily="34" charset="-120"/>
+              </a:rPr>
+              <a:t>SCOPE + COMPETITIVE</a:t>
+            </a:r>
+            <a:endParaRPr lang="en-US" sz="1000" dirty="0"/>
+          </a:p>
+        </p:txBody>
+      </p:sp>
+      <p:sp>
+        <p:nvSpPr>
+          <p:cNvPr id="13" name="Text 11"/>
+          <p:cNvSpPr/>
+          <p:nvPr/>
+        </p:nvSpPr>
+        <p:spPr>
+          <a:xfrm>
+            <a:off x="3360420" y="2450592"/>
+            <a:ext cx="2423160" cy="256032"/>
+          </a:xfrm>
+          <a:prstGeom prst="rect">
+            <a:avLst/>
+          </a:prstGeom>
+          <a:noFill/>
+          <a:ln/>
+        </p:spPr>
+        <p:txBody>
+          <a:bodyPr wrap="square" lIns="0" tIns="0" rIns="0" bIns="0" rtlCol="0" anchor="ctr"/>
+          <a:lstStyle/>
+          <a:p>
+            <a:pPr indent="0" marL="0">
+              <a:buNone/>
+            </a:pPr>
+            <a:r>
+              <a:rPr lang="en-US" sz="1200" b="1" dirty="0">
+                <a:solidFill>
+                  <a:srgbClr val="091230"/>
                 </a:solidFill>
                 <a:latin typeface="Georgia" pitchFamily="34" charset="0"/>
                 <a:ea typeface="Georgia" pitchFamily="34" charset="-122"/>
                 <a:cs typeface="Georgia" pitchFamily="34" charset="-120"/>
               </a:rPr>
-              <a:t>B</a:t>
-            </a:r>
-            <a:endParaRPr lang="en-US" sz="2200" dirty="0"/>
-          </a:p>
-        </p:txBody>
-      </p:sp>
-      <p:sp>
-        <p:nvSpPr>
-          <p:cNvPr id="12" name="Text 10"/>
-          <p:cNvSpPr/>
-          <p:nvPr/>
-        </p:nvSpPr>
-        <p:spPr>
-          <a:xfrm>
-            <a:off x="3753612" y="1709928"/>
-            <a:ext cx="2103120" cy="384048"/>
-          </a:xfrm>
-          <a:prstGeom prst="rect">
-            <a:avLst/>
-          </a:prstGeom>
-          <a:noFill/>
-          <a:ln/>
-        </p:spPr>
-        <p:txBody>
-          <a:bodyPr wrap="square" lIns="0" tIns="0" rIns="0" bIns="0" rtlCol="0" anchor="ctr"/>
-          <a:lstStyle/>
-          <a:p>
-            <a:pPr indent="0" marL="0">
-              <a:buNone/>
-            </a:pPr>
-            <a:r>
-              <a:rPr lang="en-US" sz="1400" b="1" dirty="0">
-                <a:solidFill>
-                  <a:srgbClr val="0F1B3D"/>
-                </a:solidFill>
-                <a:latin typeface="Georgia" pitchFamily="34" charset="0"/>
-                <a:ea typeface="Georgia" pitchFamily="34" charset="-122"/>
-                <a:cs typeface="Georgia" pitchFamily="34" charset="-120"/>
-              </a:rPr>
-              <a:t>Gateway Core POC plan</a:t>
-            </a:r>
-            <a:endParaRPr lang="en-US" sz="1400" dirty="0"/>
-          </a:p>
-        </p:txBody>
-      </p:sp>
-      <p:sp>
-        <p:nvSpPr>
-          <p:cNvPr id="13" name="Shape 11"/>
-          <p:cNvSpPr/>
-          <p:nvPr/>
-        </p:nvSpPr>
-        <p:spPr>
-          <a:xfrm>
-            <a:off x="3223260" y="2121408"/>
-            <a:ext cx="2697480" cy="2267712"/>
+              <a:t>Omri</a:t>
+            </a:r>
+            <a:endParaRPr lang="en-US" sz="1200" dirty="0"/>
+          </a:p>
+        </p:txBody>
+      </p:sp>
+      <p:sp>
+        <p:nvSpPr>
+          <p:cNvPr id="14" name="Shape 12"/>
+          <p:cNvSpPr/>
+          <p:nvPr/>
+        </p:nvSpPr>
+        <p:spPr>
+          <a:xfrm>
+            <a:off x="3223260" y="2761488"/>
+            <a:ext cx="2697480" cy="1673352"/>
           </a:xfrm>
           <a:prstGeom prst="rect">
             <a:avLst/>
@@ -5080,14 +5119,14 @@
       </p:sp>
       <p:sp>
         <p:nvSpPr>
-          <p:cNvPr id="14" name="Text 12"/>
-          <p:cNvSpPr/>
-          <p:nvPr/>
-        </p:nvSpPr>
-        <p:spPr>
-          <a:xfrm>
-            <a:off x="3406140" y="2267712"/>
-            <a:ext cx="2331720" cy="1993392"/>
+          <p:cNvPr id="15" name="Text 13"/>
+          <p:cNvSpPr/>
+          <p:nvPr/>
+        </p:nvSpPr>
+        <p:spPr>
+          <a:xfrm>
+            <a:off x="3387852" y="2907792"/>
+            <a:ext cx="2368296" cy="1417320"/>
           </a:xfrm>
           <a:prstGeom prst="rect">
             <a:avLst/>
@@ -5101,7 +5140,7 @@
           <a:p>
             <a:pPr marL="342900" indent="-342900">
               <a:spcAft>
-                <a:spcPts val="500"/>
+                <a:spcPts val="400"/>
               </a:spcAft>
               <a:buSzPct val="100000"/>
               <a:buChar char="■"/>
@@ -5115,14 +5154,14 @@
                 <a:ea typeface="Calibri" pitchFamily="34" charset="-122"/>
                 <a:cs typeface="Calibri" pitchFamily="34" charset="-120"/>
               </a:rPr>
-              <a:t>Owners: Javier + Omer Blechman</a:t>
+              <a:t>Competitor scan: where the market is moving</a:t>
             </a:r>
             <a:endParaRPr lang="en-US" sz="1100" dirty="0"/>
           </a:p>
           <a:p>
             <a:pPr marL="342900" indent="-342900">
               <a:spcAft>
-                <a:spcPts val="500"/>
+                <a:spcPts val="400"/>
               </a:spcAft>
               <a:buSzPct val="100000"/>
               <a:buChar char="■"/>
@@ -5136,14 +5175,14 @@
                 <a:ea typeface="Calibri" pitchFamily="34" charset="-122"/>
                 <a:cs typeface="Calibri" pitchFamily="34" charset="-120"/>
               </a:rPr>
-              <a:t>Options: build vs. adopt · M1/M2 inputs</a:t>
+              <a:t>Scope P0 remainder + post-P0 sequence</a:t>
             </a:r>
             <a:endParaRPr lang="en-US" sz="1100" dirty="0"/>
           </a:p>
           <a:p>
             <a:pPr marL="342900" indent="-342900">
               <a:spcAft>
-                <a:spcPts val="500"/>
+                <a:spcPts val="400"/>
               </a:spcAft>
               <a:buSzPct val="100000"/>
               <a:buChar char="■"/>
@@ -5157,14 +5196,14 @@
                 <a:ea typeface="Calibri" pitchFamily="34" charset="-122"/>
                 <a:cs typeface="Calibri" pitchFamily="34" charset="-120"/>
               </a:rPr>
-              <a:t>Apr 27 research → May 11 POC check</a:t>
+              <a:t>Define “demo lands” — format + scenario</a:t>
             </a:r>
             <a:endParaRPr lang="en-US" sz="1100" dirty="0"/>
           </a:p>
           <a:p>
             <a:pPr indent="0" marL="0">
               <a:spcAft>
-                <a:spcPts val="500"/>
+                <a:spcPts val="400"/>
               </a:spcAft>
               <a:buNone/>
             </a:pPr>
@@ -5177,7 +5216,7 @@
                 <a:ea typeface="Calibri" pitchFamily="34" charset="-122"/>
                 <a:cs typeface="Calibri" pitchFamily="34" charset="-120"/>
               </a:rPr>
-              <a:t>→ Jun 1 integration · Jun 15 demo</a:t>
+              <a:t>→ Share findings: Wednesday</a:t>
             </a:r>
             <a:endParaRPr lang="en-US" sz="1100" dirty="0"/>
           </a:p>
@@ -5185,14 +5224,14 @@
       </p:sp>
       <p:sp>
         <p:nvSpPr>
-          <p:cNvPr id="15" name="Shape 13"/>
-          <p:cNvSpPr/>
-          <p:nvPr/>
-        </p:nvSpPr>
-        <p:spPr>
-          <a:xfrm>
-            <a:off x="6039612" y="1645920"/>
-            <a:ext cx="2697480" cy="475488"/>
+          <p:cNvPr id="16" name="Shape 14"/>
+          <p:cNvSpPr/>
+          <p:nvPr/>
+        </p:nvSpPr>
+        <p:spPr>
+          <a:xfrm>
+            <a:off x="6012180" y="2103120"/>
+            <a:ext cx="2697480" cy="658368"/>
           </a:xfrm>
           <a:prstGeom prst="rect">
             <a:avLst/>
@@ -5210,30 +5249,69 @@
       </p:sp>
       <p:sp>
         <p:nvSpPr>
-          <p:cNvPr id="16" name="Text 14"/>
-          <p:cNvSpPr/>
-          <p:nvPr/>
-        </p:nvSpPr>
-        <p:spPr>
-          <a:xfrm>
-            <a:off x="6039612" y="1645920"/>
-            <a:ext cx="475488" cy="475488"/>
-          </a:xfrm>
-          <a:prstGeom prst="rect">
-            <a:avLst/>
-          </a:prstGeom>
-          <a:noFill/>
-          <a:ln/>
-        </p:spPr>
-        <p:txBody>
-          <a:bodyPr wrap="square" lIns="0" tIns="0" rIns="0" bIns="0" rtlCol="0" anchor="ctr"/>
-          <a:lstStyle/>
-          <a:p>
-            <a:pPr algn="ctr" indent="0" marL="0">
-              <a:buNone/>
-            </a:pPr>
-            <a:r>
-              <a:rPr lang="en-US" sz="2200" b="1" dirty="0">
+          <p:cNvPr id="17" name="Text 15"/>
+          <p:cNvSpPr/>
+          <p:nvPr/>
+        </p:nvSpPr>
+        <p:spPr>
+          <a:xfrm>
+            <a:off x="6149340" y="2148840"/>
+            <a:ext cx="2423160" cy="256032"/>
+          </a:xfrm>
+          <a:prstGeom prst="rect">
+            <a:avLst/>
+          </a:prstGeom>
+          <a:noFill/>
+          <a:ln/>
+        </p:spPr>
+        <p:txBody>
+          <a:bodyPr wrap="square" lIns="0" tIns="0" rIns="0" bIns="0" rtlCol="0" anchor="ctr"/>
+          <a:lstStyle/>
+          <a:p>
+            <a:pPr indent="0" marL="0">
+              <a:buNone/>
+            </a:pPr>
+            <a:r>
+              <a:rPr lang="en-US" sz="1000" b="1" spc="300" kern="0" dirty="0">
+                <a:solidFill>
+                  <a:srgbClr val="0F1B3D"/>
+                </a:solidFill>
+                <a:latin typeface="Calibri" pitchFamily="34" charset="0"/>
+                <a:ea typeface="Calibri" pitchFamily="34" charset="-122"/>
+                <a:cs typeface="Calibri" pitchFamily="34" charset="-120"/>
+              </a:rPr>
+              <a:t>ARCHITECTURE</a:t>
+            </a:r>
+            <a:endParaRPr lang="en-US" sz="1000" dirty="0"/>
+          </a:p>
+        </p:txBody>
+      </p:sp>
+      <p:sp>
+        <p:nvSpPr>
+          <p:cNvPr id="18" name="Text 16"/>
+          <p:cNvSpPr/>
+          <p:nvPr/>
+        </p:nvSpPr>
+        <p:spPr>
+          <a:xfrm>
+            <a:off x="6149340" y="2450592"/>
+            <a:ext cx="2423160" cy="256032"/>
+          </a:xfrm>
+          <a:prstGeom prst="rect">
+            <a:avLst/>
+          </a:prstGeom>
+          <a:noFill/>
+          <a:ln/>
+        </p:spPr>
+        <p:txBody>
+          <a:bodyPr wrap="square" lIns="0" tIns="0" rIns="0" bIns="0" rtlCol="0" anchor="ctr"/>
+          <a:lstStyle/>
+          <a:p>
+            <a:pPr indent="0" marL="0">
+              <a:buNone/>
+            </a:pPr>
+            <a:r>
+              <a:rPr lang="en-US" sz="1200" b="1" dirty="0">
                 <a:solidFill>
                   <a:srgbClr val="0F1B3D"/>
                 </a:solidFill>
@@ -5241,61 +5319,22 @@
                 <a:ea typeface="Georgia" pitchFamily="34" charset="-122"/>
                 <a:cs typeface="Georgia" pitchFamily="34" charset="-120"/>
               </a:rPr>
-              <a:t>C</a:t>
-            </a:r>
-            <a:endParaRPr lang="en-US" sz="2200" dirty="0"/>
-          </a:p>
-        </p:txBody>
-      </p:sp>
-      <p:sp>
-        <p:nvSpPr>
-          <p:cNvPr id="17" name="Text 15"/>
-          <p:cNvSpPr/>
-          <p:nvPr/>
-        </p:nvSpPr>
-        <p:spPr>
-          <a:xfrm>
-            <a:off x="6569964" y="1709928"/>
-            <a:ext cx="2103120" cy="384048"/>
-          </a:xfrm>
-          <a:prstGeom prst="rect">
-            <a:avLst/>
-          </a:prstGeom>
-          <a:noFill/>
-          <a:ln/>
-        </p:spPr>
-        <p:txBody>
-          <a:bodyPr wrap="square" lIns="0" tIns="0" rIns="0" bIns="0" rtlCol="0" anchor="ctr"/>
-          <a:lstStyle/>
-          <a:p>
-            <a:pPr indent="0" marL="0">
-              <a:buNone/>
-            </a:pPr>
-            <a:r>
-              <a:rPr lang="en-US" sz="1400" b="1" dirty="0">
-                <a:solidFill>
-                  <a:srgbClr val="0F1B3D"/>
-                </a:solidFill>
-                <a:latin typeface="Georgia" pitchFamily="34" charset="0"/>
-                <a:ea typeface="Georgia" pitchFamily="34" charset="-122"/>
-                <a:cs typeface="Georgia" pitchFamily="34" charset="-120"/>
-              </a:rPr>
-              <a:t>Demo format picked</a:t>
-            </a:r>
-            <a:endParaRPr lang="en-US" sz="1400" dirty="0"/>
-          </a:p>
-        </p:txBody>
-      </p:sp>
-      <p:sp>
-        <p:nvSpPr>
-          <p:cNvPr id="18" name="Shape 16"/>
-          <p:cNvSpPr/>
-          <p:nvPr/>
-        </p:nvSpPr>
-        <p:spPr>
-          <a:xfrm>
-            <a:off x="6039612" y="2121408"/>
-            <a:ext cx="2697480" cy="2267712"/>
+              <a:t>Sarit + Amir Ben Ami</a:t>
+            </a:r>
+            <a:endParaRPr lang="en-US" sz="1200" dirty="0"/>
+          </a:p>
+        </p:txBody>
+      </p:sp>
+      <p:sp>
+        <p:nvSpPr>
+          <p:cNvPr id="19" name="Shape 17"/>
+          <p:cNvSpPr/>
+          <p:nvPr/>
+        </p:nvSpPr>
+        <p:spPr>
+          <a:xfrm>
+            <a:off x="6012180" y="2761488"/>
+            <a:ext cx="2697480" cy="1673352"/>
           </a:xfrm>
           <a:prstGeom prst="rect">
             <a:avLst/>
@@ -5313,14 +5352,14 @@
       </p:sp>
       <p:sp>
         <p:nvSpPr>
-          <p:cNvPr id="19" name="Text 17"/>
-          <p:cNvSpPr/>
-          <p:nvPr/>
-        </p:nvSpPr>
-        <p:spPr>
-          <a:xfrm>
-            <a:off x="6222492" y="2267712"/>
-            <a:ext cx="2331720" cy="1993392"/>
+          <p:cNvPr id="20" name="Text 18"/>
+          <p:cNvSpPr/>
+          <p:nvPr/>
+        </p:nvSpPr>
+        <p:spPr>
+          <a:xfrm>
+            <a:off x="6176772" y="2907792"/>
+            <a:ext cx="2368296" cy="1417320"/>
           </a:xfrm>
           <a:prstGeom prst="rect">
             <a:avLst/>
@@ -5334,7 +5373,7 @@
           <a:p>
             <a:pPr marL="342900" indent="-342900">
               <a:spcAft>
-                <a:spcPts val="500"/>
+                <a:spcPts val="400"/>
               </a:spcAft>
               <a:buSzPct val="100000"/>
               <a:buChar char="■"/>
@@ -5348,14 +5387,14 @@
                 <a:ea typeface="Calibri" pitchFamily="34" charset="-122"/>
                 <a:cs typeface="Calibri" pitchFamily="34" charset="-120"/>
               </a:rPr>
-              <a:t>Thin live: Gateway + 1 connector + 1 policy, live</a:t>
+              <a:t>Gateway design doc: surface + policy model</a:t>
             </a:r>
             <a:endParaRPr lang="en-US" sz="1100" dirty="0"/>
           </a:p>
           <a:p>
             <a:pPr marL="342900" indent="-342900">
               <a:spcAft>
-                <a:spcPts val="500"/>
+                <a:spcPts val="400"/>
               </a:spcAft>
               <a:buSzPct val="100000"/>
               <a:buChar char="■"/>
@@ -5369,14 +5408,14 @@
                 <a:ea typeface="Calibri" pitchFamily="34" charset="-122"/>
                 <a:cs typeface="Calibri" pitchFamily="34" charset="-120"/>
               </a:rPr>
-              <a:t>Wide canned: all 3 components, scripted</a:t>
+              <a:t>Tool-level access model for Policy Agent</a:t>
             </a:r>
             <a:endParaRPr lang="en-US" sz="1100" dirty="0"/>
           </a:p>
           <a:p>
             <a:pPr marL="342900" indent="-342900">
               <a:spcAft>
-                <a:spcPts val="500"/>
+                <a:spcPts val="400"/>
               </a:spcAft>
               <a:buSzPct val="100000"/>
               <a:buChar char="■"/>
@@ -5390,14 +5429,14 @@
                 <a:ea typeface="Calibri" pitchFamily="34" charset="-122"/>
                 <a:cs typeface="Calibri" pitchFamily="34" charset="-120"/>
               </a:rPr>
-              <a:t>Hybrid: Gateway live, rest scripted</a:t>
+              <a:t>Integration points with eng research</a:t>
             </a:r>
             <a:endParaRPr lang="en-US" sz="1100" dirty="0"/>
           </a:p>
           <a:p>
             <a:pPr indent="0" marL="0">
               <a:spcAft>
-                <a:spcPts val="500"/>
+                <a:spcPts val="400"/>
               </a:spcAft>
               <a:buNone/>
             </a:pPr>
@@ -5410,7 +5449,7 @@
                 <a:ea typeface="Calibri" pitchFamily="34" charset="-122"/>
                 <a:cs typeface="Calibri" pitchFamily="34" charset="-120"/>
               </a:rPr>
-              <a:t>→ Room picks one</a:t>
+              <a:t>→ This week</a:t>
             </a:r>
             <a:endParaRPr lang="en-US" sz="1100" dirty="0"/>
           </a:p>
@@ -5418,24 +5457,24 @@
       </p:sp>
       <p:sp>
         <p:nvSpPr>
-          <p:cNvPr id="20" name="Shape 18"/>
-          <p:cNvSpPr/>
-          <p:nvPr/>
-        </p:nvSpPr>
-        <p:spPr>
-          <a:xfrm>
-            <a:off x="457200" y="4544568"/>
+          <p:cNvPr id="21" name="Shape 19"/>
+          <p:cNvSpPr/>
+          <p:nvPr/>
+        </p:nvSpPr>
+        <p:spPr>
+          <a:xfrm>
+            <a:off x="457200" y="4572000"/>
             <a:ext cx="8229600" cy="384048"/>
           </a:xfrm>
           <a:prstGeom prst="rect">
             <a:avLst/>
           </a:prstGeom>
           <a:solidFill>
-            <a:srgbClr val="02C39A"/>
+            <a:srgbClr val="F59E0B"/>
           </a:solidFill>
           <a:ln w="12700">
             <a:solidFill>
-              <a:srgbClr val="02C39A"/>
+              <a:srgbClr val="F59E0B"/>
             </a:solidFill>
             <a:prstDash val="solid"/>
           </a:ln>
@@ -5443,13 +5482,13 @@
       </p:sp>
       <p:sp>
         <p:nvSpPr>
-          <p:cNvPr id="21" name="Text 19"/>
-          <p:cNvSpPr/>
-          <p:nvPr/>
-        </p:nvSpPr>
-        <p:spPr>
-          <a:xfrm>
-            <a:off x="640080" y="4544568"/>
+          <p:cNvPr id="22" name="Text 20"/>
+          <p:cNvSpPr/>
+          <p:nvPr/>
+        </p:nvSpPr>
+        <p:spPr>
+          <a:xfrm>
+            <a:off x="640080" y="4572000"/>
             <a:ext cx="7863840" cy="384048"/>
           </a:xfrm>
           <a:prstGeom prst="rect">
@@ -5466,7 +5505,7 @@
               <a:buNone/>
             </a:pPr>
             <a:r>
-              <a:rPr lang="en-US" sz="1000" b="1" spc="300" kern="0" dirty="0">
+              <a:rPr lang="en-US" sz="1100" b="1" spc="300" kern="0" dirty="0">
                 <a:solidFill>
                   <a:srgbClr val="0F1B3D"/>
                 </a:solidFill>
@@ -5474,13 +5513,13 @@
                 <a:ea typeface="Calibri" pitchFamily="34" charset="-122"/>
                 <a:cs typeface="Calibri" pitchFamily="34" charset="-120"/>
               </a:rPr>
-              <a:t>OPEN TO THE ROOM:  </a:t>
-            </a:r>
-            <a:pPr indent="0" marL="0">
-              <a:buNone/>
-            </a:pPr>
-            <a:r>
-              <a:rPr lang="en-US" sz="1300" b="1" i="1" dirty="0">
+              <a:t>P0 FOR LINX  ·  </a:t>
+            </a:r>
+            <a:pPr indent="0" marL="0">
+              <a:buNone/>
+            </a:pPr>
+            <a:r>
+              <a:rPr lang="en-US" sz="1300" dirty="0">
                 <a:solidFill>
                   <a:srgbClr val="0F1B3D"/>
                 </a:solidFill>
@@ -5488,15 +5527,29 @@
                 <a:ea typeface="Calibri" pitchFamily="34" charset="-122"/>
                 <a:cs typeface="Calibri" pitchFamily="34" charset="-120"/>
               </a:rPr>
-              <a:t>What from M1 / M2 already covers parts of P0? What do you think is missing?</a:t>
-            </a:r>
-            <a:endParaRPr lang="en-US" sz="1000" dirty="0"/>
-          </a:p>
-        </p:txBody>
-      </p:sp>
-      <p:sp>
-        <p:nvSpPr>
-          <p:cNvPr id="22" name="Text 20"/>
+              <a:t>Omri + Sarit tracking weekly  ·  June 15 is the line  ·  </a:t>
+            </a:r>
+            <a:pPr indent="0" marL="0">
+              <a:buNone/>
+            </a:pPr>
+            <a:r>
+              <a:rPr lang="en-US" sz="1300" b="1" dirty="0">
+                <a:solidFill>
+                  <a:srgbClr val="0F1B3D"/>
+                </a:solidFill>
+                <a:latin typeface="Calibri" pitchFamily="34" charset="0"/>
+                <a:ea typeface="Calibri" pitchFamily="34" charset="-122"/>
+                <a:cs typeface="Calibri" pitchFamily="34" charset="-120"/>
+              </a:rPr>
+              <a:t>Next full sync after Wednesday research check-in.</a:t>
+            </a:r>
+            <a:endParaRPr lang="en-US" sz="1100" dirty="0"/>
+          </a:p>
+        </p:txBody>
+      </p:sp>
+      <p:sp>
+        <p:nvSpPr>
+          <p:cNvPr id="23" name="Text 21"/>
           <p:cNvSpPr/>
           <p:nvPr/>
         </p:nvSpPr>
